--- a/投影片/民意與調查Week5.pptx
+++ b/投影片/民意與調查Week5.pptx
@@ -5,20 +5,21 @@
     <p:sldMasterId id="2147483648" r:id="rId1"/>
   </p:sldMasterIdLst>
   <p:notesMasterIdLst>
-    <p:notesMasterId r:id="rId13"/>
+    <p:notesMasterId r:id="rId14"/>
   </p:notesMasterIdLst>
   <p:sldIdLst>
     <p:sldId id="256" r:id="rId2"/>
     <p:sldId id="259" r:id="rId3"/>
     <p:sldId id="260" r:id="rId4"/>
-    <p:sldId id="264" r:id="rId5"/>
-    <p:sldId id="265" r:id="rId6"/>
-    <p:sldId id="266" r:id="rId7"/>
-    <p:sldId id="267" r:id="rId8"/>
-    <p:sldId id="268" r:id="rId9"/>
-    <p:sldId id="269" r:id="rId10"/>
-    <p:sldId id="270" r:id="rId11"/>
-    <p:sldId id="258" r:id="rId12"/>
+    <p:sldId id="271" r:id="rId5"/>
+    <p:sldId id="264" r:id="rId6"/>
+    <p:sldId id="265" r:id="rId7"/>
+    <p:sldId id="266" r:id="rId8"/>
+    <p:sldId id="267" r:id="rId9"/>
+    <p:sldId id="268" r:id="rId10"/>
+    <p:sldId id="269" r:id="rId11"/>
+    <p:sldId id="270" r:id="rId12"/>
+    <p:sldId id="258" r:id="rId13"/>
   </p:sldIdLst>
   <p:sldSz cx="12192000" cy="6858000"/>
   <p:notesSz cx="6858000" cy="9144000"/>
@@ -207,7 +208,7 @@
           <a:p>
             <a:fld id="{308549C9-F1F2-A344-9318-AC3AB4654B7E}" type="datetimeFigureOut">
               <a:rPr lang="en-US" smtClean="0"/>
-              <a:t>3/17/26</a:t>
+              <a:t>3/23/26</a:t>
             </a:fld>
             <a:endParaRPr lang="en-US"/>
           </a:p>
@@ -621,7 +622,7 @@
           <a:p>
             <a:fld id="{0ECB731F-7F54-EF4E-BC14-D4454C95FF4D}" type="datetime1">
               <a:rPr lang="en-US" smtClean="0"/>
-              <a:t>3/17/26</a:t>
+              <a:t>3/23/26</a:t>
             </a:fld>
             <a:endParaRPr lang="en-US"/>
           </a:p>
@@ -819,7 +820,7 @@
           <a:p>
             <a:fld id="{5FC0AAEB-F940-CA44-B742-2110711973A7}" type="datetime1">
               <a:rPr lang="en-US" smtClean="0"/>
-              <a:t>3/17/26</a:t>
+              <a:t>3/23/26</a:t>
             </a:fld>
             <a:endParaRPr lang="en-US"/>
           </a:p>
@@ -1027,7 +1028,7 @@
           <a:p>
             <a:fld id="{0C0FC7EA-A73C-4146-9B14-54C11597AA40}" type="datetime1">
               <a:rPr lang="en-US" smtClean="0"/>
-              <a:t>3/17/26</a:t>
+              <a:t>3/23/26</a:t>
             </a:fld>
             <a:endParaRPr lang="en-US"/>
           </a:p>
@@ -1225,7 +1226,7 @@
           <a:p>
             <a:fld id="{24943121-CDD1-174D-9095-06B3974B3CC1}" type="datetime1">
               <a:rPr lang="en-US" smtClean="0"/>
-              <a:t>3/17/26</a:t>
+              <a:t>3/23/26</a:t>
             </a:fld>
             <a:endParaRPr lang="en-US"/>
           </a:p>
@@ -1500,7 +1501,7 @@
           <a:p>
             <a:fld id="{21F2BAF9-EAD3-1641-87AF-ADC71D8222CD}" type="datetime1">
               <a:rPr lang="en-US" smtClean="0"/>
-              <a:t>3/17/26</a:t>
+              <a:t>3/23/26</a:t>
             </a:fld>
             <a:endParaRPr lang="en-US"/>
           </a:p>
@@ -1765,7 +1766,7 @@
           <a:p>
             <a:fld id="{F8F7A49D-4C23-6A49-AF9D-C0E1C1130921}" type="datetime1">
               <a:rPr lang="en-US" smtClean="0"/>
-              <a:t>3/17/26</a:t>
+              <a:t>3/23/26</a:t>
             </a:fld>
             <a:endParaRPr lang="en-US"/>
           </a:p>
@@ -2177,7 +2178,7 @@
           <a:p>
             <a:fld id="{9F516F59-8951-4749-B49C-6C88C0B4B6BD}" type="datetime1">
               <a:rPr lang="en-US" smtClean="0"/>
-              <a:t>3/17/26</a:t>
+              <a:t>3/23/26</a:t>
             </a:fld>
             <a:endParaRPr lang="en-US"/>
           </a:p>
@@ -2318,7 +2319,7 @@
           <a:p>
             <a:fld id="{CA82BBDF-C485-174D-8051-FF3ED3DF33C6}" type="datetime1">
               <a:rPr lang="en-US" smtClean="0"/>
-              <a:t>3/17/26</a:t>
+              <a:t>3/23/26</a:t>
             </a:fld>
             <a:endParaRPr lang="en-US"/>
           </a:p>
@@ -2431,7 +2432,7 @@
           <a:p>
             <a:fld id="{3CA316C8-35EA-C448-A7DB-295F753FB635}" type="datetime1">
               <a:rPr lang="en-US" smtClean="0"/>
-              <a:t>3/17/26</a:t>
+              <a:t>3/23/26</a:t>
             </a:fld>
             <a:endParaRPr lang="en-US"/>
           </a:p>
@@ -2742,7 +2743,7 @@
           <a:p>
             <a:fld id="{3EBA6818-685C-B142-BE10-A6D54A85D7FF}" type="datetime1">
               <a:rPr lang="en-US" smtClean="0"/>
-              <a:t>3/17/26</a:t>
+              <a:t>3/23/26</a:t>
             </a:fld>
             <a:endParaRPr lang="en-US"/>
           </a:p>
@@ -3030,7 +3031,7 @@
           <a:p>
             <a:fld id="{D444D57B-5B66-2F49-AB7C-362DD22B45D8}" type="datetime1">
               <a:rPr lang="en-US" smtClean="0"/>
-              <a:t>3/17/26</a:t>
+              <a:t>3/23/26</a:t>
             </a:fld>
             <a:endParaRPr lang="en-US"/>
           </a:p>
@@ -3271,7 +3272,7 @@
           <a:p>
             <a:fld id="{4025DC53-D744-A54C-8957-51F9F93FF803}" type="datetime1">
               <a:rPr lang="en-US" smtClean="0"/>
-              <a:t>3/17/26</a:t>
+              <a:t>3/23/26</a:t>
             </a:fld>
             <a:endParaRPr lang="en-US"/>
           </a:p>
@@ -3770,6 +3771,544 @@
 </file>
 
 <file path=ppt/slides/slide10.xml><?xml version="1.0" encoding="utf-8"?>
+<p:sld xmlns:a="http://schemas.openxmlformats.org/drawingml/2006/main" xmlns:r="http://schemas.openxmlformats.org/officeDocument/2006/relationships" xmlns:p="http://schemas.openxmlformats.org/presentationml/2006/main">
+  <p:cSld>
+    <p:spTree>
+      <p:nvGrpSpPr>
+        <p:cNvPr id="1" name=""/>
+        <p:cNvGrpSpPr/>
+        <p:nvPr/>
+      </p:nvGrpSpPr>
+      <p:grpSpPr>
+        <a:xfrm>
+          <a:off x="0" y="0"/>
+          <a:ext cx="0" cy="0"/>
+          <a:chOff x="0" y="0"/>
+          <a:chExt cx="0" cy="0"/>
+        </a:xfrm>
+      </p:grpSpPr>
+      <p:sp>
+        <p:nvSpPr>
+          <p:cNvPr id="2" name="Title 1">
+            <a:extLst>
+              <a:ext uri="{FF2B5EF4-FFF2-40B4-BE49-F238E27FC236}">
+                <a16:creationId xmlns:a16="http://schemas.microsoft.com/office/drawing/2014/main" id="{ED266BC7-D370-DB3B-3586-0BB7D3212D0F}"/>
+              </a:ext>
+            </a:extLst>
+          </p:cNvPr>
+          <p:cNvSpPr>
+            <a:spLocks noGrp="1"/>
+          </p:cNvSpPr>
+          <p:nvPr>
+            <p:ph type="title"/>
+          </p:nvPr>
+        </p:nvSpPr>
+        <p:spPr/>
+        <p:txBody>
+          <a:bodyPr/>
+          <a:lstStyle/>
+          <a:p>
+            <a:r>
+              <a:rPr lang="ja-JP" altLang="en-US"/>
+              <a:t>如何修正網路調查的非機率抽樣？</a:t>
+            </a:r>
+            <a:endParaRPr lang="en-US" dirty="0"/>
+          </a:p>
+        </p:txBody>
+      </p:sp>
+      <mc:AlternateContent xmlns:mc="http://schemas.openxmlformats.org/markup-compatibility/2006" xmlns:a14="http://schemas.microsoft.com/office/drawing/2010/main">
+        <mc:Choice Requires="a14">
+          <p:sp>
+            <p:nvSpPr>
+              <p:cNvPr id="3" name="Content Placeholder 2">
+                <a:extLst>
+                  <a:ext uri="{FF2B5EF4-FFF2-40B4-BE49-F238E27FC236}">
+                    <a16:creationId xmlns:a16="http://schemas.microsoft.com/office/drawing/2014/main" id="{4F08E529-29DD-AB2C-94BF-694DBD41AB6D}"/>
+                  </a:ext>
+                </a:extLst>
+              </p:cNvPr>
+              <p:cNvSpPr>
+                <a:spLocks noGrp="1"/>
+              </p:cNvSpPr>
+              <p:nvPr>
+                <p:ph idx="1"/>
+              </p:nvPr>
+            </p:nvSpPr>
+            <p:spPr/>
+            <p:txBody>
+              <a:bodyPr>
+                <a:normAutofit/>
+              </a:bodyPr>
+              <a:lstStyle/>
+              <a:p>
+                <a:pPr>
+                  <a:lnSpc>
+                    <a:spcPct val="150000"/>
+                  </a:lnSpc>
+                  <a:buFont typeface="Wingdings" pitchFamily="2" charset="2"/>
+                  <a:buChar char="q"/>
+                </a:pPr>
+                <a:r>
+                  <a:rPr lang="ja-JP" altLang="en-US" sz="2000"/>
+                  <a:t>配額抽樣 </a:t>
+                </a:r>
+                <a:r>
+                  <a:rPr lang="en-US" altLang="ja-JP" sz="2000" dirty="0"/>
+                  <a:t>(Quota Sampling)</a:t>
+                </a:r>
+                <a:r>
+                  <a:rPr lang="ja-JP" altLang="en-US" sz="2000"/>
+                  <a:t>： 如果資料庫中有足夠的樣本，可以設定性別、年齡比例，一旦某族群收滿足夠的樣本，就停止發送給受訪者。</a:t>
+                </a:r>
+              </a:p>
+              <a:p>
+                <a:pPr>
+                  <a:lnSpc>
+                    <a:spcPct val="150000"/>
+                  </a:lnSpc>
+                  <a:buFont typeface="Wingdings" pitchFamily="2" charset="2"/>
+                  <a:buChar char="q"/>
+                </a:pPr>
+                <a:r>
+                  <a:rPr lang="ja-JP" altLang="en-US" sz="2000"/>
+                  <a:t>加權校正 </a:t>
+                </a:r>
+                <a:r>
+                  <a:rPr lang="en-US" altLang="ja-JP" sz="2000" dirty="0"/>
+                  <a:t>(Weighting)</a:t>
+                </a:r>
+                <a:r>
+                  <a:rPr lang="ja-JP" altLang="en-US" sz="2000"/>
+                  <a:t>： 根據人口普查數據，對受訪者進行事後數學調整。</a:t>
+                </a:r>
+                <a:endParaRPr lang="en-US" altLang="ja-JP" sz="2000" dirty="0"/>
+              </a:p>
+              <a:p>
+                <a:pPr>
+                  <a:lnSpc>
+                    <a:spcPct val="150000"/>
+                  </a:lnSpc>
+                  <a:buFont typeface="Wingdings" pitchFamily="2" charset="2"/>
+                  <a:buChar char="q"/>
+                </a:pPr>
+                <a:r>
+                  <a:rPr lang="ja-JP" altLang="en-US" sz="2000"/>
+                  <a:t>例如：如果用電話訪問招募受訪者，然後寄同意書給受訪者，最後寄問卷給受訪者。這一套過程，有三次的選擇偏誤。</a:t>
+                </a:r>
+                <a:endParaRPr lang="en-US" altLang="ja-JP" sz="2000" dirty="0"/>
+              </a:p>
+              <a:p>
+                <a:pPr marL="742950" lvl="1" indent="-285750">
+                  <a:buFont typeface="Arial" panose="020B0604020202020204" pitchFamily="34" charset="0"/>
+                  <a:buChar char="•"/>
+                </a:pPr>
+                <a14:m>
+                  <m:oMath xmlns:m="http://schemas.openxmlformats.org/officeDocument/2006/math">
+                    <m:sSub>
+                      <m:sSubPr>
+                        <m:ctrlPr>
+                          <a:rPr lang="en-US" i="1" smtClean="0">
+                            <a:latin typeface="Cambria Math" panose="02040503050406030204" pitchFamily="18" charset="0"/>
+                          </a:rPr>
+                        </m:ctrlPr>
+                      </m:sSubPr>
+                      <m:e>
+                        <m:r>
+                          <a:rPr lang="en-US" b="0" i="1" smtClean="0">
+                            <a:latin typeface="Cambria Math" panose="02040503050406030204" pitchFamily="18" charset="0"/>
+                          </a:rPr>
+                          <m:t>𝑆</m:t>
+                        </m:r>
+                      </m:e>
+                      <m:sub>
+                        <m:r>
+                          <a:rPr lang="en-US" b="0" i="1" smtClean="0">
+                            <a:latin typeface="Cambria Math" panose="02040503050406030204" pitchFamily="18" charset="0"/>
+                          </a:rPr>
+                          <m:t>𝑖</m:t>
+                        </m:r>
+                      </m:sub>
+                    </m:sSub>
+                    <m:r>
+                      <a:rPr lang="en-US" b="0" i="1" smtClean="0">
+                        <a:latin typeface="Cambria Math" panose="02040503050406030204" pitchFamily="18" charset="0"/>
+                      </a:rPr>
+                      <m:t>=1</m:t>
+                    </m:r>
+                  </m:oMath>
+                </a14:m>
+                <a:r>
+                  <a:rPr lang="en-US" dirty="0"/>
+                  <a:t>：</a:t>
+                </a:r>
+                <a:r>
+                  <a:rPr lang="ja-JP" altLang="en-US"/>
+                  <a:t>電話樣本「被抽到且完成訪問」（</a:t>
+                </a:r>
+                <a:r>
+                  <a:rPr lang="en-US" dirty="0"/>
+                  <a:t>reference sample）</a:t>
+                </a:r>
+              </a:p>
+              <a:p>
+                <a:pPr marL="742950" lvl="1" indent="-285750">
+                  <a:buFont typeface="Arial" panose="020B0604020202020204" pitchFamily="34" charset="0"/>
+                  <a:buChar char="•"/>
+                </a:pPr>
+                <a14:m>
+                  <m:oMath xmlns:m="http://schemas.openxmlformats.org/officeDocument/2006/math">
+                    <m:sSub>
+                      <m:sSubPr>
+                        <m:ctrlPr>
+                          <a:rPr lang="en-US" i="1" smtClean="0">
+                            <a:latin typeface="Cambria Math" panose="02040503050406030204" pitchFamily="18" charset="0"/>
+                          </a:rPr>
+                        </m:ctrlPr>
+                      </m:sSubPr>
+                      <m:e>
+                        <m:r>
+                          <a:rPr lang="en-US" b="0" i="1" smtClean="0">
+                            <a:latin typeface="Cambria Math" panose="02040503050406030204" pitchFamily="18" charset="0"/>
+                          </a:rPr>
+                          <m:t>𝐽</m:t>
+                        </m:r>
+                      </m:e>
+                      <m:sub>
+                        <m:r>
+                          <a:rPr lang="en-US" b="0" i="1" smtClean="0">
+                            <a:latin typeface="Cambria Math" panose="02040503050406030204" pitchFamily="18" charset="0"/>
+                          </a:rPr>
+                          <m:t>𝑖</m:t>
+                        </m:r>
+                      </m:sub>
+                    </m:sSub>
+                    <m:r>
+                      <a:rPr lang="en-US" b="0" i="1" smtClean="0">
+                        <a:latin typeface="Cambria Math" panose="02040503050406030204" pitchFamily="18" charset="0"/>
+                      </a:rPr>
+                      <m:t>=1 </m:t>
+                    </m:r>
+                  </m:oMath>
+                </a14:m>
+                <a:r>
+                  <a:rPr lang="en-US" dirty="0"/>
+                  <a:t>：</a:t>
+                </a:r>
+                <a:r>
+                  <a:rPr lang="ja-JP" altLang="en-US"/>
+                  <a:t>在電話訪問後「同意加入 </a:t>
+                </a:r>
+                <a:r>
+                  <a:rPr lang="en-US" dirty="0"/>
+                  <a:t>panel」</a:t>
+                </a:r>
+              </a:p>
+              <a:p>
+                <a:pPr marL="742950" lvl="1" indent="-285750">
+                  <a:buFont typeface="Arial" panose="020B0604020202020204" pitchFamily="34" charset="0"/>
+                  <a:buChar char="•"/>
+                </a:pPr>
+                <a14:m>
+                  <m:oMath xmlns:m="http://schemas.openxmlformats.org/officeDocument/2006/math">
+                    <m:sSub>
+                      <m:sSubPr>
+                        <m:ctrlPr>
+                          <a:rPr lang="en-US" i="1" smtClean="0">
+                            <a:latin typeface="Cambria Math" panose="02040503050406030204" pitchFamily="18" charset="0"/>
+                          </a:rPr>
+                        </m:ctrlPr>
+                      </m:sSubPr>
+                      <m:e>
+                        <m:r>
+                          <a:rPr lang="en-US" b="0" i="1" smtClean="0">
+                            <a:latin typeface="Cambria Math" panose="02040503050406030204" pitchFamily="18" charset="0"/>
+                          </a:rPr>
+                          <m:t>𝑅</m:t>
+                        </m:r>
+                      </m:e>
+                      <m:sub>
+                        <m:r>
+                          <a:rPr lang="en-US" b="0" i="1" smtClean="0">
+                            <a:latin typeface="Cambria Math" panose="02040503050406030204" pitchFamily="18" charset="0"/>
+                          </a:rPr>
+                          <m:t>𝑖</m:t>
+                        </m:r>
+                      </m:sub>
+                    </m:sSub>
+                    <m:r>
+                      <a:rPr lang="en-US" b="0" i="1" smtClean="0">
+                        <a:latin typeface="Cambria Math" panose="02040503050406030204" pitchFamily="18" charset="0"/>
+                      </a:rPr>
+                      <m:t>=1 </m:t>
+                    </m:r>
+                  </m:oMath>
+                </a14:m>
+                <a:r>
+                  <a:rPr lang="en-US" dirty="0"/>
+                  <a:t>：</a:t>
+                </a:r>
+                <a:r>
+                  <a:rPr lang="ja-JP" altLang="en-US"/>
+                  <a:t>在同意加入後「實際完成線上問卷」</a:t>
+                </a:r>
+              </a:p>
+              <a:p>
+                <a:r>
+                  <a:rPr lang="ja-JP" altLang="en-US" sz="2100"/>
+                  <a:t>最後資料的集合是：</a:t>
+                </a:r>
+                <a14:m>
+                  <m:oMath xmlns:m="http://schemas.openxmlformats.org/officeDocument/2006/math">
+                    <m:d>
+                      <m:dPr>
+                        <m:begChr m:val="{"/>
+                        <m:endChr m:val="}"/>
+                        <m:ctrlPr>
+                          <a:rPr lang="en-US" altLang="ja-JP" sz="2100" i="1" smtClean="0">
+                            <a:latin typeface="Cambria Math" panose="02040503050406030204" pitchFamily="18" charset="0"/>
+                          </a:rPr>
+                        </m:ctrlPr>
+                      </m:dPr>
+                      <m:e>
+                        <m:r>
+                          <a:rPr lang="en-US" altLang="ja-JP" sz="2100" b="0" i="1" smtClean="0">
+                            <a:latin typeface="Cambria Math" panose="02040503050406030204" pitchFamily="18" charset="0"/>
+                          </a:rPr>
+                          <m:t>𝑖</m:t>
+                        </m:r>
+                        <m:r>
+                          <a:rPr lang="en-US" altLang="ja-JP" sz="2100" b="0" i="1" smtClean="0">
+                            <a:latin typeface="Cambria Math" panose="02040503050406030204" pitchFamily="18" charset="0"/>
+                          </a:rPr>
+                          <m:t>:</m:t>
+                        </m:r>
+                        <m:sSub>
+                          <m:sSubPr>
+                            <m:ctrlPr>
+                              <a:rPr lang="en-US" sz="2400" i="1">
+                                <a:latin typeface="Cambria Math" panose="02040503050406030204" pitchFamily="18" charset="0"/>
+                              </a:rPr>
+                            </m:ctrlPr>
+                          </m:sSubPr>
+                          <m:e>
+                            <m:r>
+                              <a:rPr lang="en-US" sz="2400" i="1">
+                                <a:latin typeface="Cambria Math" panose="02040503050406030204" pitchFamily="18" charset="0"/>
+                              </a:rPr>
+                              <m:t>𝑆</m:t>
+                            </m:r>
+                          </m:e>
+                          <m:sub>
+                            <m:r>
+                              <a:rPr lang="en-US" sz="2400" i="1">
+                                <a:latin typeface="Cambria Math" panose="02040503050406030204" pitchFamily="18" charset="0"/>
+                              </a:rPr>
+                              <m:t>𝑖</m:t>
+                            </m:r>
+                          </m:sub>
+                        </m:sSub>
+                        <m:r>
+                          <a:rPr lang="en-US" sz="2400" i="1">
+                            <a:latin typeface="Cambria Math" panose="02040503050406030204" pitchFamily="18" charset="0"/>
+                          </a:rPr>
+                          <m:t>=1</m:t>
+                        </m:r>
+                        <m:r>
+                          <a:rPr lang="en-US" sz="2400" b="0" i="1" smtClean="0">
+                            <a:latin typeface="Cambria Math" panose="02040503050406030204" pitchFamily="18" charset="0"/>
+                          </a:rPr>
+                          <m:t>,</m:t>
+                        </m:r>
+                        <m:sSub>
+                          <m:sSubPr>
+                            <m:ctrlPr>
+                              <a:rPr lang="en-US" sz="2400" i="1">
+                                <a:latin typeface="Cambria Math" panose="02040503050406030204" pitchFamily="18" charset="0"/>
+                              </a:rPr>
+                            </m:ctrlPr>
+                          </m:sSubPr>
+                          <m:e>
+                            <m:r>
+                              <a:rPr lang="en-US" sz="2400" b="0" i="1" smtClean="0">
+                                <a:latin typeface="Cambria Math" panose="02040503050406030204" pitchFamily="18" charset="0"/>
+                              </a:rPr>
+                              <m:t>𝐽</m:t>
+                            </m:r>
+                          </m:e>
+                          <m:sub>
+                            <m:r>
+                              <a:rPr lang="en-US" sz="2400" i="1">
+                                <a:latin typeface="Cambria Math" panose="02040503050406030204" pitchFamily="18" charset="0"/>
+                              </a:rPr>
+                              <m:t>𝑖</m:t>
+                            </m:r>
+                          </m:sub>
+                        </m:sSub>
+                        <m:r>
+                          <a:rPr lang="en-US" sz="2400" i="1">
+                            <a:latin typeface="Cambria Math" panose="02040503050406030204" pitchFamily="18" charset="0"/>
+                          </a:rPr>
+                          <m:t>=1</m:t>
+                        </m:r>
+                        <m:r>
+                          <a:rPr lang="en-US" sz="2400" b="0" i="1" smtClean="0">
+                            <a:latin typeface="Cambria Math" panose="02040503050406030204" pitchFamily="18" charset="0"/>
+                          </a:rPr>
+                          <m:t>,</m:t>
+                        </m:r>
+                        <m:sSub>
+                          <m:sSubPr>
+                            <m:ctrlPr>
+                              <a:rPr lang="en-US" sz="2400" i="1">
+                                <a:latin typeface="Cambria Math" panose="02040503050406030204" pitchFamily="18" charset="0"/>
+                              </a:rPr>
+                            </m:ctrlPr>
+                          </m:sSubPr>
+                          <m:e>
+                            <m:r>
+                              <a:rPr lang="en-US" sz="2400" b="0" i="1" smtClean="0">
+                                <a:latin typeface="Cambria Math" panose="02040503050406030204" pitchFamily="18" charset="0"/>
+                              </a:rPr>
+                              <m:t>𝑅</m:t>
+                            </m:r>
+                          </m:e>
+                          <m:sub>
+                            <m:r>
+                              <a:rPr lang="en-US" sz="2400" i="1">
+                                <a:latin typeface="Cambria Math" panose="02040503050406030204" pitchFamily="18" charset="0"/>
+                              </a:rPr>
+                              <m:t>𝑖</m:t>
+                            </m:r>
+                          </m:sub>
+                        </m:sSub>
+                        <m:r>
+                          <a:rPr lang="en-US" sz="2400" i="1">
+                            <a:latin typeface="Cambria Math" panose="02040503050406030204" pitchFamily="18" charset="0"/>
+                          </a:rPr>
+                          <m:t>=1</m:t>
+                        </m:r>
+                      </m:e>
+                    </m:d>
+                  </m:oMath>
+                </a14:m>
+                <a:endParaRPr lang="ja-JP" altLang="en-US" sz="2100"/>
+              </a:p>
+              <a:p>
+                <a:endParaRPr lang="en-US" altLang="ja-JP" sz="2000" dirty="0"/>
+              </a:p>
+              <a:p>
+                <a:pPr>
+                  <a:lnSpc>
+                    <a:spcPct val="150000"/>
+                  </a:lnSpc>
+                  <a:buFont typeface="Wingdings" pitchFamily="2" charset="2"/>
+                  <a:buChar char="q"/>
+                </a:pPr>
+                <a:endParaRPr lang="en-US" altLang="ja-JP" sz="2000" dirty="0"/>
+              </a:p>
+              <a:p>
+                <a:pPr>
+                  <a:lnSpc>
+                    <a:spcPct val="150000"/>
+                  </a:lnSpc>
+                  <a:buFont typeface="Wingdings" pitchFamily="2" charset="2"/>
+                  <a:buChar char="l"/>
+                </a:pPr>
+                <a:endParaRPr lang="en-US" sz="2000" dirty="0"/>
+              </a:p>
+              <a:p>
+                <a:pPr>
+                  <a:buFont typeface="Wingdings" pitchFamily="2" charset="2"/>
+                  <a:buChar char="l"/>
+                </a:pPr>
+                <a:endParaRPr lang="en-US" dirty="0"/>
+              </a:p>
+            </p:txBody>
+          </p:sp>
+        </mc:Choice>
+        <mc:Fallback xmlns="">
+          <p:sp>
+            <p:nvSpPr>
+              <p:cNvPr id="3" name="Content Placeholder 2">
+                <a:extLst>
+                  <a:ext uri="{FF2B5EF4-FFF2-40B4-BE49-F238E27FC236}">
+                    <a16:creationId xmlns:a16="http://schemas.microsoft.com/office/drawing/2014/main" id="{4F08E529-29DD-AB2C-94BF-694DBD41AB6D}"/>
+                  </a:ext>
+                </a:extLst>
+              </p:cNvPr>
+              <p:cNvSpPr>
+                <a:spLocks noGrp="1" noRot="1" noChangeAspect="1" noMove="1" noResize="1" noEditPoints="1" noAdjustHandles="1" noChangeArrowheads="1" noChangeShapeType="1" noTextEdit="1"/>
+              </p:cNvSpPr>
+              <p:nvPr>
+                <p:ph idx="1"/>
+              </p:nvPr>
+            </p:nvSpPr>
+            <p:spPr>
+              <a:blipFill>
+                <a:blip r:embed="rId2"/>
+                <a:stretch>
+                  <a:fillRect l="-603"/>
+                </a:stretch>
+              </a:blipFill>
+            </p:spPr>
+            <p:txBody>
+              <a:bodyPr/>
+              <a:lstStyle/>
+              <a:p>
+                <a:r>
+                  <a:rPr lang="en-US">
+                    <a:noFill/>
+                  </a:rPr>
+                  <a:t> </a:t>
+                </a:r>
+              </a:p>
+            </p:txBody>
+          </p:sp>
+        </mc:Fallback>
+      </mc:AlternateContent>
+      <p:sp>
+        <p:nvSpPr>
+          <p:cNvPr id="4" name="Slide Number Placeholder 3">
+            <a:extLst>
+              <a:ext uri="{FF2B5EF4-FFF2-40B4-BE49-F238E27FC236}">
+                <a16:creationId xmlns:a16="http://schemas.microsoft.com/office/drawing/2014/main" id="{C98085D9-FBDD-C940-3F14-8994BAC36532}"/>
+              </a:ext>
+            </a:extLst>
+          </p:cNvPr>
+          <p:cNvSpPr>
+            <a:spLocks noGrp="1"/>
+          </p:cNvSpPr>
+          <p:nvPr>
+            <p:ph type="sldNum" sz="quarter" idx="12"/>
+          </p:nvPr>
+        </p:nvSpPr>
+        <p:spPr/>
+        <p:txBody>
+          <a:bodyPr/>
+          <a:lstStyle/>
+          <a:p>
+            <a:fld id="{34E21383-B02B-694B-B2AD-A967203CDE86}" type="slidenum">
+              <a:rPr lang="en-US" smtClean="0"/>
+              <a:t>10</a:t>
+            </a:fld>
+            <a:endParaRPr lang="en-US"/>
+          </a:p>
+        </p:txBody>
+      </p:sp>
+    </p:spTree>
+    <p:extLst>
+      <p:ext uri="{BB962C8B-B14F-4D97-AF65-F5344CB8AC3E}">
+        <p14:creationId xmlns:p14="http://schemas.microsoft.com/office/powerpoint/2010/main" val="3836497003"/>
+      </p:ext>
+    </p:extLst>
+  </p:cSld>
+  <p:clrMapOvr>
+    <a:masterClrMapping/>
+  </p:clrMapOvr>
+</p:sld>
+</file>
+
+<file path=ppt/slides/slide11.xml><?xml version="1.0" encoding="utf-8"?>
 <p:sld xmlns:a="http://schemas.openxmlformats.org/drawingml/2006/main" xmlns:r="http://schemas.openxmlformats.org/officeDocument/2006/relationships" xmlns:p="http://schemas.openxmlformats.org/presentationml/2006/main">
   <p:cSld>
     <p:spTree>
@@ -4439,7 +4978,7 @@
           <a:p>
             <a:fld id="{34E21383-B02B-694B-B2AD-A967203CDE86}" type="slidenum">
               <a:rPr lang="en-US" smtClean="0"/>
-              <a:t>10</a:t>
+              <a:t>11</a:t>
             </a:fld>
             <a:endParaRPr lang="en-US"/>
           </a:p>
@@ -4458,7 +4997,7 @@
 </p:sld>
 </file>
 
-<file path=ppt/slides/slide11.xml><?xml version="1.0" encoding="utf-8"?>
+<file path=ppt/slides/slide12.xml><?xml version="1.0" encoding="utf-8"?>
 <p:sld xmlns:a="http://schemas.openxmlformats.org/drawingml/2006/main" xmlns:r="http://schemas.openxmlformats.org/officeDocument/2006/relationships" xmlns:p="http://schemas.openxmlformats.org/presentationml/2006/main">
   <p:cSld>
     <p:spTree>
@@ -4680,7 +5219,7 @@
           <a:p>
             <a:fld id="{34E21383-B02B-694B-B2AD-A967203CDE86}" type="slidenum">
               <a:rPr lang="en-US" smtClean="0"/>
-              <a:t>11</a:t>
+              <a:t>12</a:t>
             </a:fld>
             <a:endParaRPr lang="en-US"/>
           </a:p>
@@ -4788,7 +5327,7 @@
                 <a:ea typeface="DFKai-SB"/>
                 <a:cs typeface="Times New Roman" panose="02020603050405020304" pitchFamily="18" charset="0"/>
               </a:rPr>
-              <a:t>網路調查的特色</a:t>
+              <a:t>為何要抽樣？</a:t>
             </a:r>
             <a:endParaRPr lang="en-US" altLang="zh-TW" kern="100" dirty="0">
               <a:latin typeface="Times New Roman" panose="02020603050405020304" pitchFamily="18" charset="0"/>
@@ -4814,7 +5353,7 @@
                 <a:ea typeface="DFKai-SB"/>
                 <a:cs typeface="Times New Roman" panose="02020603050405020304" pitchFamily="18" charset="0"/>
               </a:rPr>
-              <a:t>網路調查的優點</a:t>
+              <a:t>抽樣方法</a:t>
             </a:r>
             <a:endParaRPr lang="en-US" altLang="zh-TW" kern="100" dirty="0">
               <a:latin typeface="Times New Roman" panose="02020603050405020304" pitchFamily="18" charset="0"/>
@@ -4840,7 +5379,7 @@
                 <a:ea typeface="DFKai-SB"/>
                 <a:cs typeface="Times New Roman" panose="02020603050405020304" pitchFamily="18" charset="0"/>
               </a:rPr>
-              <a:t>網路調查的問題</a:t>
+              <a:t>推論統計</a:t>
             </a:r>
             <a:endParaRPr lang="en-US" altLang="zh-TW" kern="100" dirty="0">
               <a:latin typeface="Times New Roman" panose="02020603050405020304" pitchFamily="18" charset="0"/>
@@ -4849,7 +5388,7 @@
             </a:endParaRPr>
           </a:p>
           <a:p>
-            <a:pPr marL="0" marR="0" indent="304800" algn="just">
+            <a:pPr marL="0" marR="0" indent="0" algn="just">
               <a:lnSpc>
                 <a:spcPct val="150000"/>
               </a:lnSpc>
@@ -4859,25 +5398,8 @@
               <a:spcAft>
                 <a:spcPts val="0"/>
               </a:spcAft>
+              <a:buNone/>
             </a:pPr>
-            <a:r>
-              <a:rPr lang="zh-TW" altLang="en-US" kern="100" dirty="0">
-                <a:effectLst/>
-                <a:latin typeface="Times New Roman" panose="02020603050405020304" pitchFamily="18" charset="0"/>
-                <a:ea typeface="DFKai-SB"/>
-                <a:cs typeface="Times New Roman" panose="02020603050405020304" pitchFamily="18" charset="0"/>
-              </a:rPr>
-              <a:t>網路調查的</a:t>
-            </a:r>
-            <a:r>
-              <a:rPr lang="zh-TW" kern="100" dirty="0">
-                <a:effectLst/>
-                <a:latin typeface="Times New Roman" panose="02020603050405020304" pitchFamily="18" charset="0"/>
-                <a:ea typeface="DFKai-SB"/>
-                <a:cs typeface="Times New Roman" panose="02020603050405020304" pitchFamily="18" charset="0"/>
-              </a:rPr>
-              <a:t>實務</a:t>
-            </a:r>
             <a:endParaRPr lang="en-US" altLang="zh-TW" sz="2000" kern="100" dirty="0">
               <a:effectLst/>
               <a:latin typeface="Times New Roman" panose="02020603050405020304" pitchFamily="18" charset="0"/>
@@ -4983,7 +5505,7 @@
           <a:p>
             <a:r>
               <a:rPr lang="ja-JP" altLang="en-US"/>
-              <a:t>網路調查的特色</a:t>
+              <a:t>為何要抽樣？</a:t>
             </a:r>
             <a:endParaRPr lang="en-US" dirty="0"/>
           </a:p>
@@ -5150,6 +5672,188 @@
 </file>
 
 <file path=ppt/slides/slide4.xml><?xml version="1.0" encoding="utf-8"?>
+<p:sld xmlns:a="http://schemas.openxmlformats.org/drawingml/2006/main" xmlns:r="http://schemas.openxmlformats.org/officeDocument/2006/relationships" xmlns:p="http://schemas.openxmlformats.org/presentationml/2006/main">
+  <p:cSld>
+    <p:spTree>
+      <p:nvGrpSpPr>
+        <p:cNvPr id="1" name=""/>
+        <p:cNvGrpSpPr/>
+        <p:nvPr/>
+      </p:nvGrpSpPr>
+      <p:grpSpPr>
+        <a:xfrm>
+          <a:off x="0" y="0"/>
+          <a:ext cx="0" cy="0"/>
+          <a:chOff x="0" y="0"/>
+          <a:chExt cx="0" cy="0"/>
+        </a:xfrm>
+      </p:grpSpPr>
+      <p:sp>
+        <p:nvSpPr>
+          <p:cNvPr id="5" name="標題 4">
+            <a:extLst>
+              <a:ext uri="{FF2B5EF4-FFF2-40B4-BE49-F238E27FC236}">
+                <a16:creationId xmlns:a16="http://schemas.microsoft.com/office/drawing/2014/main" id="{9251C1C1-BCDC-0FFC-A3C6-ACED3BC6A05F}"/>
+              </a:ext>
+            </a:extLst>
+          </p:cNvPr>
+          <p:cNvSpPr>
+            <a:spLocks noGrp="1"/>
+          </p:cNvSpPr>
+          <p:nvPr>
+            <p:ph type="title"/>
+          </p:nvPr>
+        </p:nvSpPr>
+        <p:spPr/>
+        <p:txBody>
+          <a:bodyPr/>
+          <a:lstStyle/>
+          <a:p>
+            <a:endParaRPr lang="zh-TW" altLang="en-US" dirty="0"/>
+          </a:p>
+        </p:txBody>
+      </p:sp>
+      <p:sp>
+        <p:nvSpPr>
+          <p:cNvPr id="6" name="文字版面配置區 5">
+            <a:extLst>
+              <a:ext uri="{FF2B5EF4-FFF2-40B4-BE49-F238E27FC236}">
+                <a16:creationId xmlns:a16="http://schemas.microsoft.com/office/drawing/2014/main" id="{469BFB84-0026-A6D9-C983-8B4284284848}"/>
+              </a:ext>
+            </a:extLst>
+          </p:cNvPr>
+          <p:cNvSpPr>
+            <a:spLocks noGrp="1"/>
+          </p:cNvSpPr>
+          <p:nvPr>
+            <p:ph type="body" idx="1"/>
+          </p:nvPr>
+        </p:nvSpPr>
+        <p:spPr>
+          <a:xfrm>
+            <a:off x="831850" y="5630984"/>
+            <a:ext cx="10515600" cy="763708"/>
+          </a:xfrm>
+        </p:spPr>
+        <p:txBody>
+          <a:bodyPr>
+            <a:normAutofit/>
+          </a:bodyPr>
+          <a:lstStyle/>
+          <a:p>
+            <a:r>
+              <a:rPr lang="en" altLang="zh-TW" dirty="0">
+                <a:solidFill>
+                  <a:schemeClr val="tx1"/>
+                </a:solidFill>
+              </a:rPr>
+              <a:t>Source: </a:t>
+            </a:r>
+            <a:r>
+              <a:rPr lang="en" altLang="zh-TW" dirty="0" err="1">
+                <a:solidFill>
+                  <a:schemeClr val="tx1"/>
+                </a:solidFill>
+              </a:rPr>
+              <a:t>Biffignandi</a:t>
+            </a:r>
+            <a:r>
+              <a:rPr lang="en-US" altLang="zh-TW" dirty="0">
+                <a:solidFill>
+                  <a:schemeClr val="tx1"/>
+                </a:solidFill>
+              </a:rPr>
+              <a:t> and </a:t>
+            </a:r>
+            <a:r>
+              <a:rPr lang="en" altLang="zh-TW" dirty="0">
+                <a:solidFill>
+                  <a:schemeClr val="tx1"/>
+                </a:solidFill>
+              </a:rPr>
+              <a:t>Bethlehem (2021) Handbook of Web Survey, p. 111</a:t>
+            </a:r>
+            <a:endParaRPr lang="zh-TW" altLang="en-US" dirty="0">
+              <a:solidFill>
+                <a:schemeClr val="tx1"/>
+              </a:solidFill>
+            </a:endParaRPr>
+          </a:p>
+        </p:txBody>
+      </p:sp>
+      <p:sp>
+        <p:nvSpPr>
+          <p:cNvPr id="2" name="投影片編號版面配置區 1">
+            <a:extLst>
+              <a:ext uri="{FF2B5EF4-FFF2-40B4-BE49-F238E27FC236}">
+                <a16:creationId xmlns:a16="http://schemas.microsoft.com/office/drawing/2014/main" id="{A9B96B5E-71A0-1AB2-9C3C-172ABD68F981}"/>
+              </a:ext>
+            </a:extLst>
+          </p:cNvPr>
+          <p:cNvSpPr>
+            <a:spLocks noGrp="1"/>
+          </p:cNvSpPr>
+          <p:nvPr>
+            <p:ph type="sldNum" sz="quarter" idx="12"/>
+          </p:nvPr>
+        </p:nvSpPr>
+        <p:spPr/>
+        <p:txBody>
+          <a:bodyPr/>
+          <a:lstStyle/>
+          <a:p>
+            <a:fld id="{34E21383-B02B-694B-B2AD-A967203CDE86}" type="slidenum">
+              <a:rPr lang="en-US" smtClean="0"/>
+              <a:t>4</a:t>
+            </a:fld>
+            <a:endParaRPr lang="en-US"/>
+          </a:p>
+        </p:txBody>
+      </p:sp>
+      <p:pic>
+        <p:nvPicPr>
+          <p:cNvPr id="4" name="圖片 3">
+            <a:extLst>
+              <a:ext uri="{FF2B5EF4-FFF2-40B4-BE49-F238E27FC236}">
+                <a16:creationId xmlns:a16="http://schemas.microsoft.com/office/drawing/2014/main" id="{5E1BC76C-E4A5-129F-7659-C25E3860C8D8}"/>
+              </a:ext>
+            </a:extLst>
+          </p:cNvPr>
+          <p:cNvPicPr>
+            <a:picLocks noChangeAspect="1"/>
+          </p:cNvPicPr>
+          <p:nvPr/>
+        </p:nvPicPr>
+        <p:blipFill>
+          <a:blip r:embed="rId2"/>
+          <a:stretch>
+            <a:fillRect/>
+          </a:stretch>
+        </p:blipFill>
+        <p:spPr>
+          <a:xfrm>
+            <a:off x="1885950" y="641229"/>
+            <a:ext cx="7772400" cy="4818184"/>
+          </a:xfrm>
+          <a:prstGeom prst="rect">
+            <a:avLst/>
+          </a:prstGeom>
+        </p:spPr>
+      </p:pic>
+    </p:spTree>
+    <p:extLst>
+      <p:ext uri="{BB962C8B-B14F-4D97-AF65-F5344CB8AC3E}">
+        <p14:creationId xmlns:p14="http://schemas.microsoft.com/office/powerpoint/2010/main" val="3890837572"/>
+      </p:ext>
+    </p:extLst>
+  </p:cSld>
+  <p:clrMapOvr>
+    <a:masterClrMapping/>
+  </p:clrMapOvr>
+</p:sld>
+</file>
+
+<file path=ppt/slides/slide5.xml><?xml version="1.0" encoding="utf-8"?>
 <p:sld xmlns:a="http://schemas.openxmlformats.org/drawingml/2006/main" xmlns:r="http://schemas.openxmlformats.org/officeDocument/2006/relationships" xmlns:p="http://schemas.openxmlformats.org/presentationml/2006/main">
   <p:cSld>
     <p:spTree>
@@ -5541,7 +6245,7 @@
           <a:p>
             <a:fld id="{34E21383-B02B-694B-B2AD-A967203CDE86}" type="slidenum">
               <a:rPr lang="en-US" smtClean="0"/>
-              <a:t>4</a:t>
+              <a:t>5</a:t>
             </a:fld>
             <a:endParaRPr lang="en-US"/>
           </a:p>
@@ -5560,7 +6264,7 @@
 </p:sld>
 </file>
 
-<file path=ppt/slides/slide5.xml><?xml version="1.0" encoding="utf-8"?>
+<file path=ppt/slides/slide6.xml><?xml version="1.0" encoding="utf-8"?>
 <p:sld xmlns:a="http://schemas.openxmlformats.org/drawingml/2006/main" xmlns:r="http://schemas.openxmlformats.org/officeDocument/2006/relationships" xmlns:p="http://schemas.openxmlformats.org/presentationml/2006/main">
   <p:cSld>
     <p:spTree>
@@ -5600,7 +6304,7 @@
           <a:p>
             <a:fld id="{34E21383-B02B-694B-B2AD-A967203CDE86}" type="slidenum">
               <a:rPr lang="en-US" smtClean="0"/>
-              <a:t>5</a:t>
+              <a:t>6</a:t>
             </a:fld>
             <a:endParaRPr lang="en-US"/>
           </a:p>
@@ -5649,191 +6353,6 @@
 </p:sld>
 </file>
 
-<file path=ppt/slides/slide6.xml><?xml version="1.0" encoding="utf-8"?>
-<p:sld xmlns:a="http://schemas.openxmlformats.org/drawingml/2006/main" xmlns:r="http://schemas.openxmlformats.org/officeDocument/2006/relationships" xmlns:p="http://schemas.openxmlformats.org/presentationml/2006/main">
-  <p:cSld>
-    <p:spTree>
-      <p:nvGrpSpPr>
-        <p:cNvPr id="1" name=""/>
-        <p:cNvGrpSpPr/>
-        <p:nvPr/>
-      </p:nvGrpSpPr>
-      <p:grpSpPr>
-        <a:xfrm>
-          <a:off x="0" y="0"/>
-          <a:ext cx="0" cy="0"/>
-          <a:chOff x="0" y="0"/>
-          <a:chExt cx="0" cy="0"/>
-        </a:xfrm>
-      </p:grpSpPr>
-      <p:sp>
-        <p:nvSpPr>
-          <p:cNvPr id="2" name="Title 1">
-            <a:extLst>
-              <a:ext uri="{FF2B5EF4-FFF2-40B4-BE49-F238E27FC236}">
-                <a16:creationId xmlns:a16="http://schemas.microsoft.com/office/drawing/2014/main" id="{ED266BC7-D370-DB3B-3586-0BB7D3212D0F}"/>
-              </a:ext>
-            </a:extLst>
-          </p:cNvPr>
-          <p:cNvSpPr>
-            <a:spLocks noGrp="1"/>
-          </p:cNvSpPr>
-          <p:nvPr>
-            <p:ph type="title"/>
-          </p:nvPr>
-        </p:nvSpPr>
-        <p:spPr/>
-        <p:txBody>
-          <a:bodyPr/>
-          <a:lstStyle/>
-          <a:p>
-            <a:r>
-              <a:rPr lang="ja-JP" altLang="en-US"/>
-              <a:t>非機率抽樣</a:t>
-            </a:r>
-            <a:endParaRPr lang="en-US" dirty="0"/>
-          </a:p>
-        </p:txBody>
-      </p:sp>
-      <p:sp>
-        <p:nvSpPr>
-          <p:cNvPr id="3" name="Content Placeholder 2">
-            <a:extLst>
-              <a:ext uri="{FF2B5EF4-FFF2-40B4-BE49-F238E27FC236}">
-                <a16:creationId xmlns:a16="http://schemas.microsoft.com/office/drawing/2014/main" id="{4F08E529-29DD-AB2C-94BF-694DBD41AB6D}"/>
-              </a:ext>
-            </a:extLst>
-          </p:cNvPr>
-          <p:cNvSpPr>
-            <a:spLocks noGrp="1"/>
-          </p:cNvSpPr>
-          <p:nvPr>
-            <p:ph idx="1"/>
-          </p:nvPr>
-        </p:nvSpPr>
-        <p:spPr/>
-        <p:txBody>
-          <a:bodyPr>
-            <a:normAutofit/>
-          </a:bodyPr>
-          <a:lstStyle/>
-          <a:p>
-            <a:pPr>
-              <a:lnSpc>
-                <a:spcPct val="150000"/>
-              </a:lnSpc>
-              <a:buFont typeface="Wingdings" pitchFamily="2" charset="2"/>
-              <a:buChar char="l"/>
-            </a:pPr>
-            <a:r>
-              <a:rPr lang="ja-JP" altLang="en-US" sz="2000"/>
-              <a:t>非機率抽樣並非基於隨機原則，而是根據研究者的便利性、判斷或特定標準來選取樣本。</a:t>
-            </a:r>
-            <a:endParaRPr lang="en-US" altLang="ja-JP" sz="2000" dirty="0"/>
-          </a:p>
-          <a:p>
-            <a:pPr>
-              <a:lnSpc>
-                <a:spcPct val="150000"/>
-              </a:lnSpc>
-              <a:buFont typeface="Wingdings" pitchFamily="2" charset="2"/>
-              <a:buChar char="l"/>
-            </a:pPr>
-            <a:r>
-              <a:rPr lang="ja-JP" altLang="en-US" sz="2000"/>
-              <a:t>缺乏代表性， 可能集中在少數人，無法推論至全體母體。</a:t>
-            </a:r>
-            <a:endParaRPr lang="en-US" altLang="ja-JP" sz="2000" dirty="0"/>
-          </a:p>
-          <a:p>
-            <a:pPr>
-              <a:lnSpc>
-                <a:spcPct val="150000"/>
-              </a:lnSpc>
-              <a:buFont typeface="Wingdings" pitchFamily="2" charset="2"/>
-              <a:buChar char="l"/>
-            </a:pPr>
-            <a:r>
-              <a:rPr lang="ja-JP" altLang="en-US" sz="2000"/>
-              <a:t>抽樣機率不明，無法計算精確的抽樣誤差。</a:t>
-            </a:r>
-            <a:endParaRPr lang="en-US" altLang="ja-JP" sz="2000" dirty="0"/>
-          </a:p>
-          <a:p>
-            <a:pPr>
-              <a:lnSpc>
-                <a:spcPct val="150000"/>
-              </a:lnSpc>
-              <a:buFont typeface="Wingdings" pitchFamily="2" charset="2"/>
-              <a:buChar char="l"/>
-            </a:pPr>
-            <a:r>
-              <a:rPr lang="ja-JP" altLang="en-US" sz="2000"/>
-              <a:t>便利抽樣、判斷抽樣（專家抽樣）、滾雪球抽樣、配額抽樣都屬於非機率抽樣。</a:t>
-            </a:r>
-            <a:endParaRPr lang="en-US" altLang="ja-JP" sz="2000" dirty="0"/>
-          </a:p>
-          <a:p>
-            <a:pPr>
-              <a:lnSpc>
-                <a:spcPct val="150000"/>
-              </a:lnSpc>
-              <a:buFont typeface="Wingdings" pitchFamily="2" charset="2"/>
-              <a:buChar char="l"/>
-            </a:pPr>
-            <a:endParaRPr lang="en-US" sz="2000" dirty="0"/>
-          </a:p>
-          <a:p>
-            <a:pPr>
-              <a:buFont typeface="Wingdings" pitchFamily="2" charset="2"/>
-              <a:buChar char="l"/>
-            </a:pPr>
-            <a:endParaRPr lang="en-US" dirty="0"/>
-          </a:p>
-        </p:txBody>
-      </p:sp>
-      <p:sp>
-        <p:nvSpPr>
-          <p:cNvPr id="4" name="Slide Number Placeholder 3">
-            <a:extLst>
-              <a:ext uri="{FF2B5EF4-FFF2-40B4-BE49-F238E27FC236}">
-                <a16:creationId xmlns:a16="http://schemas.microsoft.com/office/drawing/2014/main" id="{C98085D9-FBDD-C940-3F14-8994BAC36532}"/>
-              </a:ext>
-            </a:extLst>
-          </p:cNvPr>
-          <p:cNvSpPr>
-            <a:spLocks noGrp="1"/>
-          </p:cNvSpPr>
-          <p:nvPr>
-            <p:ph type="sldNum" sz="quarter" idx="12"/>
-          </p:nvPr>
-        </p:nvSpPr>
-        <p:spPr/>
-        <p:txBody>
-          <a:bodyPr/>
-          <a:lstStyle/>
-          <a:p>
-            <a:fld id="{34E21383-B02B-694B-B2AD-A967203CDE86}" type="slidenum">
-              <a:rPr lang="en-US" smtClean="0"/>
-              <a:t>6</a:t>
-            </a:fld>
-            <a:endParaRPr lang="en-US"/>
-          </a:p>
-        </p:txBody>
-      </p:sp>
-    </p:spTree>
-    <p:extLst>
-      <p:ext uri="{BB962C8B-B14F-4D97-AF65-F5344CB8AC3E}">
-        <p14:creationId xmlns:p14="http://schemas.microsoft.com/office/powerpoint/2010/main" val="397422702"/>
-      </p:ext>
-    </p:extLst>
-  </p:cSld>
-  <p:clrMapOvr>
-    <a:masterClrMapping/>
-  </p:clrMapOvr>
-</p:sld>
-</file>
-
 <file path=ppt/slides/slide7.xml><?xml version="1.0" encoding="utf-8"?>
 <p:sld xmlns:a="http://schemas.openxmlformats.org/drawingml/2006/main" xmlns:r="http://schemas.openxmlformats.org/officeDocument/2006/relationships" xmlns:p="http://schemas.openxmlformats.org/presentationml/2006/main">
   <p:cSld>
@@ -5853,10 +6372,136 @@
       </p:grpSpPr>
       <p:sp>
         <p:nvSpPr>
-          <p:cNvPr id="2" name="Slide Number Placeholder 1">
-            <a:extLst>
-              <a:ext uri="{FF2B5EF4-FFF2-40B4-BE49-F238E27FC236}">
-                <a16:creationId xmlns:a16="http://schemas.microsoft.com/office/drawing/2014/main" id="{059EBEF9-A064-EC8F-F179-60480554D8D1}"/>
+          <p:cNvPr id="2" name="Title 1">
+            <a:extLst>
+              <a:ext uri="{FF2B5EF4-FFF2-40B4-BE49-F238E27FC236}">
+                <a16:creationId xmlns:a16="http://schemas.microsoft.com/office/drawing/2014/main" id="{ED266BC7-D370-DB3B-3586-0BB7D3212D0F}"/>
+              </a:ext>
+            </a:extLst>
+          </p:cNvPr>
+          <p:cNvSpPr>
+            <a:spLocks noGrp="1"/>
+          </p:cNvSpPr>
+          <p:nvPr>
+            <p:ph type="title"/>
+          </p:nvPr>
+        </p:nvSpPr>
+        <p:spPr/>
+        <p:txBody>
+          <a:bodyPr/>
+          <a:lstStyle/>
+          <a:p>
+            <a:r>
+              <a:rPr lang="ja-JP" altLang="en-US"/>
+              <a:t>非機率抽樣</a:t>
+            </a:r>
+            <a:endParaRPr lang="en-US" dirty="0"/>
+          </a:p>
+        </p:txBody>
+      </p:sp>
+      <p:sp>
+        <p:nvSpPr>
+          <p:cNvPr id="3" name="Content Placeholder 2">
+            <a:extLst>
+              <a:ext uri="{FF2B5EF4-FFF2-40B4-BE49-F238E27FC236}">
+                <a16:creationId xmlns:a16="http://schemas.microsoft.com/office/drawing/2014/main" id="{4F08E529-29DD-AB2C-94BF-694DBD41AB6D}"/>
+              </a:ext>
+            </a:extLst>
+          </p:cNvPr>
+          <p:cNvSpPr>
+            <a:spLocks noGrp="1"/>
+          </p:cNvSpPr>
+          <p:nvPr>
+            <p:ph idx="1"/>
+          </p:nvPr>
+        </p:nvSpPr>
+        <p:spPr/>
+        <p:txBody>
+          <a:bodyPr>
+            <a:normAutofit/>
+          </a:bodyPr>
+          <a:lstStyle/>
+          <a:p>
+            <a:pPr>
+              <a:lnSpc>
+                <a:spcPct val="150000"/>
+              </a:lnSpc>
+              <a:buFont typeface="Wingdings" pitchFamily="2" charset="2"/>
+              <a:buChar char="l"/>
+            </a:pPr>
+            <a:r>
+              <a:rPr lang="ja-JP" altLang="en-US" sz="2000"/>
+              <a:t>非機率抽樣並非基於隨機原則，而是根據研究者的便利性、判斷或特定標準來選取樣本。</a:t>
+            </a:r>
+            <a:endParaRPr lang="en-US" altLang="ja-JP" sz="2000" dirty="0"/>
+          </a:p>
+          <a:p>
+            <a:pPr>
+              <a:lnSpc>
+                <a:spcPct val="150000"/>
+              </a:lnSpc>
+              <a:buFont typeface="Wingdings" pitchFamily="2" charset="2"/>
+              <a:buChar char="l"/>
+            </a:pPr>
+            <a:r>
+              <a:rPr lang="ja-JP" altLang="en-US" sz="2000"/>
+              <a:t>缺乏代表性， 可能集中在少數人，無法推論至全體母體。</a:t>
+            </a:r>
+            <a:endParaRPr lang="en-US" altLang="ja-JP" sz="2000" dirty="0"/>
+          </a:p>
+          <a:p>
+            <a:pPr>
+              <a:lnSpc>
+                <a:spcPct val="150000"/>
+              </a:lnSpc>
+              <a:buFont typeface="Wingdings" pitchFamily="2" charset="2"/>
+              <a:buChar char="l"/>
+            </a:pPr>
+            <a:r>
+              <a:rPr lang="ja-JP" altLang="en-US" sz="2000"/>
+              <a:t>抽樣機率不明，無法計算精確的抽樣誤差。</a:t>
+            </a:r>
+            <a:endParaRPr lang="en-US" altLang="ja-JP" sz="2000" dirty="0"/>
+          </a:p>
+          <a:p>
+            <a:pPr>
+              <a:lnSpc>
+                <a:spcPct val="150000"/>
+              </a:lnSpc>
+              <a:buFont typeface="Wingdings" pitchFamily="2" charset="2"/>
+              <a:buChar char="l"/>
+            </a:pPr>
+            <a:r>
+              <a:rPr lang="ja-JP" altLang="en-US" sz="2000"/>
+              <a:t>便利抽樣、判斷抽樣（專家抽樣）、滾雪球抽樣、配額抽樣都屬於非機率抽樣。</a:t>
+            </a:r>
+            <a:endParaRPr lang="en-US" altLang="ja-JP" sz="2000" dirty="0"/>
+          </a:p>
+          <a:p>
+            <a:pPr>
+              <a:lnSpc>
+                <a:spcPct val="150000"/>
+              </a:lnSpc>
+              <a:buFont typeface="Wingdings" pitchFamily="2" charset="2"/>
+              <a:buChar char="l"/>
+            </a:pPr>
+            <a:endParaRPr lang="en-US" sz="2000" dirty="0"/>
+          </a:p>
+          <a:p>
+            <a:pPr>
+              <a:buFont typeface="Wingdings" pitchFamily="2" charset="2"/>
+              <a:buChar char="l"/>
+            </a:pPr>
+            <a:endParaRPr lang="en-US" dirty="0"/>
+          </a:p>
+        </p:txBody>
+      </p:sp>
+      <p:sp>
+        <p:nvSpPr>
+          <p:cNvPr id="4" name="Slide Number Placeholder 3">
+            <a:extLst>
+              <a:ext uri="{FF2B5EF4-FFF2-40B4-BE49-F238E27FC236}">
+                <a16:creationId xmlns:a16="http://schemas.microsoft.com/office/drawing/2014/main" id="{C98085D9-FBDD-C940-3F14-8994BAC36532}"/>
               </a:ext>
             </a:extLst>
           </p:cNvPr>
@@ -5875,6 +6520,65 @@
             <a:fld id="{34E21383-B02B-694B-B2AD-A967203CDE86}" type="slidenum">
               <a:rPr lang="en-US" smtClean="0"/>
               <a:t>7</a:t>
+            </a:fld>
+            <a:endParaRPr lang="en-US"/>
+          </a:p>
+        </p:txBody>
+      </p:sp>
+    </p:spTree>
+    <p:extLst>
+      <p:ext uri="{BB962C8B-B14F-4D97-AF65-F5344CB8AC3E}">
+        <p14:creationId xmlns:p14="http://schemas.microsoft.com/office/powerpoint/2010/main" val="397422702"/>
+      </p:ext>
+    </p:extLst>
+  </p:cSld>
+  <p:clrMapOvr>
+    <a:masterClrMapping/>
+  </p:clrMapOvr>
+</p:sld>
+</file>
+
+<file path=ppt/slides/slide8.xml><?xml version="1.0" encoding="utf-8"?>
+<p:sld xmlns:a="http://schemas.openxmlformats.org/drawingml/2006/main" xmlns:r="http://schemas.openxmlformats.org/officeDocument/2006/relationships" xmlns:p="http://schemas.openxmlformats.org/presentationml/2006/main">
+  <p:cSld>
+    <p:spTree>
+      <p:nvGrpSpPr>
+        <p:cNvPr id="1" name=""/>
+        <p:cNvGrpSpPr/>
+        <p:nvPr/>
+      </p:nvGrpSpPr>
+      <p:grpSpPr>
+        <a:xfrm>
+          <a:off x="0" y="0"/>
+          <a:ext cx="0" cy="0"/>
+          <a:chOff x="0" y="0"/>
+          <a:chExt cx="0" cy="0"/>
+        </a:xfrm>
+      </p:grpSpPr>
+      <p:sp>
+        <p:nvSpPr>
+          <p:cNvPr id="2" name="Slide Number Placeholder 1">
+            <a:extLst>
+              <a:ext uri="{FF2B5EF4-FFF2-40B4-BE49-F238E27FC236}">
+                <a16:creationId xmlns:a16="http://schemas.microsoft.com/office/drawing/2014/main" id="{059EBEF9-A064-EC8F-F179-60480554D8D1}"/>
+              </a:ext>
+            </a:extLst>
+          </p:cNvPr>
+          <p:cNvSpPr>
+            <a:spLocks noGrp="1"/>
+          </p:cNvSpPr>
+          <p:nvPr>
+            <p:ph type="sldNum" sz="quarter" idx="12"/>
+          </p:nvPr>
+        </p:nvSpPr>
+        <p:spPr/>
+        <p:txBody>
+          <a:bodyPr/>
+          <a:lstStyle/>
+          <a:p>
+            <a:fld id="{34E21383-B02B-694B-B2AD-A967203CDE86}" type="slidenum">
+              <a:rPr lang="en-US" smtClean="0"/>
+              <a:t>8</a:t>
             </a:fld>
             <a:endParaRPr lang="en-US"/>
           </a:p>
@@ -5923,262 +6627,6 @@
 </p:sld>
 </file>
 
-<file path=ppt/slides/slide8.xml><?xml version="1.0" encoding="utf-8"?>
-<p:sld xmlns:a="http://schemas.openxmlformats.org/drawingml/2006/main" xmlns:r="http://schemas.openxmlformats.org/officeDocument/2006/relationships" xmlns:p="http://schemas.openxmlformats.org/presentationml/2006/main">
-  <p:cSld>
-    <p:spTree>
-      <p:nvGrpSpPr>
-        <p:cNvPr id="1" name=""/>
-        <p:cNvGrpSpPr/>
-        <p:nvPr/>
-      </p:nvGrpSpPr>
-      <p:grpSpPr>
-        <a:xfrm>
-          <a:off x="0" y="0"/>
-          <a:ext cx="0" cy="0"/>
-          <a:chOff x="0" y="0"/>
-          <a:chExt cx="0" cy="0"/>
-        </a:xfrm>
-      </p:grpSpPr>
-      <p:sp>
-        <p:nvSpPr>
-          <p:cNvPr id="2" name="Title 1">
-            <a:extLst>
-              <a:ext uri="{FF2B5EF4-FFF2-40B4-BE49-F238E27FC236}">
-                <a16:creationId xmlns:a16="http://schemas.microsoft.com/office/drawing/2014/main" id="{ED266BC7-D370-DB3B-3586-0BB7D3212D0F}"/>
-              </a:ext>
-            </a:extLst>
-          </p:cNvPr>
-          <p:cNvSpPr>
-            <a:spLocks noGrp="1"/>
-          </p:cNvSpPr>
-          <p:nvPr>
-            <p:ph type="title"/>
-          </p:nvPr>
-        </p:nvSpPr>
-        <p:spPr/>
-        <p:txBody>
-          <a:bodyPr/>
-          <a:lstStyle/>
-          <a:p>
-            <a:r>
-              <a:rPr lang="ja-JP" altLang="en-US"/>
-              <a:t>網路調查的非機率抽樣</a:t>
-            </a:r>
-            <a:endParaRPr lang="en-US" dirty="0"/>
-          </a:p>
-        </p:txBody>
-      </p:sp>
-      <p:sp>
-        <p:nvSpPr>
-          <p:cNvPr id="3" name="Content Placeholder 2">
-            <a:extLst>
-              <a:ext uri="{FF2B5EF4-FFF2-40B4-BE49-F238E27FC236}">
-                <a16:creationId xmlns:a16="http://schemas.microsoft.com/office/drawing/2014/main" id="{4F08E529-29DD-AB2C-94BF-694DBD41AB6D}"/>
-              </a:ext>
-            </a:extLst>
-          </p:cNvPr>
-          <p:cNvSpPr>
-            <a:spLocks noGrp="1"/>
-          </p:cNvSpPr>
-          <p:nvPr>
-            <p:ph idx="1"/>
-          </p:nvPr>
-        </p:nvSpPr>
-        <p:spPr/>
-        <p:txBody>
-          <a:bodyPr>
-            <a:normAutofit fontScale="85000" lnSpcReduction="10000"/>
-          </a:bodyPr>
-          <a:lstStyle/>
-          <a:p>
-            <a:pPr>
-              <a:lnSpc>
-                <a:spcPct val="150000"/>
-              </a:lnSpc>
-              <a:buFont typeface="Wingdings" pitchFamily="2" charset="2"/>
-              <a:buChar char="l"/>
-            </a:pPr>
-            <a:r>
-              <a:rPr lang="ja-JP" altLang="en-US" sz="2000"/>
-              <a:t>自願參與偏差 </a:t>
-            </a:r>
-            <a:r>
-              <a:rPr lang="en-US" altLang="ja-JP" sz="2000" dirty="0"/>
-              <a:t>(Self-Selection Bias)</a:t>
-            </a:r>
-            <a:r>
-              <a:rPr lang="ja-JP" altLang="en-US" sz="2000"/>
-              <a:t>：由對該主題感興趣、有強烈意見，或單純想領取獎勵的人自行決定加入。</a:t>
-            </a:r>
-            <a:endParaRPr lang="en-US" altLang="ja-JP" sz="2000" dirty="0"/>
-          </a:p>
-          <a:p>
-            <a:pPr>
-              <a:lnSpc>
-                <a:spcPct val="150000"/>
-              </a:lnSpc>
-              <a:buFont typeface="Wingdings" pitchFamily="2" charset="2"/>
-              <a:buChar char="l"/>
-            </a:pPr>
-            <a:r>
-              <a:rPr lang="ja-JP" altLang="en-US" sz="2000"/>
-              <a:t>涵蓋誤差 </a:t>
-            </a:r>
-            <a:r>
-              <a:rPr lang="en-US" altLang="ja-JP" sz="2000" dirty="0"/>
-              <a:t>(Coverage Error)</a:t>
-            </a:r>
-            <a:r>
-              <a:rPr lang="ja-JP" altLang="en-US" sz="2000"/>
-              <a:t>：並非所有人都有同等的機會上網或看到調查連結。例如高齡族群、低收入者的上網頻率較低。</a:t>
-            </a:r>
-            <a:endParaRPr lang="en-US" altLang="ja-JP" sz="2000" dirty="0"/>
-          </a:p>
-          <a:p>
-            <a:pPr>
-              <a:lnSpc>
-                <a:spcPct val="150000"/>
-              </a:lnSpc>
-              <a:buFont typeface="Wingdings" pitchFamily="2" charset="2"/>
-              <a:buChar char="l"/>
-            </a:pPr>
-            <a:r>
-              <a:rPr lang="ja-JP" altLang="en-US" sz="2000"/>
-              <a:t>非隨機的「便利性」：研究者通常將連結發布在自己能觸及的社群媒體、論壇或 </a:t>
-            </a:r>
-            <a:r>
-              <a:rPr lang="en-US" altLang="ja-JP" sz="2000" dirty="0"/>
-              <a:t>LINE </a:t>
-            </a:r>
-            <a:r>
-              <a:rPr lang="ja-JP" altLang="en-US" sz="2000"/>
-              <a:t>群組中。受限於研究者的「同溫層」。</a:t>
-            </a:r>
-            <a:endParaRPr lang="en-US" altLang="ja-JP" sz="2000" dirty="0"/>
-          </a:p>
-          <a:p>
-            <a:pPr>
-              <a:lnSpc>
-                <a:spcPct val="150000"/>
-              </a:lnSpc>
-              <a:buFont typeface="Wingdings" pitchFamily="2" charset="2"/>
-              <a:buChar char="l"/>
-            </a:pPr>
-            <a:r>
-              <a:rPr lang="ja-JP" altLang="en-US" sz="2000"/>
-              <a:t>樣本性質難以驗證：</a:t>
-            </a:r>
-          </a:p>
-          <a:p>
-            <a:pPr>
-              <a:lnSpc>
-                <a:spcPct val="150000"/>
-              </a:lnSpc>
-              <a:buFont typeface="Courier New" panose="02070309020205020404" pitchFamily="49" charset="0"/>
-              <a:buChar char="o"/>
-            </a:pPr>
-            <a:r>
-              <a:rPr lang="ja-JP" altLang="en-US" sz="2000"/>
-              <a:t>重複填答： 同一人可能為了獎品多次填寫。</a:t>
-            </a:r>
-          </a:p>
-          <a:p>
-            <a:pPr>
-              <a:lnSpc>
-                <a:spcPct val="150000"/>
-              </a:lnSpc>
-              <a:buFont typeface="Courier New" panose="02070309020205020404" pitchFamily="49" charset="0"/>
-              <a:buChar char="o"/>
-            </a:pPr>
-            <a:r>
-              <a:rPr lang="ja-JP" altLang="en-US" sz="2000"/>
-              <a:t>機器人與無效樣本： </a:t>
-            </a:r>
-            <a:r>
-              <a:rPr lang="en-US" altLang="ja-JP" sz="2000" dirty="0"/>
-              <a:t>AI </a:t>
-            </a:r>
-            <a:r>
-              <a:rPr lang="ja-JP" altLang="en-US" sz="2000"/>
-              <a:t>或自動化程式可能產生大量垃圾數據。</a:t>
-            </a:r>
-          </a:p>
-          <a:p>
-            <a:pPr>
-              <a:lnSpc>
-                <a:spcPct val="150000"/>
-              </a:lnSpc>
-              <a:buFont typeface="Courier New" panose="02070309020205020404" pitchFamily="49" charset="0"/>
-              <a:buChar char="o"/>
-            </a:pPr>
-            <a:r>
-              <a:rPr lang="ja-JP" altLang="en-US" sz="2000"/>
-              <a:t>身分造假： 受訪者可能為了領取獎勵而虛報符合填答問卷條件的年齡或職業。</a:t>
-            </a:r>
-            <a:endParaRPr lang="en-US" altLang="ja-JP" sz="2000" dirty="0"/>
-          </a:p>
-          <a:p>
-            <a:pPr>
-              <a:lnSpc>
-                <a:spcPct val="150000"/>
-              </a:lnSpc>
-              <a:buFont typeface="Wingdings" pitchFamily="2" charset="2"/>
-              <a:buChar char="l"/>
-            </a:pPr>
-            <a:endParaRPr lang="en-US" sz="2000" dirty="0"/>
-          </a:p>
-          <a:p>
-            <a:pPr>
-              <a:buFont typeface="Wingdings" pitchFamily="2" charset="2"/>
-              <a:buChar char="l"/>
-            </a:pPr>
-            <a:endParaRPr lang="en-US" dirty="0"/>
-          </a:p>
-        </p:txBody>
-      </p:sp>
-      <p:sp>
-        <p:nvSpPr>
-          <p:cNvPr id="4" name="Slide Number Placeholder 3">
-            <a:extLst>
-              <a:ext uri="{FF2B5EF4-FFF2-40B4-BE49-F238E27FC236}">
-                <a16:creationId xmlns:a16="http://schemas.microsoft.com/office/drawing/2014/main" id="{C98085D9-FBDD-C940-3F14-8994BAC36532}"/>
-              </a:ext>
-            </a:extLst>
-          </p:cNvPr>
-          <p:cNvSpPr>
-            <a:spLocks noGrp="1"/>
-          </p:cNvSpPr>
-          <p:nvPr>
-            <p:ph type="sldNum" sz="quarter" idx="12"/>
-          </p:nvPr>
-        </p:nvSpPr>
-        <p:spPr/>
-        <p:txBody>
-          <a:bodyPr/>
-          <a:lstStyle/>
-          <a:p>
-            <a:fld id="{34E21383-B02B-694B-B2AD-A967203CDE86}" type="slidenum">
-              <a:rPr lang="en-US" smtClean="0"/>
-              <a:t>8</a:t>
-            </a:fld>
-            <a:endParaRPr lang="en-US"/>
-          </a:p>
-        </p:txBody>
-      </p:sp>
-    </p:spTree>
-    <p:extLst>
-      <p:ext uri="{BB962C8B-B14F-4D97-AF65-F5344CB8AC3E}">
-        <p14:creationId xmlns:p14="http://schemas.microsoft.com/office/powerpoint/2010/main" val="1700727804"/>
-      </p:ext>
-    </p:extLst>
-  </p:cSld>
-  <p:clrMapOvr>
-    <a:masterClrMapping/>
-  </p:clrMapOvr>
-</p:sld>
-</file>
-
 <file path=ppt/slides/slide9.xml><?xml version="1.0" encoding="utf-8"?>
 <p:sld xmlns:a="http://schemas.openxmlformats.org/drawingml/2006/main" xmlns:r="http://schemas.openxmlformats.org/officeDocument/2006/relationships" xmlns:p="http://schemas.openxmlformats.org/presentationml/2006/main">
   <p:cSld>
@@ -6219,462 +6667,180 @@
           <a:p>
             <a:r>
               <a:rPr lang="ja-JP" altLang="en-US"/>
-              <a:t>如何修正網路調查的非機率抽樣？</a:t>
+              <a:t>網路調查的非機率抽樣</a:t>
             </a:r>
             <a:endParaRPr lang="en-US" dirty="0"/>
           </a:p>
         </p:txBody>
       </p:sp>
-      <mc:AlternateContent xmlns:mc="http://schemas.openxmlformats.org/markup-compatibility/2006" xmlns:a14="http://schemas.microsoft.com/office/drawing/2010/main">
-        <mc:Choice Requires="a14">
-          <p:sp>
-            <p:nvSpPr>
-              <p:cNvPr id="3" name="Content Placeholder 2">
-                <a:extLst>
-                  <a:ext uri="{FF2B5EF4-FFF2-40B4-BE49-F238E27FC236}">
-                    <a16:creationId xmlns:a16="http://schemas.microsoft.com/office/drawing/2014/main" id="{4F08E529-29DD-AB2C-94BF-694DBD41AB6D}"/>
-                  </a:ext>
-                </a:extLst>
-              </p:cNvPr>
-              <p:cNvSpPr>
-                <a:spLocks noGrp="1"/>
-              </p:cNvSpPr>
-              <p:nvPr>
-                <p:ph idx="1"/>
-              </p:nvPr>
-            </p:nvSpPr>
-            <p:spPr/>
-            <p:txBody>
-              <a:bodyPr>
-                <a:normAutofit/>
-              </a:bodyPr>
-              <a:lstStyle/>
-              <a:p>
-                <a:pPr>
-                  <a:lnSpc>
-                    <a:spcPct val="150000"/>
-                  </a:lnSpc>
-                  <a:buFont typeface="Wingdings" pitchFamily="2" charset="2"/>
-                  <a:buChar char="q"/>
-                </a:pPr>
-                <a:r>
-                  <a:rPr lang="ja-JP" altLang="en-US" sz="2000"/>
-                  <a:t>配額抽樣 </a:t>
-                </a:r>
-                <a:r>
-                  <a:rPr lang="en-US" altLang="ja-JP" sz="2000" dirty="0"/>
-                  <a:t>(Quota Sampling)</a:t>
-                </a:r>
-                <a:r>
-                  <a:rPr lang="ja-JP" altLang="en-US" sz="2000"/>
-                  <a:t>： 如果資料庫中有足夠的樣本，可以設定性別、年齡比例，一旦某族群收滿足夠的樣本，就停止發送給受訪者。</a:t>
-                </a:r>
-              </a:p>
-              <a:p>
-                <a:pPr>
-                  <a:lnSpc>
-                    <a:spcPct val="150000"/>
-                  </a:lnSpc>
-                  <a:buFont typeface="Wingdings" pitchFamily="2" charset="2"/>
-                  <a:buChar char="q"/>
-                </a:pPr>
-                <a:r>
-                  <a:rPr lang="ja-JP" altLang="en-US" sz="2000"/>
-                  <a:t>加權校正 </a:t>
-                </a:r>
-                <a:r>
-                  <a:rPr lang="en-US" altLang="ja-JP" sz="2000" dirty="0"/>
-                  <a:t>(Weighting)</a:t>
-                </a:r>
-                <a:r>
-                  <a:rPr lang="ja-JP" altLang="en-US" sz="2000"/>
-                  <a:t>： 根據人口普查數據，對受訪者進行事後數學調整。</a:t>
-                </a:r>
-                <a:endParaRPr lang="en-US" altLang="ja-JP" sz="2000" dirty="0"/>
-              </a:p>
-              <a:p>
-                <a:pPr>
-                  <a:lnSpc>
-                    <a:spcPct val="150000"/>
-                  </a:lnSpc>
-                  <a:buFont typeface="Wingdings" pitchFamily="2" charset="2"/>
-                  <a:buChar char="q"/>
-                </a:pPr>
-                <a:r>
-                  <a:rPr lang="ja-JP" altLang="en-US" sz="2000"/>
-                  <a:t>例如：如果用電話訪問招募受訪者，然後寄同意書給受訪者，最後寄問卷給受訪者。這一套過程，有三次的選擇偏誤。</a:t>
-                </a:r>
-                <a:endParaRPr lang="en-US" altLang="ja-JP" sz="2000" dirty="0"/>
-              </a:p>
-              <a:p>
-                <a:pPr marL="742950" lvl="1" indent="-285750">
-                  <a:buFont typeface="Arial" panose="020B0604020202020204" pitchFamily="34" charset="0"/>
-                  <a:buChar char="•"/>
-                </a:pPr>
-                <a14:m>
-                  <m:oMath xmlns:m="http://schemas.openxmlformats.org/officeDocument/2006/math">
-                    <m:sSub>
-                      <m:sSubPr>
-                        <m:ctrlPr>
-                          <a:rPr lang="en-US" i="1" smtClean="0">
-                            <a:latin typeface="Cambria Math" panose="02040503050406030204" pitchFamily="18" charset="0"/>
-                          </a:rPr>
-                        </m:ctrlPr>
-                      </m:sSubPr>
-                      <m:e>
-                        <m:r>
-                          <a:rPr lang="en-US" b="0" i="1" smtClean="0">
-                            <a:latin typeface="Cambria Math" panose="02040503050406030204" pitchFamily="18" charset="0"/>
-                          </a:rPr>
-                          <m:t>𝑆</m:t>
-                        </m:r>
-                      </m:e>
-                      <m:sub>
-                        <m:r>
-                          <a:rPr lang="en-US" b="0" i="1" smtClean="0">
-                            <a:latin typeface="Cambria Math" panose="02040503050406030204" pitchFamily="18" charset="0"/>
-                          </a:rPr>
-                          <m:t>𝑖</m:t>
-                        </m:r>
-                      </m:sub>
-                    </m:sSub>
-                    <m:r>
-                      <a:rPr lang="en-US" b="0" i="1" smtClean="0">
-                        <a:latin typeface="Cambria Math" panose="02040503050406030204" pitchFamily="18" charset="0"/>
-                      </a:rPr>
-                      <m:t>=1</m:t>
-                    </m:r>
-                  </m:oMath>
-                </a14:m>
-                <a:r>
-                  <a:rPr lang="en-US" dirty="0"/>
-                  <a:t>：</a:t>
-                </a:r>
-                <a:r>
-                  <a:rPr lang="ja-JP" altLang="en-US"/>
-                  <a:t>電話樣本「被抽到且完成訪問」（</a:t>
-                </a:r>
-                <a:r>
-                  <a:rPr lang="en-US" dirty="0"/>
-                  <a:t>reference sample）</a:t>
-                </a:r>
-              </a:p>
-              <a:p>
-                <a:pPr marL="742950" lvl="1" indent="-285750">
-                  <a:buFont typeface="Arial" panose="020B0604020202020204" pitchFamily="34" charset="0"/>
-                  <a:buChar char="•"/>
-                </a:pPr>
-                <a14:m>
-                  <m:oMath xmlns:m="http://schemas.openxmlformats.org/officeDocument/2006/math">
-                    <m:sSub>
-                      <m:sSubPr>
-                        <m:ctrlPr>
-                          <a:rPr lang="en-US" i="1" smtClean="0">
-                            <a:latin typeface="Cambria Math" panose="02040503050406030204" pitchFamily="18" charset="0"/>
-                          </a:rPr>
-                        </m:ctrlPr>
-                      </m:sSubPr>
-                      <m:e>
-                        <m:r>
-                          <a:rPr lang="en-US" b="0" i="1" smtClean="0">
-                            <a:latin typeface="Cambria Math" panose="02040503050406030204" pitchFamily="18" charset="0"/>
-                          </a:rPr>
-                          <m:t>𝐽</m:t>
-                        </m:r>
-                      </m:e>
-                      <m:sub>
-                        <m:r>
-                          <a:rPr lang="en-US" b="0" i="1" smtClean="0">
-                            <a:latin typeface="Cambria Math" panose="02040503050406030204" pitchFamily="18" charset="0"/>
-                          </a:rPr>
-                          <m:t>𝑖</m:t>
-                        </m:r>
-                      </m:sub>
-                    </m:sSub>
-                    <m:r>
-                      <a:rPr lang="en-US" b="0" i="1" smtClean="0">
-                        <a:latin typeface="Cambria Math" panose="02040503050406030204" pitchFamily="18" charset="0"/>
-                      </a:rPr>
-                      <m:t>=1 </m:t>
-                    </m:r>
-                  </m:oMath>
-                </a14:m>
-                <a:r>
-                  <a:rPr lang="en-US" dirty="0"/>
-                  <a:t>：</a:t>
-                </a:r>
-                <a:r>
-                  <a:rPr lang="ja-JP" altLang="en-US"/>
-                  <a:t>在電話訪問後「同意加入 </a:t>
-                </a:r>
-                <a:r>
-                  <a:rPr lang="en-US" dirty="0"/>
-                  <a:t>panel」</a:t>
-                </a:r>
-              </a:p>
-              <a:p>
-                <a:pPr marL="742950" lvl="1" indent="-285750">
-                  <a:buFont typeface="Arial" panose="020B0604020202020204" pitchFamily="34" charset="0"/>
-                  <a:buChar char="•"/>
-                </a:pPr>
-                <a14:m>
-                  <m:oMath xmlns:m="http://schemas.openxmlformats.org/officeDocument/2006/math">
-                    <m:sSub>
-                      <m:sSubPr>
-                        <m:ctrlPr>
-                          <a:rPr lang="en-US" i="1" smtClean="0">
-                            <a:latin typeface="Cambria Math" panose="02040503050406030204" pitchFamily="18" charset="0"/>
-                          </a:rPr>
-                        </m:ctrlPr>
-                      </m:sSubPr>
-                      <m:e>
-                        <m:r>
-                          <a:rPr lang="en-US" b="0" i="1" smtClean="0">
-                            <a:latin typeface="Cambria Math" panose="02040503050406030204" pitchFamily="18" charset="0"/>
-                          </a:rPr>
-                          <m:t>𝑅</m:t>
-                        </m:r>
-                      </m:e>
-                      <m:sub>
-                        <m:r>
-                          <a:rPr lang="en-US" b="0" i="1" smtClean="0">
-                            <a:latin typeface="Cambria Math" panose="02040503050406030204" pitchFamily="18" charset="0"/>
-                          </a:rPr>
-                          <m:t>𝑖</m:t>
-                        </m:r>
-                      </m:sub>
-                    </m:sSub>
-                    <m:r>
-                      <a:rPr lang="en-US" b="0" i="1" smtClean="0">
-                        <a:latin typeface="Cambria Math" panose="02040503050406030204" pitchFamily="18" charset="0"/>
-                      </a:rPr>
-                      <m:t>=1 </m:t>
-                    </m:r>
-                  </m:oMath>
-                </a14:m>
-                <a:r>
-                  <a:rPr lang="en-US" dirty="0"/>
-                  <a:t>：</a:t>
-                </a:r>
-                <a:r>
-                  <a:rPr lang="ja-JP" altLang="en-US"/>
-                  <a:t>在同意加入後「實際完成線上問卷」</a:t>
-                </a:r>
-              </a:p>
-              <a:p>
-                <a:r>
-                  <a:rPr lang="ja-JP" altLang="en-US" sz="2100"/>
-                  <a:t>最後資料的集合是：</a:t>
-                </a:r>
-                <a14:m>
-                  <m:oMath xmlns:m="http://schemas.openxmlformats.org/officeDocument/2006/math">
-                    <m:d>
-                      <m:dPr>
-                        <m:begChr m:val="{"/>
-                        <m:endChr m:val="}"/>
-                        <m:ctrlPr>
-                          <a:rPr lang="en-US" altLang="ja-JP" sz="2100" i="1" smtClean="0">
-                            <a:latin typeface="Cambria Math" panose="02040503050406030204" pitchFamily="18" charset="0"/>
-                          </a:rPr>
-                        </m:ctrlPr>
-                      </m:dPr>
-                      <m:e>
-                        <m:r>
-                          <a:rPr lang="en-US" altLang="ja-JP" sz="2100" b="0" i="1" smtClean="0">
-                            <a:latin typeface="Cambria Math" panose="02040503050406030204" pitchFamily="18" charset="0"/>
-                          </a:rPr>
-                          <m:t>𝑖</m:t>
-                        </m:r>
-                        <m:r>
-                          <a:rPr lang="en-US" altLang="ja-JP" sz="2100" b="0" i="1" smtClean="0">
-                            <a:latin typeface="Cambria Math" panose="02040503050406030204" pitchFamily="18" charset="0"/>
-                          </a:rPr>
-                          <m:t>:</m:t>
-                        </m:r>
-                        <m:sSub>
-                          <m:sSubPr>
-                            <m:ctrlPr>
-                              <a:rPr lang="en-US" sz="2400" i="1">
-                                <a:latin typeface="Cambria Math" panose="02040503050406030204" pitchFamily="18" charset="0"/>
-                              </a:rPr>
-                            </m:ctrlPr>
-                          </m:sSubPr>
-                          <m:e>
-                            <m:r>
-                              <a:rPr lang="en-US" sz="2400" i="1">
-                                <a:latin typeface="Cambria Math" panose="02040503050406030204" pitchFamily="18" charset="0"/>
-                              </a:rPr>
-                              <m:t>𝑆</m:t>
-                            </m:r>
-                          </m:e>
-                          <m:sub>
-                            <m:r>
-                              <a:rPr lang="en-US" sz="2400" i="1">
-                                <a:latin typeface="Cambria Math" panose="02040503050406030204" pitchFamily="18" charset="0"/>
-                              </a:rPr>
-                              <m:t>𝑖</m:t>
-                            </m:r>
-                          </m:sub>
-                        </m:sSub>
-                        <m:r>
-                          <a:rPr lang="en-US" sz="2400" i="1">
-                            <a:latin typeface="Cambria Math" panose="02040503050406030204" pitchFamily="18" charset="0"/>
-                          </a:rPr>
-                          <m:t>=1</m:t>
-                        </m:r>
-                        <m:r>
-                          <a:rPr lang="en-US" sz="2400" b="0" i="1" smtClean="0">
-                            <a:latin typeface="Cambria Math" panose="02040503050406030204" pitchFamily="18" charset="0"/>
-                          </a:rPr>
-                          <m:t>,</m:t>
-                        </m:r>
-                        <m:sSub>
-                          <m:sSubPr>
-                            <m:ctrlPr>
-                              <a:rPr lang="en-US" sz="2400" i="1">
-                                <a:latin typeface="Cambria Math" panose="02040503050406030204" pitchFamily="18" charset="0"/>
-                              </a:rPr>
-                            </m:ctrlPr>
-                          </m:sSubPr>
-                          <m:e>
-                            <m:r>
-                              <a:rPr lang="en-US" sz="2400" b="0" i="1" smtClean="0">
-                                <a:latin typeface="Cambria Math" panose="02040503050406030204" pitchFamily="18" charset="0"/>
-                              </a:rPr>
-                              <m:t>𝐽</m:t>
-                            </m:r>
-                          </m:e>
-                          <m:sub>
-                            <m:r>
-                              <a:rPr lang="en-US" sz="2400" i="1">
-                                <a:latin typeface="Cambria Math" panose="02040503050406030204" pitchFamily="18" charset="0"/>
-                              </a:rPr>
-                              <m:t>𝑖</m:t>
-                            </m:r>
-                          </m:sub>
-                        </m:sSub>
-                        <m:r>
-                          <a:rPr lang="en-US" sz="2400" i="1">
-                            <a:latin typeface="Cambria Math" panose="02040503050406030204" pitchFamily="18" charset="0"/>
-                          </a:rPr>
-                          <m:t>=1</m:t>
-                        </m:r>
-                        <m:r>
-                          <a:rPr lang="en-US" sz="2400" b="0" i="1" smtClean="0">
-                            <a:latin typeface="Cambria Math" panose="02040503050406030204" pitchFamily="18" charset="0"/>
-                          </a:rPr>
-                          <m:t>,</m:t>
-                        </m:r>
-                        <m:sSub>
-                          <m:sSubPr>
-                            <m:ctrlPr>
-                              <a:rPr lang="en-US" sz="2400" i="1">
-                                <a:latin typeface="Cambria Math" panose="02040503050406030204" pitchFamily="18" charset="0"/>
-                              </a:rPr>
-                            </m:ctrlPr>
-                          </m:sSubPr>
-                          <m:e>
-                            <m:r>
-                              <a:rPr lang="en-US" sz="2400" b="0" i="1" smtClean="0">
-                                <a:latin typeface="Cambria Math" panose="02040503050406030204" pitchFamily="18" charset="0"/>
-                              </a:rPr>
-                              <m:t>𝑅</m:t>
-                            </m:r>
-                          </m:e>
-                          <m:sub>
-                            <m:r>
-                              <a:rPr lang="en-US" sz="2400" i="1">
-                                <a:latin typeface="Cambria Math" panose="02040503050406030204" pitchFamily="18" charset="0"/>
-                              </a:rPr>
-                              <m:t>𝑖</m:t>
-                            </m:r>
-                          </m:sub>
-                        </m:sSub>
-                        <m:r>
-                          <a:rPr lang="en-US" sz="2400" i="1">
-                            <a:latin typeface="Cambria Math" panose="02040503050406030204" pitchFamily="18" charset="0"/>
-                          </a:rPr>
-                          <m:t>=1</m:t>
-                        </m:r>
-                      </m:e>
-                    </m:d>
-                  </m:oMath>
-                </a14:m>
-                <a:endParaRPr lang="ja-JP" altLang="en-US" sz="2100"/>
-              </a:p>
-              <a:p>
-                <a:endParaRPr lang="en-US" altLang="ja-JP" sz="2000" dirty="0"/>
-              </a:p>
-              <a:p>
-                <a:pPr>
-                  <a:lnSpc>
-                    <a:spcPct val="150000"/>
-                  </a:lnSpc>
-                  <a:buFont typeface="Wingdings" pitchFamily="2" charset="2"/>
-                  <a:buChar char="q"/>
-                </a:pPr>
-                <a:endParaRPr lang="en-US" altLang="ja-JP" sz="2000" dirty="0"/>
-              </a:p>
-              <a:p>
-                <a:pPr>
-                  <a:lnSpc>
-                    <a:spcPct val="150000"/>
-                  </a:lnSpc>
-                  <a:buFont typeface="Wingdings" pitchFamily="2" charset="2"/>
-                  <a:buChar char="l"/>
-                </a:pPr>
-                <a:endParaRPr lang="en-US" sz="2000" dirty="0"/>
-              </a:p>
-              <a:p>
-                <a:pPr>
-                  <a:buFont typeface="Wingdings" pitchFamily="2" charset="2"/>
-                  <a:buChar char="l"/>
-                </a:pPr>
-                <a:endParaRPr lang="en-US" dirty="0"/>
-              </a:p>
-            </p:txBody>
-          </p:sp>
-        </mc:Choice>
-        <mc:Fallback xmlns="">
-          <p:sp>
-            <p:nvSpPr>
-              <p:cNvPr id="3" name="Content Placeholder 2">
-                <a:extLst>
-                  <a:ext uri="{FF2B5EF4-FFF2-40B4-BE49-F238E27FC236}">
-                    <a16:creationId xmlns:a16="http://schemas.microsoft.com/office/drawing/2014/main" id="{4F08E529-29DD-AB2C-94BF-694DBD41AB6D}"/>
-                  </a:ext>
-                </a:extLst>
-              </p:cNvPr>
-              <p:cNvSpPr>
-                <a:spLocks noGrp="1" noRot="1" noChangeAspect="1" noMove="1" noResize="1" noEditPoints="1" noAdjustHandles="1" noChangeArrowheads="1" noChangeShapeType="1" noTextEdit="1"/>
-              </p:cNvSpPr>
-              <p:nvPr>
-                <p:ph idx="1"/>
-              </p:nvPr>
-            </p:nvSpPr>
-            <p:spPr>
-              <a:blipFill>
-                <a:blip r:embed="rId2"/>
-                <a:stretch>
-                  <a:fillRect l="-603"/>
-                </a:stretch>
-              </a:blipFill>
-            </p:spPr>
-            <p:txBody>
-              <a:bodyPr/>
-              <a:lstStyle/>
-              <a:p>
-                <a:r>
-                  <a:rPr lang="en-US">
-                    <a:noFill/>
-                  </a:rPr>
-                  <a:t> </a:t>
-                </a:r>
-              </a:p>
-            </p:txBody>
-          </p:sp>
-        </mc:Fallback>
-      </mc:AlternateContent>
+      <p:sp>
+        <p:nvSpPr>
+          <p:cNvPr id="3" name="Content Placeholder 2">
+            <a:extLst>
+              <a:ext uri="{FF2B5EF4-FFF2-40B4-BE49-F238E27FC236}">
+                <a16:creationId xmlns:a16="http://schemas.microsoft.com/office/drawing/2014/main" id="{4F08E529-29DD-AB2C-94BF-694DBD41AB6D}"/>
+              </a:ext>
+            </a:extLst>
+          </p:cNvPr>
+          <p:cNvSpPr>
+            <a:spLocks noGrp="1"/>
+          </p:cNvSpPr>
+          <p:nvPr>
+            <p:ph idx="1"/>
+          </p:nvPr>
+        </p:nvSpPr>
+        <p:spPr/>
+        <p:txBody>
+          <a:bodyPr>
+            <a:normAutofit fontScale="85000" lnSpcReduction="10000"/>
+          </a:bodyPr>
+          <a:lstStyle/>
+          <a:p>
+            <a:pPr>
+              <a:lnSpc>
+                <a:spcPct val="150000"/>
+              </a:lnSpc>
+              <a:buFont typeface="Wingdings" pitchFamily="2" charset="2"/>
+              <a:buChar char="l"/>
+            </a:pPr>
+            <a:r>
+              <a:rPr lang="ja-JP" altLang="en-US" sz="2000"/>
+              <a:t>自願參與偏差 </a:t>
+            </a:r>
+            <a:r>
+              <a:rPr lang="en-US" altLang="ja-JP" sz="2000" dirty="0"/>
+              <a:t>(Self-Selection Bias)</a:t>
+            </a:r>
+            <a:r>
+              <a:rPr lang="ja-JP" altLang="en-US" sz="2000"/>
+              <a:t>：由對該主題感興趣、有強烈意見，或單純想領取獎勵的人自行決定加入。</a:t>
+            </a:r>
+            <a:endParaRPr lang="en-US" altLang="ja-JP" sz="2000" dirty="0"/>
+          </a:p>
+          <a:p>
+            <a:pPr>
+              <a:lnSpc>
+                <a:spcPct val="150000"/>
+              </a:lnSpc>
+              <a:buFont typeface="Wingdings" pitchFamily="2" charset="2"/>
+              <a:buChar char="l"/>
+            </a:pPr>
+            <a:r>
+              <a:rPr lang="ja-JP" altLang="en-US" sz="2000"/>
+              <a:t>涵蓋誤差 </a:t>
+            </a:r>
+            <a:r>
+              <a:rPr lang="en-US" altLang="ja-JP" sz="2000" dirty="0"/>
+              <a:t>(Coverage Error)</a:t>
+            </a:r>
+            <a:r>
+              <a:rPr lang="ja-JP" altLang="en-US" sz="2000"/>
+              <a:t>：並非所有人都有同等的機會上網或看到調查連結。例如高齡族群、低收入者的上網頻率較低。</a:t>
+            </a:r>
+            <a:endParaRPr lang="en-US" altLang="ja-JP" sz="2000" dirty="0"/>
+          </a:p>
+          <a:p>
+            <a:pPr>
+              <a:lnSpc>
+                <a:spcPct val="150000"/>
+              </a:lnSpc>
+              <a:buFont typeface="Wingdings" pitchFamily="2" charset="2"/>
+              <a:buChar char="l"/>
+            </a:pPr>
+            <a:r>
+              <a:rPr lang="ja-JP" altLang="en-US" sz="2000"/>
+              <a:t>非隨機的「便利性」：研究者通常將連結發布在自己能觸及的社群媒體、論壇或 </a:t>
+            </a:r>
+            <a:r>
+              <a:rPr lang="en-US" altLang="ja-JP" sz="2000" dirty="0"/>
+              <a:t>LINE </a:t>
+            </a:r>
+            <a:r>
+              <a:rPr lang="ja-JP" altLang="en-US" sz="2000"/>
+              <a:t>群組中。受限於研究者的「同溫層」。</a:t>
+            </a:r>
+            <a:endParaRPr lang="en-US" altLang="ja-JP" sz="2000" dirty="0"/>
+          </a:p>
+          <a:p>
+            <a:pPr>
+              <a:lnSpc>
+                <a:spcPct val="150000"/>
+              </a:lnSpc>
+              <a:buFont typeface="Wingdings" pitchFamily="2" charset="2"/>
+              <a:buChar char="l"/>
+            </a:pPr>
+            <a:r>
+              <a:rPr lang="ja-JP" altLang="en-US" sz="2000"/>
+              <a:t>樣本性質難以驗證：</a:t>
+            </a:r>
+          </a:p>
+          <a:p>
+            <a:pPr>
+              <a:lnSpc>
+                <a:spcPct val="150000"/>
+              </a:lnSpc>
+              <a:buFont typeface="Courier New" panose="02070309020205020404" pitchFamily="49" charset="0"/>
+              <a:buChar char="o"/>
+            </a:pPr>
+            <a:r>
+              <a:rPr lang="ja-JP" altLang="en-US" sz="2000"/>
+              <a:t>重複填答： 同一人可能為了獎品多次填寫。</a:t>
+            </a:r>
+          </a:p>
+          <a:p>
+            <a:pPr>
+              <a:lnSpc>
+                <a:spcPct val="150000"/>
+              </a:lnSpc>
+              <a:buFont typeface="Courier New" panose="02070309020205020404" pitchFamily="49" charset="0"/>
+              <a:buChar char="o"/>
+            </a:pPr>
+            <a:r>
+              <a:rPr lang="ja-JP" altLang="en-US" sz="2000"/>
+              <a:t>機器人與無效樣本： </a:t>
+            </a:r>
+            <a:r>
+              <a:rPr lang="en-US" altLang="ja-JP" sz="2000" dirty="0"/>
+              <a:t>AI </a:t>
+            </a:r>
+            <a:r>
+              <a:rPr lang="ja-JP" altLang="en-US" sz="2000"/>
+              <a:t>或自動化程式可能產生大量垃圾數據。</a:t>
+            </a:r>
+          </a:p>
+          <a:p>
+            <a:pPr>
+              <a:lnSpc>
+                <a:spcPct val="150000"/>
+              </a:lnSpc>
+              <a:buFont typeface="Courier New" panose="02070309020205020404" pitchFamily="49" charset="0"/>
+              <a:buChar char="o"/>
+            </a:pPr>
+            <a:r>
+              <a:rPr lang="ja-JP" altLang="en-US" sz="2000"/>
+              <a:t>身分造假： 受訪者可能為了領取獎勵而虛報符合填答問卷條件的年齡或職業。</a:t>
+            </a:r>
+            <a:endParaRPr lang="en-US" altLang="ja-JP" sz="2000" dirty="0"/>
+          </a:p>
+          <a:p>
+            <a:pPr>
+              <a:lnSpc>
+                <a:spcPct val="150000"/>
+              </a:lnSpc>
+              <a:buFont typeface="Wingdings" pitchFamily="2" charset="2"/>
+              <a:buChar char="l"/>
+            </a:pPr>
+            <a:endParaRPr lang="en-US" sz="2000" dirty="0"/>
+          </a:p>
+          <a:p>
+            <a:pPr>
+              <a:buFont typeface="Wingdings" pitchFamily="2" charset="2"/>
+              <a:buChar char="l"/>
+            </a:pPr>
+            <a:endParaRPr lang="en-US" dirty="0"/>
+          </a:p>
+        </p:txBody>
+      </p:sp>
       <p:sp>
         <p:nvSpPr>
           <p:cNvPr id="4" name="Slide Number Placeholder 3">
@@ -6707,7 +6873,7 @@
     </p:spTree>
     <p:extLst>
       <p:ext uri="{BB962C8B-B14F-4D97-AF65-F5344CB8AC3E}">
-        <p14:creationId xmlns:p14="http://schemas.microsoft.com/office/powerpoint/2010/main" val="3836497003"/>
+        <p14:creationId xmlns:p14="http://schemas.microsoft.com/office/powerpoint/2010/main" val="1700727804"/>
       </p:ext>
     </p:extLst>
   </p:cSld>

--- a/投影片/民意與調查Week5.pptx
+++ b/投影片/民意與調查Week5.pptx
@@ -5,7 +5,7 @@
     <p:sldMasterId id="2147483648" r:id="rId1"/>
   </p:sldMasterIdLst>
   <p:notesMasterIdLst>
-    <p:notesMasterId r:id="rId14"/>
+    <p:notesMasterId r:id="rId20"/>
   </p:notesMasterIdLst>
   <p:sldIdLst>
     <p:sldId id="256" r:id="rId2"/>
@@ -13,13 +13,19 @@
     <p:sldId id="260" r:id="rId4"/>
     <p:sldId id="271" r:id="rId5"/>
     <p:sldId id="264" r:id="rId6"/>
-    <p:sldId id="265" r:id="rId7"/>
-    <p:sldId id="266" r:id="rId8"/>
-    <p:sldId id="267" r:id="rId9"/>
-    <p:sldId id="268" r:id="rId10"/>
-    <p:sldId id="269" r:id="rId11"/>
-    <p:sldId id="270" r:id="rId12"/>
-    <p:sldId id="258" r:id="rId13"/>
+    <p:sldId id="273" r:id="rId7"/>
+    <p:sldId id="274" r:id="rId8"/>
+    <p:sldId id="275" r:id="rId9"/>
+    <p:sldId id="276" r:id="rId10"/>
+    <p:sldId id="277" r:id="rId11"/>
+    <p:sldId id="272" r:id="rId12"/>
+    <p:sldId id="265" r:id="rId13"/>
+    <p:sldId id="266" r:id="rId14"/>
+    <p:sldId id="267" r:id="rId15"/>
+    <p:sldId id="268" r:id="rId16"/>
+    <p:sldId id="269" r:id="rId17"/>
+    <p:sldId id="270" r:id="rId18"/>
+    <p:sldId id="258" r:id="rId19"/>
   </p:sldIdLst>
   <p:sldSz cx="12192000" cy="6858000"/>
   <p:notesSz cx="6858000" cy="9144000"/>
@@ -208,7 +214,7 @@
           <a:p>
             <a:fld id="{308549C9-F1F2-A344-9318-AC3AB4654B7E}" type="datetimeFigureOut">
               <a:rPr lang="en-US" smtClean="0"/>
-              <a:t>3/23/26</a:t>
+              <a:t>3/24/26</a:t>
             </a:fld>
             <a:endParaRPr lang="en-US"/>
           </a:p>
@@ -622,7 +628,7 @@
           <a:p>
             <a:fld id="{0ECB731F-7F54-EF4E-BC14-D4454C95FF4D}" type="datetime1">
               <a:rPr lang="en-US" smtClean="0"/>
-              <a:t>3/23/26</a:t>
+              <a:t>3/24/26</a:t>
             </a:fld>
             <a:endParaRPr lang="en-US"/>
           </a:p>
@@ -820,7 +826,7 @@
           <a:p>
             <a:fld id="{5FC0AAEB-F940-CA44-B742-2110711973A7}" type="datetime1">
               <a:rPr lang="en-US" smtClean="0"/>
-              <a:t>3/23/26</a:t>
+              <a:t>3/24/26</a:t>
             </a:fld>
             <a:endParaRPr lang="en-US"/>
           </a:p>
@@ -1028,7 +1034,7 @@
           <a:p>
             <a:fld id="{0C0FC7EA-A73C-4146-9B14-54C11597AA40}" type="datetime1">
               <a:rPr lang="en-US" smtClean="0"/>
-              <a:t>3/23/26</a:t>
+              <a:t>3/24/26</a:t>
             </a:fld>
             <a:endParaRPr lang="en-US"/>
           </a:p>
@@ -1226,7 +1232,7 @@
           <a:p>
             <a:fld id="{24943121-CDD1-174D-9095-06B3974B3CC1}" type="datetime1">
               <a:rPr lang="en-US" smtClean="0"/>
-              <a:t>3/23/26</a:t>
+              <a:t>3/24/26</a:t>
             </a:fld>
             <a:endParaRPr lang="en-US"/>
           </a:p>
@@ -1501,7 +1507,7 @@
           <a:p>
             <a:fld id="{21F2BAF9-EAD3-1641-87AF-ADC71D8222CD}" type="datetime1">
               <a:rPr lang="en-US" smtClean="0"/>
-              <a:t>3/23/26</a:t>
+              <a:t>3/24/26</a:t>
             </a:fld>
             <a:endParaRPr lang="en-US"/>
           </a:p>
@@ -1766,7 +1772,7 @@
           <a:p>
             <a:fld id="{F8F7A49D-4C23-6A49-AF9D-C0E1C1130921}" type="datetime1">
               <a:rPr lang="en-US" smtClean="0"/>
-              <a:t>3/23/26</a:t>
+              <a:t>3/24/26</a:t>
             </a:fld>
             <a:endParaRPr lang="en-US"/>
           </a:p>
@@ -2178,7 +2184,7 @@
           <a:p>
             <a:fld id="{9F516F59-8951-4749-B49C-6C88C0B4B6BD}" type="datetime1">
               <a:rPr lang="en-US" smtClean="0"/>
-              <a:t>3/23/26</a:t>
+              <a:t>3/24/26</a:t>
             </a:fld>
             <a:endParaRPr lang="en-US"/>
           </a:p>
@@ -2319,7 +2325,7 @@
           <a:p>
             <a:fld id="{CA82BBDF-C485-174D-8051-FF3ED3DF33C6}" type="datetime1">
               <a:rPr lang="en-US" smtClean="0"/>
-              <a:t>3/23/26</a:t>
+              <a:t>3/24/26</a:t>
             </a:fld>
             <a:endParaRPr lang="en-US"/>
           </a:p>
@@ -2432,7 +2438,7 @@
           <a:p>
             <a:fld id="{3CA316C8-35EA-C448-A7DB-295F753FB635}" type="datetime1">
               <a:rPr lang="en-US" smtClean="0"/>
-              <a:t>3/23/26</a:t>
+              <a:t>3/24/26</a:t>
             </a:fld>
             <a:endParaRPr lang="en-US"/>
           </a:p>
@@ -2743,7 +2749,7 @@
           <a:p>
             <a:fld id="{3EBA6818-685C-B142-BE10-A6D54A85D7FF}" type="datetime1">
               <a:rPr lang="en-US" smtClean="0"/>
-              <a:t>3/23/26</a:t>
+              <a:t>3/24/26</a:t>
             </a:fld>
             <a:endParaRPr lang="en-US"/>
           </a:p>
@@ -3031,7 +3037,7 @@
           <a:p>
             <a:fld id="{D444D57B-5B66-2F49-AB7C-362DD22B45D8}" type="datetime1">
               <a:rPr lang="en-US" smtClean="0"/>
-              <a:t>3/23/26</a:t>
+              <a:t>3/24/26</a:t>
             </a:fld>
             <a:endParaRPr lang="en-US"/>
           </a:p>
@@ -3272,7 +3278,7 @@
           <a:p>
             <a:fld id="{4025DC53-D744-A54C-8957-51F9F93FF803}" type="datetime1">
               <a:rPr lang="en-US" smtClean="0"/>
-              <a:t>3/23/26</a:t>
+              <a:t>3/24/26</a:t>
             </a:fld>
             <a:endParaRPr lang="en-US"/>
           </a:p>
@@ -3789,6 +3795,2693 @@
       </p:grpSpPr>
       <p:sp>
         <p:nvSpPr>
+          <p:cNvPr id="4" name="標題 3">
+            <a:extLst>
+              <a:ext uri="{FF2B5EF4-FFF2-40B4-BE49-F238E27FC236}">
+                <a16:creationId xmlns:a16="http://schemas.microsoft.com/office/drawing/2014/main" id="{748C4BE4-7B96-743F-FB37-78B98C65A130}"/>
+              </a:ext>
+            </a:extLst>
+          </p:cNvPr>
+          <p:cNvSpPr>
+            <a:spLocks noGrp="1"/>
+          </p:cNvSpPr>
+          <p:nvPr>
+            <p:ph type="title"/>
+          </p:nvPr>
+        </p:nvSpPr>
+        <p:spPr/>
+        <p:txBody>
+          <a:bodyPr/>
+          <a:lstStyle/>
+          <a:p>
+            <a:r>
+              <a:rPr lang="ja-JP" altLang="en-US"/>
+              <a:t>機率抽樣的元素（五）</a:t>
+            </a:r>
+            <a:endParaRPr lang="zh-TW" altLang="en-US" dirty="0"/>
+          </a:p>
+        </p:txBody>
+      </p:sp>
+      <p:sp>
+        <p:nvSpPr>
+          <p:cNvPr id="5" name="內容版面配置區 4">
+            <a:extLst>
+              <a:ext uri="{FF2B5EF4-FFF2-40B4-BE49-F238E27FC236}">
+                <a16:creationId xmlns:a16="http://schemas.microsoft.com/office/drawing/2014/main" id="{546C7FE0-E2B6-85E4-2700-04A06C4B71D2}"/>
+              </a:ext>
+            </a:extLst>
+          </p:cNvPr>
+          <p:cNvSpPr>
+            <a:spLocks noGrp="1"/>
+          </p:cNvSpPr>
+          <p:nvPr>
+            <p:ph idx="1"/>
+          </p:nvPr>
+        </p:nvSpPr>
+        <p:spPr/>
+        <p:txBody>
+          <a:bodyPr/>
+          <a:lstStyle/>
+          <a:p>
+            <a:endParaRPr lang="zh-TW" altLang="en-US" dirty="0"/>
+          </a:p>
+        </p:txBody>
+      </p:sp>
+      <p:sp>
+        <p:nvSpPr>
+          <p:cNvPr id="2" name="投影片編號版面配置區 1">
+            <a:extLst>
+              <a:ext uri="{FF2B5EF4-FFF2-40B4-BE49-F238E27FC236}">
+                <a16:creationId xmlns:a16="http://schemas.microsoft.com/office/drawing/2014/main" id="{48E739CE-D578-4E0C-7CD3-E1A196D863B3}"/>
+              </a:ext>
+            </a:extLst>
+          </p:cNvPr>
+          <p:cNvSpPr>
+            <a:spLocks noGrp="1"/>
+          </p:cNvSpPr>
+          <p:nvPr>
+            <p:ph type="sldNum" sz="quarter" idx="12"/>
+          </p:nvPr>
+        </p:nvSpPr>
+        <p:spPr/>
+        <p:txBody>
+          <a:bodyPr/>
+          <a:lstStyle/>
+          <a:p>
+            <a:fld id="{34E21383-B02B-694B-B2AD-A967203CDE86}" type="slidenum">
+              <a:rPr lang="en-US" smtClean="0"/>
+              <a:t>10</a:t>
+            </a:fld>
+            <a:endParaRPr lang="en-US"/>
+          </a:p>
+        </p:txBody>
+      </p:sp>
+      <p:graphicFrame>
+        <p:nvGraphicFramePr>
+          <p:cNvPr id="3" name="表格 2">
+            <a:extLst>
+              <a:ext uri="{FF2B5EF4-FFF2-40B4-BE49-F238E27FC236}">
+                <a16:creationId xmlns:a16="http://schemas.microsoft.com/office/drawing/2014/main" id="{58ABDC07-D2D8-76EB-255B-5B03BE0D1E35}"/>
+              </a:ext>
+            </a:extLst>
+          </p:cNvPr>
+          <p:cNvGraphicFramePr>
+            <a:graphicFrameLocks noGrp="1"/>
+          </p:cNvGraphicFramePr>
+          <p:nvPr/>
+        </p:nvGraphicFramePr>
+        <p:xfrm>
+          <a:off x="838200" y="2553494"/>
+          <a:ext cx="10515599" cy="2895600"/>
+        </p:xfrm>
+        <a:graphic>
+          <a:graphicData uri="http://schemas.openxmlformats.org/drawingml/2006/table">
+            <a:tbl>
+              <a:tblPr/>
+              <a:tblGrid>
+                <a:gridCol w="2695548">
+                  <a:extLst>
+                    <a:ext uri="{9D8B030D-6E8A-4147-A177-3AD203B41FA5}">
+                      <a16:colId xmlns:a16="http://schemas.microsoft.com/office/drawing/2014/main" val="1092537034"/>
+                    </a:ext>
+                  </a:extLst>
+                </a:gridCol>
+                <a:gridCol w="2695548">
+                  <a:extLst>
+                    <a:ext uri="{9D8B030D-6E8A-4147-A177-3AD203B41FA5}">
+                      <a16:colId xmlns:a16="http://schemas.microsoft.com/office/drawing/2014/main" val="4071730486"/>
+                    </a:ext>
+                  </a:extLst>
+                </a:gridCol>
+                <a:gridCol w="2695548">
+                  <a:extLst>
+                    <a:ext uri="{9D8B030D-6E8A-4147-A177-3AD203B41FA5}">
+                      <a16:colId xmlns:a16="http://schemas.microsoft.com/office/drawing/2014/main" val="555145253"/>
+                    </a:ext>
+                  </a:extLst>
+                </a:gridCol>
+                <a:gridCol w="2428955">
+                  <a:extLst>
+                    <a:ext uri="{9D8B030D-6E8A-4147-A177-3AD203B41FA5}">
+                      <a16:colId xmlns:a16="http://schemas.microsoft.com/office/drawing/2014/main" val="3059292820"/>
+                    </a:ext>
+                  </a:extLst>
+                </a:gridCol>
+              </a:tblGrid>
+              <a:tr h="0">
+                <a:tc>
+                  <a:txBody>
+                    <a:bodyPr/>
+                    <a:lstStyle/>
+                    <a:p>
+                      <a:pPr rtl="0"/>
+                      <a:r>
+                        <a:rPr lang="zh-TW" altLang="en-US" b="1">
+                          <a:solidFill>
+                            <a:srgbClr val="1F1F1F"/>
+                          </a:solidFill>
+                          <a:effectLst/>
+                          <a:latin typeface="Google Sans Text"/>
+                        </a:rPr>
+                        <a:t>組合</a:t>
+                      </a:r>
+                      <a:endParaRPr lang="zh-TW" altLang="en-US">
+                        <a:solidFill>
+                          <a:srgbClr val="1F1F1F"/>
+                        </a:solidFill>
+                        <a:effectLst/>
+                        <a:latin typeface="Google Sans Text"/>
+                      </a:endParaRPr>
+                    </a:p>
+                  </a:txBody>
+                  <a:tcPr marR="114300" marT="152400" marB="152400" anchor="ctr">
+                    <a:lnL w="9525" cap="flat" cmpd="sng" algn="ctr">
+                      <a:solidFill>
+                        <a:schemeClr val="bg1"/>
+                      </a:solidFill>
+                      <a:prstDash val="solid"/>
+                      <a:round/>
+                      <a:headEnd type="none" w="med" len="med"/>
+                      <a:tailEnd type="none" w="med" len="med"/>
+                    </a:lnL>
+                    <a:lnR w="9525" cap="flat" cmpd="sng" algn="ctr">
+                      <a:solidFill>
+                        <a:schemeClr val="bg1"/>
+                      </a:solidFill>
+                      <a:prstDash val="solid"/>
+                      <a:round/>
+                      <a:headEnd type="none" w="med" len="med"/>
+                      <a:tailEnd type="none" w="med" len="med"/>
+                    </a:lnR>
+                    <a:lnT w="9525" cap="flat" cmpd="sng" algn="ctr">
+                      <a:solidFill>
+                        <a:schemeClr val="bg1"/>
+                      </a:solidFill>
+                      <a:prstDash val="solid"/>
+                      <a:round/>
+                      <a:headEnd type="none" w="med" len="med"/>
+                      <a:tailEnd type="none" w="med" len="med"/>
+                    </a:lnT>
+                    <a:lnB w="9525" cap="flat" cmpd="sng" algn="ctr">
+                      <a:solidFill>
+                        <a:schemeClr val="bg1"/>
+                      </a:solidFill>
+                      <a:prstDash val="solid"/>
+                      <a:round/>
+                      <a:headEnd type="none" w="med" len="med"/>
+                      <a:tailEnd type="none" w="med" len="med"/>
+                    </a:lnB>
+                    <a:noFill/>
+                  </a:tcPr>
+                </a:tc>
+                <a:tc>
+                  <a:txBody>
+                    <a:bodyPr/>
+                    <a:lstStyle/>
+                    <a:p>
+                      <a:pPr rtl="0"/>
+                      <a:r>
+                        <a:rPr lang="en" b="1">
+                          <a:solidFill>
+                            <a:srgbClr val="1F1F1F"/>
+                          </a:solidFill>
+                          <a:effectLst/>
+                          <a:latin typeface="Google Sans Text"/>
+                        </a:rPr>
+                        <a:t>H-T </a:t>
+                      </a:r>
+                      <a:r>
+                        <a:rPr lang="zh-TW" altLang="en-US" b="1">
+                          <a:solidFill>
+                            <a:srgbClr val="1F1F1F"/>
+                          </a:solidFill>
+                          <a:effectLst/>
+                          <a:latin typeface="Google Sans Text"/>
+                        </a:rPr>
+                        <a:t>估計值 </a:t>
+                      </a:r>
+                      <a:r>
+                        <a:rPr lang="en-US" altLang="zh-TW" b="1">
+                          <a:solidFill>
+                            <a:srgbClr val="1F1F1F"/>
+                          </a:solidFill>
+                          <a:effectLst/>
+                          <a:latin typeface="Google Sans Text"/>
+                        </a:rPr>
+                        <a:t>(</a:t>
+                      </a:r>
+                      <a:r>
+                        <a:rPr lang="en" b="1">
+                          <a:solidFill>
+                            <a:srgbClr val="1F1F1F"/>
+                          </a:solidFill>
+                          <a:effectLst/>
+                          <a:latin typeface="Google Sans Text"/>
+                        </a:rPr>
+                        <a:t>Y^)</a:t>
+                      </a:r>
+                      <a:endParaRPr lang="en">
+                        <a:solidFill>
+                          <a:srgbClr val="1F1F1F"/>
+                        </a:solidFill>
+                        <a:effectLst/>
+                        <a:latin typeface="Google Sans Text"/>
+                      </a:endParaRPr>
+                    </a:p>
+                  </a:txBody>
+                  <a:tcPr marR="114300" marT="152400" marB="152400" anchor="ctr">
+                    <a:lnL w="9525" cap="flat" cmpd="sng" algn="ctr">
+                      <a:solidFill>
+                        <a:schemeClr val="bg1"/>
+                      </a:solidFill>
+                      <a:prstDash val="solid"/>
+                      <a:round/>
+                      <a:headEnd type="none" w="med" len="med"/>
+                      <a:tailEnd type="none" w="med" len="med"/>
+                    </a:lnL>
+                    <a:lnR w="9525" cap="flat" cmpd="sng" algn="ctr">
+                      <a:solidFill>
+                        <a:schemeClr val="bg1"/>
+                      </a:solidFill>
+                      <a:prstDash val="solid"/>
+                      <a:round/>
+                      <a:headEnd type="none" w="med" len="med"/>
+                      <a:tailEnd type="none" w="med" len="med"/>
+                    </a:lnR>
+                    <a:lnT w="9525" cap="flat" cmpd="sng" algn="ctr">
+                      <a:solidFill>
+                        <a:schemeClr val="bg1"/>
+                      </a:solidFill>
+                      <a:prstDash val="solid"/>
+                      <a:round/>
+                      <a:headEnd type="none" w="med" len="med"/>
+                      <a:tailEnd type="none" w="med" len="med"/>
+                    </a:lnT>
+                    <a:lnB w="9525" cap="flat" cmpd="sng" algn="ctr">
+                      <a:solidFill>
+                        <a:schemeClr val="bg1"/>
+                      </a:solidFill>
+                      <a:prstDash val="solid"/>
+                      <a:round/>
+                      <a:headEnd type="none" w="med" len="med"/>
+                      <a:tailEnd type="none" w="med" len="med"/>
+                    </a:lnB>
+                    <a:noFill/>
+                  </a:tcPr>
+                </a:tc>
+                <a:tc>
+                  <a:txBody>
+                    <a:bodyPr/>
+                    <a:lstStyle/>
+                    <a:p>
+                      <a:pPr rtl="0"/>
+                      <a:r>
+                        <a:rPr lang="zh-TW" altLang="en-US" b="1">
+                          <a:solidFill>
+                            <a:srgbClr val="1F1F1F"/>
+                          </a:solidFill>
+                          <a:effectLst/>
+                          <a:latin typeface="Google Sans Text"/>
+                        </a:rPr>
+                        <a:t>發生機率 </a:t>
+                      </a:r>
+                      <a:r>
+                        <a:rPr lang="en-US" altLang="zh-TW" b="1">
+                          <a:solidFill>
+                            <a:srgbClr val="1F1F1F"/>
+                          </a:solidFill>
+                          <a:effectLst/>
+                          <a:latin typeface="Google Sans Text"/>
+                        </a:rPr>
+                        <a:t>(</a:t>
+                      </a:r>
+                      <a:r>
+                        <a:rPr lang="en" b="1">
+                          <a:solidFill>
+                            <a:srgbClr val="1F1F1F"/>
+                          </a:solidFill>
+                          <a:effectLst/>
+                          <a:latin typeface="Google Sans Text"/>
+                        </a:rPr>
+                        <a:t>P)</a:t>
+                      </a:r>
+                      <a:endParaRPr lang="en">
+                        <a:solidFill>
+                          <a:srgbClr val="1F1F1F"/>
+                        </a:solidFill>
+                        <a:effectLst/>
+                        <a:latin typeface="Google Sans Text"/>
+                      </a:endParaRPr>
+                    </a:p>
+                  </a:txBody>
+                  <a:tcPr marR="114300" marT="152400" marB="152400" anchor="ctr">
+                    <a:lnL w="9525" cap="flat" cmpd="sng" algn="ctr">
+                      <a:solidFill>
+                        <a:schemeClr val="bg1"/>
+                      </a:solidFill>
+                      <a:prstDash val="solid"/>
+                      <a:round/>
+                      <a:headEnd type="none" w="med" len="med"/>
+                      <a:tailEnd type="none" w="med" len="med"/>
+                    </a:lnL>
+                    <a:lnR w="9525" cap="flat" cmpd="sng" algn="ctr">
+                      <a:solidFill>
+                        <a:schemeClr val="bg1"/>
+                      </a:solidFill>
+                      <a:prstDash val="solid"/>
+                      <a:round/>
+                      <a:headEnd type="none" w="med" len="med"/>
+                      <a:tailEnd type="none" w="med" len="med"/>
+                    </a:lnR>
+                    <a:lnT w="9525" cap="flat" cmpd="sng" algn="ctr">
+                      <a:solidFill>
+                        <a:schemeClr val="bg1"/>
+                      </a:solidFill>
+                      <a:prstDash val="solid"/>
+                      <a:round/>
+                      <a:headEnd type="none" w="med" len="med"/>
+                      <a:tailEnd type="none" w="med" len="med"/>
+                    </a:lnT>
+                    <a:lnB w="9525" cap="flat" cmpd="sng" algn="ctr">
+                      <a:solidFill>
+                        <a:schemeClr val="bg1"/>
+                      </a:solidFill>
+                      <a:prstDash val="solid"/>
+                      <a:round/>
+                      <a:headEnd type="none" w="med" len="med"/>
+                      <a:tailEnd type="none" w="med" len="med"/>
+                    </a:lnB>
+                    <a:noFill/>
+                  </a:tcPr>
+                </a:tc>
+                <a:tc>
+                  <a:txBody>
+                    <a:bodyPr/>
+                    <a:lstStyle/>
+                    <a:p>
+                      <a:pPr rtl="0"/>
+                      <a:r>
+                        <a:rPr lang="zh-TW" altLang="en-US" b="1">
+                          <a:solidFill>
+                            <a:srgbClr val="1F1F1F"/>
+                          </a:solidFill>
+                          <a:effectLst/>
+                          <a:latin typeface="Google Sans Text"/>
+                        </a:rPr>
+                        <a:t>加權結果 </a:t>
+                      </a:r>
+                      <a:r>
+                        <a:rPr lang="en-US" altLang="zh-TW" b="1">
+                          <a:solidFill>
+                            <a:srgbClr val="1F1F1F"/>
+                          </a:solidFill>
+                          <a:effectLst/>
+                          <a:latin typeface="Google Sans Text"/>
+                        </a:rPr>
+                        <a:t>(</a:t>
+                      </a:r>
+                      <a:r>
+                        <a:rPr lang="en" b="1">
+                          <a:solidFill>
+                            <a:srgbClr val="1F1F1F"/>
+                          </a:solidFill>
+                          <a:effectLst/>
+                          <a:latin typeface="Google Sans Text"/>
+                        </a:rPr>
+                        <a:t>Y^×P)</a:t>
+                      </a:r>
+                      <a:endParaRPr lang="en">
+                        <a:solidFill>
+                          <a:srgbClr val="1F1F1F"/>
+                        </a:solidFill>
+                        <a:effectLst/>
+                        <a:latin typeface="Google Sans Text"/>
+                      </a:endParaRPr>
+                    </a:p>
+                  </a:txBody>
+                  <a:tcPr marT="152400" marB="152400" anchor="ctr">
+                    <a:lnL w="9525" cap="flat" cmpd="sng" algn="ctr">
+                      <a:solidFill>
+                        <a:schemeClr val="bg1"/>
+                      </a:solidFill>
+                      <a:prstDash val="solid"/>
+                      <a:round/>
+                      <a:headEnd type="none" w="med" len="med"/>
+                      <a:tailEnd type="none" w="med" len="med"/>
+                    </a:lnL>
+                    <a:lnR w="9525" cap="flat" cmpd="sng" algn="ctr">
+                      <a:solidFill>
+                        <a:schemeClr val="bg1"/>
+                      </a:solidFill>
+                      <a:prstDash val="solid"/>
+                      <a:round/>
+                      <a:headEnd type="none" w="med" len="med"/>
+                      <a:tailEnd type="none" w="med" len="med"/>
+                    </a:lnR>
+                    <a:lnT w="9525" cap="flat" cmpd="sng" algn="ctr">
+                      <a:solidFill>
+                        <a:schemeClr val="bg1"/>
+                      </a:solidFill>
+                      <a:prstDash val="solid"/>
+                      <a:round/>
+                      <a:headEnd type="none" w="med" len="med"/>
+                      <a:tailEnd type="none" w="med" len="med"/>
+                    </a:lnT>
+                    <a:lnB w="9525" cap="flat" cmpd="sng" algn="ctr">
+                      <a:solidFill>
+                        <a:schemeClr val="bg1"/>
+                      </a:solidFill>
+                      <a:prstDash val="solid"/>
+                      <a:round/>
+                      <a:headEnd type="none" w="med" len="med"/>
+                      <a:tailEnd type="none" w="med" len="med"/>
+                    </a:lnB>
+                    <a:noFill/>
+                  </a:tcPr>
+                </a:tc>
+                <a:extLst>
+                  <a:ext uri="{0D108BD9-81ED-4DB2-BD59-A6C34878D82A}">
+                    <a16:rowId xmlns:a16="http://schemas.microsoft.com/office/drawing/2014/main" val="1439181357"/>
+                  </a:ext>
+                </a:extLst>
+              </a:tr>
+              <a:tr h="0">
+                <a:tc>
+                  <a:txBody>
+                    <a:bodyPr/>
+                    <a:lstStyle/>
+                    <a:p>
+                      <a:pPr rtl="0"/>
+                      <a:r>
+                        <a:rPr lang="en-US" altLang="zh-TW" b="1" dirty="0">
+                          <a:solidFill>
+                            <a:srgbClr val="1F1F1F"/>
+                          </a:solidFill>
+                          <a:effectLst/>
+                          <a:latin typeface="Google Sans Text"/>
+                        </a:rPr>
+                        <a:t>2 </a:t>
+                      </a:r>
+                      <a:r>
+                        <a:rPr lang="zh-TW" altLang="en-US" b="1" dirty="0">
+                          <a:solidFill>
+                            <a:srgbClr val="1F1F1F"/>
+                          </a:solidFill>
+                          <a:effectLst/>
+                          <a:latin typeface="Google Sans Text"/>
+                        </a:rPr>
+                        <a:t>富人</a:t>
+                      </a:r>
+                      <a:endParaRPr lang="zh-TW" altLang="en-US" dirty="0">
+                        <a:solidFill>
+                          <a:srgbClr val="1F1F1F"/>
+                        </a:solidFill>
+                        <a:effectLst/>
+                        <a:latin typeface="Google Sans Text"/>
+                      </a:endParaRPr>
+                    </a:p>
+                  </a:txBody>
+                  <a:tcPr marR="114300" marT="152400" marB="152400" anchor="ctr">
+                    <a:lnL w="9525" cap="flat" cmpd="sng" algn="ctr">
+                      <a:solidFill>
+                        <a:schemeClr val="bg1"/>
+                      </a:solidFill>
+                      <a:prstDash val="solid"/>
+                      <a:round/>
+                      <a:headEnd type="none" w="med" len="med"/>
+                      <a:tailEnd type="none" w="med" len="med"/>
+                    </a:lnL>
+                    <a:lnR w="9525" cap="flat" cmpd="sng" algn="ctr">
+                      <a:solidFill>
+                        <a:schemeClr val="bg1"/>
+                      </a:solidFill>
+                      <a:prstDash val="solid"/>
+                      <a:round/>
+                      <a:headEnd type="none" w="med" len="med"/>
+                      <a:tailEnd type="none" w="med" len="med"/>
+                    </a:lnR>
+                    <a:lnT w="9525" cap="flat" cmpd="sng" algn="ctr">
+                      <a:solidFill>
+                        <a:schemeClr val="bg1"/>
+                      </a:solidFill>
+                      <a:prstDash val="solid"/>
+                      <a:round/>
+                      <a:headEnd type="none" w="med" len="med"/>
+                      <a:tailEnd type="none" w="med" len="med"/>
+                    </a:lnT>
+                    <a:lnB w="9525" cap="flat" cmpd="sng" algn="ctr">
+                      <a:solidFill>
+                        <a:schemeClr val="bg1"/>
+                      </a:solidFill>
+                      <a:prstDash val="solid"/>
+                      <a:round/>
+                      <a:headEnd type="none" w="med" len="med"/>
+                      <a:tailEnd type="none" w="med" len="med"/>
+                    </a:lnB>
+                    <a:noFill/>
+                  </a:tcPr>
+                </a:tc>
+                <a:tc>
+                  <a:txBody>
+                    <a:bodyPr/>
+                    <a:lstStyle/>
+                    <a:p>
+                      <a:pPr rtl="0"/>
+                      <a:r>
+                        <a:rPr lang="en-US" altLang="zh-TW">
+                          <a:solidFill>
+                            <a:srgbClr val="1F1F1F"/>
+                          </a:solidFill>
+                          <a:effectLst/>
+                          <a:latin typeface="Google Sans Text"/>
+                        </a:rPr>
+                        <a:t>850 </a:t>
+                      </a:r>
+                      <a:r>
+                        <a:rPr lang="zh-TW" altLang="en-US">
+                          <a:solidFill>
+                            <a:srgbClr val="1F1F1F"/>
+                          </a:solidFill>
+                          <a:effectLst/>
+                          <a:latin typeface="Google Sans Text"/>
+                        </a:rPr>
+                        <a:t>萬</a:t>
+                      </a:r>
+                    </a:p>
+                  </a:txBody>
+                  <a:tcPr marR="114300" marT="152400" marB="152400" anchor="ctr">
+                    <a:lnL w="9525" cap="flat" cmpd="sng" algn="ctr">
+                      <a:solidFill>
+                        <a:schemeClr val="bg1"/>
+                      </a:solidFill>
+                      <a:prstDash val="solid"/>
+                      <a:round/>
+                      <a:headEnd type="none" w="med" len="med"/>
+                      <a:tailEnd type="none" w="med" len="med"/>
+                    </a:lnL>
+                    <a:lnR w="9525" cap="flat" cmpd="sng" algn="ctr">
+                      <a:solidFill>
+                        <a:schemeClr val="bg1"/>
+                      </a:solidFill>
+                      <a:prstDash val="solid"/>
+                      <a:round/>
+                      <a:headEnd type="none" w="med" len="med"/>
+                      <a:tailEnd type="none" w="med" len="med"/>
+                    </a:lnR>
+                    <a:lnT w="9525" cap="flat" cmpd="sng" algn="ctr">
+                      <a:solidFill>
+                        <a:schemeClr val="bg1"/>
+                      </a:solidFill>
+                      <a:prstDash val="solid"/>
+                      <a:round/>
+                      <a:headEnd type="none" w="med" len="med"/>
+                      <a:tailEnd type="none" w="med" len="med"/>
+                    </a:lnT>
+                    <a:lnB w="9525" cap="flat" cmpd="sng" algn="ctr">
+                      <a:solidFill>
+                        <a:schemeClr val="bg1"/>
+                      </a:solidFill>
+                      <a:prstDash val="solid"/>
+                      <a:round/>
+                      <a:headEnd type="none" w="med" len="med"/>
+                      <a:tailEnd type="none" w="med" len="med"/>
+                    </a:lnB>
+                    <a:noFill/>
+                  </a:tcPr>
+                </a:tc>
+                <a:tc>
+                  <a:txBody>
+                    <a:bodyPr/>
+                    <a:lstStyle/>
+                    <a:p>
+                      <a:pPr rtl="0"/>
+                      <a:r>
+                        <a:rPr lang="en-US" altLang="zh-TW">
+                          <a:solidFill>
+                            <a:srgbClr val="1F1F1F"/>
+                          </a:solidFill>
+                          <a:effectLst/>
+                          <a:latin typeface="Google Sans Text"/>
+                        </a:rPr>
+                        <a:t>0.8784</a:t>
+                      </a:r>
+                    </a:p>
+                  </a:txBody>
+                  <a:tcPr marR="114300" marT="152400" marB="152400" anchor="ctr">
+                    <a:lnL w="9525" cap="flat" cmpd="sng" algn="ctr">
+                      <a:solidFill>
+                        <a:schemeClr val="bg1"/>
+                      </a:solidFill>
+                      <a:prstDash val="solid"/>
+                      <a:round/>
+                      <a:headEnd type="none" w="med" len="med"/>
+                      <a:tailEnd type="none" w="med" len="med"/>
+                    </a:lnL>
+                    <a:lnR w="9525" cap="flat" cmpd="sng" algn="ctr">
+                      <a:solidFill>
+                        <a:schemeClr val="bg1"/>
+                      </a:solidFill>
+                      <a:prstDash val="solid"/>
+                      <a:round/>
+                      <a:headEnd type="none" w="med" len="med"/>
+                      <a:tailEnd type="none" w="med" len="med"/>
+                    </a:lnR>
+                    <a:lnT w="9525" cap="flat" cmpd="sng" algn="ctr">
+                      <a:solidFill>
+                        <a:schemeClr val="bg1"/>
+                      </a:solidFill>
+                      <a:prstDash val="solid"/>
+                      <a:round/>
+                      <a:headEnd type="none" w="med" len="med"/>
+                      <a:tailEnd type="none" w="med" len="med"/>
+                    </a:lnT>
+                    <a:lnB w="9525" cap="flat" cmpd="sng" algn="ctr">
+                      <a:solidFill>
+                        <a:schemeClr val="bg1"/>
+                      </a:solidFill>
+                      <a:prstDash val="solid"/>
+                      <a:round/>
+                      <a:headEnd type="none" w="med" len="med"/>
+                      <a:tailEnd type="none" w="med" len="med"/>
+                    </a:lnB>
+                    <a:noFill/>
+                  </a:tcPr>
+                </a:tc>
+                <a:tc>
+                  <a:txBody>
+                    <a:bodyPr/>
+                    <a:lstStyle/>
+                    <a:p>
+                      <a:pPr rtl="0"/>
+                      <a:r>
+                        <a:rPr lang="en-US" altLang="zh-TW" b="1">
+                          <a:solidFill>
+                            <a:srgbClr val="1F1F1F"/>
+                          </a:solidFill>
+                          <a:effectLst/>
+                          <a:latin typeface="Google Sans Text"/>
+                        </a:rPr>
+                        <a:t>746.64 </a:t>
+                      </a:r>
+                      <a:r>
+                        <a:rPr lang="zh-TW" altLang="en-US" b="1">
+                          <a:solidFill>
+                            <a:srgbClr val="1F1F1F"/>
+                          </a:solidFill>
+                          <a:effectLst/>
+                          <a:latin typeface="Google Sans Text"/>
+                        </a:rPr>
+                        <a:t>萬</a:t>
+                      </a:r>
+                      <a:endParaRPr lang="zh-TW" altLang="en-US">
+                        <a:solidFill>
+                          <a:srgbClr val="1F1F1F"/>
+                        </a:solidFill>
+                        <a:effectLst/>
+                        <a:latin typeface="Google Sans Text"/>
+                      </a:endParaRPr>
+                    </a:p>
+                  </a:txBody>
+                  <a:tcPr marT="152400" marB="152400" anchor="ctr">
+                    <a:lnL w="9525" cap="flat" cmpd="sng" algn="ctr">
+                      <a:solidFill>
+                        <a:schemeClr val="bg1"/>
+                      </a:solidFill>
+                      <a:prstDash val="solid"/>
+                      <a:round/>
+                      <a:headEnd type="none" w="med" len="med"/>
+                      <a:tailEnd type="none" w="med" len="med"/>
+                    </a:lnL>
+                    <a:lnR w="9525" cap="flat" cmpd="sng" algn="ctr">
+                      <a:solidFill>
+                        <a:schemeClr val="bg1"/>
+                      </a:solidFill>
+                      <a:prstDash val="solid"/>
+                      <a:round/>
+                      <a:headEnd type="none" w="med" len="med"/>
+                      <a:tailEnd type="none" w="med" len="med"/>
+                    </a:lnR>
+                    <a:lnT w="9525" cap="flat" cmpd="sng" algn="ctr">
+                      <a:solidFill>
+                        <a:schemeClr val="bg1"/>
+                      </a:solidFill>
+                      <a:prstDash val="solid"/>
+                      <a:round/>
+                      <a:headEnd type="none" w="med" len="med"/>
+                      <a:tailEnd type="none" w="med" len="med"/>
+                    </a:lnT>
+                    <a:lnB w="9525" cap="flat" cmpd="sng" algn="ctr">
+                      <a:solidFill>
+                        <a:schemeClr val="bg1"/>
+                      </a:solidFill>
+                      <a:prstDash val="solid"/>
+                      <a:round/>
+                      <a:headEnd type="none" w="med" len="med"/>
+                      <a:tailEnd type="none" w="med" len="med"/>
+                    </a:lnB>
+                    <a:noFill/>
+                  </a:tcPr>
+                </a:tc>
+                <a:extLst>
+                  <a:ext uri="{0D108BD9-81ED-4DB2-BD59-A6C34878D82A}">
+                    <a16:rowId xmlns:a16="http://schemas.microsoft.com/office/drawing/2014/main" val="477083205"/>
+                  </a:ext>
+                </a:extLst>
+              </a:tr>
+              <a:tr h="0">
+                <a:tc>
+                  <a:txBody>
+                    <a:bodyPr/>
+                    <a:lstStyle/>
+                    <a:p>
+                      <a:pPr rtl="0"/>
+                      <a:r>
+                        <a:rPr lang="en-US" altLang="zh-TW" b="1">
+                          <a:solidFill>
+                            <a:srgbClr val="1F1F1F"/>
+                          </a:solidFill>
+                          <a:effectLst/>
+                          <a:latin typeface="Google Sans Text"/>
+                        </a:rPr>
+                        <a:t>1 </a:t>
+                      </a:r>
+                      <a:r>
+                        <a:rPr lang="zh-TW" altLang="en-US" b="1">
+                          <a:solidFill>
+                            <a:srgbClr val="1F1F1F"/>
+                          </a:solidFill>
+                          <a:effectLst/>
+                          <a:latin typeface="Google Sans Text"/>
+                        </a:rPr>
+                        <a:t>富 </a:t>
+                      </a:r>
+                      <a:r>
+                        <a:rPr lang="en-US" altLang="zh-TW" b="1">
+                          <a:solidFill>
+                            <a:srgbClr val="1F1F1F"/>
+                          </a:solidFill>
+                          <a:effectLst/>
+                          <a:latin typeface="Google Sans Text"/>
+                        </a:rPr>
+                        <a:t>1 </a:t>
+                      </a:r>
+                      <a:r>
+                        <a:rPr lang="zh-TW" altLang="en-US" b="1">
+                          <a:solidFill>
+                            <a:srgbClr val="1F1F1F"/>
+                          </a:solidFill>
+                          <a:effectLst/>
+                          <a:latin typeface="Google Sans Text"/>
+                        </a:rPr>
+                        <a:t>窮</a:t>
+                      </a:r>
+                      <a:endParaRPr lang="zh-TW" altLang="en-US">
+                        <a:solidFill>
+                          <a:srgbClr val="1F1F1F"/>
+                        </a:solidFill>
+                        <a:effectLst/>
+                        <a:latin typeface="Google Sans Text"/>
+                      </a:endParaRPr>
+                    </a:p>
+                  </a:txBody>
+                  <a:tcPr marR="114300" marT="152400" marB="152400" anchor="ctr">
+                    <a:lnL w="9525" cap="flat" cmpd="sng" algn="ctr">
+                      <a:solidFill>
+                        <a:schemeClr val="bg1"/>
+                      </a:solidFill>
+                      <a:prstDash val="solid"/>
+                      <a:round/>
+                      <a:headEnd type="none" w="med" len="med"/>
+                      <a:tailEnd type="none" w="med" len="med"/>
+                    </a:lnL>
+                    <a:lnR w="9525" cap="flat" cmpd="sng" algn="ctr">
+                      <a:solidFill>
+                        <a:schemeClr val="bg1"/>
+                      </a:solidFill>
+                      <a:prstDash val="solid"/>
+                      <a:round/>
+                      <a:headEnd type="none" w="med" len="med"/>
+                      <a:tailEnd type="none" w="med" len="med"/>
+                    </a:lnR>
+                    <a:lnT w="9525" cap="flat" cmpd="sng" algn="ctr">
+                      <a:solidFill>
+                        <a:schemeClr val="bg1"/>
+                      </a:solidFill>
+                      <a:prstDash val="solid"/>
+                      <a:round/>
+                      <a:headEnd type="none" w="med" len="med"/>
+                      <a:tailEnd type="none" w="med" len="med"/>
+                    </a:lnT>
+                    <a:lnB w="9525" cap="flat" cmpd="sng" algn="ctr">
+                      <a:solidFill>
+                        <a:schemeClr val="bg1"/>
+                      </a:solidFill>
+                      <a:prstDash val="solid"/>
+                      <a:round/>
+                      <a:headEnd type="none" w="med" len="med"/>
+                      <a:tailEnd type="none" w="med" len="med"/>
+                    </a:lnB>
+                    <a:noFill/>
+                  </a:tcPr>
+                </a:tc>
+                <a:tc>
+                  <a:txBody>
+                    <a:bodyPr/>
+                    <a:lstStyle/>
+                    <a:p>
+                      <a:pPr rtl="0"/>
+                      <a:r>
+                        <a:rPr lang="en-US" altLang="zh-TW">
+                          <a:solidFill>
+                            <a:srgbClr val="1F1F1F"/>
+                          </a:solidFill>
+                          <a:effectLst/>
+                          <a:latin typeface="Google Sans Text"/>
+                        </a:rPr>
+                        <a:t>765 </a:t>
+                      </a:r>
+                      <a:r>
+                        <a:rPr lang="zh-TW" altLang="en-US">
+                          <a:solidFill>
+                            <a:srgbClr val="1F1F1F"/>
+                          </a:solidFill>
+                          <a:effectLst/>
+                          <a:latin typeface="Google Sans Text"/>
+                        </a:rPr>
+                        <a:t>萬</a:t>
+                      </a:r>
+                    </a:p>
+                  </a:txBody>
+                  <a:tcPr marR="114300" marT="152400" marB="152400" anchor="ctr">
+                    <a:lnL w="9525" cap="flat" cmpd="sng" algn="ctr">
+                      <a:solidFill>
+                        <a:schemeClr val="bg1"/>
+                      </a:solidFill>
+                      <a:prstDash val="solid"/>
+                      <a:round/>
+                      <a:headEnd type="none" w="med" len="med"/>
+                      <a:tailEnd type="none" w="med" len="med"/>
+                    </a:lnL>
+                    <a:lnR w="9525" cap="flat" cmpd="sng" algn="ctr">
+                      <a:solidFill>
+                        <a:schemeClr val="bg1"/>
+                      </a:solidFill>
+                      <a:prstDash val="solid"/>
+                      <a:round/>
+                      <a:headEnd type="none" w="med" len="med"/>
+                      <a:tailEnd type="none" w="med" len="med"/>
+                    </a:lnR>
+                    <a:lnT w="9525" cap="flat" cmpd="sng" algn="ctr">
+                      <a:solidFill>
+                        <a:schemeClr val="bg1"/>
+                      </a:solidFill>
+                      <a:prstDash val="solid"/>
+                      <a:round/>
+                      <a:headEnd type="none" w="med" len="med"/>
+                      <a:tailEnd type="none" w="med" len="med"/>
+                    </a:lnT>
+                    <a:lnB w="9525" cap="flat" cmpd="sng" algn="ctr">
+                      <a:solidFill>
+                        <a:schemeClr val="bg1"/>
+                      </a:solidFill>
+                      <a:prstDash val="solid"/>
+                      <a:round/>
+                      <a:headEnd type="none" w="med" len="med"/>
+                      <a:tailEnd type="none" w="med" len="med"/>
+                    </a:lnB>
+                    <a:noFill/>
+                  </a:tcPr>
+                </a:tc>
+                <a:tc>
+                  <a:txBody>
+                    <a:bodyPr/>
+                    <a:lstStyle/>
+                    <a:p>
+                      <a:pPr rtl="0"/>
+                      <a:r>
+                        <a:rPr lang="en-US" altLang="zh-TW">
+                          <a:solidFill>
+                            <a:srgbClr val="1F1F1F"/>
+                          </a:solidFill>
+                          <a:effectLst/>
+                          <a:latin typeface="Google Sans Text"/>
+                        </a:rPr>
+                        <a:t>0.1197</a:t>
+                      </a:r>
+                    </a:p>
+                  </a:txBody>
+                  <a:tcPr marR="114300" marT="152400" marB="152400" anchor="ctr">
+                    <a:lnL w="9525" cap="flat" cmpd="sng" algn="ctr">
+                      <a:solidFill>
+                        <a:schemeClr val="bg1"/>
+                      </a:solidFill>
+                      <a:prstDash val="solid"/>
+                      <a:round/>
+                      <a:headEnd type="none" w="med" len="med"/>
+                      <a:tailEnd type="none" w="med" len="med"/>
+                    </a:lnL>
+                    <a:lnR w="9525" cap="flat" cmpd="sng" algn="ctr">
+                      <a:solidFill>
+                        <a:schemeClr val="bg1"/>
+                      </a:solidFill>
+                      <a:prstDash val="solid"/>
+                      <a:round/>
+                      <a:headEnd type="none" w="med" len="med"/>
+                      <a:tailEnd type="none" w="med" len="med"/>
+                    </a:lnR>
+                    <a:lnT w="9525" cap="flat" cmpd="sng" algn="ctr">
+                      <a:solidFill>
+                        <a:schemeClr val="bg1"/>
+                      </a:solidFill>
+                      <a:prstDash val="solid"/>
+                      <a:round/>
+                      <a:headEnd type="none" w="med" len="med"/>
+                      <a:tailEnd type="none" w="med" len="med"/>
+                    </a:lnT>
+                    <a:lnB w="9525" cap="flat" cmpd="sng" algn="ctr">
+                      <a:solidFill>
+                        <a:schemeClr val="bg1"/>
+                      </a:solidFill>
+                      <a:prstDash val="solid"/>
+                      <a:round/>
+                      <a:headEnd type="none" w="med" len="med"/>
+                      <a:tailEnd type="none" w="med" len="med"/>
+                    </a:lnB>
+                    <a:noFill/>
+                  </a:tcPr>
+                </a:tc>
+                <a:tc>
+                  <a:txBody>
+                    <a:bodyPr/>
+                    <a:lstStyle/>
+                    <a:p>
+                      <a:pPr rtl="0"/>
+                      <a:r>
+                        <a:rPr lang="en-US" altLang="zh-TW" b="1">
+                          <a:solidFill>
+                            <a:srgbClr val="1F1F1F"/>
+                          </a:solidFill>
+                          <a:effectLst/>
+                          <a:latin typeface="Google Sans Text"/>
+                        </a:rPr>
+                        <a:t>91.57 </a:t>
+                      </a:r>
+                      <a:r>
+                        <a:rPr lang="zh-TW" altLang="en-US" b="1">
+                          <a:solidFill>
+                            <a:srgbClr val="1F1F1F"/>
+                          </a:solidFill>
+                          <a:effectLst/>
+                          <a:latin typeface="Google Sans Text"/>
+                        </a:rPr>
+                        <a:t>萬</a:t>
+                      </a:r>
+                      <a:endParaRPr lang="zh-TW" altLang="en-US">
+                        <a:solidFill>
+                          <a:srgbClr val="1F1F1F"/>
+                        </a:solidFill>
+                        <a:effectLst/>
+                        <a:latin typeface="Google Sans Text"/>
+                      </a:endParaRPr>
+                    </a:p>
+                  </a:txBody>
+                  <a:tcPr marT="152400" marB="152400" anchor="ctr">
+                    <a:lnL w="9525" cap="flat" cmpd="sng" algn="ctr">
+                      <a:solidFill>
+                        <a:schemeClr val="bg1"/>
+                      </a:solidFill>
+                      <a:prstDash val="solid"/>
+                      <a:round/>
+                      <a:headEnd type="none" w="med" len="med"/>
+                      <a:tailEnd type="none" w="med" len="med"/>
+                    </a:lnL>
+                    <a:lnR w="9525" cap="flat" cmpd="sng" algn="ctr">
+                      <a:solidFill>
+                        <a:schemeClr val="bg1"/>
+                      </a:solidFill>
+                      <a:prstDash val="solid"/>
+                      <a:round/>
+                      <a:headEnd type="none" w="med" len="med"/>
+                      <a:tailEnd type="none" w="med" len="med"/>
+                    </a:lnR>
+                    <a:lnT w="9525" cap="flat" cmpd="sng" algn="ctr">
+                      <a:solidFill>
+                        <a:schemeClr val="bg1"/>
+                      </a:solidFill>
+                      <a:prstDash val="solid"/>
+                      <a:round/>
+                      <a:headEnd type="none" w="med" len="med"/>
+                      <a:tailEnd type="none" w="med" len="med"/>
+                    </a:lnT>
+                    <a:lnB w="9525" cap="flat" cmpd="sng" algn="ctr">
+                      <a:solidFill>
+                        <a:schemeClr val="bg1"/>
+                      </a:solidFill>
+                      <a:prstDash val="solid"/>
+                      <a:round/>
+                      <a:headEnd type="none" w="med" len="med"/>
+                      <a:tailEnd type="none" w="med" len="med"/>
+                    </a:lnB>
+                    <a:noFill/>
+                  </a:tcPr>
+                </a:tc>
+                <a:extLst>
+                  <a:ext uri="{0D108BD9-81ED-4DB2-BD59-A6C34878D82A}">
+                    <a16:rowId xmlns:a16="http://schemas.microsoft.com/office/drawing/2014/main" val="2251357188"/>
+                  </a:ext>
+                </a:extLst>
+              </a:tr>
+              <a:tr h="0">
+                <a:tc>
+                  <a:txBody>
+                    <a:bodyPr/>
+                    <a:lstStyle/>
+                    <a:p>
+                      <a:pPr rtl="0"/>
+                      <a:r>
+                        <a:rPr lang="en-US" altLang="zh-TW" b="1">
+                          <a:solidFill>
+                            <a:srgbClr val="1F1F1F"/>
+                          </a:solidFill>
+                          <a:effectLst/>
+                          <a:latin typeface="Google Sans Text"/>
+                        </a:rPr>
+                        <a:t>2 </a:t>
+                      </a:r>
+                      <a:r>
+                        <a:rPr lang="zh-TW" altLang="en-US" b="1">
+                          <a:solidFill>
+                            <a:srgbClr val="1F1F1F"/>
+                          </a:solidFill>
+                          <a:effectLst/>
+                          <a:latin typeface="Google Sans Text"/>
+                        </a:rPr>
+                        <a:t>窮人</a:t>
+                      </a:r>
+                      <a:endParaRPr lang="zh-TW" altLang="en-US">
+                        <a:solidFill>
+                          <a:srgbClr val="1F1F1F"/>
+                        </a:solidFill>
+                        <a:effectLst/>
+                        <a:latin typeface="Google Sans Text"/>
+                      </a:endParaRPr>
+                    </a:p>
+                  </a:txBody>
+                  <a:tcPr marR="114300" marT="152400" marB="152400" anchor="ctr">
+                    <a:lnL w="9525" cap="flat" cmpd="sng" algn="ctr">
+                      <a:solidFill>
+                        <a:schemeClr val="bg1"/>
+                      </a:solidFill>
+                      <a:prstDash val="solid"/>
+                      <a:round/>
+                      <a:headEnd type="none" w="med" len="med"/>
+                      <a:tailEnd type="none" w="med" len="med"/>
+                    </a:lnL>
+                    <a:lnR w="9525" cap="flat" cmpd="sng" algn="ctr">
+                      <a:solidFill>
+                        <a:schemeClr val="bg1"/>
+                      </a:solidFill>
+                      <a:prstDash val="solid"/>
+                      <a:round/>
+                      <a:headEnd type="none" w="med" len="med"/>
+                      <a:tailEnd type="none" w="med" len="med"/>
+                    </a:lnR>
+                    <a:lnT w="9525" cap="flat" cmpd="sng" algn="ctr">
+                      <a:solidFill>
+                        <a:schemeClr val="bg1"/>
+                      </a:solidFill>
+                      <a:prstDash val="solid"/>
+                      <a:round/>
+                      <a:headEnd type="none" w="med" len="med"/>
+                      <a:tailEnd type="none" w="med" len="med"/>
+                    </a:lnT>
+                    <a:lnB w="9525" cap="flat" cmpd="sng" algn="ctr">
+                      <a:solidFill>
+                        <a:schemeClr val="bg1"/>
+                      </a:solidFill>
+                      <a:prstDash val="solid"/>
+                      <a:round/>
+                      <a:headEnd type="none" w="med" len="med"/>
+                      <a:tailEnd type="none" w="med" len="med"/>
+                    </a:lnB>
+                    <a:noFill/>
+                  </a:tcPr>
+                </a:tc>
+                <a:tc>
+                  <a:txBody>
+                    <a:bodyPr/>
+                    <a:lstStyle/>
+                    <a:p>
+                      <a:pPr rtl="0"/>
+                      <a:r>
+                        <a:rPr lang="en-US" altLang="zh-TW">
+                          <a:solidFill>
+                            <a:srgbClr val="1F1F1F"/>
+                          </a:solidFill>
+                          <a:effectLst/>
+                          <a:latin typeface="Google Sans Text"/>
+                        </a:rPr>
+                        <a:t>680 </a:t>
+                      </a:r>
+                      <a:r>
+                        <a:rPr lang="zh-TW" altLang="en-US">
+                          <a:solidFill>
+                            <a:srgbClr val="1F1F1F"/>
+                          </a:solidFill>
+                          <a:effectLst/>
+                          <a:latin typeface="Google Sans Text"/>
+                        </a:rPr>
+                        <a:t>萬</a:t>
+                      </a:r>
+                    </a:p>
+                  </a:txBody>
+                  <a:tcPr marR="114300" marT="152400" marB="152400" anchor="ctr">
+                    <a:lnL w="9525" cap="flat" cmpd="sng" algn="ctr">
+                      <a:solidFill>
+                        <a:schemeClr val="bg1"/>
+                      </a:solidFill>
+                      <a:prstDash val="solid"/>
+                      <a:round/>
+                      <a:headEnd type="none" w="med" len="med"/>
+                      <a:tailEnd type="none" w="med" len="med"/>
+                    </a:lnL>
+                    <a:lnR w="9525" cap="flat" cmpd="sng" algn="ctr">
+                      <a:solidFill>
+                        <a:schemeClr val="bg1"/>
+                      </a:solidFill>
+                      <a:prstDash val="solid"/>
+                      <a:round/>
+                      <a:headEnd type="none" w="med" len="med"/>
+                      <a:tailEnd type="none" w="med" len="med"/>
+                    </a:lnR>
+                    <a:lnT w="9525" cap="flat" cmpd="sng" algn="ctr">
+                      <a:solidFill>
+                        <a:schemeClr val="bg1"/>
+                      </a:solidFill>
+                      <a:prstDash val="solid"/>
+                      <a:round/>
+                      <a:headEnd type="none" w="med" len="med"/>
+                      <a:tailEnd type="none" w="med" len="med"/>
+                    </a:lnT>
+                    <a:lnB w="9525" cap="flat" cmpd="sng" algn="ctr">
+                      <a:solidFill>
+                        <a:schemeClr val="bg1"/>
+                      </a:solidFill>
+                      <a:prstDash val="solid"/>
+                      <a:round/>
+                      <a:headEnd type="none" w="med" len="med"/>
+                      <a:tailEnd type="none" w="med" len="med"/>
+                    </a:lnB>
+                    <a:noFill/>
+                  </a:tcPr>
+                </a:tc>
+                <a:tc>
+                  <a:txBody>
+                    <a:bodyPr/>
+                    <a:lstStyle/>
+                    <a:p>
+                      <a:pPr rtl="0"/>
+                      <a:r>
+                        <a:rPr lang="en-US" altLang="zh-TW">
+                          <a:solidFill>
+                            <a:srgbClr val="1F1F1F"/>
+                          </a:solidFill>
+                          <a:effectLst/>
+                          <a:latin typeface="Google Sans Text"/>
+                        </a:rPr>
+                        <a:t>0.0018</a:t>
+                      </a:r>
+                    </a:p>
+                  </a:txBody>
+                  <a:tcPr marR="114300" marT="152400" marB="152400" anchor="ctr">
+                    <a:lnL w="9525" cap="flat" cmpd="sng" algn="ctr">
+                      <a:solidFill>
+                        <a:schemeClr val="bg1"/>
+                      </a:solidFill>
+                      <a:prstDash val="solid"/>
+                      <a:round/>
+                      <a:headEnd type="none" w="med" len="med"/>
+                      <a:tailEnd type="none" w="med" len="med"/>
+                    </a:lnL>
+                    <a:lnR w="9525" cap="flat" cmpd="sng" algn="ctr">
+                      <a:solidFill>
+                        <a:schemeClr val="bg1"/>
+                      </a:solidFill>
+                      <a:prstDash val="solid"/>
+                      <a:round/>
+                      <a:headEnd type="none" w="med" len="med"/>
+                      <a:tailEnd type="none" w="med" len="med"/>
+                    </a:lnR>
+                    <a:lnT w="9525" cap="flat" cmpd="sng" algn="ctr">
+                      <a:solidFill>
+                        <a:schemeClr val="bg1"/>
+                      </a:solidFill>
+                      <a:prstDash val="solid"/>
+                      <a:round/>
+                      <a:headEnd type="none" w="med" len="med"/>
+                      <a:tailEnd type="none" w="med" len="med"/>
+                    </a:lnT>
+                    <a:lnB w="9525" cap="flat" cmpd="sng" algn="ctr">
+                      <a:solidFill>
+                        <a:schemeClr val="bg1"/>
+                      </a:solidFill>
+                      <a:prstDash val="solid"/>
+                      <a:round/>
+                      <a:headEnd type="none" w="med" len="med"/>
+                      <a:tailEnd type="none" w="med" len="med"/>
+                    </a:lnB>
+                    <a:noFill/>
+                  </a:tcPr>
+                </a:tc>
+                <a:tc>
+                  <a:txBody>
+                    <a:bodyPr/>
+                    <a:lstStyle/>
+                    <a:p>
+                      <a:pPr rtl="0"/>
+                      <a:r>
+                        <a:rPr lang="en-US" altLang="zh-TW" b="1">
+                          <a:solidFill>
+                            <a:srgbClr val="1F1F1F"/>
+                          </a:solidFill>
+                          <a:effectLst/>
+                          <a:latin typeface="Google Sans Text"/>
+                        </a:rPr>
+                        <a:t>1.22 </a:t>
+                      </a:r>
+                      <a:r>
+                        <a:rPr lang="zh-TW" altLang="en-US" b="1">
+                          <a:solidFill>
+                            <a:srgbClr val="1F1F1F"/>
+                          </a:solidFill>
+                          <a:effectLst/>
+                          <a:latin typeface="Google Sans Text"/>
+                        </a:rPr>
+                        <a:t>萬</a:t>
+                      </a:r>
+                      <a:endParaRPr lang="zh-TW" altLang="en-US">
+                        <a:solidFill>
+                          <a:srgbClr val="1F1F1F"/>
+                        </a:solidFill>
+                        <a:effectLst/>
+                        <a:latin typeface="Google Sans Text"/>
+                      </a:endParaRPr>
+                    </a:p>
+                  </a:txBody>
+                  <a:tcPr marT="152400" marB="152400" anchor="ctr">
+                    <a:lnL w="9525" cap="flat" cmpd="sng" algn="ctr">
+                      <a:solidFill>
+                        <a:schemeClr val="bg1"/>
+                      </a:solidFill>
+                      <a:prstDash val="solid"/>
+                      <a:round/>
+                      <a:headEnd type="none" w="med" len="med"/>
+                      <a:tailEnd type="none" w="med" len="med"/>
+                    </a:lnL>
+                    <a:lnR w="9525" cap="flat" cmpd="sng" algn="ctr">
+                      <a:solidFill>
+                        <a:schemeClr val="bg1"/>
+                      </a:solidFill>
+                      <a:prstDash val="solid"/>
+                      <a:round/>
+                      <a:headEnd type="none" w="med" len="med"/>
+                      <a:tailEnd type="none" w="med" len="med"/>
+                    </a:lnR>
+                    <a:lnT w="9525" cap="flat" cmpd="sng" algn="ctr">
+                      <a:solidFill>
+                        <a:schemeClr val="bg1"/>
+                      </a:solidFill>
+                      <a:prstDash val="solid"/>
+                      <a:round/>
+                      <a:headEnd type="none" w="med" len="med"/>
+                      <a:tailEnd type="none" w="med" len="med"/>
+                    </a:lnT>
+                    <a:lnB w="9525" cap="flat" cmpd="sng" algn="ctr">
+                      <a:solidFill>
+                        <a:schemeClr val="bg1"/>
+                      </a:solidFill>
+                      <a:prstDash val="solid"/>
+                      <a:round/>
+                      <a:headEnd type="none" w="med" len="med"/>
+                      <a:tailEnd type="none" w="med" len="med"/>
+                    </a:lnB>
+                    <a:noFill/>
+                  </a:tcPr>
+                </a:tc>
+                <a:extLst>
+                  <a:ext uri="{0D108BD9-81ED-4DB2-BD59-A6C34878D82A}">
+                    <a16:rowId xmlns:a16="http://schemas.microsoft.com/office/drawing/2014/main" val="3926020851"/>
+                  </a:ext>
+                </a:extLst>
+              </a:tr>
+              <a:tr h="0">
+                <a:tc>
+                  <a:txBody>
+                    <a:bodyPr/>
+                    <a:lstStyle/>
+                    <a:p>
+                      <a:pPr rtl="0"/>
+                      <a:r>
+                        <a:rPr lang="zh-TW" altLang="en-US" b="1">
+                          <a:solidFill>
+                            <a:srgbClr val="1F1F1F"/>
+                          </a:solidFill>
+                          <a:effectLst/>
+                          <a:latin typeface="Google Sans Text"/>
+                        </a:rPr>
+                        <a:t>總計</a:t>
+                      </a:r>
+                      <a:endParaRPr lang="zh-TW" altLang="en-US">
+                        <a:solidFill>
+                          <a:srgbClr val="1F1F1F"/>
+                        </a:solidFill>
+                        <a:effectLst/>
+                        <a:latin typeface="Google Sans Text"/>
+                      </a:endParaRPr>
+                    </a:p>
+                  </a:txBody>
+                  <a:tcPr marR="114300" marT="152400" marB="152400" anchor="ctr">
+                    <a:lnL w="9525" cap="flat" cmpd="sng" algn="ctr">
+                      <a:solidFill>
+                        <a:schemeClr val="bg1"/>
+                      </a:solidFill>
+                      <a:prstDash val="solid"/>
+                      <a:round/>
+                      <a:headEnd type="none" w="med" len="med"/>
+                      <a:tailEnd type="none" w="med" len="med"/>
+                    </a:lnL>
+                    <a:lnR w="9525" cap="flat" cmpd="sng" algn="ctr">
+                      <a:solidFill>
+                        <a:schemeClr val="bg1"/>
+                      </a:solidFill>
+                      <a:prstDash val="solid"/>
+                      <a:round/>
+                      <a:headEnd type="none" w="med" len="med"/>
+                      <a:tailEnd type="none" w="med" len="med"/>
+                    </a:lnR>
+                    <a:lnT w="9525" cap="flat" cmpd="sng" algn="ctr">
+                      <a:solidFill>
+                        <a:schemeClr val="bg1"/>
+                      </a:solidFill>
+                      <a:prstDash val="solid"/>
+                      <a:round/>
+                      <a:headEnd type="none" w="med" len="med"/>
+                      <a:tailEnd type="none" w="med" len="med"/>
+                    </a:lnT>
+                    <a:lnB w="9525" cap="flat" cmpd="sng" algn="ctr">
+                      <a:solidFill>
+                        <a:schemeClr val="bg1"/>
+                      </a:solidFill>
+                      <a:prstDash val="solid"/>
+                      <a:round/>
+                      <a:headEnd type="none" w="med" len="med"/>
+                      <a:tailEnd type="none" w="med" len="med"/>
+                    </a:lnB>
+                    <a:noFill/>
+                  </a:tcPr>
+                </a:tc>
+                <a:tc>
+                  <a:txBody>
+                    <a:bodyPr/>
+                    <a:lstStyle/>
+                    <a:p>
+                      <a:pPr rtl="0"/>
+                      <a:endParaRPr lang="zh-TW" altLang="en-US">
+                        <a:solidFill>
+                          <a:srgbClr val="1F1F1F"/>
+                        </a:solidFill>
+                        <a:effectLst/>
+                        <a:latin typeface="Google Sans Text"/>
+                      </a:endParaRPr>
+                    </a:p>
+                  </a:txBody>
+                  <a:tcPr marR="114300" marT="152400" marB="152400" anchor="ctr">
+                    <a:lnL w="9525" cap="flat" cmpd="sng" algn="ctr">
+                      <a:solidFill>
+                        <a:schemeClr val="bg1"/>
+                      </a:solidFill>
+                      <a:prstDash val="solid"/>
+                      <a:round/>
+                      <a:headEnd type="none" w="med" len="med"/>
+                      <a:tailEnd type="none" w="med" len="med"/>
+                    </a:lnL>
+                    <a:lnR w="9525" cap="flat" cmpd="sng" algn="ctr">
+                      <a:solidFill>
+                        <a:schemeClr val="bg1"/>
+                      </a:solidFill>
+                      <a:prstDash val="solid"/>
+                      <a:round/>
+                      <a:headEnd type="none" w="med" len="med"/>
+                      <a:tailEnd type="none" w="med" len="med"/>
+                    </a:lnR>
+                    <a:lnT w="9525" cap="flat" cmpd="sng" algn="ctr">
+                      <a:solidFill>
+                        <a:schemeClr val="bg1"/>
+                      </a:solidFill>
+                      <a:prstDash val="solid"/>
+                      <a:round/>
+                      <a:headEnd type="none" w="med" len="med"/>
+                      <a:tailEnd type="none" w="med" len="med"/>
+                    </a:lnT>
+                    <a:lnB w="9525" cap="flat" cmpd="sng" algn="ctr">
+                      <a:solidFill>
+                        <a:schemeClr val="bg1"/>
+                      </a:solidFill>
+                      <a:prstDash val="solid"/>
+                      <a:round/>
+                      <a:headEnd type="none" w="med" len="med"/>
+                      <a:tailEnd type="none" w="med" len="med"/>
+                    </a:lnB>
+                    <a:noFill/>
+                  </a:tcPr>
+                </a:tc>
+                <a:tc>
+                  <a:txBody>
+                    <a:bodyPr/>
+                    <a:lstStyle/>
+                    <a:p>
+                      <a:pPr rtl="0"/>
+                      <a:r>
+                        <a:rPr lang="en-US" altLang="zh-TW" b="1">
+                          <a:solidFill>
+                            <a:srgbClr val="1F1F1F"/>
+                          </a:solidFill>
+                          <a:effectLst/>
+                          <a:latin typeface="Google Sans Text"/>
+                        </a:rPr>
+                        <a:t>1.0000</a:t>
+                      </a:r>
+                      <a:endParaRPr lang="zh-TW" altLang="en-US">
+                        <a:solidFill>
+                          <a:srgbClr val="1F1F1F"/>
+                        </a:solidFill>
+                        <a:effectLst/>
+                        <a:latin typeface="Google Sans Text"/>
+                      </a:endParaRPr>
+                    </a:p>
+                  </a:txBody>
+                  <a:tcPr marR="114300" marT="152400" marB="152400" anchor="ctr">
+                    <a:lnL w="9525" cap="flat" cmpd="sng" algn="ctr">
+                      <a:solidFill>
+                        <a:schemeClr val="bg1"/>
+                      </a:solidFill>
+                      <a:prstDash val="solid"/>
+                      <a:round/>
+                      <a:headEnd type="none" w="med" len="med"/>
+                      <a:tailEnd type="none" w="med" len="med"/>
+                    </a:lnL>
+                    <a:lnR w="9525" cap="flat" cmpd="sng" algn="ctr">
+                      <a:solidFill>
+                        <a:schemeClr val="bg1"/>
+                      </a:solidFill>
+                      <a:prstDash val="solid"/>
+                      <a:round/>
+                      <a:headEnd type="none" w="med" len="med"/>
+                      <a:tailEnd type="none" w="med" len="med"/>
+                    </a:lnR>
+                    <a:lnT w="9525" cap="flat" cmpd="sng" algn="ctr">
+                      <a:solidFill>
+                        <a:schemeClr val="bg1"/>
+                      </a:solidFill>
+                      <a:prstDash val="solid"/>
+                      <a:round/>
+                      <a:headEnd type="none" w="med" len="med"/>
+                      <a:tailEnd type="none" w="med" len="med"/>
+                    </a:lnT>
+                    <a:lnB w="9525" cap="flat" cmpd="sng" algn="ctr">
+                      <a:solidFill>
+                        <a:schemeClr val="bg1"/>
+                      </a:solidFill>
+                      <a:prstDash val="solid"/>
+                      <a:round/>
+                      <a:headEnd type="none" w="med" len="med"/>
+                      <a:tailEnd type="none" w="med" len="med"/>
+                    </a:lnB>
+                    <a:noFill/>
+                  </a:tcPr>
+                </a:tc>
+                <a:tc>
+                  <a:txBody>
+                    <a:bodyPr/>
+                    <a:lstStyle/>
+                    <a:p>
+                      <a:pPr rtl="0"/>
+                      <a:r>
+                        <a:rPr lang="en-US" altLang="zh-TW" b="1" dirty="0">
+                          <a:solidFill>
+                            <a:srgbClr val="1F1F1F"/>
+                          </a:solidFill>
+                          <a:effectLst/>
+                          <a:latin typeface="Google Sans Text"/>
+                        </a:rPr>
+                        <a:t>839.43 </a:t>
+                      </a:r>
+                      <a:r>
+                        <a:rPr lang="zh-TW" altLang="en-US" b="1" dirty="0">
+                          <a:solidFill>
+                            <a:srgbClr val="1F1F1F"/>
+                          </a:solidFill>
+                          <a:effectLst/>
+                          <a:latin typeface="Google Sans Text"/>
+                        </a:rPr>
+                        <a:t>萬</a:t>
+                      </a:r>
+                      <a:endParaRPr lang="zh-TW" altLang="en-US" dirty="0">
+                        <a:solidFill>
+                          <a:srgbClr val="1F1F1F"/>
+                        </a:solidFill>
+                        <a:effectLst/>
+                        <a:latin typeface="Google Sans Text"/>
+                      </a:endParaRPr>
+                    </a:p>
+                  </a:txBody>
+                  <a:tcPr marT="152400" marB="152400" anchor="ctr">
+                    <a:lnL w="9525" cap="flat" cmpd="sng" algn="ctr">
+                      <a:solidFill>
+                        <a:schemeClr val="bg1"/>
+                      </a:solidFill>
+                      <a:prstDash val="solid"/>
+                      <a:round/>
+                      <a:headEnd type="none" w="med" len="med"/>
+                      <a:tailEnd type="none" w="med" len="med"/>
+                    </a:lnL>
+                    <a:lnR w="9525" cap="flat" cmpd="sng" algn="ctr">
+                      <a:solidFill>
+                        <a:schemeClr val="bg1"/>
+                      </a:solidFill>
+                      <a:prstDash val="solid"/>
+                      <a:round/>
+                      <a:headEnd type="none" w="med" len="med"/>
+                      <a:tailEnd type="none" w="med" len="med"/>
+                    </a:lnR>
+                    <a:lnT w="9525" cap="flat" cmpd="sng" algn="ctr">
+                      <a:solidFill>
+                        <a:schemeClr val="bg1"/>
+                      </a:solidFill>
+                      <a:prstDash val="solid"/>
+                      <a:round/>
+                      <a:headEnd type="none" w="med" len="med"/>
+                      <a:tailEnd type="none" w="med" len="med"/>
+                    </a:lnT>
+                    <a:lnB w="9525" cap="flat" cmpd="sng" algn="ctr">
+                      <a:solidFill>
+                        <a:schemeClr val="bg1"/>
+                      </a:solidFill>
+                      <a:prstDash val="solid"/>
+                      <a:round/>
+                      <a:headEnd type="none" w="med" len="med"/>
+                      <a:tailEnd type="none" w="med" len="med"/>
+                    </a:lnB>
+                    <a:noFill/>
+                  </a:tcPr>
+                </a:tc>
+                <a:extLst>
+                  <a:ext uri="{0D108BD9-81ED-4DB2-BD59-A6C34878D82A}">
+                    <a16:rowId xmlns:a16="http://schemas.microsoft.com/office/drawing/2014/main" val="124635869"/>
+                  </a:ext>
+                </a:extLst>
+              </a:tr>
+            </a:tbl>
+          </a:graphicData>
+        </a:graphic>
+      </p:graphicFrame>
+    </p:spTree>
+    <p:extLst>
+      <p:ext uri="{BB962C8B-B14F-4D97-AF65-F5344CB8AC3E}">
+        <p14:creationId xmlns:p14="http://schemas.microsoft.com/office/powerpoint/2010/main" val="861608071"/>
+      </p:ext>
+    </p:extLst>
+  </p:cSld>
+  <p:clrMapOvr>
+    <a:masterClrMapping/>
+  </p:clrMapOvr>
+</p:sld>
+</file>
+
+<file path=ppt/slides/slide11.xml><?xml version="1.0" encoding="utf-8"?>
+<p:sld xmlns:a="http://schemas.openxmlformats.org/drawingml/2006/main" xmlns:r="http://schemas.openxmlformats.org/officeDocument/2006/relationships" xmlns:p="http://schemas.openxmlformats.org/presentationml/2006/main">
+  <p:cSld>
+    <p:spTree>
+      <p:nvGrpSpPr>
+        <p:cNvPr id="1" name="">
+          <a:extLst>
+            <a:ext uri="{FF2B5EF4-FFF2-40B4-BE49-F238E27FC236}">
+              <a16:creationId xmlns:a16="http://schemas.microsoft.com/office/drawing/2014/main" id="{D939A6A0-D0A4-5C45-40A5-D1303876A315}"/>
+            </a:ext>
+          </a:extLst>
+        </p:cNvPr>
+        <p:cNvGrpSpPr/>
+        <p:nvPr/>
+      </p:nvGrpSpPr>
+      <p:grpSpPr>
+        <a:xfrm>
+          <a:off x="0" y="0"/>
+          <a:ext cx="0" cy="0"/>
+          <a:chOff x="0" y="0"/>
+          <a:chExt cx="0" cy="0"/>
+        </a:xfrm>
+      </p:grpSpPr>
+      <p:sp>
+        <p:nvSpPr>
+          <p:cNvPr id="2" name="Title 1">
+            <a:extLst>
+              <a:ext uri="{FF2B5EF4-FFF2-40B4-BE49-F238E27FC236}">
+                <a16:creationId xmlns:a16="http://schemas.microsoft.com/office/drawing/2014/main" id="{C2EC4BC0-34C7-DDBF-FA25-8D0B64CA5399}"/>
+              </a:ext>
+            </a:extLst>
+          </p:cNvPr>
+          <p:cNvSpPr>
+            <a:spLocks noGrp="1"/>
+          </p:cNvSpPr>
+          <p:nvPr>
+            <p:ph type="title"/>
+          </p:nvPr>
+        </p:nvSpPr>
+        <p:spPr/>
+        <p:txBody>
+          <a:bodyPr/>
+          <a:lstStyle/>
+          <a:p>
+            <a:r>
+              <a:rPr lang="ja-JP" altLang="en-US"/>
+              <a:t>機率抽樣方式</a:t>
+            </a:r>
+            <a:endParaRPr lang="en-US" dirty="0"/>
+          </a:p>
+        </p:txBody>
+      </p:sp>
+      <mc:AlternateContent xmlns:mc="http://schemas.openxmlformats.org/markup-compatibility/2006">
+        <mc:Choice xmlns:a14="http://schemas.microsoft.com/office/drawing/2010/main" Requires="a14">
+          <p:sp>
+            <p:nvSpPr>
+              <p:cNvPr id="3" name="Content Placeholder 2">
+                <a:extLst>
+                  <a:ext uri="{FF2B5EF4-FFF2-40B4-BE49-F238E27FC236}">
+                    <a16:creationId xmlns:a16="http://schemas.microsoft.com/office/drawing/2014/main" id="{A7D72A33-6DF2-AAC5-553F-AADBC53C207C}"/>
+                  </a:ext>
+                </a:extLst>
+              </p:cNvPr>
+              <p:cNvSpPr>
+                <a:spLocks noGrp="1"/>
+              </p:cNvSpPr>
+              <p:nvPr>
+                <p:ph idx="1"/>
+              </p:nvPr>
+            </p:nvSpPr>
+            <p:spPr/>
+            <p:txBody>
+              <a:bodyPr>
+                <a:normAutofit fontScale="62500" lnSpcReduction="20000"/>
+              </a:bodyPr>
+              <a:lstStyle/>
+              <a:p>
+                <a:pPr marL="0" indent="0">
+                  <a:lnSpc>
+                    <a:spcPct val="150000"/>
+                  </a:lnSpc>
+                  <a:buNone/>
+                </a:pPr>
+                <a:endParaRPr lang="en-US" altLang="ja-JP" sz="2000" dirty="0"/>
+              </a:p>
+              <a:p>
+                <a:pPr>
+                  <a:lnSpc>
+                    <a:spcPct val="150000"/>
+                  </a:lnSpc>
+                  <a:buFont typeface="Wingdings" pitchFamily="2" charset="2"/>
+                  <a:buChar char="l"/>
+                </a:pPr>
+                <a:r>
+                  <a:rPr lang="ja-JP" altLang="en-US" sz="2900"/>
+                  <a:t>如果母體中的每一個成員都有一個大於零且已知的被選中機會，稱為機率抽樣。</a:t>
+                </a:r>
+                <a:endParaRPr lang="en-US" altLang="ja-JP" sz="2900" dirty="0"/>
+              </a:p>
+              <a:p>
+                <a:pPr>
+                  <a:lnSpc>
+                    <a:spcPct val="150000"/>
+                  </a:lnSpc>
+                  <a:buFont typeface="Wingdings" pitchFamily="2" charset="2"/>
+                  <a:buChar char="l"/>
+                </a:pPr>
+                <a:r>
+                  <a:rPr lang="ja-JP" altLang="en-US" sz="2900"/>
+                  <a:t>由於遵循隨機原則，研究者可以使用統計公式計算信心水準與誤差範圍，使得樣本特徵可以推論至整個母體。</a:t>
+                </a:r>
+                <a:endParaRPr lang="en-US" altLang="ja-JP" sz="2900" dirty="0"/>
+              </a:p>
+              <a:p>
+                <a:pPr>
+                  <a:lnSpc>
+                    <a:spcPct val="150000"/>
+                  </a:lnSpc>
+                  <a:buFont typeface="Wingdings" pitchFamily="2" charset="2"/>
+                  <a:buChar char="l"/>
+                </a:pPr>
+                <a:r>
+                  <a:rPr lang="ja-JP" altLang="en-US" sz="2900"/>
+                  <a:t>假設我們進行了一次網路調查，回收了 </a:t>
+                </a:r>
+                <a:r>
+                  <a:rPr lang="en-US" altLang="ja-JP" sz="2900" dirty="0"/>
+                  <a:t>1,067 </a:t>
+                </a:r>
+                <a:r>
+                  <a:rPr lang="ja-JP" altLang="en-US" sz="2900"/>
+                  <a:t>份 有效問卷，假設得到結果如下：</a:t>
+                </a:r>
+                <a:endParaRPr lang="en-US" altLang="ja-JP" sz="2900" dirty="0"/>
+              </a:p>
+              <a:p>
+                <a:pPr>
+                  <a:lnSpc>
+                    <a:spcPct val="150000"/>
+                  </a:lnSpc>
+                  <a:buFont typeface="Wingdings" pitchFamily="2" charset="2"/>
+                  <a:buChar char="l"/>
+                </a:pPr>
+                <a:r>
+                  <a:rPr lang="ja-JP" altLang="en-US" sz="2900"/>
+                  <a:t>樣本平均值 </a:t>
+                </a:r>
+                <a:r>
+                  <a:rPr lang="en-US" altLang="ja-JP" sz="2900" dirty="0"/>
+                  <a:t>(</a:t>
+                </a:r>
+                <a14:m>
+                  <m:oMath xmlns:m="http://schemas.openxmlformats.org/officeDocument/2006/math">
+                    <m:acc>
+                      <m:accPr>
+                        <m:chr m:val="̅"/>
+                        <m:ctrlPr>
+                          <a:rPr lang="en-US" altLang="ja-JP" sz="2900" i="1" smtClean="0">
+                            <a:latin typeface="Cambria Math" panose="02040503050406030204" pitchFamily="18" charset="0"/>
+                          </a:rPr>
+                        </m:ctrlPr>
+                      </m:accPr>
+                      <m:e>
+                        <m:r>
+                          <a:rPr lang="en-US" altLang="ja-JP" sz="2900" b="0" i="1" smtClean="0">
+                            <a:latin typeface="Cambria Math" panose="02040503050406030204" pitchFamily="18" charset="0"/>
+                          </a:rPr>
+                          <m:t>𝑋</m:t>
+                        </m:r>
+                      </m:e>
+                    </m:acc>
+                  </m:oMath>
+                </a14:m>
+                <a:r>
+                  <a:rPr lang="en-US" altLang="ja-JP" sz="2900" dirty="0"/>
+                  <a:t>)</a:t>
+                </a:r>
+                <a:r>
+                  <a:rPr lang="ja-JP" altLang="en-US" sz="2900"/>
+                  <a:t>：</a:t>
+                </a:r>
+                <a:r>
+                  <a:rPr lang="en-US" altLang="ja-JP" sz="2900" dirty="0"/>
+                  <a:t>5.5 </a:t>
+                </a:r>
+                <a:r>
+                  <a:rPr lang="ja-JP" altLang="en-US" sz="2900"/>
+                  <a:t>分，</a:t>
+                </a:r>
+                <a:endParaRPr lang="en-US" altLang="ja-JP" sz="2900" dirty="0"/>
+              </a:p>
+              <a:p>
+                <a:pPr>
+                  <a:lnSpc>
+                    <a:spcPct val="150000"/>
+                  </a:lnSpc>
+                  <a:buFont typeface="Wingdings" pitchFamily="2" charset="2"/>
+                  <a:buChar char="l"/>
+                </a:pPr>
+                <a:r>
+                  <a:rPr lang="ja-JP" altLang="en-US" sz="2900"/>
+                  <a:t>樣本標準差 </a:t>
+                </a:r>
+                <a:r>
+                  <a:rPr lang="en-US" altLang="ja-JP" sz="2900" dirty="0"/>
+                  <a:t>(s )</a:t>
+                </a:r>
+                <a:r>
+                  <a:rPr lang="ja-JP" altLang="en-US" sz="2900"/>
+                  <a:t>： </a:t>
+                </a:r>
+                <a:r>
+                  <a:rPr lang="en-US" altLang="ja-JP" sz="2900" dirty="0"/>
+                  <a:t>2.5 </a:t>
+                </a:r>
+                <a:r>
+                  <a:rPr lang="ja-JP" altLang="en-US" sz="2900"/>
+                  <a:t>分</a:t>
+                </a:r>
+                <a:endParaRPr lang="en-US" altLang="ja-JP" sz="2900" dirty="0"/>
+              </a:p>
+              <a:p>
+                <a:pPr>
+                  <a:lnSpc>
+                    <a:spcPct val="150000"/>
+                  </a:lnSpc>
+                  <a:buFont typeface="Wingdings" pitchFamily="2" charset="2"/>
+                  <a:buChar char="l"/>
+                </a:pPr>
+                <a:r>
+                  <a:rPr lang="ja-JP" altLang="en-US" sz="2900"/>
+                  <a:t>信心水準：</a:t>
+                </a:r>
+                <a:r>
+                  <a:rPr lang="en-US" altLang="ja-JP" sz="2900" dirty="0"/>
+                  <a:t>95% (</a:t>
+                </a:r>
+                <a:r>
+                  <a:rPr lang="en-US" altLang="ja-JP" sz="2900" i="1" dirty="0"/>
+                  <a:t>z</a:t>
+                </a:r>
+                <a:r>
+                  <a:rPr lang="en-US" altLang="ja-JP" sz="2900" dirty="0"/>
+                  <a:t> = 1.96)</a:t>
+                </a:r>
+                <a:r>
+                  <a:rPr lang="ja-JP" altLang="en-US" sz="2900"/>
+                  <a:t> </a:t>
+                </a:r>
+                <a:endParaRPr lang="en-US" altLang="ja-JP" sz="2900" dirty="0"/>
+              </a:p>
+              <a:p>
+                <a:pPr>
+                  <a:lnSpc>
+                    <a:spcPct val="150000"/>
+                  </a:lnSpc>
+                  <a:buFont typeface="Wingdings" pitchFamily="2" charset="2"/>
+                  <a:buChar char="l"/>
+                </a:pPr>
+                <a:r>
+                  <a:rPr lang="ja-JP" altLang="en-US" sz="2900"/>
+                  <a:t>標準誤 </a:t>
+                </a:r>
+                <a:r>
+                  <a:rPr lang="en-US" altLang="ja-JP" sz="2900" dirty="0"/>
+                  <a:t>(Standard Error)</a:t>
+                </a:r>
+                <a:r>
+                  <a:rPr lang="ja-JP" altLang="en-US" sz="2900"/>
+                  <a:t>：</a:t>
+                </a:r>
+                <a14:m>
+                  <m:oMath xmlns:m="http://schemas.openxmlformats.org/officeDocument/2006/math">
+                    <m:f>
+                      <m:fPr>
+                        <m:ctrlPr>
+                          <a:rPr lang="en-US" altLang="ja-JP" sz="2900" i="1" smtClean="0">
+                            <a:latin typeface="Cambria Math" panose="02040503050406030204" pitchFamily="18" charset="0"/>
+                          </a:rPr>
+                        </m:ctrlPr>
+                      </m:fPr>
+                      <m:num>
+                        <m:r>
+                          <a:rPr lang="en-US" altLang="ja-JP" sz="2900" b="0" i="1" smtClean="0">
+                            <a:latin typeface="Cambria Math" panose="02040503050406030204" pitchFamily="18" charset="0"/>
+                          </a:rPr>
+                          <m:t>2.5</m:t>
+                        </m:r>
+                      </m:num>
+                      <m:den>
+                        <m:rad>
+                          <m:radPr>
+                            <m:degHide m:val="on"/>
+                            <m:ctrlPr>
+                              <a:rPr lang="en-US" altLang="ja-JP" sz="2900" i="1" smtClean="0">
+                                <a:latin typeface="Cambria Math" panose="02040503050406030204" pitchFamily="18" charset="0"/>
+                              </a:rPr>
+                            </m:ctrlPr>
+                          </m:radPr>
+                          <m:deg/>
+                          <m:e>
+                            <m:r>
+                              <a:rPr lang="en-US" altLang="ja-JP" sz="2900" b="0" i="1" smtClean="0">
+                                <a:latin typeface="Cambria Math" panose="02040503050406030204" pitchFamily="18" charset="0"/>
+                              </a:rPr>
+                              <m:t>1067</m:t>
+                            </m:r>
+                          </m:e>
+                        </m:rad>
+                      </m:den>
+                    </m:f>
+                  </m:oMath>
+                </a14:m>
+                <a:r>
+                  <a:rPr lang="en-US" altLang="ja-JP" sz="2900" dirty="0"/>
+                  <a:t> </a:t>
+                </a:r>
+                <a14:m>
+                  <m:oMath xmlns:m="http://schemas.openxmlformats.org/officeDocument/2006/math">
+                    <m:r>
+                      <a:rPr lang="en-US" altLang="ja-JP" sz="2900" i="1" dirty="0" smtClean="0">
+                        <a:latin typeface="Cambria Math" panose="02040503050406030204" pitchFamily="18" charset="0"/>
+                        <a:ea typeface="Cambria Math" panose="02040503050406030204" pitchFamily="18" charset="0"/>
+                      </a:rPr>
+                      <m:t>≈</m:t>
+                    </m:r>
+                  </m:oMath>
+                </a14:m>
+                <a:r>
+                  <a:rPr lang="en-US" altLang="ja-JP" sz="2900" dirty="0"/>
+                  <a:t> 0.0766</a:t>
+                </a:r>
+                <a:endParaRPr lang="en-US" sz="2900" dirty="0"/>
+              </a:p>
+              <a:p>
+                <a:pPr>
+                  <a:buFont typeface="Wingdings" pitchFamily="2" charset="2"/>
+                  <a:buChar char="l"/>
+                </a:pPr>
+                <a:endParaRPr lang="en-US" dirty="0"/>
+              </a:p>
+            </p:txBody>
+          </p:sp>
+        </mc:Choice>
+        <mc:Fallback>
+          <p:sp>
+            <p:nvSpPr>
+              <p:cNvPr id="3" name="Content Placeholder 2">
+                <a:extLst>
+                  <a:ext uri="{FF2B5EF4-FFF2-40B4-BE49-F238E27FC236}">
+                    <a16:creationId xmlns:a16="http://schemas.microsoft.com/office/drawing/2014/main" id="{A7D72A33-6DF2-AAC5-553F-AADBC53C207C}"/>
+                  </a:ext>
+                </a:extLst>
+              </p:cNvPr>
+              <p:cNvSpPr>
+                <a:spLocks noGrp="1" noRot="1" noChangeAspect="1" noMove="1" noResize="1" noEditPoints="1" noAdjustHandles="1" noChangeArrowheads="1" noChangeShapeType="1" noTextEdit="1"/>
+              </p:cNvSpPr>
+              <p:nvPr>
+                <p:ph idx="1"/>
+              </p:nvPr>
+            </p:nvSpPr>
+            <p:spPr>
+              <a:blipFill>
+                <a:blip r:embed="rId2"/>
+                <a:stretch>
+                  <a:fillRect l="-483"/>
+                </a:stretch>
+              </a:blipFill>
+            </p:spPr>
+            <p:txBody>
+              <a:bodyPr/>
+              <a:lstStyle/>
+              <a:p>
+                <a:r>
+                  <a:rPr lang="zh-TW" altLang="en-US">
+                    <a:noFill/>
+                  </a:rPr>
+                  <a:t> </a:t>
+                </a:r>
+              </a:p>
+            </p:txBody>
+          </p:sp>
+        </mc:Fallback>
+      </mc:AlternateContent>
+      <p:sp>
+        <p:nvSpPr>
+          <p:cNvPr id="4" name="Slide Number Placeholder 3">
+            <a:extLst>
+              <a:ext uri="{FF2B5EF4-FFF2-40B4-BE49-F238E27FC236}">
+                <a16:creationId xmlns:a16="http://schemas.microsoft.com/office/drawing/2014/main" id="{012A0B99-9112-8E28-D4DA-773C27213FD1}"/>
+              </a:ext>
+            </a:extLst>
+          </p:cNvPr>
+          <p:cNvSpPr>
+            <a:spLocks noGrp="1"/>
+          </p:cNvSpPr>
+          <p:nvPr>
+            <p:ph type="sldNum" sz="quarter" idx="12"/>
+          </p:nvPr>
+        </p:nvSpPr>
+        <p:spPr/>
+        <p:txBody>
+          <a:bodyPr/>
+          <a:lstStyle/>
+          <a:p>
+            <a:fld id="{34E21383-B02B-694B-B2AD-A967203CDE86}" type="slidenum">
+              <a:rPr lang="en-US" smtClean="0"/>
+              <a:t>11</a:t>
+            </a:fld>
+            <a:endParaRPr lang="en-US"/>
+          </a:p>
+        </p:txBody>
+      </p:sp>
+    </p:spTree>
+    <p:extLst>
+      <p:ext uri="{BB962C8B-B14F-4D97-AF65-F5344CB8AC3E}">
+        <p14:creationId xmlns:p14="http://schemas.microsoft.com/office/powerpoint/2010/main" val="2283638695"/>
+      </p:ext>
+    </p:extLst>
+  </p:cSld>
+  <p:clrMapOvr>
+    <a:masterClrMapping/>
+  </p:clrMapOvr>
+</p:sld>
+</file>
+
+<file path=ppt/slides/slide12.xml><?xml version="1.0" encoding="utf-8"?>
+<p:sld xmlns:a="http://schemas.openxmlformats.org/drawingml/2006/main" xmlns:r="http://schemas.openxmlformats.org/officeDocument/2006/relationships" xmlns:p="http://schemas.openxmlformats.org/presentationml/2006/main">
+  <p:cSld>
+    <p:spTree>
+      <p:nvGrpSpPr>
+        <p:cNvPr id="1" name=""/>
+        <p:cNvGrpSpPr/>
+        <p:nvPr/>
+      </p:nvGrpSpPr>
+      <p:grpSpPr>
+        <a:xfrm>
+          <a:off x="0" y="0"/>
+          <a:ext cx="0" cy="0"/>
+          <a:chOff x="0" y="0"/>
+          <a:chExt cx="0" cy="0"/>
+        </a:xfrm>
+      </p:grpSpPr>
+      <p:sp>
+        <p:nvSpPr>
+          <p:cNvPr id="2" name="Slide Number Placeholder 1">
+            <a:extLst>
+              <a:ext uri="{FF2B5EF4-FFF2-40B4-BE49-F238E27FC236}">
+                <a16:creationId xmlns:a16="http://schemas.microsoft.com/office/drawing/2014/main" id="{090E2491-AA9A-BF63-9395-E47BB3443C8F}"/>
+              </a:ext>
+            </a:extLst>
+          </p:cNvPr>
+          <p:cNvSpPr>
+            <a:spLocks noGrp="1"/>
+          </p:cNvSpPr>
+          <p:nvPr>
+            <p:ph type="sldNum" sz="quarter" idx="12"/>
+          </p:nvPr>
+        </p:nvSpPr>
+        <p:spPr/>
+        <p:txBody>
+          <a:bodyPr/>
+          <a:lstStyle/>
+          <a:p>
+            <a:fld id="{34E21383-B02B-694B-B2AD-A967203CDE86}" type="slidenum">
+              <a:rPr lang="en-US" smtClean="0"/>
+              <a:t>12</a:t>
+            </a:fld>
+            <a:endParaRPr lang="en-US"/>
+          </a:p>
+        </p:txBody>
+      </p:sp>
+      <p:pic>
+        <p:nvPicPr>
+          <p:cNvPr id="4" name="Picture 3">
+            <a:extLst>
+              <a:ext uri="{FF2B5EF4-FFF2-40B4-BE49-F238E27FC236}">
+                <a16:creationId xmlns:a16="http://schemas.microsoft.com/office/drawing/2014/main" id="{0575C55C-39ED-D1E3-ADBC-6F08C2F7E1F3}"/>
+              </a:ext>
+            </a:extLst>
+          </p:cNvPr>
+          <p:cNvPicPr>
+            <a:picLocks noChangeAspect="1"/>
+          </p:cNvPicPr>
+          <p:nvPr/>
+        </p:nvPicPr>
+        <p:blipFill>
+          <a:blip r:embed="rId2"/>
+          <a:stretch>
+            <a:fillRect/>
+          </a:stretch>
+        </p:blipFill>
+        <p:spPr>
+          <a:xfrm>
+            <a:off x="2210158" y="0"/>
+            <a:ext cx="7771683" cy="6858000"/>
+          </a:xfrm>
+          <a:prstGeom prst="rect">
+            <a:avLst/>
+          </a:prstGeom>
+        </p:spPr>
+      </p:pic>
+    </p:spTree>
+    <p:extLst>
+      <p:ext uri="{BB962C8B-B14F-4D97-AF65-F5344CB8AC3E}">
+        <p14:creationId xmlns:p14="http://schemas.microsoft.com/office/powerpoint/2010/main" val="2765617566"/>
+      </p:ext>
+    </p:extLst>
+  </p:cSld>
+  <p:clrMapOvr>
+    <a:masterClrMapping/>
+  </p:clrMapOvr>
+</p:sld>
+</file>
+
+<file path=ppt/slides/slide13.xml><?xml version="1.0" encoding="utf-8"?>
+<p:sld xmlns:a="http://schemas.openxmlformats.org/drawingml/2006/main" xmlns:r="http://schemas.openxmlformats.org/officeDocument/2006/relationships" xmlns:p="http://schemas.openxmlformats.org/presentationml/2006/main">
+  <p:cSld>
+    <p:spTree>
+      <p:nvGrpSpPr>
+        <p:cNvPr id="1" name=""/>
+        <p:cNvGrpSpPr/>
+        <p:nvPr/>
+      </p:nvGrpSpPr>
+      <p:grpSpPr>
+        <a:xfrm>
+          <a:off x="0" y="0"/>
+          <a:ext cx="0" cy="0"/>
+          <a:chOff x="0" y="0"/>
+          <a:chExt cx="0" cy="0"/>
+        </a:xfrm>
+      </p:grpSpPr>
+      <p:sp>
+        <p:nvSpPr>
+          <p:cNvPr id="2" name="Title 1">
+            <a:extLst>
+              <a:ext uri="{FF2B5EF4-FFF2-40B4-BE49-F238E27FC236}">
+                <a16:creationId xmlns:a16="http://schemas.microsoft.com/office/drawing/2014/main" id="{ED266BC7-D370-DB3B-3586-0BB7D3212D0F}"/>
+              </a:ext>
+            </a:extLst>
+          </p:cNvPr>
+          <p:cNvSpPr>
+            <a:spLocks noGrp="1"/>
+          </p:cNvSpPr>
+          <p:nvPr>
+            <p:ph type="title"/>
+          </p:nvPr>
+        </p:nvSpPr>
+        <p:spPr/>
+        <p:txBody>
+          <a:bodyPr/>
+          <a:lstStyle/>
+          <a:p>
+            <a:r>
+              <a:rPr lang="ja-JP" altLang="en-US"/>
+              <a:t>非機率抽樣</a:t>
+            </a:r>
+            <a:endParaRPr lang="en-US" dirty="0"/>
+          </a:p>
+        </p:txBody>
+      </p:sp>
+      <p:sp>
+        <p:nvSpPr>
+          <p:cNvPr id="3" name="Content Placeholder 2">
+            <a:extLst>
+              <a:ext uri="{FF2B5EF4-FFF2-40B4-BE49-F238E27FC236}">
+                <a16:creationId xmlns:a16="http://schemas.microsoft.com/office/drawing/2014/main" id="{4F08E529-29DD-AB2C-94BF-694DBD41AB6D}"/>
+              </a:ext>
+            </a:extLst>
+          </p:cNvPr>
+          <p:cNvSpPr>
+            <a:spLocks noGrp="1"/>
+          </p:cNvSpPr>
+          <p:nvPr>
+            <p:ph idx="1"/>
+          </p:nvPr>
+        </p:nvSpPr>
+        <p:spPr/>
+        <p:txBody>
+          <a:bodyPr>
+            <a:normAutofit/>
+          </a:bodyPr>
+          <a:lstStyle/>
+          <a:p>
+            <a:pPr>
+              <a:lnSpc>
+                <a:spcPct val="150000"/>
+              </a:lnSpc>
+              <a:buFont typeface="Wingdings" pitchFamily="2" charset="2"/>
+              <a:buChar char="l"/>
+            </a:pPr>
+            <a:r>
+              <a:rPr lang="ja-JP" altLang="en-US" sz="2000"/>
+              <a:t>非機率抽樣並非基於隨機原則，而是根據研究者的便利性、判斷或特定標準來選取樣本。</a:t>
+            </a:r>
+            <a:endParaRPr lang="en-US" altLang="ja-JP" sz="2000" dirty="0"/>
+          </a:p>
+          <a:p>
+            <a:pPr>
+              <a:lnSpc>
+                <a:spcPct val="150000"/>
+              </a:lnSpc>
+              <a:buFont typeface="Wingdings" pitchFamily="2" charset="2"/>
+              <a:buChar char="l"/>
+            </a:pPr>
+            <a:r>
+              <a:rPr lang="ja-JP" altLang="en-US" sz="2000"/>
+              <a:t>缺乏代表性， 可能集中在少數人，無法推論至全體母體。</a:t>
+            </a:r>
+            <a:endParaRPr lang="en-US" altLang="ja-JP" sz="2000" dirty="0"/>
+          </a:p>
+          <a:p>
+            <a:pPr>
+              <a:lnSpc>
+                <a:spcPct val="150000"/>
+              </a:lnSpc>
+              <a:buFont typeface="Wingdings" pitchFamily="2" charset="2"/>
+              <a:buChar char="l"/>
+            </a:pPr>
+            <a:r>
+              <a:rPr lang="ja-JP" altLang="en-US" sz="2000"/>
+              <a:t>抽樣機率不明，無法計算精確的抽樣誤差。</a:t>
+            </a:r>
+            <a:endParaRPr lang="en-US" altLang="ja-JP" sz="2000" dirty="0"/>
+          </a:p>
+          <a:p>
+            <a:pPr>
+              <a:lnSpc>
+                <a:spcPct val="150000"/>
+              </a:lnSpc>
+              <a:buFont typeface="Wingdings" pitchFamily="2" charset="2"/>
+              <a:buChar char="l"/>
+            </a:pPr>
+            <a:r>
+              <a:rPr lang="ja-JP" altLang="en-US" sz="2000"/>
+              <a:t>便利抽樣、判斷抽樣（專家抽樣）、滾雪球抽樣、配額抽樣都屬於非機率抽樣。</a:t>
+            </a:r>
+            <a:endParaRPr lang="en-US" altLang="ja-JP" sz="2000" dirty="0"/>
+          </a:p>
+          <a:p>
+            <a:pPr>
+              <a:lnSpc>
+                <a:spcPct val="150000"/>
+              </a:lnSpc>
+              <a:buFont typeface="Wingdings" pitchFamily="2" charset="2"/>
+              <a:buChar char="l"/>
+            </a:pPr>
+            <a:endParaRPr lang="en-US" sz="2000" dirty="0"/>
+          </a:p>
+          <a:p>
+            <a:pPr>
+              <a:buFont typeface="Wingdings" pitchFamily="2" charset="2"/>
+              <a:buChar char="l"/>
+            </a:pPr>
+            <a:endParaRPr lang="en-US" dirty="0"/>
+          </a:p>
+        </p:txBody>
+      </p:sp>
+      <p:sp>
+        <p:nvSpPr>
+          <p:cNvPr id="4" name="Slide Number Placeholder 3">
+            <a:extLst>
+              <a:ext uri="{FF2B5EF4-FFF2-40B4-BE49-F238E27FC236}">
+                <a16:creationId xmlns:a16="http://schemas.microsoft.com/office/drawing/2014/main" id="{C98085D9-FBDD-C940-3F14-8994BAC36532}"/>
+              </a:ext>
+            </a:extLst>
+          </p:cNvPr>
+          <p:cNvSpPr>
+            <a:spLocks noGrp="1"/>
+          </p:cNvSpPr>
+          <p:nvPr>
+            <p:ph type="sldNum" sz="quarter" idx="12"/>
+          </p:nvPr>
+        </p:nvSpPr>
+        <p:spPr/>
+        <p:txBody>
+          <a:bodyPr/>
+          <a:lstStyle/>
+          <a:p>
+            <a:fld id="{34E21383-B02B-694B-B2AD-A967203CDE86}" type="slidenum">
+              <a:rPr lang="en-US" smtClean="0"/>
+              <a:t>13</a:t>
+            </a:fld>
+            <a:endParaRPr lang="en-US"/>
+          </a:p>
+        </p:txBody>
+      </p:sp>
+    </p:spTree>
+    <p:extLst>
+      <p:ext uri="{BB962C8B-B14F-4D97-AF65-F5344CB8AC3E}">
+        <p14:creationId xmlns:p14="http://schemas.microsoft.com/office/powerpoint/2010/main" val="397422702"/>
+      </p:ext>
+    </p:extLst>
+  </p:cSld>
+  <p:clrMapOvr>
+    <a:masterClrMapping/>
+  </p:clrMapOvr>
+</p:sld>
+</file>
+
+<file path=ppt/slides/slide14.xml><?xml version="1.0" encoding="utf-8"?>
+<p:sld xmlns:a="http://schemas.openxmlformats.org/drawingml/2006/main" xmlns:r="http://schemas.openxmlformats.org/officeDocument/2006/relationships" xmlns:p="http://schemas.openxmlformats.org/presentationml/2006/main">
+  <p:cSld>
+    <p:spTree>
+      <p:nvGrpSpPr>
+        <p:cNvPr id="1" name=""/>
+        <p:cNvGrpSpPr/>
+        <p:nvPr/>
+      </p:nvGrpSpPr>
+      <p:grpSpPr>
+        <a:xfrm>
+          <a:off x="0" y="0"/>
+          <a:ext cx="0" cy="0"/>
+          <a:chOff x="0" y="0"/>
+          <a:chExt cx="0" cy="0"/>
+        </a:xfrm>
+      </p:grpSpPr>
+      <p:sp>
+        <p:nvSpPr>
+          <p:cNvPr id="2" name="Slide Number Placeholder 1">
+            <a:extLst>
+              <a:ext uri="{FF2B5EF4-FFF2-40B4-BE49-F238E27FC236}">
+                <a16:creationId xmlns:a16="http://schemas.microsoft.com/office/drawing/2014/main" id="{059EBEF9-A064-EC8F-F179-60480554D8D1}"/>
+              </a:ext>
+            </a:extLst>
+          </p:cNvPr>
+          <p:cNvSpPr>
+            <a:spLocks noGrp="1"/>
+          </p:cNvSpPr>
+          <p:nvPr>
+            <p:ph type="sldNum" sz="quarter" idx="12"/>
+          </p:nvPr>
+        </p:nvSpPr>
+        <p:spPr/>
+        <p:txBody>
+          <a:bodyPr/>
+          <a:lstStyle/>
+          <a:p>
+            <a:fld id="{34E21383-B02B-694B-B2AD-A967203CDE86}" type="slidenum">
+              <a:rPr lang="en-US" smtClean="0"/>
+              <a:t>14</a:t>
+            </a:fld>
+            <a:endParaRPr lang="en-US"/>
+          </a:p>
+        </p:txBody>
+      </p:sp>
+      <p:pic>
+        <p:nvPicPr>
+          <p:cNvPr id="4" name="Picture 3">
+            <a:extLst>
+              <a:ext uri="{FF2B5EF4-FFF2-40B4-BE49-F238E27FC236}">
+                <a16:creationId xmlns:a16="http://schemas.microsoft.com/office/drawing/2014/main" id="{AC7825AB-9123-046E-5144-047BBDB4FE4F}"/>
+              </a:ext>
+            </a:extLst>
+          </p:cNvPr>
+          <p:cNvPicPr>
+            <a:picLocks noChangeAspect="1"/>
+          </p:cNvPicPr>
+          <p:nvPr/>
+        </p:nvPicPr>
+        <p:blipFill>
+          <a:blip r:embed="rId2"/>
+          <a:stretch>
+            <a:fillRect/>
+          </a:stretch>
+        </p:blipFill>
+        <p:spPr>
+          <a:xfrm>
+            <a:off x="2059405" y="993274"/>
+            <a:ext cx="7772400" cy="5097346"/>
+          </a:xfrm>
+          <a:prstGeom prst="rect">
+            <a:avLst/>
+          </a:prstGeom>
+        </p:spPr>
+      </p:pic>
+    </p:spTree>
+    <p:extLst>
+      <p:ext uri="{BB962C8B-B14F-4D97-AF65-F5344CB8AC3E}">
+        <p14:creationId xmlns:p14="http://schemas.microsoft.com/office/powerpoint/2010/main" val="1103186742"/>
+      </p:ext>
+    </p:extLst>
+  </p:cSld>
+  <p:clrMapOvr>
+    <a:masterClrMapping/>
+  </p:clrMapOvr>
+</p:sld>
+</file>
+
+<file path=ppt/slides/slide15.xml><?xml version="1.0" encoding="utf-8"?>
+<p:sld xmlns:a="http://schemas.openxmlformats.org/drawingml/2006/main" xmlns:r="http://schemas.openxmlformats.org/officeDocument/2006/relationships" xmlns:p="http://schemas.openxmlformats.org/presentationml/2006/main">
+  <p:cSld>
+    <p:spTree>
+      <p:nvGrpSpPr>
+        <p:cNvPr id="1" name=""/>
+        <p:cNvGrpSpPr/>
+        <p:nvPr/>
+      </p:nvGrpSpPr>
+      <p:grpSpPr>
+        <a:xfrm>
+          <a:off x="0" y="0"/>
+          <a:ext cx="0" cy="0"/>
+          <a:chOff x="0" y="0"/>
+          <a:chExt cx="0" cy="0"/>
+        </a:xfrm>
+      </p:grpSpPr>
+      <p:sp>
+        <p:nvSpPr>
+          <p:cNvPr id="2" name="Title 1">
+            <a:extLst>
+              <a:ext uri="{FF2B5EF4-FFF2-40B4-BE49-F238E27FC236}">
+                <a16:creationId xmlns:a16="http://schemas.microsoft.com/office/drawing/2014/main" id="{ED266BC7-D370-DB3B-3586-0BB7D3212D0F}"/>
+              </a:ext>
+            </a:extLst>
+          </p:cNvPr>
+          <p:cNvSpPr>
+            <a:spLocks noGrp="1"/>
+          </p:cNvSpPr>
+          <p:nvPr>
+            <p:ph type="title"/>
+          </p:nvPr>
+        </p:nvSpPr>
+        <p:spPr/>
+        <p:txBody>
+          <a:bodyPr/>
+          <a:lstStyle/>
+          <a:p>
+            <a:r>
+              <a:rPr lang="ja-JP" altLang="en-US"/>
+              <a:t>網路調查的非機率抽樣</a:t>
+            </a:r>
+            <a:endParaRPr lang="en-US" dirty="0"/>
+          </a:p>
+        </p:txBody>
+      </p:sp>
+      <p:sp>
+        <p:nvSpPr>
+          <p:cNvPr id="3" name="Content Placeholder 2">
+            <a:extLst>
+              <a:ext uri="{FF2B5EF4-FFF2-40B4-BE49-F238E27FC236}">
+                <a16:creationId xmlns:a16="http://schemas.microsoft.com/office/drawing/2014/main" id="{4F08E529-29DD-AB2C-94BF-694DBD41AB6D}"/>
+              </a:ext>
+            </a:extLst>
+          </p:cNvPr>
+          <p:cNvSpPr>
+            <a:spLocks noGrp="1"/>
+          </p:cNvSpPr>
+          <p:nvPr>
+            <p:ph idx="1"/>
+          </p:nvPr>
+        </p:nvSpPr>
+        <p:spPr/>
+        <p:txBody>
+          <a:bodyPr>
+            <a:normAutofit fontScale="85000" lnSpcReduction="10000"/>
+          </a:bodyPr>
+          <a:lstStyle/>
+          <a:p>
+            <a:pPr>
+              <a:lnSpc>
+                <a:spcPct val="150000"/>
+              </a:lnSpc>
+              <a:buFont typeface="Wingdings" pitchFamily="2" charset="2"/>
+              <a:buChar char="l"/>
+            </a:pPr>
+            <a:r>
+              <a:rPr lang="ja-JP" altLang="en-US" sz="2000"/>
+              <a:t>自願參與偏差 </a:t>
+            </a:r>
+            <a:r>
+              <a:rPr lang="en-US" altLang="ja-JP" sz="2000" dirty="0"/>
+              <a:t>(Self-Selection Bias)</a:t>
+            </a:r>
+            <a:r>
+              <a:rPr lang="ja-JP" altLang="en-US" sz="2000"/>
+              <a:t>：由對該主題感興趣、有強烈意見，或單純想領取獎勵的人自行決定加入。</a:t>
+            </a:r>
+            <a:endParaRPr lang="en-US" altLang="ja-JP" sz="2000" dirty="0"/>
+          </a:p>
+          <a:p>
+            <a:pPr>
+              <a:lnSpc>
+                <a:spcPct val="150000"/>
+              </a:lnSpc>
+              <a:buFont typeface="Wingdings" pitchFamily="2" charset="2"/>
+              <a:buChar char="l"/>
+            </a:pPr>
+            <a:r>
+              <a:rPr lang="ja-JP" altLang="en-US" sz="2000"/>
+              <a:t>涵蓋誤差 </a:t>
+            </a:r>
+            <a:r>
+              <a:rPr lang="en-US" altLang="ja-JP" sz="2000" dirty="0"/>
+              <a:t>(Coverage Error)</a:t>
+            </a:r>
+            <a:r>
+              <a:rPr lang="ja-JP" altLang="en-US" sz="2000"/>
+              <a:t>：並非所有人都有同等的機會上網或看到調查連結。例如高齡族群、低收入者的上網頻率較低。</a:t>
+            </a:r>
+            <a:endParaRPr lang="en-US" altLang="ja-JP" sz="2000" dirty="0"/>
+          </a:p>
+          <a:p>
+            <a:pPr>
+              <a:lnSpc>
+                <a:spcPct val="150000"/>
+              </a:lnSpc>
+              <a:buFont typeface="Wingdings" pitchFamily="2" charset="2"/>
+              <a:buChar char="l"/>
+            </a:pPr>
+            <a:r>
+              <a:rPr lang="ja-JP" altLang="en-US" sz="2000"/>
+              <a:t>非隨機的「便利性」：研究者通常將連結發布在自己能觸及的社群媒體、論壇或 </a:t>
+            </a:r>
+            <a:r>
+              <a:rPr lang="en-US" altLang="ja-JP" sz="2000" dirty="0"/>
+              <a:t>LINE </a:t>
+            </a:r>
+            <a:r>
+              <a:rPr lang="ja-JP" altLang="en-US" sz="2000"/>
+              <a:t>群組中。受限於研究者的「同溫層」。</a:t>
+            </a:r>
+            <a:endParaRPr lang="en-US" altLang="ja-JP" sz="2000" dirty="0"/>
+          </a:p>
+          <a:p>
+            <a:pPr>
+              <a:lnSpc>
+                <a:spcPct val="150000"/>
+              </a:lnSpc>
+              <a:buFont typeface="Wingdings" pitchFamily="2" charset="2"/>
+              <a:buChar char="l"/>
+            </a:pPr>
+            <a:r>
+              <a:rPr lang="ja-JP" altLang="en-US" sz="2000"/>
+              <a:t>樣本性質難以驗證：</a:t>
+            </a:r>
+          </a:p>
+          <a:p>
+            <a:pPr>
+              <a:lnSpc>
+                <a:spcPct val="150000"/>
+              </a:lnSpc>
+              <a:buFont typeface="Courier New" panose="02070309020205020404" pitchFamily="49" charset="0"/>
+              <a:buChar char="o"/>
+            </a:pPr>
+            <a:r>
+              <a:rPr lang="ja-JP" altLang="en-US" sz="2000"/>
+              <a:t>重複填答： 同一人可能為了獎品多次填寫。</a:t>
+            </a:r>
+          </a:p>
+          <a:p>
+            <a:pPr>
+              <a:lnSpc>
+                <a:spcPct val="150000"/>
+              </a:lnSpc>
+              <a:buFont typeface="Courier New" panose="02070309020205020404" pitchFamily="49" charset="0"/>
+              <a:buChar char="o"/>
+            </a:pPr>
+            <a:r>
+              <a:rPr lang="ja-JP" altLang="en-US" sz="2000"/>
+              <a:t>機器人與無效樣本： </a:t>
+            </a:r>
+            <a:r>
+              <a:rPr lang="en-US" altLang="ja-JP" sz="2000" dirty="0"/>
+              <a:t>AI </a:t>
+            </a:r>
+            <a:r>
+              <a:rPr lang="ja-JP" altLang="en-US" sz="2000"/>
+              <a:t>或自動化程式可能產生大量垃圾數據。</a:t>
+            </a:r>
+          </a:p>
+          <a:p>
+            <a:pPr>
+              <a:lnSpc>
+                <a:spcPct val="150000"/>
+              </a:lnSpc>
+              <a:buFont typeface="Courier New" panose="02070309020205020404" pitchFamily="49" charset="0"/>
+              <a:buChar char="o"/>
+            </a:pPr>
+            <a:r>
+              <a:rPr lang="ja-JP" altLang="en-US" sz="2000"/>
+              <a:t>身分造假： 受訪者可能為了領取獎勵而虛報符合填答問卷條件的年齡或職業。</a:t>
+            </a:r>
+            <a:endParaRPr lang="en-US" altLang="ja-JP" sz="2000" dirty="0"/>
+          </a:p>
+          <a:p>
+            <a:pPr>
+              <a:lnSpc>
+                <a:spcPct val="150000"/>
+              </a:lnSpc>
+              <a:buFont typeface="Wingdings" pitchFamily="2" charset="2"/>
+              <a:buChar char="l"/>
+            </a:pPr>
+            <a:endParaRPr lang="en-US" sz="2000" dirty="0"/>
+          </a:p>
+          <a:p>
+            <a:pPr>
+              <a:buFont typeface="Wingdings" pitchFamily="2" charset="2"/>
+              <a:buChar char="l"/>
+            </a:pPr>
+            <a:endParaRPr lang="en-US" dirty="0"/>
+          </a:p>
+        </p:txBody>
+      </p:sp>
+      <p:sp>
+        <p:nvSpPr>
+          <p:cNvPr id="4" name="Slide Number Placeholder 3">
+            <a:extLst>
+              <a:ext uri="{FF2B5EF4-FFF2-40B4-BE49-F238E27FC236}">
+                <a16:creationId xmlns:a16="http://schemas.microsoft.com/office/drawing/2014/main" id="{C98085D9-FBDD-C940-3F14-8994BAC36532}"/>
+              </a:ext>
+            </a:extLst>
+          </p:cNvPr>
+          <p:cNvSpPr>
+            <a:spLocks noGrp="1"/>
+          </p:cNvSpPr>
+          <p:nvPr>
+            <p:ph type="sldNum" sz="quarter" idx="12"/>
+          </p:nvPr>
+        </p:nvSpPr>
+        <p:spPr/>
+        <p:txBody>
+          <a:bodyPr/>
+          <a:lstStyle/>
+          <a:p>
+            <a:fld id="{34E21383-B02B-694B-B2AD-A967203CDE86}" type="slidenum">
+              <a:rPr lang="en-US" smtClean="0"/>
+              <a:t>15</a:t>
+            </a:fld>
+            <a:endParaRPr lang="en-US"/>
+          </a:p>
+        </p:txBody>
+      </p:sp>
+    </p:spTree>
+    <p:extLst>
+      <p:ext uri="{BB962C8B-B14F-4D97-AF65-F5344CB8AC3E}">
+        <p14:creationId xmlns:p14="http://schemas.microsoft.com/office/powerpoint/2010/main" val="1700727804"/>
+      </p:ext>
+    </p:extLst>
+  </p:cSld>
+  <p:clrMapOvr>
+    <a:masterClrMapping/>
+  </p:clrMapOvr>
+</p:sld>
+</file>
+
+<file path=ppt/slides/slide16.xml><?xml version="1.0" encoding="utf-8"?>
+<p:sld xmlns:a="http://schemas.openxmlformats.org/drawingml/2006/main" xmlns:r="http://schemas.openxmlformats.org/officeDocument/2006/relationships" xmlns:p="http://schemas.openxmlformats.org/presentationml/2006/main">
+  <p:cSld>
+    <p:spTree>
+      <p:nvGrpSpPr>
+        <p:cNvPr id="1" name=""/>
+        <p:cNvGrpSpPr/>
+        <p:nvPr/>
+      </p:nvGrpSpPr>
+      <p:grpSpPr>
+        <a:xfrm>
+          <a:off x="0" y="0"/>
+          <a:ext cx="0" cy="0"/>
+          <a:chOff x="0" y="0"/>
+          <a:chExt cx="0" cy="0"/>
+        </a:xfrm>
+      </p:grpSpPr>
+      <p:sp>
+        <p:nvSpPr>
           <p:cNvPr id="2" name="Title 1">
             <a:extLst>
               <a:ext uri="{FF2B5EF4-FFF2-40B4-BE49-F238E27FC236}">
@@ -4289,7 +6982,7 @@
           <a:p>
             <a:fld id="{34E21383-B02B-694B-B2AD-A967203CDE86}" type="slidenum">
               <a:rPr lang="en-US" smtClean="0"/>
-              <a:t>10</a:t>
+              <a:t>16</a:t>
             </a:fld>
             <a:endParaRPr lang="en-US"/>
           </a:p>
@@ -4308,7 +7001,7 @@
 </p:sld>
 </file>
 
-<file path=ppt/slides/slide11.xml><?xml version="1.0" encoding="utf-8"?>
+<file path=ppt/slides/slide17.xml><?xml version="1.0" encoding="utf-8"?>
 <p:sld xmlns:a="http://schemas.openxmlformats.org/drawingml/2006/main" xmlns:r="http://schemas.openxmlformats.org/officeDocument/2006/relationships" xmlns:p="http://schemas.openxmlformats.org/presentationml/2006/main">
   <p:cSld>
     <p:spTree>
@@ -4978,7 +7671,7 @@
           <a:p>
             <a:fld id="{34E21383-B02B-694B-B2AD-A967203CDE86}" type="slidenum">
               <a:rPr lang="en-US" smtClean="0"/>
-              <a:t>11</a:t>
+              <a:t>17</a:t>
             </a:fld>
             <a:endParaRPr lang="en-US"/>
           </a:p>
@@ -4997,7 +7690,7 @@
 </p:sld>
 </file>
 
-<file path=ppt/slides/slide12.xml><?xml version="1.0" encoding="utf-8"?>
+<file path=ppt/slides/slide18.xml><?xml version="1.0" encoding="utf-8"?>
 <p:sld xmlns:a="http://schemas.openxmlformats.org/drawingml/2006/main" xmlns:r="http://schemas.openxmlformats.org/officeDocument/2006/relationships" xmlns:p="http://schemas.openxmlformats.org/presentationml/2006/main">
   <p:cSld>
     <p:spTree>
@@ -5219,7 +7912,7 @@
           <a:p>
             <a:fld id="{34E21383-B02B-694B-B2AD-A967203CDE86}" type="slidenum">
               <a:rPr lang="en-US" smtClean="0"/>
-              <a:t>12</a:t>
+              <a:t>18</a:t>
             </a:fld>
             <a:endParaRPr lang="en-US"/>
           </a:p>
@@ -5542,23 +8235,17 @@
               <a:buChar char="l"/>
             </a:pPr>
             <a:r>
-              <a:rPr lang="en-US" sz="2000" dirty="0" err="1"/>
-              <a:t>網路普及之後，研究者可以利用email寄問</a:t>
-            </a:r>
-            <a:r>
-              <a:rPr lang="zh-TW" altLang="en-US" sz="2000" dirty="0"/>
-              <a:t>卷給受訪者</a:t>
-            </a:r>
-            <a:r>
-              <a:rPr lang="en-US" sz="2000" dirty="0"/>
-              <a:t>，</a:t>
-            </a:r>
-            <a:r>
-              <a:rPr lang="en-US" sz="2000" dirty="0" err="1"/>
-              <a:t>或者請受訪者直接登入網路介面回答問題</a:t>
-            </a:r>
-            <a:r>
-              <a:rPr lang="en-US" sz="2000" dirty="0"/>
+              <a:rPr lang="en-US" sz="2000" dirty="0" err="1">
+                <a:latin typeface="MingLiU" panose="02020509000000000000" pitchFamily="49" charset="-120"/>
+                <a:ea typeface="MingLiU" panose="02020509000000000000" pitchFamily="49" charset="-120"/>
+              </a:rPr>
+              <a:t>早在巴比倫時代，當時的人想要對農耕的方式與面積進行調查</a:t>
+            </a:r>
+            <a:r>
+              <a:rPr lang="en-US" sz="2000" dirty="0">
+                <a:latin typeface="MingLiU" panose="02020509000000000000" pitchFamily="49" charset="-120"/>
+                <a:ea typeface="MingLiU" panose="02020509000000000000" pitchFamily="49" charset="-120"/>
+              </a:rPr>
               <a:t>。</a:t>
             </a:r>
           </a:p>
@@ -5571,12 +8258,18 @@
               <a:buChar char="l"/>
             </a:pPr>
             <a:r>
-              <a:rPr lang="en-US" sz="2000" dirty="0" err="1"/>
-              <a:t>出現越來越多方法克服非機率抽樣的問題，使網路調查的結果更接近電話調查或者面對面調查</a:t>
-            </a:r>
-            <a:r>
-              <a:rPr lang="en-US" sz="2000" dirty="0"/>
-              <a:t>。</a:t>
+              <a:rPr lang="en-US" sz="2000" dirty="0" err="1">
+                <a:latin typeface="MingLiU" panose="02020509000000000000" pitchFamily="49" charset="-120"/>
+                <a:ea typeface="MingLiU" panose="02020509000000000000" pitchFamily="49" charset="-120"/>
+              </a:rPr>
+              <a:t>工業革命之前，人口不多，可以把全國分成若干區域進行全體人口的調查</a:t>
+            </a:r>
+            <a:r>
+              <a:rPr lang="en-US" sz="2000" dirty="0">
+                <a:latin typeface="MingLiU" panose="02020509000000000000" pitchFamily="49" charset="-120"/>
+                <a:ea typeface="MingLiU" panose="02020509000000000000" pitchFamily="49" charset="-120"/>
+              </a:rPr>
+              <a:t>(census)。</a:t>
             </a:r>
           </a:p>
           <a:p>
@@ -5588,12 +8281,46 @@
               <a:buChar char="l"/>
             </a:pPr>
             <a:r>
-              <a:rPr lang="en-US" sz="2000" dirty="0" err="1"/>
-              <a:t>網路調查有許多優點，主要可以克服透過訪員接觸受訪者的問題，改由受訪者自己填寫</a:t>
-            </a:r>
-            <a:r>
-              <a:rPr lang="en-US" sz="2000" dirty="0"/>
-              <a:t>。</a:t>
+              <a:rPr lang="zh-TW" altLang="en-US" sz="2000" dirty="0">
+                <a:latin typeface="MingLiU" panose="02020509000000000000" pitchFamily="49" charset="-120"/>
+                <a:ea typeface="MingLiU" panose="02020509000000000000" pitchFamily="49" charset="-120"/>
+              </a:rPr>
+              <a:t>人口增加之後，</a:t>
+            </a:r>
+            <a:r>
+              <a:rPr lang="en-US" altLang="zh-TW" sz="2000" dirty="0" err="1">
+                <a:latin typeface="MingLiU" panose="02020509000000000000" pitchFamily="49" charset="-120"/>
+                <a:ea typeface="MingLiU" panose="02020509000000000000" pitchFamily="49" charset="-120"/>
+              </a:rPr>
+              <a:t>調查全體母體</a:t>
+            </a:r>
+            <a:r>
+              <a:rPr lang="zh-TW" altLang="en-US" sz="2000" dirty="0">
+                <a:latin typeface="MingLiU" panose="02020509000000000000" pitchFamily="49" charset="-120"/>
+                <a:ea typeface="MingLiU" panose="02020509000000000000" pitchFamily="49" charset="-120"/>
+              </a:rPr>
+              <a:t>變得</a:t>
+            </a:r>
+            <a:r>
+              <a:rPr lang="en-US" altLang="zh-TW" sz="2000" dirty="0" err="1">
+                <a:latin typeface="MingLiU" panose="02020509000000000000" pitchFamily="49" charset="-120"/>
+                <a:ea typeface="MingLiU" panose="02020509000000000000" pitchFamily="49" charset="-120"/>
+              </a:rPr>
+              <a:t>不可行</a:t>
+            </a:r>
+            <a:r>
+              <a:rPr lang="zh-TW" altLang="en-US" sz="2000" dirty="0">
+                <a:latin typeface="MingLiU" panose="02020509000000000000" pitchFamily="49" charset="-120"/>
+                <a:ea typeface="MingLiU" panose="02020509000000000000" pitchFamily="49" charset="-120"/>
+              </a:rPr>
+              <a:t>。因此從</a:t>
+            </a:r>
+            <a:r>
+              <a:rPr lang="en-US" sz="2000" dirty="0">
+                <a:latin typeface="MingLiU" panose="02020509000000000000" pitchFamily="49" charset="-120"/>
+                <a:ea typeface="MingLiU" panose="02020509000000000000" pitchFamily="49" charset="-120"/>
+              </a:rPr>
+              <a:t>1895年到1934年，學者開始討論抽樣調查的方法，包括立意抽樣，也就是根據普查把全國一直細分到街道進行抽樣。</a:t>
             </a:r>
           </a:p>
           <a:p>
@@ -5605,12 +8332,27 @@
               <a:buChar char="l"/>
             </a:pPr>
             <a:r>
-              <a:rPr lang="en-US" sz="2000" dirty="0" err="1"/>
-              <a:t>網路調查加上實驗設計，受到研究者的歡迎</a:t>
-            </a:r>
-            <a:r>
-              <a:rPr lang="en-US" sz="2000" dirty="0"/>
-              <a:t>。</a:t>
+              <a:rPr lang="en-US" sz="2000" dirty="0">
+                <a:latin typeface="MingLiU" panose="02020509000000000000" pitchFamily="49" charset="-120"/>
+                <a:ea typeface="MingLiU" panose="02020509000000000000" pitchFamily="49" charset="-120"/>
+              </a:rPr>
+              <a:t>到了1940年代，機率抽樣成為主流，政府與民調公司從母體中抽取部分的樣本，透過電話、面對面、郵寄問卷進行調查。</a:t>
+            </a:r>
+          </a:p>
+          <a:p>
+            <a:pPr>
+              <a:lnSpc>
+                <a:spcPct val="150000"/>
+              </a:lnSpc>
+              <a:buFont typeface="Wingdings" pitchFamily="2" charset="2"/>
+              <a:buChar char="l"/>
+            </a:pPr>
+            <a:r>
+              <a:rPr lang="en-US" sz="2000" dirty="0">
+                <a:latin typeface="MingLiU" panose="02020509000000000000" pitchFamily="49" charset="-120"/>
+                <a:ea typeface="MingLiU" panose="02020509000000000000" pitchFamily="49" charset="-120"/>
+              </a:rPr>
+              <a:t>到了1970年代，以電腦輔助的電話訪問(CATI)開始流行。1982年出現網際網路，開始有人使用email進行調查。</a:t>
             </a:r>
           </a:p>
           <a:p>
@@ -5893,335 +8635,146 @@
           <a:p>
             <a:r>
               <a:rPr lang="ja-JP" altLang="en-US"/>
-              <a:t>機率抽樣</a:t>
+              <a:t>機率抽樣的元素（一）</a:t>
             </a:r>
             <a:endParaRPr lang="en-US" dirty="0"/>
           </a:p>
         </p:txBody>
       </p:sp>
-      <mc:AlternateContent xmlns:mc="http://schemas.openxmlformats.org/markup-compatibility/2006" xmlns:a14="http://schemas.microsoft.com/office/drawing/2010/main">
-        <mc:Choice Requires="a14">
-          <p:sp>
-            <p:nvSpPr>
-              <p:cNvPr id="3" name="Content Placeholder 2">
-                <a:extLst>
-                  <a:ext uri="{FF2B5EF4-FFF2-40B4-BE49-F238E27FC236}">
-                    <a16:creationId xmlns:a16="http://schemas.microsoft.com/office/drawing/2014/main" id="{4F08E529-29DD-AB2C-94BF-694DBD41AB6D}"/>
-                  </a:ext>
-                </a:extLst>
-              </p:cNvPr>
-              <p:cNvSpPr>
-                <a:spLocks noGrp="1"/>
-              </p:cNvSpPr>
-              <p:nvPr>
-                <p:ph idx="1"/>
-              </p:nvPr>
-            </p:nvSpPr>
-            <p:spPr/>
-            <p:txBody>
-              <a:bodyPr>
-                <a:normAutofit fontScale="92500" lnSpcReduction="10000"/>
-              </a:bodyPr>
-              <a:lstStyle/>
-              <a:p>
-                <a:pPr>
-                  <a:lnSpc>
-                    <a:spcPct val="150000"/>
-                  </a:lnSpc>
-                  <a:buFont typeface="Wingdings" pitchFamily="2" charset="2"/>
-                  <a:buChar char="l"/>
-                </a:pPr>
-                <a:r>
-                  <a:rPr lang="ja-JP" altLang="en-US" sz="2000"/>
-                  <a:t>如果母體中的每一個成員都有一個大於零且已知的被選中機會，稱為機率抽樣。</a:t>
-                </a:r>
-                <a:endParaRPr lang="en-US" altLang="ja-JP" sz="2000" dirty="0"/>
-              </a:p>
-              <a:p>
-                <a:pPr>
-                  <a:lnSpc>
-                    <a:spcPct val="150000"/>
-                  </a:lnSpc>
-                  <a:buFont typeface="Wingdings" pitchFamily="2" charset="2"/>
-                  <a:buChar char="l"/>
-                </a:pPr>
-                <a:r>
-                  <a:rPr lang="ja-JP" altLang="en-US" sz="2000"/>
-                  <a:t>由於遵循隨機原則，研究者可以使用統計公式計算信心水準與誤差範圍，使得樣本特徵可以推論至整個母體。</a:t>
-                </a:r>
-                <a:endParaRPr lang="en-US" altLang="ja-JP" sz="2000" dirty="0"/>
-              </a:p>
-              <a:p>
-                <a:pPr>
-                  <a:lnSpc>
-                    <a:spcPct val="150000"/>
-                  </a:lnSpc>
-                  <a:buFont typeface="Wingdings" pitchFamily="2" charset="2"/>
-                  <a:buChar char="l"/>
-                </a:pPr>
-                <a:r>
-                  <a:rPr lang="ja-JP" altLang="en-US" sz="2000"/>
-                  <a:t>假設我們進行了一次網路調查，回收了 </a:t>
-                </a:r>
-                <a:r>
-                  <a:rPr lang="en-US" altLang="ja-JP" sz="2000" dirty="0"/>
-                  <a:t>1,067 </a:t>
-                </a:r>
-                <a:r>
-                  <a:rPr lang="ja-JP" altLang="en-US" sz="2000"/>
-                  <a:t>份 有效問卷，假設得到結果如下：</a:t>
-                </a:r>
-                <a:endParaRPr lang="en-US" altLang="ja-JP" sz="2000" dirty="0"/>
-              </a:p>
-              <a:p>
-                <a:pPr>
-                  <a:lnSpc>
-                    <a:spcPct val="150000"/>
-                  </a:lnSpc>
-                  <a:buFont typeface="Wingdings" pitchFamily="2" charset="2"/>
-                  <a:buChar char="l"/>
-                </a:pPr>
-                <a:r>
-                  <a:rPr lang="ja-JP" altLang="en-US" sz="2000"/>
-                  <a:t>樣本平均值 </a:t>
-                </a:r>
-                <a:r>
-                  <a:rPr lang="en-US" altLang="ja-JP" sz="2000" dirty="0"/>
-                  <a:t>(</a:t>
-                </a:r>
-                <a14:m>
-                  <m:oMath xmlns:m="http://schemas.openxmlformats.org/officeDocument/2006/math">
-                    <m:acc>
-                      <m:accPr>
-                        <m:chr m:val="̅"/>
-                        <m:ctrlPr>
-                          <a:rPr lang="en-US" altLang="ja-JP" sz="2000" i="1" smtClean="0">
-                            <a:latin typeface="Cambria Math" panose="02040503050406030204" pitchFamily="18" charset="0"/>
-                          </a:rPr>
-                        </m:ctrlPr>
-                      </m:accPr>
-                      <m:e>
-                        <m:r>
-                          <a:rPr lang="en-US" altLang="ja-JP" sz="2000" b="0" i="1" smtClean="0">
-                            <a:latin typeface="Cambria Math" panose="02040503050406030204" pitchFamily="18" charset="0"/>
-                          </a:rPr>
-                          <m:t>𝑋</m:t>
-                        </m:r>
-                      </m:e>
-                    </m:acc>
-                  </m:oMath>
-                </a14:m>
-                <a:r>
-                  <a:rPr lang="en-US" altLang="ja-JP" sz="2000" dirty="0"/>
-                  <a:t>)</a:t>
-                </a:r>
-                <a:r>
-                  <a:rPr lang="ja-JP" altLang="en-US" sz="2000"/>
-                  <a:t>：</a:t>
-                </a:r>
-                <a:r>
-                  <a:rPr lang="en-US" altLang="ja-JP" sz="2000" dirty="0"/>
-                  <a:t>5.5 </a:t>
-                </a:r>
-                <a:r>
-                  <a:rPr lang="ja-JP" altLang="en-US" sz="2000"/>
-                  <a:t>分，</a:t>
-                </a:r>
-                <a:endParaRPr lang="en-US" altLang="ja-JP" sz="2000" dirty="0"/>
-              </a:p>
-              <a:p>
-                <a:pPr>
-                  <a:lnSpc>
-                    <a:spcPct val="150000"/>
-                  </a:lnSpc>
-                  <a:buFont typeface="Wingdings" pitchFamily="2" charset="2"/>
-                  <a:buChar char="l"/>
-                </a:pPr>
-                <a:r>
-                  <a:rPr lang="ja-JP" altLang="en-US" sz="2000"/>
-                  <a:t>樣本標準差 </a:t>
-                </a:r>
-                <a:r>
-                  <a:rPr lang="en-US" altLang="ja-JP" sz="2000" dirty="0"/>
-                  <a:t>(s )</a:t>
-                </a:r>
-                <a:r>
-                  <a:rPr lang="ja-JP" altLang="en-US" sz="2000"/>
-                  <a:t>： </a:t>
-                </a:r>
-                <a:r>
-                  <a:rPr lang="en-US" altLang="ja-JP" sz="2000" dirty="0"/>
-                  <a:t>2.5 </a:t>
-                </a:r>
-                <a:r>
-                  <a:rPr lang="ja-JP" altLang="en-US" sz="2000"/>
-                  <a:t>分</a:t>
-                </a:r>
-                <a:endParaRPr lang="en-US" altLang="ja-JP" sz="2000" dirty="0"/>
-              </a:p>
-              <a:p>
-                <a:pPr>
-                  <a:lnSpc>
-                    <a:spcPct val="150000"/>
-                  </a:lnSpc>
-                  <a:buFont typeface="Wingdings" pitchFamily="2" charset="2"/>
-                  <a:buChar char="l"/>
-                </a:pPr>
-                <a:r>
-                  <a:rPr lang="ja-JP" altLang="en-US" sz="2000"/>
-                  <a:t>信心水準：</a:t>
-                </a:r>
-                <a:r>
-                  <a:rPr lang="en-US" altLang="ja-JP" sz="2000" dirty="0"/>
-                  <a:t>95% (</a:t>
-                </a:r>
-                <a:r>
-                  <a:rPr lang="en-US" altLang="ja-JP" sz="2000" i="1" dirty="0"/>
-                  <a:t>z</a:t>
-                </a:r>
-                <a:r>
-                  <a:rPr lang="en-US" altLang="ja-JP" sz="2000" dirty="0"/>
-                  <a:t> = 1.96)</a:t>
-                </a:r>
-                <a:r>
-                  <a:rPr lang="ja-JP" altLang="en-US" sz="2000"/>
-                  <a:t> </a:t>
-                </a:r>
-                <a:endParaRPr lang="en-US" altLang="ja-JP" sz="2000" dirty="0"/>
-              </a:p>
-              <a:p>
-                <a:pPr>
-                  <a:lnSpc>
-                    <a:spcPct val="150000"/>
-                  </a:lnSpc>
-                  <a:buFont typeface="Wingdings" pitchFamily="2" charset="2"/>
-                  <a:buChar char="l"/>
-                </a:pPr>
-                <a:r>
-                  <a:rPr lang="ja-JP" altLang="en-US" sz="2000"/>
-                  <a:t>標準誤 </a:t>
-                </a:r>
-                <a:r>
-                  <a:rPr lang="en-US" altLang="ja-JP" sz="2000" dirty="0"/>
-                  <a:t>(Standard Error)</a:t>
-                </a:r>
-                <a:r>
-                  <a:rPr lang="ja-JP" altLang="en-US" sz="2000"/>
-                  <a:t>：</a:t>
-                </a:r>
-                <a14:m>
-                  <m:oMath xmlns:m="http://schemas.openxmlformats.org/officeDocument/2006/math">
-                    <m:f>
-                      <m:fPr>
-                        <m:ctrlPr>
-                          <a:rPr lang="en-US" altLang="ja-JP" sz="2000" i="1" smtClean="0">
-                            <a:latin typeface="Cambria Math" panose="02040503050406030204" pitchFamily="18" charset="0"/>
-                          </a:rPr>
-                        </m:ctrlPr>
-                      </m:fPr>
-                      <m:num>
-                        <m:r>
-                          <a:rPr lang="en-US" altLang="ja-JP" sz="2000" b="0" i="1" smtClean="0">
-                            <a:latin typeface="Cambria Math" panose="02040503050406030204" pitchFamily="18" charset="0"/>
-                          </a:rPr>
-                          <m:t>2.5</m:t>
-                        </m:r>
-                      </m:num>
-                      <m:den>
-                        <m:rad>
-                          <m:radPr>
-                            <m:degHide m:val="on"/>
-                            <m:ctrlPr>
-                              <a:rPr lang="en-US" altLang="ja-JP" sz="2000" i="1" smtClean="0">
-                                <a:latin typeface="Cambria Math" panose="02040503050406030204" pitchFamily="18" charset="0"/>
-                              </a:rPr>
-                            </m:ctrlPr>
-                          </m:radPr>
-                          <m:deg/>
-                          <m:e>
-                            <m:r>
-                              <a:rPr lang="en-US" altLang="ja-JP" sz="2000" b="0" i="1" smtClean="0">
-                                <a:latin typeface="Cambria Math" panose="02040503050406030204" pitchFamily="18" charset="0"/>
-                              </a:rPr>
-                              <m:t>1067</m:t>
-                            </m:r>
-                          </m:e>
-                        </m:rad>
-                      </m:den>
-                    </m:f>
-                  </m:oMath>
-                </a14:m>
-                <a:r>
-                  <a:rPr lang="en-US" altLang="ja-JP" sz="2000" dirty="0"/>
-                  <a:t> </a:t>
-                </a:r>
-                <a14:m>
-                  <m:oMath xmlns:m="http://schemas.openxmlformats.org/officeDocument/2006/math">
-                    <m:r>
-                      <a:rPr lang="en-US" altLang="ja-JP" sz="2000" i="1" dirty="0" smtClean="0">
-                        <a:latin typeface="Cambria Math" panose="02040503050406030204" pitchFamily="18" charset="0"/>
-                        <a:ea typeface="Cambria Math" panose="02040503050406030204" pitchFamily="18" charset="0"/>
-                      </a:rPr>
-                      <m:t>≈</m:t>
-                    </m:r>
-                  </m:oMath>
-                </a14:m>
-                <a:r>
-                  <a:rPr lang="en-US" altLang="ja-JP" sz="2000" dirty="0"/>
-                  <a:t> 0.0766</a:t>
-                </a:r>
-                <a:endParaRPr lang="en-US" sz="2000" dirty="0"/>
-              </a:p>
-              <a:p>
-                <a:pPr>
-                  <a:buFont typeface="Wingdings" pitchFamily="2" charset="2"/>
-                  <a:buChar char="l"/>
-                </a:pPr>
-                <a:endParaRPr lang="en-US" dirty="0"/>
-              </a:p>
-            </p:txBody>
-          </p:sp>
-        </mc:Choice>
-        <mc:Fallback xmlns="">
-          <p:sp>
-            <p:nvSpPr>
-              <p:cNvPr id="3" name="Content Placeholder 2">
-                <a:extLst>
-                  <a:ext uri="{FF2B5EF4-FFF2-40B4-BE49-F238E27FC236}">
-                    <a16:creationId xmlns:a16="http://schemas.microsoft.com/office/drawing/2014/main" id="{4F08E529-29DD-AB2C-94BF-694DBD41AB6D}"/>
-                  </a:ext>
-                </a:extLst>
-              </p:cNvPr>
-              <p:cNvSpPr>
-                <a:spLocks noGrp="1" noRot="1" noChangeAspect="1" noMove="1" noResize="1" noEditPoints="1" noAdjustHandles="1" noChangeArrowheads="1" noChangeShapeType="1" noTextEdit="1"/>
-              </p:cNvSpPr>
-              <p:nvPr>
-                <p:ph idx="1"/>
-              </p:nvPr>
-            </p:nvSpPr>
-            <p:spPr>
-              <a:blipFill>
-                <a:blip r:embed="rId2"/>
-                <a:stretch>
-                  <a:fillRect l="-483"/>
-                </a:stretch>
-              </a:blipFill>
-            </p:spPr>
-            <p:txBody>
-              <a:bodyPr/>
-              <a:lstStyle/>
-              <a:p>
-                <a:r>
-                  <a:rPr lang="en-US">
-                    <a:noFill/>
-                  </a:rPr>
-                  <a:t> </a:t>
-                </a:r>
-              </a:p>
-            </p:txBody>
-          </p:sp>
-        </mc:Fallback>
-      </mc:AlternateContent>
+      <p:sp>
+        <p:nvSpPr>
+          <p:cNvPr id="3" name="Content Placeholder 2">
+            <a:extLst>
+              <a:ext uri="{FF2B5EF4-FFF2-40B4-BE49-F238E27FC236}">
+                <a16:creationId xmlns:a16="http://schemas.microsoft.com/office/drawing/2014/main" id="{4F08E529-29DD-AB2C-94BF-694DBD41AB6D}"/>
+              </a:ext>
+            </a:extLst>
+          </p:cNvPr>
+          <p:cNvSpPr>
+            <a:spLocks noGrp="1"/>
+          </p:cNvSpPr>
+          <p:nvPr>
+            <p:ph idx="1"/>
+          </p:nvPr>
+        </p:nvSpPr>
+        <p:spPr/>
+        <p:txBody>
+          <a:bodyPr>
+            <a:normAutofit/>
+          </a:bodyPr>
+          <a:lstStyle/>
+          <a:p>
+            <a:pPr>
+              <a:lnSpc>
+                <a:spcPct val="150000"/>
+              </a:lnSpc>
+              <a:buFont typeface="Wingdings" pitchFamily="2" charset="2"/>
+              <a:buChar char="l"/>
+            </a:pPr>
+            <a:r>
+              <a:rPr lang="en-US" altLang="ja-JP" sz="2000" dirty="0"/>
+              <a:t>Bowley(1906)</a:t>
+            </a:r>
+            <a:r>
+              <a:rPr lang="ja-JP" altLang="en-US" sz="2000"/>
+              <a:t>提出大數法則：只要樣本量足夠大且具備隨機性，樣本的平均值就會趨近於母體的平均值。抽樣調查的精確度是可以透過數學公式（標準誤）來衡量的。</a:t>
+            </a:r>
+            <a:endParaRPr lang="en-US" altLang="ja-JP" sz="2000" dirty="0"/>
+          </a:p>
+          <a:p>
+            <a:pPr>
+              <a:lnSpc>
+                <a:spcPct val="150000"/>
+              </a:lnSpc>
+              <a:buFont typeface="Wingdings" pitchFamily="2" charset="2"/>
+              <a:buChar char="l"/>
+            </a:pPr>
+            <a:r>
+              <a:rPr lang="en-US" altLang="ja-JP" sz="2000" dirty="0"/>
+              <a:t>Bowley (1926)</a:t>
+            </a:r>
+            <a:r>
+              <a:rPr lang="ja-JP" altLang="en-US" sz="2000"/>
+              <a:t>提出</a:t>
+            </a:r>
+            <a:r>
+              <a:rPr lang="zh-TW" altLang="en-US" sz="2000" dirty="0"/>
+              <a:t>分層抽樣理論：</a:t>
+            </a:r>
+            <a:endParaRPr lang="en-US" altLang="zh-TW" sz="2000" dirty="0"/>
+          </a:p>
+          <a:p>
+            <a:pPr marL="457200" indent="-457200">
+              <a:lnSpc>
+                <a:spcPct val="150000"/>
+              </a:lnSpc>
+              <a:buFont typeface="+mj-lt"/>
+              <a:buAutoNum type="arabicPeriod"/>
+            </a:pPr>
+            <a:r>
+              <a:rPr lang="zh-TW" altLang="en-US" sz="2000" dirty="0"/>
+              <a:t>將母體依照已知特徵（如地區、職業）分成若干「層」（</a:t>
+            </a:r>
+            <a:r>
+              <a:rPr lang="en-US" altLang="ja-JP" sz="2000" dirty="0"/>
+              <a:t>Strata</a:t>
+            </a:r>
+            <a:r>
+              <a:rPr lang="ja-JP" altLang="en-US" sz="2000"/>
+              <a:t>）。</a:t>
+            </a:r>
+          </a:p>
+          <a:p>
+            <a:pPr marL="457200" indent="-457200">
+              <a:lnSpc>
+                <a:spcPct val="150000"/>
+              </a:lnSpc>
+              <a:buFont typeface="+mj-lt"/>
+              <a:buAutoNum type="arabicPeriod"/>
+            </a:pPr>
+            <a:r>
+              <a:rPr lang="zh-TW" altLang="en-US" sz="2000" dirty="0"/>
+              <a:t>在每一層內進行隨機抽樣。</a:t>
+            </a:r>
+          </a:p>
+          <a:p>
+            <a:pPr marL="457200" indent="-457200">
+              <a:lnSpc>
+                <a:spcPct val="150000"/>
+              </a:lnSpc>
+              <a:buFont typeface="+mj-lt"/>
+              <a:buAutoNum type="arabicPeriod"/>
+            </a:pPr>
+            <a:r>
+              <a:rPr lang="zh-TW" altLang="en-US" sz="2000" dirty="0"/>
+              <a:t>等比例分配 </a:t>
+            </a:r>
+            <a:r>
+              <a:rPr lang="en-US" altLang="zh-TW" sz="2000" dirty="0"/>
+              <a:t>(</a:t>
+            </a:r>
+            <a:r>
+              <a:rPr lang="en-US" altLang="ja-JP" sz="2000" dirty="0"/>
+              <a:t>Proportional Allocation)</a:t>
+            </a:r>
+            <a:r>
+              <a:rPr lang="ja-JP" altLang="en-US" sz="2000"/>
+              <a:t>： </a:t>
+            </a:r>
+            <a:r>
+              <a:rPr lang="zh-TW" altLang="en-US" sz="2000" dirty="0"/>
+              <a:t>各層抽取的樣本數應與該層在母體中的比例一致，以確保樣本結構與母體完全相同。</a:t>
+            </a:r>
+            <a:endParaRPr lang="en-US" altLang="ja-JP" sz="2000" dirty="0"/>
+          </a:p>
+          <a:p>
+            <a:pPr marL="0" indent="0">
+              <a:buNone/>
+            </a:pPr>
+            <a:endParaRPr lang="en-US" dirty="0"/>
+          </a:p>
+        </p:txBody>
+      </p:sp>
       <p:sp>
         <p:nvSpPr>
           <p:cNvPr id="4" name="Slide Number Placeholder 3">
@@ -6283,10 +8836,64 @@
       </p:grpSpPr>
       <p:sp>
         <p:nvSpPr>
-          <p:cNvPr id="2" name="Slide Number Placeholder 1">
+          <p:cNvPr id="5" name="標題 4">
             <a:extLst>
               <a:ext uri="{FF2B5EF4-FFF2-40B4-BE49-F238E27FC236}">
-                <a16:creationId xmlns:a16="http://schemas.microsoft.com/office/drawing/2014/main" id="{090E2491-AA9A-BF63-9395-E47BB3443C8F}"/>
+                <a16:creationId xmlns:a16="http://schemas.microsoft.com/office/drawing/2014/main" id="{800A7CD4-8BCE-CB26-0945-784DFDC0AAB3}"/>
+              </a:ext>
+            </a:extLst>
+          </p:cNvPr>
+          <p:cNvSpPr>
+            <a:spLocks noGrp="1"/>
+          </p:cNvSpPr>
+          <p:nvPr>
+            <p:ph type="title"/>
+          </p:nvPr>
+        </p:nvSpPr>
+        <p:spPr/>
+        <p:txBody>
+          <a:bodyPr/>
+          <a:lstStyle/>
+          <a:p>
+            <a:r>
+              <a:rPr lang="zh-TW" altLang="en-US" sz="4400" dirty="0"/>
+              <a:t>等比例分配</a:t>
+            </a:r>
+            <a:endParaRPr lang="zh-TW" altLang="en-US" dirty="0"/>
+          </a:p>
+        </p:txBody>
+      </p:sp>
+      <p:sp>
+        <p:nvSpPr>
+          <p:cNvPr id="6" name="內容版面配置區 5">
+            <a:extLst>
+              <a:ext uri="{FF2B5EF4-FFF2-40B4-BE49-F238E27FC236}">
+                <a16:creationId xmlns:a16="http://schemas.microsoft.com/office/drawing/2014/main" id="{A9B38302-3344-5246-4FF4-E49ADEAD4CB8}"/>
+              </a:ext>
+            </a:extLst>
+          </p:cNvPr>
+          <p:cNvSpPr>
+            <a:spLocks noGrp="1"/>
+          </p:cNvSpPr>
+          <p:nvPr>
+            <p:ph idx="1"/>
+          </p:nvPr>
+        </p:nvSpPr>
+        <p:spPr/>
+        <p:txBody>
+          <a:bodyPr/>
+          <a:lstStyle/>
+          <a:p>
+            <a:endParaRPr lang="zh-TW" altLang="en-US"/>
+          </a:p>
+        </p:txBody>
+      </p:sp>
+      <p:sp>
+        <p:nvSpPr>
+          <p:cNvPr id="2" name="投影片編號版面配置區 1">
+            <a:extLst>
+              <a:ext uri="{FF2B5EF4-FFF2-40B4-BE49-F238E27FC236}">
+                <a16:creationId xmlns:a16="http://schemas.microsoft.com/office/drawing/2014/main" id="{9BF5D712-AF58-8E6E-1CE2-D7DAE492006F}"/>
               </a:ext>
             </a:extLst>
           </p:cNvPr>
@@ -6312,10 +8919,10 @@
       </p:sp>
       <p:pic>
         <p:nvPicPr>
-          <p:cNvPr id="4" name="Picture 3">
+          <p:cNvPr id="4" name="圖片 3">
             <a:extLst>
               <a:ext uri="{FF2B5EF4-FFF2-40B4-BE49-F238E27FC236}">
-                <a16:creationId xmlns:a16="http://schemas.microsoft.com/office/drawing/2014/main" id="{0575C55C-39ED-D1E3-ADBC-6F08C2F7E1F3}"/>
+                <a16:creationId xmlns:a16="http://schemas.microsoft.com/office/drawing/2014/main" id="{B53CDD0B-B711-97A5-2078-238874EDA660}"/>
               </a:ext>
             </a:extLst>
           </p:cNvPr>
@@ -6332,8 +8939,8 @@
         </p:blipFill>
         <p:spPr>
           <a:xfrm>
-            <a:off x="2210158" y="0"/>
-            <a:ext cx="7771683" cy="6858000"/>
+            <a:off x="2109857" y="1825625"/>
+            <a:ext cx="7772400" cy="4709160"/>
           </a:xfrm>
           <a:prstGeom prst="rect">
             <a:avLst/>
@@ -6343,7 +8950,7 @@
     </p:spTree>
     <p:extLst>
       <p:ext uri="{BB962C8B-B14F-4D97-AF65-F5344CB8AC3E}">
-        <p14:creationId xmlns:p14="http://schemas.microsoft.com/office/powerpoint/2010/main" val="2765617566"/>
+        <p14:creationId xmlns:p14="http://schemas.microsoft.com/office/powerpoint/2010/main" val="2317845449"/>
       </p:ext>
     </p:extLst>
   </p:cSld>
@@ -6358,7 +8965,13 @@
   <p:cSld>
     <p:spTree>
       <p:nvGrpSpPr>
-        <p:cNvPr id="1" name=""/>
+        <p:cNvPr id="1" name="">
+          <a:extLst>
+            <a:ext uri="{FF2B5EF4-FFF2-40B4-BE49-F238E27FC236}">
+              <a16:creationId xmlns:a16="http://schemas.microsoft.com/office/drawing/2014/main" id="{A7404DDB-15EC-29FF-ECB8-4B8889462184}"/>
+            </a:ext>
+          </a:extLst>
+        </p:cNvPr>
         <p:cNvGrpSpPr/>
         <p:nvPr/>
       </p:nvGrpSpPr>
@@ -6375,7 +8988,7 @@
           <p:cNvPr id="2" name="Title 1">
             <a:extLst>
               <a:ext uri="{FF2B5EF4-FFF2-40B4-BE49-F238E27FC236}">
-                <a16:creationId xmlns:a16="http://schemas.microsoft.com/office/drawing/2014/main" id="{ED266BC7-D370-DB3B-3586-0BB7D3212D0F}"/>
+                <a16:creationId xmlns:a16="http://schemas.microsoft.com/office/drawing/2014/main" id="{44E11805-6F04-E425-0D4E-A3915F730D8B}"/>
               </a:ext>
             </a:extLst>
           </p:cNvPr>
@@ -6393,115 +9006,310 @@
           <a:p>
             <a:r>
               <a:rPr lang="ja-JP" altLang="en-US"/>
-              <a:t>非機率抽樣</a:t>
+              <a:t>機率抽樣的元素（二）</a:t>
             </a:r>
             <a:endParaRPr lang="en-US" dirty="0"/>
           </a:p>
         </p:txBody>
       </p:sp>
-      <p:sp>
-        <p:nvSpPr>
-          <p:cNvPr id="3" name="Content Placeholder 2">
-            <a:extLst>
-              <a:ext uri="{FF2B5EF4-FFF2-40B4-BE49-F238E27FC236}">
-                <a16:creationId xmlns:a16="http://schemas.microsoft.com/office/drawing/2014/main" id="{4F08E529-29DD-AB2C-94BF-694DBD41AB6D}"/>
-              </a:ext>
-            </a:extLst>
-          </p:cNvPr>
-          <p:cNvSpPr>
-            <a:spLocks noGrp="1"/>
-          </p:cNvSpPr>
-          <p:nvPr>
-            <p:ph idx="1"/>
-          </p:nvPr>
-        </p:nvSpPr>
-        <p:spPr/>
-        <p:txBody>
-          <a:bodyPr>
-            <a:normAutofit/>
-          </a:bodyPr>
-          <a:lstStyle/>
-          <a:p>
-            <a:pPr>
-              <a:lnSpc>
-                <a:spcPct val="150000"/>
-              </a:lnSpc>
-              <a:buFont typeface="Wingdings" pitchFamily="2" charset="2"/>
-              <a:buChar char="l"/>
-            </a:pPr>
-            <a:r>
-              <a:rPr lang="ja-JP" altLang="en-US" sz="2000"/>
-              <a:t>非機率抽樣並非基於隨機原則，而是根據研究者的便利性、判斷或特定標準來選取樣本。</a:t>
-            </a:r>
-            <a:endParaRPr lang="en-US" altLang="ja-JP" sz="2000" dirty="0"/>
-          </a:p>
-          <a:p>
-            <a:pPr>
-              <a:lnSpc>
-                <a:spcPct val="150000"/>
-              </a:lnSpc>
-              <a:buFont typeface="Wingdings" pitchFamily="2" charset="2"/>
-              <a:buChar char="l"/>
-            </a:pPr>
-            <a:r>
-              <a:rPr lang="ja-JP" altLang="en-US" sz="2000"/>
-              <a:t>缺乏代表性， 可能集中在少數人，無法推論至全體母體。</a:t>
-            </a:r>
-            <a:endParaRPr lang="en-US" altLang="ja-JP" sz="2000" dirty="0"/>
-          </a:p>
-          <a:p>
-            <a:pPr>
-              <a:lnSpc>
-                <a:spcPct val="150000"/>
-              </a:lnSpc>
-              <a:buFont typeface="Wingdings" pitchFamily="2" charset="2"/>
-              <a:buChar char="l"/>
-            </a:pPr>
-            <a:r>
-              <a:rPr lang="ja-JP" altLang="en-US" sz="2000"/>
-              <a:t>抽樣機率不明，無法計算精確的抽樣誤差。</a:t>
-            </a:r>
-            <a:endParaRPr lang="en-US" altLang="ja-JP" sz="2000" dirty="0"/>
-          </a:p>
-          <a:p>
-            <a:pPr>
-              <a:lnSpc>
-                <a:spcPct val="150000"/>
-              </a:lnSpc>
-              <a:buFont typeface="Wingdings" pitchFamily="2" charset="2"/>
-              <a:buChar char="l"/>
-            </a:pPr>
-            <a:r>
-              <a:rPr lang="ja-JP" altLang="en-US" sz="2000"/>
-              <a:t>便利抽樣、判斷抽樣（專家抽樣）、滾雪球抽樣、配額抽樣都屬於非機率抽樣。</a:t>
-            </a:r>
-            <a:endParaRPr lang="en-US" altLang="ja-JP" sz="2000" dirty="0"/>
-          </a:p>
-          <a:p>
-            <a:pPr>
-              <a:lnSpc>
-                <a:spcPct val="150000"/>
-              </a:lnSpc>
-              <a:buFont typeface="Wingdings" pitchFamily="2" charset="2"/>
-              <a:buChar char="l"/>
-            </a:pPr>
-            <a:endParaRPr lang="en-US" sz="2000" dirty="0"/>
-          </a:p>
-          <a:p>
-            <a:pPr>
-              <a:buFont typeface="Wingdings" pitchFamily="2" charset="2"/>
-              <a:buChar char="l"/>
-            </a:pPr>
-            <a:endParaRPr lang="en-US" dirty="0"/>
-          </a:p>
-        </p:txBody>
-      </p:sp>
+      <mc:AlternateContent xmlns:mc="http://schemas.openxmlformats.org/markup-compatibility/2006">
+        <mc:Choice xmlns:a14="http://schemas.microsoft.com/office/drawing/2010/main" Requires="a14">
+          <p:sp>
+            <p:nvSpPr>
+              <p:cNvPr id="3" name="Content Placeholder 2">
+                <a:extLst>
+                  <a:ext uri="{FF2B5EF4-FFF2-40B4-BE49-F238E27FC236}">
+                    <a16:creationId xmlns:a16="http://schemas.microsoft.com/office/drawing/2014/main" id="{7D6ACAF2-D8D8-8333-5783-CC2CE5195321}"/>
+                  </a:ext>
+                </a:extLst>
+              </p:cNvPr>
+              <p:cNvSpPr>
+                <a:spLocks noGrp="1"/>
+              </p:cNvSpPr>
+              <p:nvPr>
+                <p:ph idx="1"/>
+              </p:nvPr>
+            </p:nvSpPr>
+            <p:spPr/>
+            <p:txBody>
+              <a:bodyPr>
+                <a:normAutofit/>
+              </a:bodyPr>
+              <a:lstStyle/>
+              <a:p>
+                <a:pPr>
+                  <a:lnSpc>
+                    <a:spcPct val="150000"/>
+                  </a:lnSpc>
+                  <a:buFont typeface="Wingdings" pitchFamily="2" charset="2"/>
+                  <a:buChar char="l"/>
+                </a:pPr>
+                <a:r>
+                  <a:rPr lang="en-US" altLang="zh-TW" sz="2000" dirty="0"/>
+                  <a:t>Jerzy </a:t>
+                </a:r>
+                <a:r>
+                  <a:rPr lang="en-US" altLang="zh-TW" sz="2000" dirty="0" err="1"/>
+                  <a:t>Neyman</a:t>
+                </a:r>
+                <a:r>
+                  <a:rPr lang="zh-TW" altLang="en-US" sz="2000" dirty="0"/>
+                  <a:t>提出雖然我們無法得知母體參數，但可以建立一個區間，並宣稱：「如果我們重複抽樣 </a:t>
+                </a:r>
+                <a:r>
+                  <a:rPr lang="en-US" altLang="zh-TW" sz="2000" dirty="0"/>
+                  <a:t>100 </a:t>
+                </a:r>
+                <a:r>
+                  <a:rPr lang="zh-TW" altLang="en-US" sz="2000" dirty="0"/>
+                  <a:t>次，有 </a:t>
+                </a:r>
+                <a:r>
+                  <a:rPr lang="en-US" altLang="zh-TW" sz="2000" dirty="0"/>
+                  <a:t>95 </a:t>
+                </a:r>
+                <a:r>
+                  <a:rPr lang="zh-TW" altLang="en-US" sz="2000" dirty="0"/>
+                  <a:t>次這個區間會包含真實的母體參數。」</a:t>
+                </a:r>
+                <a:endParaRPr lang="en-US" altLang="zh-TW" sz="2000" dirty="0"/>
+              </a:p>
+              <a:p>
+                <a:pPr>
+                  <a:lnSpc>
+                    <a:spcPct val="150000"/>
+                  </a:lnSpc>
+                  <a:buFont typeface="Wingdings" pitchFamily="2" charset="2"/>
+                  <a:buChar char="l"/>
+                </a:pPr>
+                <a:r>
+                  <a:rPr lang="en-US" altLang="zh-TW" sz="2000" dirty="0" err="1"/>
+                  <a:t>Neyman</a:t>
+                </a:r>
+                <a:r>
+                  <a:rPr lang="zh-TW" altLang="en-US" sz="2000" dirty="0"/>
+                  <a:t>主張推論的有效性來自於抽樣設計（</a:t>
+                </a:r>
+                <a:r>
+                  <a:rPr lang="en-US" altLang="ja-JP" sz="2000" dirty="0"/>
+                  <a:t>Sampling Design</a:t>
+                </a:r>
+                <a:r>
+                  <a:rPr lang="ja-JP" altLang="en-US" sz="2000"/>
+                  <a:t>）</a:t>
+                </a:r>
+                <a:r>
+                  <a:rPr lang="zh-TW" altLang="en-US" sz="2000" dirty="0"/>
+                  <a:t>本身，而不是對母體分佈的假設。只要抽樣過程是機率導向的，不論母體是什麼分佈，我們都能得到不偏的估計值（</a:t>
+                </a:r>
+                <a:r>
+                  <a:rPr lang="en-US" altLang="ja-JP" sz="2000" dirty="0"/>
+                  <a:t>Unbiased Estimator</a:t>
+                </a:r>
+                <a:r>
+                  <a:rPr lang="ja-JP" altLang="en-US" sz="2000"/>
+                  <a:t>）。</a:t>
+                </a:r>
+                <a:endParaRPr lang="en-US" altLang="ja-JP" sz="2000" dirty="0"/>
+              </a:p>
+              <a:p>
+                <a:pPr>
+                  <a:lnSpc>
+                    <a:spcPct val="150000"/>
+                  </a:lnSpc>
+                  <a:buFont typeface="Wingdings" pitchFamily="2" charset="2"/>
+                  <a:buChar char="l"/>
+                </a:pPr>
+                <a:r>
+                  <a:rPr lang="zh-TW" altLang="en-US" sz="2000" dirty="0"/>
+                  <a:t>最優分配法 </a:t>
+                </a:r>
+                <a:r>
+                  <a:rPr lang="en-US" altLang="zh-TW" sz="2000" dirty="0"/>
+                  <a:t>(</a:t>
+                </a:r>
+                <a:r>
+                  <a:rPr lang="en-US" altLang="ja-JP" sz="2000" dirty="0" err="1"/>
+                  <a:t>Neyman</a:t>
+                </a:r>
+                <a:r>
+                  <a:rPr lang="en-US" altLang="ja-JP" sz="2000" dirty="0"/>
+                  <a:t> Allocation)</a:t>
+                </a:r>
+                <a:r>
+                  <a:rPr lang="ja-JP" altLang="en-US" sz="2000"/>
+                  <a:t>：如果某一「層」（例如高收入戶）的內部變異非常大，而另一層（例如固定薪資族）的變異很小，我們應該在變異大的那一層抽取更多樣本。</a:t>
+                </a:r>
+                <a:endParaRPr lang="en-US" altLang="ja-JP" sz="2000" dirty="0"/>
+              </a:p>
+              <a:p>
+                <a:pPr>
+                  <a:lnSpc>
+                    <a:spcPct val="150000"/>
+                  </a:lnSpc>
+                  <a:buFont typeface="Wingdings" pitchFamily="2" charset="2"/>
+                  <a:buChar char="l"/>
+                </a:pPr>
+                <a:r>
+                  <a:rPr lang="zh-TW" altLang="en-US" sz="2000" dirty="0"/>
+                  <a:t>決定每一層的樣本數的公式： </a:t>
+                </a:r>
+                <a14:m>
+                  <m:oMath xmlns:m="http://schemas.openxmlformats.org/officeDocument/2006/math">
+                    <m:sSub>
+                      <m:sSubPr>
+                        <m:ctrlPr>
+                          <a:rPr lang="en-US" altLang="zh-TW" sz="2000" i="1" smtClean="0">
+                            <a:latin typeface="Cambria Math" panose="02040503050406030204" pitchFamily="18" charset="0"/>
+                          </a:rPr>
+                        </m:ctrlPr>
+                      </m:sSubPr>
+                      <m:e>
+                        <m:r>
+                          <a:rPr lang="en-US" altLang="zh-TW" sz="2000" b="0" i="1" smtClean="0">
+                            <a:latin typeface="Cambria Math" panose="02040503050406030204" pitchFamily="18" charset="0"/>
+                          </a:rPr>
+                          <m:t>𝑛</m:t>
+                        </m:r>
+                      </m:e>
+                      <m:sub>
+                        <m:r>
+                          <a:rPr lang="en-US" altLang="zh-TW" sz="2000" b="0" i="1" smtClean="0">
+                            <a:latin typeface="Cambria Math" panose="02040503050406030204" pitchFamily="18" charset="0"/>
+                          </a:rPr>
+                          <m:t>h</m:t>
+                        </m:r>
+                      </m:sub>
+                    </m:sSub>
+                    <m:r>
+                      <a:rPr lang="en-US" altLang="zh-TW" sz="2000" i="1" smtClean="0">
+                        <a:latin typeface="Cambria Math" panose="02040503050406030204" pitchFamily="18" charset="0"/>
+                        <a:ea typeface="Cambria Math" panose="02040503050406030204" pitchFamily="18" charset="0"/>
+                      </a:rPr>
+                      <m:t>∝</m:t>
+                    </m:r>
+                    <m:sSub>
+                      <m:sSubPr>
+                        <m:ctrlPr>
+                          <a:rPr lang="en-US" altLang="zh-TW" sz="2000" i="1" smtClean="0">
+                            <a:latin typeface="Cambria Math" panose="02040503050406030204" pitchFamily="18" charset="0"/>
+                            <a:ea typeface="Cambria Math" panose="02040503050406030204" pitchFamily="18" charset="0"/>
+                          </a:rPr>
+                        </m:ctrlPr>
+                      </m:sSubPr>
+                      <m:e>
+                        <m:r>
+                          <a:rPr lang="en-US" altLang="zh-TW" sz="2000" b="0" i="1" smtClean="0">
+                            <a:latin typeface="Cambria Math" panose="02040503050406030204" pitchFamily="18" charset="0"/>
+                            <a:ea typeface="Cambria Math" panose="02040503050406030204" pitchFamily="18" charset="0"/>
+                          </a:rPr>
+                          <m:t>𝑁</m:t>
+                        </m:r>
+                      </m:e>
+                      <m:sub>
+                        <m:r>
+                          <a:rPr lang="en-US" altLang="zh-TW" sz="2000" b="0" i="1" smtClean="0">
+                            <a:latin typeface="Cambria Math" panose="02040503050406030204" pitchFamily="18" charset="0"/>
+                            <a:ea typeface="Cambria Math" panose="02040503050406030204" pitchFamily="18" charset="0"/>
+                          </a:rPr>
+                          <m:t>h</m:t>
+                        </m:r>
+                      </m:sub>
+                    </m:sSub>
+                    <m:r>
+                      <a:rPr lang="en-US" altLang="zh-TW" sz="2000" i="1" smtClean="0">
+                        <a:latin typeface="Cambria Math" panose="02040503050406030204" pitchFamily="18" charset="0"/>
+                        <a:ea typeface="Cambria Math" panose="02040503050406030204" pitchFamily="18" charset="0"/>
+                      </a:rPr>
+                      <m:t>×</m:t>
+                    </m:r>
+                    <m:sSub>
+                      <m:sSubPr>
+                        <m:ctrlPr>
+                          <a:rPr lang="en-US" altLang="zh-TW" sz="2000" i="1" smtClean="0">
+                            <a:latin typeface="Cambria Math" panose="02040503050406030204" pitchFamily="18" charset="0"/>
+                            <a:ea typeface="Cambria Math" panose="02040503050406030204" pitchFamily="18" charset="0"/>
+                          </a:rPr>
+                        </m:ctrlPr>
+                      </m:sSubPr>
+                      <m:e>
+                        <m:r>
+                          <a:rPr lang="en-US" altLang="zh-TW" sz="2000" i="1" smtClean="0">
+                            <a:latin typeface="Cambria Math" panose="02040503050406030204" pitchFamily="18" charset="0"/>
+                            <a:ea typeface="Cambria Math" panose="02040503050406030204" pitchFamily="18" charset="0"/>
+                          </a:rPr>
+                          <m:t>𝜎</m:t>
+                        </m:r>
+                      </m:e>
+                      <m:sub>
+                        <m:r>
+                          <a:rPr lang="en-US" altLang="zh-TW" sz="2000" b="0" i="1" smtClean="0">
+                            <a:latin typeface="Cambria Math" panose="02040503050406030204" pitchFamily="18" charset="0"/>
+                            <a:ea typeface="Cambria Math" panose="02040503050406030204" pitchFamily="18" charset="0"/>
+                          </a:rPr>
+                          <m:t>h</m:t>
+                        </m:r>
+                      </m:sub>
+                    </m:sSub>
+                  </m:oMath>
+                </a14:m>
+                <a:endParaRPr lang="en-US" altLang="ja-JP" sz="2000" dirty="0"/>
+              </a:p>
+              <a:p>
+                <a:pPr marL="0" indent="0">
+                  <a:buNone/>
+                </a:pPr>
+                <a:endParaRPr lang="en-US" dirty="0"/>
+              </a:p>
+            </p:txBody>
+          </p:sp>
+        </mc:Choice>
+        <mc:Fallback>
+          <p:sp>
+            <p:nvSpPr>
+              <p:cNvPr id="3" name="Content Placeholder 2">
+                <a:extLst>
+                  <a:ext uri="{FF2B5EF4-FFF2-40B4-BE49-F238E27FC236}">
+                    <a16:creationId xmlns:a16="http://schemas.microsoft.com/office/drawing/2014/main" id="{7D6ACAF2-D8D8-8333-5783-CC2CE5195321}"/>
+                  </a:ext>
+                </a:extLst>
+              </p:cNvPr>
+              <p:cNvSpPr>
+                <a:spLocks noGrp="1" noRot="1" noChangeAspect="1" noMove="1" noResize="1" noEditPoints="1" noAdjustHandles="1" noChangeArrowheads="1" noChangeShapeType="1" noTextEdit="1"/>
+              </p:cNvSpPr>
+              <p:nvPr>
+                <p:ph idx="1"/>
+              </p:nvPr>
+            </p:nvSpPr>
+            <p:spPr>
+              <a:blipFill>
+                <a:blip r:embed="rId2"/>
+                <a:stretch>
+                  <a:fillRect l="-603" r="-121"/>
+                </a:stretch>
+              </a:blipFill>
+            </p:spPr>
+            <p:txBody>
+              <a:bodyPr/>
+              <a:lstStyle/>
+              <a:p>
+                <a:r>
+                  <a:rPr lang="zh-TW" altLang="en-US">
+                    <a:noFill/>
+                  </a:rPr>
+                  <a:t> </a:t>
+                </a:r>
+              </a:p>
+            </p:txBody>
+          </p:sp>
+        </mc:Fallback>
+      </mc:AlternateContent>
       <p:sp>
         <p:nvSpPr>
           <p:cNvPr id="4" name="Slide Number Placeholder 3">
             <a:extLst>
               <a:ext uri="{FF2B5EF4-FFF2-40B4-BE49-F238E27FC236}">
-                <a16:creationId xmlns:a16="http://schemas.microsoft.com/office/drawing/2014/main" id="{C98085D9-FBDD-C940-3F14-8994BAC36532}"/>
+                <a16:creationId xmlns:a16="http://schemas.microsoft.com/office/drawing/2014/main" id="{54D651AA-21FF-3A73-E78A-CABF3C989614}"/>
               </a:ext>
             </a:extLst>
           </p:cNvPr>
@@ -6528,7 +9336,7 @@
     </p:spTree>
     <p:extLst>
       <p:ext uri="{BB962C8B-B14F-4D97-AF65-F5344CB8AC3E}">
-        <p14:creationId xmlns:p14="http://schemas.microsoft.com/office/powerpoint/2010/main" val="397422702"/>
+        <p14:creationId xmlns:p14="http://schemas.microsoft.com/office/powerpoint/2010/main" val="2689928673"/>
       </p:ext>
     </p:extLst>
   </p:cSld>
@@ -6543,7 +9351,13 @@
   <p:cSld>
     <p:spTree>
       <p:nvGrpSpPr>
-        <p:cNvPr id="1" name=""/>
+        <p:cNvPr id="1" name="">
+          <a:extLst>
+            <a:ext uri="{FF2B5EF4-FFF2-40B4-BE49-F238E27FC236}">
+              <a16:creationId xmlns:a16="http://schemas.microsoft.com/office/drawing/2014/main" id="{02C106E1-CF63-3145-5A92-C69BD208B292}"/>
+            </a:ext>
+          </a:extLst>
+        </p:cNvPr>
         <p:cNvGrpSpPr/>
         <p:nvPr/>
       </p:nvGrpSpPr>
@@ -6557,10 +9371,865 @@
       </p:grpSpPr>
       <p:sp>
         <p:nvSpPr>
-          <p:cNvPr id="2" name="Slide Number Placeholder 1">
+          <p:cNvPr id="2" name="Title 1">
             <a:extLst>
               <a:ext uri="{FF2B5EF4-FFF2-40B4-BE49-F238E27FC236}">
-                <a16:creationId xmlns:a16="http://schemas.microsoft.com/office/drawing/2014/main" id="{059EBEF9-A064-EC8F-F179-60480554D8D1}"/>
+                <a16:creationId xmlns:a16="http://schemas.microsoft.com/office/drawing/2014/main" id="{B3778C6F-211A-7AA3-0C69-B61C040A1E77}"/>
+              </a:ext>
+            </a:extLst>
+          </p:cNvPr>
+          <p:cNvSpPr>
+            <a:spLocks noGrp="1"/>
+          </p:cNvSpPr>
+          <p:nvPr>
+            <p:ph type="title"/>
+          </p:nvPr>
+        </p:nvSpPr>
+        <p:spPr/>
+        <p:txBody>
+          <a:bodyPr/>
+          <a:lstStyle/>
+          <a:p>
+            <a:r>
+              <a:rPr lang="ja-JP" altLang="en-US"/>
+              <a:t>機率抽樣的元素（三）</a:t>
+            </a:r>
+            <a:endParaRPr lang="en-US" dirty="0"/>
+          </a:p>
+        </p:txBody>
+      </p:sp>
+      <mc:AlternateContent xmlns:mc="http://schemas.openxmlformats.org/markup-compatibility/2006">
+        <mc:Choice xmlns:a14="http://schemas.microsoft.com/office/drawing/2010/main" Requires="a14">
+          <p:sp>
+            <p:nvSpPr>
+              <p:cNvPr id="3" name="Content Placeholder 2">
+                <a:extLst>
+                  <a:ext uri="{FF2B5EF4-FFF2-40B4-BE49-F238E27FC236}">
+                    <a16:creationId xmlns:a16="http://schemas.microsoft.com/office/drawing/2014/main" id="{CFAE9C41-B4EA-2EE4-7488-91928CBB72B4}"/>
+                  </a:ext>
+                </a:extLst>
+              </p:cNvPr>
+              <p:cNvSpPr>
+                <a:spLocks noGrp="1"/>
+              </p:cNvSpPr>
+              <p:nvPr>
+                <p:ph idx="1"/>
+              </p:nvPr>
+            </p:nvSpPr>
+            <p:spPr/>
+            <p:txBody>
+              <a:bodyPr>
+                <a:normAutofit fontScale="92500" lnSpcReduction="10000"/>
+              </a:bodyPr>
+              <a:lstStyle/>
+              <a:p>
+                <a:pPr>
+                  <a:lnSpc>
+                    <a:spcPct val="150000"/>
+                  </a:lnSpc>
+                  <a:buFont typeface="Wingdings" pitchFamily="2" charset="2"/>
+                  <a:buChar char="l"/>
+                </a:pPr>
+                <a:r>
+                  <a:rPr lang="en-US" altLang="zh-TW" sz="2000" dirty="0"/>
+                  <a:t>Horvitz &amp; Thompson (1952)</a:t>
+                </a:r>
+                <a:r>
+                  <a:rPr lang="zh-TW" altLang="en-US" sz="2000" dirty="0"/>
+                  <a:t>提出不論抽樣設計多麼複雜，只要我們計算出每個樣本的入選機率或者權重，都能得到母體總和的不偏估計。</a:t>
+                </a:r>
+                <a:r>
+                  <a:rPr lang="en-US" altLang="zh-TW" sz="2000" dirty="0"/>
+                  <a:t>H-Y</a:t>
+                </a:r>
+                <a:r>
+                  <a:rPr lang="zh-TW" altLang="en-US" sz="2000" dirty="0"/>
+                  <a:t>估計式：</a:t>
+                </a:r>
+                <a14:m>
+                  <m:oMath xmlns:m="http://schemas.openxmlformats.org/officeDocument/2006/math">
+                    <m:acc>
+                      <m:accPr>
+                        <m:chr m:val="̂"/>
+                        <m:ctrlPr>
+                          <a:rPr lang="zh-TW" altLang="en-US" sz="2000" i="1" smtClean="0">
+                            <a:latin typeface="Cambria Math" panose="02040503050406030204" pitchFamily="18" charset="0"/>
+                          </a:rPr>
+                        </m:ctrlPr>
+                      </m:accPr>
+                      <m:e>
+                        <m:r>
+                          <a:rPr lang="zh-TW" altLang="en-US" sz="2000" i="1">
+                            <a:latin typeface="Cambria Math" panose="02040503050406030204" pitchFamily="18" charset="0"/>
+                          </a:rPr>
+                          <m:t>Ｙ</m:t>
+                        </m:r>
+                      </m:e>
+                    </m:acc>
+                  </m:oMath>
+                </a14:m>
+                <a:r>
+                  <a:rPr lang="en-US" altLang="zh-TW" sz="2000" dirty="0"/>
+                  <a:t>=</a:t>
+                </a:r>
+                <a14:m>
+                  <m:oMath xmlns:m="http://schemas.openxmlformats.org/officeDocument/2006/math">
+                    <m:nary>
+                      <m:naryPr>
+                        <m:chr m:val="∑"/>
+                        <m:supHide m:val="on"/>
+                        <m:ctrlPr>
+                          <a:rPr lang="en-US" altLang="zh-TW" sz="2000" i="1" dirty="0" smtClean="0">
+                            <a:latin typeface="Cambria Math" panose="02040503050406030204" pitchFamily="18" charset="0"/>
+                          </a:rPr>
+                        </m:ctrlPr>
+                      </m:naryPr>
+                      <m:sub>
+                        <m:r>
+                          <m:rPr>
+                            <m:brk m:alnAt="7"/>
+                          </m:rPr>
+                          <a:rPr lang="en-US" altLang="zh-TW" sz="2000" b="0" i="1" dirty="0" smtClean="0">
+                            <a:latin typeface="Cambria Math" panose="02040503050406030204" pitchFamily="18" charset="0"/>
+                          </a:rPr>
+                          <m:t>𝑖</m:t>
+                        </m:r>
+                        <m:r>
+                          <a:rPr lang="en-US" altLang="zh-TW" sz="2000" b="0" i="1" dirty="0" smtClean="0">
+                            <a:latin typeface="Cambria Math" panose="02040503050406030204" pitchFamily="18" charset="0"/>
+                            <a:ea typeface="Cambria Math" panose="02040503050406030204" pitchFamily="18" charset="0"/>
+                          </a:rPr>
+                          <m:t>∈</m:t>
+                        </m:r>
+                        <m:r>
+                          <a:rPr lang="en-US" altLang="zh-TW" sz="2000" b="0" i="1" dirty="0" smtClean="0">
+                            <a:latin typeface="Cambria Math" panose="02040503050406030204" pitchFamily="18" charset="0"/>
+                            <a:ea typeface="Cambria Math" panose="02040503050406030204" pitchFamily="18" charset="0"/>
+                          </a:rPr>
+                          <m:t>𝑆</m:t>
+                        </m:r>
+                      </m:sub>
+                      <m:sup/>
+                      <m:e>
+                        <m:f>
+                          <m:fPr>
+                            <m:ctrlPr>
+                              <a:rPr lang="en-US" altLang="zh-TW" sz="2000" i="1" dirty="0" smtClean="0">
+                                <a:latin typeface="Cambria Math" panose="02040503050406030204" pitchFamily="18" charset="0"/>
+                              </a:rPr>
+                            </m:ctrlPr>
+                          </m:fPr>
+                          <m:num>
+                            <m:sSub>
+                              <m:sSubPr>
+                                <m:ctrlPr>
+                                  <a:rPr lang="en-US" altLang="zh-TW" sz="2000" i="1" dirty="0" smtClean="0">
+                                    <a:latin typeface="Cambria Math" panose="02040503050406030204" pitchFamily="18" charset="0"/>
+                                  </a:rPr>
+                                </m:ctrlPr>
+                              </m:sSubPr>
+                              <m:e>
+                                <m:r>
+                                  <a:rPr lang="en-US" altLang="zh-TW" sz="2000" b="0" i="1" dirty="0" smtClean="0">
+                                    <a:latin typeface="Cambria Math" panose="02040503050406030204" pitchFamily="18" charset="0"/>
+                                  </a:rPr>
+                                  <m:t>𝑦</m:t>
+                                </m:r>
+                              </m:e>
+                              <m:sub>
+                                <m:r>
+                                  <a:rPr lang="en-US" altLang="zh-TW" sz="2000" b="0" i="1" dirty="0" smtClean="0">
+                                    <a:latin typeface="Cambria Math" panose="02040503050406030204" pitchFamily="18" charset="0"/>
+                                  </a:rPr>
+                                  <m:t>𝑖</m:t>
+                                </m:r>
+                              </m:sub>
+                            </m:sSub>
+                          </m:num>
+                          <m:den>
+                            <m:sSub>
+                              <m:sSubPr>
+                                <m:ctrlPr>
+                                  <a:rPr lang="en-US" altLang="zh-TW" sz="2000" i="1" dirty="0" smtClean="0">
+                                    <a:latin typeface="Cambria Math" panose="02040503050406030204" pitchFamily="18" charset="0"/>
+                                  </a:rPr>
+                                </m:ctrlPr>
+                              </m:sSubPr>
+                              <m:e>
+                                <m:r>
+                                  <a:rPr lang="en-US" altLang="zh-TW" sz="2000" i="1" dirty="0" smtClean="0">
+                                    <a:latin typeface="Cambria Math" panose="02040503050406030204" pitchFamily="18" charset="0"/>
+                                    <a:ea typeface="Cambria Math" panose="02040503050406030204" pitchFamily="18" charset="0"/>
+                                  </a:rPr>
+                                  <m:t>𝜋</m:t>
+                                </m:r>
+                              </m:e>
+                              <m:sub>
+                                <m:r>
+                                  <a:rPr lang="en-US" altLang="zh-TW" sz="2000" b="0" i="1" dirty="0" smtClean="0">
+                                    <a:latin typeface="Cambria Math" panose="02040503050406030204" pitchFamily="18" charset="0"/>
+                                  </a:rPr>
+                                  <m:t>𝑖</m:t>
+                                </m:r>
+                              </m:sub>
+                            </m:sSub>
+                          </m:den>
+                        </m:f>
+                      </m:e>
+                    </m:nary>
+                  </m:oMath>
+                </a14:m>
+                <a:r>
+                  <a:rPr lang="en-US" altLang="zh-TW" sz="2000" dirty="0"/>
+                  <a:t> </a:t>
+                </a:r>
+                <a:r>
+                  <a:rPr lang="zh-TW" altLang="en-US" sz="2000" dirty="0"/>
+                  <a:t>。</a:t>
+                </a:r>
+                <a14:m>
+                  <m:oMath xmlns:m="http://schemas.openxmlformats.org/officeDocument/2006/math">
+                    <m:sSub>
+                      <m:sSubPr>
+                        <m:ctrlPr>
+                          <a:rPr lang="en-US" altLang="zh-TW" sz="2000" i="1" dirty="0" smtClean="0">
+                            <a:latin typeface="Cambria Math" panose="02040503050406030204" pitchFamily="18" charset="0"/>
+                          </a:rPr>
+                        </m:ctrlPr>
+                      </m:sSubPr>
+                      <m:e>
+                        <m:r>
+                          <a:rPr lang="en-US" altLang="zh-TW" sz="2000" i="1" dirty="0" smtClean="0">
+                            <a:latin typeface="Cambria Math" panose="02040503050406030204" pitchFamily="18" charset="0"/>
+                            <a:ea typeface="Cambria Math" panose="02040503050406030204" pitchFamily="18" charset="0"/>
+                          </a:rPr>
+                          <m:t>𝜋</m:t>
+                        </m:r>
+                      </m:e>
+                      <m:sub>
+                        <m:r>
+                          <a:rPr lang="en-US" altLang="zh-TW" sz="2000" b="0" i="1" dirty="0" smtClean="0">
+                            <a:latin typeface="Cambria Math" panose="02040503050406030204" pitchFamily="18" charset="0"/>
+                          </a:rPr>
+                          <m:t>𝑖</m:t>
+                        </m:r>
+                      </m:sub>
+                    </m:sSub>
+                  </m:oMath>
+                </a14:m>
+                <a:r>
+                  <a:rPr lang="zh-TW" altLang="en-US" sz="2000" dirty="0"/>
+                  <a:t>是被抽中的機率。</a:t>
+                </a:r>
+                <a:endParaRPr lang="en-US" altLang="zh-TW" sz="2000" dirty="0"/>
+              </a:p>
+              <a:p>
+                <a:pPr>
+                  <a:lnSpc>
+                    <a:spcPct val="150000"/>
+                  </a:lnSpc>
+                  <a:buFont typeface="Wingdings" pitchFamily="2" charset="2"/>
+                  <a:buChar char="l"/>
+                </a:pPr>
+                <a:r>
+                  <a:rPr lang="zh-TW" altLang="en-US" sz="2000" dirty="0"/>
+                  <a:t>例如有</a:t>
+                </a:r>
+                <a:r>
+                  <a:rPr lang="en-US" altLang="zh-TW" sz="2000" dirty="0"/>
+                  <a:t>10</a:t>
+                </a:r>
+                <a:r>
+                  <a:rPr lang="zh-TW" altLang="en-US" sz="2000" dirty="0"/>
+                  <a:t>人，已知有</a:t>
+                </a:r>
+                <a:r>
+                  <a:rPr lang="en-US" altLang="zh-TW" sz="2000" dirty="0"/>
+                  <a:t>8</a:t>
+                </a:r>
+                <a:r>
+                  <a:rPr lang="zh-TW" altLang="en-US" sz="2000" dirty="0"/>
+                  <a:t>人的年薪是</a:t>
+                </a:r>
+                <a:r>
+                  <a:rPr lang="en-US" altLang="zh-TW" sz="2000" dirty="0"/>
+                  <a:t>100</a:t>
+                </a:r>
+                <a:r>
+                  <a:rPr lang="zh-TW" altLang="en-US" sz="2000" dirty="0"/>
+                  <a:t>萬，</a:t>
+                </a:r>
+                <a:r>
+                  <a:rPr lang="en-US" altLang="zh-TW" sz="2000" dirty="0"/>
+                  <a:t>2</a:t>
+                </a:r>
+                <a:r>
+                  <a:rPr lang="zh-TW" altLang="en-US" sz="2000" dirty="0"/>
+                  <a:t>人的年薪是</a:t>
+                </a:r>
+                <a:r>
+                  <a:rPr lang="en-US" altLang="zh-TW" sz="2000" dirty="0"/>
+                  <a:t>20</a:t>
+                </a:r>
+                <a:r>
+                  <a:rPr lang="zh-TW" altLang="en-US" sz="2000" dirty="0"/>
+                  <a:t>萬，如果只能抽出一位，請問年薪的估計是多少？如果抽中年薪</a:t>
+                </a:r>
+                <a:r>
+                  <a:rPr lang="en-US" altLang="zh-TW" sz="2000" dirty="0"/>
+                  <a:t>100</a:t>
+                </a:r>
+                <a:r>
+                  <a:rPr lang="zh-TW" altLang="en-US" sz="2000" dirty="0"/>
+                  <a:t>萬的</a:t>
+                </a:r>
+                <a:r>
+                  <a:rPr lang="en-US" altLang="zh-TW" sz="2000" dirty="0"/>
+                  <a:t>8</a:t>
+                </a:r>
+                <a:r>
+                  <a:rPr lang="zh-TW" altLang="en-US" sz="2000" dirty="0"/>
+                  <a:t>個人其中之一，</a:t>
+                </a:r>
+                <a:r>
+                  <a:rPr lang="en-US" altLang="zh-TW" sz="2000" dirty="0"/>
+                  <a:t>100</a:t>
+                </a:r>
+                <a:r>
+                  <a:rPr lang="zh-TW" altLang="en-US" sz="2000" dirty="0"/>
+                  <a:t>萬雖然是無偏估計，卻不如用</a:t>
+                </a:r>
+                <a:r>
+                  <a:rPr lang="en-US" altLang="zh-TW" sz="2000" dirty="0"/>
+                  <a:t>H-Y</a:t>
+                </a:r>
+                <a:r>
+                  <a:rPr lang="zh-TW" altLang="en-US" sz="2000" dirty="0"/>
+                  <a:t>估計式：</a:t>
+                </a:r>
+                <a14:m>
+                  <m:oMath xmlns:m="http://schemas.openxmlformats.org/officeDocument/2006/math">
+                    <m:f>
+                      <m:fPr>
+                        <m:ctrlPr>
+                          <a:rPr lang="en-US" altLang="zh-TW" sz="2000" i="1" smtClean="0">
+                            <a:latin typeface="Cambria Math" panose="02040503050406030204" pitchFamily="18" charset="0"/>
+                          </a:rPr>
+                        </m:ctrlPr>
+                      </m:fPr>
+                      <m:num>
+                        <m:r>
+                          <a:rPr lang="en-US" altLang="zh-TW" sz="2000" b="0" i="1" smtClean="0">
+                            <a:latin typeface="Cambria Math" panose="02040503050406030204" pitchFamily="18" charset="0"/>
+                          </a:rPr>
+                          <m:t>100</m:t>
+                        </m:r>
+                      </m:num>
+                      <m:den>
+                        <m:r>
+                          <a:rPr lang="en-US" altLang="zh-TW" sz="2000" b="0" i="1" smtClean="0">
+                            <a:latin typeface="Cambria Math" panose="02040503050406030204" pitchFamily="18" charset="0"/>
+                          </a:rPr>
+                          <m:t>0.1</m:t>
+                        </m:r>
+                      </m:den>
+                    </m:f>
+                    <m:r>
+                      <a:rPr lang="en-US" altLang="zh-TW" sz="2000" b="0" i="1" smtClean="0">
+                        <a:latin typeface="Cambria Math" panose="02040503050406030204" pitchFamily="18" charset="0"/>
+                      </a:rPr>
+                      <m:t>=1000</m:t>
+                    </m:r>
+                    <m:r>
+                      <a:rPr lang="zh-TW" altLang="en-US" sz="2000" i="1">
+                        <a:latin typeface="Cambria Math" panose="02040503050406030204" pitchFamily="18" charset="0"/>
+                      </a:rPr>
+                      <m:t>萬</m:t>
+                    </m:r>
+                    <m:r>
+                      <a:rPr lang="zh-TW" altLang="en-US" sz="2000" i="1" smtClean="0">
+                        <a:latin typeface="Cambria Math" panose="02040503050406030204" pitchFamily="18" charset="0"/>
+                      </a:rPr>
+                      <m:t>。</m:t>
+                    </m:r>
+                    <m:r>
+                      <a:rPr lang="en-US" altLang="zh-TW" sz="2000" b="0" i="1" smtClean="0">
+                        <a:latin typeface="Cambria Math" panose="02040503050406030204" pitchFamily="18" charset="0"/>
+                      </a:rPr>
+                      <m:t> </m:t>
+                    </m:r>
+                    <m:r>
+                      <a:rPr lang="zh-TW" altLang="en-US" sz="2000" i="1">
+                        <a:latin typeface="Cambria Math" panose="02040503050406030204" pitchFamily="18" charset="0"/>
+                      </a:rPr>
+                      <m:t>如果抽中</m:t>
+                    </m:r>
+                    <m:r>
+                      <a:rPr lang="zh-TW" altLang="en-US" sz="2000" i="1" smtClean="0">
+                        <a:latin typeface="Cambria Math" panose="02040503050406030204" pitchFamily="18" charset="0"/>
+                      </a:rPr>
+                      <m:t>年薪</m:t>
+                    </m:r>
+                    <m:r>
+                      <a:rPr lang="en-US" altLang="zh-TW" sz="2000" b="0" i="1" smtClean="0">
+                        <a:latin typeface="Cambria Math" panose="02040503050406030204" pitchFamily="18" charset="0"/>
+                      </a:rPr>
+                      <m:t>20</m:t>
+                    </m:r>
+                    <m:r>
+                      <a:rPr lang="zh-TW" altLang="en-US" sz="2000" i="1">
+                        <a:latin typeface="Cambria Math" panose="02040503050406030204" pitchFamily="18" charset="0"/>
+                      </a:rPr>
+                      <m:t>萬，則是</m:t>
+                    </m:r>
+                    <m:f>
+                      <m:fPr>
+                        <m:ctrlPr>
+                          <a:rPr lang="en-US" altLang="zh-TW" sz="2000" b="0" i="1" smtClean="0">
+                            <a:latin typeface="Cambria Math" panose="02040503050406030204" pitchFamily="18" charset="0"/>
+                          </a:rPr>
+                        </m:ctrlPr>
+                      </m:fPr>
+                      <m:num>
+                        <m:r>
+                          <a:rPr lang="en-US" altLang="zh-TW" sz="2000" b="0" i="1" smtClean="0">
+                            <a:latin typeface="Cambria Math" panose="02040503050406030204" pitchFamily="18" charset="0"/>
+                          </a:rPr>
+                          <m:t>20</m:t>
+                        </m:r>
+                      </m:num>
+                      <m:den>
+                        <m:r>
+                          <a:rPr lang="en-US" altLang="zh-TW" sz="2000" b="0" i="1" smtClean="0">
+                            <a:latin typeface="Cambria Math" panose="02040503050406030204" pitchFamily="18" charset="0"/>
+                          </a:rPr>
+                          <m:t>0.1</m:t>
+                        </m:r>
+                      </m:den>
+                    </m:f>
+                    <m:r>
+                      <a:rPr lang="en-US" altLang="zh-TW" sz="2000" b="0" i="1" smtClean="0">
+                        <a:latin typeface="Cambria Math" panose="02040503050406030204" pitchFamily="18" charset="0"/>
+                      </a:rPr>
+                      <m:t>=200</m:t>
+                    </m:r>
+                    <m:r>
+                      <a:rPr lang="zh-TW" altLang="en-US" sz="2000" i="1">
+                        <a:latin typeface="Cambria Math" panose="02040503050406030204" pitchFamily="18" charset="0"/>
+                      </a:rPr>
+                      <m:t>萬。</m:t>
+                    </m:r>
+                    <m:r>
+                      <a:rPr lang="zh-TW" altLang="en-US" sz="2000" i="1" smtClean="0">
+                        <a:latin typeface="Cambria Math" panose="02040503050406030204" pitchFamily="18" charset="0"/>
+                      </a:rPr>
+                      <m:t>期望值</m:t>
+                    </m:r>
+                    <m:r>
+                      <a:rPr lang="en-US" altLang="zh-TW" sz="2000" b="0" i="1" smtClean="0">
+                        <a:latin typeface="Cambria Math" panose="02040503050406030204" pitchFamily="18" charset="0"/>
+                      </a:rPr>
+                      <m:t>=</m:t>
+                    </m:r>
+                    <m:d>
+                      <m:dPr>
+                        <m:ctrlPr>
+                          <a:rPr lang="en-US" altLang="zh-TW" sz="2000" b="0" i="1" smtClean="0">
+                            <a:latin typeface="Cambria Math" panose="02040503050406030204" pitchFamily="18" charset="0"/>
+                          </a:rPr>
+                        </m:ctrlPr>
+                      </m:dPr>
+                      <m:e>
+                        <m:r>
+                          <a:rPr lang="en-US" altLang="zh-TW" sz="2000" b="0" i="1" smtClean="0">
+                            <a:latin typeface="Cambria Math" panose="02040503050406030204" pitchFamily="18" charset="0"/>
+                          </a:rPr>
+                          <m:t>0.8</m:t>
+                        </m:r>
+                        <m:r>
+                          <a:rPr lang="en-US" altLang="zh-TW" sz="2000" b="0" i="1" smtClean="0">
+                            <a:latin typeface="Cambria Math" panose="02040503050406030204" pitchFamily="18" charset="0"/>
+                            <a:ea typeface="Cambria Math" panose="02040503050406030204" pitchFamily="18" charset="0"/>
+                          </a:rPr>
+                          <m:t>×1000</m:t>
+                        </m:r>
+                      </m:e>
+                    </m:d>
+                    <m:r>
+                      <a:rPr lang="en-US" altLang="zh-TW" sz="2000" b="0" i="1" smtClean="0">
+                        <a:latin typeface="Cambria Math" panose="02040503050406030204" pitchFamily="18" charset="0"/>
+                        <a:ea typeface="Cambria Math" panose="02040503050406030204" pitchFamily="18" charset="0"/>
+                      </a:rPr>
+                      <m:t>+</m:t>
+                    </m:r>
+                    <m:d>
+                      <m:dPr>
+                        <m:ctrlPr>
+                          <a:rPr lang="en-US" altLang="zh-TW" sz="2000" b="0" i="1" smtClean="0">
+                            <a:latin typeface="Cambria Math" panose="02040503050406030204" pitchFamily="18" charset="0"/>
+                            <a:ea typeface="Cambria Math" panose="02040503050406030204" pitchFamily="18" charset="0"/>
+                          </a:rPr>
+                        </m:ctrlPr>
+                      </m:dPr>
+                      <m:e>
+                        <m:r>
+                          <a:rPr lang="en-US" altLang="zh-TW" sz="2000" b="0" i="1" smtClean="0">
+                            <a:latin typeface="Cambria Math" panose="02040503050406030204" pitchFamily="18" charset="0"/>
+                            <a:ea typeface="Cambria Math" panose="02040503050406030204" pitchFamily="18" charset="0"/>
+                          </a:rPr>
+                          <m:t>0.2×200</m:t>
+                        </m:r>
+                      </m:e>
+                    </m:d>
+                    <m:r>
+                      <a:rPr lang="en-US" altLang="zh-TW" sz="2000" b="0" i="1" smtClean="0">
+                        <a:latin typeface="Cambria Math" panose="02040503050406030204" pitchFamily="18" charset="0"/>
+                        <a:ea typeface="Cambria Math" panose="02040503050406030204" pitchFamily="18" charset="0"/>
+                      </a:rPr>
+                      <m:t>=800+40=840</m:t>
+                    </m:r>
+                    <m:r>
+                      <a:rPr lang="zh-TW" altLang="en-US" sz="2000" i="1">
+                        <a:latin typeface="Cambria Math" panose="02040503050406030204" pitchFamily="18" charset="0"/>
+                        <a:ea typeface="Cambria Math" panose="02040503050406030204" pitchFamily="18" charset="0"/>
+                      </a:rPr>
+                      <m:t>萬。</m:t>
+                    </m:r>
+                  </m:oMath>
+                </a14:m>
+                <a:r>
+                  <a:rPr lang="en-US" altLang="zh-TW" sz="2000" dirty="0"/>
+                  <a:t> 840</a:t>
+                </a:r>
+                <a:r>
+                  <a:rPr lang="zh-TW" altLang="en-US" sz="2000" dirty="0"/>
+                  <a:t>萬剛好是這</a:t>
+                </a:r>
+                <a:r>
+                  <a:rPr lang="en-US" altLang="zh-TW" sz="2000" dirty="0"/>
+                  <a:t>10</a:t>
+                </a:r>
+                <a:r>
+                  <a:rPr lang="zh-TW" altLang="en-US" sz="2000" dirty="0"/>
+                  <a:t>個人的平均年薪。</a:t>
+                </a:r>
+                <a:endParaRPr lang="en-US" altLang="zh-TW" sz="2000" dirty="0"/>
+              </a:p>
+              <a:p>
+                <a:pPr>
+                  <a:lnSpc>
+                    <a:spcPct val="150000"/>
+                  </a:lnSpc>
+                  <a:buFont typeface="Wingdings" pitchFamily="2" charset="2"/>
+                  <a:buChar char="l"/>
+                </a:pPr>
+                <a:r>
+                  <a:rPr lang="zh-TW" altLang="en-US" sz="2000" dirty="0"/>
+                  <a:t>入選機率只要不是 </a:t>
+                </a:r>
+                <a:r>
+                  <a:rPr lang="en-US" altLang="zh-TW" sz="2000" dirty="0"/>
+                  <a:t>0</a:t>
+                </a:r>
+                <a:r>
+                  <a:rPr lang="zh-TW" altLang="en-US" sz="2000" dirty="0"/>
+                  <a:t>，在計算時除回正確的 </a:t>
+                </a:r>
+                <a14:m>
+                  <m:oMath xmlns:m="http://schemas.openxmlformats.org/officeDocument/2006/math">
+                    <m:sSub>
+                      <m:sSubPr>
+                        <m:ctrlPr>
+                          <a:rPr lang="en-US" altLang="zh-TW" sz="2000" i="1" smtClean="0">
+                            <a:latin typeface="Cambria Math" panose="02040503050406030204" pitchFamily="18" charset="0"/>
+                          </a:rPr>
+                        </m:ctrlPr>
+                      </m:sSubPr>
+                      <m:e>
+                        <m:r>
+                          <a:rPr lang="en-US" altLang="zh-TW" sz="2000" i="1" smtClean="0">
+                            <a:latin typeface="Cambria Math" panose="02040503050406030204" pitchFamily="18" charset="0"/>
+                            <a:ea typeface="Cambria Math" panose="02040503050406030204" pitchFamily="18" charset="0"/>
+                          </a:rPr>
+                          <m:t>𝜋</m:t>
+                        </m:r>
+                      </m:e>
+                      <m:sub>
+                        <m:r>
+                          <a:rPr lang="en-US" altLang="zh-TW" sz="2000" b="0" i="1" smtClean="0">
+                            <a:latin typeface="Cambria Math" panose="02040503050406030204" pitchFamily="18" charset="0"/>
+                          </a:rPr>
+                          <m:t>𝑖</m:t>
+                        </m:r>
+                      </m:sub>
+                    </m:sSub>
+                  </m:oMath>
+                </a14:m>
+                <a:r>
+                  <a:rPr lang="zh-TW" altLang="en" sz="2000" dirty="0"/>
+                  <a:t>，</a:t>
+                </a:r>
+                <a:r>
+                  <a:rPr lang="zh-TW" altLang="en-US" sz="2000" dirty="0"/>
+                  <a:t>算出的平均收入會等於母體的真實真相。期望值寫成：</a:t>
+                </a:r>
+                <a14:m>
+                  <m:oMath xmlns:m="http://schemas.openxmlformats.org/officeDocument/2006/math">
+                    <m:nary>
+                      <m:naryPr>
+                        <m:chr m:val="∑"/>
+                        <m:ctrlPr>
+                          <a:rPr lang="zh-TW" altLang="en-US" sz="2000" i="1" smtClean="0">
+                            <a:latin typeface="Cambria Math" panose="02040503050406030204" pitchFamily="18" charset="0"/>
+                          </a:rPr>
+                        </m:ctrlPr>
+                      </m:naryPr>
+                      <m:sub>
+                        <m:r>
+                          <m:rPr>
+                            <m:brk m:alnAt="23"/>
+                          </m:rPr>
+                          <a:rPr lang="en-US" altLang="zh-TW" sz="2000" b="0" i="1" smtClean="0">
+                            <a:latin typeface="Cambria Math" panose="02040503050406030204" pitchFamily="18" charset="0"/>
+                          </a:rPr>
+                          <m:t>𝑖</m:t>
+                        </m:r>
+                        <m:r>
+                          <a:rPr lang="en-US" altLang="zh-TW" sz="2000" b="0" i="1" smtClean="0">
+                            <a:latin typeface="Cambria Math" panose="02040503050406030204" pitchFamily="18" charset="0"/>
+                          </a:rPr>
+                          <m:t>=1</m:t>
+                        </m:r>
+                      </m:sub>
+                      <m:sup>
+                        <m:r>
+                          <a:rPr lang="en-US" altLang="zh-TW" sz="2000" b="0" i="1" smtClean="0">
+                            <a:latin typeface="Cambria Math" panose="02040503050406030204" pitchFamily="18" charset="0"/>
+                          </a:rPr>
+                          <m:t>𝑁</m:t>
+                        </m:r>
+                      </m:sup>
+                      <m:e>
+                        <m:sSub>
+                          <m:sSubPr>
+                            <m:ctrlPr>
+                              <a:rPr lang="en-US" altLang="zh-TW" sz="2000" i="1" smtClean="0">
+                                <a:latin typeface="Cambria Math" panose="02040503050406030204" pitchFamily="18" charset="0"/>
+                              </a:rPr>
+                            </m:ctrlPr>
+                          </m:sSubPr>
+                          <m:e>
+                            <m:r>
+                              <a:rPr lang="en-US" altLang="zh-TW" sz="2000" i="1" smtClean="0">
+                                <a:latin typeface="Cambria Math" panose="02040503050406030204" pitchFamily="18" charset="0"/>
+                                <a:ea typeface="Cambria Math" panose="02040503050406030204" pitchFamily="18" charset="0"/>
+                              </a:rPr>
+                              <m:t>𝜋</m:t>
+                            </m:r>
+                          </m:e>
+                          <m:sub>
+                            <m:r>
+                              <a:rPr lang="en-US" altLang="zh-TW" sz="2000" b="0" i="1" smtClean="0">
+                                <a:latin typeface="Cambria Math" panose="02040503050406030204" pitchFamily="18" charset="0"/>
+                              </a:rPr>
+                              <m:t>𝑖</m:t>
+                            </m:r>
+                          </m:sub>
+                        </m:sSub>
+                        <m:f>
+                          <m:fPr>
+                            <m:ctrlPr>
+                              <a:rPr lang="en-US" altLang="zh-TW" sz="2000" i="1" smtClean="0">
+                                <a:latin typeface="Cambria Math" panose="02040503050406030204" pitchFamily="18" charset="0"/>
+                              </a:rPr>
+                            </m:ctrlPr>
+                          </m:fPr>
+                          <m:num>
+                            <m:sSub>
+                              <m:sSubPr>
+                                <m:ctrlPr>
+                                  <a:rPr lang="en-US" altLang="zh-TW" sz="2000" i="1" smtClean="0">
+                                    <a:latin typeface="Cambria Math" panose="02040503050406030204" pitchFamily="18" charset="0"/>
+                                  </a:rPr>
+                                </m:ctrlPr>
+                              </m:sSubPr>
+                              <m:e>
+                                <m:r>
+                                  <a:rPr lang="en-US" altLang="zh-TW" sz="2000" b="0" i="1" smtClean="0">
+                                    <a:latin typeface="Cambria Math" panose="02040503050406030204" pitchFamily="18" charset="0"/>
+                                  </a:rPr>
+                                  <m:t>𝑦</m:t>
+                                </m:r>
+                              </m:e>
+                              <m:sub>
+                                <m:r>
+                                  <a:rPr lang="en-US" altLang="zh-TW" sz="2000" b="0" i="1" smtClean="0">
+                                    <a:latin typeface="Cambria Math" panose="02040503050406030204" pitchFamily="18" charset="0"/>
+                                  </a:rPr>
+                                  <m:t>𝑖</m:t>
+                                </m:r>
+                              </m:sub>
+                            </m:sSub>
+                          </m:num>
+                          <m:den>
+                            <m:sSub>
+                              <m:sSubPr>
+                                <m:ctrlPr>
+                                  <a:rPr lang="en-US" altLang="zh-TW" sz="2000" i="1" smtClean="0">
+                                    <a:latin typeface="Cambria Math" panose="02040503050406030204" pitchFamily="18" charset="0"/>
+                                  </a:rPr>
+                                </m:ctrlPr>
+                              </m:sSubPr>
+                              <m:e>
+                                <m:r>
+                                  <a:rPr lang="en-US" altLang="zh-TW" sz="2000" i="1" smtClean="0">
+                                    <a:latin typeface="Cambria Math" panose="02040503050406030204" pitchFamily="18" charset="0"/>
+                                    <a:ea typeface="Cambria Math" panose="02040503050406030204" pitchFamily="18" charset="0"/>
+                                  </a:rPr>
+                                  <m:t>𝜋</m:t>
+                                </m:r>
+                              </m:e>
+                              <m:sub>
+                                <m:r>
+                                  <a:rPr lang="en-US" altLang="zh-TW" sz="2000" b="0" i="1" smtClean="0">
+                                    <a:latin typeface="Cambria Math" panose="02040503050406030204" pitchFamily="18" charset="0"/>
+                                  </a:rPr>
+                                  <m:t>𝑖</m:t>
+                                </m:r>
+                              </m:sub>
+                            </m:sSub>
+                          </m:den>
+                        </m:f>
+                        <m:r>
+                          <a:rPr lang="en-US" altLang="zh-TW" sz="2000" b="0" i="1" smtClean="0">
+                            <a:latin typeface="Cambria Math" panose="02040503050406030204" pitchFamily="18" charset="0"/>
+                          </a:rPr>
+                          <m:t>=</m:t>
+                        </m:r>
+                      </m:e>
+                    </m:nary>
+                    <m:nary>
+                      <m:naryPr>
+                        <m:chr m:val="∑"/>
+                        <m:ctrlPr>
+                          <a:rPr lang="zh-TW" altLang="en-US" sz="2000" i="1">
+                            <a:latin typeface="Cambria Math" panose="02040503050406030204" pitchFamily="18" charset="0"/>
+                          </a:rPr>
+                        </m:ctrlPr>
+                      </m:naryPr>
+                      <m:sub>
+                        <m:r>
+                          <m:rPr>
+                            <m:brk m:alnAt="23"/>
+                          </m:rPr>
+                          <a:rPr lang="en-US" altLang="zh-TW" sz="2000" i="1">
+                            <a:latin typeface="Cambria Math" panose="02040503050406030204" pitchFamily="18" charset="0"/>
+                          </a:rPr>
+                          <m:t>𝑖</m:t>
+                        </m:r>
+                        <m:r>
+                          <a:rPr lang="en-US" altLang="zh-TW" sz="2000" i="1">
+                            <a:latin typeface="Cambria Math" panose="02040503050406030204" pitchFamily="18" charset="0"/>
+                          </a:rPr>
+                          <m:t>=1</m:t>
+                        </m:r>
+                      </m:sub>
+                      <m:sup>
+                        <m:r>
+                          <a:rPr lang="en-US" altLang="zh-TW" sz="2000" i="1">
+                            <a:latin typeface="Cambria Math" panose="02040503050406030204" pitchFamily="18" charset="0"/>
+                          </a:rPr>
+                          <m:t>𝑁</m:t>
+                        </m:r>
+                      </m:sup>
+                      <m:e>
+                        <m:sSub>
+                          <m:sSubPr>
+                            <m:ctrlPr>
+                              <a:rPr lang="en-US" altLang="zh-TW" sz="2000" i="1">
+                                <a:latin typeface="Cambria Math" panose="02040503050406030204" pitchFamily="18" charset="0"/>
+                              </a:rPr>
+                            </m:ctrlPr>
+                          </m:sSubPr>
+                          <m:e>
+                            <m:r>
+                              <a:rPr lang="en-US" altLang="zh-TW" sz="2000" b="0" i="1" smtClean="0">
+                                <a:latin typeface="Cambria Math" panose="02040503050406030204" pitchFamily="18" charset="0"/>
+                                <a:ea typeface="Cambria Math" panose="02040503050406030204" pitchFamily="18" charset="0"/>
+                              </a:rPr>
+                              <m:t>𝑦</m:t>
+                            </m:r>
+                          </m:e>
+                          <m:sub>
+                            <m:r>
+                              <a:rPr lang="en-US" altLang="zh-TW" sz="2000" i="1">
+                                <a:latin typeface="Cambria Math" panose="02040503050406030204" pitchFamily="18" charset="0"/>
+                              </a:rPr>
+                              <m:t>𝑖</m:t>
+                            </m:r>
+                          </m:sub>
+                        </m:sSub>
+                      </m:e>
+                    </m:nary>
+                  </m:oMath>
+                </a14:m>
+                <a:endParaRPr lang="en-US" altLang="ja-JP" sz="2000" dirty="0"/>
+              </a:p>
+              <a:p>
+                <a:pPr marL="0" indent="0">
+                  <a:buNone/>
+                </a:pPr>
+                <a:endParaRPr lang="en-US" dirty="0"/>
+              </a:p>
+            </p:txBody>
+          </p:sp>
+        </mc:Choice>
+        <mc:Fallback>
+          <p:sp>
+            <p:nvSpPr>
+              <p:cNvPr id="3" name="Content Placeholder 2">
+                <a:extLst>
+                  <a:ext uri="{FF2B5EF4-FFF2-40B4-BE49-F238E27FC236}">
+                    <a16:creationId xmlns:a16="http://schemas.microsoft.com/office/drawing/2014/main" id="{CFAE9C41-B4EA-2EE4-7488-91928CBB72B4}"/>
+                  </a:ext>
+                </a:extLst>
+              </p:cNvPr>
+              <p:cNvSpPr>
+                <a:spLocks noGrp="1" noRot="1" noChangeAspect="1" noMove="1" noResize="1" noEditPoints="1" noAdjustHandles="1" noChangeArrowheads="1" noChangeShapeType="1" noTextEdit="1"/>
+              </p:cNvSpPr>
+              <p:nvPr>
+                <p:ph idx="1"/>
+              </p:nvPr>
+            </p:nvSpPr>
+            <p:spPr>
+              <a:blipFill>
+                <a:blip r:embed="rId2"/>
+                <a:stretch>
+                  <a:fillRect l="-483" r="-603" b="-8721"/>
+                </a:stretch>
+              </a:blipFill>
+            </p:spPr>
+            <p:txBody>
+              <a:bodyPr/>
+              <a:lstStyle/>
+              <a:p>
+                <a:r>
+                  <a:rPr lang="zh-TW" altLang="en-US">
+                    <a:noFill/>
+                  </a:rPr>
+                  <a:t> </a:t>
+                </a:r>
+              </a:p>
+            </p:txBody>
+          </p:sp>
+        </mc:Fallback>
+      </mc:AlternateContent>
+      <p:sp>
+        <p:nvSpPr>
+          <p:cNvPr id="4" name="Slide Number Placeholder 3">
+            <a:extLst>
+              <a:ext uri="{FF2B5EF4-FFF2-40B4-BE49-F238E27FC236}">
+                <a16:creationId xmlns:a16="http://schemas.microsoft.com/office/drawing/2014/main" id="{2A1B54FE-2AC9-E283-7F28-80727A4EC28D}"/>
               </a:ext>
             </a:extLst>
           </p:cNvPr>
@@ -6584,40 +10253,10 @@
           </a:p>
         </p:txBody>
       </p:sp>
-      <p:pic>
-        <p:nvPicPr>
-          <p:cNvPr id="4" name="Picture 3">
-            <a:extLst>
-              <a:ext uri="{FF2B5EF4-FFF2-40B4-BE49-F238E27FC236}">
-                <a16:creationId xmlns:a16="http://schemas.microsoft.com/office/drawing/2014/main" id="{AC7825AB-9123-046E-5144-047BBDB4FE4F}"/>
-              </a:ext>
-            </a:extLst>
-          </p:cNvPr>
-          <p:cNvPicPr>
-            <a:picLocks noChangeAspect="1"/>
-          </p:cNvPicPr>
-          <p:nvPr/>
-        </p:nvPicPr>
-        <p:blipFill>
-          <a:blip r:embed="rId2"/>
-          <a:stretch>
-            <a:fillRect/>
-          </a:stretch>
-        </p:blipFill>
-        <p:spPr>
-          <a:xfrm>
-            <a:off x="2059405" y="993274"/>
-            <a:ext cx="7772400" cy="5097346"/>
-          </a:xfrm>
-          <a:prstGeom prst="rect">
-            <a:avLst/>
-          </a:prstGeom>
-        </p:spPr>
-      </p:pic>
     </p:spTree>
     <p:extLst>
       <p:ext uri="{BB962C8B-B14F-4D97-AF65-F5344CB8AC3E}">
-        <p14:creationId xmlns:p14="http://schemas.microsoft.com/office/powerpoint/2010/main" val="1103186742"/>
+        <p14:creationId xmlns:p14="http://schemas.microsoft.com/office/powerpoint/2010/main" val="1597800765"/>
       </p:ext>
     </p:extLst>
   </p:cSld>
@@ -6646,10 +10285,10 @@
       </p:grpSpPr>
       <p:sp>
         <p:nvSpPr>
-          <p:cNvPr id="2" name="Title 1">
+          <p:cNvPr id="2" name="標題 1">
             <a:extLst>
               <a:ext uri="{FF2B5EF4-FFF2-40B4-BE49-F238E27FC236}">
-                <a16:creationId xmlns:a16="http://schemas.microsoft.com/office/drawing/2014/main" id="{ED266BC7-D370-DB3B-3586-0BB7D3212D0F}"/>
+                <a16:creationId xmlns:a16="http://schemas.microsoft.com/office/drawing/2014/main" id="{16EB92D8-39C7-1636-8E9E-421E554925B5}"/>
               </a:ext>
             </a:extLst>
           </p:cNvPr>
@@ -6667,186 +10306,785 @@
           <a:p>
             <a:r>
               <a:rPr lang="ja-JP" altLang="en-US"/>
-              <a:t>網路調查的非機率抽樣</a:t>
-            </a:r>
-            <a:endParaRPr lang="en-US" dirty="0"/>
+              <a:t>機率抽樣的元素（四）</a:t>
+            </a:r>
+            <a:endParaRPr kumimoji="1" lang="zh-TW" altLang="en-US" dirty="0"/>
           </a:p>
         </p:txBody>
       </p:sp>
+      <mc:AlternateContent xmlns:mc="http://schemas.openxmlformats.org/markup-compatibility/2006">
+        <mc:Choice xmlns:a14="http://schemas.microsoft.com/office/drawing/2010/main" Requires="a14">
+          <p:sp>
+            <p:nvSpPr>
+              <p:cNvPr id="3" name="內容版面配置區 2">
+                <a:extLst>
+                  <a:ext uri="{FF2B5EF4-FFF2-40B4-BE49-F238E27FC236}">
+                    <a16:creationId xmlns:a16="http://schemas.microsoft.com/office/drawing/2014/main" id="{D77F4EED-7909-5AF8-5411-8811C2034F9D}"/>
+                  </a:ext>
+                </a:extLst>
+              </p:cNvPr>
+              <p:cNvSpPr>
+                <a:spLocks noGrp="1"/>
+              </p:cNvSpPr>
+              <p:nvPr>
+                <p:ph idx="1"/>
+              </p:nvPr>
+            </p:nvSpPr>
+            <p:spPr/>
+            <p:txBody>
+              <a:bodyPr>
+                <a:normAutofit lnSpcReduction="10000"/>
+              </a:bodyPr>
+              <a:lstStyle/>
+              <a:p>
+                <a:pPr>
+                  <a:lnSpc>
+                    <a:spcPct val="150000"/>
+                  </a:lnSpc>
+                </a:pPr>
+                <a:r>
+                  <a:rPr kumimoji="1" lang="zh-TW" altLang="en-US" sz="2000" dirty="0"/>
+                  <a:t>如果已經知道收入高的人的中選機率是收入低的人的</a:t>
+                </a:r>
+                <a:r>
+                  <a:rPr kumimoji="1" lang="en-US" altLang="zh-TW" sz="2000" dirty="0"/>
+                  <a:t>4</a:t>
+                </a:r>
+                <a:r>
+                  <a:rPr kumimoji="1" lang="zh-TW" altLang="en-US" sz="2000" dirty="0"/>
+                  <a:t>倍，只抽出</a:t>
+                </a:r>
+                <a:r>
+                  <a:rPr kumimoji="1" lang="en-US" altLang="zh-TW" sz="2000" dirty="0"/>
+                  <a:t>1</a:t>
+                </a:r>
+                <a:r>
+                  <a:rPr kumimoji="1" lang="zh-TW" altLang="en-US" sz="2000" dirty="0"/>
+                  <a:t>人，也可以用</a:t>
+                </a:r>
+                <a:r>
+                  <a:rPr kumimoji="1" lang="en-US" altLang="zh-TW" sz="2000" dirty="0"/>
+                  <a:t>H-T</a:t>
+                </a:r>
+                <a:r>
+                  <a:rPr kumimoji="1" lang="zh-TW" altLang="en-US" sz="2000" dirty="0"/>
+                  <a:t>估計式。先計算每個人的中選機率：</a:t>
+                </a:r>
+                <a14:m>
+                  <m:oMath xmlns:m="http://schemas.openxmlformats.org/officeDocument/2006/math">
+                    <m:f>
+                      <m:fPr>
+                        <m:ctrlPr>
+                          <a:rPr kumimoji="1" lang="en-US" altLang="zh-TW" sz="2000" i="1" smtClean="0">
+                            <a:latin typeface="Cambria Math" panose="02040503050406030204" pitchFamily="18" charset="0"/>
+                          </a:rPr>
+                        </m:ctrlPr>
+                      </m:fPr>
+                      <m:num>
+                        <m:r>
+                          <a:rPr kumimoji="1" lang="en-US" altLang="zh-TW" sz="2000" b="0" i="1" smtClean="0">
+                            <a:latin typeface="Cambria Math" panose="02040503050406030204" pitchFamily="18" charset="0"/>
+                          </a:rPr>
+                          <m:t>1</m:t>
+                        </m:r>
+                      </m:num>
+                      <m:den>
+                        <m:r>
+                          <a:rPr kumimoji="1" lang="en-US" altLang="zh-TW" sz="2000" b="0" i="1" smtClean="0">
+                            <a:latin typeface="Cambria Math" panose="02040503050406030204" pitchFamily="18" charset="0"/>
+                          </a:rPr>
+                          <m:t>8</m:t>
+                        </m:r>
+                        <m:r>
+                          <a:rPr kumimoji="1" lang="en-US" altLang="zh-TW" sz="2000" b="0" i="1" smtClean="0">
+                            <a:latin typeface="Cambria Math" panose="02040503050406030204" pitchFamily="18" charset="0"/>
+                            <a:ea typeface="Cambria Math" panose="02040503050406030204" pitchFamily="18" charset="0"/>
+                          </a:rPr>
+                          <m:t>×4+2</m:t>
+                        </m:r>
+                      </m:den>
+                    </m:f>
+                    <m:r>
+                      <a:rPr kumimoji="1" lang="en-US" altLang="zh-TW" sz="2000" b="0" i="1" smtClean="0">
+                        <a:latin typeface="Cambria Math" panose="02040503050406030204" pitchFamily="18" charset="0"/>
+                      </a:rPr>
+                      <m:t>=</m:t>
+                    </m:r>
+                    <m:f>
+                      <m:fPr>
+                        <m:ctrlPr>
+                          <a:rPr kumimoji="1" lang="en-US" altLang="zh-TW" sz="2000" b="0" i="1" smtClean="0">
+                            <a:latin typeface="Cambria Math" panose="02040503050406030204" pitchFamily="18" charset="0"/>
+                          </a:rPr>
+                        </m:ctrlPr>
+                      </m:fPr>
+                      <m:num>
+                        <m:r>
+                          <a:rPr kumimoji="1" lang="en-US" altLang="zh-TW" sz="2000" b="0" i="1" smtClean="0">
+                            <a:latin typeface="Cambria Math" panose="02040503050406030204" pitchFamily="18" charset="0"/>
+                          </a:rPr>
+                          <m:t>1</m:t>
+                        </m:r>
+                      </m:num>
+                      <m:den>
+                        <m:r>
+                          <a:rPr kumimoji="1" lang="en-US" altLang="zh-TW" sz="2000" b="0" i="1" smtClean="0">
+                            <a:latin typeface="Cambria Math" panose="02040503050406030204" pitchFamily="18" charset="0"/>
+                          </a:rPr>
+                          <m:t>34</m:t>
+                        </m:r>
+                      </m:den>
+                    </m:f>
+                  </m:oMath>
+                </a14:m>
+                <a:endParaRPr kumimoji="1" lang="en-US" altLang="zh-TW" sz="2000" dirty="0"/>
+              </a:p>
+              <a:p>
+                <a:pPr>
+                  <a:lnSpc>
+                    <a:spcPct val="150000"/>
+                  </a:lnSpc>
+                </a:pPr>
+                <a:r>
+                  <a:rPr kumimoji="1" lang="zh-TW" altLang="en-US" sz="2000" dirty="0"/>
+                  <a:t>期望值：</a:t>
+                </a:r>
+                <a:r>
+                  <a:rPr lang="zh-TW" altLang="en-US" sz="2000" dirty="0"/>
+                  <a:t> </a:t>
+                </a:r>
+                <a14:m>
+                  <m:oMath xmlns:m="http://schemas.openxmlformats.org/officeDocument/2006/math">
+                    <m:nary>
+                      <m:naryPr>
+                        <m:chr m:val="∑"/>
+                        <m:ctrlPr>
+                          <a:rPr lang="zh-TW" altLang="en-US" sz="2000" i="1" smtClean="0">
+                            <a:latin typeface="Cambria Math" panose="02040503050406030204" pitchFamily="18" charset="0"/>
+                          </a:rPr>
+                        </m:ctrlPr>
+                      </m:naryPr>
+                      <m:sub>
+                        <m:r>
+                          <m:rPr>
+                            <m:brk m:alnAt="23"/>
+                          </m:rPr>
+                          <a:rPr lang="en-US" altLang="zh-TW" sz="2000" b="0" i="1" smtClean="0">
+                            <a:latin typeface="Cambria Math" panose="02040503050406030204" pitchFamily="18" charset="0"/>
+                          </a:rPr>
+                          <m:t>𝑖</m:t>
+                        </m:r>
+                        <m:r>
+                          <a:rPr lang="en-US" altLang="zh-TW" sz="2000" b="0" i="1" smtClean="0">
+                            <a:latin typeface="Cambria Math" panose="02040503050406030204" pitchFamily="18" charset="0"/>
+                          </a:rPr>
+                          <m:t>=1</m:t>
+                        </m:r>
+                      </m:sub>
+                      <m:sup>
+                        <m:r>
+                          <a:rPr lang="en-US" altLang="zh-TW" sz="2000" b="0" i="1" smtClean="0">
+                            <a:latin typeface="Cambria Math" panose="02040503050406030204" pitchFamily="18" charset="0"/>
+                          </a:rPr>
+                          <m:t>𝑁</m:t>
+                        </m:r>
+                      </m:sup>
+                      <m:e>
+                        <m:sSub>
+                          <m:sSubPr>
+                            <m:ctrlPr>
+                              <a:rPr lang="en-US" altLang="zh-TW" sz="2000" i="1" smtClean="0">
+                                <a:latin typeface="Cambria Math" panose="02040503050406030204" pitchFamily="18" charset="0"/>
+                              </a:rPr>
+                            </m:ctrlPr>
+                          </m:sSubPr>
+                          <m:e>
+                            <m:r>
+                              <a:rPr lang="en-US" altLang="zh-TW" sz="2000" i="1" smtClean="0">
+                                <a:latin typeface="Cambria Math" panose="02040503050406030204" pitchFamily="18" charset="0"/>
+                                <a:ea typeface="Cambria Math" panose="02040503050406030204" pitchFamily="18" charset="0"/>
+                              </a:rPr>
+                              <m:t>𝜋</m:t>
+                            </m:r>
+                          </m:e>
+                          <m:sub>
+                            <m:r>
+                              <a:rPr lang="en-US" altLang="zh-TW" sz="2000" b="0" i="1" smtClean="0">
+                                <a:latin typeface="Cambria Math" panose="02040503050406030204" pitchFamily="18" charset="0"/>
+                              </a:rPr>
+                              <m:t>𝑖</m:t>
+                            </m:r>
+                          </m:sub>
+                        </m:sSub>
+                        <m:f>
+                          <m:fPr>
+                            <m:ctrlPr>
+                              <a:rPr lang="en-US" altLang="zh-TW" sz="2000" i="1" smtClean="0">
+                                <a:latin typeface="Cambria Math" panose="02040503050406030204" pitchFamily="18" charset="0"/>
+                              </a:rPr>
+                            </m:ctrlPr>
+                          </m:fPr>
+                          <m:num>
+                            <m:sSub>
+                              <m:sSubPr>
+                                <m:ctrlPr>
+                                  <a:rPr lang="en-US" altLang="zh-TW" sz="2000" i="1" smtClean="0">
+                                    <a:latin typeface="Cambria Math" panose="02040503050406030204" pitchFamily="18" charset="0"/>
+                                  </a:rPr>
+                                </m:ctrlPr>
+                              </m:sSubPr>
+                              <m:e>
+                                <m:r>
+                                  <a:rPr lang="en-US" altLang="zh-TW" sz="2000" b="0" i="1" smtClean="0">
+                                    <a:latin typeface="Cambria Math" panose="02040503050406030204" pitchFamily="18" charset="0"/>
+                                  </a:rPr>
+                                  <m:t>𝑦</m:t>
+                                </m:r>
+                              </m:e>
+                              <m:sub>
+                                <m:r>
+                                  <a:rPr lang="en-US" altLang="zh-TW" sz="2000" b="0" i="1" smtClean="0">
+                                    <a:latin typeface="Cambria Math" panose="02040503050406030204" pitchFamily="18" charset="0"/>
+                                  </a:rPr>
+                                  <m:t>𝑖</m:t>
+                                </m:r>
+                              </m:sub>
+                            </m:sSub>
+                          </m:num>
+                          <m:den>
+                            <m:sSub>
+                              <m:sSubPr>
+                                <m:ctrlPr>
+                                  <a:rPr lang="en-US" altLang="zh-TW" sz="2000" i="1" smtClean="0">
+                                    <a:latin typeface="Cambria Math" panose="02040503050406030204" pitchFamily="18" charset="0"/>
+                                  </a:rPr>
+                                </m:ctrlPr>
+                              </m:sSubPr>
+                              <m:e>
+                                <m:r>
+                                  <a:rPr lang="en-US" altLang="zh-TW" sz="2000" i="1" smtClean="0">
+                                    <a:latin typeface="Cambria Math" panose="02040503050406030204" pitchFamily="18" charset="0"/>
+                                    <a:ea typeface="Cambria Math" panose="02040503050406030204" pitchFamily="18" charset="0"/>
+                                  </a:rPr>
+                                  <m:t>𝜋</m:t>
+                                </m:r>
+                              </m:e>
+                              <m:sub>
+                                <m:r>
+                                  <a:rPr lang="en-US" altLang="zh-TW" sz="2000" b="0" i="1" smtClean="0">
+                                    <a:latin typeface="Cambria Math" panose="02040503050406030204" pitchFamily="18" charset="0"/>
+                                  </a:rPr>
+                                  <m:t>𝑖</m:t>
+                                </m:r>
+                              </m:sub>
+                            </m:sSub>
+                          </m:den>
+                        </m:f>
+                        <m:r>
+                          <a:rPr lang="en-US" altLang="zh-TW" sz="2000" b="0" i="1" smtClean="0">
+                            <a:latin typeface="Cambria Math" panose="02040503050406030204" pitchFamily="18" charset="0"/>
+                          </a:rPr>
+                          <m:t>=</m:t>
+                        </m:r>
+                      </m:e>
+                    </m:nary>
+                    <m:r>
+                      <a:rPr lang="en-US" altLang="zh-TW" sz="2000" b="0" i="1" smtClean="0">
+                        <a:latin typeface="Cambria Math" panose="02040503050406030204" pitchFamily="18" charset="0"/>
+                      </a:rPr>
+                      <m:t>8</m:t>
+                    </m:r>
+                    <m:r>
+                      <a:rPr lang="en-US" altLang="zh-TW" sz="2000" b="0" i="1" smtClean="0">
+                        <a:latin typeface="Cambria Math" panose="02040503050406030204" pitchFamily="18" charset="0"/>
+                        <a:ea typeface="Cambria Math" panose="02040503050406030204" pitchFamily="18" charset="0"/>
+                      </a:rPr>
+                      <m:t>×</m:t>
+                    </m:r>
+                    <m:d>
+                      <m:dPr>
+                        <m:ctrlPr>
+                          <a:rPr lang="en-US" altLang="zh-TW" sz="2000" b="0" i="1" smtClean="0">
+                            <a:latin typeface="Cambria Math" panose="02040503050406030204" pitchFamily="18" charset="0"/>
+                          </a:rPr>
+                        </m:ctrlPr>
+                      </m:dPr>
+                      <m:e>
+                        <m:r>
+                          <a:rPr lang="en-US" altLang="zh-TW" sz="2000" b="0" i="1" smtClean="0">
+                            <a:latin typeface="Cambria Math" panose="02040503050406030204" pitchFamily="18" charset="0"/>
+                          </a:rPr>
+                          <m:t>4</m:t>
+                        </m:r>
+                        <m:r>
+                          <a:rPr lang="en-US" altLang="zh-TW" sz="2000" b="0" i="1" smtClean="0">
+                            <a:latin typeface="Cambria Math" panose="02040503050406030204" pitchFamily="18" charset="0"/>
+                            <a:ea typeface="Cambria Math" panose="02040503050406030204" pitchFamily="18" charset="0"/>
+                          </a:rPr>
+                          <m:t>×</m:t>
+                        </m:r>
+                        <m:f>
+                          <m:fPr>
+                            <m:ctrlPr>
+                              <a:rPr lang="en-US" altLang="zh-TW" sz="2000" b="0" i="1" smtClean="0">
+                                <a:latin typeface="Cambria Math" panose="02040503050406030204" pitchFamily="18" charset="0"/>
+                                <a:ea typeface="Cambria Math" panose="02040503050406030204" pitchFamily="18" charset="0"/>
+                              </a:rPr>
+                            </m:ctrlPr>
+                          </m:fPr>
+                          <m:num>
+                            <m:r>
+                              <a:rPr lang="en-US" altLang="zh-TW" sz="2000" b="0" i="1" smtClean="0">
+                                <a:latin typeface="Cambria Math" panose="02040503050406030204" pitchFamily="18" charset="0"/>
+                                <a:ea typeface="Cambria Math" panose="02040503050406030204" pitchFamily="18" charset="0"/>
+                              </a:rPr>
+                              <m:t>1</m:t>
+                            </m:r>
+                          </m:num>
+                          <m:den>
+                            <m:r>
+                              <a:rPr lang="en-US" altLang="zh-TW" sz="2000" b="0" i="1" smtClean="0">
+                                <a:latin typeface="Cambria Math" panose="02040503050406030204" pitchFamily="18" charset="0"/>
+                                <a:ea typeface="Cambria Math" panose="02040503050406030204" pitchFamily="18" charset="0"/>
+                              </a:rPr>
+                              <m:t>34</m:t>
+                            </m:r>
+                          </m:den>
+                        </m:f>
+                        <m:r>
+                          <a:rPr lang="en-US" altLang="zh-TW" sz="2000" b="0" i="1" smtClean="0">
+                            <a:latin typeface="Cambria Math" panose="02040503050406030204" pitchFamily="18" charset="0"/>
+                            <a:ea typeface="Cambria Math" panose="02040503050406030204" pitchFamily="18" charset="0"/>
+                          </a:rPr>
+                          <m:t>×</m:t>
+                        </m:r>
+                        <m:f>
+                          <m:fPr>
+                            <m:ctrlPr>
+                              <a:rPr lang="en-US" altLang="zh-TW" sz="2000" b="0" i="1" smtClean="0">
+                                <a:latin typeface="Cambria Math" panose="02040503050406030204" pitchFamily="18" charset="0"/>
+                                <a:ea typeface="Cambria Math" panose="02040503050406030204" pitchFamily="18" charset="0"/>
+                              </a:rPr>
+                            </m:ctrlPr>
+                          </m:fPr>
+                          <m:num>
+                            <m:r>
+                              <a:rPr lang="en-US" altLang="zh-TW" sz="2000" b="0" i="1" smtClean="0">
+                                <a:latin typeface="Cambria Math" panose="02040503050406030204" pitchFamily="18" charset="0"/>
+                                <a:ea typeface="Cambria Math" panose="02040503050406030204" pitchFamily="18" charset="0"/>
+                              </a:rPr>
+                              <m:t>100</m:t>
+                            </m:r>
+                          </m:num>
+                          <m:den>
+                            <m:r>
+                              <a:rPr lang="en-US" altLang="zh-TW" sz="2000" b="0" i="1" smtClean="0">
+                                <a:latin typeface="Cambria Math" panose="02040503050406030204" pitchFamily="18" charset="0"/>
+                                <a:ea typeface="Cambria Math" panose="02040503050406030204" pitchFamily="18" charset="0"/>
+                              </a:rPr>
+                              <m:t>4×</m:t>
+                            </m:r>
+                            <m:f>
+                              <m:fPr>
+                                <m:ctrlPr>
+                                  <a:rPr lang="en-US" altLang="zh-TW" sz="2000" b="0" i="1" smtClean="0">
+                                    <a:latin typeface="Cambria Math" panose="02040503050406030204" pitchFamily="18" charset="0"/>
+                                    <a:ea typeface="Cambria Math" panose="02040503050406030204" pitchFamily="18" charset="0"/>
+                                  </a:rPr>
+                                </m:ctrlPr>
+                              </m:fPr>
+                              <m:num>
+                                <m:r>
+                                  <a:rPr lang="en-US" altLang="zh-TW" sz="2000" b="0" i="1" smtClean="0">
+                                    <a:latin typeface="Cambria Math" panose="02040503050406030204" pitchFamily="18" charset="0"/>
+                                    <a:ea typeface="Cambria Math" panose="02040503050406030204" pitchFamily="18" charset="0"/>
+                                  </a:rPr>
+                                  <m:t>1</m:t>
+                                </m:r>
+                              </m:num>
+                              <m:den>
+                                <m:r>
+                                  <a:rPr lang="en-US" altLang="zh-TW" sz="2000" b="0" i="1" smtClean="0">
+                                    <a:latin typeface="Cambria Math" panose="02040503050406030204" pitchFamily="18" charset="0"/>
+                                    <a:ea typeface="Cambria Math" panose="02040503050406030204" pitchFamily="18" charset="0"/>
+                                  </a:rPr>
+                                  <m:t>34</m:t>
+                                </m:r>
+                              </m:den>
+                            </m:f>
+                          </m:den>
+                        </m:f>
+                      </m:e>
+                    </m:d>
+                    <m:r>
+                      <a:rPr lang="en-US" altLang="zh-TW" sz="2000" b="0" i="1" smtClean="0">
+                        <a:latin typeface="Cambria Math" panose="02040503050406030204" pitchFamily="18" charset="0"/>
+                        <a:ea typeface="Cambria Math" panose="02040503050406030204" pitchFamily="18" charset="0"/>
+                      </a:rPr>
+                      <m:t>+2×</m:t>
+                    </m:r>
+                    <m:d>
+                      <m:dPr>
+                        <m:ctrlPr>
+                          <a:rPr lang="en-US" altLang="zh-TW" sz="2000" b="0" i="1" smtClean="0">
+                            <a:latin typeface="Cambria Math" panose="02040503050406030204" pitchFamily="18" charset="0"/>
+                            <a:ea typeface="Cambria Math" panose="02040503050406030204" pitchFamily="18" charset="0"/>
+                          </a:rPr>
+                        </m:ctrlPr>
+                      </m:dPr>
+                      <m:e>
+                        <m:f>
+                          <m:fPr>
+                            <m:ctrlPr>
+                              <a:rPr lang="en-US" altLang="zh-TW" sz="2000" b="0" i="1" smtClean="0">
+                                <a:latin typeface="Cambria Math" panose="02040503050406030204" pitchFamily="18" charset="0"/>
+                                <a:ea typeface="Cambria Math" panose="02040503050406030204" pitchFamily="18" charset="0"/>
+                              </a:rPr>
+                            </m:ctrlPr>
+                          </m:fPr>
+                          <m:num>
+                            <m:r>
+                              <a:rPr lang="en-US" altLang="zh-TW" sz="2000" b="0" i="1" smtClean="0">
+                                <a:latin typeface="Cambria Math" panose="02040503050406030204" pitchFamily="18" charset="0"/>
+                                <a:ea typeface="Cambria Math" panose="02040503050406030204" pitchFamily="18" charset="0"/>
+                              </a:rPr>
+                              <m:t>1</m:t>
+                            </m:r>
+                          </m:num>
+                          <m:den>
+                            <m:r>
+                              <a:rPr lang="en-US" altLang="zh-TW" sz="2000" b="0" i="1" smtClean="0">
+                                <a:latin typeface="Cambria Math" panose="02040503050406030204" pitchFamily="18" charset="0"/>
+                                <a:ea typeface="Cambria Math" panose="02040503050406030204" pitchFamily="18" charset="0"/>
+                              </a:rPr>
+                              <m:t>34</m:t>
+                            </m:r>
+                          </m:den>
+                        </m:f>
+                        <m:r>
+                          <a:rPr lang="en-US" altLang="zh-TW" sz="2000" i="1">
+                            <a:latin typeface="Cambria Math" panose="02040503050406030204" pitchFamily="18" charset="0"/>
+                            <a:ea typeface="Cambria Math" panose="02040503050406030204" pitchFamily="18" charset="0"/>
+                          </a:rPr>
+                          <m:t>×</m:t>
+                        </m:r>
+                        <m:f>
+                          <m:fPr>
+                            <m:ctrlPr>
+                              <a:rPr lang="en-US" altLang="zh-TW" sz="2000" i="1" smtClean="0">
+                                <a:latin typeface="Cambria Math" panose="02040503050406030204" pitchFamily="18" charset="0"/>
+                                <a:ea typeface="Cambria Math" panose="02040503050406030204" pitchFamily="18" charset="0"/>
+                              </a:rPr>
+                            </m:ctrlPr>
+                          </m:fPr>
+                          <m:num>
+                            <m:r>
+                              <a:rPr lang="en-US" altLang="zh-TW" sz="2000" b="0" i="1" smtClean="0">
+                                <a:latin typeface="Cambria Math" panose="02040503050406030204" pitchFamily="18" charset="0"/>
+                                <a:ea typeface="Cambria Math" panose="02040503050406030204" pitchFamily="18" charset="0"/>
+                              </a:rPr>
+                              <m:t>20</m:t>
+                            </m:r>
+                          </m:num>
+                          <m:den>
+                            <m:f>
+                              <m:fPr>
+                                <m:ctrlPr>
+                                  <a:rPr lang="en-US" altLang="zh-TW" sz="2000" i="1" smtClean="0">
+                                    <a:latin typeface="Cambria Math" panose="02040503050406030204" pitchFamily="18" charset="0"/>
+                                    <a:ea typeface="Cambria Math" panose="02040503050406030204" pitchFamily="18" charset="0"/>
+                                  </a:rPr>
+                                </m:ctrlPr>
+                              </m:fPr>
+                              <m:num>
+                                <m:r>
+                                  <a:rPr lang="en-US" altLang="zh-TW" sz="2000" b="0" i="1" smtClean="0">
+                                    <a:latin typeface="Cambria Math" panose="02040503050406030204" pitchFamily="18" charset="0"/>
+                                    <a:ea typeface="Cambria Math" panose="02040503050406030204" pitchFamily="18" charset="0"/>
+                                  </a:rPr>
+                                  <m:t>1</m:t>
+                                </m:r>
+                              </m:num>
+                              <m:den>
+                                <m:r>
+                                  <a:rPr lang="en-US" altLang="zh-TW" sz="2000" b="0" i="1" smtClean="0">
+                                    <a:latin typeface="Cambria Math" panose="02040503050406030204" pitchFamily="18" charset="0"/>
+                                    <a:ea typeface="Cambria Math" panose="02040503050406030204" pitchFamily="18" charset="0"/>
+                                  </a:rPr>
+                                  <m:t>34</m:t>
+                                </m:r>
+                              </m:den>
+                            </m:f>
+                          </m:den>
+                        </m:f>
+                      </m:e>
+                    </m:d>
+                    <m:r>
+                      <a:rPr lang="en-US" altLang="zh-TW" sz="2000" b="0" i="1" smtClean="0">
+                        <a:latin typeface="Cambria Math" panose="02040503050406030204" pitchFamily="18" charset="0"/>
+                        <a:ea typeface="Cambria Math" panose="02040503050406030204" pitchFamily="18" charset="0"/>
+                      </a:rPr>
+                      <m:t>=800+40=840=</m:t>
+                    </m:r>
+                    <m:nary>
+                      <m:naryPr>
+                        <m:chr m:val="∑"/>
+                        <m:ctrlPr>
+                          <a:rPr lang="zh-TW" altLang="en-US" sz="2000" i="1">
+                            <a:latin typeface="Cambria Math" panose="02040503050406030204" pitchFamily="18" charset="0"/>
+                          </a:rPr>
+                        </m:ctrlPr>
+                      </m:naryPr>
+                      <m:sub>
+                        <m:r>
+                          <m:rPr>
+                            <m:brk m:alnAt="23"/>
+                          </m:rPr>
+                          <a:rPr lang="en-US" altLang="zh-TW" sz="2000" i="1">
+                            <a:latin typeface="Cambria Math" panose="02040503050406030204" pitchFamily="18" charset="0"/>
+                          </a:rPr>
+                          <m:t>𝑖</m:t>
+                        </m:r>
+                        <m:r>
+                          <a:rPr lang="en-US" altLang="zh-TW" sz="2000" i="1">
+                            <a:latin typeface="Cambria Math" panose="02040503050406030204" pitchFamily="18" charset="0"/>
+                          </a:rPr>
+                          <m:t>=1</m:t>
+                        </m:r>
+                      </m:sub>
+                      <m:sup>
+                        <m:r>
+                          <a:rPr lang="en-US" altLang="zh-TW" sz="2000" i="1">
+                            <a:latin typeface="Cambria Math" panose="02040503050406030204" pitchFamily="18" charset="0"/>
+                          </a:rPr>
+                          <m:t>𝑁</m:t>
+                        </m:r>
+                      </m:sup>
+                      <m:e>
+                        <m:sSub>
+                          <m:sSubPr>
+                            <m:ctrlPr>
+                              <a:rPr lang="en-US" altLang="zh-TW" sz="2000" i="1">
+                                <a:latin typeface="Cambria Math" panose="02040503050406030204" pitchFamily="18" charset="0"/>
+                              </a:rPr>
+                            </m:ctrlPr>
+                          </m:sSubPr>
+                          <m:e>
+                            <m:r>
+                              <a:rPr lang="en-US" altLang="zh-TW" sz="2000" b="0" i="1" smtClean="0">
+                                <a:latin typeface="Cambria Math" panose="02040503050406030204" pitchFamily="18" charset="0"/>
+                                <a:ea typeface="Cambria Math" panose="02040503050406030204" pitchFamily="18" charset="0"/>
+                              </a:rPr>
+                              <m:t>𝑦</m:t>
+                            </m:r>
+                          </m:e>
+                          <m:sub>
+                            <m:r>
+                              <a:rPr lang="en-US" altLang="zh-TW" sz="2000" i="1">
+                                <a:latin typeface="Cambria Math" panose="02040503050406030204" pitchFamily="18" charset="0"/>
+                              </a:rPr>
+                              <m:t>𝑖</m:t>
+                            </m:r>
+                          </m:sub>
+                        </m:sSub>
+                      </m:e>
+                    </m:nary>
+                  </m:oMath>
+                </a14:m>
+                <a:endParaRPr kumimoji="1" lang="en-US" altLang="zh-TW" sz="2000" dirty="0"/>
+              </a:p>
+              <a:p>
+                <a:pPr>
+                  <a:lnSpc>
+                    <a:spcPct val="150000"/>
+                  </a:lnSpc>
+                </a:pPr>
+                <a:r>
+                  <a:rPr kumimoji="1" lang="zh-TW" altLang="en-US" sz="2000" dirty="0"/>
+                  <a:t>如果樣本從</a:t>
+                </a:r>
+                <a:r>
+                  <a:rPr kumimoji="1" lang="en-US" altLang="zh-TW" sz="2000" dirty="0"/>
+                  <a:t>1</a:t>
+                </a:r>
+                <a:r>
+                  <a:rPr kumimoji="1" lang="zh-TW" altLang="en-US" sz="2000" dirty="0"/>
+                  <a:t>人增加到</a:t>
+                </a:r>
+                <a:r>
+                  <a:rPr kumimoji="1" lang="en-US" altLang="zh-TW" sz="2000" dirty="0"/>
+                  <a:t>2</a:t>
+                </a:r>
+                <a:r>
+                  <a:rPr kumimoji="1" lang="zh-TW" altLang="en-US" sz="2000" dirty="0"/>
+                  <a:t>人，其他條件不變，那麼每個人中選機率變成</a:t>
+                </a:r>
+                <a14:m>
+                  <m:oMath xmlns:m="http://schemas.openxmlformats.org/officeDocument/2006/math">
+                    <m:f>
+                      <m:fPr>
+                        <m:ctrlPr>
+                          <a:rPr kumimoji="1" lang="en-US" altLang="zh-TW" sz="2000" i="1" smtClean="0">
+                            <a:latin typeface="Cambria Math" panose="02040503050406030204" pitchFamily="18" charset="0"/>
+                          </a:rPr>
+                        </m:ctrlPr>
+                      </m:fPr>
+                      <m:num>
+                        <m:r>
+                          <a:rPr kumimoji="1" lang="en-US" altLang="zh-TW" sz="2000" b="0" i="1" smtClean="0">
+                            <a:latin typeface="Cambria Math" panose="02040503050406030204" pitchFamily="18" charset="0"/>
+                          </a:rPr>
+                          <m:t>2</m:t>
+                        </m:r>
+                      </m:num>
+                      <m:den>
+                        <m:r>
+                          <a:rPr kumimoji="1" lang="en-US" altLang="zh-TW" sz="2000" b="0" i="1" smtClean="0">
+                            <a:latin typeface="Cambria Math" panose="02040503050406030204" pitchFamily="18" charset="0"/>
+                          </a:rPr>
+                          <m:t>34</m:t>
+                        </m:r>
+                      </m:den>
+                    </m:f>
+                    <m:r>
+                      <a:rPr kumimoji="1" lang="en-US" altLang="zh-TW" sz="2000" b="0" i="1" smtClean="0">
+                        <a:latin typeface="Cambria Math" panose="02040503050406030204" pitchFamily="18" charset="0"/>
+                      </a:rPr>
+                      <m:t>=</m:t>
+                    </m:r>
+                    <m:f>
+                      <m:fPr>
+                        <m:ctrlPr>
+                          <a:rPr kumimoji="1" lang="en-US" altLang="zh-TW" sz="2000" b="0" i="1" smtClean="0">
+                            <a:latin typeface="Cambria Math" panose="02040503050406030204" pitchFamily="18" charset="0"/>
+                          </a:rPr>
+                        </m:ctrlPr>
+                      </m:fPr>
+                      <m:num>
+                        <m:r>
+                          <a:rPr kumimoji="1" lang="en-US" altLang="zh-TW" sz="2000" b="0" i="1" smtClean="0">
+                            <a:latin typeface="Cambria Math" panose="02040503050406030204" pitchFamily="18" charset="0"/>
+                          </a:rPr>
+                          <m:t>1</m:t>
+                        </m:r>
+                      </m:num>
+                      <m:den>
+                        <m:r>
+                          <a:rPr kumimoji="1" lang="en-US" altLang="zh-TW" sz="2000" b="0" i="1" smtClean="0">
+                            <a:latin typeface="Cambria Math" panose="02040503050406030204" pitchFamily="18" charset="0"/>
+                          </a:rPr>
+                          <m:t>17</m:t>
+                        </m:r>
+                      </m:den>
+                    </m:f>
+                  </m:oMath>
+                </a14:m>
+                <a:endParaRPr kumimoji="1" lang="en-US" altLang="zh-TW" sz="2000" b="0" dirty="0"/>
+              </a:p>
+              <a:p>
+                <a:pPr>
+                  <a:lnSpc>
+                    <a:spcPct val="150000"/>
+                  </a:lnSpc>
+                </a:pPr>
+                <a:r>
+                  <a:rPr kumimoji="1" lang="zh-TW" altLang="en-US" sz="2000" dirty="0"/>
+                  <a:t>抽出</a:t>
+                </a:r>
+                <a:r>
+                  <a:rPr kumimoji="1" lang="en-US" altLang="zh-TW" sz="2000" dirty="0"/>
+                  <a:t>2</a:t>
+                </a:r>
+                <a:r>
+                  <a:rPr kumimoji="1" lang="zh-TW" altLang="en-US" sz="2000" dirty="0"/>
+                  <a:t>人可能是一個高薪一個低薪、兩個高薪、兩個低薪，分別計算這三種組合的期望值，</a:t>
+                </a:r>
+                <a:r>
+                  <a:rPr kumimoji="1" lang="zh-TW" altLang="en-US" sz="2000"/>
+                  <a:t>然後再加權平均</a:t>
+                </a:r>
+                <a:r>
+                  <a:rPr kumimoji="1" lang="zh-TW" altLang="en-US" sz="2000" dirty="0"/>
+                  <a:t>，會得到</a:t>
+                </a:r>
+                <a:r>
+                  <a:rPr kumimoji="1" lang="en-US" altLang="zh-TW" sz="2000" dirty="0"/>
+                  <a:t>840</a:t>
+                </a:r>
+                <a:r>
+                  <a:rPr kumimoji="1" lang="zh-TW" altLang="en-US" sz="2000" dirty="0"/>
+                  <a:t>萬（為什麼？）</a:t>
+                </a:r>
+                <a:endParaRPr kumimoji="1" lang="en-US" altLang="zh-TW" sz="2000" dirty="0"/>
+              </a:p>
+              <a:p>
+                <a:pPr>
+                  <a:lnSpc>
+                    <a:spcPct val="150000"/>
+                  </a:lnSpc>
+                </a:pPr>
+                <a:r>
+                  <a:rPr kumimoji="1" lang="zh-TW" altLang="en-US" sz="2000" dirty="0"/>
+                  <a:t>比起只抽</a:t>
+                </a:r>
+                <a:r>
+                  <a:rPr kumimoji="1" lang="en-US" altLang="zh-TW" sz="2000" dirty="0"/>
+                  <a:t>1</a:t>
+                </a:r>
+                <a:r>
+                  <a:rPr kumimoji="1" lang="zh-TW" altLang="en-US" sz="2000" dirty="0"/>
+                  <a:t>人，如果抽中組合是一個高薪一個低薪，會更接近最後的期望值。</a:t>
+                </a:r>
+              </a:p>
+            </p:txBody>
+          </p:sp>
+        </mc:Choice>
+        <mc:Fallback>
+          <p:sp>
+            <p:nvSpPr>
+              <p:cNvPr id="3" name="內容版面配置區 2">
+                <a:extLst>
+                  <a:ext uri="{FF2B5EF4-FFF2-40B4-BE49-F238E27FC236}">
+                    <a16:creationId xmlns:a16="http://schemas.microsoft.com/office/drawing/2014/main" id="{D77F4EED-7909-5AF8-5411-8811C2034F9D}"/>
+                  </a:ext>
+                </a:extLst>
+              </p:cNvPr>
+              <p:cNvSpPr>
+                <a:spLocks noGrp="1" noRot="1" noChangeAspect="1" noMove="1" noResize="1" noEditPoints="1" noAdjustHandles="1" noChangeArrowheads="1" noChangeShapeType="1" noTextEdit="1"/>
+              </p:cNvSpPr>
+              <p:nvPr>
+                <p:ph idx="1"/>
+              </p:nvPr>
+            </p:nvSpPr>
+            <p:spPr>
+              <a:blipFill>
+                <a:blip r:embed="rId2"/>
+                <a:stretch>
+                  <a:fillRect l="-603" r="-2171"/>
+                </a:stretch>
+              </a:blipFill>
+            </p:spPr>
+            <p:txBody>
+              <a:bodyPr/>
+              <a:lstStyle/>
+              <a:p>
+                <a:r>
+                  <a:rPr lang="zh-TW" altLang="en-US">
+                    <a:noFill/>
+                  </a:rPr>
+                  <a:t> </a:t>
+                </a:r>
+              </a:p>
+            </p:txBody>
+          </p:sp>
+        </mc:Fallback>
+      </mc:AlternateContent>
       <p:sp>
         <p:nvSpPr>
-          <p:cNvPr id="3" name="Content Placeholder 2">
+          <p:cNvPr id="4" name="投影片編號版面配置區 3">
             <a:extLst>
               <a:ext uri="{FF2B5EF4-FFF2-40B4-BE49-F238E27FC236}">
-                <a16:creationId xmlns:a16="http://schemas.microsoft.com/office/drawing/2014/main" id="{4F08E529-29DD-AB2C-94BF-694DBD41AB6D}"/>
-              </a:ext>
-            </a:extLst>
-          </p:cNvPr>
-          <p:cNvSpPr>
-            <a:spLocks noGrp="1"/>
-          </p:cNvSpPr>
-          <p:nvPr>
-            <p:ph idx="1"/>
-          </p:nvPr>
-        </p:nvSpPr>
-        <p:spPr/>
-        <p:txBody>
-          <a:bodyPr>
-            <a:normAutofit fontScale="85000" lnSpcReduction="10000"/>
-          </a:bodyPr>
-          <a:lstStyle/>
-          <a:p>
-            <a:pPr>
-              <a:lnSpc>
-                <a:spcPct val="150000"/>
-              </a:lnSpc>
-              <a:buFont typeface="Wingdings" pitchFamily="2" charset="2"/>
-              <a:buChar char="l"/>
-            </a:pPr>
-            <a:r>
-              <a:rPr lang="ja-JP" altLang="en-US" sz="2000"/>
-              <a:t>自願參與偏差 </a:t>
-            </a:r>
-            <a:r>
-              <a:rPr lang="en-US" altLang="ja-JP" sz="2000" dirty="0"/>
-              <a:t>(Self-Selection Bias)</a:t>
-            </a:r>
-            <a:r>
-              <a:rPr lang="ja-JP" altLang="en-US" sz="2000"/>
-              <a:t>：由對該主題感興趣、有強烈意見，或單純想領取獎勵的人自行決定加入。</a:t>
-            </a:r>
-            <a:endParaRPr lang="en-US" altLang="ja-JP" sz="2000" dirty="0"/>
-          </a:p>
-          <a:p>
-            <a:pPr>
-              <a:lnSpc>
-                <a:spcPct val="150000"/>
-              </a:lnSpc>
-              <a:buFont typeface="Wingdings" pitchFamily="2" charset="2"/>
-              <a:buChar char="l"/>
-            </a:pPr>
-            <a:r>
-              <a:rPr lang="ja-JP" altLang="en-US" sz="2000"/>
-              <a:t>涵蓋誤差 </a:t>
-            </a:r>
-            <a:r>
-              <a:rPr lang="en-US" altLang="ja-JP" sz="2000" dirty="0"/>
-              <a:t>(Coverage Error)</a:t>
-            </a:r>
-            <a:r>
-              <a:rPr lang="ja-JP" altLang="en-US" sz="2000"/>
-              <a:t>：並非所有人都有同等的機會上網或看到調查連結。例如高齡族群、低收入者的上網頻率較低。</a:t>
-            </a:r>
-            <a:endParaRPr lang="en-US" altLang="ja-JP" sz="2000" dirty="0"/>
-          </a:p>
-          <a:p>
-            <a:pPr>
-              <a:lnSpc>
-                <a:spcPct val="150000"/>
-              </a:lnSpc>
-              <a:buFont typeface="Wingdings" pitchFamily="2" charset="2"/>
-              <a:buChar char="l"/>
-            </a:pPr>
-            <a:r>
-              <a:rPr lang="ja-JP" altLang="en-US" sz="2000"/>
-              <a:t>非隨機的「便利性」：研究者通常將連結發布在自己能觸及的社群媒體、論壇或 </a:t>
-            </a:r>
-            <a:r>
-              <a:rPr lang="en-US" altLang="ja-JP" sz="2000" dirty="0"/>
-              <a:t>LINE </a:t>
-            </a:r>
-            <a:r>
-              <a:rPr lang="ja-JP" altLang="en-US" sz="2000"/>
-              <a:t>群組中。受限於研究者的「同溫層」。</a:t>
-            </a:r>
-            <a:endParaRPr lang="en-US" altLang="ja-JP" sz="2000" dirty="0"/>
-          </a:p>
-          <a:p>
-            <a:pPr>
-              <a:lnSpc>
-                <a:spcPct val="150000"/>
-              </a:lnSpc>
-              <a:buFont typeface="Wingdings" pitchFamily="2" charset="2"/>
-              <a:buChar char="l"/>
-            </a:pPr>
-            <a:r>
-              <a:rPr lang="ja-JP" altLang="en-US" sz="2000"/>
-              <a:t>樣本性質難以驗證：</a:t>
-            </a:r>
-          </a:p>
-          <a:p>
-            <a:pPr>
-              <a:lnSpc>
-                <a:spcPct val="150000"/>
-              </a:lnSpc>
-              <a:buFont typeface="Courier New" panose="02070309020205020404" pitchFamily="49" charset="0"/>
-              <a:buChar char="o"/>
-            </a:pPr>
-            <a:r>
-              <a:rPr lang="ja-JP" altLang="en-US" sz="2000"/>
-              <a:t>重複填答： 同一人可能為了獎品多次填寫。</a:t>
-            </a:r>
-          </a:p>
-          <a:p>
-            <a:pPr>
-              <a:lnSpc>
-                <a:spcPct val="150000"/>
-              </a:lnSpc>
-              <a:buFont typeface="Courier New" panose="02070309020205020404" pitchFamily="49" charset="0"/>
-              <a:buChar char="o"/>
-            </a:pPr>
-            <a:r>
-              <a:rPr lang="ja-JP" altLang="en-US" sz="2000"/>
-              <a:t>機器人與無效樣本： </a:t>
-            </a:r>
-            <a:r>
-              <a:rPr lang="en-US" altLang="ja-JP" sz="2000" dirty="0"/>
-              <a:t>AI </a:t>
-            </a:r>
-            <a:r>
-              <a:rPr lang="ja-JP" altLang="en-US" sz="2000"/>
-              <a:t>或自動化程式可能產生大量垃圾數據。</a:t>
-            </a:r>
-          </a:p>
-          <a:p>
-            <a:pPr>
-              <a:lnSpc>
-                <a:spcPct val="150000"/>
-              </a:lnSpc>
-              <a:buFont typeface="Courier New" panose="02070309020205020404" pitchFamily="49" charset="0"/>
-              <a:buChar char="o"/>
-            </a:pPr>
-            <a:r>
-              <a:rPr lang="ja-JP" altLang="en-US" sz="2000"/>
-              <a:t>身分造假： 受訪者可能為了領取獎勵而虛報符合填答問卷條件的年齡或職業。</a:t>
-            </a:r>
-            <a:endParaRPr lang="en-US" altLang="ja-JP" sz="2000" dirty="0"/>
-          </a:p>
-          <a:p>
-            <a:pPr>
-              <a:lnSpc>
-                <a:spcPct val="150000"/>
-              </a:lnSpc>
-              <a:buFont typeface="Wingdings" pitchFamily="2" charset="2"/>
-              <a:buChar char="l"/>
-            </a:pPr>
-            <a:endParaRPr lang="en-US" sz="2000" dirty="0"/>
-          </a:p>
-          <a:p>
-            <a:pPr>
-              <a:buFont typeface="Wingdings" pitchFamily="2" charset="2"/>
-              <a:buChar char="l"/>
-            </a:pPr>
-            <a:endParaRPr lang="en-US" dirty="0"/>
-          </a:p>
-        </p:txBody>
-      </p:sp>
-      <p:sp>
-        <p:nvSpPr>
-          <p:cNvPr id="4" name="Slide Number Placeholder 3">
-            <a:extLst>
-              <a:ext uri="{FF2B5EF4-FFF2-40B4-BE49-F238E27FC236}">
-                <a16:creationId xmlns:a16="http://schemas.microsoft.com/office/drawing/2014/main" id="{C98085D9-FBDD-C940-3F14-8994BAC36532}"/>
+                <a16:creationId xmlns:a16="http://schemas.microsoft.com/office/drawing/2014/main" id="{BF4C5D14-5932-A53B-6231-86CE0BBFB842}"/>
               </a:ext>
             </a:extLst>
           </p:cNvPr>
@@ -6873,7 +11111,7 @@
     </p:spTree>
     <p:extLst>
       <p:ext uri="{BB962C8B-B14F-4D97-AF65-F5344CB8AC3E}">
-        <p14:creationId xmlns:p14="http://schemas.microsoft.com/office/powerpoint/2010/main" val="1700727804"/>
+        <p14:creationId xmlns:p14="http://schemas.microsoft.com/office/powerpoint/2010/main" val="3414733"/>
       </p:ext>
     </p:extLst>
   </p:cSld>

--- a/投影片/民意與調查Week5.pptx
+++ b/投影片/民意與調查Week5.pptx
@@ -5,7 +5,7 @@
     <p:sldMasterId id="2147483648" r:id="rId1"/>
   </p:sldMasterIdLst>
   <p:notesMasterIdLst>
-    <p:notesMasterId r:id="rId20"/>
+    <p:notesMasterId r:id="rId15"/>
   </p:notesMasterIdLst>
   <p:sldIdLst>
     <p:sldId id="256" r:id="rId2"/>
@@ -18,14 +18,9 @@
     <p:sldId id="275" r:id="rId9"/>
     <p:sldId id="276" r:id="rId10"/>
     <p:sldId id="277" r:id="rId11"/>
-    <p:sldId id="272" r:id="rId12"/>
-    <p:sldId id="265" r:id="rId13"/>
-    <p:sldId id="266" r:id="rId14"/>
-    <p:sldId id="267" r:id="rId15"/>
-    <p:sldId id="268" r:id="rId16"/>
-    <p:sldId id="269" r:id="rId17"/>
-    <p:sldId id="270" r:id="rId18"/>
-    <p:sldId id="258" r:id="rId19"/>
+    <p:sldId id="278" r:id="rId12"/>
+    <p:sldId id="279" r:id="rId13"/>
+    <p:sldId id="280" r:id="rId14"/>
   </p:sldIdLst>
   <p:sldSz cx="12192000" cy="6858000"/>
   <p:notesSz cx="6858000" cy="9144000"/>
@@ -3888,39 +3883,45 @@
           <p:cNvGraphicFramePr>
             <a:graphicFrameLocks noGrp="1"/>
           </p:cNvGraphicFramePr>
-          <p:nvPr/>
+          <p:nvPr>
+            <p:extLst>
+              <p:ext uri="{D42A27DB-BD31-4B8C-83A1-F6EECF244321}">
+                <p14:modId xmlns:p14="http://schemas.microsoft.com/office/powerpoint/2010/main" val="3756962315"/>
+              </p:ext>
+            </p:extLst>
+          </p:nvPr>
         </p:nvGraphicFramePr>
         <p:xfrm>
-          <a:off x="838200" y="2553494"/>
-          <a:ext cx="10515599" cy="2895600"/>
+          <a:off x="1425039" y="2553494"/>
+          <a:ext cx="9262754" cy="3048000"/>
         </p:xfrm>
         <a:graphic>
           <a:graphicData uri="http://schemas.openxmlformats.org/drawingml/2006/table">
             <a:tbl>
               <a:tblPr/>
               <a:tblGrid>
-                <a:gridCol w="2695548">
+                <a:gridCol w="1967260">
                   <a:extLst>
                     <a:ext uri="{9D8B030D-6E8A-4147-A177-3AD203B41FA5}">
                       <a16:colId xmlns:a16="http://schemas.microsoft.com/office/drawing/2014/main" val="1092537034"/>
                     </a:ext>
                   </a:extLst>
                 </a:gridCol>
-                <a:gridCol w="2695548">
+                <a:gridCol w="2514735">
                   <a:extLst>
                     <a:ext uri="{9D8B030D-6E8A-4147-A177-3AD203B41FA5}">
                       <a16:colId xmlns:a16="http://schemas.microsoft.com/office/drawing/2014/main" val="4071730486"/>
                     </a:ext>
                   </a:extLst>
                 </a:gridCol>
-                <a:gridCol w="2695548">
+                <a:gridCol w="2514735">
                   <a:extLst>
                     <a:ext uri="{9D8B030D-6E8A-4147-A177-3AD203B41FA5}">
                       <a16:colId xmlns:a16="http://schemas.microsoft.com/office/drawing/2014/main" val="555145253"/>
                     </a:ext>
                   </a:extLst>
                 </a:gridCol>
-                <a:gridCol w="2428955">
+                <a:gridCol w="2266024">
                   <a:extLst>
                     <a:ext uri="{9D8B030D-6E8A-4147-A177-3AD203B41FA5}">
                       <a16:colId xmlns:a16="http://schemas.microsoft.com/office/drawing/2014/main" val="3059292820"/>
@@ -3936,7 +3937,7 @@
                     <a:p>
                       <a:pPr rtl="0"/>
                       <a:r>
-                        <a:rPr lang="zh-TW" altLang="en-US" b="1">
+                        <a:rPr lang="zh-TW" altLang="en-US" sz="2000" b="1" dirty="0">
                           <a:solidFill>
                             <a:srgbClr val="1F1F1F"/>
                           </a:solidFill>
@@ -3945,7 +3946,7 @@
                         </a:rPr>
                         <a:t>組合</a:t>
                       </a:r>
-                      <a:endParaRPr lang="zh-TW" altLang="en-US">
+                      <a:endParaRPr lang="zh-TW" altLang="en-US" sz="2000" dirty="0">
                         <a:solidFill>
                           <a:srgbClr val="1F1F1F"/>
                         </a:solidFill>
@@ -4001,7 +4002,7 @@
                     <a:p>
                       <a:pPr rtl="0"/>
                       <a:r>
-                        <a:rPr lang="en" b="1">
+                        <a:rPr lang="en" sz="2000" b="1">
                           <a:solidFill>
                             <a:srgbClr val="1F1F1F"/>
                           </a:solidFill>
@@ -4011,7 +4012,7 @@
                         <a:t>H-T </a:t>
                       </a:r>
                       <a:r>
-                        <a:rPr lang="zh-TW" altLang="en-US" b="1">
+                        <a:rPr lang="zh-TW" altLang="en-US" sz="2000" b="1">
                           <a:solidFill>
                             <a:srgbClr val="1F1F1F"/>
                           </a:solidFill>
@@ -4021,7 +4022,7 @@
                         <a:t>估計值 </a:t>
                       </a:r>
                       <a:r>
-                        <a:rPr lang="en-US" altLang="zh-TW" b="1">
+                        <a:rPr lang="en-US" altLang="zh-TW" sz="2000" b="1">
                           <a:solidFill>
                             <a:srgbClr val="1F1F1F"/>
                           </a:solidFill>
@@ -4031,7 +4032,7 @@
                         <a:t>(</a:t>
                       </a:r>
                       <a:r>
-                        <a:rPr lang="en" b="1">
+                        <a:rPr lang="en" sz="2000" b="1">
                           <a:solidFill>
                             <a:srgbClr val="1F1F1F"/>
                           </a:solidFill>
@@ -4040,7 +4041,7 @@
                         </a:rPr>
                         <a:t>Y^)</a:t>
                       </a:r>
-                      <a:endParaRPr lang="en">
+                      <a:endParaRPr lang="en" sz="2000">
                         <a:solidFill>
                           <a:srgbClr val="1F1F1F"/>
                         </a:solidFill>
@@ -4096,7 +4097,7 @@
                     <a:p>
                       <a:pPr rtl="0"/>
                       <a:r>
-                        <a:rPr lang="zh-TW" altLang="en-US" b="1">
+                        <a:rPr lang="zh-TW" altLang="en-US" sz="2000" b="1">
                           <a:solidFill>
                             <a:srgbClr val="1F1F1F"/>
                           </a:solidFill>
@@ -4106,7 +4107,7 @@
                         <a:t>發生機率 </a:t>
                       </a:r>
                       <a:r>
-                        <a:rPr lang="en-US" altLang="zh-TW" b="1">
+                        <a:rPr lang="en-US" altLang="zh-TW" sz="2000" b="1">
                           <a:solidFill>
                             <a:srgbClr val="1F1F1F"/>
                           </a:solidFill>
@@ -4116,7 +4117,7 @@
                         <a:t>(</a:t>
                       </a:r>
                       <a:r>
-                        <a:rPr lang="en" b="1">
+                        <a:rPr lang="en" sz="2000" b="1">
                           <a:solidFill>
                             <a:srgbClr val="1F1F1F"/>
                           </a:solidFill>
@@ -4125,7 +4126,7 @@
                         </a:rPr>
                         <a:t>P)</a:t>
                       </a:r>
-                      <a:endParaRPr lang="en">
+                      <a:endParaRPr lang="en" sz="2000">
                         <a:solidFill>
                           <a:srgbClr val="1F1F1F"/>
                         </a:solidFill>
@@ -4181,7 +4182,7 @@
                     <a:p>
                       <a:pPr rtl="0"/>
                       <a:r>
-                        <a:rPr lang="zh-TW" altLang="en-US" b="1">
+                        <a:rPr lang="zh-TW" altLang="en-US" sz="2000" b="1">
                           <a:solidFill>
                             <a:srgbClr val="1F1F1F"/>
                           </a:solidFill>
@@ -4191,7 +4192,7 @@
                         <a:t>加權結果 </a:t>
                       </a:r>
                       <a:r>
-                        <a:rPr lang="en-US" altLang="zh-TW" b="1">
+                        <a:rPr lang="en-US" altLang="zh-TW" sz="2000" b="1">
                           <a:solidFill>
                             <a:srgbClr val="1F1F1F"/>
                           </a:solidFill>
@@ -4201,7 +4202,7 @@
                         <a:t>(</a:t>
                       </a:r>
                       <a:r>
-                        <a:rPr lang="en" b="1">
+                        <a:rPr lang="en" sz="2000" b="1">
                           <a:solidFill>
                             <a:srgbClr val="1F1F1F"/>
                           </a:solidFill>
@@ -4210,7 +4211,7 @@
                         </a:rPr>
                         <a:t>Y^×P)</a:t>
                       </a:r>
-                      <a:endParaRPr lang="en">
+                      <a:endParaRPr lang="en" sz="2000">
                         <a:solidFill>
                           <a:srgbClr val="1F1F1F"/>
                         </a:solidFill>
@@ -4273,7 +4274,7 @@
                     <a:p>
                       <a:pPr rtl="0"/>
                       <a:r>
-                        <a:rPr lang="en-US" altLang="zh-TW" b="1" dirty="0">
+                        <a:rPr lang="en-US" altLang="zh-TW" sz="2000" b="1" dirty="0">
                           <a:solidFill>
                             <a:srgbClr val="1F1F1F"/>
                           </a:solidFill>
@@ -4283,7 +4284,7 @@
                         <a:t>2 </a:t>
                       </a:r>
                       <a:r>
-                        <a:rPr lang="zh-TW" altLang="en-US" b="1" dirty="0">
+                        <a:rPr lang="zh-TW" altLang="en-US" sz="2000" b="1" dirty="0">
                           <a:solidFill>
                             <a:srgbClr val="1F1F1F"/>
                           </a:solidFill>
@@ -4292,7 +4293,7 @@
                         </a:rPr>
                         <a:t>富人</a:t>
                       </a:r>
-                      <a:endParaRPr lang="zh-TW" altLang="en-US" dirty="0">
+                      <a:endParaRPr lang="zh-TW" altLang="en-US" sz="2000" dirty="0">
                         <a:solidFill>
                           <a:srgbClr val="1F1F1F"/>
                         </a:solidFill>
@@ -4348,7 +4349,7 @@
                     <a:p>
                       <a:pPr rtl="0"/>
                       <a:r>
-                        <a:rPr lang="en-US" altLang="zh-TW">
+                        <a:rPr lang="en-US" altLang="zh-TW" sz="2000">
                           <a:solidFill>
                             <a:srgbClr val="1F1F1F"/>
                           </a:solidFill>
@@ -4358,7 +4359,7 @@
                         <a:t>850 </a:t>
                       </a:r>
                       <a:r>
-                        <a:rPr lang="zh-TW" altLang="en-US">
+                        <a:rPr lang="zh-TW" altLang="en-US" sz="2000">
                           <a:solidFill>
                             <a:srgbClr val="1F1F1F"/>
                           </a:solidFill>
@@ -4416,7 +4417,7 @@
                     <a:p>
                       <a:pPr rtl="0"/>
                       <a:r>
-                        <a:rPr lang="en-US" altLang="zh-TW">
+                        <a:rPr lang="en-US" altLang="zh-TW" sz="2000">
                           <a:solidFill>
                             <a:srgbClr val="1F1F1F"/>
                           </a:solidFill>
@@ -4474,7 +4475,7 @@
                     <a:p>
                       <a:pPr rtl="0"/>
                       <a:r>
-                        <a:rPr lang="en-US" altLang="zh-TW" b="1">
+                        <a:rPr lang="en-US" altLang="zh-TW" sz="2000" b="1">
                           <a:solidFill>
                             <a:srgbClr val="1F1F1F"/>
                           </a:solidFill>
@@ -4484,7 +4485,7 @@
                         <a:t>746.64 </a:t>
                       </a:r>
                       <a:r>
-                        <a:rPr lang="zh-TW" altLang="en-US" b="1">
+                        <a:rPr lang="zh-TW" altLang="en-US" sz="2000" b="1">
                           <a:solidFill>
                             <a:srgbClr val="1F1F1F"/>
                           </a:solidFill>
@@ -4493,7 +4494,7 @@
                         </a:rPr>
                         <a:t>萬</a:t>
                       </a:r>
-                      <a:endParaRPr lang="zh-TW" altLang="en-US">
+                      <a:endParaRPr lang="zh-TW" altLang="en-US" sz="2000">
                         <a:solidFill>
                           <a:srgbClr val="1F1F1F"/>
                         </a:solidFill>
@@ -4556,7 +4557,7 @@
                     <a:p>
                       <a:pPr rtl="0"/>
                       <a:r>
-                        <a:rPr lang="en-US" altLang="zh-TW" b="1">
+                        <a:rPr lang="en-US" altLang="zh-TW" sz="2000" b="1" dirty="0">
                           <a:solidFill>
                             <a:srgbClr val="1F1F1F"/>
                           </a:solidFill>
@@ -4566,7 +4567,7 @@
                         <a:t>1 </a:t>
                       </a:r>
                       <a:r>
-                        <a:rPr lang="zh-TW" altLang="en-US" b="1">
+                        <a:rPr lang="zh-TW" altLang="en-US" sz="2000" b="1" dirty="0">
                           <a:solidFill>
                             <a:srgbClr val="1F1F1F"/>
                           </a:solidFill>
@@ -4576,7 +4577,7 @@
                         <a:t>富 </a:t>
                       </a:r>
                       <a:r>
-                        <a:rPr lang="en-US" altLang="zh-TW" b="1">
+                        <a:rPr lang="en-US" altLang="zh-TW" sz="2000" b="1" dirty="0">
                           <a:solidFill>
                             <a:srgbClr val="1F1F1F"/>
                           </a:solidFill>
@@ -4586,7 +4587,7 @@
                         <a:t>1 </a:t>
                       </a:r>
                       <a:r>
-                        <a:rPr lang="zh-TW" altLang="en-US" b="1">
+                        <a:rPr lang="zh-TW" altLang="en-US" sz="2000" b="1" dirty="0">
                           <a:solidFill>
                             <a:srgbClr val="1F1F1F"/>
                           </a:solidFill>
@@ -4595,7 +4596,7 @@
                         </a:rPr>
                         <a:t>窮</a:t>
                       </a:r>
-                      <a:endParaRPr lang="zh-TW" altLang="en-US">
+                      <a:endParaRPr lang="zh-TW" altLang="en-US" sz="2000" dirty="0">
                         <a:solidFill>
                           <a:srgbClr val="1F1F1F"/>
                         </a:solidFill>
@@ -4651,7 +4652,7 @@
                     <a:p>
                       <a:pPr rtl="0"/>
                       <a:r>
-                        <a:rPr lang="en-US" altLang="zh-TW">
+                        <a:rPr lang="en-US" altLang="zh-TW" sz="2000">
                           <a:solidFill>
                             <a:srgbClr val="1F1F1F"/>
                           </a:solidFill>
@@ -4661,7 +4662,7 @@
                         <a:t>765 </a:t>
                       </a:r>
                       <a:r>
-                        <a:rPr lang="zh-TW" altLang="en-US">
+                        <a:rPr lang="zh-TW" altLang="en-US" sz="2000">
                           <a:solidFill>
                             <a:srgbClr val="1F1F1F"/>
                           </a:solidFill>
@@ -4719,7 +4720,7 @@
                     <a:p>
                       <a:pPr rtl="0"/>
                       <a:r>
-                        <a:rPr lang="en-US" altLang="zh-TW">
+                        <a:rPr lang="en-US" altLang="zh-TW" sz="2000">
                           <a:solidFill>
                             <a:srgbClr val="1F1F1F"/>
                           </a:solidFill>
@@ -4777,7 +4778,7 @@
                     <a:p>
                       <a:pPr rtl="0"/>
                       <a:r>
-                        <a:rPr lang="en-US" altLang="zh-TW" b="1">
+                        <a:rPr lang="en-US" altLang="zh-TW" sz="2000" b="1">
                           <a:solidFill>
                             <a:srgbClr val="1F1F1F"/>
                           </a:solidFill>
@@ -4787,7 +4788,7 @@
                         <a:t>91.57 </a:t>
                       </a:r>
                       <a:r>
-                        <a:rPr lang="zh-TW" altLang="en-US" b="1">
+                        <a:rPr lang="zh-TW" altLang="en-US" sz="2000" b="1">
                           <a:solidFill>
                             <a:srgbClr val="1F1F1F"/>
                           </a:solidFill>
@@ -4796,7 +4797,7 @@
                         </a:rPr>
                         <a:t>萬</a:t>
                       </a:r>
-                      <a:endParaRPr lang="zh-TW" altLang="en-US">
+                      <a:endParaRPr lang="zh-TW" altLang="en-US" sz="2000">
                         <a:solidFill>
                           <a:srgbClr val="1F1F1F"/>
                         </a:solidFill>
@@ -4859,7 +4860,7 @@
                     <a:p>
                       <a:pPr rtl="0"/>
                       <a:r>
-                        <a:rPr lang="en-US" altLang="zh-TW" b="1">
+                        <a:rPr lang="en-US" altLang="zh-TW" sz="2000" b="1" dirty="0">
                           <a:solidFill>
                             <a:srgbClr val="1F1F1F"/>
                           </a:solidFill>
@@ -4869,7 +4870,7 @@
                         <a:t>2 </a:t>
                       </a:r>
                       <a:r>
-                        <a:rPr lang="zh-TW" altLang="en-US" b="1">
+                        <a:rPr lang="zh-TW" altLang="en-US" sz="2000" b="1" dirty="0">
                           <a:solidFill>
                             <a:srgbClr val="1F1F1F"/>
                           </a:solidFill>
@@ -4878,7 +4879,7 @@
                         </a:rPr>
                         <a:t>窮人</a:t>
                       </a:r>
-                      <a:endParaRPr lang="zh-TW" altLang="en-US">
+                      <a:endParaRPr lang="zh-TW" altLang="en-US" sz="2000" dirty="0">
                         <a:solidFill>
                           <a:srgbClr val="1F1F1F"/>
                         </a:solidFill>
@@ -4934,7 +4935,7 @@
                     <a:p>
                       <a:pPr rtl="0"/>
                       <a:r>
-                        <a:rPr lang="en-US" altLang="zh-TW">
+                        <a:rPr lang="en-US" altLang="zh-TW" sz="2000">
                           <a:solidFill>
                             <a:srgbClr val="1F1F1F"/>
                           </a:solidFill>
@@ -4944,7 +4945,7 @@
                         <a:t>680 </a:t>
                       </a:r>
                       <a:r>
-                        <a:rPr lang="zh-TW" altLang="en-US">
+                        <a:rPr lang="zh-TW" altLang="en-US" sz="2000">
                           <a:solidFill>
                             <a:srgbClr val="1F1F1F"/>
                           </a:solidFill>
@@ -5002,7 +5003,7 @@
                     <a:p>
                       <a:pPr rtl="0"/>
                       <a:r>
-                        <a:rPr lang="en-US" altLang="zh-TW">
+                        <a:rPr lang="en-US" altLang="zh-TW" sz="2000">
                           <a:solidFill>
                             <a:srgbClr val="1F1F1F"/>
                           </a:solidFill>
@@ -5060,7 +5061,7 @@
                     <a:p>
                       <a:pPr rtl="0"/>
                       <a:r>
-                        <a:rPr lang="en-US" altLang="zh-TW" b="1">
+                        <a:rPr lang="en-US" altLang="zh-TW" sz="2000" b="1">
                           <a:solidFill>
                             <a:srgbClr val="1F1F1F"/>
                           </a:solidFill>
@@ -5070,7 +5071,7 @@
                         <a:t>1.22 </a:t>
                       </a:r>
                       <a:r>
-                        <a:rPr lang="zh-TW" altLang="en-US" b="1">
+                        <a:rPr lang="zh-TW" altLang="en-US" sz="2000" b="1">
                           <a:solidFill>
                             <a:srgbClr val="1F1F1F"/>
                           </a:solidFill>
@@ -5079,7 +5080,7 @@
                         </a:rPr>
                         <a:t>萬</a:t>
                       </a:r>
-                      <a:endParaRPr lang="zh-TW" altLang="en-US">
+                      <a:endParaRPr lang="zh-TW" altLang="en-US" sz="2000">
                         <a:solidFill>
                           <a:srgbClr val="1F1F1F"/>
                         </a:solidFill>
@@ -5142,7 +5143,7 @@
                     <a:p>
                       <a:pPr rtl="0"/>
                       <a:r>
-                        <a:rPr lang="zh-TW" altLang="en-US" b="1">
+                        <a:rPr lang="zh-TW" altLang="en-US" sz="2000" b="1" dirty="0">
                           <a:solidFill>
                             <a:srgbClr val="1F1F1F"/>
                           </a:solidFill>
@@ -5151,7 +5152,7 @@
                         </a:rPr>
                         <a:t>總計</a:t>
                       </a:r>
-                      <a:endParaRPr lang="zh-TW" altLang="en-US">
+                      <a:endParaRPr lang="zh-TW" altLang="en-US" sz="2000" dirty="0">
                         <a:solidFill>
                           <a:srgbClr val="1F1F1F"/>
                         </a:solidFill>
@@ -5206,7 +5207,7 @@
                     <a:lstStyle/>
                     <a:p>
                       <a:pPr rtl="0"/>
-                      <a:endParaRPr lang="zh-TW" altLang="en-US">
+                      <a:endParaRPr lang="zh-TW" altLang="en-US" sz="2000" dirty="0">
                         <a:solidFill>
                           <a:srgbClr val="1F1F1F"/>
                         </a:solidFill>
@@ -5262,7 +5263,7 @@
                     <a:p>
                       <a:pPr rtl="0"/>
                       <a:r>
-                        <a:rPr lang="en-US" altLang="zh-TW" b="1">
+                        <a:rPr lang="en-US" altLang="zh-TW" sz="2000" b="1" dirty="0">
                           <a:solidFill>
                             <a:srgbClr val="1F1F1F"/>
                           </a:solidFill>
@@ -5271,7 +5272,7 @@
                         </a:rPr>
                         <a:t>1.0000</a:t>
                       </a:r>
-                      <a:endParaRPr lang="zh-TW" altLang="en-US">
+                      <a:endParaRPr lang="zh-TW" altLang="en-US" sz="2000" dirty="0">
                         <a:solidFill>
                           <a:srgbClr val="1F1F1F"/>
                         </a:solidFill>
@@ -5327,7 +5328,7 @@
                     <a:p>
                       <a:pPr rtl="0"/>
                       <a:r>
-                        <a:rPr lang="en-US" altLang="zh-TW" b="1" dirty="0">
+                        <a:rPr lang="en-US" altLang="zh-TW" sz="2000" b="1" dirty="0">
                           <a:solidFill>
                             <a:srgbClr val="1F1F1F"/>
                           </a:solidFill>
@@ -5337,7 +5338,7 @@
                         <a:t>839.43 </a:t>
                       </a:r>
                       <a:r>
-                        <a:rPr lang="zh-TW" altLang="en-US" b="1" dirty="0">
+                        <a:rPr lang="zh-TW" altLang="en-US" sz="2000" b="1" dirty="0">
                           <a:solidFill>
                             <a:srgbClr val="1F1F1F"/>
                           </a:solidFill>
@@ -5346,7 +5347,7 @@
                         </a:rPr>
                         <a:t>萬</a:t>
                       </a:r>
-                      <a:endParaRPr lang="zh-TW" altLang="en-US" dirty="0">
+                      <a:endParaRPr lang="zh-TW" altLang="en-US" sz="2000" dirty="0">
                         <a:solidFill>
                           <a:srgbClr val="1F1F1F"/>
                         </a:solidFill>
@@ -5423,13 +5424,7 @@
   <p:cSld>
     <p:spTree>
       <p:nvGrpSpPr>
-        <p:cNvPr id="1" name="">
-          <a:extLst>
-            <a:ext uri="{FF2B5EF4-FFF2-40B4-BE49-F238E27FC236}">
-              <a16:creationId xmlns:a16="http://schemas.microsoft.com/office/drawing/2014/main" id="{D939A6A0-D0A4-5C45-40A5-D1303876A315}"/>
-            </a:ext>
-          </a:extLst>
-        </p:cNvPr>
+        <p:cNvPr id="1" name=""/>
         <p:cNvGrpSpPr/>
         <p:nvPr/>
       </p:nvGrpSpPr>
@@ -5446,7 +5441,7 @@
           <p:cNvPr id="2" name="Title 1">
             <a:extLst>
               <a:ext uri="{FF2B5EF4-FFF2-40B4-BE49-F238E27FC236}">
-                <a16:creationId xmlns:a16="http://schemas.microsoft.com/office/drawing/2014/main" id="{C2EC4BC0-34C7-DDBF-FA25-8D0B64CA5399}"/>
+                <a16:creationId xmlns:a16="http://schemas.microsoft.com/office/drawing/2014/main" id="{31C60B46-553E-18AD-A4BE-E745BAB0CAA0}"/>
               </a:ext>
             </a:extLst>
           </p:cNvPr>
@@ -5464,7 +5459,7 @@
           <a:p>
             <a:r>
               <a:rPr lang="ja-JP" altLang="en-US"/>
-              <a:t>機率抽樣方式</a:t>
+              <a:t>機率抽樣的元素（六）</a:t>
             </a:r>
             <a:endParaRPr lang="en-US" dirty="0"/>
           </a:p>
@@ -5477,7 +5472,7 @@
               <p:cNvPr id="3" name="Content Placeholder 2">
                 <a:extLst>
                   <a:ext uri="{FF2B5EF4-FFF2-40B4-BE49-F238E27FC236}">
-                    <a16:creationId xmlns:a16="http://schemas.microsoft.com/office/drawing/2014/main" id="{A7D72A33-6DF2-AAC5-553F-AADBC53C207C}"/>
+                    <a16:creationId xmlns:a16="http://schemas.microsoft.com/office/drawing/2014/main" id="{659579A7-244A-1B4E-A6EF-9B1F87EA3242}"/>
                   </a:ext>
                 </a:extLst>
               </p:cNvPr>
@@ -5490,84 +5485,539 @@
             </p:nvSpPr>
             <p:spPr/>
             <p:txBody>
-              <a:bodyPr>
-                <a:normAutofit fontScale="62500" lnSpcReduction="20000"/>
-              </a:bodyPr>
+              <a:bodyPr/>
               <a:lstStyle/>
               <a:p>
-                <a:pPr marL="0" indent="0">
-                  <a:lnSpc>
-                    <a:spcPct val="150000"/>
-                  </a:lnSpc>
-                  <a:buNone/>
-                </a:pPr>
-                <a:endParaRPr lang="en-US" altLang="ja-JP" sz="2000" dirty="0"/>
+                <a14:m>
+                  <m:oMath xmlns:m="http://schemas.openxmlformats.org/officeDocument/2006/math">
+                    <m:r>
+                      <a:rPr lang="en-US" sz="2000" b="1" i="1" smtClean="0">
+                        <a:latin typeface="Cambria Math" panose="02040503050406030204" pitchFamily="18" charset="0"/>
+                      </a:rPr>
+                      <m:t>前面是</m:t>
+                    </m:r>
+                    <m:r>
+                      <a:rPr lang="zh-TW" altLang="en-US" sz="2000" b="1" i="1">
+                        <a:latin typeface="Cambria Math" panose="02040503050406030204" pitchFamily="18" charset="0"/>
+                      </a:rPr>
+                      <m:t>計算</m:t>
+                    </m:r>
+                    <m:r>
+                      <a:rPr lang="zh-TW" altLang="en-US" sz="2000" b="1" i="1" smtClean="0">
+                        <a:latin typeface="Cambria Math" panose="02040503050406030204" pitchFamily="18" charset="0"/>
+                      </a:rPr>
+                      <m:t>總和。計算平均數的公式為：</m:t>
+                    </m:r>
+                    <m:r>
+                      <a:rPr lang="zh-TW" altLang="en-US" sz="2000" b="0" i="1" smtClean="0">
+                        <a:latin typeface="Cambria Math" panose="02040503050406030204" pitchFamily="18" charset="0"/>
+                      </a:rPr>
+                      <m:t> </m:t>
+                    </m:r>
+                    <m:acc>
+                      <m:accPr>
+                        <m:chr m:val="̅"/>
+                        <m:ctrlPr>
+                          <a:rPr lang="en-US" sz="2000" i="1" smtClean="0">
+                            <a:latin typeface="Cambria Math" panose="02040503050406030204" pitchFamily="18" charset="0"/>
+                          </a:rPr>
+                        </m:ctrlPr>
+                      </m:accPr>
+                      <m:e>
+                        <m:sSub>
+                          <m:sSubPr>
+                            <m:ctrlPr>
+                              <a:rPr lang="en-US" sz="2000" i="1" smtClean="0">
+                                <a:latin typeface="Cambria Math" panose="02040503050406030204" pitchFamily="18" charset="0"/>
+                              </a:rPr>
+                            </m:ctrlPr>
+                          </m:sSubPr>
+                          <m:e>
+                            <m:r>
+                              <a:rPr lang="en-US" sz="2000" b="0" i="1" smtClean="0">
+                                <a:latin typeface="Cambria Math" panose="02040503050406030204" pitchFamily="18" charset="0"/>
+                              </a:rPr>
+                              <m:t>𝑦</m:t>
+                            </m:r>
+                          </m:e>
+                          <m:sub>
+                            <m:r>
+                              <a:rPr lang="en-US" sz="2000" b="0" i="1" smtClean="0">
+                                <a:latin typeface="Cambria Math" panose="02040503050406030204" pitchFamily="18" charset="0"/>
+                              </a:rPr>
+                              <m:t>𝐻𝑇</m:t>
+                            </m:r>
+                          </m:sub>
+                        </m:sSub>
+                      </m:e>
+                    </m:acc>
+                  </m:oMath>
+                </a14:m>
+                <a:r>
+                  <a:rPr lang="en-US" sz="2000" dirty="0"/>
+                  <a:t>=</a:t>
+                </a:r>
+                <a14:m>
+                  <m:oMath xmlns:m="http://schemas.openxmlformats.org/officeDocument/2006/math">
+                    <m:f>
+                      <m:fPr>
+                        <m:ctrlPr>
+                          <a:rPr lang="en-US" sz="2000" i="1" dirty="0" smtClean="0">
+                            <a:latin typeface="Cambria Math" panose="02040503050406030204" pitchFamily="18" charset="0"/>
+                          </a:rPr>
+                        </m:ctrlPr>
+                      </m:fPr>
+                      <m:num>
+                        <m:r>
+                          <a:rPr lang="en-US" sz="2000" b="0" i="1" dirty="0" smtClean="0">
+                            <a:latin typeface="Cambria Math" panose="02040503050406030204" pitchFamily="18" charset="0"/>
+                          </a:rPr>
+                          <m:t>1</m:t>
+                        </m:r>
+                      </m:num>
+                      <m:den>
+                        <m:r>
+                          <a:rPr lang="en-US" sz="2000" b="0" i="1" dirty="0" smtClean="0">
+                            <a:latin typeface="Cambria Math" panose="02040503050406030204" pitchFamily="18" charset="0"/>
+                          </a:rPr>
+                          <m:t>𝑁</m:t>
+                        </m:r>
+                      </m:den>
+                    </m:f>
+                    <m:nary>
+                      <m:naryPr>
+                        <m:chr m:val="∑"/>
+                        <m:ctrlPr>
+                          <a:rPr lang="en-US" sz="2000" i="1" dirty="0" smtClean="0">
+                            <a:latin typeface="Cambria Math" panose="02040503050406030204" pitchFamily="18" charset="0"/>
+                          </a:rPr>
+                        </m:ctrlPr>
+                      </m:naryPr>
+                      <m:sub>
+                        <m:r>
+                          <m:rPr>
+                            <m:brk m:alnAt="23"/>
+                          </m:rPr>
+                          <a:rPr lang="en-US" sz="2000" b="0" i="1" dirty="0" smtClean="0">
+                            <a:latin typeface="Cambria Math" panose="02040503050406030204" pitchFamily="18" charset="0"/>
+                          </a:rPr>
+                          <m:t>𝑘</m:t>
+                        </m:r>
+                        <m:r>
+                          <a:rPr lang="en-US" sz="2000" b="0" i="1" dirty="0" smtClean="0">
+                            <a:latin typeface="Cambria Math" panose="02040503050406030204" pitchFamily="18" charset="0"/>
+                          </a:rPr>
+                          <m:t>=1</m:t>
+                        </m:r>
+                      </m:sub>
+                      <m:sup>
+                        <m:r>
+                          <a:rPr lang="en-US" sz="2000" b="0" i="1" dirty="0" smtClean="0">
+                            <a:latin typeface="Cambria Math" panose="02040503050406030204" pitchFamily="18" charset="0"/>
+                          </a:rPr>
+                          <m:t>𝑁</m:t>
+                        </m:r>
+                      </m:sup>
+                      <m:e>
+                        <m:sSub>
+                          <m:sSubPr>
+                            <m:ctrlPr>
+                              <a:rPr lang="en-US" sz="2000" i="1" dirty="0" smtClean="0">
+                                <a:latin typeface="Cambria Math" panose="02040503050406030204" pitchFamily="18" charset="0"/>
+                              </a:rPr>
+                            </m:ctrlPr>
+                          </m:sSubPr>
+                          <m:e>
+                            <m:r>
+                              <a:rPr lang="en-US" sz="2000" b="0" i="1" dirty="0" smtClean="0">
+                                <a:latin typeface="Cambria Math" panose="02040503050406030204" pitchFamily="18" charset="0"/>
+                              </a:rPr>
+                              <m:t>𝑎</m:t>
+                            </m:r>
+                          </m:e>
+                          <m:sub>
+                            <m:r>
+                              <a:rPr lang="en-US" sz="2000" b="0" i="1" dirty="0" smtClean="0">
+                                <a:latin typeface="Cambria Math" panose="02040503050406030204" pitchFamily="18" charset="0"/>
+                              </a:rPr>
+                              <m:t>𝑘</m:t>
+                            </m:r>
+                          </m:sub>
+                        </m:sSub>
+                        <m:f>
+                          <m:fPr>
+                            <m:ctrlPr>
+                              <a:rPr lang="en-US" sz="2000" i="1" dirty="0" smtClean="0">
+                                <a:latin typeface="Cambria Math" panose="02040503050406030204" pitchFamily="18" charset="0"/>
+                              </a:rPr>
+                            </m:ctrlPr>
+                          </m:fPr>
+                          <m:num>
+                            <m:sSub>
+                              <m:sSubPr>
+                                <m:ctrlPr>
+                                  <a:rPr lang="en-US" sz="2000" i="1" dirty="0" smtClean="0">
+                                    <a:latin typeface="Cambria Math" panose="02040503050406030204" pitchFamily="18" charset="0"/>
+                                  </a:rPr>
+                                </m:ctrlPr>
+                              </m:sSubPr>
+                              <m:e>
+                                <m:r>
+                                  <a:rPr lang="en-US" sz="2000" b="0" i="1" dirty="0" smtClean="0">
+                                    <a:latin typeface="Cambria Math" panose="02040503050406030204" pitchFamily="18" charset="0"/>
+                                  </a:rPr>
+                                  <m:t>𝑦</m:t>
+                                </m:r>
+                              </m:e>
+                              <m:sub>
+                                <m:r>
+                                  <a:rPr lang="en-US" sz="2000" b="0" i="1" dirty="0" smtClean="0">
+                                    <a:latin typeface="Cambria Math" panose="02040503050406030204" pitchFamily="18" charset="0"/>
+                                  </a:rPr>
+                                  <m:t>𝑘</m:t>
+                                </m:r>
+                              </m:sub>
+                            </m:sSub>
+                          </m:num>
+                          <m:den>
+                            <m:sSub>
+                              <m:sSubPr>
+                                <m:ctrlPr>
+                                  <a:rPr lang="en-US" sz="2000" i="1" dirty="0" smtClean="0">
+                                    <a:latin typeface="Cambria Math" panose="02040503050406030204" pitchFamily="18" charset="0"/>
+                                  </a:rPr>
+                                </m:ctrlPr>
+                              </m:sSubPr>
+                              <m:e>
+                                <m:r>
+                                  <a:rPr lang="en-US" sz="2000" i="1" dirty="0" smtClean="0">
+                                    <a:latin typeface="Cambria Math" panose="02040503050406030204" pitchFamily="18" charset="0"/>
+                                    <a:ea typeface="Cambria Math" panose="02040503050406030204" pitchFamily="18" charset="0"/>
+                                  </a:rPr>
+                                  <m:t>𝜋</m:t>
+                                </m:r>
+                              </m:e>
+                              <m:sub>
+                                <m:r>
+                                  <a:rPr lang="en-US" sz="2000" b="0" i="1" dirty="0" smtClean="0">
+                                    <a:latin typeface="Cambria Math" panose="02040503050406030204" pitchFamily="18" charset="0"/>
+                                  </a:rPr>
+                                  <m:t>𝑘</m:t>
+                                </m:r>
+                              </m:sub>
+                            </m:sSub>
+                          </m:den>
+                        </m:f>
+                      </m:e>
+                    </m:nary>
+                  </m:oMath>
+                </a14:m>
+                <a:endParaRPr lang="en-US" sz="2000" dirty="0"/>
               </a:p>
               <a:p>
-                <a:pPr>
-                  <a:lnSpc>
-                    <a:spcPct val="150000"/>
-                  </a:lnSpc>
-                  <a:buFont typeface="Wingdings" pitchFamily="2" charset="2"/>
-                  <a:buChar char="l"/>
-                </a:pPr>
-                <a:r>
-                  <a:rPr lang="ja-JP" altLang="en-US" sz="2900"/>
-                  <a:t>如果母體中的每一個成員都有一個大於零且已知的被選中機會，稱為機率抽樣。</a:t>
-                </a:r>
-                <a:endParaRPr lang="en-US" altLang="ja-JP" sz="2900" dirty="0"/>
+                <a14:m>
+                  <m:oMath xmlns:m="http://schemas.openxmlformats.org/officeDocument/2006/math">
+                    <m:sSub>
+                      <m:sSubPr>
+                        <m:ctrlPr>
+                          <a:rPr lang="en-US" sz="2000" i="1" smtClean="0">
+                            <a:latin typeface="Cambria Math" panose="02040503050406030204" pitchFamily="18" charset="0"/>
+                          </a:rPr>
+                        </m:ctrlPr>
+                      </m:sSubPr>
+                      <m:e>
+                        <m:r>
+                          <a:rPr lang="en-US" sz="2000" b="0" i="1" smtClean="0">
+                            <a:latin typeface="Cambria Math" panose="02040503050406030204" pitchFamily="18" charset="0"/>
+                          </a:rPr>
+                          <m:t>𝑎</m:t>
+                        </m:r>
+                      </m:e>
+                      <m:sub>
+                        <m:r>
+                          <a:rPr lang="en-US" sz="2000" b="0" i="1" smtClean="0">
+                            <a:latin typeface="Cambria Math" panose="02040503050406030204" pitchFamily="18" charset="0"/>
+                          </a:rPr>
+                          <m:t>𝑘</m:t>
+                        </m:r>
+                      </m:sub>
+                    </m:sSub>
+                  </m:oMath>
+                </a14:m>
+                <a:r>
+                  <a:rPr lang="en-US" sz="2000" dirty="0" err="1"/>
+                  <a:t>代表有沒有被抽中，k</a:t>
+                </a:r>
+                <a:r>
+                  <a:rPr lang="en-US" sz="2000" dirty="0"/>
+                  <a:t>=0或是1.</a:t>
+                </a:r>
               </a:p>
               <a:p>
-                <a:pPr>
-                  <a:lnSpc>
-                    <a:spcPct val="150000"/>
-                  </a:lnSpc>
-                  <a:buFont typeface="Wingdings" pitchFamily="2" charset="2"/>
-                  <a:buChar char="l"/>
-                </a:pPr>
-                <a:r>
-                  <a:rPr lang="ja-JP" altLang="en-US" sz="2900"/>
-                  <a:t>由於遵循隨機原則，研究者可以使用統計公式計算信心水準與誤差範圍，使得樣本特徵可以推論至整個母體。</a:t>
-                </a:r>
-                <a:endParaRPr lang="en-US" altLang="ja-JP" sz="2900" dirty="0"/>
+                <a:r>
+                  <a:rPr lang="en-US" sz="2000" dirty="0" err="1"/>
+                  <a:t>以剛剛的例子</a:t>
+                </a:r>
+                <a:r>
+                  <a:rPr lang="en-US" sz="2000" dirty="0"/>
+                  <a:t>，</a:t>
+                </a:r>
+                <a:r>
+                  <a:rPr lang="ja-JP" altLang="en-US" sz="2000"/>
+                  <a:t> 抽到富人 </a:t>
+                </a:r>
+                <a:r>
+                  <a:rPr lang="en-US" sz="2000" dirty="0">
+                    <a:effectLst/>
+                    <a:latin typeface="Google Sans Text"/>
+                  </a:rPr>
+                  <a:t>k=1</a:t>
+                </a:r>
+                <a:r>
+                  <a:rPr lang="en-US" sz="2000" dirty="0"/>
+                  <a:t>，</a:t>
+                </a:r>
+                <a14:m>
+                  <m:oMath xmlns:m="http://schemas.openxmlformats.org/officeDocument/2006/math">
+                    <m:sSub>
+                      <m:sSubPr>
+                        <m:ctrlPr>
+                          <a:rPr lang="en-US" sz="2000" i="1" smtClean="0">
+                            <a:latin typeface="Cambria Math" panose="02040503050406030204" pitchFamily="18" charset="0"/>
+                          </a:rPr>
+                        </m:ctrlPr>
+                      </m:sSubPr>
+                      <m:e>
+                        <m:r>
+                          <a:rPr lang="en-US" sz="2000" b="0" i="1" smtClean="0">
+                            <a:latin typeface="Cambria Math" panose="02040503050406030204" pitchFamily="18" charset="0"/>
+                          </a:rPr>
+                          <m:t>𝑎</m:t>
+                        </m:r>
+                      </m:e>
+                      <m:sub>
+                        <m:r>
+                          <a:rPr lang="en-US" sz="2000" b="0" i="1" smtClean="0">
+                            <a:latin typeface="Cambria Math" panose="02040503050406030204" pitchFamily="18" charset="0"/>
+                          </a:rPr>
+                          <m:t>1</m:t>
+                        </m:r>
+                      </m:sub>
+                    </m:sSub>
+                    <m:r>
+                      <a:rPr lang="en-US" sz="2000" b="0" i="1" smtClean="0">
+                        <a:latin typeface="Cambria Math" panose="02040503050406030204" pitchFamily="18" charset="0"/>
+                      </a:rPr>
+                      <m:t>=1</m:t>
+                    </m:r>
+                  </m:oMath>
+                </a14:m>
+                <a:r>
+                  <a:rPr lang="en-US" sz="2000" dirty="0"/>
+                  <a:t>，</a:t>
+                </a:r>
+                <a:r>
+                  <a:rPr lang="ja-JP" altLang="en-US" sz="2000"/>
+                  <a:t>其他 </a:t>
+                </a:r>
+                <a14:m>
+                  <m:oMath xmlns:m="http://schemas.openxmlformats.org/officeDocument/2006/math">
+                    <m:sSub>
+                      <m:sSubPr>
+                        <m:ctrlPr>
+                          <a:rPr lang="en-US" altLang="ja-JP" sz="2000" i="1" smtClean="0">
+                            <a:latin typeface="Cambria Math" panose="02040503050406030204" pitchFamily="18" charset="0"/>
+                          </a:rPr>
+                        </m:ctrlPr>
+                      </m:sSubPr>
+                      <m:e>
+                        <m:r>
+                          <a:rPr lang="en-US" altLang="ja-JP" sz="2000" b="0" i="1" smtClean="0">
+                            <a:latin typeface="Cambria Math" panose="02040503050406030204" pitchFamily="18" charset="0"/>
+                          </a:rPr>
+                          <m:t>𝑎</m:t>
+                        </m:r>
+                      </m:e>
+                      <m:sub>
+                        <m:r>
+                          <a:rPr lang="en-US" altLang="ja-JP" sz="2000" b="0" i="1" smtClean="0">
+                            <a:latin typeface="Cambria Math" panose="02040503050406030204" pitchFamily="18" charset="0"/>
+                          </a:rPr>
+                          <m:t>2</m:t>
+                        </m:r>
+                      </m:sub>
+                    </m:sSub>
+                    <m:r>
+                      <a:rPr lang="en-US" altLang="ja-JP" sz="2000" i="1" smtClean="0">
+                        <a:latin typeface="Cambria Math" panose="02040503050406030204" pitchFamily="18" charset="0"/>
+                        <a:ea typeface="Cambria Math" panose="02040503050406030204" pitchFamily="18" charset="0"/>
+                      </a:rPr>
+                      <m:t>⋯</m:t>
+                    </m:r>
+                    <m:sSub>
+                      <m:sSubPr>
+                        <m:ctrlPr>
+                          <a:rPr lang="en-US" altLang="ja-JP" sz="2000" i="1" smtClean="0">
+                            <a:latin typeface="Cambria Math" panose="02040503050406030204" pitchFamily="18" charset="0"/>
+                            <a:ea typeface="Cambria Math" panose="02040503050406030204" pitchFamily="18" charset="0"/>
+                          </a:rPr>
+                        </m:ctrlPr>
+                      </m:sSubPr>
+                      <m:e>
+                        <m:r>
+                          <a:rPr lang="en-US" altLang="ja-JP" sz="2000" b="0" i="1" smtClean="0">
+                            <a:latin typeface="Cambria Math" panose="02040503050406030204" pitchFamily="18" charset="0"/>
+                            <a:ea typeface="Cambria Math" panose="02040503050406030204" pitchFamily="18" charset="0"/>
+                          </a:rPr>
+                          <m:t>𝑎</m:t>
+                        </m:r>
+                      </m:e>
+                      <m:sub>
+                        <m:r>
+                          <a:rPr lang="en-US" altLang="ja-JP" sz="2000" b="0" i="1" smtClean="0">
+                            <a:latin typeface="Cambria Math" panose="02040503050406030204" pitchFamily="18" charset="0"/>
+                            <a:ea typeface="Cambria Math" panose="02040503050406030204" pitchFamily="18" charset="0"/>
+                          </a:rPr>
+                          <m:t>10</m:t>
+                        </m:r>
+                      </m:sub>
+                    </m:sSub>
+                    <m:r>
+                      <a:rPr lang="en-US" altLang="ja-JP" sz="2000" b="0" i="1" smtClean="0">
+                        <a:latin typeface="Cambria Math" panose="02040503050406030204" pitchFamily="18" charset="0"/>
+                        <a:ea typeface="Cambria Math" panose="02040503050406030204" pitchFamily="18" charset="0"/>
+                      </a:rPr>
+                      <m:t>=0</m:t>
+                    </m:r>
+                  </m:oMath>
+                </a14:m>
+                <a:endParaRPr lang="en-US" altLang="ja-JP" sz="2000" b="0" dirty="0">
+                  <a:ea typeface="Cambria Math" panose="02040503050406030204" pitchFamily="18" charset="0"/>
+                </a:endParaRPr>
               </a:p>
               <a:p>
-                <a:pPr>
-                  <a:lnSpc>
-                    <a:spcPct val="150000"/>
-                  </a:lnSpc>
-                  <a:buFont typeface="Wingdings" pitchFamily="2" charset="2"/>
-                  <a:buChar char="l"/>
-                </a:pPr>
-                <a:r>
-                  <a:rPr lang="ja-JP" altLang="en-US" sz="2900"/>
-                  <a:t>假設我們進行了一次網路調查，回收了 </a:t>
-                </a:r>
-                <a:r>
-                  <a:rPr lang="en-US" altLang="ja-JP" sz="2900" dirty="0"/>
-                  <a:t>1,067 </a:t>
-                </a:r>
-                <a:r>
-                  <a:rPr lang="ja-JP" altLang="en-US" sz="2900"/>
-                  <a:t>份 有效問卷，假設得到結果如下：</a:t>
-                </a:r>
-                <a:endParaRPr lang="en-US" altLang="ja-JP" sz="2900" dirty="0"/>
+                <a:r>
+                  <a:rPr lang="en-US" sz="2000" dirty="0" err="1"/>
+                  <a:t>而</a:t>
+                </a:r>
+                <a14:m>
+                  <m:oMath xmlns:m="http://schemas.openxmlformats.org/officeDocument/2006/math">
+                    <m:sSub>
+                      <m:sSubPr>
+                        <m:ctrlPr>
+                          <a:rPr lang="en-US" sz="2000" i="1" smtClean="0">
+                            <a:latin typeface="Cambria Math" panose="02040503050406030204" pitchFamily="18" charset="0"/>
+                          </a:rPr>
+                        </m:ctrlPr>
+                      </m:sSubPr>
+                      <m:e>
+                        <m:r>
+                          <a:rPr lang="en-US" sz="2000" b="0" i="1" smtClean="0">
+                            <a:latin typeface="Cambria Math" panose="02040503050406030204" pitchFamily="18" charset="0"/>
+                          </a:rPr>
+                          <m:t>𝑦</m:t>
+                        </m:r>
+                      </m:e>
+                      <m:sub>
+                        <m:r>
+                          <a:rPr lang="en-US" sz="2000" b="0" i="1" smtClean="0">
+                            <a:latin typeface="Cambria Math" panose="02040503050406030204" pitchFamily="18" charset="0"/>
+                          </a:rPr>
+                          <m:t>1</m:t>
+                        </m:r>
+                      </m:sub>
+                    </m:sSub>
+                    <m:r>
+                      <a:rPr lang="en-US" sz="2000" b="0" i="1" smtClean="0">
+                        <a:latin typeface="Cambria Math" panose="02040503050406030204" pitchFamily="18" charset="0"/>
+                      </a:rPr>
+                      <m:t>=100</m:t>
+                    </m:r>
+                    <m:r>
+                      <a:rPr lang="en-US" sz="2000" i="1">
+                        <a:latin typeface="Cambria Math" panose="02040503050406030204" pitchFamily="18" charset="0"/>
+                      </a:rPr>
+                      <m:t>萬，</m:t>
+                    </m:r>
+                    <m:sSub>
+                      <m:sSubPr>
+                        <m:ctrlPr>
+                          <a:rPr lang="en-US" sz="2000" i="1" smtClean="0">
+                            <a:latin typeface="Cambria Math" panose="02040503050406030204" pitchFamily="18" charset="0"/>
+                          </a:rPr>
+                        </m:ctrlPr>
+                      </m:sSubPr>
+                      <m:e>
+                        <m:r>
+                          <a:rPr lang="en-US" sz="2000" i="1" smtClean="0">
+                            <a:latin typeface="Cambria Math" panose="02040503050406030204" pitchFamily="18" charset="0"/>
+                            <a:ea typeface="Cambria Math" panose="02040503050406030204" pitchFamily="18" charset="0"/>
+                          </a:rPr>
+                          <m:t>𝜋</m:t>
+                        </m:r>
+                      </m:e>
+                      <m:sub>
+                        <m:r>
+                          <a:rPr lang="en-US" sz="2000" b="0" i="1" smtClean="0">
+                            <a:latin typeface="Cambria Math" panose="02040503050406030204" pitchFamily="18" charset="0"/>
+                          </a:rPr>
+                          <m:t>1</m:t>
+                        </m:r>
+                      </m:sub>
+                    </m:sSub>
+                    <m:r>
+                      <a:rPr lang="en-US" sz="2000" b="0" i="1" smtClean="0">
+                        <a:latin typeface="Cambria Math" panose="02040503050406030204" pitchFamily="18" charset="0"/>
+                      </a:rPr>
+                      <m:t>=4</m:t>
+                    </m:r>
+                    <m:r>
+                      <a:rPr lang="en-US" sz="2000" b="0" i="1" smtClean="0">
+                        <a:latin typeface="Cambria Math" panose="02040503050406030204" pitchFamily="18" charset="0"/>
+                        <a:ea typeface="Cambria Math" panose="02040503050406030204" pitchFamily="18" charset="0"/>
+                      </a:rPr>
+                      <m:t>×</m:t>
+                    </m:r>
+                    <m:f>
+                      <m:fPr>
+                        <m:ctrlPr>
+                          <a:rPr lang="en-US" sz="2000" b="0" i="1" smtClean="0">
+                            <a:latin typeface="Cambria Math" panose="02040503050406030204" pitchFamily="18" charset="0"/>
+                          </a:rPr>
+                        </m:ctrlPr>
+                      </m:fPr>
+                      <m:num>
+                        <m:r>
+                          <a:rPr lang="en-US" sz="2000" b="0" i="1" smtClean="0">
+                            <a:latin typeface="Cambria Math" panose="02040503050406030204" pitchFamily="18" charset="0"/>
+                          </a:rPr>
+                          <m:t>1</m:t>
+                        </m:r>
+                      </m:num>
+                      <m:den>
+                        <m:r>
+                          <a:rPr lang="en-US" sz="2000" b="0" i="1" smtClean="0">
+                            <a:latin typeface="Cambria Math" panose="02040503050406030204" pitchFamily="18" charset="0"/>
+                          </a:rPr>
+                          <m:t>34</m:t>
+                        </m:r>
+                      </m:den>
+                    </m:f>
+                  </m:oMath>
+                </a14:m>
+                <a:r>
+                  <a:rPr lang="en-US" sz="2000" dirty="0"/>
+                  <a:t>=0.1176（因為富人中選機率是其他人的4倍）</a:t>
+                </a:r>
               </a:p>
               <a:p>
-                <a:pPr>
-                  <a:lnSpc>
-                    <a:spcPct val="150000"/>
-                  </a:lnSpc>
-                  <a:buFont typeface="Wingdings" pitchFamily="2" charset="2"/>
-                  <a:buChar char="l"/>
-                </a:pPr>
-                <a:r>
-                  <a:rPr lang="ja-JP" altLang="en-US" sz="2900"/>
-                  <a:t>樣本平均值 </a:t>
-                </a:r>
-                <a:r>
-                  <a:rPr lang="en-US" altLang="ja-JP" sz="2900" dirty="0"/>
-                  <a:t>(</a:t>
+                <a:r>
+                  <a:rPr lang="en-US" sz="2000" dirty="0" err="1"/>
+                  <a:t>代入公式</a:t>
+                </a:r>
+                <a:r>
+                  <a:rPr lang="en-US" sz="2000" dirty="0"/>
+                  <a:t>：</a:t>
                 </a:r>
                 <a14:m>
                   <m:oMath xmlns:m="http://schemas.openxmlformats.org/officeDocument/2006/math">
@@ -5575,118 +6025,239 @@
                       <m:accPr>
                         <m:chr m:val="̅"/>
                         <m:ctrlPr>
-                          <a:rPr lang="en-US" altLang="ja-JP" sz="2900" i="1" smtClean="0">
+                          <a:rPr lang="en-US" sz="2000" i="1" smtClean="0">
                             <a:latin typeface="Cambria Math" panose="02040503050406030204" pitchFamily="18" charset="0"/>
                           </a:rPr>
                         </m:ctrlPr>
                       </m:accPr>
                       <m:e>
                         <m:r>
-                          <a:rPr lang="en-US" altLang="ja-JP" sz="2900" b="0" i="1" smtClean="0">
-                            <a:latin typeface="Cambria Math" panose="02040503050406030204" pitchFamily="18" charset="0"/>
-                          </a:rPr>
-                          <m:t>𝑋</m:t>
+                          <a:rPr lang="en-US" sz="2000" b="0" i="1" smtClean="0">
+                            <a:latin typeface="Cambria Math" panose="02040503050406030204" pitchFamily="18" charset="0"/>
+                          </a:rPr>
+                          <m:t>𝑦</m:t>
                         </m:r>
                       </m:e>
                     </m:acc>
+                    <m:r>
+                      <a:rPr lang="en-US" sz="2000" b="0" i="1" smtClean="0">
+                        <a:latin typeface="Cambria Math" panose="02040503050406030204" pitchFamily="18" charset="0"/>
+                      </a:rPr>
+                      <m:t>=</m:t>
+                    </m:r>
+                    <m:f>
+                      <m:fPr>
+                        <m:ctrlPr>
+                          <a:rPr lang="en-US" sz="2000" b="0" i="1" smtClean="0">
+                            <a:latin typeface="Cambria Math" panose="02040503050406030204" pitchFamily="18" charset="0"/>
+                          </a:rPr>
+                        </m:ctrlPr>
+                      </m:fPr>
+                      <m:num>
+                        <m:r>
+                          <a:rPr lang="en-US" sz="2000" b="0" i="1" smtClean="0">
+                            <a:latin typeface="Cambria Math" panose="02040503050406030204" pitchFamily="18" charset="0"/>
+                          </a:rPr>
+                          <m:t>1</m:t>
+                        </m:r>
+                      </m:num>
+                      <m:den>
+                        <m:r>
+                          <a:rPr lang="en-US" sz="2000" b="0" i="1" smtClean="0">
+                            <a:latin typeface="Cambria Math" panose="02040503050406030204" pitchFamily="18" charset="0"/>
+                          </a:rPr>
+                          <m:t>10</m:t>
+                        </m:r>
+                      </m:den>
+                    </m:f>
+                    <m:r>
+                      <a:rPr lang="en-US" sz="2000" b="0" i="1" smtClean="0">
+                        <a:latin typeface="Cambria Math" panose="02040503050406030204" pitchFamily="18" charset="0"/>
+                        <a:ea typeface="Cambria Math" panose="02040503050406030204" pitchFamily="18" charset="0"/>
+                      </a:rPr>
+                      <m:t>×</m:t>
+                    </m:r>
+                    <m:d>
+                      <m:dPr>
+                        <m:ctrlPr>
+                          <a:rPr lang="en-US" sz="2000" b="0" i="1" smtClean="0">
+                            <a:latin typeface="Cambria Math" panose="02040503050406030204" pitchFamily="18" charset="0"/>
+                            <a:ea typeface="Cambria Math" panose="02040503050406030204" pitchFamily="18" charset="0"/>
+                          </a:rPr>
+                        </m:ctrlPr>
+                      </m:dPr>
+                      <m:e>
+                        <m:r>
+                          <a:rPr lang="en-US" sz="2000" b="0" i="1" smtClean="0">
+                            <a:latin typeface="Cambria Math" panose="02040503050406030204" pitchFamily="18" charset="0"/>
+                            <a:ea typeface="Cambria Math" panose="02040503050406030204" pitchFamily="18" charset="0"/>
+                          </a:rPr>
+                          <m:t>1×</m:t>
+                        </m:r>
+                        <m:f>
+                          <m:fPr>
+                            <m:ctrlPr>
+                              <a:rPr lang="en-US" sz="2000" b="0" i="1" smtClean="0">
+                                <a:latin typeface="Cambria Math" panose="02040503050406030204" pitchFamily="18" charset="0"/>
+                                <a:ea typeface="Cambria Math" panose="02040503050406030204" pitchFamily="18" charset="0"/>
+                              </a:rPr>
+                            </m:ctrlPr>
+                          </m:fPr>
+                          <m:num>
+                            <m:r>
+                              <a:rPr lang="en-US" sz="2000" b="0" i="1" smtClean="0">
+                                <a:latin typeface="Cambria Math" panose="02040503050406030204" pitchFamily="18" charset="0"/>
+                                <a:ea typeface="Cambria Math" panose="02040503050406030204" pitchFamily="18" charset="0"/>
+                              </a:rPr>
+                              <m:t>100</m:t>
+                            </m:r>
+                          </m:num>
+                          <m:den>
+                            <m:r>
+                              <a:rPr lang="en-US" sz="2000" b="0" i="1" smtClean="0">
+                                <a:latin typeface="Cambria Math" panose="02040503050406030204" pitchFamily="18" charset="0"/>
+                                <a:ea typeface="Cambria Math" panose="02040503050406030204" pitchFamily="18" charset="0"/>
+                              </a:rPr>
+                              <m:t>0.1176</m:t>
+                            </m:r>
+                          </m:den>
+                        </m:f>
+                      </m:e>
+                    </m:d>
+                    <m:r>
+                      <a:rPr lang="en-US" sz="2000" b="0" i="1" smtClean="0">
+                        <a:latin typeface="Cambria Math" panose="02040503050406030204" pitchFamily="18" charset="0"/>
+                        <a:ea typeface="Cambria Math" panose="02040503050406030204" pitchFamily="18" charset="0"/>
+                      </a:rPr>
+                      <m:t>=</m:t>
+                    </m:r>
+                    <m:f>
+                      <m:fPr>
+                        <m:ctrlPr>
+                          <a:rPr lang="en-US" sz="2000" b="0" i="1" smtClean="0">
+                            <a:latin typeface="Cambria Math" panose="02040503050406030204" pitchFamily="18" charset="0"/>
+                            <a:ea typeface="Cambria Math" panose="02040503050406030204" pitchFamily="18" charset="0"/>
+                          </a:rPr>
+                        </m:ctrlPr>
+                      </m:fPr>
+                      <m:num>
+                        <m:r>
+                          <a:rPr lang="en-US" sz="2000" b="0" i="1" smtClean="0">
+                            <a:latin typeface="Cambria Math" panose="02040503050406030204" pitchFamily="18" charset="0"/>
+                            <a:ea typeface="Cambria Math" panose="02040503050406030204" pitchFamily="18" charset="0"/>
+                          </a:rPr>
+                          <m:t>1</m:t>
+                        </m:r>
+                      </m:num>
+                      <m:den>
+                        <m:r>
+                          <a:rPr lang="en-US" sz="2000" b="0" i="1" smtClean="0">
+                            <a:latin typeface="Cambria Math" panose="02040503050406030204" pitchFamily="18" charset="0"/>
+                            <a:ea typeface="Cambria Math" panose="02040503050406030204" pitchFamily="18" charset="0"/>
+                          </a:rPr>
+                          <m:t>10</m:t>
+                        </m:r>
+                      </m:den>
+                    </m:f>
+                    <m:r>
+                      <a:rPr lang="en-US" sz="2000" b="0" i="1" smtClean="0">
+                        <a:latin typeface="Cambria Math" panose="02040503050406030204" pitchFamily="18" charset="0"/>
+                        <a:ea typeface="Cambria Math" panose="02040503050406030204" pitchFamily="18" charset="0"/>
+                      </a:rPr>
+                      <m:t>×850=85</m:t>
+                    </m:r>
                   </m:oMath>
                 </a14:m>
-                <a:r>
-                  <a:rPr lang="en-US" altLang="ja-JP" sz="2900" dirty="0"/>
-                  <a:t>)</a:t>
-                </a:r>
-                <a:r>
-                  <a:rPr lang="ja-JP" altLang="en-US" sz="2900"/>
-                  <a:t>：</a:t>
-                </a:r>
-                <a:r>
-                  <a:rPr lang="en-US" altLang="ja-JP" sz="2900" dirty="0"/>
-                  <a:t>5.5 </a:t>
-                </a:r>
-                <a:r>
-                  <a:rPr lang="ja-JP" altLang="en-US" sz="2900"/>
-                  <a:t>分，</a:t>
-                </a:r>
-                <a:endParaRPr lang="en-US" altLang="ja-JP" sz="2900" dirty="0"/>
+                <a:endParaRPr lang="en-US" sz="2000" dirty="0"/>
               </a:p>
               <a:p>
-                <a:pPr>
-                  <a:lnSpc>
-                    <a:spcPct val="150000"/>
-                  </a:lnSpc>
-                  <a:buFont typeface="Wingdings" pitchFamily="2" charset="2"/>
-                  <a:buChar char="l"/>
-                </a:pPr>
-                <a:r>
-                  <a:rPr lang="ja-JP" altLang="en-US" sz="2900"/>
-                  <a:t>樣本標準差 </a:t>
-                </a:r>
-                <a:r>
-                  <a:rPr lang="en-US" altLang="ja-JP" sz="2900" dirty="0"/>
-                  <a:t>(s )</a:t>
-                </a:r>
-                <a:r>
-                  <a:rPr lang="ja-JP" altLang="en-US" sz="2900"/>
-                  <a:t>： </a:t>
-                </a:r>
-                <a:r>
-                  <a:rPr lang="en-US" altLang="ja-JP" sz="2900" dirty="0"/>
-                  <a:t>2.5 </a:t>
-                </a:r>
-                <a:r>
-                  <a:rPr lang="ja-JP" altLang="en-US" sz="2900"/>
-                  <a:t>分</a:t>
-                </a:r>
-                <a:endParaRPr lang="en-US" altLang="ja-JP" sz="2900" dirty="0"/>
+                <a14:m>
+                  <m:oMath xmlns:m="http://schemas.openxmlformats.org/officeDocument/2006/math">
+                    <m:sSub>
+                      <m:sSubPr>
+                        <m:ctrlPr>
+                          <a:rPr lang="en-US" sz="2000" i="1" smtClean="0">
+                            <a:latin typeface="Cambria Math" panose="02040503050406030204" pitchFamily="18" charset="0"/>
+                          </a:rPr>
+                        </m:ctrlPr>
+                      </m:sSubPr>
+                      <m:e>
+                        <m:r>
+                          <a:rPr lang="en-US" sz="2000" i="1" smtClean="0">
+                            <a:latin typeface="Cambria Math" panose="02040503050406030204" pitchFamily="18" charset="0"/>
+                            <a:ea typeface="Cambria Math" panose="02040503050406030204" pitchFamily="18" charset="0"/>
+                          </a:rPr>
+                          <m:t>𝜋</m:t>
+                        </m:r>
+                      </m:e>
+                      <m:sub>
+                        <m:r>
+                          <a:rPr lang="en-US" sz="2000" b="0" i="1" smtClean="0">
+                            <a:latin typeface="Cambria Math" panose="02040503050406030204" pitchFamily="18" charset="0"/>
+                          </a:rPr>
+                          <m:t>1</m:t>
+                        </m:r>
+                      </m:sub>
+                    </m:sSub>
+                    <m:r>
+                      <a:rPr lang="en-US" sz="2000" i="1">
+                        <a:latin typeface="Cambria Math" panose="02040503050406030204" pitchFamily="18" charset="0"/>
+                      </a:rPr>
+                      <m:t>的倒數</m:t>
+                    </m:r>
+                    <m:r>
+                      <a:rPr lang="en-US" sz="2000" i="1" smtClean="0">
+                        <a:latin typeface="Cambria Math" panose="02040503050406030204" pitchFamily="18" charset="0"/>
+                      </a:rPr>
+                      <m:t>是</m:t>
+                    </m:r>
+                    <m:r>
+                      <a:rPr lang="en-US" sz="2000" b="0" i="1" smtClean="0">
+                        <a:latin typeface="Cambria Math" panose="02040503050406030204" pitchFamily="18" charset="0"/>
+                      </a:rPr>
+                      <m:t>8.5</m:t>
+                    </m:r>
+                    <m:r>
+                      <a:rPr lang="en-US" sz="2000" i="1">
+                        <a:latin typeface="Cambria Math" panose="02040503050406030204" pitchFamily="18" charset="0"/>
+                      </a:rPr>
+                      <m:t>，就是</m:t>
+                    </m:r>
+                    <m:r>
+                      <a:rPr lang="en-US" sz="2000" i="1" smtClean="0">
+                        <a:latin typeface="Cambria Math" panose="02040503050406030204" pitchFamily="18" charset="0"/>
+                      </a:rPr>
+                      <m:t>富人的</m:t>
+                    </m:r>
+                    <m:r>
+                      <a:rPr lang="en-US" sz="2000" i="1">
+                        <a:latin typeface="Cambria Math" panose="02040503050406030204" pitchFamily="18" charset="0"/>
+                      </a:rPr>
+                      <m:t>權重。</m:t>
+                    </m:r>
+                  </m:oMath>
+                </a14:m>
+                <a:r>
+                  <a:rPr lang="en-US" sz="2000" dirty="0">
+                    <a:latin typeface="PMingLiU" panose="02020500000000000000" pitchFamily="18" charset="-120"/>
+                    <a:ea typeface="PMingLiU" panose="02020500000000000000" pitchFamily="18" charset="-120"/>
+                  </a:rPr>
+                  <a:t>窮人的權重則是34。如果抽到窮人，平均值就是34x20=680萬。</a:t>
+                </a:r>
               </a:p>
               <a:p>
-                <a:pPr>
-                  <a:lnSpc>
-                    <a:spcPct val="150000"/>
-                  </a:lnSpc>
-                  <a:buFont typeface="Wingdings" pitchFamily="2" charset="2"/>
-                  <a:buChar char="l"/>
-                </a:pPr>
-                <a:r>
-                  <a:rPr lang="ja-JP" altLang="en-US" sz="2900"/>
-                  <a:t>信心水準：</a:t>
-                </a:r>
-                <a:r>
-                  <a:rPr lang="en-US" altLang="ja-JP" sz="2900" dirty="0"/>
-                  <a:t>95% (</a:t>
-                </a:r>
-                <a:r>
-                  <a:rPr lang="en-US" altLang="ja-JP" sz="2900" i="1" dirty="0"/>
-                  <a:t>z</a:t>
-                </a:r>
-                <a:r>
-                  <a:rPr lang="en-US" altLang="ja-JP" sz="2900" dirty="0"/>
-                  <a:t> = 1.96)</a:t>
-                </a:r>
-                <a:r>
-                  <a:rPr lang="ja-JP" altLang="en-US" sz="2900"/>
-                  <a:t> </a:t>
-                </a:r>
-                <a:endParaRPr lang="en-US" altLang="ja-JP" sz="2900" dirty="0"/>
-              </a:p>
-              <a:p>
-                <a:pPr>
-                  <a:lnSpc>
-                    <a:spcPct val="150000"/>
-                  </a:lnSpc>
-                  <a:buFont typeface="Wingdings" pitchFamily="2" charset="2"/>
-                  <a:buChar char="l"/>
-                </a:pPr>
-                <a:r>
-                  <a:rPr lang="ja-JP" altLang="en-US" sz="2900"/>
-                  <a:t>標準誤 </a:t>
-                </a:r>
-                <a:r>
-                  <a:rPr lang="en-US" altLang="ja-JP" sz="2900" dirty="0"/>
-                  <a:t>(Standard Error)</a:t>
-                </a:r>
-                <a:r>
-                  <a:rPr lang="ja-JP" altLang="en-US" sz="2900"/>
+                <a:r>
+                  <a:rPr lang="en-US" sz="2000" dirty="0" err="1">
+                    <a:latin typeface="PMingLiU" panose="02020500000000000000" pitchFamily="18" charset="-120"/>
+                    <a:ea typeface="PMingLiU" panose="02020500000000000000" pitchFamily="18" charset="-120"/>
+                  </a:rPr>
+                  <a:t>這兩種人的期望值加權會等於總和</a:t>
+                </a:r>
+                <a:r>
+                  <a:rPr lang="en-US" sz="2000" dirty="0">
+                    <a:latin typeface="PMingLiU" panose="02020500000000000000" pitchFamily="18" charset="-120"/>
+                    <a:ea typeface="PMingLiU" panose="02020500000000000000" pitchFamily="18" charset="-120"/>
+                  </a:rPr>
                   <a:t>：</a:t>
                 </a:r>
                 <a14:m>
@@ -5694,69 +6265,100 @@
                     <m:f>
                       <m:fPr>
                         <m:ctrlPr>
-                          <a:rPr lang="en-US" altLang="ja-JP" sz="2900" i="1" smtClean="0">
-                            <a:latin typeface="Cambria Math" panose="02040503050406030204" pitchFamily="18" charset="0"/>
+                          <a:rPr lang="en-US" sz="2000" i="1" smtClean="0">
+                            <a:latin typeface="Cambria Math" panose="02040503050406030204" pitchFamily="18" charset="0"/>
+                            <a:ea typeface="PMingLiU" panose="02020500000000000000" pitchFamily="18" charset="-120"/>
                           </a:rPr>
                         </m:ctrlPr>
                       </m:fPr>
                       <m:num>
                         <m:r>
-                          <a:rPr lang="en-US" altLang="ja-JP" sz="2900" b="0" i="1" smtClean="0">
-                            <a:latin typeface="Cambria Math" panose="02040503050406030204" pitchFamily="18" charset="0"/>
-                          </a:rPr>
-                          <m:t>2.5</m:t>
+                          <a:rPr lang="en-US" sz="2000" b="0" i="1" smtClean="0">
+                            <a:latin typeface="Cambria Math" panose="02040503050406030204" pitchFamily="18" charset="0"/>
+                            <a:ea typeface="PMingLiU" panose="02020500000000000000" pitchFamily="18" charset="-120"/>
+                          </a:rPr>
+                          <m:t>32</m:t>
                         </m:r>
                       </m:num>
                       <m:den>
-                        <m:rad>
-                          <m:radPr>
-                            <m:degHide m:val="on"/>
-                            <m:ctrlPr>
-                              <a:rPr lang="en-US" altLang="ja-JP" sz="2900" i="1" smtClean="0">
-                                <a:latin typeface="Cambria Math" panose="02040503050406030204" pitchFamily="18" charset="0"/>
-                              </a:rPr>
-                            </m:ctrlPr>
-                          </m:radPr>
-                          <m:deg/>
-                          <m:e>
-                            <m:r>
-                              <a:rPr lang="en-US" altLang="ja-JP" sz="2900" b="0" i="1" smtClean="0">
-                                <a:latin typeface="Cambria Math" panose="02040503050406030204" pitchFamily="18" charset="0"/>
-                              </a:rPr>
-                              <m:t>1067</m:t>
-                            </m:r>
-                          </m:e>
-                        </m:rad>
+                        <m:r>
+                          <a:rPr lang="en-US" sz="2000" b="0" i="1" smtClean="0">
+                            <a:latin typeface="Cambria Math" panose="02040503050406030204" pitchFamily="18" charset="0"/>
+                            <a:ea typeface="PMingLiU" panose="02020500000000000000" pitchFamily="18" charset="-120"/>
+                          </a:rPr>
+                          <m:t>34</m:t>
+                        </m:r>
                       </m:den>
                     </m:f>
-                  </m:oMath>
-                </a14:m>
-                <a:r>
-                  <a:rPr lang="en-US" altLang="ja-JP" sz="2900" dirty="0"/>
-                  <a:t> </a:t>
-                </a:r>
-                <a14:m>
-                  <m:oMath xmlns:m="http://schemas.openxmlformats.org/officeDocument/2006/math">
                     <m:r>
-                      <a:rPr lang="en-US" altLang="ja-JP" sz="2900" i="1" dirty="0" smtClean="0">
+                      <a:rPr lang="en-US" sz="2000" i="1" smtClean="0">
                         <a:latin typeface="Cambria Math" panose="02040503050406030204" pitchFamily="18" charset="0"/>
                         <a:ea typeface="Cambria Math" panose="02040503050406030204" pitchFamily="18" charset="0"/>
                       </a:rPr>
-                      <m:t>≈</m:t>
+                      <m:t>×</m:t>
+                    </m:r>
+                    <m:r>
+                      <a:rPr lang="en-US" sz="2000" b="0" i="1" smtClean="0">
+                        <a:latin typeface="Cambria Math" panose="02040503050406030204" pitchFamily="18" charset="0"/>
+                        <a:ea typeface="Cambria Math" panose="02040503050406030204" pitchFamily="18" charset="0"/>
+                      </a:rPr>
+                      <m:t>850+</m:t>
+                    </m:r>
+                    <m:f>
+                      <m:fPr>
+                        <m:ctrlPr>
+                          <a:rPr lang="en-US" sz="2000" b="0" i="1" smtClean="0">
+                            <a:latin typeface="Cambria Math" panose="02040503050406030204" pitchFamily="18" charset="0"/>
+                            <a:ea typeface="Cambria Math" panose="02040503050406030204" pitchFamily="18" charset="0"/>
+                          </a:rPr>
+                        </m:ctrlPr>
+                      </m:fPr>
+                      <m:num>
+                        <m:r>
+                          <a:rPr lang="en-US" sz="2000" b="0" i="1" smtClean="0">
+                            <a:latin typeface="Cambria Math" panose="02040503050406030204" pitchFamily="18" charset="0"/>
+                            <a:ea typeface="Cambria Math" panose="02040503050406030204" pitchFamily="18" charset="0"/>
+                          </a:rPr>
+                          <m:t>2</m:t>
+                        </m:r>
+                      </m:num>
+                      <m:den>
+                        <m:r>
+                          <a:rPr lang="en-US" sz="2000" b="0" i="1" smtClean="0">
+                            <a:latin typeface="Cambria Math" panose="02040503050406030204" pitchFamily="18" charset="0"/>
+                            <a:ea typeface="Cambria Math" panose="02040503050406030204" pitchFamily="18" charset="0"/>
+                          </a:rPr>
+                          <m:t>34</m:t>
+                        </m:r>
+                      </m:den>
+                    </m:f>
+                    <m:r>
+                      <a:rPr lang="en-US" sz="2000" b="0" i="1" smtClean="0">
+                        <a:latin typeface="Cambria Math" panose="02040503050406030204" pitchFamily="18" charset="0"/>
+                        <a:ea typeface="Cambria Math" panose="02040503050406030204" pitchFamily="18" charset="0"/>
+                      </a:rPr>
+                      <m:t>×680=</m:t>
                     </m:r>
                   </m:oMath>
                 </a14:m>
                 <a:r>
-                  <a:rPr lang="en-US" altLang="ja-JP" sz="2900" dirty="0"/>
-                  <a:t> 0.0766</a:t>
-                </a:r>
-                <a:endParaRPr lang="en-US" sz="2900" dirty="0"/>
+                  <a:rPr lang="en-US" sz="2000" dirty="0">
+                    <a:latin typeface="PMingLiU" panose="02020500000000000000" pitchFamily="18" charset="-120"/>
+                    <a:ea typeface="PMingLiU" panose="02020500000000000000" pitchFamily="18" charset="-120"/>
+                  </a:rPr>
+                  <a:t>840</a:t>
+                </a:r>
               </a:p>
               <a:p>
-                <a:pPr>
-                  <a:buFont typeface="Wingdings" pitchFamily="2" charset="2"/>
-                  <a:buChar char="l"/>
-                </a:pPr>
+                <a:r>
+                  <a:rPr lang="en-US" sz="2000" dirty="0">
+                    <a:latin typeface="PMingLiU" panose="02020500000000000000" pitchFamily="18" charset="-120"/>
+                    <a:ea typeface="PMingLiU" panose="02020500000000000000" pitchFamily="18" charset="-120"/>
+                  </a:rPr>
+                  <a:t>一般研究會設定權重低於5，避免抽中一些不容易中選的族群卻因為權重太大而得到錯誤的結論，但是這種主觀的設定違反了H-T的不偏估計的理論。</a:t>
+                </a:r>
+              </a:p>
+              <a:p>
                 <a:endParaRPr lang="en-US" dirty="0"/>
               </a:p>
             </p:txBody>
@@ -5768,7 +6370,7 @@
               <p:cNvPr id="3" name="Content Placeholder 2">
                 <a:extLst>
                   <a:ext uri="{FF2B5EF4-FFF2-40B4-BE49-F238E27FC236}">
-                    <a16:creationId xmlns:a16="http://schemas.microsoft.com/office/drawing/2014/main" id="{A7D72A33-6DF2-AAC5-553F-AADBC53C207C}"/>
+                    <a16:creationId xmlns:a16="http://schemas.microsoft.com/office/drawing/2014/main" id="{659579A7-244A-1B4E-A6EF-9B1F87EA3242}"/>
                   </a:ext>
                 </a:extLst>
               </p:cNvPr>
@@ -5783,7 +6385,7 @@
               <a:blipFill>
                 <a:blip r:embed="rId2"/>
                 <a:stretch>
-                  <a:fillRect l="-483"/>
+                  <a:fillRect l="-603" t="-10174"/>
                 </a:stretch>
               </a:blipFill>
             </p:spPr>
@@ -5792,7 +6394,7 @@
               <a:lstStyle/>
               <a:p>
                 <a:r>
-                  <a:rPr lang="zh-TW" altLang="en-US">
+                  <a:rPr lang="en-US">
                     <a:noFill/>
                   </a:rPr>
                   <a:t> </a:t>
@@ -5807,7 +6409,7 @@
           <p:cNvPr id="4" name="Slide Number Placeholder 3">
             <a:extLst>
               <a:ext uri="{FF2B5EF4-FFF2-40B4-BE49-F238E27FC236}">
-                <a16:creationId xmlns:a16="http://schemas.microsoft.com/office/drawing/2014/main" id="{012A0B99-9112-8E28-D4DA-773C27213FD1}"/>
+                <a16:creationId xmlns:a16="http://schemas.microsoft.com/office/drawing/2014/main" id="{49069B59-1518-4C2D-ABA7-09A5F449F58E}"/>
               </a:ext>
             </a:extLst>
           </p:cNvPr>
@@ -5834,7 +6436,7 @@
     </p:spTree>
     <p:extLst>
       <p:ext uri="{BB962C8B-B14F-4D97-AF65-F5344CB8AC3E}">
-        <p14:creationId xmlns:p14="http://schemas.microsoft.com/office/powerpoint/2010/main" val="2283638695"/>
+        <p14:creationId xmlns:p14="http://schemas.microsoft.com/office/powerpoint/2010/main" val="607635657"/>
       </p:ext>
     </p:extLst>
   </p:cSld>
@@ -5863,10 +6465,1025 @@
       </p:grpSpPr>
       <p:sp>
         <p:nvSpPr>
-          <p:cNvPr id="2" name="Slide Number Placeholder 1">
+          <p:cNvPr id="2" name="Title 1">
             <a:extLst>
               <a:ext uri="{FF2B5EF4-FFF2-40B4-BE49-F238E27FC236}">
-                <a16:creationId xmlns:a16="http://schemas.microsoft.com/office/drawing/2014/main" id="{090E2491-AA9A-BF63-9395-E47BB3443C8F}"/>
+                <a16:creationId xmlns:a16="http://schemas.microsoft.com/office/drawing/2014/main" id="{31C60B46-553E-18AD-A4BE-E745BAB0CAA0}"/>
+              </a:ext>
+            </a:extLst>
+          </p:cNvPr>
+          <p:cNvSpPr>
+            <a:spLocks noGrp="1"/>
+          </p:cNvSpPr>
+          <p:nvPr>
+            <p:ph type="title"/>
+          </p:nvPr>
+        </p:nvSpPr>
+        <p:spPr/>
+        <p:txBody>
+          <a:bodyPr/>
+          <a:lstStyle/>
+          <a:p>
+            <a:r>
+              <a:rPr lang="ja-JP" altLang="en-US"/>
+              <a:t>機率抽樣的元素（七）</a:t>
+            </a:r>
+            <a:endParaRPr lang="en-US" dirty="0"/>
+          </a:p>
+        </p:txBody>
+      </p:sp>
+      <mc:AlternateContent xmlns:mc="http://schemas.openxmlformats.org/markup-compatibility/2006">
+        <mc:Choice xmlns:a14="http://schemas.microsoft.com/office/drawing/2010/main" Requires="a14">
+          <p:sp>
+            <p:nvSpPr>
+              <p:cNvPr id="3" name="Content Placeholder 2">
+                <a:extLst>
+                  <a:ext uri="{FF2B5EF4-FFF2-40B4-BE49-F238E27FC236}">
+                    <a16:creationId xmlns:a16="http://schemas.microsoft.com/office/drawing/2014/main" id="{659579A7-244A-1B4E-A6EF-9B1F87EA3242}"/>
+                  </a:ext>
+                </a:extLst>
+              </p:cNvPr>
+              <p:cNvSpPr>
+                <a:spLocks noGrp="1"/>
+              </p:cNvSpPr>
+              <p:nvPr>
+                <p:ph idx="1"/>
+              </p:nvPr>
+            </p:nvSpPr>
+            <p:spPr/>
+            <p:txBody>
+              <a:bodyPr>
+                <a:normAutofit/>
+              </a:bodyPr>
+              <a:lstStyle/>
+              <a:p>
+                <a:pPr>
+                  <a:lnSpc>
+                    <a:spcPct val="120000"/>
+                  </a:lnSpc>
+                </a:pPr>
+                <a14:m>
+                  <m:oMath xmlns:m="http://schemas.openxmlformats.org/officeDocument/2006/math">
+                    <m:r>
+                      <a:rPr lang="zh-TW" altLang="en-US" sz="2000" b="1" i="1" smtClean="0">
+                        <a:latin typeface="Cambria Math" panose="02040503050406030204" pitchFamily="18" charset="0"/>
+                      </a:rPr>
+                      <m:t>變異數</m:t>
+                    </m:r>
+                    <m:r>
+                      <a:rPr lang="zh-TW" altLang="en-US" sz="2000" b="1" i="1">
+                        <a:latin typeface="Cambria Math" panose="02040503050406030204" pitchFamily="18" charset="0"/>
+                      </a:rPr>
+                      <m:t>表示</m:t>
+                    </m:r>
+                    <m:r>
+                      <a:rPr lang="zh-TW" altLang="en-US" sz="2000" b="1" i="1" smtClean="0">
+                        <a:latin typeface="Cambria Math" panose="02040503050406030204" pitchFamily="18" charset="0"/>
+                      </a:rPr>
+                      <m:t>資料的離散程度。</m:t>
+                    </m:r>
+                    <m:r>
+                      <a:rPr lang="zh-TW" altLang="en-US" sz="2000" b="1" i="1" smtClean="0">
+                        <a:latin typeface="Cambria Math" panose="02040503050406030204" pitchFamily="18" charset="0"/>
+                      </a:rPr>
+                      <m:t>計算</m:t>
+                    </m:r>
+                    <m:r>
+                      <a:rPr lang="zh-TW" altLang="en-US" sz="2000" b="1" i="1">
+                        <a:latin typeface="Cambria Math" panose="02040503050406030204" pitchFamily="18" charset="0"/>
+                      </a:rPr>
+                      <m:t>變異</m:t>
+                    </m:r>
+                    <m:r>
+                      <a:rPr lang="zh-TW" altLang="en-US" sz="2000" b="1" i="1" smtClean="0">
+                        <a:latin typeface="Cambria Math" panose="02040503050406030204" pitchFamily="18" charset="0"/>
+                      </a:rPr>
+                      <m:t>數的</m:t>
+                    </m:r>
+                    <m:r>
+                      <a:rPr lang="zh-TW" altLang="en-US" sz="2000" b="1" i="1">
+                        <a:latin typeface="Cambria Math" panose="02040503050406030204" pitchFamily="18" charset="0"/>
+                      </a:rPr>
+                      <m:t>估計</m:t>
+                    </m:r>
+                    <m:r>
+                      <a:rPr lang="zh-TW" altLang="en-US" sz="2000" b="1" i="1" smtClean="0">
+                        <a:latin typeface="Cambria Math" panose="02040503050406030204" pitchFamily="18" charset="0"/>
+                      </a:rPr>
+                      <m:t>式為：</m:t>
+                    </m:r>
+                  </m:oMath>
+                </a14:m>
+                <a:endParaRPr lang="en-US" altLang="zh-TW" sz="2000" b="1" i="1" dirty="0">
+                  <a:latin typeface="Cambria Math" panose="02040503050406030204" pitchFamily="18" charset="0"/>
+                </a:endParaRPr>
+              </a:p>
+              <a:p>
+                <a:pPr marL="0" indent="0" algn="ctr">
+                  <a:lnSpc>
+                    <a:spcPct val="120000"/>
+                  </a:lnSpc>
+                  <a:buNone/>
+                </a:pPr>
+                <a14:m>
+                  <m:oMath xmlns:m="http://schemas.openxmlformats.org/officeDocument/2006/math">
+                    <m:r>
+                      <a:rPr lang="en-US" altLang="zh-TW" sz="2000" b="0" i="1" smtClean="0">
+                        <a:latin typeface="Cambria Math" panose="02040503050406030204" pitchFamily="18" charset="0"/>
+                      </a:rPr>
+                      <m:t>𝑉</m:t>
+                    </m:r>
+                    <m:r>
+                      <a:rPr lang="en-US" altLang="zh-TW" sz="2000" b="0" i="1" smtClean="0">
+                        <a:latin typeface="Cambria Math" panose="02040503050406030204" pitchFamily="18" charset="0"/>
+                      </a:rPr>
+                      <m:t>(</m:t>
+                    </m:r>
+                    <m:r>
+                      <a:rPr lang="zh-TW" altLang="en-US" sz="2000" b="0" i="1" smtClean="0">
+                        <a:latin typeface="Cambria Math" panose="02040503050406030204" pitchFamily="18" charset="0"/>
+                      </a:rPr>
+                      <m:t> </m:t>
+                    </m:r>
+                    <m:acc>
+                      <m:accPr>
+                        <m:chr m:val="̅"/>
+                        <m:ctrlPr>
+                          <a:rPr lang="en-US" sz="2000" i="1" smtClean="0">
+                            <a:latin typeface="Cambria Math" panose="02040503050406030204" pitchFamily="18" charset="0"/>
+                          </a:rPr>
+                        </m:ctrlPr>
+                      </m:accPr>
+                      <m:e>
+                        <m:sSub>
+                          <m:sSubPr>
+                            <m:ctrlPr>
+                              <a:rPr lang="en-US" sz="2000" i="1" smtClean="0">
+                                <a:latin typeface="Cambria Math" panose="02040503050406030204" pitchFamily="18" charset="0"/>
+                              </a:rPr>
+                            </m:ctrlPr>
+                          </m:sSubPr>
+                          <m:e>
+                            <m:r>
+                              <a:rPr lang="en-US" sz="2000" b="0" i="1" smtClean="0">
+                                <a:latin typeface="Cambria Math" panose="02040503050406030204" pitchFamily="18" charset="0"/>
+                              </a:rPr>
+                              <m:t>𝑦</m:t>
+                            </m:r>
+                          </m:e>
+                          <m:sub>
+                            <m:r>
+                              <a:rPr lang="en-US" sz="2000" b="0" i="1" smtClean="0">
+                                <a:latin typeface="Cambria Math" panose="02040503050406030204" pitchFamily="18" charset="0"/>
+                              </a:rPr>
+                              <m:t>𝐻𝑇</m:t>
+                            </m:r>
+                          </m:sub>
+                        </m:sSub>
+                      </m:e>
+                    </m:acc>
+                    <m:r>
+                      <a:rPr lang="en-US" sz="2000" b="0" i="1" smtClean="0">
+                        <a:latin typeface="Cambria Math" panose="02040503050406030204" pitchFamily="18" charset="0"/>
+                      </a:rPr>
+                      <m:t>)</m:t>
+                    </m:r>
+                  </m:oMath>
+                </a14:m>
+                <a:r>
+                  <a:rPr lang="en-US" sz="2000" dirty="0"/>
+                  <a:t>=</a:t>
+                </a:r>
+                <a14:m>
+                  <m:oMath xmlns:m="http://schemas.openxmlformats.org/officeDocument/2006/math">
+                    <m:f>
+                      <m:fPr>
+                        <m:ctrlPr>
+                          <a:rPr lang="en-US" sz="2000" i="1" dirty="0" smtClean="0">
+                            <a:latin typeface="Cambria Math" panose="02040503050406030204" pitchFamily="18" charset="0"/>
+                          </a:rPr>
+                        </m:ctrlPr>
+                      </m:fPr>
+                      <m:num>
+                        <m:r>
+                          <a:rPr lang="en-US" sz="2000" b="0" i="1" dirty="0" smtClean="0">
+                            <a:latin typeface="Cambria Math" panose="02040503050406030204" pitchFamily="18" charset="0"/>
+                          </a:rPr>
+                          <m:t>1</m:t>
+                        </m:r>
+                      </m:num>
+                      <m:den>
+                        <m:sSup>
+                          <m:sSupPr>
+                            <m:ctrlPr>
+                              <a:rPr lang="en-US" sz="2000" b="0" i="1" dirty="0" smtClean="0">
+                                <a:latin typeface="Cambria Math" panose="02040503050406030204" pitchFamily="18" charset="0"/>
+                              </a:rPr>
+                            </m:ctrlPr>
+                          </m:sSupPr>
+                          <m:e>
+                            <m:r>
+                              <a:rPr lang="en-US" sz="2000" b="0" i="1" dirty="0" smtClean="0">
+                                <a:latin typeface="Cambria Math" panose="02040503050406030204" pitchFamily="18" charset="0"/>
+                              </a:rPr>
+                              <m:t>𝑁</m:t>
+                            </m:r>
+                          </m:e>
+                          <m:sup>
+                            <m:r>
+                              <a:rPr lang="en-US" sz="2000" b="0" i="1" dirty="0" smtClean="0">
+                                <a:latin typeface="Cambria Math" panose="02040503050406030204" pitchFamily="18" charset="0"/>
+                              </a:rPr>
+                              <m:t>2</m:t>
+                            </m:r>
+                          </m:sup>
+                        </m:sSup>
+                      </m:den>
+                    </m:f>
+                    <m:nary>
+                      <m:naryPr>
+                        <m:chr m:val="∑"/>
+                        <m:ctrlPr>
+                          <a:rPr lang="en-US" sz="2000" i="1" dirty="0" smtClean="0">
+                            <a:latin typeface="Cambria Math" panose="02040503050406030204" pitchFamily="18" charset="0"/>
+                          </a:rPr>
+                        </m:ctrlPr>
+                      </m:naryPr>
+                      <m:sub>
+                        <m:r>
+                          <m:rPr>
+                            <m:brk m:alnAt="23"/>
+                          </m:rPr>
+                          <a:rPr lang="en-US" sz="2000" b="0" i="1" dirty="0" smtClean="0">
+                            <a:latin typeface="Cambria Math" panose="02040503050406030204" pitchFamily="18" charset="0"/>
+                          </a:rPr>
+                          <m:t>𝑘</m:t>
+                        </m:r>
+                        <m:r>
+                          <a:rPr lang="en-US" sz="2000" b="0" i="1" dirty="0" smtClean="0">
+                            <a:latin typeface="Cambria Math" panose="02040503050406030204" pitchFamily="18" charset="0"/>
+                          </a:rPr>
+                          <m:t>=1</m:t>
+                        </m:r>
+                      </m:sub>
+                      <m:sup>
+                        <m:r>
+                          <a:rPr lang="en-US" sz="2000" b="0" i="1" dirty="0" smtClean="0">
+                            <a:latin typeface="Cambria Math" panose="02040503050406030204" pitchFamily="18" charset="0"/>
+                          </a:rPr>
+                          <m:t>𝑁</m:t>
+                        </m:r>
+                      </m:sup>
+                      <m:e>
+                        <m:nary>
+                          <m:naryPr>
+                            <m:chr m:val="∑"/>
+                            <m:ctrlPr>
+                              <a:rPr lang="en-US" sz="2000" b="0" i="1" dirty="0" smtClean="0">
+                                <a:latin typeface="Cambria Math" panose="02040503050406030204" pitchFamily="18" charset="0"/>
+                              </a:rPr>
+                            </m:ctrlPr>
+                          </m:naryPr>
+                          <m:sub>
+                            <m:r>
+                              <m:rPr>
+                                <m:brk m:alnAt="23"/>
+                              </m:rPr>
+                              <a:rPr lang="en-US" sz="2000" b="0" i="1" dirty="0" smtClean="0">
+                                <a:latin typeface="Cambria Math" panose="02040503050406030204" pitchFamily="18" charset="0"/>
+                              </a:rPr>
+                              <m:t>𝑙</m:t>
+                            </m:r>
+                            <m:r>
+                              <a:rPr lang="en-US" sz="2000" b="0" i="1" dirty="0" smtClean="0">
+                                <a:latin typeface="Cambria Math" panose="02040503050406030204" pitchFamily="18" charset="0"/>
+                              </a:rPr>
+                              <m:t>=1</m:t>
+                            </m:r>
+                          </m:sub>
+                          <m:sup>
+                            <m:r>
+                              <a:rPr lang="en-US" sz="2000" b="0" i="1" dirty="0" smtClean="0">
+                                <a:latin typeface="Cambria Math" panose="02040503050406030204" pitchFamily="18" charset="0"/>
+                              </a:rPr>
+                              <m:t>𝑁</m:t>
+                            </m:r>
+                          </m:sup>
+                          <m:e>
+                            <m:r>
+                              <a:rPr lang="en-US" sz="2000" b="0" i="1" dirty="0" smtClean="0">
+                                <a:latin typeface="Cambria Math" panose="02040503050406030204" pitchFamily="18" charset="0"/>
+                              </a:rPr>
+                              <m:t>(</m:t>
+                            </m:r>
+                            <m:sSub>
+                              <m:sSubPr>
+                                <m:ctrlPr>
+                                  <a:rPr lang="en-US" sz="2000" b="0" i="1" dirty="0" smtClean="0">
+                                    <a:latin typeface="Cambria Math" panose="02040503050406030204" pitchFamily="18" charset="0"/>
+                                  </a:rPr>
+                                </m:ctrlPr>
+                              </m:sSubPr>
+                              <m:e>
+                                <m:r>
+                                  <a:rPr lang="en-US" sz="2000" b="0" i="1" dirty="0" smtClean="0">
+                                    <a:latin typeface="Cambria Math" panose="02040503050406030204" pitchFamily="18" charset="0"/>
+                                    <a:ea typeface="Cambria Math" panose="02040503050406030204" pitchFamily="18" charset="0"/>
+                                  </a:rPr>
+                                  <m:t>𝜋</m:t>
+                                </m:r>
+                              </m:e>
+                              <m:sub>
+                                <m:r>
+                                  <a:rPr lang="en-US" sz="2000" b="0" i="1" dirty="0" smtClean="0">
+                                    <a:latin typeface="Cambria Math" panose="02040503050406030204" pitchFamily="18" charset="0"/>
+                                  </a:rPr>
+                                  <m:t>𝑘𝑙</m:t>
+                                </m:r>
+                              </m:sub>
+                            </m:sSub>
+                            <m:r>
+                              <a:rPr lang="en-US" sz="2000" b="0" i="1" dirty="0" smtClean="0">
+                                <a:latin typeface="Cambria Math" panose="02040503050406030204" pitchFamily="18" charset="0"/>
+                              </a:rPr>
+                              <m:t>−</m:t>
+                            </m:r>
+                            <m:sSub>
+                              <m:sSubPr>
+                                <m:ctrlPr>
+                                  <a:rPr lang="en-US" sz="2000" b="0" i="1" dirty="0" smtClean="0">
+                                    <a:latin typeface="Cambria Math" panose="02040503050406030204" pitchFamily="18" charset="0"/>
+                                  </a:rPr>
+                                </m:ctrlPr>
+                              </m:sSubPr>
+                              <m:e>
+                                <m:r>
+                                  <a:rPr lang="en-US" sz="2000" b="0" i="1" dirty="0" smtClean="0">
+                                    <a:latin typeface="Cambria Math" panose="02040503050406030204" pitchFamily="18" charset="0"/>
+                                    <a:ea typeface="Cambria Math" panose="02040503050406030204" pitchFamily="18" charset="0"/>
+                                  </a:rPr>
+                                  <m:t>𝜋</m:t>
+                                </m:r>
+                              </m:e>
+                              <m:sub>
+                                <m:r>
+                                  <a:rPr lang="en-US" sz="2000" b="0" i="1" dirty="0" smtClean="0">
+                                    <a:latin typeface="Cambria Math" panose="02040503050406030204" pitchFamily="18" charset="0"/>
+                                  </a:rPr>
+                                  <m:t>𝑘</m:t>
+                                </m:r>
+                              </m:sub>
+                            </m:sSub>
+                            <m:sSub>
+                              <m:sSubPr>
+                                <m:ctrlPr>
+                                  <a:rPr lang="en-US" sz="2000" b="0" i="1" dirty="0" smtClean="0">
+                                    <a:latin typeface="Cambria Math" panose="02040503050406030204" pitchFamily="18" charset="0"/>
+                                  </a:rPr>
+                                </m:ctrlPr>
+                              </m:sSubPr>
+                              <m:e>
+                                <m:r>
+                                  <a:rPr lang="en-US" sz="2000" b="0" i="1" dirty="0" smtClean="0">
+                                    <a:latin typeface="Cambria Math" panose="02040503050406030204" pitchFamily="18" charset="0"/>
+                                    <a:ea typeface="Cambria Math" panose="02040503050406030204" pitchFamily="18" charset="0"/>
+                                  </a:rPr>
+                                  <m:t>𝜋</m:t>
+                                </m:r>
+                              </m:e>
+                              <m:sub>
+                                <m:r>
+                                  <a:rPr lang="en-US" sz="2000" b="0" i="1" dirty="0" smtClean="0">
+                                    <a:latin typeface="Cambria Math" panose="02040503050406030204" pitchFamily="18" charset="0"/>
+                                  </a:rPr>
+                                  <m:t>𝑙</m:t>
+                                </m:r>
+                              </m:sub>
+                            </m:sSub>
+                            <m:r>
+                              <a:rPr lang="en-US" sz="2000" b="0" i="1" dirty="0" smtClean="0">
+                                <a:latin typeface="Cambria Math" panose="02040503050406030204" pitchFamily="18" charset="0"/>
+                              </a:rPr>
+                              <m:t>)</m:t>
+                            </m:r>
+                          </m:e>
+                        </m:nary>
+                        <m:f>
+                          <m:fPr>
+                            <m:ctrlPr>
+                              <a:rPr lang="en-US" sz="2000" i="1" dirty="0" smtClean="0">
+                                <a:latin typeface="Cambria Math" panose="02040503050406030204" pitchFamily="18" charset="0"/>
+                              </a:rPr>
+                            </m:ctrlPr>
+                          </m:fPr>
+                          <m:num>
+                            <m:sSub>
+                              <m:sSubPr>
+                                <m:ctrlPr>
+                                  <a:rPr lang="en-US" sz="2000" i="1" dirty="0" smtClean="0">
+                                    <a:latin typeface="Cambria Math" panose="02040503050406030204" pitchFamily="18" charset="0"/>
+                                  </a:rPr>
+                                </m:ctrlPr>
+                              </m:sSubPr>
+                              <m:e>
+                                <m:r>
+                                  <a:rPr lang="en-US" sz="2000" b="0" i="1" dirty="0" smtClean="0">
+                                    <a:latin typeface="Cambria Math" panose="02040503050406030204" pitchFamily="18" charset="0"/>
+                                  </a:rPr>
+                                  <m:t>𝑦</m:t>
+                                </m:r>
+                              </m:e>
+                              <m:sub>
+                                <m:r>
+                                  <a:rPr lang="en-US" sz="2000" b="0" i="1" dirty="0" smtClean="0">
+                                    <a:latin typeface="Cambria Math" panose="02040503050406030204" pitchFamily="18" charset="0"/>
+                                  </a:rPr>
+                                  <m:t>𝑘</m:t>
+                                </m:r>
+                              </m:sub>
+                            </m:sSub>
+                          </m:num>
+                          <m:den>
+                            <m:sSub>
+                              <m:sSubPr>
+                                <m:ctrlPr>
+                                  <a:rPr lang="en-US" sz="2000" i="1" dirty="0" smtClean="0">
+                                    <a:latin typeface="Cambria Math" panose="02040503050406030204" pitchFamily="18" charset="0"/>
+                                  </a:rPr>
+                                </m:ctrlPr>
+                              </m:sSubPr>
+                              <m:e>
+                                <m:r>
+                                  <a:rPr lang="en-US" sz="2000" i="1" dirty="0" smtClean="0">
+                                    <a:latin typeface="Cambria Math" panose="02040503050406030204" pitchFamily="18" charset="0"/>
+                                    <a:ea typeface="Cambria Math" panose="02040503050406030204" pitchFamily="18" charset="0"/>
+                                  </a:rPr>
+                                  <m:t>𝜋</m:t>
+                                </m:r>
+                              </m:e>
+                              <m:sub>
+                                <m:r>
+                                  <a:rPr lang="en-US" sz="2000" b="0" i="1" dirty="0" smtClean="0">
+                                    <a:latin typeface="Cambria Math" panose="02040503050406030204" pitchFamily="18" charset="0"/>
+                                  </a:rPr>
+                                  <m:t>𝑘</m:t>
+                                </m:r>
+                              </m:sub>
+                            </m:sSub>
+                          </m:den>
+                        </m:f>
+                        <m:f>
+                          <m:fPr>
+                            <m:ctrlPr>
+                              <a:rPr lang="en-US" sz="2000" i="1" dirty="0">
+                                <a:latin typeface="Cambria Math" panose="02040503050406030204" pitchFamily="18" charset="0"/>
+                              </a:rPr>
+                            </m:ctrlPr>
+                          </m:fPr>
+                          <m:num>
+                            <m:sSub>
+                              <m:sSubPr>
+                                <m:ctrlPr>
+                                  <a:rPr lang="en-US" sz="2000" i="1" dirty="0">
+                                    <a:latin typeface="Cambria Math" panose="02040503050406030204" pitchFamily="18" charset="0"/>
+                                  </a:rPr>
+                                </m:ctrlPr>
+                              </m:sSubPr>
+                              <m:e>
+                                <m:r>
+                                  <a:rPr lang="en-US" sz="2000" i="1" dirty="0">
+                                    <a:latin typeface="Cambria Math" panose="02040503050406030204" pitchFamily="18" charset="0"/>
+                                  </a:rPr>
+                                  <m:t>𝑦</m:t>
+                                </m:r>
+                              </m:e>
+                              <m:sub>
+                                <m:r>
+                                  <a:rPr lang="en-US" sz="2000" b="0" i="1" dirty="0" smtClean="0">
+                                    <a:latin typeface="Cambria Math" panose="02040503050406030204" pitchFamily="18" charset="0"/>
+                                  </a:rPr>
+                                  <m:t>𝑙</m:t>
+                                </m:r>
+                              </m:sub>
+                            </m:sSub>
+                          </m:num>
+                          <m:den>
+                            <m:sSub>
+                              <m:sSubPr>
+                                <m:ctrlPr>
+                                  <a:rPr lang="en-US" sz="2000" i="1" dirty="0">
+                                    <a:latin typeface="Cambria Math" panose="02040503050406030204" pitchFamily="18" charset="0"/>
+                                  </a:rPr>
+                                </m:ctrlPr>
+                              </m:sSubPr>
+                              <m:e>
+                                <m:r>
+                                  <a:rPr lang="en-US" sz="2000" i="1" dirty="0">
+                                    <a:latin typeface="Cambria Math" panose="02040503050406030204" pitchFamily="18" charset="0"/>
+                                    <a:ea typeface="Cambria Math" panose="02040503050406030204" pitchFamily="18" charset="0"/>
+                                  </a:rPr>
+                                  <m:t>𝜋</m:t>
+                                </m:r>
+                              </m:e>
+                              <m:sub>
+                                <m:r>
+                                  <a:rPr lang="en-US" sz="2000" b="0" i="1" dirty="0" smtClean="0">
+                                    <a:latin typeface="Cambria Math" panose="02040503050406030204" pitchFamily="18" charset="0"/>
+                                  </a:rPr>
+                                  <m:t>𝑙</m:t>
+                                </m:r>
+                              </m:sub>
+                            </m:sSub>
+                          </m:den>
+                        </m:f>
+                      </m:e>
+                    </m:nary>
+                  </m:oMath>
+                </a14:m>
+                <a:endParaRPr lang="en-US" sz="2000" dirty="0"/>
+              </a:p>
+              <a:p>
+                <a:pPr>
+                  <a:lnSpc>
+                    <a:spcPct val="120000"/>
+                  </a:lnSpc>
+                </a:pPr>
+                <a14:m>
+                  <m:oMath xmlns:m="http://schemas.openxmlformats.org/officeDocument/2006/math">
+                    <m:sSub>
+                      <m:sSubPr>
+                        <m:ctrlPr>
+                          <a:rPr lang="en-US" altLang="ja-JP" sz="2000" i="1" smtClean="0">
+                            <a:effectLst/>
+                            <a:latin typeface="Cambria Math" panose="02040503050406030204" pitchFamily="18" charset="0"/>
+                          </a:rPr>
+                        </m:ctrlPr>
+                      </m:sSubPr>
+                      <m:e>
+                        <m:r>
+                          <a:rPr lang="en-US" altLang="ja-JP" sz="2000" i="1" smtClean="0">
+                            <a:effectLst/>
+                            <a:latin typeface="Cambria Math" panose="02040503050406030204" pitchFamily="18" charset="0"/>
+                            <a:ea typeface="Cambria Math" panose="02040503050406030204" pitchFamily="18" charset="0"/>
+                          </a:rPr>
+                          <m:t>𝜋</m:t>
+                        </m:r>
+                      </m:e>
+                      <m:sub>
+                        <m:r>
+                          <a:rPr lang="en-US" altLang="ja-JP" sz="2000" b="0" i="1" smtClean="0">
+                            <a:effectLst/>
+                            <a:latin typeface="Cambria Math" panose="02040503050406030204" pitchFamily="18" charset="0"/>
+                          </a:rPr>
+                          <m:t>𝑘𝑙</m:t>
+                        </m:r>
+                      </m:sub>
+                    </m:sSub>
+                  </m:oMath>
+                </a14:m>
+                <a:r>
+                  <a:rPr lang="ja-JP" altLang="en-US" sz="2000">
+                    <a:effectLst/>
+                    <a:latin typeface="Google Sans Text"/>
+                  </a:rPr>
+                  <a:t>這是個體 </a:t>
+                </a:r>
+                <a:r>
+                  <a:rPr lang="en-US" sz="2000" i="1" dirty="0">
+                    <a:effectLst/>
+                    <a:latin typeface="Google Sans Text"/>
+                  </a:rPr>
+                  <a:t>k</a:t>
+                </a:r>
+                <a:r>
+                  <a:rPr lang="en-US" sz="2000" dirty="0">
+                    <a:effectLst/>
+                    <a:latin typeface="Google Sans Text"/>
+                  </a:rPr>
+                  <a:t> </a:t>
+                </a:r>
+                <a:r>
+                  <a:rPr lang="ja-JP" altLang="en-US" sz="2000">
+                    <a:effectLst/>
+                    <a:latin typeface="Google Sans Text"/>
+                  </a:rPr>
+                  <a:t>和個體 </a:t>
+                </a:r>
+                <a:r>
+                  <a:rPr lang="en-US" sz="2000" i="1" dirty="0">
+                    <a:effectLst/>
+                    <a:latin typeface="Google Sans Text"/>
+                  </a:rPr>
+                  <a:t>l</a:t>
+                </a:r>
+                <a:r>
+                  <a:rPr lang="en-US" sz="2000" dirty="0">
+                    <a:effectLst/>
+                    <a:latin typeface="Google Sans Text"/>
+                  </a:rPr>
+                  <a:t> </a:t>
+                </a:r>
+                <a:r>
+                  <a:rPr lang="ja-JP" altLang="en-US" sz="2000">
+                    <a:effectLst/>
+                    <a:latin typeface="Google Sans Text"/>
+                  </a:rPr>
+                  <a:t>同時被抽中進入樣本的機率。</a:t>
+                </a:r>
+                <a:endParaRPr lang="en-US" altLang="ja-JP" sz="2000" dirty="0">
+                  <a:effectLst/>
+                  <a:latin typeface="Google Sans Text"/>
+                </a:endParaRPr>
+              </a:p>
+              <a:p>
+                <a:pPr>
+                  <a:lnSpc>
+                    <a:spcPct val="120000"/>
+                  </a:lnSpc>
+                </a:pPr>
+                <a14:m>
+                  <m:oMath xmlns:m="http://schemas.openxmlformats.org/officeDocument/2006/math">
+                    <m:sSub>
+                      <m:sSubPr>
+                        <m:ctrlPr>
+                          <a:rPr lang="en-US" altLang="ja-JP" sz="2000" i="1" smtClean="0">
+                            <a:latin typeface="Cambria Math" panose="02040503050406030204" pitchFamily="18" charset="0"/>
+                          </a:rPr>
+                        </m:ctrlPr>
+                      </m:sSubPr>
+                      <m:e>
+                        <m:r>
+                          <a:rPr lang="en-US" altLang="ja-JP" sz="2000" i="1" smtClean="0">
+                            <a:latin typeface="Cambria Math" panose="02040503050406030204" pitchFamily="18" charset="0"/>
+                            <a:ea typeface="Cambria Math" panose="02040503050406030204" pitchFamily="18" charset="0"/>
+                          </a:rPr>
+                          <m:t>𝜋</m:t>
+                        </m:r>
+                      </m:e>
+                      <m:sub>
+                        <m:r>
+                          <a:rPr lang="en-US" altLang="ja-JP" sz="2000" b="0" i="1" smtClean="0">
+                            <a:latin typeface="Cambria Math" panose="02040503050406030204" pitchFamily="18" charset="0"/>
+                          </a:rPr>
+                          <m:t>𝑘</m:t>
+                        </m:r>
+                      </m:sub>
+                    </m:sSub>
+                  </m:oMath>
+                </a14:m>
+                <a:r>
+                  <a:rPr lang="en-US" altLang="ja-JP" sz="2000" dirty="0"/>
+                  <a:t>, </a:t>
+                </a:r>
+                <a14:m>
+                  <m:oMath xmlns:m="http://schemas.openxmlformats.org/officeDocument/2006/math">
+                    <m:sSub>
+                      <m:sSubPr>
+                        <m:ctrlPr>
+                          <a:rPr lang="en-US" altLang="ja-JP" sz="2000" i="1">
+                            <a:latin typeface="Cambria Math" panose="02040503050406030204" pitchFamily="18" charset="0"/>
+                          </a:rPr>
+                        </m:ctrlPr>
+                      </m:sSubPr>
+                      <m:e>
+                        <m:r>
+                          <a:rPr lang="en-US" altLang="ja-JP" sz="2000" i="1">
+                            <a:latin typeface="Cambria Math" panose="02040503050406030204" pitchFamily="18" charset="0"/>
+                            <a:ea typeface="Cambria Math" panose="02040503050406030204" pitchFamily="18" charset="0"/>
+                          </a:rPr>
+                          <m:t>𝜋</m:t>
+                        </m:r>
+                      </m:e>
+                      <m:sub>
+                        <m:r>
+                          <a:rPr lang="en-US" altLang="ja-JP" sz="2000" b="0" i="1" smtClean="0">
+                            <a:latin typeface="Cambria Math" panose="02040503050406030204" pitchFamily="18" charset="0"/>
+                          </a:rPr>
+                          <m:t>𝑙</m:t>
+                        </m:r>
+                      </m:sub>
+                    </m:sSub>
+                    <m:r>
+                      <a:rPr lang="en-US" altLang="ja-JP" sz="2000" i="1">
+                        <a:latin typeface="Cambria Math" panose="02040503050406030204" pitchFamily="18" charset="0"/>
+                      </a:rPr>
+                      <m:t> </m:t>
+                    </m:r>
+                  </m:oMath>
+                </a14:m>
+                <a:r>
+                  <a:rPr lang="ja-JP" altLang="en-US" sz="2000"/>
+                  <a:t>：如果 </a:t>
+                </a:r>
+                <a:r>
+                  <a:rPr lang="en-US" sz="2000" i="1" dirty="0">
+                    <a:effectLst/>
+                    <a:latin typeface="Google Sans Text"/>
+                  </a:rPr>
+                  <a:t>k</a:t>
+                </a:r>
+                <a:r>
+                  <a:rPr lang="en-US" sz="2000" dirty="0"/>
+                  <a:t> </a:t>
+                </a:r>
+                <a:r>
+                  <a:rPr lang="ja-JP" altLang="en-US" sz="2000"/>
+                  <a:t>和 </a:t>
+                </a:r>
+                <a:r>
+                  <a:rPr lang="en-US" sz="2000" i="1" dirty="0">
+                    <a:effectLst/>
+                    <a:latin typeface="Google Sans Text"/>
+                  </a:rPr>
+                  <a:t>l</a:t>
+                </a:r>
+                <a:r>
+                  <a:rPr lang="en-US" sz="2000" dirty="0"/>
+                  <a:t> </a:t>
+                </a:r>
+                <a:r>
+                  <a:rPr lang="ja-JP" altLang="en-US" sz="2000"/>
+                  <a:t>是獨立被抽中的，這是他們同時入選的機率。</a:t>
+                </a:r>
+                <a:endParaRPr lang="en-US" altLang="ja-JP" sz="2000" dirty="0"/>
+              </a:p>
+              <a:p>
+                <a:pPr>
+                  <a:lnSpc>
+                    <a:spcPct val="120000"/>
+                  </a:lnSpc>
+                </a:pPr>
+                <a14:m>
+                  <m:oMath xmlns:m="http://schemas.openxmlformats.org/officeDocument/2006/math">
+                    <m:r>
+                      <a:rPr lang="en-US" sz="2000" b="0" i="1" dirty="0" smtClean="0">
+                        <a:latin typeface="Cambria Math" panose="02040503050406030204" pitchFamily="18" charset="0"/>
+                      </a:rPr>
+                      <m:t>(</m:t>
+                    </m:r>
+                    <m:sSub>
+                      <m:sSubPr>
+                        <m:ctrlPr>
+                          <a:rPr lang="en-US" sz="2000" b="0" i="1" dirty="0" smtClean="0">
+                            <a:latin typeface="Cambria Math" panose="02040503050406030204" pitchFamily="18" charset="0"/>
+                          </a:rPr>
+                        </m:ctrlPr>
+                      </m:sSubPr>
+                      <m:e>
+                        <m:r>
+                          <a:rPr lang="en-US" sz="2000" b="0" i="1" dirty="0" smtClean="0">
+                            <a:latin typeface="Cambria Math" panose="02040503050406030204" pitchFamily="18" charset="0"/>
+                            <a:ea typeface="Cambria Math" panose="02040503050406030204" pitchFamily="18" charset="0"/>
+                          </a:rPr>
+                          <m:t>𝜋</m:t>
+                        </m:r>
+                      </m:e>
+                      <m:sub>
+                        <m:r>
+                          <a:rPr lang="en-US" sz="2000" b="0" i="1" dirty="0" smtClean="0">
+                            <a:latin typeface="Cambria Math" panose="02040503050406030204" pitchFamily="18" charset="0"/>
+                          </a:rPr>
+                          <m:t>𝑘𝑙</m:t>
+                        </m:r>
+                      </m:sub>
+                    </m:sSub>
+                    <m:r>
+                      <a:rPr lang="en-US" sz="2000" b="0" i="1" dirty="0" smtClean="0">
+                        <a:latin typeface="Cambria Math" panose="02040503050406030204" pitchFamily="18" charset="0"/>
+                      </a:rPr>
+                      <m:t>−</m:t>
+                    </m:r>
+                    <m:sSub>
+                      <m:sSubPr>
+                        <m:ctrlPr>
+                          <a:rPr lang="en-US" sz="2000" b="0" i="1" dirty="0" smtClean="0">
+                            <a:latin typeface="Cambria Math" panose="02040503050406030204" pitchFamily="18" charset="0"/>
+                          </a:rPr>
+                        </m:ctrlPr>
+                      </m:sSubPr>
+                      <m:e>
+                        <m:r>
+                          <a:rPr lang="en-US" sz="2000" b="0" i="1" dirty="0" smtClean="0">
+                            <a:latin typeface="Cambria Math" panose="02040503050406030204" pitchFamily="18" charset="0"/>
+                            <a:ea typeface="Cambria Math" panose="02040503050406030204" pitchFamily="18" charset="0"/>
+                          </a:rPr>
+                          <m:t>𝜋</m:t>
+                        </m:r>
+                      </m:e>
+                      <m:sub>
+                        <m:r>
+                          <a:rPr lang="en-US" sz="2000" b="0" i="1" dirty="0" smtClean="0">
+                            <a:latin typeface="Cambria Math" panose="02040503050406030204" pitchFamily="18" charset="0"/>
+                          </a:rPr>
+                          <m:t>𝑘</m:t>
+                        </m:r>
+                      </m:sub>
+                    </m:sSub>
+                    <m:sSub>
+                      <m:sSubPr>
+                        <m:ctrlPr>
+                          <a:rPr lang="en-US" sz="2000" b="0" i="1" dirty="0" smtClean="0">
+                            <a:latin typeface="Cambria Math" panose="02040503050406030204" pitchFamily="18" charset="0"/>
+                          </a:rPr>
+                        </m:ctrlPr>
+                      </m:sSubPr>
+                      <m:e>
+                        <m:r>
+                          <a:rPr lang="en-US" sz="2000" b="0" i="1" dirty="0" smtClean="0">
+                            <a:latin typeface="Cambria Math" panose="02040503050406030204" pitchFamily="18" charset="0"/>
+                            <a:ea typeface="Cambria Math" panose="02040503050406030204" pitchFamily="18" charset="0"/>
+                          </a:rPr>
+                          <m:t>𝜋</m:t>
+                        </m:r>
+                      </m:e>
+                      <m:sub>
+                        <m:r>
+                          <a:rPr lang="en-US" sz="2000" b="0" i="1" dirty="0" smtClean="0">
+                            <a:latin typeface="Cambria Math" panose="02040503050406030204" pitchFamily="18" charset="0"/>
+                          </a:rPr>
+                          <m:t>𝑙</m:t>
+                        </m:r>
+                      </m:sub>
+                    </m:sSub>
+                    <m:r>
+                      <a:rPr lang="en-US" sz="2000" b="0" i="1" dirty="0" smtClean="0">
+                        <a:latin typeface="Cambria Math" panose="02040503050406030204" pitchFamily="18" charset="0"/>
+                      </a:rPr>
+                      <m:t>)</m:t>
+                    </m:r>
+                  </m:oMath>
+                </a14:m>
+                <a:r>
+                  <a:rPr lang="ja-JP" altLang="en-US" sz="2000">
+                    <a:effectLst/>
+                    <a:latin typeface="Google Sans Text"/>
+                  </a:rPr>
+                  <a:t>是 </a:t>
+                </a:r>
+                <a:r>
+                  <a:rPr lang="en-US" sz="2000" dirty="0">
+                    <a:effectLst/>
+                    <a:latin typeface="Google Sans Text"/>
+                  </a:rPr>
+                  <a:t>k </a:t>
+                </a:r>
+                <a:r>
+                  <a:rPr lang="ja-JP" altLang="en-US" sz="2000">
+                    <a:effectLst/>
+                    <a:latin typeface="Google Sans Text"/>
+                  </a:rPr>
+                  <a:t>與 </a:t>
+                </a:r>
+                <a:r>
+                  <a:rPr lang="en-US" sz="2000" dirty="0">
+                    <a:effectLst/>
+                    <a:latin typeface="Google Sans Text"/>
+                  </a:rPr>
+                  <a:t>l </a:t>
+                </a:r>
+                <a:r>
+                  <a:rPr lang="ja-JP" altLang="en-US" sz="2000">
+                    <a:effectLst/>
+                    <a:latin typeface="Google Sans Text"/>
+                  </a:rPr>
+                  <a:t>抽樣的</a:t>
+                </a:r>
+                <a:r>
+                  <a:rPr lang="ja-JP" altLang="en-US" sz="2000" b="1">
+                    <a:effectLst/>
+                    <a:latin typeface="Google Sans Text"/>
+                  </a:rPr>
+                  <a:t>共變異數 </a:t>
+                </a:r>
+                <a:r>
+                  <a:rPr lang="en-US" altLang="ja-JP" sz="2000" b="1" dirty="0">
+                    <a:effectLst/>
+                    <a:latin typeface="Google Sans Text"/>
+                  </a:rPr>
+                  <a:t>(</a:t>
+                </a:r>
+                <a:r>
+                  <a:rPr lang="en-US" sz="2000" b="1" dirty="0">
+                    <a:effectLst/>
+                    <a:latin typeface="Google Sans Text"/>
+                  </a:rPr>
+                  <a:t>Covariance)</a:t>
+                </a:r>
+                <a:r>
+                  <a:rPr lang="en-US" sz="2000" dirty="0">
+                    <a:effectLst/>
+                    <a:latin typeface="Google Sans Text"/>
+                  </a:rPr>
+                  <a:t>。</a:t>
+                </a:r>
+                <a:r>
+                  <a:rPr lang="ja-JP" altLang="en-US" sz="2000">
+                    <a:effectLst/>
+                    <a:latin typeface="Google Sans Text"/>
+                  </a:rPr>
+                  <a:t>它描述了個體之間入選機率的「相關性」。</a:t>
+                </a:r>
+              </a:p>
+              <a:p>
+                <a:pPr>
+                  <a:lnSpc>
+                    <a:spcPct val="120000"/>
+                  </a:lnSpc>
+                  <a:buFont typeface="Arial" panose="020B0604020202020204" pitchFamily="34" charset="0"/>
+                  <a:buChar char="•"/>
+                </a:pPr>
+                <a:r>
+                  <a:rPr lang="ja-JP" altLang="en-US" sz="2000">
+                    <a:effectLst/>
+                    <a:latin typeface="Google Sans Text"/>
+                  </a:rPr>
+                  <a:t>如果這個值是負的，代表抽到 </a:t>
+                </a:r>
+                <a:r>
+                  <a:rPr lang="en-US" sz="2000" dirty="0">
+                    <a:effectLst/>
+                    <a:latin typeface="Google Sans Text"/>
+                  </a:rPr>
+                  <a:t>k </a:t>
+                </a:r>
+                <a:r>
+                  <a:rPr lang="ja-JP" altLang="en-US" sz="2000">
+                    <a:effectLst/>
+                    <a:latin typeface="Google Sans Text"/>
+                  </a:rPr>
+                  <a:t>就不容易抽到 </a:t>
+                </a:r>
+                <a:r>
+                  <a:rPr lang="en-US" sz="2000" dirty="0">
+                    <a:effectLst/>
+                    <a:latin typeface="Google Sans Text"/>
+                  </a:rPr>
+                  <a:t>l（</a:t>
+                </a:r>
+                <a:r>
+                  <a:rPr lang="ja-JP" altLang="en-US" sz="2000">
+                    <a:effectLst/>
+                    <a:latin typeface="Google Sans Text"/>
+                  </a:rPr>
+                  <a:t>例如：簡單隨機抽樣）。</a:t>
+                </a:r>
+                <a:endParaRPr lang="en-US" sz="2000" dirty="0">
+                  <a:effectLst/>
+                  <a:latin typeface="Google Sans Text"/>
+                </a:endParaRPr>
+              </a:p>
+              <a:p>
+                <a:endParaRPr lang="en-US" dirty="0"/>
+              </a:p>
+            </p:txBody>
+          </p:sp>
+        </mc:Choice>
+        <mc:Fallback>
+          <p:sp>
+            <p:nvSpPr>
+              <p:cNvPr id="3" name="Content Placeholder 2">
+                <a:extLst>
+                  <a:ext uri="{FF2B5EF4-FFF2-40B4-BE49-F238E27FC236}">
+                    <a16:creationId xmlns:a16="http://schemas.microsoft.com/office/drawing/2014/main" id="{659579A7-244A-1B4E-A6EF-9B1F87EA3242}"/>
+                  </a:ext>
+                </a:extLst>
+              </p:cNvPr>
+              <p:cNvSpPr>
+                <a:spLocks noGrp="1" noRot="1" noChangeAspect="1" noMove="1" noResize="1" noEditPoints="1" noAdjustHandles="1" noChangeArrowheads="1" noChangeShapeType="1" noTextEdit="1"/>
+              </p:cNvSpPr>
+              <p:nvPr>
+                <p:ph idx="1"/>
+              </p:nvPr>
+            </p:nvSpPr>
+            <p:spPr>
+              <a:blipFill>
+                <a:blip r:embed="rId2"/>
+                <a:stretch>
+                  <a:fillRect l="-603"/>
+                </a:stretch>
+              </a:blipFill>
+            </p:spPr>
+            <p:txBody>
+              <a:bodyPr/>
+              <a:lstStyle/>
+              <a:p>
+                <a:r>
+                  <a:rPr lang="en-US">
+                    <a:noFill/>
+                  </a:rPr>
+                  <a:t> </a:t>
+                </a:r>
+              </a:p>
+            </p:txBody>
+          </p:sp>
+        </mc:Fallback>
+      </mc:AlternateContent>
+      <p:sp>
+        <p:nvSpPr>
+          <p:cNvPr id="4" name="Slide Number Placeholder 3">
+            <a:extLst>
+              <a:ext uri="{FF2B5EF4-FFF2-40B4-BE49-F238E27FC236}">
+                <a16:creationId xmlns:a16="http://schemas.microsoft.com/office/drawing/2014/main" id="{49069B59-1518-4C2D-ABA7-09A5F449F58E}"/>
               </a:ext>
             </a:extLst>
           </p:cNvPr>
@@ -5890,40 +7507,10 @@
           </a:p>
         </p:txBody>
       </p:sp>
-      <p:pic>
-        <p:nvPicPr>
-          <p:cNvPr id="4" name="Picture 3">
-            <a:extLst>
-              <a:ext uri="{FF2B5EF4-FFF2-40B4-BE49-F238E27FC236}">
-                <a16:creationId xmlns:a16="http://schemas.microsoft.com/office/drawing/2014/main" id="{0575C55C-39ED-D1E3-ADBC-6F08C2F7E1F3}"/>
-              </a:ext>
-            </a:extLst>
-          </p:cNvPr>
-          <p:cNvPicPr>
-            <a:picLocks noChangeAspect="1"/>
-          </p:cNvPicPr>
-          <p:nvPr/>
-        </p:nvPicPr>
-        <p:blipFill>
-          <a:blip r:embed="rId2"/>
-          <a:stretch>
-            <a:fillRect/>
-          </a:stretch>
-        </p:blipFill>
-        <p:spPr>
-          <a:xfrm>
-            <a:off x="2210158" y="0"/>
-            <a:ext cx="7771683" cy="6858000"/>
-          </a:xfrm>
-          <a:prstGeom prst="rect">
-            <a:avLst/>
-          </a:prstGeom>
-        </p:spPr>
-      </p:pic>
     </p:spTree>
     <p:extLst>
       <p:ext uri="{BB962C8B-B14F-4D97-AF65-F5344CB8AC3E}">
-        <p14:creationId xmlns:p14="http://schemas.microsoft.com/office/powerpoint/2010/main" val="2765617566"/>
+        <p14:creationId xmlns:p14="http://schemas.microsoft.com/office/powerpoint/2010/main" val="3495408900"/>
       </p:ext>
     </p:extLst>
   </p:cSld>
@@ -5955,7 +7542,7 @@
           <p:cNvPr id="2" name="Title 1">
             <a:extLst>
               <a:ext uri="{FF2B5EF4-FFF2-40B4-BE49-F238E27FC236}">
-                <a16:creationId xmlns:a16="http://schemas.microsoft.com/office/drawing/2014/main" id="{ED266BC7-D370-DB3B-3586-0BB7D3212D0F}"/>
+                <a16:creationId xmlns:a16="http://schemas.microsoft.com/office/drawing/2014/main" id="{31C60B46-553E-18AD-A4BE-E745BAB0CAA0}"/>
               </a:ext>
             </a:extLst>
           </p:cNvPr>
@@ -5973,550 +7560,20 @@
           <a:p>
             <a:r>
               <a:rPr lang="ja-JP" altLang="en-US"/>
-              <a:t>非機率抽樣</a:t>
+              <a:t>機率抽樣的元素（八）</a:t>
             </a:r>
             <a:endParaRPr lang="en-US" dirty="0"/>
           </a:p>
         </p:txBody>
       </p:sp>
-      <p:sp>
-        <p:nvSpPr>
-          <p:cNvPr id="3" name="Content Placeholder 2">
-            <a:extLst>
-              <a:ext uri="{FF2B5EF4-FFF2-40B4-BE49-F238E27FC236}">
-                <a16:creationId xmlns:a16="http://schemas.microsoft.com/office/drawing/2014/main" id="{4F08E529-29DD-AB2C-94BF-694DBD41AB6D}"/>
-              </a:ext>
-            </a:extLst>
-          </p:cNvPr>
-          <p:cNvSpPr>
-            <a:spLocks noGrp="1"/>
-          </p:cNvSpPr>
-          <p:nvPr>
-            <p:ph idx="1"/>
-          </p:nvPr>
-        </p:nvSpPr>
-        <p:spPr/>
-        <p:txBody>
-          <a:bodyPr>
-            <a:normAutofit/>
-          </a:bodyPr>
-          <a:lstStyle/>
-          <a:p>
-            <a:pPr>
-              <a:lnSpc>
-                <a:spcPct val="150000"/>
-              </a:lnSpc>
-              <a:buFont typeface="Wingdings" pitchFamily="2" charset="2"/>
-              <a:buChar char="l"/>
-            </a:pPr>
-            <a:r>
-              <a:rPr lang="ja-JP" altLang="en-US" sz="2000"/>
-              <a:t>非機率抽樣並非基於隨機原則，而是根據研究者的便利性、判斷或特定標準來選取樣本。</a:t>
-            </a:r>
-            <a:endParaRPr lang="en-US" altLang="ja-JP" sz="2000" dirty="0"/>
-          </a:p>
-          <a:p>
-            <a:pPr>
-              <a:lnSpc>
-                <a:spcPct val="150000"/>
-              </a:lnSpc>
-              <a:buFont typeface="Wingdings" pitchFamily="2" charset="2"/>
-              <a:buChar char="l"/>
-            </a:pPr>
-            <a:r>
-              <a:rPr lang="ja-JP" altLang="en-US" sz="2000"/>
-              <a:t>缺乏代表性， 可能集中在少數人，無法推論至全體母體。</a:t>
-            </a:r>
-            <a:endParaRPr lang="en-US" altLang="ja-JP" sz="2000" dirty="0"/>
-          </a:p>
-          <a:p>
-            <a:pPr>
-              <a:lnSpc>
-                <a:spcPct val="150000"/>
-              </a:lnSpc>
-              <a:buFont typeface="Wingdings" pitchFamily="2" charset="2"/>
-              <a:buChar char="l"/>
-            </a:pPr>
-            <a:r>
-              <a:rPr lang="ja-JP" altLang="en-US" sz="2000"/>
-              <a:t>抽樣機率不明，無法計算精確的抽樣誤差。</a:t>
-            </a:r>
-            <a:endParaRPr lang="en-US" altLang="ja-JP" sz="2000" dirty="0"/>
-          </a:p>
-          <a:p>
-            <a:pPr>
-              <a:lnSpc>
-                <a:spcPct val="150000"/>
-              </a:lnSpc>
-              <a:buFont typeface="Wingdings" pitchFamily="2" charset="2"/>
-              <a:buChar char="l"/>
-            </a:pPr>
-            <a:r>
-              <a:rPr lang="ja-JP" altLang="en-US" sz="2000"/>
-              <a:t>便利抽樣、判斷抽樣（專家抽樣）、滾雪球抽樣、配額抽樣都屬於非機率抽樣。</a:t>
-            </a:r>
-            <a:endParaRPr lang="en-US" altLang="ja-JP" sz="2000" dirty="0"/>
-          </a:p>
-          <a:p>
-            <a:pPr>
-              <a:lnSpc>
-                <a:spcPct val="150000"/>
-              </a:lnSpc>
-              <a:buFont typeface="Wingdings" pitchFamily="2" charset="2"/>
-              <a:buChar char="l"/>
-            </a:pPr>
-            <a:endParaRPr lang="en-US" sz="2000" dirty="0"/>
-          </a:p>
-          <a:p>
-            <a:pPr>
-              <a:buFont typeface="Wingdings" pitchFamily="2" charset="2"/>
-              <a:buChar char="l"/>
-            </a:pPr>
-            <a:endParaRPr lang="en-US" dirty="0"/>
-          </a:p>
-        </p:txBody>
-      </p:sp>
-      <p:sp>
-        <p:nvSpPr>
-          <p:cNvPr id="4" name="Slide Number Placeholder 3">
-            <a:extLst>
-              <a:ext uri="{FF2B5EF4-FFF2-40B4-BE49-F238E27FC236}">
-                <a16:creationId xmlns:a16="http://schemas.microsoft.com/office/drawing/2014/main" id="{C98085D9-FBDD-C940-3F14-8994BAC36532}"/>
-              </a:ext>
-            </a:extLst>
-          </p:cNvPr>
-          <p:cNvSpPr>
-            <a:spLocks noGrp="1"/>
-          </p:cNvSpPr>
-          <p:nvPr>
-            <p:ph type="sldNum" sz="quarter" idx="12"/>
-          </p:nvPr>
-        </p:nvSpPr>
-        <p:spPr/>
-        <p:txBody>
-          <a:bodyPr/>
-          <a:lstStyle/>
-          <a:p>
-            <a:fld id="{34E21383-B02B-694B-B2AD-A967203CDE86}" type="slidenum">
-              <a:rPr lang="en-US" smtClean="0"/>
-              <a:t>13</a:t>
-            </a:fld>
-            <a:endParaRPr lang="en-US"/>
-          </a:p>
-        </p:txBody>
-      </p:sp>
-    </p:spTree>
-    <p:extLst>
-      <p:ext uri="{BB962C8B-B14F-4D97-AF65-F5344CB8AC3E}">
-        <p14:creationId xmlns:p14="http://schemas.microsoft.com/office/powerpoint/2010/main" val="397422702"/>
-      </p:ext>
-    </p:extLst>
-  </p:cSld>
-  <p:clrMapOvr>
-    <a:masterClrMapping/>
-  </p:clrMapOvr>
-</p:sld>
-</file>
-
-<file path=ppt/slides/slide14.xml><?xml version="1.0" encoding="utf-8"?>
-<p:sld xmlns:a="http://schemas.openxmlformats.org/drawingml/2006/main" xmlns:r="http://schemas.openxmlformats.org/officeDocument/2006/relationships" xmlns:p="http://schemas.openxmlformats.org/presentationml/2006/main">
-  <p:cSld>
-    <p:spTree>
-      <p:nvGrpSpPr>
-        <p:cNvPr id="1" name=""/>
-        <p:cNvGrpSpPr/>
-        <p:nvPr/>
-      </p:nvGrpSpPr>
-      <p:grpSpPr>
-        <a:xfrm>
-          <a:off x="0" y="0"/>
-          <a:ext cx="0" cy="0"/>
-          <a:chOff x="0" y="0"/>
-          <a:chExt cx="0" cy="0"/>
-        </a:xfrm>
-      </p:grpSpPr>
-      <p:sp>
-        <p:nvSpPr>
-          <p:cNvPr id="2" name="Slide Number Placeholder 1">
-            <a:extLst>
-              <a:ext uri="{FF2B5EF4-FFF2-40B4-BE49-F238E27FC236}">
-                <a16:creationId xmlns:a16="http://schemas.microsoft.com/office/drawing/2014/main" id="{059EBEF9-A064-EC8F-F179-60480554D8D1}"/>
-              </a:ext>
-            </a:extLst>
-          </p:cNvPr>
-          <p:cNvSpPr>
-            <a:spLocks noGrp="1"/>
-          </p:cNvSpPr>
-          <p:nvPr>
-            <p:ph type="sldNum" sz="quarter" idx="12"/>
-          </p:nvPr>
-        </p:nvSpPr>
-        <p:spPr/>
-        <p:txBody>
-          <a:bodyPr/>
-          <a:lstStyle/>
-          <a:p>
-            <a:fld id="{34E21383-B02B-694B-B2AD-A967203CDE86}" type="slidenum">
-              <a:rPr lang="en-US" smtClean="0"/>
-              <a:t>14</a:t>
-            </a:fld>
-            <a:endParaRPr lang="en-US"/>
-          </a:p>
-        </p:txBody>
-      </p:sp>
-      <p:pic>
-        <p:nvPicPr>
-          <p:cNvPr id="4" name="Picture 3">
-            <a:extLst>
-              <a:ext uri="{FF2B5EF4-FFF2-40B4-BE49-F238E27FC236}">
-                <a16:creationId xmlns:a16="http://schemas.microsoft.com/office/drawing/2014/main" id="{AC7825AB-9123-046E-5144-047BBDB4FE4F}"/>
-              </a:ext>
-            </a:extLst>
-          </p:cNvPr>
-          <p:cNvPicPr>
-            <a:picLocks noChangeAspect="1"/>
-          </p:cNvPicPr>
-          <p:nvPr/>
-        </p:nvPicPr>
-        <p:blipFill>
-          <a:blip r:embed="rId2"/>
-          <a:stretch>
-            <a:fillRect/>
-          </a:stretch>
-        </p:blipFill>
-        <p:spPr>
-          <a:xfrm>
-            <a:off x="2059405" y="993274"/>
-            <a:ext cx="7772400" cy="5097346"/>
-          </a:xfrm>
-          <a:prstGeom prst="rect">
-            <a:avLst/>
-          </a:prstGeom>
-        </p:spPr>
-      </p:pic>
-    </p:spTree>
-    <p:extLst>
-      <p:ext uri="{BB962C8B-B14F-4D97-AF65-F5344CB8AC3E}">
-        <p14:creationId xmlns:p14="http://schemas.microsoft.com/office/powerpoint/2010/main" val="1103186742"/>
-      </p:ext>
-    </p:extLst>
-  </p:cSld>
-  <p:clrMapOvr>
-    <a:masterClrMapping/>
-  </p:clrMapOvr>
-</p:sld>
-</file>
-
-<file path=ppt/slides/slide15.xml><?xml version="1.0" encoding="utf-8"?>
-<p:sld xmlns:a="http://schemas.openxmlformats.org/drawingml/2006/main" xmlns:r="http://schemas.openxmlformats.org/officeDocument/2006/relationships" xmlns:p="http://schemas.openxmlformats.org/presentationml/2006/main">
-  <p:cSld>
-    <p:spTree>
-      <p:nvGrpSpPr>
-        <p:cNvPr id="1" name=""/>
-        <p:cNvGrpSpPr/>
-        <p:nvPr/>
-      </p:nvGrpSpPr>
-      <p:grpSpPr>
-        <a:xfrm>
-          <a:off x="0" y="0"/>
-          <a:ext cx="0" cy="0"/>
-          <a:chOff x="0" y="0"/>
-          <a:chExt cx="0" cy="0"/>
-        </a:xfrm>
-      </p:grpSpPr>
-      <p:sp>
-        <p:nvSpPr>
-          <p:cNvPr id="2" name="Title 1">
-            <a:extLst>
-              <a:ext uri="{FF2B5EF4-FFF2-40B4-BE49-F238E27FC236}">
-                <a16:creationId xmlns:a16="http://schemas.microsoft.com/office/drawing/2014/main" id="{ED266BC7-D370-DB3B-3586-0BB7D3212D0F}"/>
-              </a:ext>
-            </a:extLst>
-          </p:cNvPr>
-          <p:cNvSpPr>
-            <a:spLocks noGrp="1"/>
-          </p:cNvSpPr>
-          <p:nvPr>
-            <p:ph type="title"/>
-          </p:nvPr>
-        </p:nvSpPr>
-        <p:spPr/>
-        <p:txBody>
-          <a:bodyPr/>
-          <a:lstStyle/>
-          <a:p>
-            <a:r>
-              <a:rPr lang="ja-JP" altLang="en-US"/>
-              <a:t>網路調查的非機率抽樣</a:t>
-            </a:r>
-            <a:endParaRPr lang="en-US" dirty="0"/>
-          </a:p>
-        </p:txBody>
-      </p:sp>
-      <p:sp>
-        <p:nvSpPr>
-          <p:cNvPr id="3" name="Content Placeholder 2">
-            <a:extLst>
-              <a:ext uri="{FF2B5EF4-FFF2-40B4-BE49-F238E27FC236}">
-                <a16:creationId xmlns:a16="http://schemas.microsoft.com/office/drawing/2014/main" id="{4F08E529-29DD-AB2C-94BF-694DBD41AB6D}"/>
-              </a:ext>
-            </a:extLst>
-          </p:cNvPr>
-          <p:cNvSpPr>
-            <a:spLocks noGrp="1"/>
-          </p:cNvSpPr>
-          <p:nvPr>
-            <p:ph idx="1"/>
-          </p:nvPr>
-        </p:nvSpPr>
-        <p:spPr/>
-        <p:txBody>
-          <a:bodyPr>
-            <a:normAutofit fontScale="85000" lnSpcReduction="10000"/>
-          </a:bodyPr>
-          <a:lstStyle/>
-          <a:p>
-            <a:pPr>
-              <a:lnSpc>
-                <a:spcPct val="150000"/>
-              </a:lnSpc>
-              <a:buFont typeface="Wingdings" pitchFamily="2" charset="2"/>
-              <a:buChar char="l"/>
-            </a:pPr>
-            <a:r>
-              <a:rPr lang="ja-JP" altLang="en-US" sz="2000"/>
-              <a:t>自願參與偏差 </a:t>
-            </a:r>
-            <a:r>
-              <a:rPr lang="en-US" altLang="ja-JP" sz="2000" dirty="0"/>
-              <a:t>(Self-Selection Bias)</a:t>
-            </a:r>
-            <a:r>
-              <a:rPr lang="ja-JP" altLang="en-US" sz="2000"/>
-              <a:t>：由對該主題感興趣、有強烈意見，或單純想領取獎勵的人自行決定加入。</a:t>
-            </a:r>
-            <a:endParaRPr lang="en-US" altLang="ja-JP" sz="2000" dirty="0"/>
-          </a:p>
-          <a:p>
-            <a:pPr>
-              <a:lnSpc>
-                <a:spcPct val="150000"/>
-              </a:lnSpc>
-              <a:buFont typeface="Wingdings" pitchFamily="2" charset="2"/>
-              <a:buChar char="l"/>
-            </a:pPr>
-            <a:r>
-              <a:rPr lang="ja-JP" altLang="en-US" sz="2000"/>
-              <a:t>涵蓋誤差 </a:t>
-            </a:r>
-            <a:r>
-              <a:rPr lang="en-US" altLang="ja-JP" sz="2000" dirty="0"/>
-              <a:t>(Coverage Error)</a:t>
-            </a:r>
-            <a:r>
-              <a:rPr lang="ja-JP" altLang="en-US" sz="2000"/>
-              <a:t>：並非所有人都有同等的機會上網或看到調查連結。例如高齡族群、低收入者的上網頻率較低。</a:t>
-            </a:r>
-            <a:endParaRPr lang="en-US" altLang="ja-JP" sz="2000" dirty="0"/>
-          </a:p>
-          <a:p>
-            <a:pPr>
-              <a:lnSpc>
-                <a:spcPct val="150000"/>
-              </a:lnSpc>
-              <a:buFont typeface="Wingdings" pitchFamily="2" charset="2"/>
-              <a:buChar char="l"/>
-            </a:pPr>
-            <a:r>
-              <a:rPr lang="ja-JP" altLang="en-US" sz="2000"/>
-              <a:t>非隨機的「便利性」：研究者通常將連結發布在自己能觸及的社群媒體、論壇或 </a:t>
-            </a:r>
-            <a:r>
-              <a:rPr lang="en-US" altLang="ja-JP" sz="2000" dirty="0"/>
-              <a:t>LINE </a:t>
-            </a:r>
-            <a:r>
-              <a:rPr lang="ja-JP" altLang="en-US" sz="2000"/>
-              <a:t>群組中。受限於研究者的「同溫層」。</a:t>
-            </a:r>
-            <a:endParaRPr lang="en-US" altLang="ja-JP" sz="2000" dirty="0"/>
-          </a:p>
-          <a:p>
-            <a:pPr>
-              <a:lnSpc>
-                <a:spcPct val="150000"/>
-              </a:lnSpc>
-              <a:buFont typeface="Wingdings" pitchFamily="2" charset="2"/>
-              <a:buChar char="l"/>
-            </a:pPr>
-            <a:r>
-              <a:rPr lang="ja-JP" altLang="en-US" sz="2000"/>
-              <a:t>樣本性質難以驗證：</a:t>
-            </a:r>
-          </a:p>
-          <a:p>
-            <a:pPr>
-              <a:lnSpc>
-                <a:spcPct val="150000"/>
-              </a:lnSpc>
-              <a:buFont typeface="Courier New" panose="02070309020205020404" pitchFamily="49" charset="0"/>
-              <a:buChar char="o"/>
-            </a:pPr>
-            <a:r>
-              <a:rPr lang="ja-JP" altLang="en-US" sz="2000"/>
-              <a:t>重複填答： 同一人可能為了獎品多次填寫。</a:t>
-            </a:r>
-          </a:p>
-          <a:p>
-            <a:pPr>
-              <a:lnSpc>
-                <a:spcPct val="150000"/>
-              </a:lnSpc>
-              <a:buFont typeface="Courier New" panose="02070309020205020404" pitchFamily="49" charset="0"/>
-              <a:buChar char="o"/>
-            </a:pPr>
-            <a:r>
-              <a:rPr lang="ja-JP" altLang="en-US" sz="2000"/>
-              <a:t>機器人與無效樣本： </a:t>
-            </a:r>
-            <a:r>
-              <a:rPr lang="en-US" altLang="ja-JP" sz="2000" dirty="0"/>
-              <a:t>AI </a:t>
-            </a:r>
-            <a:r>
-              <a:rPr lang="ja-JP" altLang="en-US" sz="2000"/>
-              <a:t>或自動化程式可能產生大量垃圾數據。</a:t>
-            </a:r>
-          </a:p>
-          <a:p>
-            <a:pPr>
-              <a:lnSpc>
-                <a:spcPct val="150000"/>
-              </a:lnSpc>
-              <a:buFont typeface="Courier New" panose="02070309020205020404" pitchFamily="49" charset="0"/>
-              <a:buChar char="o"/>
-            </a:pPr>
-            <a:r>
-              <a:rPr lang="ja-JP" altLang="en-US" sz="2000"/>
-              <a:t>身分造假： 受訪者可能為了領取獎勵而虛報符合填答問卷條件的年齡或職業。</a:t>
-            </a:r>
-            <a:endParaRPr lang="en-US" altLang="ja-JP" sz="2000" dirty="0"/>
-          </a:p>
-          <a:p>
-            <a:pPr>
-              <a:lnSpc>
-                <a:spcPct val="150000"/>
-              </a:lnSpc>
-              <a:buFont typeface="Wingdings" pitchFamily="2" charset="2"/>
-              <a:buChar char="l"/>
-            </a:pPr>
-            <a:endParaRPr lang="en-US" sz="2000" dirty="0"/>
-          </a:p>
-          <a:p>
-            <a:pPr>
-              <a:buFont typeface="Wingdings" pitchFamily="2" charset="2"/>
-              <a:buChar char="l"/>
-            </a:pPr>
-            <a:endParaRPr lang="en-US" dirty="0"/>
-          </a:p>
-        </p:txBody>
-      </p:sp>
-      <p:sp>
-        <p:nvSpPr>
-          <p:cNvPr id="4" name="Slide Number Placeholder 3">
-            <a:extLst>
-              <a:ext uri="{FF2B5EF4-FFF2-40B4-BE49-F238E27FC236}">
-                <a16:creationId xmlns:a16="http://schemas.microsoft.com/office/drawing/2014/main" id="{C98085D9-FBDD-C940-3F14-8994BAC36532}"/>
-              </a:ext>
-            </a:extLst>
-          </p:cNvPr>
-          <p:cNvSpPr>
-            <a:spLocks noGrp="1"/>
-          </p:cNvSpPr>
-          <p:nvPr>
-            <p:ph type="sldNum" sz="quarter" idx="12"/>
-          </p:nvPr>
-        </p:nvSpPr>
-        <p:spPr/>
-        <p:txBody>
-          <a:bodyPr/>
-          <a:lstStyle/>
-          <a:p>
-            <a:fld id="{34E21383-B02B-694B-B2AD-A967203CDE86}" type="slidenum">
-              <a:rPr lang="en-US" smtClean="0"/>
-              <a:t>15</a:t>
-            </a:fld>
-            <a:endParaRPr lang="en-US"/>
-          </a:p>
-        </p:txBody>
-      </p:sp>
-    </p:spTree>
-    <p:extLst>
-      <p:ext uri="{BB962C8B-B14F-4D97-AF65-F5344CB8AC3E}">
-        <p14:creationId xmlns:p14="http://schemas.microsoft.com/office/powerpoint/2010/main" val="1700727804"/>
-      </p:ext>
-    </p:extLst>
-  </p:cSld>
-  <p:clrMapOvr>
-    <a:masterClrMapping/>
-  </p:clrMapOvr>
-</p:sld>
-</file>
-
-<file path=ppt/slides/slide16.xml><?xml version="1.0" encoding="utf-8"?>
-<p:sld xmlns:a="http://schemas.openxmlformats.org/drawingml/2006/main" xmlns:r="http://schemas.openxmlformats.org/officeDocument/2006/relationships" xmlns:p="http://schemas.openxmlformats.org/presentationml/2006/main">
-  <p:cSld>
-    <p:spTree>
-      <p:nvGrpSpPr>
-        <p:cNvPr id="1" name=""/>
-        <p:cNvGrpSpPr/>
-        <p:nvPr/>
-      </p:nvGrpSpPr>
-      <p:grpSpPr>
-        <a:xfrm>
-          <a:off x="0" y="0"/>
-          <a:ext cx="0" cy="0"/>
-          <a:chOff x="0" y="0"/>
-          <a:chExt cx="0" cy="0"/>
-        </a:xfrm>
-      </p:grpSpPr>
-      <p:sp>
-        <p:nvSpPr>
-          <p:cNvPr id="2" name="Title 1">
-            <a:extLst>
-              <a:ext uri="{FF2B5EF4-FFF2-40B4-BE49-F238E27FC236}">
-                <a16:creationId xmlns:a16="http://schemas.microsoft.com/office/drawing/2014/main" id="{ED266BC7-D370-DB3B-3586-0BB7D3212D0F}"/>
-              </a:ext>
-            </a:extLst>
-          </p:cNvPr>
-          <p:cNvSpPr>
-            <a:spLocks noGrp="1"/>
-          </p:cNvSpPr>
-          <p:nvPr>
-            <p:ph type="title"/>
-          </p:nvPr>
-        </p:nvSpPr>
-        <p:spPr/>
-        <p:txBody>
-          <a:bodyPr/>
-          <a:lstStyle/>
-          <a:p>
-            <a:r>
-              <a:rPr lang="ja-JP" altLang="en-US"/>
-              <a:t>如何修正網路調查的非機率抽樣？</a:t>
-            </a:r>
-            <a:endParaRPr lang="en-US" dirty="0"/>
-          </a:p>
-        </p:txBody>
-      </p:sp>
-      <mc:AlternateContent xmlns:mc="http://schemas.openxmlformats.org/markup-compatibility/2006" xmlns:a14="http://schemas.microsoft.com/office/drawing/2010/main">
-        <mc:Choice Requires="a14">
+      <mc:AlternateContent xmlns:mc="http://schemas.openxmlformats.org/markup-compatibility/2006">
+        <mc:Choice xmlns:a14="http://schemas.microsoft.com/office/drawing/2010/main" Requires="a14">
           <p:sp>
             <p:nvSpPr>
               <p:cNvPr id="3" name="Content Placeholder 2">
                 <a:extLst>
                   <a:ext uri="{FF2B5EF4-FFF2-40B4-BE49-F238E27FC236}">
-                    <a16:creationId xmlns:a16="http://schemas.microsoft.com/office/drawing/2014/main" id="{4F08E529-29DD-AB2C-94BF-694DBD41AB6D}"/>
+                    <a16:creationId xmlns:a16="http://schemas.microsoft.com/office/drawing/2014/main" id="{659579A7-244A-1B4E-A6EF-9B1F87EA3242}"/>
                   </a:ext>
                 </a:extLst>
               </p:cNvPr>
@@ -6538,20 +7595,20 @@
                   <a:lnSpc>
                     <a:spcPct val="150000"/>
                   </a:lnSpc>
-                  <a:buFont typeface="Wingdings" pitchFamily="2" charset="2"/>
-                  <a:buChar char="q"/>
                 </a:pPr>
                 <a:r>
-                  <a:rPr lang="ja-JP" altLang="en-US" sz="2000"/>
-                  <a:t>配額抽樣 </a:t>
-                </a:r>
-                <a:r>
-                  <a:rPr lang="en-US" altLang="ja-JP" sz="2000" dirty="0"/>
-                  <a:t>(Quota Sampling)</a:t>
-                </a:r>
-                <a:r>
-                  <a:rPr lang="ja-JP" altLang="en-US" sz="2000"/>
-                  <a:t>： 如果資料庫中有足夠的樣本，可以設定性別、年齡比例，一旦某族群收滿足夠的樣本，就停止發送給受訪者。</a:t>
+                  <a:rPr lang="en-US" sz="2200" dirty="0">
+                    <a:effectLst/>
+                    <a:latin typeface="Google Sans Text"/>
+                  </a:rPr>
+                  <a:t>H-T </a:t>
+                </a:r>
+                <a:r>
+                  <a:rPr lang="ja-JP" altLang="en-US" sz="2200">
+                    <a:effectLst/>
+                    <a:latin typeface="Google Sans Text"/>
+                  </a:rPr>
+                  <a:t>估計值的穩定性取決於兩件事：</a:t>
                 </a:r>
               </a:p>
               <a:p>
@@ -6559,373 +7616,221 @@
                   <a:lnSpc>
                     <a:spcPct val="150000"/>
                   </a:lnSpc>
-                  <a:buFont typeface="Wingdings" pitchFamily="2" charset="2"/>
-                  <a:buChar char="q"/>
+                  <a:buFont typeface="+mj-lt"/>
+                  <a:buAutoNum type="arabicPeriod"/>
                 </a:pPr>
                 <a:r>
-                  <a:rPr lang="ja-JP" altLang="en-US" sz="2000"/>
-                  <a:t>加權校正 </a:t>
-                </a:r>
-                <a:r>
-                  <a:rPr lang="en-US" altLang="ja-JP" sz="2000" dirty="0"/>
-                  <a:t>(Weighting)</a:t>
-                </a:r>
-                <a:r>
-                  <a:rPr lang="ja-JP" altLang="en-US" sz="2000"/>
-                  <a:t>： 根據人口普查數據，對受訪者進行事後數學調整。</a:t>
-                </a:r>
-                <a:endParaRPr lang="en-US" altLang="ja-JP" sz="2000" dirty="0"/>
+                  <a:rPr lang="ja-JP" altLang="en-US" sz="2200" b="1">
+                    <a:effectLst/>
+                    <a:latin typeface="PMingLiU" panose="02020500000000000000" pitchFamily="18" charset="-120"/>
+                    <a:ea typeface="PMingLiU" panose="02020500000000000000" pitchFamily="18" charset="-120"/>
+                  </a:rPr>
+                  <a:t>個體權重的大小 </a:t>
+                </a:r>
+                <a:r>
+                  <a:rPr lang="en-US" altLang="ja-JP" sz="2200" dirty="0">
+                    <a:effectLst/>
+                    <a:latin typeface="PMingLiU" panose="02020500000000000000" pitchFamily="18" charset="-120"/>
+                    <a:ea typeface="PMingLiU" panose="02020500000000000000" pitchFamily="18" charset="-120"/>
+                  </a:rPr>
+                  <a:t>(</a:t>
+                </a:r>
+                <a14:m>
+                  <m:oMath xmlns:m="http://schemas.openxmlformats.org/officeDocument/2006/math">
+                    <m:sSub>
+                      <m:sSubPr>
+                        <m:ctrlPr>
+                          <a:rPr lang="en-US" altLang="ja-JP" sz="2200" i="1" smtClean="0">
+                            <a:effectLst/>
+                            <a:latin typeface="Cambria Math" panose="02040503050406030204" pitchFamily="18" charset="0"/>
+                            <a:ea typeface="PMingLiU" panose="02020500000000000000" pitchFamily="18" charset="-120"/>
+                          </a:rPr>
+                        </m:ctrlPr>
+                      </m:sSubPr>
+                      <m:e>
+                        <m:r>
+                          <a:rPr lang="en-US" altLang="ja-JP" sz="2200" b="0" i="1" smtClean="0">
+                            <a:effectLst/>
+                            <a:latin typeface="Cambria Math" panose="02040503050406030204" pitchFamily="18" charset="0"/>
+                            <a:ea typeface="Cambria Math" panose="02040503050406030204" pitchFamily="18" charset="0"/>
+                          </a:rPr>
+                          <m:t>𝜋</m:t>
+                        </m:r>
+                      </m:e>
+                      <m:sub>
+                        <m:r>
+                          <a:rPr lang="en-US" altLang="ja-JP" sz="2200" b="0" i="1" smtClean="0">
+                            <a:effectLst/>
+                            <a:latin typeface="Cambria Math" panose="02040503050406030204" pitchFamily="18" charset="0"/>
+                            <a:ea typeface="PMingLiU" panose="02020500000000000000" pitchFamily="18" charset="-120"/>
+                          </a:rPr>
+                          <m:t>𝑘</m:t>
+                        </m:r>
+                      </m:sub>
+                    </m:sSub>
+                  </m:oMath>
+                </a14:m>
+                <a:r>
+                  <a:rPr lang="en-US" sz="2200" dirty="0">
+                    <a:effectLst/>
+                    <a:latin typeface="PMingLiU" panose="02020500000000000000" pitchFamily="18" charset="-120"/>
+                    <a:ea typeface="PMingLiU" panose="02020500000000000000" pitchFamily="18" charset="-120"/>
+                  </a:rPr>
+                  <a:t>, </a:t>
+                </a:r>
+                <a14:m>
+                  <m:oMath xmlns:m="http://schemas.openxmlformats.org/officeDocument/2006/math">
+                    <m:sSub>
+                      <m:sSubPr>
+                        <m:ctrlPr>
+                          <a:rPr lang="en-US" sz="2200" i="1" smtClean="0">
+                            <a:effectLst/>
+                            <a:latin typeface="Cambria Math" panose="02040503050406030204" pitchFamily="18" charset="0"/>
+                            <a:ea typeface="PMingLiU" panose="02020500000000000000" pitchFamily="18" charset="-120"/>
+                          </a:rPr>
+                        </m:ctrlPr>
+                      </m:sSubPr>
+                      <m:e>
+                        <m:r>
+                          <a:rPr lang="en-US" sz="2200" b="0" i="1" smtClean="0">
+                            <a:effectLst/>
+                            <a:latin typeface="Cambria Math" panose="02040503050406030204" pitchFamily="18" charset="0"/>
+                            <a:ea typeface="Cambria Math" panose="02040503050406030204" pitchFamily="18" charset="0"/>
+                          </a:rPr>
+                          <m:t>𝜋</m:t>
+                        </m:r>
+                      </m:e>
+                      <m:sub>
+                        <m:r>
+                          <a:rPr lang="en-US" sz="2200" b="0" i="1" smtClean="0">
+                            <a:effectLst/>
+                            <a:latin typeface="Cambria Math" panose="02040503050406030204" pitchFamily="18" charset="0"/>
+                            <a:ea typeface="PMingLiU" panose="02020500000000000000" pitchFamily="18" charset="-120"/>
+                          </a:rPr>
+                          <m:t>𝑙</m:t>
+                        </m:r>
+                      </m:sub>
+                    </m:sSub>
+                  </m:oMath>
+                </a14:m>
+                <a:r>
+                  <a:rPr lang="en-US" sz="2200" dirty="0">
+                    <a:effectLst/>
+                    <a:latin typeface="PMingLiU" panose="02020500000000000000" pitchFamily="18" charset="-120"/>
+                    <a:ea typeface="PMingLiU" panose="02020500000000000000" pitchFamily="18" charset="-120"/>
+                  </a:rPr>
+                  <a:t>)：</a:t>
+                </a:r>
+                <a:r>
+                  <a:rPr lang="ja-JP" altLang="en-US" sz="2200">
+                    <a:effectLst/>
+                    <a:latin typeface="Google Sans Text"/>
+                  </a:rPr>
+                  <a:t>如果某個人的中選機率</a:t>
+                </a:r>
+                <a:r>
+                  <a:rPr lang="en-US" sz="2200" dirty="0">
+                    <a:effectLst/>
+                    <a:latin typeface="Google Sans Text"/>
+                  </a:rPr>
+                  <a:t> </a:t>
+                </a:r>
+                <a:r>
+                  <a:rPr lang="ja-JP" altLang="en-US" sz="2200">
+                    <a:effectLst/>
+                    <a:latin typeface="Google Sans Text"/>
+                  </a:rPr>
+                  <a:t>非常小（窮人），權重會變大。這會直接增加變異數。這就是為什麼「抽到窮人會跟母體真相差很大」的數學原因。</a:t>
+                </a:r>
               </a:p>
               <a:p>
                 <a:pPr>
                   <a:lnSpc>
                     <a:spcPct val="150000"/>
                   </a:lnSpc>
-                  <a:buFont typeface="Wingdings" pitchFamily="2" charset="2"/>
-                  <a:buChar char="q"/>
+                  <a:buFont typeface="+mj-lt"/>
+                  <a:buAutoNum type="arabicPeriod"/>
                 </a:pPr>
                 <a:r>
-                  <a:rPr lang="ja-JP" altLang="en-US" sz="2000"/>
-                  <a:t>例如：如果用電話訪問招募受訪者，然後寄同意書給受訪者，最後寄問卷給受訪者。這一套過程，有三次的選擇偏誤。</a:t>
-                </a:r>
-                <a:endParaRPr lang="en-US" altLang="ja-JP" sz="2000" dirty="0"/>
-              </a:p>
-              <a:p>
-                <a:pPr marL="742950" lvl="1" indent="-285750">
-                  <a:buFont typeface="Arial" panose="020B0604020202020204" pitchFamily="34" charset="0"/>
-                  <a:buChar char="•"/>
-                </a:pPr>
+                  <a:rPr lang="ja-JP" altLang="en-US" sz="2200" b="1">
+                    <a:effectLst/>
+                    <a:latin typeface="PMingLiU" panose="02020500000000000000" pitchFamily="18" charset="-120"/>
+                    <a:ea typeface="PMingLiU" panose="02020500000000000000" pitchFamily="18" charset="-120"/>
+                  </a:rPr>
+                  <a:t>抽樣設計的策略 </a:t>
+                </a:r>
+                <a:r>
+                  <a:rPr lang="en-US" altLang="ja-JP" sz="2200" dirty="0">
+                    <a:effectLst/>
+                    <a:latin typeface="PMingLiU" panose="02020500000000000000" pitchFamily="18" charset="-120"/>
+                    <a:ea typeface="PMingLiU" panose="02020500000000000000" pitchFamily="18" charset="-120"/>
+                  </a:rPr>
+                  <a:t>(</a:t>
+                </a:r>
                 <a14:m>
                   <m:oMath xmlns:m="http://schemas.openxmlformats.org/officeDocument/2006/math">
                     <m:sSub>
                       <m:sSubPr>
                         <m:ctrlPr>
-                          <a:rPr lang="en-US" i="1" smtClean="0">
-                            <a:latin typeface="Cambria Math" panose="02040503050406030204" pitchFamily="18" charset="0"/>
+                          <a:rPr lang="en-US" altLang="ja-JP" sz="2200" i="1" smtClean="0">
+                            <a:effectLst/>
+                            <a:latin typeface="Cambria Math" panose="02040503050406030204" pitchFamily="18" charset="0"/>
+                            <a:ea typeface="PMingLiU" panose="02020500000000000000" pitchFamily="18" charset="-120"/>
                           </a:rPr>
                         </m:ctrlPr>
                       </m:sSubPr>
                       <m:e>
                         <m:r>
-                          <a:rPr lang="en-US" b="0" i="1" smtClean="0">
-                            <a:latin typeface="Cambria Math" panose="02040503050406030204" pitchFamily="18" charset="0"/>
-                          </a:rPr>
-                          <m:t>𝑆</m:t>
+                          <a:rPr lang="en-US" altLang="ja-JP" sz="2200" i="1" smtClean="0">
+                            <a:effectLst/>
+                            <a:latin typeface="Cambria Math" panose="02040503050406030204" pitchFamily="18" charset="0"/>
+                            <a:ea typeface="Cambria Math" panose="02040503050406030204" pitchFamily="18" charset="0"/>
+                          </a:rPr>
+                          <m:t>𝜋</m:t>
                         </m:r>
                       </m:e>
                       <m:sub>
                         <m:r>
-                          <a:rPr lang="en-US" b="0" i="1" smtClean="0">
-                            <a:latin typeface="Cambria Math" panose="02040503050406030204" pitchFamily="18" charset="0"/>
-                          </a:rPr>
-                          <m:t>𝑖</m:t>
+                          <a:rPr lang="en-US" altLang="ja-JP" sz="2200" b="0" i="1" smtClean="0">
+                            <a:effectLst/>
+                            <a:latin typeface="Cambria Math" panose="02040503050406030204" pitchFamily="18" charset="0"/>
+                            <a:ea typeface="PMingLiU" panose="02020500000000000000" pitchFamily="18" charset="-120"/>
+                          </a:rPr>
+                          <m:t>𝑘𝑙</m:t>
                         </m:r>
                       </m:sub>
                     </m:sSub>
-                    <m:r>
-                      <a:rPr lang="en-US" b="0" i="1" smtClean="0">
-                        <a:latin typeface="Cambria Math" panose="02040503050406030204" pitchFamily="18" charset="0"/>
-                      </a:rPr>
-                      <m:t>=1</m:t>
-                    </m:r>
                   </m:oMath>
                 </a14:m>
                 <a:r>
-                  <a:rPr lang="en-US" dirty="0"/>
-                  <a:t>：</a:t>
-                </a:r>
-                <a:r>
-                  <a:rPr lang="ja-JP" altLang="en-US"/>
-                  <a:t>電話樣本「被抽到且完成訪問」（</a:t>
-                </a:r>
-                <a:r>
-                  <a:rPr lang="en-US" dirty="0"/>
-                  <a:t>reference sample）</a:t>
+                  <a:rPr lang="en-US" sz="2200" dirty="0">
+                    <a:effectLst/>
+                    <a:latin typeface="PMingLiU" panose="02020500000000000000" pitchFamily="18" charset="-120"/>
+                    <a:ea typeface="PMingLiU" panose="02020500000000000000" pitchFamily="18" charset="-120"/>
+                  </a:rPr>
+                  <a:t>)：</a:t>
+                </a:r>
+                <a:r>
+                  <a:rPr lang="ja-JP" altLang="en-US" sz="2200">
+                    <a:effectLst/>
+                    <a:latin typeface="Google Sans Text"/>
+                  </a:rPr>
+                  <a:t>如果設計一種抽樣方式，使得數值相似的個體（例如兩個都是富人）盡量不要同時被抽中（負相關），那麼這個公式算出來的變異數就會變小，調查就更精確。</a:t>
                 </a:r>
               </a:p>
               <a:p>
-                <a:pPr marL="742950" lvl="1" indent="-285750">
-                  <a:buFont typeface="Arial" panose="020B0604020202020204" pitchFamily="34" charset="0"/>
-                  <a:buChar char="•"/>
-                </a:pPr>
-                <a14:m>
-                  <m:oMath xmlns:m="http://schemas.openxmlformats.org/officeDocument/2006/math">
-                    <m:sSub>
-                      <m:sSubPr>
-                        <m:ctrlPr>
-                          <a:rPr lang="en-US" i="1" smtClean="0">
-                            <a:latin typeface="Cambria Math" panose="02040503050406030204" pitchFamily="18" charset="0"/>
-                          </a:rPr>
-                        </m:ctrlPr>
-                      </m:sSubPr>
-                      <m:e>
-                        <m:r>
-                          <a:rPr lang="en-US" b="0" i="1" smtClean="0">
-                            <a:latin typeface="Cambria Math" panose="02040503050406030204" pitchFamily="18" charset="0"/>
-                          </a:rPr>
-                          <m:t>𝐽</m:t>
-                        </m:r>
-                      </m:e>
-                      <m:sub>
-                        <m:r>
-                          <a:rPr lang="en-US" b="0" i="1" smtClean="0">
-                            <a:latin typeface="Cambria Math" panose="02040503050406030204" pitchFamily="18" charset="0"/>
-                          </a:rPr>
-                          <m:t>𝑖</m:t>
-                        </m:r>
-                      </m:sub>
-                    </m:sSub>
-                    <m:r>
-                      <a:rPr lang="en-US" b="0" i="1" smtClean="0">
-                        <a:latin typeface="Cambria Math" panose="02040503050406030204" pitchFamily="18" charset="0"/>
-                      </a:rPr>
-                      <m:t>=1 </m:t>
-                    </m:r>
-                  </m:oMath>
-                </a14:m>
-                <a:r>
-                  <a:rPr lang="en-US" dirty="0"/>
-                  <a:t>：</a:t>
-                </a:r>
-                <a:r>
-                  <a:rPr lang="ja-JP" altLang="en-US"/>
-                  <a:t>在電話訪問後「同意加入 </a:t>
-                </a:r>
-                <a:r>
-                  <a:rPr lang="en-US" dirty="0"/>
-                  <a:t>panel」</a:t>
-                </a:r>
-              </a:p>
-              <a:p>
-                <a:pPr marL="742950" lvl="1" indent="-285750">
-                  <a:buFont typeface="Arial" panose="020B0604020202020204" pitchFamily="34" charset="0"/>
-                  <a:buChar char="•"/>
-                </a:pPr>
-                <a14:m>
-                  <m:oMath xmlns:m="http://schemas.openxmlformats.org/officeDocument/2006/math">
-                    <m:sSub>
-                      <m:sSubPr>
-                        <m:ctrlPr>
-                          <a:rPr lang="en-US" i="1" smtClean="0">
-                            <a:latin typeface="Cambria Math" panose="02040503050406030204" pitchFamily="18" charset="0"/>
-                          </a:rPr>
-                        </m:ctrlPr>
-                      </m:sSubPr>
-                      <m:e>
-                        <m:r>
-                          <a:rPr lang="en-US" b="0" i="1" smtClean="0">
-                            <a:latin typeface="Cambria Math" panose="02040503050406030204" pitchFamily="18" charset="0"/>
-                          </a:rPr>
-                          <m:t>𝑅</m:t>
-                        </m:r>
-                      </m:e>
-                      <m:sub>
-                        <m:r>
-                          <a:rPr lang="en-US" b="0" i="1" smtClean="0">
-                            <a:latin typeface="Cambria Math" panose="02040503050406030204" pitchFamily="18" charset="0"/>
-                          </a:rPr>
-                          <m:t>𝑖</m:t>
-                        </m:r>
-                      </m:sub>
-                    </m:sSub>
-                    <m:r>
-                      <a:rPr lang="en-US" b="0" i="1" smtClean="0">
-                        <a:latin typeface="Cambria Math" panose="02040503050406030204" pitchFamily="18" charset="0"/>
-                      </a:rPr>
-                      <m:t>=1 </m:t>
-                    </m:r>
-                  </m:oMath>
-                </a14:m>
-                <a:r>
-                  <a:rPr lang="en-US" dirty="0"/>
-                  <a:t>：</a:t>
-                </a:r>
-                <a:r>
-                  <a:rPr lang="ja-JP" altLang="en-US"/>
-                  <a:t>在同意加入後「實際完成線上問卷」</a:t>
-                </a:r>
-              </a:p>
-              <a:p>
-                <a:r>
-                  <a:rPr lang="ja-JP" altLang="en-US" sz="2100"/>
-                  <a:t>最後資料的集合是：</a:t>
-                </a:r>
-                <a14:m>
-                  <m:oMath xmlns:m="http://schemas.openxmlformats.org/officeDocument/2006/math">
-                    <m:d>
-                      <m:dPr>
-                        <m:begChr m:val="{"/>
-                        <m:endChr m:val="}"/>
-                        <m:ctrlPr>
-                          <a:rPr lang="en-US" altLang="ja-JP" sz="2100" i="1" smtClean="0">
-                            <a:latin typeface="Cambria Math" panose="02040503050406030204" pitchFamily="18" charset="0"/>
-                          </a:rPr>
-                        </m:ctrlPr>
-                      </m:dPr>
-                      <m:e>
-                        <m:r>
-                          <a:rPr lang="en-US" altLang="ja-JP" sz="2100" b="0" i="1" smtClean="0">
-                            <a:latin typeface="Cambria Math" panose="02040503050406030204" pitchFamily="18" charset="0"/>
-                          </a:rPr>
-                          <m:t>𝑖</m:t>
-                        </m:r>
-                        <m:r>
-                          <a:rPr lang="en-US" altLang="ja-JP" sz="2100" b="0" i="1" smtClean="0">
-                            <a:latin typeface="Cambria Math" panose="02040503050406030204" pitchFamily="18" charset="0"/>
-                          </a:rPr>
-                          <m:t>:</m:t>
-                        </m:r>
-                        <m:sSub>
-                          <m:sSubPr>
-                            <m:ctrlPr>
-                              <a:rPr lang="en-US" sz="2400" i="1">
-                                <a:latin typeface="Cambria Math" panose="02040503050406030204" pitchFamily="18" charset="0"/>
-                              </a:rPr>
-                            </m:ctrlPr>
-                          </m:sSubPr>
-                          <m:e>
-                            <m:r>
-                              <a:rPr lang="en-US" sz="2400" i="1">
-                                <a:latin typeface="Cambria Math" panose="02040503050406030204" pitchFamily="18" charset="0"/>
-                              </a:rPr>
-                              <m:t>𝑆</m:t>
-                            </m:r>
-                          </m:e>
-                          <m:sub>
-                            <m:r>
-                              <a:rPr lang="en-US" sz="2400" i="1">
-                                <a:latin typeface="Cambria Math" panose="02040503050406030204" pitchFamily="18" charset="0"/>
-                              </a:rPr>
-                              <m:t>𝑖</m:t>
-                            </m:r>
-                          </m:sub>
-                        </m:sSub>
-                        <m:r>
-                          <a:rPr lang="en-US" sz="2400" i="1">
-                            <a:latin typeface="Cambria Math" panose="02040503050406030204" pitchFamily="18" charset="0"/>
-                          </a:rPr>
-                          <m:t>=1</m:t>
-                        </m:r>
-                        <m:r>
-                          <a:rPr lang="en-US" sz="2400" b="0" i="1" smtClean="0">
-                            <a:latin typeface="Cambria Math" panose="02040503050406030204" pitchFamily="18" charset="0"/>
-                          </a:rPr>
-                          <m:t>,</m:t>
-                        </m:r>
-                        <m:sSub>
-                          <m:sSubPr>
-                            <m:ctrlPr>
-                              <a:rPr lang="en-US" sz="2400" i="1">
-                                <a:latin typeface="Cambria Math" panose="02040503050406030204" pitchFamily="18" charset="0"/>
-                              </a:rPr>
-                            </m:ctrlPr>
-                          </m:sSubPr>
-                          <m:e>
-                            <m:r>
-                              <a:rPr lang="en-US" sz="2400" b="0" i="1" smtClean="0">
-                                <a:latin typeface="Cambria Math" panose="02040503050406030204" pitchFamily="18" charset="0"/>
-                              </a:rPr>
-                              <m:t>𝐽</m:t>
-                            </m:r>
-                          </m:e>
-                          <m:sub>
-                            <m:r>
-                              <a:rPr lang="en-US" sz="2400" i="1">
-                                <a:latin typeface="Cambria Math" panose="02040503050406030204" pitchFamily="18" charset="0"/>
-                              </a:rPr>
-                              <m:t>𝑖</m:t>
-                            </m:r>
-                          </m:sub>
-                        </m:sSub>
-                        <m:r>
-                          <a:rPr lang="en-US" sz="2400" i="1">
-                            <a:latin typeface="Cambria Math" panose="02040503050406030204" pitchFamily="18" charset="0"/>
-                          </a:rPr>
-                          <m:t>=1</m:t>
-                        </m:r>
-                        <m:r>
-                          <a:rPr lang="en-US" sz="2400" b="0" i="1" smtClean="0">
-                            <a:latin typeface="Cambria Math" panose="02040503050406030204" pitchFamily="18" charset="0"/>
-                          </a:rPr>
-                          <m:t>,</m:t>
-                        </m:r>
-                        <m:sSub>
-                          <m:sSubPr>
-                            <m:ctrlPr>
-                              <a:rPr lang="en-US" sz="2400" i="1">
-                                <a:latin typeface="Cambria Math" panose="02040503050406030204" pitchFamily="18" charset="0"/>
-                              </a:rPr>
-                            </m:ctrlPr>
-                          </m:sSubPr>
-                          <m:e>
-                            <m:r>
-                              <a:rPr lang="en-US" sz="2400" b="0" i="1" smtClean="0">
-                                <a:latin typeface="Cambria Math" panose="02040503050406030204" pitchFamily="18" charset="0"/>
-                              </a:rPr>
-                              <m:t>𝑅</m:t>
-                            </m:r>
-                          </m:e>
-                          <m:sub>
-                            <m:r>
-                              <a:rPr lang="en-US" sz="2400" i="1">
-                                <a:latin typeface="Cambria Math" panose="02040503050406030204" pitchFamily="18" charset="0"/>
-                              </a:rPr>
-                              <m:t>𝑖</m:t>
-                            </m:r>
-                          </m:sub>
-                        </m:sSub>
-                        <m:r>
-                          <a:rPr lang="en-US" sz="2400" i="1">
-                            <a:latin typeface="Cambria Math" panose="02040503050406030204" pitchFamily="18" charset="0"/>
-                          </a:rPr>
-                          <m:t>=1</m:t>
-                        </m:r>
-                      </m:e>
-                    </m:d>
-                  </m:oMath>
-                </a14:m>
-                <a:endParaRPr lang="ja-JP" altLang="en-US" sz="2100"/>
-              </a:p>
-              <a:p>
-                <a:endParaRPr lang="en-US" altLang="ja-JP" sz="2000" dirty="0"/>
-              </a:p>
-              <a:p>
-                <a:pPr>
-                  <a:lnSpc>
-                    <a:spcPct val="150000"/>
-                  </a:lnSpc>
-                  <a:buFont typeface="Wingdings" pitchFamily="2" charset="2"/>
-                  <a:buChar char="q"/>
-                </a:pPr>
-                <a:endParaRPr lang="en-US" altLang="ja-JP" sz="2000" dirty="0"/>
-              </a:p>
-              <a:p>
-                <a:pPr>
-                  <a:lnSpc>
-                    <a:spcPct val="150000"/>
-                  </a:lnSpc>
-                  <a:buFont typeface="Wingdings" pitchFamily="2" charset="2"/>
-                  <a:buChar char="l"/>
-                </a:pPr>
-                <a:endParaRPr lang="en-US" sz="2000" dirty="0"/>
-              </a:p>
-              <a:p>
-                <a:pPr>
-                  <a:buFont typeface="Wingdings" pitchFamily="2" charset="2"/>
-                  <a:buChar char="l"/>
-                </a:pPr>
                 <a:endParaRPr lang="en-US" dirty="0"/>
               </a:p>
             </p:txBody>
           </p:sp>
         </mc:Choice>
-        <mc:Fallback xmlns="">
+        <mc:Fallback>
           <p:sp>
             <p:nvSpPr>
               <p:cNvPr id="3" name="Content Placeholder 2">
                 <a:extLst>
                   <a:ext uri="{FF2B5EF4-FFF2-40B4-BE49-F238E27FC236}">
-                    <a16:creationId xmlns:a16="http://schemas.microsoft.com/office/drawing/2014/main" id="{4F08E529-29DD-AB2C-94BF-694DBD41AB6D}"/>
+                    <a16:creationId xmlns:a16="http://schemas.microsoft.com/office/drawing/2014/main" id="{659579A7-244A-1B4E-A6EF-9B1F87EA3242}"/>
                   </a:ext>
                 </a:extLst>
               </p:cNvPr>
@@ -6940,7 +7845,7 @@
               <a:blipFill>
                 <a:blip r:embed="rId2"/>
                 <a:stretch>
-                  <a:fillRect l="-603"/>
+                  <a:fillRect l="-724" r="-2895"/>
                 </a:stretch>
               </a:blipFill>
             </p:spPr>
@@ -6964,7 +7869,7 @@
           <p:cNvPr id="4" name="Slide Number Placeholder 3">
             <a:extLst>
               <a:ext uri="{FF2B5EF4-FFF2-40B4-BE49-F238E27FC236}">
-                <a16:creationId xmlns:a16="http://schemas.microsoft.com/office/drawing/2014/main" id="{C98085D9-FBDD-C940-3F14-8994BAC36532}"/>
+                <a16:creationId xmlns:a16="http://schemas.microsoft.com/office/drawing/2014/main" id="{49069B59-1518-4C2D-ABA7-09A5F449F58E}"/>
               </a:ext>
             </a:extLst>
           </p:cNvPr>
@@ -6982,7 +7887,7 @@
           <a:p>
             <a:fld id="{34E21383-B02B-694B-B2AD-A967203CDE86}" type="slidenum">
               <a:rPr lang="en-US" smtClean="0"/>
-              <a:t>16</a:t>
+              <a:t>13</a:t>
             </a:fld>
             <a:endParaRPr lang="en-US"/>
           </a:p>
@@ -6991,937 +7896,7 @@
     </p:spTree>
     <p:extLst>
       <p:ext uri="{BB962C8B-B14F-4D97-AF65-F5344CB8AC3E}">
-        <p14:creationId xmlns:p14="http://schemas.microsoft.com/office/powerpoint/2010/main" val="3836497003"/>
-      </p:ext>
-    </p:extLst>
-  </p:cSld>
-  <p:clrMapOvr>
-    <a:masterClrMapping/>
-  </p:clrMapOvr>
-</p:sld>
-</file>
-
-<file path=ppt/slides/slide17.xml><?xml version="1.0" encoding="utf-8"?>
-<p:sld xmlns:a="http://schemas.openxmlformats.org/drawingml/2006/main" xmlns:r="http://schemas.openxmlformats.org/officeDocument/2006/relationships" xmlns:p="http://schemas.openxmlformats.org/presentationml/2006/main">
-  <p:cSld>
-    <p:spTree>
-      <p:nvGrpSpPr>
-        <p:cNvPr id="1" name=""/>
-        <p:cNvGrpSpPr/>
-        <p:nvPr/>
-      </p:nvGrpSpPr>
-      <p:grpSpPr>
-        <a:xfrm>
-          <a:off x="0" y="0"/>
-          <a:ext cx="0" cy="0"/>
-          <a:chOff x="0" y="0"/>
-          <a:chExt cx="0" cy="0"/>
-        </a:xfrm>
-      </p:grpSpPr>
-      <p:sp>
-        <p:nvSpPr>
-          <p:cNvPr id="2" name="Title 1">
-            <a:extLst>
-              <a:ext uri="{FF2B5EF4-FFF2-40B4-BE49-F238E27FC236}">
-                <a16:creationId xmlns:a16="http://schemas.microsoft.com/office/drawing/2014/main" id="{AA343FC3-4047-4A6A-6B74-C624EA381675}"/>
-              </a:ext>
-            </a:extLst>
-          </p:cNvPr>
-          <p:cNvSpPr>
-            <a:spLocks noGrp="1"/>
-          </p:cNvSpPr>
-          <p:nvPr>
-            <p:ph type="title"/>
-          </p:nvPr>
-        </p:nvSpPr>
-        <p:spPr/>
-        <p:txBody>
-          <a:bodyPr/>
-          <a:lstStyle/>
-          <a:p>
-            <a:r>
-              <a:rPr lang="ja-JP" altLang="en-US"/>
-              <a:t>網路調查的</a:t>
-            </a:r>
-            <a:r>
-              <a:rPr lang="en-US" dirty="0" err="1"/>
-              <a:t>加權</a:t>
-            </a:r>
-            <a:endParaRPr lang="en-US" dirty="0"/>
-          </a:p>
-        </p:txBody>
-      </p:sp>
-      <mc:AlternateContent xmlns:mc="http://schemas.openxmlformats.org/markup-compatibility/2006" xmlns:a14="http://schemas.microsoft.com/office/drawing/2010/main">
-        <mc:Choice Requires="a14">
-          <p:sp>
-            <p:nvSpPr>
-              <p:cNvPr id="3" name="Content Placeholder 2">
-                <a:extLst>
-                  <a:ext uri="{FF2B5EF4-FFF2-40B4-BE49-F238E27FC236}">
-                    <a16:creationId xmlns:a16="http://schemas.microsoft.com/office/drawing/2014/main" id="{503CE2E6-2E15-4EE8-1671-5A91A471FFCA}"/>
-                  </a:ext>
-                </a:extLst>
-              </p:cNvPr>
-              <p:cNvSpPr>
-                <a:spLocks noGrp="1"/>
-              </p:cNvSpPr>
-              <p:nvPr>
-                <p:ph idx="1"/>
-              </p:nvPr>
-            </p:nvSpPr>
-            <p:spPr/>
-            <p:txBody>
-              <a:bodyPr>
-                <a:normAutofit/>
-              </a:bodyPr>
-              <a:lstStyle/>
-              <a:p>
-                <a:r>
-                  <a:rPr lang="ja-JP" altLang="en-US" sz="2400"/>
-                  <a:t>在電話樣本內，完成線上問卷的條件機率為：</a:t>
-                </a:r>
-                <a:endParaRPr lang="en-US" altLang="ja-JP" sz="2400" dirty="0"/>
-              </a:p>
-              <a:p>
-                <a14:m>
-                  <m:oMath xmlns:m="http://schemas.openxmlformats.org/officeDocument/2006/math">
-                    <m:sSub>
-                      <m:sSubPr>
-                        <m:ctrlPr>
-                          <a:rPr lang="en-US" altLang="ja-JP" sz="2400" i="1" smtClean="0">
-                            <a:latin typeface="Cambria Math" panose="02040503050406030204" pitchFamily="18" charset="0"/>
-                          </a:rPr>
-                        </m:ctrlPr>
-                      </m:sSubPr>
-                      <m:e>
-                        <m:r>
-                          <a:rPr lang="en-US" altLang="ja-JP" sz="2400" b="0" i="1" smtClean="0">
-                            <a:latin typeface="Cambria Math" panose="02040503050406030204" pitchFamily="18" charset="0"/>
-                          </a:rPr>
-                          <m:t>𝑝</m:t>
-                        </m:r>
-                      </m:e>
-                      <m:sub>
-                        <m:r>
-                          <a:rPr lang="en-US" altLang="ja-JP" sz="2400" b="0" i="1" smtClean="0">
-                            <a:latin typeface="Cambria Math" panose="02040503050406030204" pitchFamily="18" charset="0"/>
-                          </a:rPr>
-                          <m:t>𝐽𝑅</m:t>
-                        </m:r>
-                      </m:sub>
-                    </m:sSub>
-                    <m:d>
-                      <m:dPr>
-                        <m:ctrlPr>
-                          <a:rPr lang="en-US" altLang="ja-JP" sz="2400" b="0" i="1" smtClean="0">
-                            <a:latin typeface="Cambria Math" panose="02040503050406030204" pitchFamily="18" charset="0"/>
-                          </a:rPr>
-                        </m:ctrlPr>
-                      </m:dPr>
-                      <m:e>
-                        <m:r>
-                          <a:rPr lang="en-US" altLang="ja-JP" sz="2400" b="0" i="1" smtClean="0">
-                            <a:latin typeface="Cambria Math" panose="02040503050406030204" pitchFamily="18" charset="0"/>
-                          </a:rPr>
-                          <m:t>𝑋</m:t>
-                        </m:r>
-                      </m:e>
-                    </m:d>
-                    <m:r>
-                      <a:rPr lang="en-US" altLang="ja-JP" sz="2400" b="0" i="1" smtClean="0">
-                        <a:latin typeface="Cambria Math" panose="02040503050406030204" pitchFamily="18" charset="0"/>
-                      </a:rPr>
-                      <m:t>=</m:t>
-                    </m:r>
-                    <m:func>
-                      <m:funcPr>
-                        <m:ctrlPr>
-                          <a:rPr lang="en-US" altLang="ja-JP" sz="2400" b="0" i="1" smtClean="0">
-                            <a:latin typeface="Cambria Math" panose="02040503050406030204" pitchFamily="18" charset="0"/>
-                          </a:rPr>
-                        </m:ctrlPr>
-                      </m:funcPr>
-                      <m:fName>
-                        <m:r>
-                          <m:rPr>
-                            <m:sty m:val="p"/>
-                          </m:rPr>
-                          <a:rPr lang="en-US" altLang="ja-JP" sz="2400" b="0" i="0" smtClean="0">
-                            <a:latin typeface="Cambria Math" panose="02040503050406030204" pitchFamily="18" charset="0"/>
-                          </a:rPr>
-                          <m:t>Pr</m:t>
-                        </m:r>
-                      </m:fName>
-                      <m:e>
-                        <m:d>
-                          <m:dPr>
-                            <m:ctrlPr>
-                              <a:rPr lang="en-US" altLang="ja-JP" sz="2400" b="0" i="1" smtClean="0">
-                                <a:latin typeface="Cambria Math" panose="02040503050406030204" pitchFamily="18" charset="0"/>
-                              </a:rPr>
-                            </m:ctrlPr>
-                          </m:dPr>
-                          <m:e>
-                            <m:r>
-                              <a:rPr lang="en-US" altLang="ja-JP" sz="2400" b="0" i="1" smtClean="0">
-                                <a:latin typeface="Cambria Math" panose="02040503050406030204" pitchFamily="18" charset="0"/>
-                              </a:rPr>
-                              <m:t>𝐽</m:t>
-                            </m:r>
-                            <m:r>
-                              <a:rPr lang="en-US" altLang="ja-JP" sz="2400" b="0" i="1" smtClean="0">
-                                <a:latin typeface="Cambria Math" panose="02040503050406030204" pitchFamily="18" charset="0"/>
-                              </a:rPr>
-                              <m:t>=1,</m:t>
-                            </m:r>
-                            <m:r>
-                              <a:rPr lang="en-US" altLang="ja-JP" sz="2400" b="0" i="1" smtClean="0">
-                                <a:latin typeface="Cambria Math" panose="02040503050406030204" pitchFamily="18" charset="0"/>
-                              </a:rPr>
-                              <m:t>𝑅</m:t>
-                            </m:r>
-                            <m:r>
-                              <a:rPr lang="en-US" altLang="ja-JP" sz="2400" b="0" i="1" smtClean="0">
-                                <a:latin typeface="Cambria Math" panose="02040503050406030204" pitchFamily="18" charset="0"/>
-                              </a:rPr>
-                              <m:t>=1</m:t>
-                            </m:r>
-                          </m:e>
-                          <m:e>
-                            <m:r>
-                              <a:rPr lang="en-US" altLang="ja-JP" sz="2400" b="0" i="1" smtClean="0">
-                                <a:latin typeface="Cambria Math" panose="02040503050406030204" pitchFamily="18" charset="0"/>
-                              </a:rPr>
-                              <m:t>𝑋</m:t>
-                            </m:r>
-                            <m:r>
-                              <a:rPr lang="en-US" altLang="ja-JP" sz="2400" b="0" i="1" smtClean="0">
-                                <a:latin typeface="Cambria Math" panose="02040503050406030204" pitchFamily="18" charset="0"/>
-                              </a:rPr>
-                              <m:t>,</m:t>
-                            </m:r>
-                            <m:r>
-                              <a:rPr lang="en-US" altLang="ja-JP" sz="2400" b="0" i="1" smtClean="0">
-                                <a:latin typeface="Cambria Math" panose="02040503050406030204" pitchFamily="18" charset="0"/>
-                              </a:rPr>
-                              <m:t>𝑆</m:t>
-                            </m:r>
-                            <m:r>
-                              <a:rPr lang="en-US" altLang="ja-JP" sz="2400" b="0" i="1" smtClean="0">
-                                <a:latin typeface="Cambria Math" panose="02040503050406030204" pitchFamily="18" charset="0"/>
-                              </a:rPr>
-                              <m:t>=1</m:t>
-                            </m:r>
-                          </m:e>
-                        </m:d>
-                      </m:e>
-                    </m:func>
-                    <m:r>
-                      <a:rPr lang="en-US" altLang="ja-JP" sz="2400" b="0" i="1" smtClean="0">
-                        <a:latin typeface="Cambria Math" panose="02040503050406030204" pitchFamily="18" charset="0"/>
-                      </a:rPr>
-                      <m:t>=</m:t>
-                    </m:r>
-                    <m:sSub>
-                      <m:sSubPr>
-                        <m:ctrlPr>
-                          <a:rPr lang="en-US" altLang="ja-JP" sz="2400" b="0" i="1" smtClean="0">
-                            <a:latin typeface="Cambria Math" panose="02040503050406030204" pitchFamily="18" charset="0"/>
-                          </a:rPr>
-                        </m:ctrlPr>
-                      </m:sSubPr>
-                      <m:e>
-                        <m:r>
-                          <a:rPr lang="en-US" altLang="ja-JP" sz="2400" b="0" i="1" smtClean="0">
-                            <a:latin typeface="Cambria Math" panose="02040503050406030204" pitchFamily="18" charset="0"/>
-                          </a:rPr>
-                          <m:t>𝑝</m:t>
-                        </m:r>
-                      </m:e>
-                      <m:sub>
-                        <m:r>
-                          <a:rPr lang="en-US" altLang="ja-JP" sz="2400" b="0" i="1" smtClean="0">
-                            <a:latin typeface="Cambria Math" panose="02040503050406030204" pitchFamily="18" charset="0"/>
-                          </a:rPr>
-                          <m:t>𝐽</m:t>
-                        </m:r>
-                      </m:sub>
-                    </m:sSub>
-                    <m:r>
-                      <a:rPr lang="en-US" altLang="ja-JP" sz="2400" b="0" i="1" smtClean="0">
-                        <a:latin typeface="Cambria Math" panose="02040503050406030204" pitchFamily="18" charset="0"/>
-                      </a:rPr>
-                      <m:t>(</m:t>
-                    </m:r>
-                    <m:r>
-                      <a:rPr lang="en-US" altLang="ja-JP" sz="2400" b="0" i="1" smtClean="0">
-                        <a:latin typeface="Cambria Math" panose="02040503050406030204" pitchFamily="18" charset="0"/>
-                      </a:rPr>
-                      <m:t>𝑋</m:t>
-                    </m:r>
-                    <m:r>
-                      <a:rPr lang="en-US" altLang="ja-JP" sz="2400" b="0" i="1" smtClean="0">
-                        <a:latin typeface="Cambria Math" panose="02040503050406030204" pitchFamily="18" charset="0"/>
-                      </a:rPr>
-                      <m:t>)</m:t>
-                    </m:r>
-                    <m:sSub>
-                      <m:sSubPr>
-                        <m:ctrlPr>
-                          <a:rPr lang="en-US" altLang="ja-JP" sz="2400" b="0" i="1" smtClean="0">
-                            <a:latin typeface="Cambria Math" panose="02040503050406030204" pitchFamily="18" charset="0"/>
-                          </a:rPr>
-                        </m:ctrlPr>
-                      </m:sSubPr>
-                      <m:e>
-                        <m:r>
-                          <a:rPr lang="en-US" altLang="ja-JP" sz="2400" b="0" i="1" smtClean="0">
-                            <a:latin typeface="Cambria Math" panose="02040503050406030204" pitchFamily="18" charset="0"/>
-                          </a:rPr>
-                          <m:t>𝑝</m:t>
-                        </m:r>
-                      </m:e>
-                      <m:sub>
-                        <m:r>
-                          <a:rPr lang="en-US" altLang="ja-JP" sz="2400" b="0" i="1" smtClean="0">
-                            <a:latin typeface="Cambria Math" panose="02040503050406030204" pitchFamily="18" charset="0"/>
-                          </a:rPr>
-                          <m:t>𝑅</m:t>
-                        </m:r>
-                      </m:sub>
-                    </m:sSub>
-                    <m:r>
-                      <a:rPr lang="en-US" altLang="ja-JP" sz="2400" b="0" i="1" smtClean="0">
-                        <a:latin typeface="Cambria Math" panose="02040503050406030204" pitchFamily="18" charset="0"/>
-                      </a:rPr>
-                      <m:t>(</m:t>
-                    </m:r>
-                    <m:r>
-                      <a:rPr lang="en-US" altLang="ja-JP" sz="2400" b="0" i="1" smtClean="0">
-                        <a:latin typeface="Cambria Math" panose="02040503050406030204" pitchFamily="18" charset="0"/>
-                      </a:rPr>
-                      <m:t>𝑋</m:t>
-                    </m:r>
-                    <m:r>
-                      <a:rPr lang="en-US" altLang="ja-JP" sz="2400" b="0" i="1" smtClean="0">
-                        <a:latin typeface="Cambria Math" panose="02040503050406030204" pitchFamily="18" charset="0"/>
-                      </a:rPr>
-                      <m:t>)</m:t>
-                    </m:r>
-                  </m:oMath>
-                </a14:m>
-                <a:endParaRPr lang="en-US" altLang="ja-JP" sz="2400" dirty="0"/>
-              </a:p>
-              <a:p>
-                <a:r>
-                  <a:rPr lang="ja-JP" altLang="en-US" sz="2400"/>
-                  <a:t>「線上完成者」的總權重可以寫成：</a:t>
-                </a:r>
-                <a:endParaRPr lang="en-US" altLang="ja-JP" sz="2400" dirty="0"/>
-              </a:p>
-              <a:p>
-                <a14:m>
-                  <m:oMath xmlns:m="http://schemas.openxmlformats.org/officeDocument/2006/math">
-                    <m:sSub>
-                      <m:sSubPr>
-                        <m:ctrlPr>
-                          <a:rPr lang="en-US" altLang="ja-JP" sz="2400" i="1" smtClean="0">
-                            <a:latin typeface="Cambria Math" panose="02040503050406030204" pitchFamily="18" charset="0"/>
-                          </a:rPr>
-                        </m:ctrlPr>
-                      </m:sSubPr>
-                      <m:e>
-                        <m:r>
-                          <a:rPr lang="en-US" altLang="ja-JP" sz="2400" b="0" i="1" smtClean="0">
-                            <a:latin typeface="Cambria Math" panose="02040503050406030204" pitchFamily="18" charset="0"/>
-                          </a:rPr>
-                          <m:t>𝑤</m:t>
-                        </m:r>
-                      </m:e>
-                      <m:sub>
-                        <m:r>
-                          <a:rPr lang="en-US" altLang="ja-JP" sz="2400" b="0" i="1" smtClean="0">
-                            <a:latin typeface="Cambria Math" panose="02040503050406030204" pitchFamily="18" charset="0"/>
-                          </a:rPr>
-                          <m:t>𝑖</m:t>
-                        </m:r>
-                      </m:sub>
-                    </m:sSub>
-                    <m:r>
-                      <a:rPr lang="en-US" altLang="ja-JP" sz="2400" b="0" i="1" smtClean="0">
-                        <a:latin typeface="Cambria Math" panose="02040503050406030204" pitchFamily="18" charset="0"/>
-                      </a:rPr>
-                      <m:t>=</m:t>
-                    </m:r>
-                    <m:sSubSup>
-                      <m:sSubSupPr>
-                        <m:ctrlPr>
-                          <a:rPr lang="en-US" altLang="ja-JP" sz="2400" b="0" i="1" smtClean="0">
-                            <a:latin typeface="Cambria Math" panose="02040503050406030204" pitchFamily="18" charset="0"/>
-                          </a:rPr>
-                        </m:ctrlPr>
-                      </m:sSubSupPr>
-                      <m:e>
-                        <m:r>
-                          <a:rPr lang="en-US" altLang="ja-JP" sz="2400" b="0" i="1" smtClean="0">
-                            <a:latin typeface="Cambria Math" panose="02040503050406030204" pitchFamily="18" charset="0"/>
-                          </a:rPr>
-                          <m:t>𝑤</m:t>
-                        </m:r>
-                      </m:e>
-                      <m:sub>
-                        <m:r>
-                          <a:rPr lang="en-US" altLang="ja-JP" sz="2400" b="0" i="1" smtClean="0">
-                            <a:latin typeface="Cambria Math" panose="02040503050406030204" pitchFamily="18" charset="0"/>
-                          </a:rPr>
-                          <m:t>𝑖</m:t>
-                        </m:r>
-                      </m:sub>
-                      <m:sup>
-                        <m:r>
-                          <a:rPr lang="en-US" altLang="ja-JP" sz="2400" b="0" i="1" smtClean="0">
-                            <a:latin typeface="Cambria Math" panose="02040503050406030204" pitchFamily="18" charset="0"/>
-                          </a:rPr>
-                          <m:t>(</m:t>
-                        </m:r>
-                        <m:r>
-                          <a:rPr lang="en-US" altLang="ja-JP" sz="2400" b="0" i="1" smtClean="0">
-                            <a:latin typeface="Cambria Math" panose="02040503050406030204" pitchFamily="18" charset="0"/>
-                          </a:rPr>
-                          <m:t>𝑆</m:t>
-                        </m:r>
-                        <m:r>
-                          <a:rPr lang="en-US" altLang="ja-JP" sz="2400" b="0" i="1" smtClean="0">
-                            <a:latin typeface="Cambria Math" panose="02040503050406030204" pitchFamily="18" charset="0"/>
-                          </a:rPr>
-                          <m:t>)</m:t>
-                        </m:r>
-                      </m:sup>
-                    </m:sSubSup>
-                    <m:r>
-                      <a:rPr lang="en-US" altLang="ja-JP" sz="2400" b="0" i="1" smtClean="0">
-                        <a:latin typeface="Cambria Math" panose="02040503050406030204" pitchFamily="18" charset="0"/>
-                        <a:ea typeface="Cambria Math" panose="02040503050406030204" pitchFamily="18" charset="0"/>
-                      </a:rPr>
-                      <m:t>∙</m:t>
-                    </m:r>
-                    <m:f>
-                      <m:fPr>
-                        <m:ctrlPr>
-                          <a:rPr lang="en-US" altLang="ja-JP" sz="2400" b="0" i="1" smtClean="0">
-                            <a:latin typeface="Cambria Math" panose="02040503050406030204" pitchFamily="18" charset="0"/>
-                            <a:ea typeface="Cambria Math" panose="02040503050406030204" pitchFamily="18" charset="0"/>
-                          </a:rPr>
-                        </m:ctrlPr>
-                      </m:fPr>
-                      <m:num>
-                        <m:r>
-                          <a:rPr lang="en-US" altLang="ja-JP" sz="2400" b="0" i="1" smtClean="0">
-                            <a:latin typeface="Cambria Math" panose="02040503050406030204" pitchFamily="18" charset="0"/>
-                            <a:ea typeface="Cambria Math" panose="02040503050406030204" pitchFamily="18" charset="0"/>
-                          </a:rPr>
-                          <m:t>1</m:t>
-                        </m:r>
-                      </m:num>
-                      <m:den>
-                        <m:sSub>
-                          <m:sSubPr>
-                            <m:ctrlPr>
-                              <a:rPr lang="en-US" altLang="ja-JP" sz="2400" b="0" i="1" smtClean="0">
-                                <a:latin typeface="Cambria Math" panose="02040503050406030204" pitchFamily="18" charset="0"/>
-                                <a:ea typeface="Cambria Math" panose="02040503050406030204" pitchFamily="18" charset="0"/>
-                              </a:rPr>
-                            </m:ctrlPr>
-                          </m:sSubPr>
-                          <m:e>
-                            <m:r>
-                              <a:rPr lang="en-US" altLang="ja-JP" sz="2400" b="0" i="1" smtClean="0">
-                                <a:latin typeface="Cambria Math" panose="02040503050406030204" pitchFamily="18" charset="0"/>
-                                <a:ea typeface="Cambria Math" panose="02040503050406030204" pitchFamily="18" charset="0"/>
-                              </a:rPr>
-                              <m:t>𝑝</m:t>
-                            </m:r>
-                          </m:e>
-                          <m:sub>
-                            <m:r>
-                              <a:rPr lang="en-US" altLang="ja-JP" sz="2400" b="0" i="1" smtClean="0">
-                                <a:latin typeface="Cambria Math" panose="02040503050406030204" pitchFamily="18" charset="0"/>
-                                <a:ea typeface="Cambria Math" panose="02040503050406030204" pitchFamily="18" charset="0"/>
-                              </a:rPr>
-                              <m:t>𝐽</m:t>
-                            </m:r>
-                          </m:sub>
-                        </m:sSub>
-                        <m:r>
-                          <a:rPr lang="en-US" altLang="ja-JP" sz="2400" b="0" i="1" smtClean="0">
-                            <a:latin typeface="Cambria Math" panose="02040503050406030204" pitchFamily="18" charset="0"/>
-                            <a:ea typeface="Cambria Math" panose="02040503050406030204" pitchFamily="18" charset="0"/>
-                          </a:rPr>
-                          <m:t>(</m:t>
-                        </m:r>
-                        <m:sSub>
-                          <m:sSubPr>
-                            <m:ctrlPr>
-                              <a:rPr lang="en-US" altLang="ja-JP" sz="2400" b="0" i="1" smtClean="0">
-                                <a:latin typeface="Cambria Math" panose="02040503050406030204" pitchFamily="18" charset="0"/>
-                                <a:ea typeface="Cambria Math" panose="02040503050406030204" pitchFamily="18" charset="0"/>
-                              </a:rPr>
-                            </m:ctrlPr>
-                          </m:sSubPr>
-                          <m:e>
-                            <m:r>
-                              <a:rPr lang="en-US" altLang="ja-JP" sz="2400" b="0" i="1" smtClean="0">
-                                <a:latin typeface="Cambria Math" panose="02040503050406030204" pitchFamily="18" charset="0"/>
-                                <a:ea typeface="Cambria Math" panose="02040503050406030204" pitchFamily="18" charset="0"/>
-                              </a:rPr>
-                              <m:t>𝑋</m:t>
-                            </m:r>
-                          </m:e>
-                          <m:sub>
-                            <m:r>
-                              <a:rPr lang="en-US" altLang="ja-JP" sz="2400" b="0" i="1" smtClean="0">
-                                <a:latin typeface="Cambria Math" panose="02040503050406030204" pitchFamily="18" charset="0"/>
-                                <a:ea typeface="Cambria Math" panose="02040503050406030204" pitchFamily="18" charset="0"/>
-                              </a:rPr>
-                              <m:t>𝑖</m:t>
-                            </m:r>
-                          </m:sub>
-                        </m:sSub>
-                        <m:r>
-                          <a:rPr lang="en-US" altLang="ja-JP" sz="2400" b="0" i="1" smtClean="0">
-                            <a:latin typeface="Cambria Math" panose="02040503050406030204" pitchFamily="18" charset="0"/>
-                            <a:ea typeface="Cambria Math" panose="02040503050406030204" pitchFamily="18" charset="0"/>
-                          </a:rPr>
-                          <m:t>)</m:t>
-                        </m:r>
-                      </m:den>
-                    </m:f>
-                    <m:r>
-                      <a:rPr lang="en-US" altLang="ja-JP" sz="2400" b="0" i="1" smtClean="0">
-                        <a:latin typeface="Cambria Math" panose="02040503050406030204" pitchFamily="18" charset="0"/>
-                        <a:ea typeface="Cambria Math" panose="02040503050406030204" pitchFamily="18" charset="0"/>
-                      </a:rPr>
-                      <m:t>∙</m:t>
-                    </m:r>
-                    <m:f>
-                      <m:fPr>
-                        <m:ctrlPr>
-                          <a:rPr lang="en-US" altLang="ja-JP" sz="2400" i="1">
-                            <a:latin typeface="Cambria Math" panose="02040503050406030204" pitchFamily="18" charset="0"/>
-                            <a:ea typeface="Cambria Math" panose="02040503050406030204" pitchFamily="18" charset="0"/>
-                          </a:rPr>
-                        </m:ctrlPr>
-                      </m:fPr>
-                      <m:num>
-                        <m:r>
-                          <a:rPr lang="en-US" altLang="ja-JP" sz="2400" i="1">
-                            <a:latin typeface="Cambria Math" panose="02040503050406030204" pitchFamily="18" charset="0"/>
-                            <a:ea typeface="Cambria Math" panose="02040503050406030204" pitchFamily="18" charset="0"/>
-                          </a:rPr>
-                          <m:t>1</m:t>
-                        </m:r>
-                      </m:num>
-                      <m:den>
-                        <m:sSub>
-                          <m:sSubPr>
-                            <m:ctrlPr>
-                              <a:rPr lang="en-US" altLang="ja-JP" sz="2400" i="1">
-                                <a:latin typeface="Cambria Math" panose="02040503050406030204" pitchFamily="18" charset="0"/>
-                                <a:ea typeface="Cambria Math" panose="02040503050406030204" pitchFamily="18" charset="0"/>
-                              </a:rPr>
-                            </m:ctrlPr>
-                          </m:sSubPr>
-                          <m:e>
-                            <m:r>
-                              <a:rPr lang="en-US" altLang="ja-JP" sz="2400" i="1">
-                                <a:latin typeface="Cambria Math" panose="02040503050406030204" pitchFamily="18" charset="0"/>
-                                <a:ea typeface="Cambria Math" panose="02040503050406030204" pitchFamily="18" charset="0"/>
-                              </a:rPr>
-                              <m:t>𝑝</m:t>
-                            </m:r>
-                          </m:e>
-                          <m:sub>
-                            <m:r>
-                              <a:rPr lang="en-US" altLang="ja-JP" sz="2400" b="0" i="1" smtClean="0">
-                                <a:latin typeface="Cambria Math" panose="02040503050406030204" pitchFamily="18" charset="0"/>
-                                <a:ea typeface="Cambria Math" panose="02040503050406030204" pitchFamily="18" charset="0"/>
-                              </a:rPr>
-                              <m:t>𝑅</m:t>
-                            </m:r>
-                          </m:sub>
-                        </m:sSub>
-                        <m:r>
-                          <a:rPr lang="en-US" altLang="ja-JP" sz="2400" i="1">
-                            <a:latin typeface="Cambria Math" panose="02040503050406030204" pitchFamily="18" charset="0"/>
-                            <a:ea typeface="Cambria Math" panose="02040503050406030204" pitchFamily="18" charset="0"/>
-                          </a:rPr>
-                          <m:t>(</m:t>
-                        </m:r>
-                        <m:sSub>
-                          <m:sSubPr>
-                            <m:ctrlPr>
-                              <a:rPr lang="en-US" altLang="ja-JP" sz="2400" i="1">
-                                <a:latin typeface="Cambria Math" panose="02040503050406030204" pitchFamily="18" charset="0"/>
-                                <a:ea typeface="Cambria Math" panose="02040503050406030204" pitchFamily="18" charset="0"/>
-                              </a:rPr>
-                            </m:ctrlPr>
-                          </m:sSubPr>
-                          <m:e>
-                            <m:r>
-                              <a:rPr lang="en-US" altLang="ja-JP" sz="2400" i="1">
-                                <a:latin typeface="Cambria Math" panose="02040503050406030204" pitchFamily="18" charset="0"/>
-                                <a:ea typeface="Cambria Math" panose="02040503050406030204" pitchFamily="18" charset="0"/>
-                              </a:rPr>
-                              <m:t>𝑋</m:t>
-                            </m:r>
-                          </m:e>
-                          <m:sub>
-                            <m:r>
-                              <a:rPr lang="en-US" altLang="ja-JP" sz="2400" i="1">
-                                <a:latin typeface="Cambria Math" panose="02040503050406030204" pitchFamily="18" charset="0"/>
-                                <a:ea typeface="Cambria Math" panose="02040503050406030204" pitchFamily="18" charset="0"/>
-                              </a:rPr>
-                              <m:t>𝑖</m:t>
-                            </m:r>
-                          </m:sub>
-                        </m:sSub>
-                        <m:r>
-                          <a:rPr lang="en-US" altLang="ja-JP" sz="2400" i="1">
-                            <a:latin typeface="Cambria Math" panose="02040503050406030204" pitchFamily="18" charset="0"/>
-                            <a:ea typeface="Cambria Math" panose="02040503050406030204" pitchFamily="18" charset="0"/>
-                          </a:rPr>
-                          <m:t>)</m:t>
-                        </m:r>
-                      </m:den>
-                    </m:f>
-                  </m:oMath>
-                </a14:m>
-                <a:endParaRPr lang="en-US" altLang="ja-JP" sz="2400" dirty="0"/>
-              </a:p>
-              <a:p>
-                <a:r>
-                  <a:rPr lang="ja-JP" altLang="en-US" sz="2400"/>
-                  <a:t>加權後能回到母體平均</a:t>
-                </a:r>
-                <a:endParaRPr lang="en-US" sz="2400" dirty="0"/>
-              </a:p>
-            </p:txBody>
-          </p:sp>
-        </mc:Choice>
-        <mc:Fallback xmlns="">
-          <p:sp>
-            <p:nvSpPr>
-              <p:cNvPr id="3" name="Content Placeholder 2">
-                <a:extLst>
-                  <a:ext uri="{FF2B5EF4-FFF2-40B4-BE49-F238E27FC236}">
-                    <a16:creationId xmlns:a16="http://schemas.microsoft.com/office/drawing/2014/main" id="{503CE2E6-2E15-4EE8-1671-5A91A471FFCA}"/>
-                  </a:ext>
-                </a:extLst>
-              </p:cNvPr>
-              <p:cNvSpPr>
-                <a:spLocks noGrp="1" noRot="1" noChangeAspect="1" noMove="1" noResize="1" noEditPoints="1" noAdjustHandles="1" noChangeArrowheads="1" noChangeShapeType="1" noTextEdit="1"/>
-              </p:cNvSpPr>
-              <p:nvPr>
-                <p:ph idx="1"/>
-              </p:nvPr>
-            </p:nvSpPr>
-            <p:spPr>
-              <a:blipFill>
-                <a:blip r:embed="rId2"/>
-                <a:stretch>
-                  <a:fillRect l="-844" t="-2035"/>
-                </a:stretch>
-              </a:blipFill>
-            </p:spPr>
-            <p:txBody>
-              <a:bodyPr/>
-              <a:lstStyle/>
-              <a:p>
-                <a:r>
-                  <a:rPr lang="en-US">
-                    <a:noFill/>
-                  </a:rPr>
-                  <a:t> </a:t>
-                </a:r>
-              </a:p>
-            </p:txBody>
-          </p:sp>
-        </mc:Fallback>
-      </mc:AlternateContent>
-      <p:sp>
-        <p:nvSpPr>
-          <p:cNvPr id="4" name="Slide Number Placeholder 3">
-            <a:extLst>
-              <a:ext uri="{FF2B5EF4-FFF2-40B4-BE49-F238E27FC236}">
-                <a16:creationId xmlns:a16="http://schemas.microsoft.com/office/drawing/2014/main" id="{8EF26EBF-36D7-2773-E645-6C866621BE6D}"/>
-              </a:ext>
-            </a:extLst>
-          </p:cNvPr>
-          <p:cNvSpPr>
-            <a:spLocks noGrp="1"/>
-          </p:cNvSpPr>
-          <p:nvPr>
-            <p:ph type="sldNum" sz="quarter" idx="12"/>
-          </p:nvPr>
-        </p:nvSpPr>
-        <p:spPr/>
-        <p:txBody>
-          <a:bodyPr/>
-          <a:lstStyle/>
-          <a:p>
-            <a:fld id="{34E21383-B02B-694B-B2AD-A967203CDE86}" type="slidenum">
-              <a:rPr lang="en-US" smtClean="0"/>
-              <a:t>17</a:t>
-            </a:fld>
-            <a:endParaRPr lang="en-US"/>
-          </a:p>
-        </p:txBody>
-      </p:sp>
-    </p:spTree>
-    <p:extLst>
-      <p:ext uri="{BB962C8B-B14F-4D97-AF65-F5344CB8AC3E}">
-        <p14:creationId xmlns:p14="http://schemas.microsoft.com/office/powerpoint/2010/main" val="1486744652"/>
-      </p:ext>
-    </p:extLst>
-  </p:cSld>
-  <p:clrMapOvr>
-    <a:masterClrMapping/>
-  </p:clrMapOvr>
-</p:sld>
-</file>
-
-<file path=ppt/slides/slide18.xml><?xml version="1.0" encoding="utf-8"?>
-<p:sld xmlns:a="http://schemas.openxmlformats.org/drawingml/2006/main" xmlns:r="http://schemas.openxmlformats.org/officeDocument/2006/relationships" xmlns:p="http://schemas.openxmlformats.org/presentationml/2006/main">
-  <p:cSld>
-    <p:spTree>
-      <p:nvGrpSpPr>
-        <p:cNvPr id="1" name=""/>
-        <p:cNvGrpSpPr/>
-        <p:nvPr/>
-      </p:nvGrpSpPr>
-      <p:grpSpPr>
-        <a:xfrm>
-          <a:off x="0" y="0"/>
-          <a:ext cx="0" cy="0"/>
-          <a:chOff x="0" y="0"/>
-          <a:chExt cx="0" cy="0"/>
-        </a:xfrm>
-      </p:grpSpPr>
-      <p:sp>
-        <p:nvSpPr>
-          <p:cNvPr id="2" name="Title 1">
-            <a:extLst>
-              <a:ext uri="{FF2B5EF4-FFF2-40B4-BE49-F238E27FC236}">
-                <a16:creationId xmlns:a16="http://schemas.microsoft.com/office/drawing/2014/main" id="{ED266BC7-D370-DB3B-3586-0BB7D3212D0F}"/>
-              </a:ext>
-            </a:extLst>
-          </p:cNvPr>
-          <p:cNvSpPr>
-            <a:spLocks noGrp="1"/>
-          </p:cNvSpPr>
-          <p:nvPr>
-            <p:ph type="title"/>
-          </p:nvPr>
-        </p:nvSpPr>
-        <p:spPr/>
-        <p:txBody>
-          <a:bodyPr/>
-          <a:lstStyle/>
-          <a:p>
-            <a:r>
-              <a:rPr lang="ja-JP" altLang="en-US"/>
-              <a:t>期末報告</a:t>
-            </a:r>
-            <a:endParaRPr lang="en-US" dirty="0"/>
-          </a:p>
-        </p:txBody>
-      </p:sp>
-      <p:sp>
-        <p:nvSpPr>
-          <p:cNvPr id="3" name="Content Placeholder 2">
-            <a:extLst>
-              <a:ext uri="{FF2B5EF4-FFF2-40B4-BE49-F238E27FC236}">
-                <a16:creationId xmlns:a16="http://schemas.microsoft.com/office/drawing/2014/main" id="{4F08E529-29DD-AB2C-94BF-694DBD41AB6D}"/>
-              </a:ext>
-            </a:extLst>
-          </p:cNvPr>
-          <p:cNvSpPr>
-            <a:spLocks noGrp="1"/>
-          </p:cNvSpPr>
-          <p:nvPr>
-            <p:ph idx="1"/>
-          </p:nvPr>
-        </p:nvSpPr>
-        <p:spPr/>
-        <p:txBody>
-          <a:bodyPr>
-            <a:normAutofit fontScale="92500" lnSpcReduction="10000"/>
-          </a:bodyPr>
-          <a:lstStyle/>
-          <a:p>
-            <a:pPr marL="514350" indent="-514350">
-              <a:lnSpc>
-                <a:spcPct val="150000"/>
-              </a:lnSpc>
-              <a:buFont typeface="+mj-lt"/>
-              <a:buAutoNum type="arabicPeriod"/>
-            </a:pPr>
-            <a:r>
-              <a:rPr lang="zh-TW" altLang="en-US" kern="100" dirty="0">
-                <a:effectLst/>
-                <a:latin typeface="Times New Roman" panose="02020603050405020304" pitchFamily="18" charset="0"/>
-                <a:ea typeface="DFKai-SB"/>
-                <a:cs typeface="Times New Roman" panose="02020603050405020304" pitchFamily="18" charset="0"/>
-              </a:rPr>
-              <a:t>為鼓勵團隊合作，期末報告係由學生分組針對民意或者調查的主題進行研究，例如政府是否回應民意？個人的意見如何形成？如何改進問卷的設計或者執行方式等等？</a:t>
-            </a:r>
-            <a:endParaRPr lang="en-US" altLang="zh-TW" kern="100" dirty="0">
-              <a:effectLst/>
-              <a:latin typeface="Times New Roman" panose="02020603050405020304" pitchFamily="18" charset="0"/>
-              <a:ea typeface="DFKai-SB"/>
-              <a:cs typeface="Times New Roman" panose="02020603050405020304" pitchFamily="18" charset="0"/>
-            </a:endParaRPr>
-          </a:p>
-          <a:p>
-            <a:pPr marL="514350" indent="-514350">
-              <a:lnSpc>
-                <a:spcPct val="150000"/>
-              </a:lnSpc>
-              <a:buFont typeface="+mj-lt"/>
-              <a:buAutoNum type="arabicPeriod"/>
-            </a:pPr>
-            <a:r>
-              <a:rPr lang="zh-TW" altLang="en-US" kern="100" dirty="0">
-                <a:effectLst/>
-                <a:latin typeface="Times New Roman" panose="02020603050405020304" pitchFamily="18" charset="0"/>
-                <a:ea typeface="DFKai-SB"/>
-                <a:cs typeface="Times New Roman" panose="02020603050405020304" pitchFamily="18" charset="0"/>
-              </a:rPr>
-              <a:t>期末進行分組發表報告後，於兩週後繳交完整報告。</a:t>
-            </a:r>
-            <a:endParaRPr lang="en-US" altLang="zh-TW" kern="100" dirty="0">
-              <a:effectLst/>
-              <a:latin typeface="Times New Roman" panose="02020603050405020304" pitchFamily="18" charset="0"/>
-              <a:ea typeface="DFKai-SB"/>
-              <a:cs typeface="Times New Roman" panose="02020603050405020304" pitchFamily="18" charset="0"/>
-            </a:endParaRPr>
-          </a:p>
-          <a:p>
-            <a:pPr marL="514350" indent="-514350">
-              <a:lnSpc>
-                <a:spcPct val="150000"/>
-              </a:lnSpc>
-              <a:buFont typeface="+mj-lt"/>
-              <a:buAutoNum type="arabicPeriod"/>
-            </a:pPr>
-            <a:r>
-              <a:rPr lang="zh-TW" altLang="en-US" kern="100" dirty="0">
-                <a:effectLst/>
-                <a:latin typeface="Times New Roman" panose="02020603050405020304" pitchFamily="18" charset="0"/>
-                <a:ea typeface="DFKai-SB"/>
-                <a:cs typeface="Times New Roman" panose="02020603050405020304" pitchFamily="18" charset="0"/>
-              </a:rPr>
-              <a:t>每一組最少</a:t>
-            </a:r>
-            <a:r>
-              <a:rPr lang="en-US" altLang="zh-TW" kern="100" dirty="0">
-                <a:effectLst/>
-                <a:latin typeface="Times New Roman" panose="02020603050405020304" pitchFamily="18" charset="0"/>
-                <a:ea typeface="DFKai-SB"/>
-                <a:cs typeface="Times New Roman" panose="02020603050405020304" pitchFamily="18" charset="0"/>
-              </a:rPr>
-              <a:t>2</a:t>
-            </a:r>
-            <a:r>
-              <a:rPr lang="zh-TW" altLang="en-US" kern="100" dirty="0">
-                <a:effectLst/>
-                <a:latin typeface="Times New Roman" panose="02020603050405020304" pitchFamily="18" charset="0"/>
-                <a:ea typeface="DFKai-SB"/>
-                <a:cs typeface="Times New Roman" panose="02020603050405020304" pitchFamily="18" charset="0"/>
-              </a:rPr>
-              <a:t>人，最多</a:t>
-            </a:r>
-            <a:r>
-              <a:rPr lang="en-US" altLang="zh-TW" kern="100" dirty="0">
-                <a:effectLst/>
-                <a:latin typeface="Times New Roman" panose="02020603050405020304" pitchFamily="18" charset="0"/>
-                <a:ea typeface="DFKai-SB"/>
-                <a:cs typeface="Times New Roman" panose="02020603050405020304" pitchFamily="18" charset="0"/>
-              </a:rPr>
-              <a:t>4</a:t>
-            </a:r>
-            <a:r>
-              <a:rPr lang="zh-TW" altLang="en-US" kern="100" dirty="0">
-                <a:effectLst/>
-                <a:latin typeface="Times New Roman" panose="02020603050405020304" pitchFamily="18" charset="0"/>
-                <a:ea typeface="DFKai-SB"/>
-                <a:cs typeface="Times New Roman" panose="02020603050405020304" pitchFamily="18" charset="0"/>
-              </a:rPr>
-              <a:t>人。</a:t>
-            </a:r>
-            <a:endParaRPr lang="en-US" altLang="zh-TW" kern="100" dirty="0">
-              <a:effectLst/>
-              <a:latin typeface="Times New Roman" panose="02020603050405020304" pitchFamily="18" charset="0"/>
-              <a:ea typeface="DFKai-SB"/>
-              <a:cs typeface="Times New Roman" panose="02020603050405020304" pitchFamily="18" charset="0"/>
-            </a:endParaRPr>
-          </a:p>
-          <a:p>
-            <a:pPr marL="514350" indent="-514350">
-              <a:lnSpc>
-                <a:spcPct val="150000"/>
-              </a:lnSpc>
-              <a:buFont typeface="+mj-lt"/>
-              <a:buAutoNum type="arabicPeriod"/>
-            </a:pPr>
-            <a:r>
-              <a:rPr lang="zh-TW" altLang="en-US" kern="100" dirty="0">
-                <a:effectLst/>
-                <a:latin typeface="Times New Roman" panose="02020603050405020304" pitchFamily="18" charset="0"/>
-                <a:ea typeface="DFKai-SB"/>
-                <a:cs typeface="Times New Roman" panose="02020603050405020304" pitchFamily="18" charset="0"/>
-              </a:rPr>
-              <a:t>報告至少包括：研究問題與可能貢獻、文獻回顧、研究發現與建議以及結論。</a:t>
-            </a:r>
-            <a:endParaRPr lang="en-US" dirty="0">
-              <a:effectLst/>
-            </a:endParaRPr>
-          </a:p>
-        </p:txBody>
-      </p:sp>
-      <p:sp>
-        <p:nvSpPr>
-          <p:cNvPr id="4" name="Slide Number Placeholder 3">
-            <a:extLst>
-              <a:ext uri="{FF2B5EF4-FFF2-40B4-BE49-F238E27FC236}">
-                <a16:creationId xmlns:a16="http://schemas.microsoft.com/office/drawing/2014/main" id="{713E27AD-FE49-2E5F-F622-F163350A2DD4}"/>
-              </a:ext>
-            </a:extLst>
-          </p:cNvPr>
-          <p:cNvSpPr>
-            <a:spLocks noGrp="1"/>
-          </p:cNvSpPr>
-          <p:nvPr>
-            <p:ph type="sldNum" sz="quarter" idx="12"/>
-          </p:nvPr>
-        </p:nvSpPr>
-        <p:spPr/>
-        <p:txBody>
-          <a:bodyPr/>
-          <a:lstStyle/>
-          <a:p>
-            <a:fld id="{34E21383-B02B-694B-B2AD-A967203CDE86}" type="slidenum">
-              <a:rPr lang="en-US" smtClean="0"/>
-              <a:t>18</a:t>
-            </a:fld>
-            <a:endParaRPr lang="en-US"/>
-          </a:p>
-        </p:txBody>
-      </p:sp>
-    </p:spTree>
-    <p:extLst>
-      <p:ext uri="{BB962C8B-B14F-4D97-AF65-F5344CB8AC3E}">
-        <p14:creationId xmlns:p14="http://schemas.microsoft.com/office/powerpoint/2010/main" val="448999480"/>
+        <p14:creationId xmlns:p14="http://schemas.microsoft.com/office/powerpoint/2010/main" val="1931281032"/>
       </p:ext>
     </p:extLst>
   </p:cSld>
@@ -9012,8 +8987,8 @@
           </a:p>
         </p:txBody>
       </p:sp>
-      <mc:AlternateContent xmlns:mc="http://schemas.openxmlformats.org/markup-compatibility/2006">
-        <mc:Choice xmlns:a14="http://schemas.microsoft.com/office/drawing/2010/main" Requires="a14">
+      <mc:AlternateContent xmlns:mc="http://schemas.openxmlformats.org/markup-compatibility/2006" xmlns:a14="http://schemas.microsoft.com/office/drawing/2010/main">
+        <mc:Choice Requires="a14">
           <p:sp>
             <p:nvSpPr>
               <p:cNvPr id="3" name="Content Placeholder 2">
@@ -9264,7 +9239,7 @@
             </p:txBody>
           </p:sp>
         </mc:Choice>
-        <mc:Fallback>
+        <mc:Fallback xmlns="">
           <p:sp>
             <p:nvSpPr>
               <p:cNvPr id="3" name="Content Placeholder 2">
@@ -9911,7 +9886,7 @@
                 </a:r>
                 <a:r>
                   <a:rPr lang="zh-TW" altLang="en-US" sz="2000" dirty="0"/>
-                  <a:t>個人的平均年薪。</a:t>
+                  <a:t>個人的總年薪。</a:t>
                 </a:r>
                 <a:endParaRPr lang="en-US" altLang="zh-TW" sz="2000" dirty="0"/>
               </a:p>
@@ -9971,7 +9946,7 @@
                 </a:r>
                 <a:r>
                   <a:rPr lang="zh-TW" altLang="en-US" sz="2000" dirty="0"/>
-                  <a:t>算出的平均收入會等於母體的真實真相。期望值寫成：</a:t>
+                  <a:t>算出的總收入會等於母體。期望值寫成：</a:t>
                 </a:r>
                 <a14:m>
                   <m:oMath xmlns:m="http://schemas.openxmlformats.org/officeDocument/2006/math">
@@ -10205,7 +10180,7 @@
               <a:blipFill>
                 <a:blip r:embed="rId2"/>
                 <a:stretch>
-                  <a:fillRect l="-483" r="-603" b="-8721"/>
+                  <a:fillRect l="-1086" r="-603" b="-8721"/>
                 </a:stretch>
               </a:blipFill>
             </p:spPr>
@@ -10214,7 +10189,7 @@
               <a:lstStyle/>
               <a:p>
                 <a:r>
-                  <a:rPr lang="zh-TW" altLang="en-US">
+                  <a:rPr lang="en-US">
                     <a:noFill/>
                   </a:rPr>
                   <a:t> </a:t>
@@ -10312,8 +10287,8 @@
           </a:p>
         </p:txBody>
       </p:sp>
-      <mc:AlternateContent xmlns:mc="http://schemas.openxmlformats.org/markup-compatibility/2006">
-        <mc:Choice xmlns:a14="http://schemas.microsoft.com/office/drawing/2010/main" Requires="a14">
+      <mc:AlternateContent xmlns:mc="http://schemas.openxmlformats.org/markup-compatibility/2006" xmlns:a14="http://schemas.microsoft.com/office/drawing/2010/main">
+        <mc:Choice Requires="a14">
           <p:sp>
             <p:nvSpPr>
               <p:cNvPr id="3" name="內容版面配置區 2">
@@ -11039,7 +11014,7 @@
             </p:txBody>
           </p:sp>
         </mc:Choice>
-        <mc:Fallback>
+        <mc:Fallback xmlns="">
           <p:sp>
             <p:nvSpPr>
               <p:cNvPr id="3" name="內容版面配置區 2">

--- a/投影片/民意與調查Week5.pptx
+++ b/投影片/民意與調查Week5.pptx
@@ -5,7 +5,7 @@
     <p:sldMasterId id="2147483648" r:id="rId1"/>
   </p:sldMasterIdLst>
   <p:notesMasterIdLst>
-    <p:notesMasterId r:id="rId15"/>
+    <p:notesMasterId r:id="rId17"/>
   </p:notesMasterIdLst>
   <p:sldIdLst>
     <p:sldId id="256" r:id="rId2"/>
@@ -14,13 +14,15 @@
     <p:sldId id="271" r:id="rId5"/>
     <p:sldId id="264" r:id="rId6"/>
     <p:sldId id="273" r:id="rId7"/>
-    <p:sldId id="274" r:id="rId8"/>
-    <p:sldId id="275" r:id="rId9"/>
-    <p:sldId id="276" r:id="rId10"/>
-    <p:sldId id="277" r:id="rId11"/>
-    <p:sldId id="278" r:id="rId12"/>
-    <p:sldId id="279" r:id="rId13"/>
-    <p:sldId id="280" r:id="rId14"/>
+    <p:sldId id="281" r:id="rId8"/>
+    <p:sldId id="274" r:id="rId9"/>
+    <p:sldId id="282" r:id="rId10"/>
+    <p:sldId id="275" r:id="rId11"/>
+    <p:sldId id="276" r:id="rId12"/>
+    <p:sldId id="277" r:id="rId13"/>
+    <p:sldId id="278" r:id="rId14"/>
+    <p:sldId id="279" r:id="rId15"/>
+    <p:sldId id="280" r:id="rId16"/>
   </p:sldIdLst>
   <p:sldSz cx="12192000" cy="6858000"/>
   <p:notesSz cx="6858000" cy="9144000"/>
@@ -209,7 +211,7 @@
           <a:p>
             <a:fld id="{308549C9-F1F2-A344-9318-AC3AB4654B7E}" type="datetimeFigureOut">
               <a:rPr lang="en-US" smtClean="0"/>
-              <a:t>3/24/26</a:t>
+              <a:t>3/26/26</a:t>
             </a:fld>
             <a:endParaRPr lang="en-US"/>
           </a:p>
@@ -623,7 +625,7 @@
           <a:p>
             <a:fld id="{0ECB731F-7F54-EF4E-BC14-D4454C95FF4D}" type="datetime1">
               <a:rPr lang="en-US" smtClean="0"/>
-              <a:t>3/24/26</a:t>
+              <a:t>3/26/26</a:t>
             </a:fld>
             <a:endParaRPr lang="en-US"/>
           </a:p>
@@ -821,7 +823,7 @@
           <a:p>
             <a:fld id="{5FC0AAEB-F940-CA44-B742-2110711973A7}" type="datetime1">
               <a:rPr lang="en-US" smtClean="0"/>
-              <a:t>3/24/26</a:t>
+              <a:t>3/26/26</a:t>
             </a:fld>
             <a:endParaRPr lang="en-US"/>
           </a:p>
@@ -1029,7 +1031,7 @@
           <a:p>
             <a:fld id="{0C0FC7EA-A73C-4146-9B14-54C11597AA40}" type="datetime1">
               <a:rPr lang="en-US" smtClean="0"/>
-              <a:t>3/24/26</a:t>
+              <a:t>3/26/26</a:t>
             </a:fld>
             <a:endParaRPr lang="en-US"/>
           </a:p>
@@ -1227,7 +1229,7 @@
           <a:p>
             <a:fld id="{24943121-CDD1-174D-9095-06B3974B3CC1}" type="datetime1">
               <a:rPr lang="en-US" smtClean="0"/>
-              <a:t>3/24/26</a:t>
+              <a:t>3/26/26</a:t>
             </a:fld>
             <a:endParaRPr lang="en-US"/>
           </a:p>
@@ -1502,7 +1504,7 @@
           <a:p>
             <a:fld id="{21F2BAF9-EAD3-1641-87AF-ADC71D8222CD}" type="datetime1">
               <a:rPr lang="en-US" smtClean="0"/>
-              <a:t>3/24/26</a:t>
+              <a:t>3/26/26</a:t>
             </a:fld>
             <a:endParaRPr lang="en-US"/>
           </a:p>
@@ -1767,7 +1769,7 @@
           <a:p>
             <a:fld id="{F8F7A49D-4C23-6A49-AF9D-C0E1C1130921}" type="datetime1">
               <a:rPr lang="en-US" smtClean="0"/>
-              <a:t>3/24/26</a:t>
+              <a:t>3/26/26</a:t>
             </a:fld>
             <a:endParaRPr lang="en-US"/>
           </a:p>
@@ -2179,7 +2181,7 @@
           <a:p>
             <a:fld id="{9F516F59-8951-4749-B49C-6C88C0B4B6BD}" type="datetime1">
               <a:rPr lang="en-US" smtClean="0"/>
-              <a:t>3/24/26</a:t>
+              <a:t>3/26/26</a:t>
             </a:fld>
             <a:endParaRPr lang="en-US"/>
           </a:p>
@@ -2320,7 +2322,7 @@
           <a:p>
             <a:fld id="{CA82BBDF-C485-174D-8051-FF3ED3DF33C6}" type="datetime1">
               <a:rPr lang="en-US" smtClean="0"/>
-              <a:t>3/24/26</a:t>
+              <a:t>3/26/26</a:t>
             </a:fld>
             <a:endParaRPr lang="en-US"/>
           </a:p>
@@ -2433,7 +2435,7 @@
           <a:p>
             <a:fld id="{3CA316C8-35EA-C448-A7DB-295F753FB635}" type="datetime1">
               <a:rPr lang="en-US" smtClean="0"/>
-              <a:t>3/24/26</a:t>
+              <a:t>3/26/26</a:t>
             </a:fld>
             <a:endParaRPr lang="en-US"/>
           </a:p>
@@ -2744,7 +2746,7 @@
           <a:p>
             <a:fld id="{3EBA6818-685C-B142-BE10-A6D54A85D7FF}" type="datetime1">
               <a:rPr lang="en-US" smtClean="0"/>
-              <a:t>3/24/26</a:t>
+              <a:t>3/26/26</a:t>
             </a:fld>
             <a:endParaRPr lang="en-US"/>
           </a:p>
@@ -3032,7 +3034,7 @@
           <a:p>
             <a:fld id="{D444D57B-5B66-2F49-AB7C-362DD22B45D8}" type="datetime1">
               <a:rPr lang="en-US" smtClean="0"/>
-              <a:t>3/24/26</a:t>
+              <a:t>3/26/26</a:t>
             </a:fld>
             <a:endParaRPr lang="en-US"/>
           </a:p>
@@ -3273,7 +3275,7 @@
           <a:p>
             <a:fld id="{4025DC53-D744-A54C-8957-51F9F93FF803}" type="datetime1">
               <a:rPr lang="en-US" smtClean="0"/>
-              <a:t>3/24/26</a:t>
+              <a:t>3/26/26</a:t>
             </a:fld>
             <a:endParaRPr lang="en-US"/>
           </a:p>
@@ -3776,6 +3778,1781 @@
   <p:cSld>
     <p:spTree>
       <p:nvGrpSpPr>
+        <p:cNvPr id="1" name="">
+          <a:extLst>
+            <a:ext uri="{FF2B5EF4-FFF2-40B4-BE49-F238E27FC236}">
+              <a16:creationId xmlns:a16="http://schemas.microsoft.com/office/drawing/2014/main" id="{02C106E1-CF63-3145-5A92-C69BD208B292}"/>
+            </a:ext>
+          </a:extLst>
+        </p:cNvPr>
+        <p:cNvGrpSpPr/>
+        <p:nvPr/>
+      </p:nvGrpSpPr>
+      <p:grpSpPr>
+        <a:xfrm>
+          <a:off x="0" y="0"/>
+          <a:ext cx="0" cy="0"/>
+          <a:chOff x="0" y="0"/>
+          <a:chExt cx="0" cy="0"/>
+        </a:xfrm>
+      </p:grpSpPr>
+      <p:sp>
+        <p:nvSpPr>
+          <p:cNvPr id="2" name="Title 1">
+            <a:extLst>
+              <a:ext uri="{FF2B5EF4-FFF2-40B4-BE49-F238E27FC236}">
+                <a16:creationId xmlns:a16="http://schemas.microsoft.com/office/drawing/2014/main" id="{B3778C6F-211A-7AA3-0C69-B61C040A1E77}"/>
+              </a:ext>
+            </a:extLst>
+          </p:cNvPr>
+          <p:cNvSpPr>
+            <a:spLocks noGrp="1"/>
+          </p:cNvSpPr>
+          <p:nvPr>
+            <p:ph type="title"/>
+          </p:nvPr>
+        </p:nvSpPr>
+        <p:spPr/>
+        <p:txBody>
+          <a:bodyPr/>
+          <a:lstStyle/>
+          <a:p>
+            <a:r>
+              <a:rPr lang="ja-JP" altLang="en-US"/>
+              <a:t>機率抽樣的元素（三）</a:t>
+            </a:r>
+            <a:endParaRPr lang="en-US" dirty="0"/>
+          </a:p>
+        </p:txBody>
+      </p:sp>
+      <mc:AlternateContent xmlns:mc="http://schemas.openxmlformats.org/markup-compatibility/2006" xmlns:a14="http://schemas.microsoft.com/office/drawing/2010/main">
+        <mc:Choice Requires="a14">
+          <p:sp>
+            <p:nvSpPr>
+              <p:cNvPr id="3" name="Content Placeholder 2">
+                <a:extLst>
+                  <a:ext uri="{FF2B5EF4-FFF2-40B4-BE49-F238E27FC236}">
+                    <a16:creationId xmlns:a16="http://schemas.microsoft.com/office/drawing/2014/main" id="{CFAE9C41-B4EA-2EE4-7488-91928CBB72B4}"/>
+                  </a:ext>
+                </a:extLst>
+              </p:cNvPr>
+              <p:cNvSpPr>
+                <a:spLocks noGrp="1"/>
+              </p:cNvSpPr>
+              <p:nvPr>
+                <p:ph idx="1"/>
+              </p:nvPr>
+            </p:nvSpPr>
+            <p:spPr/>
+            <p:txBody>
+              <a:bodyPr>
+                <a:normAutofit fontScale="92500" lnSpcReduction="10000"/>
+              </a:bodyPr>
+              <a:lstStyle/>
+              <a:p>
+                <a:pPr>
+                  <a:lnSpc>
+                    <a:spcPct val="150000"/>
+                  </a:lnSpc>
+                  <a:buFont typeface="Wingdings" pitchFamily="2" charset="2"/>
+                  <a:buChar char="l"/>
+                </a:pPr>
+                <a:r>
+                  <a:rPr lang="en-US" altLang="zh-TW" sz="2000" dirty="0"/>
+                  <a:t>Horvitz &amp; Thompson (1952)</a:t>
+                </a:r>
+                <a:r>
+                  <a:rPr lang="zh-TW" altLang="en-US" sz="2000" dirty="0"/>
+                  <a:t>提出不論抽樣設計多麼複雜，只要我們計算出每個樣本的入選機率或者權重，都能得到母體總和的不偏估計。</a:t>
+                </a:r>
+                <a:r>
+                  <a:rPr lang="en-US" altLang="zh-TW" sz="2000" dirty="0"/>
+                  <a:t>H-Y</a:t>
+                </a:r>
+                <a:r>
+                  <a:rPr lang="zh-TW" altLang="en-US" sz="2000" dirty="0"/>
+                  <a:t>估計式：</a:t>
+                </a:r>
+                <a14:m>
+                  <m:oMath xmlns:m="http://schemas.openxmlformats.org/officeDocument/2006/math">
+                    <m:acc>
+                      <m:accPr>
+                        <m:chr m:val="̂"/>
+                        <m:ctrlPr>
+                          <a:rPr lang="zh-TW" altLang="en-US" sz="2000" i="1" smtClean="0">
+                            <a:latin typeface="Cambria Math" panose="02040503050406030204" pitchFamily="18" charset="0"/>
+                          </a:rPr>
+                        </m:ctrlPr>
+                      </m:accPr>
+                      <m:e>
+                        <m:r>
+                          <a:rPr lang="zh-TW" altLang="en-US" sz="2000" i="1">
+                            <a:latin typeface="Cambria Math" panose="02040503050406030204" pitchFamily="18" charset="0"/>
+                          </a:rPr>
+                          <m:t>Ｙ</m:t>
+                        </m:r>
+                      </m:e>
+                    </m:acc>
+                  </m:oMath>
+                </a14:m>
+                <a:r>
+                  <a:rPr lang="en-US" altLang="zh-TW" sz="2000" dirty="0"/>
+                  <a:t>=</a:t>
+                </a:r>
+                <a14:m>
+                  <m:oMath xmlns:m="http://schemas.openxmlformats.org/officeDocument/2006/math">
+                    <m:nary>
+                      <m:naryPr>
+                        <m:chr m:val="∑"/>
+                        <m:supHide m:val="on"/>
+                        <m:ctrlPr>
+                          <a:rPr lang="en-US" altLang="zh-TW" sz="2000" i="1" dirty="0" smtClean="0">
+                            <a:latin typeface="Cambria Math" panose="02040503050406030204" pitchFamily="18" charset="0"/>
+                          </a:rPr>
+                        </m:ctrlPr>
+                      </m:naryPr>
+                      <m:sub>
+                        <m:r>
+                          <m:rPr>
+                            <m:brk m:alnAt="7"/>
+                          </m:rPr>
+                          <a:rPr lang="en-US" altLang="zh-TW" sz="2000" b="0" i="1" dirty="0" smtClean="0">
+                            <a:latin typeface="Cambria Math" panose="02040503050406030204" pitchFamily="18" charset="0"/>
+                          </a:rPr>
+                          <m:t>𝑖</m:t>
+                        </m:r>
+                        <m:r>
+                          <a:rPr lang="en-US" altLang="zh-TW" sz="2000" b="0" i="1" dirty="0" smtClean="0">
+                            <a:latin typeface="Cambria Math" panose="02040503050406030204" pitchFamily="18" charset="0"/>
+                            <a:ea typeface="Cambria Math" panose="02040503050406030204" pitchFamily="18" charset="0"/>
+                          </a:rPr>
+                          <m:t>∈</m:t>
+                        </m:r>
+                        <m:r>
+                          <a:rPr lang="en-US" altLang="zh-TW" sz="2000" b="0" i="1" dirty="0" smtClean="0">
+                            <a:latin typeface="Cambria Math" panose="02040503050406030204" pitchFamily="18" charset="0"/>
+                            <a:ea typeface="Cambria Math" panose="02040503050406030204" pitchFamily="18" charset="0"/>
+                          </a:rPr>
+                          <m:t>𝑆</m:t>
+                        </m:r>
+                      </m:sub>
+                      <m:sup/>
+                      <m:e>
+                        <m:f>
+                          <m:fPr>
+                            <m:ctrlPr>
+                              <a:rPr lang="en-US" altLang="zh-TW" sz="2000" i="1" dirty="0" smtClean="0">
+                                <a:latin typeface="Cambria Math" panose="02040503050406030204" pitchFamily="18" charset="0"/>
+                              </a:rPr>
+                            </m:ctrlPr>
+                          </m:fPr>
+                          <m:num>
+                            <m:sSub>
+                              <m:sSubPr>
+                                <m:ctrlPr>
+                                  <a:rPr lang="en-US" altLang="zh-TW" sz="2000" i="1" dirty="0" smtClean="0">
+                                    <a:latin typeface="Cambria Math" panose="02040503050406030204" pitchFamily="18" charset="0"/>
+                                  </a:rPr>
+                                </m:ctrlPr>
+                              </m:sSubPr>
+                              <m:e>
+                                <m:r>
+                                  <a:rPr lang="en-US" altLang="zh-TW" sz="2000" b="0" i="1" dirty="0" smtClean="0">
+                                    <a:latin typeface="Cambria Math" panose="02040503050406030204" pitchFamily="18" charset="0"/>
+                                  </a:rPr>
+                                  <m:t>𝑦</m:t>
+                                </m:r>
+                              </m:e>
+                              <m:sub>
+                                <m:r>
+                                  <a:rPr lang="en-US" altLang="zh-TW" sz="2000" b="0" i="1" dirty="0" smtClean="0">
+                                    <a:latin typeface="Cambria Math" panose="02040503050406030204" pitchFamily="18" charset="0"/>
+                                  </a:rPr>
+                                  <m:t>𝑖</m:t>
+                                </m:r>
+                              </m:sub>
+                            </m:sSub>
+                          </m:num>
+                          <m:den>
+                            <m:sSub>
+                              <m:sSubPr>
+                                <m:ctrlPr>
+                                  <a:rPr lang="en-US" altLang="zh-TW" sz="2000" i="1" dirty="0" smtClean="0">
+                                    <a:latin typeface="Cambria Math" panose="02040503050406030204" pitchFamily="18" charset="0"/>
+                                  </a:rPr>
+                                </m:ctrlPr>
+                              </m:sSubPr>
+                              <m:e>
+                                <m:r>
+                                  <a:rPr lang="en-US" altLang="zh-TW" sz="2000" i="1" dirty="0" smtClean="0">
+                                    <a:latin typeface="Cambria Math" panose="02040503050406030204" pitchFamily="18" charset="0"/>
+                                    <a:ea typeface="Cambria Math" panose="02040503050406030204" pitchFamily="18" charset="0"/>
+                                  </a:rPr>
+                                  <m:t>𝜋</m:t>
+                                </m:r>
+                              </m:e>
+                              <m:sub>
+                                <m:r>
+                                  <a:rPr lang="en-US" altLang="zh-TW" sz="2000" b="0" i="1" dirty="0" smtClean="0">
+                                    <a:latin typeface="Cambria Math" panose="02040503050406030204" pitchFamily="18" charset="0"/>
+                                  </a:rPr>
+                                  <m:t>𝑖</m:t>
+                                </m:r>
+                              </m:sub>
+                            </m:sSub>
+                          </m:den>
+                        </m:f>
+                      </m:e>
+                    </m:nary>
+                  </m:oMath>
+                </a14:m>
+                <a:r>
+                  <a:rPr lang="en-US" altLang="zh-TW" sz="2000" dirty="0"/>
+                  <a:t> </a:t>
+                </a:r>
+                <a:r>
+                  <a:rPr lang="zh-TW" altLang="en-US" sz="2000" dirty="0"/>
+                  <a:t>。</a:t>
+                </a:r>
+                <a14:m>
+                  <m:oMath xmlns:m="http://schemas.openxmlformats.org/officeDocument/2006/math">
+                    <m:sSub>
+                      <m:sSubPr>
+                        <m:ctrlPr>
+                          <a:rPr lang="en-US" altLang="zh-TW" sz="2000" i="1" dirty="0" smtClean="0">
+                            <a:latin typeface="Cambria Math" panose="02040503050406030204" pitchFamily="18" charset="0"/>
+                          </a:rPr>
+                        </m:ctrlPr>
+                      </m:sSubPr>
+                      <m:e>
+                        <m:r>
+                          <a:rPr lang="en-US" altLang="zh-TW" sz="2000" i="1" dirty="0" smtClean="0">
+                            <a:latin typeface="Cambria Math" panose="02040503050406030204" pitchFamily="18" charset="0"/>
+                            <a:ea typeface="Cambria Math" panose="02040503050406030204" pitchFamily="18" charset="0"/>
+                          </a:rPr>
+                          <m:t>𝜋</m:t>
+                        </m:r>
+                      </m:e>
+                      <m:sub>
+                        <m:r>
+                          <a:rPr lang="en-US" altLang="zh-TW" sz="2000" b="0" i="1" dirty="0" smtClean="0">
+                            <a:latin typeface="Cambria Math" panose="02040503050406030204" pitchFamily="18" charset="0"/>
+                          </a:rPr>
+                          <m:t>𝑖</m:t>
+                        </m:r>
+                      </m:sub>
+                    </m:sSub>
+                  </m:oMath>
+                </a14:m>
+                <a:r>
+                  <a:rPr lang="zh-TW" altLang="en-US" sz="2000" dirty="0"/>
+                  <a:t>是被抽中的機率。</a:t>
+                </a:r>
+                <a:endParaRPr lang="en-US" altLang="zh-TW" sz="2000" dirty="0"/>
+              </a:p>
+              <a:p>
+                <a:pPr>
+                  <a:lnSpc>
+                    <a:spcPct val="150000"/>
+                  </a:lnSpc>
+                  <a:buFont typeface="Wingdings" pitchFamily="2" charset="2"/>
+                  <a:buChar char="l"/>
+                </a:pPr>
+                <a:r>
+                  <a:rPr lang="zh-TW" altLang="en-US" sz="2000" dirty="0"/>
+                  <a:t>例如有</a:t>
+                </a:r>
+                <a:r>
+                  <a:rPr lang="en-US" altLang="zh-TW" sz="2000" dirty="0"/>
+                  <a:t>10</a:t>
+                </a:r>
+                <a:r>
+                  <a:rPr lang="zh-TW" altLang="en-US" sz="2000" dirty="0"/>
+                  <a:t>人，已知有</a:t>
+                </a:r>
+                <a:r>
+                  <a:rPr lang="en-US" altLang="zh-TW" sz="2000" dirty="0"/>
+                  <a:t>8</a:t>
+                </a:r>
+                <a:r>
+                  <a:rPr lang="zh-TW" altLang="en-US" sz="2000" dirty="0"/>
+                  <a:t>人的年薪是</a:t>
+                </a:r>
+                <a:r>
+                  <a:rPr lang="en-US" altLang="zh-TW" sz="2000" dirty="0"/>
+                  <a:t>100</a:t>
+                </a:r>
+                <a:r>
+                  <a:rPr lang="zh-TW" altLang="en-US" sz="2000" dirty="0"/>
+                  <a:t>萬，</a:t>
+                </a:r>
+                <a:r>
+                  <a:rPr lang="en-US" altLang="zh-TW" sz="2000" dirty="0"/>
+                  <a:t>2</a:t>
+                </a:r>
+                <a:r>
+                  <a:rPr lang="zh-TW" altLang="en-US" sz="2000" dirty="0"/>
+                  <a:t>人的年薪是</a:t>
+                </a:r>
+                <a:r>
+                  <a:rPr lang="en-US" altLang="zh-TW" sz="2000" dirty="0"/>
+                  <a:t>20</a:t>
+                </a:r>
+                <a:r>
+                  <a:rPr lang="zh-TW" altLang="en-US" sz="2000" dirty="0"/>
+                  <a:t>萬，如果只能抽出一位，請問年薪的估計是多少？如果抽中年薪</a:t>
+                </a:r>
+                <a:r>
+                  <a:rPr lang="en-US" altLang="zh-TW" sz="2000" dirty="0"/>
+                  <a:t>100</a:t>
+                </a:r>
+                <a:r>
+                  <a:rPr lang="zh-TW" altLang="en-US" sz="2000" dirty="0"/>
+                  <a:t>萬的</a:t>
+                </a:r>
+                <a:r>
+                  <a:rPr lang="en-US" altLang="zh-TW" sz="2000" dirty="0"/>
+                  <a:t>8</a:t>
+                </a:r>
+                <a:r>
+                  <a:rPr lang="zh-TW" altLang="en-US" sz="2000" dirty="0"/>
+                  <a:t>個人其中之一，</a:t>
+                </a:r>
+                <a:r>
+                  <a:rPr lang="en-US" altLang="zh-TW" sz="2000" dirty="0"/>
+                  <a:t>100</a:t>
+                </a:r>
+                <a:r>
+                  <a:rPr lang="zh-TW" altLang="en-US" sz="2000" dirty="0"/>
+                  <a:t>萬雖然是無偏估計，卻不如用</a:t>
+                </a:r>
+                <a:r>
+                  <a:rPr lang="en-US" altLang="zh-TW" sz="2000" dirty="0"/>
+                  <a:t>H-Y</a:t>
+                </a:r>
+                <a:r>
+                  <a:rPr lang="zh-TW" altLang="en-US" sz="2000" dirty="0"/>
+                  <a:t>估計式：</a:t>
+                </a:r>
+                <a14:m>
+                  <m:oMath xmlns:m="http://schemas.openxmlformats.org/officeDocument/2006/math">
+                    <m:f>
+                      <m:fPr>
+                        <m:ctrlPr>
+                          <a:rPr lang="en-US" altLang="zh-TW" sz="2000" i="1" smtClean="0">
+                            <a:latin typeface="Cambria Math" panose="02040503050406030204" pitchFamily="18" charset="0"/>
+                          </a:rPr>
+                        </m:ctrlPr>
+                      </m:fPr>
+                      <m:num>
+                        <m:r>
+                          <a:rPr lang="en-US" altLang="zh-TW" sz="2000" b="0" i="1" smtClean="0">
+                            <a:latin typeface="Cambria Math" panose="02040503050406030204" pitchFamily="18" charset="0"/>
+                          </a:rPr>
+                          <m:t>100</m:t>
+                        </m:r>
+                      </m:num>
+                      <m:den>
+                        <m:r>
+                          <a:rPr lang="en-US" altLang="zh-TW" sz="2000" b="0" i="1" smtClean="0">
+                            <a:latin typeface="Cambria Math" panose="02040503050406030204" pitchFamily="18" charset="0"/>
+                          </a:rPr>
+                          <m:t>0.1</m:t>
+                        </m:r>
+                      </m:den>
+                    </m:f>
+                    <m:r>
+                      <a:rPr lang="en-US" altLang="zh-TW" sz="2000" b="0" i="1" smtClean="0">
+                        <a:latin typeface="Cambria Math" panose="02040503050406030204" pitchFamily="18" charset="0"/>
+                      </a:rPr>
+                      <m:t>=1000</m:t>
+                    </m:r>
+                    <m:r>
+                      <a:rPr lang="zh-TW" altLang="en-US" sz="2000" i="1">
+                        <a:latin typeface="Cambria Math" panose="02040503050406030204" pitchFamily="18" charset="0"/>
+                      </a:rPr>
+                      <m:t>萬</m:t>
+                    </m:r>
+                    <m:r>
+                      <a:rPr lang="zh-TW" altLang="en-US" sz="2000" i="1" smtClean="0">
+                        <a:latin typeface="Cambria Math" panose="02040503050406030204" pitchFamily="18" charset="0"/>
+                      </a:rPr>
+                      <m:t>。</m:t>
+                    </m:r>
+                    <m:r>
+                      <a:rPr lang="en-US" altLang="zh-TW" sz="2000" b="0" i="1" smtClean="0">
+                        <a:latin typeface="Cambria Math" panose="02040503050406030204" pitchFamily="18" charset="0"/>
+                      </a:rPr>
+                      <m:t> </m:t>
+                    </m:r>
+                    <m:r>
+                      <a:rPr lang="zh-TW" altLang="en-US" sz="2000" i="1">
+                        <a:latin typeface="Cambria Math" panose="02040503050406030204" pitchFamily="18" charset="0"/>
+                      </a:rPr>
+                      <m:t>如果抽中</m:t>
+                    </m:r>
+                    <m:r>
+                      <a:rPr lang="zh-TW" altLang="en-US" sz="2000" i="1" smtClean="0">
+                        <a:latin typeface="Cambria Math" panose="02040503050406030204" pitchFamily="18" charset="0"/>
+                      </a:rPr>
+                      <m:t>年薪</m:t>
+                    </m:r>
+                    <m:r>
+                      <a:rPr lang="en-US" altLang="zh-TW" sz="2000" b="0" i="1" smtClean="0">
+                        <a:latin typeface="Cambria Math" panose="02040503050406030204" pitchFamily="18" charset="0"/>
+                      </a:rPr>
+                      <m:t>20</m:t>
+                    </m:r>
+                    <m:r>
+                      <a:rPr lang="zh-TW" altLang="en-US" sz="2000" i="1">
+                        <a:latin typeface="Cambria Math" panose="02040503050406030204" pitchFamily="18" charset="0"/>
+                      </a:rPr>
+                      <m:t>萬，則是</m:t>
+                    </m:r>
+                    <m:f>
+                      <m:fPr>
+                        <m:ctrlPr>
+                          <a:rPr lang="en-US" altLang="zh-TW" sz="2000" b="0" i="1" smtClean="0">
+                            <a:latin typeface="Cambria Math" panose="02040503050406030204" pitchFamily="18" charset="0"/>
+                          </a:rPr>
+                        </m:ctrlPr>
+                      </m:fPr>
+                      <m:num>
+                        <m:r>
+                          <a:rPr lang="en-US" altLang="zh-TW" sz="2000" b="0" i="1" smtClean="0">
+                            <a:latin typeface="Cambria Math" panose="02040503050406030204" pitchFamily="18" charset="0"/>
+                          </a:rPr>
+                          <m:t>20</m:t>
+                        </m:r>
+                      </m:num>
+                      <m:den>
+                        <m:r>
+                          <a:rPr lang="en-US" altLang="zh-TW" sz="2000" b="0" i="1" smtClean="0">
+                            <a:latin typeface="Cambria Math" panose="02040503050406030204" pitchFamily="18" charset="0"/>
+                          </a:rPr>
+                          <m:t>0.1</m:t>
+                        </m:r>
+                      </m:den>
+                    </m:f>
+                    <m:r>
+                      <a:rPr lang="en-US" altLang="zh-TW" sz="2000" b="0" i="1" smtClean="0">
+                        <a:latin typeface="Cambria Math" panose="02040503050406030204" pitchFamily="18" charset="0"/>
+                      </a:rPr>
+                      <m:t>=200</m:t>
+                    </m:r>
+                    <m:r>
+                      <a:rPr lang="zh-TW" altLang="en-US" sz="2000" i="1">
+                        <a:latin typeface="Cambria Math" panose="02040503050406030204" pitchFamily="18" charset="0"/>
+                      </a:rPr>
+                      <m:t>萬。</m:t>
+                    </m:r>
+                    <m:r>
+                      <a:rPr lang="zh-TW" altLang="en-US" sz="2000" i="1" smtClean="0">
+                        <a:latin typeface="Cambria Math" panose="02040503050406030204" pitchFamily="18" charset="0"/>
+                      </a:rPr>
+                      <m:t>期望值</m:t>
+                    </m:r>
+                    <m:r>
+                      <a:rPr lang="en-US" altLang="zh-TW" sz="2000" b="0" i="1" smtClean="0">
+                        <a:latin typeface="Cambria Math" panose="02040503050406030204" pitchFamily="18" charset="0"/>
+                      </a:rPr>
+                      <m:t>=</m:t>
+                    </m:r>
+                    <m:d>
+                      <m:dPr>
+                        <m:ctrlPr>
+                          <a:rPr lang="en-US" altLang="zh-TW" sz="2000" b="0" i="1" smtClean="0">
+                            <a:latin typeface="Cambria Math" panose="02040503050406030204" pitchFamily="18" charset="0"/>
+                          </a:rPr>
+                        </m:ctrlPr>
+                      </m:dPr>
+                      <m:e>
+                        <m:r>
+                          <a:rPr lang="en-US" altLang="zh-TW" sz="2000" b="0" i="1" smtClean="0">
+                            <a:latin typeface="Cambria Math" panose="02040503050406030204" pitchFamily="18" charset="0"/>
+                          </a:rPr>
+                          <m:t>0.8</m:t>
+                        </m:r>
+                        <m:r>
+                          <a:rPr lang="en-US" altLang="zh-TW" sz="2000" b="0" i="1" smtClean="0">
+                            <a:latin typeface="Cambria Math" panose="02040503050406030204" pitchFamily="18" charset="0"/>
+                            <a:ea typeface="Cambria Math" panose="02040503050406030204" pitchFamily="18" charset="0"/>
+                          </a:rPr>
+                          <m:t>×1000</m:t>
+                        </m:r>
+                      </m:e>
+                    </m:d>
+                    <m:r>
+                      <a:rPr lang="en-US" altLang="zh-TW" sz="2000" b="0" i="1" smtClean="0">
+                        <a:latin typeface="Cambria Math" panose="02040503050406030204" pitchFamily="18" charset="0"/>
+                        <a:ea typeface="Cambria Math" panose="02040503050406030204" pitchFamily="18" charset="0"/>
+                      </a:rPr>
+                      <m:t>+</m:t>
+                    </m:r>
+                    <m:d>
+                      <m:dPr>
+                        <m:ctrlPr>
+                          <a:rPr lang="en-US" altLang="zh-TW" sz="2000" b="0" i="1" smtClean="0">
+                            <a:latin typeface="Cambria Math" panose="02040503050406030204" pitchFamily="18" charset="0"/>
+                            <a:ea typeface="Cambria Math" panose="02040503050406030204" pitchFamily="18" charset="0"/>
+                          </a:rPr>
+                        </m:ctrlPr>
+                      </m:dPr>
+                      <m:e>
+                        <m:r>
+                          <a:rPr lang="en-US" altLang="zh-TW" sz="2000" b="0" i="1" smtClean="0">
+                            <a:latin typeface="Cambria Math" panose="02040503050406030204" pitchFamily="18" charset="0"/>
+                            <a:ea typeface="Cambria Math" panose="02040503050406030204" pitchFamily="18" charset="0"/>
+                          </a:rPr>
+                          <m:t>0.2×200</m:t>
+                        </m:r>
+                      </m:e>
+                    </m:d>
+                    <m:r>
+                      <a:rPr lang="en-US" altLang="zh-TW" sz="2000" b="0" i="1" smtClean="0">
+                        <a:latin typeface="Cambria Math" panose="02040503050406030204" pitchFamily="18" charset="0"/>
+                        <a:ea typeface="Cambria Math" panose="02040503050406030204" pitchFamily="18" charset="0"/>
+                      </a:rPr>
+                      <m:t>=800+40=840</m:t>
+                    </m:r>
+                    <m:r>
+                      <a:rPr lang="zh-TW" altLang="en-US" sz="2000" i="1">
+                        <a:latin typeface="Cambria Math" panose="02040503050406030204" pitchFamily="18" charset="0"/>
+                        <a:ea typeface="Cambria Math" panose="02040503050406030204" pitchFamily="18" charset="0"/>
+                      </a:rPr>
+                      <m:t>萬。</m:t>
+                    </m:r>
+                  </m:oMath>
+                </a14:m>
+                <a:r>
+                  <a:rPr lang="en-US" altLang="zh-TW" sz="2000" dirty="0"/>
+                  <a:t> 840</a:t>
+                </a:r>
+                <a:r>
+                  <a:rPr lang="zh-TW" altLang="en-US" sz="2000" dirty="0"/>
+                  <a:t>萬剛好是這</a:t>
+                </a:r>
+                <a:r>
+                  <a:rPr lang="en-US" altLang="zh-TW" sz="2000" dirty="0"/>
+                  <a:t>10</a:t>
+                </a:r>
+                <a:r>
+                  <a:rPr lang="zh-TW" altLang="en-US" sz="2000" dirty="0"/>
+                  <a:t>個人的總年薪。</a:t>
+                </a:r>
+                <a:endParaRPr lang="en-US" altLang="zh-TW" sz="2000" dirty="0"/>
+              </a:p>
+              <a:p>
+                <a:pPr>
+                  <a:lnSpc>
+                    <a:spcPct val="150000"/>
+                  </a:lnSpc>
+                  <a:buFont typeface="Wingdings" pitchFamily="2" charset="2"/>
+                  <a:buChar char="l"/>
+                </a:pPr>
+                <a:r>
+                  <a:rPr lang="zh-TW" altLang="en-US" sz="2000" dirty="0"/>
+                  <a:t>入選機率只要不是 </a:t>
+                </a:r>
+                <a:r>
+                  <a:rPr lang="en-US" altLang="zh-TW" sz="2000" dirty="0"/>
+                  <a:t>0</a:t>
+                </a:r>
+                <a:r>
+                  <a:rPr lang="zh-TW" altLang="en-US" sz="2000" dirty="0"/>
+                  <a:t>，在計算時除回正確的 </a:t>
+                </a:r>
+                <a14:m>
+                  <m:oMath xmlns:m="http://schemas.openxmlformats.org/officeDocument/2006/math">
+                    <m:sSub>
+                      <m:sSubPr>
+                        <m:ctrlPr>
+                          <a:rPr lang="en-US" altLang="zh-TW" sz="2000" i="1" smtClean="0">
+                            <a:latin typeface="Cambria Math" panose="02040503050406030204" pitchFamily="18" charset="0"/>
+                          </a:rPr>
+                        </m:ctrlPr>
+                      </m:sSubPr>
+                      <m:e>
+                        <m:r>
+                          <a:rPr lang="en-US" altLang="zh-TW" sz="2000" i="1" smtClean="0">
+                            <a:latin typeface="Cambria Math" panose="02040503050406030204" pitchFamily="18" charset="0"/>
+                            <a:ea typeface="Cambria Math" panose="02040503050406030204" pitchFamily="18" charset="0"/>
+                          </a:rPr>
+                          <m:t>𝜋</m:t>
+                        </m:r>
+                      </m:e>
+                      <m:sub>
+                        <m:r>
+                          <a:rPr lang="en-US" altLang="zh-TW" sz="2000" b="0" i="1" smtClean="0">
+                            <a:latin typeface="Cambria Math" panose="02040503050406030204" pitchFamily="18" charset="0"/>
+                          </a:rPr>
+                          <m:t>𝑖</m:t>
+                        </m:r>
+                      </m:sub>
+                    </m:sSub>
+                  </m:oMath>
+                </a14:m>
+                <a:r>
+                  <a:rPr lang="zh-TW" altLang="en" sz="2000" dirty="0"/>
+                  <a:t>，</a:t>
+                </a:r>
+                <a:r>
+                  <a:rPr lang="zh-TW" altLang="en-US" sz="2000" dirty="0"/>
+                  <a:t>算出的總收入會等於母體。期望值寫成：</a:t>
+                </a:r>
+                <a14:m>
+                  <m:oMath xmlns:m="http://schemas.openxmlformats.org/officeDocument/2006/math">
+                    <m:nary>
+                      <m:naryPr>
+                        <m:chr m:val="∑"/>
+                        <m:ctrlPr>
+                          <a:rPr lang="zh-TW" altLang="en-US" sz="2000" i="1" smtClean="0">
+                            <a:latin typeface="Cambria Math" panose="02040503050406030204" pitchFamily="18" charset="0"/>
+                          </a:rPr>
+                        </m:ctrlPr>
+                      </m:naryPr>
+                      <m:sub>
+                        <m:r>
+                          <m:rPr>
+                            <m:brk m:alnAt="23"/>
+                          </m:rPr>
+                          <a:rPr lang="en-US" altLang="zh-TW" sz="2000" b="0" i="1" smtClean="0">
+                            <a:latin typeface="Cambria Math" panose="02040503050406030204" pitchFamily="18" charset="0"/>
+                          </a:rPr>
+                          <m:t>𝑖</m:t>
+                        </m:r>
+                        <m:r>
+                          <a:rPr lang="en-US" altLang="zh-TW" sz="2000" b="0" i="1" smtClean="0">
+                            <a:latin typeface="Cambria Math" panose="02040503050406030204" pitchFamily="18" charset="0"/>
+                          </a:rPr>
+                          <m:t>=1</m:t>
+                        </m:r>
+                      </m:sub>
+                      <m:sup>
+                        <m:r>
+                          <a:rPr lang="en-US" altLang="zh-TW" sz="2000" b="0" i="1" smtClean="0">
+                            <a:latin typeface="Cambria Math" panose="02040503050406030204" pitchFamily="18" charset="0"/>
+                          </a:rPr>
+                          <m:t>𝑁</m:t>
+                        </m:r>
+                      </m:sup>
+                      <m:e>
+                        <m:sSub>
+                          <m:sSubPr>
+                            <m:ctrlPr>
+                              <a:rPr lang="en-US" altLang="zh-TW" sz="2000" i="1" smtClean="0">
+                                <a:latin typeface="Cambria Math" panose="02040503050406030204" pitchFamily="18" charset="0"/>
+                              </a:rPr>
+                            </m:ctrlPr>
+                          </m:sSubPr>
+                          <m:e>
+                            <m:r>
+                              <a:rPr lang="en-US" altLang="zh-TW" sz="2000" i="1" smtClean="0">
+                                <a:latin typeface="Cambria Math" panose="02040503050406030204" pitchFamily="18" charset="0"/>
+                                <a:ea typeface="Cambria Math" panose="02040503050406030204" pitchFamily="18" charset="0"/>
+                              </a:rPr>
+                              <m:t>𝜋</m:t>
+                            </m:r>
+                          </m:e>
+                          <m:sub>
+                            <m:r>
+                              <a:rPr lang="en-US" altLang="zh-TW" sz="2000" b="0" i="1" smtClean="0">
+                                <a:latin typeface="Cambria Math" panose="02040503050406030204" pitchFamily="18" charset="0"/>
+                              </a:rPr>
+                              <m:t>𝑖</m:t>
+                            </m:r>
+                          </m:sub>
+                        </m:sSub>
+                        <m:f>
+                          <m:fPr>
+                            <m:ctrlPr>
+                              <a:rPr lang="en-US" altLang="zh-TW" sz="2000" i="1" smtClean="0">
+                                <a:latin typeface="Cambria Math" panose="02040503050406030204" pitchFamily="18" charset="0"/>
+                              </a:rPr>
+                            </m:ctrlPr>
+                          </m:fPr>
+                          <m:num>
+                            <m:sSub>
+                              <m:sSubPr>
+                                <m:ctrlPr>
+                                  <a:rPr lang="en-US" altLang="zh-TW" sz="2000" i="1" smtClean="0">
+                                    <a:latin typeface="Cambria Math" panose="02040503050406030204" pitchFamily="18" charset="0"/>
+                                  </a:rPr>
+                                </m:ctrlPr>
+                              </m:sSubPr>
+                              <m:e>
+                                <m:r>
+                                  <a:rPr lang="en-US" altLang="zh-TW" sz="2000" b="0" i="1" smtClean="0">
+                                    <a:latin typeface="Cambria Math" panose="02040503050406030204" pitchFamily="18" charset="0"/>
+                                  </a:rPr>
+                                  <m:t>𝑦</m:t>
+                                </m:r>
+                              </m:e>
+                              <m:sub>
+                                <m:r>
+                                  <a:rPr lang="en-US" altLang="zh-TW" sz="2000" b="0" i="1" smtClean="0">
+                                    <a:latin typeface="Cambria Math" panose="02040503050406030204" pitchFamily="18" charset="0"/>
+                                  </a:rPr>
+                                  <m:t>𝑖</m:t>
+                                </m:r>
+                              </m:sub>
+                            </m:sSub>
+                          </m:num>
+                          <m:den>
+                            <m:sSub>
+                              <m:sSubPr>
+                                <m:ctrlPr>
+                                  <a:rPr lang="en-US" altLang="zh-TW" sz="2000" i="1" smtClean="0">
+                                    <a:latin typeface="Cambria Math" panose="02040503050406030204" pitchFamily="18" charset="0"/>
+                                  </a:rPr>
+                                </m:ctrlPr>
+                              </m:sSubPr>
+                              <m:e>
+                                <m:r>
+                                  <a:rPr lang="en-US" altLang="zh-TW" sz="2000" i="1" smtClean="0">
+                                    <a:latin typeface="Cambria Math" panose="02040503050406030204" pitchFamily="18" charset="0"/>
+                                    <a:ea typeface="Cambria Math" panose="02040503050406030204" pitchFamily="18" charset="0"/>
+                                  </a:rPr>
+                                  <m:t>𝜋</m:t>
+                                </m:r>
+                              </m:e>
+                              <m:sub>
+                                <m:r>
+                                  <a:rPr lang="en-US" altLang="zh-TW" sz="2000" b="0" i="1" smtClean="0">
+                                    <a:latin typeface="Cambria Math" panose="02040503050406030204" pitchFamily="18" charset="0"/>
+                                  </a:rPr>
+                                  <m:t>𝑖</m:t>
+                                </m:r>
+                              </m:sub>
+                            </m:sSub>
+                          </m:den>
+                        </m:f>
+                        <m:r>
+                          <a:rPr lang="en-US" altLang="zh-TW" sz="2000" b="0" i="1" smtClean="0">
+                            <a:latin typeface="Cambria Math" panose="02040503050406030204" pitchFamily="18" charset="0"/>
+                          </a:rPr>
+                          <m:t>=</m:t>
+                        </m:r>
+                      </m:e>
+                    </m:nary>
+                    <m:nary>
+                      <m:naryPr>
+                        <m:chr m:val="∑"/>
+                        <m:ctrlPr>
+                          <a:rPr lang="zh-TW" altLang="en-US" sz="2000" i="1">
+                            <a:latin typeface="Cambria Math" panose="02040503050406030204" pitchFamily="18" charset="0"/>
+                          </a:rPr>
+                        </m:ctrlPr>
+                      </m:naryPr>
+                      <m:sub>
+                        <m:r>
+                          <m:rPr>
+                            <m:brk m:alnAt="23"/>
+                          </m:rPr>
+                          <a:rPr lang="en-US" altLang="zh-TW" sz="2000" i="1">
+                            <a:latin typeface="Cambria Math" panose="02040503050406030204" pitchFamily="18" charset="0"/>
+                          </a:rPr>
+                          <m:t>𝑖</m:t>
+                        </m:r>
+                        <m:r>
+                          <a:rPr lang="en-US" altLang="zh-TW" sz="2000" i="1">
+                            <a:latin typeface="Cambria Math" panose="02040503050406030204" pitchFamily="18" charset="0"/>
+                          </a:rPr>
+                          <m:t>=1</m:t>
+                        </m:r>
+                      </m:sub>
+                      <m:sup>
+                        <m:r>
+                          <a:rPr lang="en-US" altLang="zh-TW" sz="2000" i="1">
+                            <a:latin typeface="Cambria Math" panose="02040503050406030204" pitchFamily="18" charset="0"/>
+                          </a:rPr>
+                          <m:t>𝑁</m:t>
+                        </m:r>
+                      </m:sup>
+                      <m:e>
+                        <m:sSub>
+                          <m:sSubPr>
+                            <m:ctrlPr>
+                              <a:rPr lang="en-US" altLang="zh-TW" sz="2000" i="1">
+                                <a:latin typeface="Cambria Math" panose="02040503050406030204" pitchFamily="18" charset="0"/>
+                              </a:rPr>
+                            </m:ctrlPr>
+                          </m:sSubPr>
+                          <m:e>
+                            <m:r>
+                              <a:rPr lang="en-US" altLang="zh-TW" sz="2000" b="0" i="1" smtClean="0">
+                                <a:latin typeface="Cambria Math" panose="02040503050406030204" pitchFamily="18" charset="0"/>
+                                <a:ea typeface="Cambria Math" panose="02040503050406030204" pitchFamily="18" charset="0"/>
+                              </a:rPr>
+                              <m:t>𝑦</m:t>
+                            </m:r>
+                          </m:e>
+                          <m:sub>
+                            <m:r>
+                              <a:rPr lang="en-US" altLang="zh-TW" sz="2000" i="1">
+                                <a:latin typeface="Cambria Math" panose="02040503050406030204" pitchFamily="18" charset="0"/>
+                              </a:rPr>
+                              <m:t>𝑖</m:t>
+                            </m:r>
+                          </m:sub>
+                        </m:sSub>
+                      </m:e>
+                    </m:nary>
+                  </m:oMath>
+                </a14:m>
+                <a:endParaRPr lang="en-US" altLang="ja-JP" sz="2000" dirty="0"/>
+              </a:p>
+              <a:p>
+                <a:pPr marL="0" indent="0">
+                  <a:buNone/>
+                </a:pPr>
+                <a:endParaRPr lang="en-US" dirty="0"/>
+              </a:p>
+            </p:txBody>
+          </p:sp>
+        </mc:Choice>
+        <mc:Fallback xmlns="">
+          <p:sp>
+            <p:nvSpPr>
+              <p:cNvPr id="3" name="Content Placeholder 2">
+                <a:extLst>
+                  <a:ext uri="{FF2B5EF4-FFF2-40B4-BE49-F238E27FC236}">
+                    <a16:creationId xmlns:a16="http://schemas.microsoft.com/office/drawing/2014/main" id="{CFAE9C41-B4EA-2EE4-7488-91928CBB72B4}"/>
+                  </a:ext>
+                </a:extLst>
+              </p:cNvPr>
+              <p:cNvSpPr>
+                <a:spLocks noGrp="1" noRot="1" noChangeAspect="1" noMove="1" noResize="1" noEditPoints="1" noAdjustHandles="1" noChangeArrowheads="1" noChangeShapeType="1" noTextEdit="1"/>
+              </p:cNvSpPr>
+              <p:nvPr>
+                <p:ph idx="1"/>
+              </p:nvPr>
+            </p:nvSpPr>
+            <p:spPr>
+              <a:blipFill>
+                <a:blip r:embed="rId2"/>
+                <a:stretch>
+                  <a:fillRect l="-1086" r="-603" b="-8721"/>
+                </a:stretch>
+              </a:blipFill>
+            </p:spPr>
+            <p:txBody>
+              <a:bodyPr/>
+              <a:lstStyle/>
+              <a:p>
+                <a:r>
+                  <a:rPr lang="en-US">
+                    <a:noFill/>
+                  </a:rPr>
+                  <a:t> </a:t>
+                </a:r>
+              </a:p>
+            </p:txBody>
+          </p:sp>
+        </mc:Fallback>
+      </mc:AlternateContent>
+      <p:sp>
+        <p:nvSpPr>
+          <p:cNvPr id="4" name="Slide Number Placeholder 3">
+            <a:extLst>
+              <a:ext uri="{FF2B5EF4-FFF2-40B4-BE49-F238E27FC236}">
+                <a16:creationId xmlns:a16="http://schemas.microsoft.com/office/drawing/2014/main" id="{2A1B54FE-2AC9-E283-7F28-80727A4EC28D}"/>
+              </a:ext>
+            </a:extLst>
+          </p:cNvPr>
+          <p:cNvSpPr>
+            <a:spLocks noGrp="1"/>
+          </p:cNvSpPr>
+          <p:nvPr>
+            <p:ph type="sldNum" sz="quarter" idx="12"/>
+          </p:nvPr>
+        </p:nvSpPr>
+        <p:spPr/>
+        <p:txBody>
+          <a:bodyPr/>
+          <a:lstStyle/>
+          <a:p>
+            <a:fld id="{34E21383-B02B-694B-B2AD-A967203CDE86}" type="slidenum">
+              <a:rPr lang="en-US" smtClean="0"/>
+              <a:t>10</a:t>
+            </a:fld>
+            <a:endParaRPr lang="en-US"/>
+          </a:p>
+        </p:txBody>
+      </p:sp>
+    </p:spTree>
+    <p:extLst>
+      <p:ext uri="{BB962C8B-B14F-4D97-AF65-F5344CB8AC3E}">
+        <p14:creationId xmlns:p14="http://schemas.microsoft.com/office/powerpoint/2010/main" val="1597800765"/>
+      </p:ext>
+    </p:extLst>
+  </p:cSld>
+  <p:clrMapOvr>
+    <a:masterClrMapping/>
+  </p:clrMapOvr>
+</p:sld>
+</file>
+
+<file path=ppt/slides/slide11.xml><?xml version="1.0" encoding="utf-8"?>
+<p:sld xmlns:a="http://schemas.openxmlformats.org/drawingml/2006/main" xmlns:r="http://schemas.openxmlformats.org/officeDocument/2006/relationships" xmlns:p="http://schemas.openxmlformats.org/presentationml/2006/main">
+  <p:cSld>
+    <p:spTree>
+      <p:nvGrpSpPr>
+        <p:cNvPr id="1" name=""/>
+        <p:cNvGrpSpPr/>
+        <p:nvPr/>
+      </p:nvGrpSpPr>
+      <p:grpSpPr>
+        <a:xfrm>
+          <a:off x="0" y="0"/>
+          <a:ext cx="0" cy="0"/>
+          <a:chOff x="0" y="0"/>
+          <a:chExt cx="0" cy="0"/>
+        </a:xfrm>
+      </p:grpSpPr>
+      <p:sp>
+        <p:nvSpPr>
+          <p:cNvPr id="2" name="標題 1">
+            <a:extLst>
+              <a:ext uri="{FF2B5EF4-FFF2-40B4-BE49-F238E27FC236}">
+                <a16:creationId xmlns:a16="http://schemas.microsoft.com/office/drawing/2014/main" id="{16EB92D8-39C7-1636-8E9E-421E554925B5}"/>
+              </a:ext>
+            </a:extLst>
+          </p:cNvPr>
+          <p:cNvSpPr>
+            <a:spLocks noGrp="1"/>
+          </p:cNvSpPr>
+          <p:nvPr>
+            <p:ph type="title"/>
+          </p:nvPr>
+        </p:nvSpPr>
+        <p:spPr/>
+        <p:txBody>
+          <a:bodyPr/>
+          <a:lstStyle/>
+          <a:p>
+            <a:r>
+              <a:rPr lang="ja-JP" altLang="en-US"/>
+              <a:t>機率抽樣的元素（四）</a:t>
+            </a:r>
+            <a:endParaRPr kumimoji="1" lang="zh-TW" altLang="en-US" dirty="0"/>
+          </a:p>
+        </p:txBody>
+      </p:sp>
+      <mc:AlternateContent xmlns:mc="http://schemas.openxmlformats.org/markup-compatibility/2006" xmlns:a14="http://schemas.microsoft.com/office/drawing/2010/main">
+        <mc:Choice Requires="a14">
+          <p:sp>
+            <p:nvSpPr>
+              <p:cNvPr id="3" name="內容版面配置區 2">
+                <a:extLst>
+                  <a:ext uri="{FF2B5EF4-FFF2-40B4-BE49-F238E27FC236}">
+                    <a16:creationId xmlns:a16="http://schemas.microsoft.com/office/drawing/2014/main" id="{D77F4EED-7909-5AF8-5411-8811C2034F9D}"/>
+                  </a:ext>
+                </a:extLst>
+              </p:cNvPr>
+              <p:cNvSpPr>
+                <a:spLocks noGrp="1"/>
+              </p:cNvSpPr>
+              <p:nvPr>
+                <p:ph idx="1"/>
+              </p:nvPr>
+            </p:nvSpPr>
+            <p:spPr/>
+            <p:txBody>
+              <a:bodyPr>
+                <a:normAutofit lnSpcReduction="10000"/>
+              </a:bodyPr>
+              <a:lstStyle/>
+              <a:p>
+                <a:pPr>
+                  <a:lnSpc>
+                    <a:spcPct val="150000"/>
+                  </a:lnSpc>
+                </a:pPr>
+                <a:r>
+                  <a:rPr kumimoji="1" lang="zh-TW" altLang="en-US" sz="2000" dirty="0"/>
+                  <a:t>如果已經知道收入高的人的中選機率是收入低的人的</a:t>
+                </a:r>
+                <a:r>
+                  <a:rPr kumimoji="1" lang="en-US" altLang="zh-TW" sz="2000" dirty="0"/>
+                  <a:t>4</a:t>
+                </a:r>
+                <a:r>
+                  <a:rPr kumimoji="1" lang="zh-TW" altLang="en-US" sz="2000" dirty="0"/>
+                  <a:t>倍，只抽出</a:t>
+                </a:r>
+                <a:r>
+                  <a:rPr kumimoji="1" lang="en-US" altLang="zh-TW" sz="2000" dirty="0"/>
+                  <a:t>1</a:t>
+                </a:r>
+                <a:r>
+                  <a:rPr kumimoji="1" lang="zh-TW" altLang="en-US" sz="2000" dirty="0"/>
+                  <a:t>人，也可以用</a:t>
+                </a:r>
+                <a:r>
+                  <a:rPr kumimoji="1" lang="en-US" altLang="zh-TW" sz="2000" dirty="0"/>
+                  <a:t>H-T</a:t>
+                </a:r>
+                <a:r>
+                  <a:rPr kumimoji="1" lang="zh-TW" altLang="en-US" sz="2000" dirty="0"/>
+                  <a:t>估計式。先計算每個人的中選機率：</a:t>
+                </a:r>
+                <a14:m>
+                  <m:oMath xmlns:m="http://schemas.openxmlformats.org/officeDocument/2006/math">
+                    <m:f>
+                      <m:fPr>
+                        <m:ctrlPr>
+                          <a:rPr kumimoji="1" lang="en-US" altLang="zh-TW" sz="2000" i="1" smtClean="0">
+                            <a:latin typeface="Cambria Math" panose="02040503050406030204" pitchFamily="18" charset="0"/>
+                          </a:rPr>
+                        </m:ctrlPr>
+                      </m:fPr>
+                      <m:num>
+                        <m:r>
+                          <a:rPr kumimoji="1" lang="en-US" altLang="zh-TW" sz="2000" b="0" i="1" smtClean="0">
+                            <a:latin typeface="Cambria Math" panose="02040503050406030204" pitchFamily="18" charset="0"/>
+                          </a:rPr>
+                          <m:t>1</m:t>
+                        </m:r>
+                      </m:num>
+                      <m:den>
+                        <m:r>
+                          <a:rPr kumimoji="1" lang="en-US" altLang="zh-TW" sz="2000" b="0" i="1" smtClean="0">
+                            <a:latin typeface="Cambria Math" panose="02040503050406030204" pitchFamily="18" charset="0"/>
+                          </a:rPr>
+                          <m:t>8</m:t>
+                        </m:r>
+                        <m:r>
+                          <a:rPr kumimoji="1" lang="en-US" altLang="zh-TW" sz="2000" b="0" i="1" smtClean="0">
+                            <a:latin typeface="Cambria Math" panose="02040503050406030204" pitchFamily="18" charset="0"/>
+                            <a:ea typeface="Cambria Math" panose="02040503050406030204" pitchFamily="18" charset="0"/>
+                          </a:rPr>
+                          <m:t>×4+2</m:t>
+                        </m:r>
+                      </m:den>
+                    </m:f>
+                    <m:r>
+                      <a:rPr kumimoji="1" lang="en-US" altLang="zh-TW" sz="2000" b="0" i="1" smtClean="0">
+                        <a:latin typeface="Cambria Math" panose="02040503050406030204" pitchFamily="18" charset="0"/>
+                      </a:rPr>
+                      <m:t>=</m:t>
+                    </m:r>
+                    <m:f>
+                      <m:fPr>
+                        <m:ctrlPr>
+                          <a:rPr kumimoji="1" lang="en-US" altLang="zh-TW" sz="2000" b="0" i="1" smtClean="0">
+                            <a:latin typeface="Cambria Math" panose="02040503050406030204" pitchFamily="18" charset="0"/>
+                          </a:rPr>
+                        </m:ctrlPr>
+                      </m:fPr>
+                      <m:num>
+                        <m:r>
+                          <a:rPr kumimoji="1" lang="en-US" altLang="zh-TW" sz="2000" b="0" i="1" smtClean="0">
+                            <a:latin typeface="Cambria Math" panose="02040503050406030204" pitchFamily="18" charset="0"/>
+                          </a:rPr>
+                          <m:t>1</m:t>
+                        </m:r>
+                      </m:num>
+                      <m:den>
+                        <m:r>
+                          <a:rPr kumimoji="1" lang="en-US" altLang="zh-TW" sz="2000" b="0" i="1" smtClean="0">
+                            <a:latin typeface="Cambria Math" panose="02040503050406030204" pitchFamily="18" charset="0"/>
+                          </a:rPr>
+                          <m:t>34</m:t>
+                        </m:r>
+                      </m:den>
+                    </m:f>
+                  </m:oMath>
+                </a14:m>
+                <a:endParaRPr kumimoji="1" lang="en-US" altLang="zh-TW" sz="2000" dirty="0"/>
+              </a:p>
+              <a:p>
+                <a:pPr>
+                  <a:lnSpc>
+                    <a:spcPct val="150000"/>
+                  </a:lnSpc>
+                </a:pPr>
+                <a:r>
+                  <a:rPr kumimoji="1" lang="zh-TW" altLang="en-US" sz="2000" dirty="0"/>
+                  <a:t>期望值：</a:t>
+                </a:r>
+                <a:r>
+                  <a:rPr lang="zh-TW" altLang="en-US" sz="2000" dirty="0"/>
+                  <a:t> </a:t>
+                </a:r>
+                <a14:m>
+                  <m:oMath xmlns:m="http://schemas.openxmlformats.org/officeDocument/2006/math">
+                    <m:nary>
+                      <m:naryPr>
+                        <m:chr m:val="∑"/>
+                        <m:ctrlPr>
+                          <a:rPr lang="zh-TW" altLang="en-US" sz="2000" i="1" smtClean="0">
+                            <a:latin typeface="Cambria Math" panose="02040503050406030204" pitchFamily="18" charset="0"/>
+                          </a:rPr>
+                        </m:ctrlPr>
+                      </m:naryPr>
+                      <m:sub>
+                        <m:r>
+                          <m:rPr>
+                            <m:brk m:alnAt="23"/>
+                          </m:rPr>
+                          <a:rPr lang="en-US" altLang="zh-TW" sz="2000" b="0" i="1" smtClean="0">
+                            <a:latin typeface="Cambria Math" panose="02040503050406030204" pitchFamily="18" charset="0"/>
+                          </a:rPr>
+                          <m:t>𝑖</m:t>
+                        </m:r>
+                        <m:r>
+                          <a:rPr lang="en-US" altLang="zh-TW" sz="2000" b="0" i="1" smtClean="0">
+                            <a:latin typeface="Cambria Math" panose="02040503050406030204" pitchFamily="18" charset="0"/>
+                          </a:rPr>
+                          <m:t>=1</m:t>
+                        </m:r>
+                      </m:sub>
+                      <m:sup>
+                        <m:r>
+                          <a:rPr lang="en-US" altLang="zh-TW" sz="2000" b="0" i="1" smtClean="0">
+                            <a:latin typeface="Cambria Math" panose="02040503050406030204" pitchFamily="18" charset="0"/>
+                          </a:rPr>
+                          <m:t>𝑁</m:t>
+                        </m:r>
+                      </m:sup>
+                      <m:e>
+                        <m:sSub>
+                          <m:sSubPr>
+                            <m:ctrlPr>
+                              <a:rPr lang="en-US" altLang="zh-TW" sz="2000" i="1" smtClean="0">
+                                <a:latin typeface="Cambria Math" panose="02040503050406030204" pitchFamily="18" charset="0"/>
+                              </a:rPr>
+                            </m:ctrlPr>
+                          </m:sSubPr>
+                          <m:e>
+                            <m:r>
+                              <a:rPr lang="en-US" altLang="zh-TW" sz="2000" i="1" smtClean="0">
+                                <a:latin typeface="Cambria Math" panose="02040503050406030204" pitchFamily="18" charset="0"/>
+                                <a:ea typeface="Cambria Math" panose="02040503050406030204" pitchFamily="18" charset="0"/>
+                              </a:rPr>
+                              <m:t>𝜋</m:t>
+                            </m:r>
+                          </m:e>
+                          <m:sub>
+                            <m:r>
+                              <a:rPr lang="en-US" altLang="zh-TW" sz="2000" b="0" i="1" smtClean="0">
+                                <a:latin typeface="Cambria Math" panose="02040503050406030204" pitchFamily="18" charset="0"/>
+                              </a:rPr>
+                              <m:t>𝑖</m:t>
+                            </m:r>
+                          </m:sub>
+                        </m:sSub>
+                        <m:f>
+                          <m:fPr>
+                            <m:ctrlPr>
+                              <a:rPr lang="en-US" altLang="zh-TW" sz="2000" i="1" smtClean="0">
+                                <a:latin typeface="Cambria Math" panose="02040503050406030204" pitchFamily="18" charset="0"/>
+                              </a:rPr>
+                            </m:ctrlPr>
+                          </m:fPr>
+                          <m:num>
+                            <m:sSub>
+                              <m:sSubPr>
+                                <m:ctrlPr>
+                                  <a:rPr lang="en-US" altLang="zh-TW" sz="2000" i="1" smtClean="0">
+                                    <a:latin typeface="Cambria Math" panose="02040503050406030204" pitchFamily="18" charset="0"/>
+                                  </a:rPr>
+                                </m:ctrlPr>
+                              </m:sSubPr>
+                              <m:e>
+                                <m:r>
+                                  <a:rPr lang="en-US" altLang="zh-TW" sz="2000" b="0" i="1" smtClean="0">
+                                    <a:latin typeface="Cambria Math" panose="02040503050406030204" pitchFamily="18" charset="0"/>
+                                  </a:rPr>
+                                  <m:t>𝑦</m:t>
+                                </m:r>
+                              </m:e>
+                              <m:sub>
+                                <m:r>
+                                  <a:rPr lang="en-US" altLang="zh-TW" sz="2000" b="0" i="1" smtClean="0">
+                                    <a:latin typeface="Cambria Math" panose="02040503050406030204" pitchFamily="18" charset="0"/>
+                                  </a:rPr>
+                                  <m:t>𝑖</m:t>
+                                </m:r>
+                              </m:sub>
+                            </m:sSub>
+                          </m:num>
+                          <m:den>
+                            <m:sSub>
+                              <m:sSubPr>
+                                <m:ctrlPr>
+                                  <a:rPr lang="en-US" altLang="zh-TW" sz="2000" i="1" smtClean="0">
+                                    <a:latin typeface="Cambria Math" panose="02040503050406030204" pitchFamily="18" charset="0"/>
+                                  </a:rPr>
+                                </m:ctrlPr>
+                              </m:sSubPr>
+                              <m:e>
+                                <m:r>
+                                  <a:rPr lang="en-US" altLang="zh-TW" sz="2000" i="1" smtClean="0">
+                                    <a:latin typeface="Cambria Math" panose="02040503050406030204" pitchFamily="18" charset="0"/>
+                                    <a:ea typeface="Cambria Math" panose="02040503050406030204" pitchFamily="18" charset="0"/>
+                                  </a:rPr>
+                                  <m:t>𝜋</m:t>
+                                </m:r>
+                              </m:e>
+                              <m:sub>
+                                <m:r>
+                                  <a:rPr lang="en-US" altLang="zh-TW" sz="2000" b="0" i="1" smtClean="0">
+                                    <a:latin typeface="Cambria Math" panose="02040503050406030204" pitchFamily="18" charset="0"/>
+                                  </a:rPr>
+                                  <m:t>𝑖</m:t>
+                                </m:r>
+                              </m:sub>
+                            </m:sSub>
+                          </m:den>
+                        </m:f>
+                        <m:r>
+                          <a:rPr lang="en-US" altLang="zh-TW" sz="2000" b="0" i="1" smtClean="0">
+                            <a:latin typeface="Cambria Math" panose="02040503050406030204" pitchFamily="18" charset="0"/>
+                          </a:rPr>
+                          <m:t>=</m:t>
+                        </m:r>
+                      </m:e>
+                    </m:nary>
+                    <m:r>
+                      <a:rPr lang="en-US" altLang="zh-TW" sz="2000" b="0" i="1" smtClean="0">
+                        <a:latin typeface="Cambria Math" panose="02040503050406030204" pitchFamily="18" charset="0"/>
+                      </a:rPr>
+                      <m:t>8</m:t>
+                    </m:r>
+                    <m:r>
+                      <a:rPr lang="en-US" altLang="zh-TW" sz="2000" b="0" i="1" smtClean="0">
+                        <a:latin typeface="Cambria Math" panose="02040503050406030204" pitchFamily="18" charset="0"/>
+                        <a:ea typeface="Cambria Math" panose="02040503050406030204" pitchFamily="18" charset="0"/>
+                      </a:rPr>
+                      <m:t>×</m:t>
+                    </m:r>
+                    <m:d>
+                      <m:dPr>
+                        <m:ctrlPr>
+                          <a:rPr lang="en-US" altLang="zh-TW" sz="2000" b="0" i="1" smtClean="0">
+                            <a:latin typeface="Cambria Math" panose="02040503050406030204" pitchFamily="18" charset="0"/>
+                          </a:rPr>
+                        </m:ctrlPr>
+                      </m:dPr>
+                      <m:e>
+                        <m:r>
+                          <a:rPr lang="en-US" altLang="zh-TW" sz="2000" b="0" i="1" smtClean="0">
+                            <a:latin typeface="Cambria Math" panose="02040503050406030204" pitchFamily="18" charset="0"/>
+                          </a:rPr>
+                          <m:t>4</m:t>
+                        </m:r>
+                        <m:r>
+                          <a:rPr lang="en-US" altLang="zh-TW" sz="2000" b="0" i="1" smtClean="0">
+                            <a:latin typeface="Cambria Math" panose="02040503050406030204" pitchFamily="18" charset="0"/>
+                            <a:ea typeface="Cambria Math" panose="02040503050406030204" pitchFamily="18" charset="0"/>
+                          </a:rPr>
+                          <m:t>×</m:t>
+                        </m:r>
+                        <m:f>
+                          <m:fPr>
+                            <m:ctrlPr>
+                              <a:rPr lang="en-US" altLang="zh-TW" sz="2000" b="0" i="1" smtClean="0">
+                                <a:latin typeface="Cambria Math" panose="02040503050406030204" pitchFamily="18" charset="0"/>
+                                <a:ea typeface="Cambria Math" panose="02040503050406030204" pitchFamily="18" charset="0"/>
+                              </a:rPr>
+                            </m:ctrlPr>
+                          </m:fPr>
+                          <m:num>
+                            <m:r>
+                              <a:rPr lang="en-US" altLang="zh-TW" sz="2000" b="0" i="1" smtClean="0">
+                                <a:latin typeface="Cambria Math" panose="02040503050406030204" pitchFamily="18" charset="0"/>
+                                <a:ea typeface="Cambria Math" panose="02040503050406030204" pitchFamily="18" charset="0"/>
+                              </a:rPr>
+                              <m:t>1</m:t>
+                            </m:r>
+                          </m:num>
+                          <m:den>
+                            <m:r>
+                              <a:rPr lang="en-US" altLang="zh-TW" sz="2000" b="0" i="1" smtClean="0">
+                                <a:latin typeface="Cambria Math" panose="02040503050406030204" pitchFamily="18" charset="0"/>
+                                <a:ea typeface="Cambria Math" panose="02040503050406030204" pitchFamily="18" charset="0"/>
+                              </a:rPr>
+                              <m:t>34</m:t>
+                            </m:r>
+                          </m:den>
+                        </m:f>
+                        <m:r>
+                          <a:rPr lang="en-US" altLang="zh-TW" sz="2000" b="0" i="1" smtClean="0">
+                            <a:latin typeface="Cambria Math" panose="02040503050406030204" pitchFamily="18" charset="0"/>
+                            <a:ea typeface="Cambria Math" panose="02040503050406030204" pitchFamily="18" charset="0"/>
+                          </a:rPr>
+                          <m:t>×</m:t>
+                        </m:r>
+                        <m:f>
+                          <m:fPr>
+                            <m:ctrlPr>
+                              <a:rPr lang="en-US" altLang="zh-TW" sz="2000" b="0" i="1" smtClean="0">
+                                <a:latin typeface="Cambria Math" panose="02040503050406030204" pitchFamily="18" charset="0"/>
+                                <a:ea typeface="Cambria Math" panose="02040503050406030204" pitchFamily="18" charset="0"/>
+                              </a:rPr>
+                            </m:ctrlPr>
+                          </m:fPr>
+                          <m:num>
+                            <m:r>
+                              <a:rPr lang="en-US" altLang="zh-TW" sz="2000" b="0" i="1" smtClean="0">
+                                <a:latin typeface="Cambria Math" panose="02040503050406030204" pitchFamily="18" charset="0"/>
+                                <a:ea typeface="Cambria Math" panose="02040503050406030204" pitchFamily="18" charset="0"/>
+                              </a:rPr>
+                              <m:t>100</m:t>
+                            </m:r>
+                          </m:num>
+                          <m:den>
+                            <m:r>
+                              <a:rPr lang="en-US" altLang="zh-TW" sz="2000" b="0" i="1" smtClean="0">
+                                <a:latin typeface="Cambria Math" panose="02040503050406030204" pitchFamily="18" charset="0"/>
+                                <a:ea typeface="Cambria Math" panose="02040503050406030204" pitchFamily="18" charset="0"/>
+                              </a:rPr>
+                              <m:t>4×</m:t>
+                            </m:r>
+                            <m:f>
+                              <m:fPr>
+                                <m:ctrlPr>
+                                  <a:rPr lang="en-US" altLang="zh-TW" sz="2000" b="0" i="1" smtClean="0">
+                                    <a:latin typeface="Cambria Math" panose="02040503050406030204" pitchFamily="18" charset="0"/>
+                                    <a:ea typeface="Cambria Math" panose="02040503050406030204" pitchFamily="18" charset="0"/>
+                                  </a:rPr>
+                                </m:ctrlPr>
+                              </m:fPr>
+                              <m:num>
+                                <m:r>
+                                  <a:rPr lang="en-US" altLang="zh-TW" sz="2000" b="0" i="1" smtClean="0">
+                                    <a:latin typeface="Cambria Math" panose="02040503050406030204" pitchFamily="18" charset="0"/>
+                                    <a:ea typeface="Cambria Math" panose="02040503050406030204" pitchFamily="18" charset="0"/>
+                                  </a:rPr>
+                                  <m:t>1</m:t>
+                                </m:r>
+                              </m:num>
+                              <m:den>
+                                <m:r>
+                                  <a:rPr lang="en-US" altLang="zh-TW" sz="2000" b="0" i="1" smtClean="0">
+                                    <a:latin typeface="Cambria Math" panose="02040503050406030204" pitchFamily="18" charset="0"/>
+                                    <a:ea typeface="Cambria Math" panose="02040503050406030204" pitchFamily="18" charset="0"/>
+                                  </a:rPr>
+                                  <m:t>34</m:t>
+                                </m:r>
+                              </m:den>
+                            </m:f>
+                          </m:den>
+                        </m:f>
+                      </m:e>
+                    </m:d>
+                    <m:r>
+                      <a:rPr lang="en-US" altLang="zh-TW" sz="2000" b="0" i="1" smtClean="0">
+                        <a:latin typeface="Cambria Math" panose="02040503050406030204" pitchFamily="18" charset="0"/>
+                        <a:ea typeface="Cambria Math" panose="02040503050406030204" pitchFamily="18" charset="0"/>
+                      </a:rPr>
+                      <m:t>+2×</m:t>
+                    </m:r>
+                    <m:d>
+                      <m:dPr>
+                        <m:ctrlPr>
+                          <a:rPr lang="en-US" altLang="zh-TW" sz="2000" b="0" i="1" smtClean="0">
+                            <a:latin typeface="Cambria Math" panose="02040503050406030204" pitchFamily="18" charset="0"/>
+                            <a:ea typeface="Cambria Math" panose="02040503050406030204" pitchFamily="18" charset="0"/>
+                          </a:rPr>
+                        </m:ctrlPr>
+                      </m:dPr>
+                      <m:e>
+                        <m:f>
+                          <m:fPr>
+                            <m:ctrlPr>
+                              <a:rPr lang="en-US" altLang="zh-TW" sz="2000" b="0" i="1" smtClean="0">
+                                <a:latin typeface="Cambria Math" panose="02040503050406030204" pitchFamily="18" charset="0"/>
+                                <a:ea typeface="Cambria Math" panose="02040503050406030204" pitchFamily="18" charset="0"/>
+                              </a:rPr>
+                            </m:ctrlPr>
+                          </m:fPr>
+                          <m:num>
+                            <m:r>
+                              <a:rPr lang="en-US" altLang="zh-TW" sz="2000" b="0" i="1" smtClean="0">
+                                <a:latin typeface="Cambria Math" panose="02040503050406030204" pitchFamily="18" charset="0"/>
+                                <a:ea typeface="Cambria Math" panose="02040503050406030204" pitchFamily="18" charset="0"/>
+                              </a:rPr>
+                              <m:t>1</m:t>
+                            </m:r>
+                          </m:num>
+                          <m:den>
+                            <m:r>
+                              <a:rPr lang="en-US" altLang="zh-TW" sz="2000" b="0" i="1" smtClean="0">
+                                <a:latin typeface="Cambria Math" panose="02040503050406030204" pitchFamily="18" charset="0"/>
+                                <a:ea typeface="Cambria Math" panose="02040503050406030204" pitchFamily="18" charset="0"/>
+                              </a:rPr>
+                              <m:t>34</m:t>
+                            </m:r>
+                          </m:den>
+                        </m:f>
+                        <m:r>
+                          <a:rPr lang="en-US" altLang="zh-TW" sz="2000" i="1">
+                            <a:latin typeface="Cambria Math" panose="02040503050406030204" pitchFamily="18" charset="0"/>
+                            <a:ea typeface="Cambria Math" panose="02040503050406030204" pitchFamily="18" charset="0"/>
+                          </a:rPr>
+                          <m:t>×</m:t>
+                        </m:r>
+                        <m:f>
+                          <m:fPr>
+                            <m:ctrlPr>
+                              <a:rPr lang="en-US" altLang="zh-TW" sz="2000" i="1" smtClean="0">
+                                <a:latin typeface="Cambria Math" panose="02040503050406030204" pitchFamily="18" charset="0"/>
+                                <a:ea typeface="Cambria Math" panose="02040503050406030204" pitchFamily="18" charset="0"/>
+                              </a:rPr>
+                            </m:ctrlPr>
+                          </m:fPr>
+                          <m:num>
+                            <m:r>
+                              <a:rPr lang="en-US" altLang="zh-TW" sz="2000" b="0" i="1" smtClean="0">
+                                <a:latin typeface="Cambria Math" panose="02040503050406030204" pitchFamily="18" charset="0"/>
+                                <a:ea typeface="Cambria Math" panose="02040503050406030204" pitchFamily="18" charset="0"/>
+                              </a:rPr>
+                              <m:t>20</m:t>
+                            </m:r>
+                          </m:num>
+                          <m:den>
+                            <m:f>
+                              <m:fPr>
+                                <m:ctrlPr>
+                                  <a:rPr lang="en-US" altLang="zh-TW" sz="2000" i="1" smtClean="0">
+                                    <a:latin typeface="Cambria Math" panose="02040503050406030204" pitchFamily="18" charset="0"/>
+                                    <a:ea typeface="Cambria Math" panose="02040503050406030204" pitchFamily="18" charset="0"/>
+                                  </a:rPr>
+                                </m:ctrlPr>
+                              </m:fPr>
+                              <m:num>
+                                <m:r>
+                                  <a:rPr lang="en-US" altLang="zh-TW" sz="2000" b="0" i="1" smtClean="0">
+                                    <a:latin typeface="Cambria Math" panose="02040503050406030204" pitchFamily="18" charset="0"/>
+                                    <a:ea typeface="Cambria Math" panose="02040503050406030204" pitchFamily="18" charset="0"/>
+                                  </a:rPr>
+                                  <m:t>1</m:t>
+                                </m:r>
+                              </m:num>
+                              <m:den>
+                                <m:r>
+                                  <a:rPr lang="en-US" altLang="zh-TW" sz="2000" b="0" i="1" smtClean="0">
+                                    <a:latin typeface="Cambria Math" panose="02040503050406030204" pitchFamily="18" charset="0"/>
+                                    <a:ea typeface="Cambria Math" panose="02040503050406030204" pitchFamily="18" charset="0"/>
+                                  </a:rPr>
+                                  <m:t>34</m:t>
+                                </m:r>
+                              </m:den>
+                            </m:f>
+                          </m:den>
+                        </m:f>
+                      </m:e>
+                    </m:d>
+                    <m:r>
+                      <a:rPr lang="en-US" altLang="zh-TW" sz="2000" b="0" i="1" smtClean="0">
+                        <a:latin typeface="Cambria Math" panose="02040503050406030204" pitchFamily="18" charset="0"/>
+                        <a:ea typeface="Cambria Math" panose="02040503050406030204" pitchFamily="18" charset="0"/>
+                      </a:rPr>
+                      <m:t>=800+40=840=</m:t>
+                    </m:r>
+                    <m:nary>
+                      <m:naryPr>
+                        <m:chr m:val="∑"/>
+                        <m:ctrlPr>
+                          <a:rPr lang="zh-TW" altLang="en-US" sz="2000" i="1">
+                            <a:latin typeface="Cambria Math" panose="02040503050406030204" pitchFamily="18" charset="0"/>
+                          </a:rPr>
+                        </m:ctrlPr>
+                      </m:naryPr>
+                      <m:sub>
+                        <m:r>
+                          <m:rPr>
+                            <m:brk m:alnAt="23"/>
+                          </m:rPr>
+                          <a:rPr lang="en-US" altLang="zh-TW" sz="2000" i="1">
+                            <a:latin typeface="Cambria Math" panose="02040503050406030204" pitchFamily="18" charset="0"/>
+                          </a:rPr>
+                          <m:t>𝑖</m:t>
+                        </m:r>
+                        <m:r>
+                          <a:rPr lang="en-US" altLang="zh-TW" sz="2000" i="1">
+                            <a:latin typeface="Cambria Math" panose="02040503050406030204" pitchFamily="18" charset="0"/>
+                          </a:rPr>
+                          <m:t>=1</m:t>
+                        </m:r>
+                      </m:sub>
+                      <m:sup>
+                        <m:r>
+                          <a:rPr lang="en-US" altLang="zh-TW" sz="2000" i="1">
+                            <a:latin typeface="Cambria Math" panose="02040503050406030204" pitchFamily="18" charset="0"/>
+                          </a:rPr>
+                          <m:t>𝑁</m:t>
+                        </m:r>
+                      </m:sup>
+                      <m:e>
+                        <m:sSub>
+                          <m:sSubPr>
+                            <m:ctrlPr>
+                              <a:rPr lang="en-US" altLang="zh-TW" sz="2000" i="1">
+                                <a:latin typeface="Cambria Math" panose="02040503050406030204" pitchFamily="18" charset="0"/>
+                              </a:rPr>
+                            </m:ctrlPr>
+                          </m:sSubPr>
+                          <m:e>
+                            <m:r>
+                              <a:rPr lang="en-US" altLang="zh-TW" sz="2000" b="0" i="1" smtClean="0">
+                                <a:latin typeface="Cambria Math" panose="02040503050406030204" pitchFamily="18" charset="0"/>
+                                <a:ea typeface="Cambria Math" panose="02040503050406030204" pitchFamily="18" charset="0"/>
+                              </a:rPr>
+                              <m:t>𝑦</m:t>
+                            </m:r>
+                          </m:e>
+                          <m:sub>
+                            <m:r>
+                              <a:rPr lang="en-US" altLang="zh-TW" sz="2000" i="1">
+                                <a:latin typeface="Cambria Math" panose="02040503050406030204" pitchFamily="18" charset="0"/>
+                              </a:rPr>
+                              <m:t>𝑖</m:t>
+                            </m:r>
+                          </m:sub>
+                        </m:sSub>
+                      </m:e>
+                    </m:nary>
+                  </m:oMath>
+                </a14:m>
+                <a:endParaRPr kumimoji="1" lang="en-US" altLang="zh-TW" sz="2000" dirty="0"/>
+              </a:p>
+              <a:p>
+                <a:pPr>
+                  <a:lnSpc>
+                    <a:spcPct val="150000"/>
+                  </a:lnSpc>
+                </a:pPr>
+                <a:r>
+                  <a:rPr kumimoji="1" lang="zh-TW" altLang="en-US" sz="2000" dirty="0"/>
+                  <a:t>如果樣本從</a:t>
+                </a:r>
+                <a:r>
+                  <a:rPr kumimoji="1" lang="en-US" altLang="zh-TW" sz="2000" dirty="0"/>
+                  <a:t>1</a:t>
+                </a:r>
+                <a:r>
+                  <a:rPr kumimoji="1" lang="zh-TW" altLang="en-US" sz="2000" dirty="0"/>
+                  <a:t>人增加到</a:t>
+                </a:r>
+                <a:r>
+                  <a:rPr kumimoji="1" lang="en-US" altLang="zh-TW" sz="2000" dirty="0"/>
+                  <a:t>2</a:t>
+                </a:r>
+                <a:r>
+                  <a:rPr kumimoji="1" lang="zh-TW" altLang="en-US" sz="2000" dirty="0"/>
+                  <a:t>人，其他條件不變，那麼每個人中選機率變成</a:t>
+                </a:r>
+                <a14:m>
+                  <m:oMath xmlns:m="http://schemas.openxmlformats.org/officeDocument/2006/math">
+                    <m:f>
+                      <m:fPr>
+                        <m:ctrlPr>
+                          <a:rPr kumimoji="1" lang="en-US" altLang="zh-TW" sz="2000" i="1" smtClean="0">
+                            <a:latin typeface="Cambria Math" panose="02040503050406030204" pitchFamily="18" charset="0"/>
+                          </a:rPr>
+                        </m:ctrlPr>
+                      </m:fPr>
+                      <m:num>
+                        <m:r>
+                          <a:rPr kumimoji="1" lang="en-US" altLang="zh-TW" sz="2000" b="0" i="1" smtClean="0">
+                            <a:latin typeface="Cambria Math" panose="02040503050406030204" pitchFamily="18" charset="0"/>
+                          </a:rPr>
+                          <m:t>2</m:t>
+                        </m:r>
+                      </m:num>
+                      <m:den>
+                        <m:r>
+                          <a:rPr kumimoji="1" lang="en-US" altLang="zh-TW" sz="2000" b="0" i="1" smtClean="0">
+                            <a:latin typeface="Cambria Math" panose="02040503050406030204" pitchFamily="18" charset="0"/>
+                          </a:rPr>
+                          <m:t>34</m:t>
+                        </m:r>
+                      </m:den>
+                    </m:f>
+                    <m:r>
+                      <a:rPr kumimoji="1" lang="en-US" altLang="zh-TW" sz="2000" b="0" i="1" smtClean="0">
+                        <a:latin typeface="Cambria Math" panose="02040503050406030204" pitchFamily="18" charset="0"/>
+                      </a:rPr>
+                      <m:t>=</m:t>
+                    </m:r>
+                    <m:f>
+                      <m:fPr>
+                        <m:ctrlPr>
+                          <a:rPr kumimoji="1" lang="en-US" altLang="zh-TW" sz="2000" b="0" i="1" smtClean="0">
+                            <a:latin typeface="Cambria Math" panose="02040503050406030204" pitchFamily="18" charset="0"/>
+                          </a:rPr>
+                        </m:ctrlPr>
+                      </m:fPr>
+                      <m:num>
+                        <m:r>
+                          <a:rPr kumimoji="1" lang="en-US" altLang="zh-TW" sz="2000" b="0" i="1" smtClean="0">
+                            <a:latin typeface="Cambria Math" panose="02040503050406030204" pitchFamily="18" charset="0"/>
+                          </a:rPr>
+                          <m:t>1</m:t>
+                        </m:r>
+                      </m:num>
+                      <m:den>
+                        <m:r>
+                          <a:rPr kumimoji="1" lang="en-US" altLang="zh-TW" sz="2000" b="0" i="1" smtClean="0">
+                            <a:latin typeface="Cambria Math" panose="02040503050406030204" pitchFamily="18" charset="0"/>
+                          </a:rPr>
+                          <m:t>17</m:t>
+                        </m:r>
+                      </m:den>
+                    </m:f>
+                  </m:oMath>
+                </a14:m>
+                <a:endParaRPr kumimoji="1" lang="en-US" altLang="zh-TW" sz="2000" b="0" dirty="0"/>
+              </a:p>
+              <a:p>
+                <a:pPr>
+                  <a:lnSpc>
+                    <a:spcPct val="150000"/>
+                  </a:lnSpc>
+                </a:pPr>
+                <a:r>
+                  <a:rPr kumimoji="1" lang="zh-TW" altLang="en-US" sz="2000" dirty="0"/>
+                  <a:t>抽出</a:t>
+                </a:r>
+                <a:r>
+                  <a:rPr kumimoji="1" lang="en-US" altLang="zh-TW" sz="2000" dirty="0"/>
+                  <a:t>2</a:t>
+                </a:r>
+                <a:r>
+                  <a:rPr kumimoji="1" lang="zh-TW" altLang="en-US" sz="2000" dirty="0"/>
+                  <a:t>人可能是一個高薪一個低薪、兩個高薪、兩個低薪，分別計算這三種組合的期望值，</a:t>
+                </a:r>
+                <a:r>
+                  <a:rPr kumimoji="1" lang="zh-TW" altLang="en-US" sz="2000"/>
+                  <a:t>然後再加權平均</a:t>
+                </a:r>
+                <a:r>
+                  <a:rPr kumimoji="1" lang="zh-TW" altLang="en-US" sz="2000" dirty="0"/>
+                  <a:t>，會得到</a:t>
+                </a:r>
+                <a:r>
+                  <a:rPr kumimoji="1" lang="en-US" altLang="zh-TW" sz="2000" dirty="0"/>
+                  <a:t>840</a:t>
+                </a:r>
+                <a:r>
+                  <a:rPr kumimoji="1" lang="zh-TW" altLang="en-US" sz="2000" dirty="0"/>
+                  <a:t>萬（為什麼？）</a:t>
+                </a:r>
+                <a:endParaRPr kumimoji="1" lang="en-US" altLang="zh-TW" sz="2000" dirty="0"/>
+              </a:p>
+              <a:p>
+                <a:pPr>
+                  <a:lnSpc>
+                    <a:spcPct val="150000"/>
+                  </a:lnSpc>
+                </a:pPr>
+                <a:r>
+                  <a:rPr kumimoji="1" lang="zh-TW" altLang="en-US" sz="2000" dirty="0"/>
+                  <a:t>比起只抽</a:t>
+                </a:r>
+                <a:r>
+                  <a:rPr kumimoji="1" lang="en-US" altLang="zh-TW" sz="2000" dirty="0"/>
+                  <a:t>1</a:t>
+                </a:r>
+                <a:r>
+                  <a:rPr kumimoji="1" lang="zh-TW" altLang="en-US" sz="2000" dirty="0"/>
+                  <a:t>人，如果抽中組合是一個高薪一個低薪，會更接近最後的期望值。</a:t>
+                </a:r>
+              </a:p>
+            </p:txBody>
+          </p:sp>
+        </mc:Choice>
+        <mc:Fallback xmlns="">
+          <p:sp>
+            <p:nvSpPr>
+              <p:cNvPr id="3" name="內容版面配置區 2">
+                <a:extLst>
+                  <a:ext uri="{FF2B5EF4-FFF2-40B4-BE49-F238E27FC236}">
+                    <a16:creationId xmlns:a16="http://schemas.microsoft.com/office/drawing/2014/main" id="{D77F4EED-7909-5AF8-5411-8811C2034F9D}"/>
+                  </a:ext>
+                </a:extLst>
+              </p:cNvPr>
+              <p:cNvSpPr>
+                <a:spLocks noGrp="1" noRot="1" noChangeAspect="1" noMove="1" noResize="1" noEditPoints="1" noAdjustHandles="1" noChangeArrowheads="1" noChangeShapeType="1" noTextEdit="1"/>
+              </p:cNvSpPr>
+              <p:nvPr>
+                <p:ph idx="1"/>
+              </p:nvPr>
+            </p:nvSpPr>
+            <p:spPr>
+              <a:blipFill>
+                <a:blip r:embed="rId2"/>
+                <a:stretch>
+                  <a:fillRect l="-603" r="-2171"/>
+                </a:stretch>
+              </a:blipFill>
+            </p:spPr>
+            <p:txBody>
+              <a:bodyPr/>
+              <a:lstStyle/>
+              <a:p>
+                <a:r>
+                  <a:rPr lang="zh-TW" altLang="en-US">
+                    <a:noFill/>
+                  </a:rPr>
+                  <a:t> </a:t>
+                </a:r>
+              </a:p>
+            </p:txBody>
+          </p:sp>
+        </mc:Fallback>
+      </mc:AlternateContent>
+      <p:sp>
+        <p:nvSpPr>
+          <p:cNvPr id="4" name="投影片編號版面配置區 3">
+            <a:extLst>
+              <a:ext uri="{FF2B5EF4-FFF2-40B4-BE49-F238E27FC236}">
+                <a16:creationId xmlns:a16="http://schemas.microsoft.com/office/drawing/2014/main" id="{BF4C5D14-5932-A53B-6231-86CE0BBFB842}"/>
+              </a:ext>
+            </a:extLst>
+          </p:cNvPr>
+          <p:cNvSpPr>
+            <a:spLocks noGrp="1"/>
+          </p:cNvSpPr>
+          <p:nvPr>
+            <p:ph type="sldNum" sz="quarter" idx="12"/>
+          </p:nvPr>
+        </p:nvSpPr>
+        <p:spPr/>
+        <p:txBody>
+          <a:bodyPr/>
+          <a:lstStyle/>
+          <a:p>
+            <a:fld id="{34E21383-B02B-694B-B2AD-A967203CDE86}" type="slidenum">
+              <a:rPr lang="en-US" smtClean="0"/>
+              <a:t>11</a:t>
+            </a:fld>
+            <a:endParaRPr lang="en-US"/>
+          </a:p>
+        </p:txBody>
+      </p:sp>
+    </p:spTree>
+    <p:extLst>
+      <p:ext uri="{BB962C8B-B14F-4D97-AF65-F5344CB8AC3E}">
+        <p14:creationId xmlns:p14="http://schemas.microsoft.com/office/powerpoint/2010/main" val="3414733"/>
+      </p:ext>
+    </p:extLst>
+  </p:cSld>
+  <p:clrMapOvr>
+    <a:masterClrMapping/>
+  </p:clrMapOvr>
+</p:sld>
+</file>
+
+<file path=ppt/slides/slide12.xml><?xml version="1.0" encoding="utf-8"?>
+<p:sld xmlns:a="http://schemas.openxmlformats.org/drawingml/2006/main" xmlns:r="http://schemas.openxmlformats.org/officeDocument/2006/relationships" xmlns:p="http://schemas.openxmlformats.org/presentationml/2006/main">
+  <p:cSld>
+    <p:spTree>
+      <p:nvGrpSpPr>
         <p:cNvPr id="1" name=""/>
         <p:cNvGrpSpPr/>
         <p:nvPr/>
@@ -3865,7 +5642,7 @@
           <a:p>
             <a:fld id="{34E21383-B02B-694B-B2AD-A967203CDE86}" type="slidenum">
               <a:rPr lang="en-US" smtClean="0"/>
-              <a:t>10</a:t>
+              <a:t>12</a:t>
             </a:fld>
             <a:endParaRPr lang="en-US"/>
           </a:p>
@@ -5419,7 +7196,7 @@
 </p:sld>
 </file>
 
-<file path=ppt/slides/slide11.xml><?xml version="1.0" encoding="utf-8"?>
+<file path=ppt/slides/slide13.xml><?xml version="1.0" encoding="utf-8"?>
 <p:sld xmlns:a="http://schemas.openxmlformats.org/drawingml/2006/main" xmlns:r="http://schemas.openxmlformats.org/officeDocument/2006/relationships" xmlns:p="http://schemas.openxmlformats.org/presentationml/2006/main">
   <p:cSld>
     <p:spTree>
@@ -5465,8 +7242,8 @@
           </a:p>
         </p:txBody>
       </p:sp>
-      <mc:AlternateContent xmlns:mc="http://schemas.openxmlformats.org/markup-compatibility/2006">
-        <mc:Choice xmlns:a14="http://schemas.microsoft.com/office/drawing/2010/main" Requires="a14">
+      <mc:AlternateContent xmlns:mc="http://schemas.openxmlformats.org/markup-compatibility/2006" xmlns:a14="http://schemas.microsoft.com/office/drawing/2010/main">
+        <mc:Choice Requires="a14">
           <p:sp>
             <p:nvSpPr>
               <p:cNvPr id="3" name="Content Placeholder 2">
@@ -6364,7 +8141,7 @@
             </p:txBody>
           </p:sp>
         </mc:Choice>
-        <mc:Fallback>
+        <mc:Fallback xmlns="">
           <p:sp>
             <p:nvSpPr>
               <p:cNvPr id="3" name="Content Placeholder 2">
@@ -6427,7 +8204,7 @@
           <a:p>
             <a:fld id="{34E21383-B02B-694B-B2AD-A967203CDE86}" type="slidenum">
               <a:rPr lang="en-US" smtClean="0"/>
-              <a:t>11</a:t>
+              <a:t>13</a:t>
             </a:fld>
             <a:endParaRPr lang="en-US"/>
           </a:p>
@@ -6446,7 +8223,7 @@
 </p:sld>
 </file>
 
-<file path=ppt/slides/slide12.xml><?xml version="1.0" encoding="utf-8"?>
+<file path=ppt/slides/slide14.xml><?xml version="1.0" encoding="utf-8"?>
 <p:sld xmlns:a="http://schemas.openxmlformats.org/drawingml/2006/main" xmlns:r="http://schemas.openxmlformats.org/officeDocument/2006/relationships" xmlns:p="http://schemas.openxmlformats.org/presentationml/2006/main">
   <p:cSld>
     <p:spTree>
@@ -6492,8 +8269,8 @@
           </a:p>
         </p:txBody>
       </p:sp>
-      <mc:AlternateContent xmlns:mc="http://schemas.openxmlformats.org/markup-compatibility/2006">
-        <mc:Choice xmlns:a14="http://schemas.microsoft.com/office/drawing/2010/main" Requires="a14">
+      <mc:AlternateContent xmlns:mc="http://schemas.openxmlformats.org/markup-compatibility/2006" xmlns:a14="http://schemas.microsoft.com/office/drawing/2010/main">
+        <mc:Choice Requires="a14">
           <p:sp>
             <p:nvSpPr>
               <p:cNvPr id="3" name="Content Placeholder 2">
@@ -6540,13 +8317,7 @@
                       <a:rPr lang="zh-TW" altLang="en-US" sz="2000" b="1" i="1" smtClean="0">
                         <a:latin typeface="Cambria Math" panose="02040503050406030204" pitchFamily="18" charset="0"/>
                       </a:rPr>
-                      <m:t>資料的離散程度。</m:t>
-                    </m:r>
-                    <m:r>
-                      <a:rPr lang="zh-TW" altLang="en-US" sz="2000" b="1" i="1" smtClean="0">
-                        <a:latin typeface="Cambria Math" panose="02040503050406030204" pitchFamily="18" charset="0"/>
-                      </a:rPr>
-                      <m:t>計算</m:t>
+                      <m:t>資料的離散程度。計算</m:t>
                     </m:r>
                     <m:r>
                       <a:rPr lang="zh-TW" altLang="en-US" sz="2000" b="1" i="1">
@@ -7438,7 +9209,7 @@
             </p:txBody>
           </p:sp>
         </mc:Choice>
-        <mc:Fallback>
+        <mc:Fallback xmlns="">
           <p:sp>
             <p:nvSpPr>
               <p:cNvPr id="3" name="Content Placeholder 2">
@@ -7501,7 +9272,7 @@
           <a:p>
             <a:fld id="{34E21383-B02B-694B-B2AD-A967203CDE86}" type="slidenum">
               <a:rPr lang="en-US" smtClean="0"/>
-              <a:t>12</a:t>
+              <a:t>14</a:t>
             </a:fld>
             <a:endParaRPr lang="en-US"/>
           </a:p>
@@ -7520,7 +9291,7 @@
 </p:sld>
 </file>
 
-<file path=ppt/slides/slide13.xml><?xml version="1.0" encoding="utf-8"?>
+<file path=ppt/slides/slide15.xml><?xml version="1.0" encoding="utf-8"?>
 <p:sld xmlns:a="http://schemas.openxmlformats.org/drawingml/2006/main" xmlns:r="http://schemas.openxmlformats.org/officeDocument/2006/relationships" xmlns:p="http://schemas.openxmlformats.org/presentationml/2006/main">
   <p:cSld>
     <p:spTree>
@@ -7566,8 +9337,8 @@
           </a:p>
         </p:txBody>
       </p:sp>
-      <mc:AlternateContent xmlns:mc="http://schemas.openxmlformats.org/markup-compatibility/2006">
-        <mc:Choice xmlns:a14="http://schemas.microsoft.com/office/drawing/2010/main" Requires="a14">
+      <mc:AlternateContent xmlns:mc="http://schemas.openxmlformats.org/markup-compatibility/2006" xmlns:a14="http://schemas.microsoft.com/office/drawing/2010/main">
+        <mc:Choice Requires="a14">
           <p:sp>
             <p:nvSpPr>
               <p:cNvPr id="3" name="Content Placeholder 2">
@@ -7824,7 +9595,7 @@
             </p:txBody>
           </p:sp>
         </mc:Choice>
-        <mc:Fallback>
+        <mc:Fallback xmlns="">
           <p:sp>
             <p:nvSpPr>
               <p:cNvPr id="3" name="Content Placeholder 2">
@@ -7887,7 +9658,7 @@
           <a:p>
             <a:fld id="{34E21383-B02B-694B-B2AD-A967203CDE86}" type="slidenum">
               <a:rPr lang="en-US" smtClean="0"/>
-              <a:t>13</a:t>
+              <a:t>15</a:t>
             </a:fld>
             <a:endParaRPr lang="en-US"/>
           </a:p>
@@ -8616,140 +10387,495 @@
           </a:p>
         </p:txBody>
       </p:sp>
-      <p:sp>
-        <p:nvSpPr>
-          <p:cNvPr id="3" name="Content Placeholder 2">
-            <a:extLst>
-              <a:ext uri="{FF2B5EF4-FFF2-40B4-BE49-F238E27FC236}">
-                <a16:creationId xmlns:a16="http://schemas.microsoft.com/office/drawing/2014/main" id="{4F08E529-29DD-AB2C-94BF-694DBD41AB6D}"/>
-              </a:ext>
-            </a:extLst>
-          </p:cNvPr>
-          <p:cNvSpPr>
-            <a:spLocks noGrp="1"/>
-          </p:cNvSpPr>
-          <p:nvPr>
-            <p:ph idx="1"/>
-          </p:nvPr>
-        </p:nvSpPr>
-        <p:spPr/>
-        <p:txBody>
-          <a:bodyPr>
-            <a:normAutofit/>
-          </a:bodyPr>
-          <a:lstStyle/>
-          <a:p>
-            <a:pPr>
-              <a:lnSpc>
-                <a:spcPct val="150000"/>
-              </a:lnSpc>
-              <a:buFont typeface="Wingdings" pitchFamily="2" charset="2"/>
-              <a:buChar char="l"/>
-            </a:pPr>
-            <a:r>
-              <a:rPr lang="en-US" altLang="ja-JP" sz="2000" dirty="0"/>
-              <a:t>Bowley(1906)</a:t>
-            </a:r>
-            <a:r>
-              <a:rPr lang="ja-JP" altLang="en-US" sz="2000"/>
-              <a:t>提出大數法則：只要樣本量足夠大且具備隨機性，樣本的平均值就會趨近於母體的平均值。抽樣調查的精確度是可以透過數學公式（標準誤）來衡量的。</a:t>
-            </a:r>
-            <a:endParaRPr lang="en-US" altLang="ja-JP" sz="2000" dirty="0"/>
-          </a:p>
-          <a:p>
-            <a:pPr>
-              <a:lnSpc>
-                <a:spcPct val="150000"/>
-              </a:lnSpc>
-              <a:buFont typeface="Wingdings" pitchFamily="2" charset="2"/>
-              <a:buChar char="l"/>
-            </a:pPr>
-            <a:r>
-              <a:rPr lang="en-US" altLang="ja-JP" sz="2000" dirty="0"/>
-              <a:t>Bowley (1926)</a:t>
-            </a:r>
-            <a:r>
-              <a:rPr lang="ja-JP" altLang="en-US" sz="2000"/>
-              <a:t>提出</a:t>
-            </a:r>
-            <a:r>
-              <a:rPr lang="zh-TW" altLang="en-US" sz="2000" dirty="0"/>
-              <a:t>分層抽樣理論：</a:t>
-            </a:r>
-            <a:endParaRPr lang="en-US" altLang="zh-TW" sz="2000" dirty="0"/>
-          </a:p>
-          <a:p>
-            <a:pPr marL="457200" indent="-457200">
-              <a:lnSpc>
-                <a:spcPct val="150000"/>
-              </a:lnSpc>
-              <a:buFont typeface="+mj-lt"/>
-              <a:buAutoNum type="arabicPeriod"/>
-            </a:pPr>
-            <a:r>
-              <a:rPr lang="zh-TW" altLang="en-US" sz="2000" dirty="0"/>
-              <a:t>將母體依照已知特徵（如地區、職業）分成若干「層」（</a:t>
-            </a:r>
-            <a:r>
-              <a:rPr lang="en-US" altLang="ja-JP" sz="2000" dirty="0"/>
-              <a:t>Strata</a:t>
-            </a:r>
-            <a:r>
-              <a:rPr lang="ja-JP" altLang="en-US" sz="2000"/>
-              <a:t>）。</a:t>
-            </a:r>
-          </a:p>
-          <a:p>
-            <a:pPr marL="457200" indent="-457200">
-              <a:lnSpc>
-                <a:spcPct val="150000"/>
-              </a:lnSpc>
-              <a:buFont typeface="+mj-lt"/>
-              <a:buAutoNum type="arabicPeriod"/>
-            </a:pPr>
-            <a:r>
-              <a:rPr lang="zh-TW" altLang="en-US" sz="2000" dirty="0"/>
-              <a:t>在每一層內進行隨機抽樣。</a:t>
-            </a:r>
-          </a:p>
-          <a:p>
-            <a:pPr marL="457200" indent="-457200">
-              <a:lnSpc>
-                <a:spcPct val="150000"/>
-              </a:lnSpc>
-              <a:buFont typeface="+mj-lt"/>
-              <a:buAutoNum type="arabicPeriod"/>
-            </a:pPr>
-            <a:r>
-              <a:rPr lang="zh-TW" altLang="en-US" sz="2000" dirty="0"/>
-              <a:t>等比例分配 </a:t>
-            </a:r>
-            <a:r>
-              <a:rPr lang="en-US" altLang="zh-TW" sz="2000" dirty="0"/>
-              <a:t>(</a:t>
-            </a:r>
-            <a:r>
-              <a:rPr lang="en-US" altLang="ja-JP" sz="2000" dirty="0"/>
-              <a:t>Proportional Allocation)</a:t>
-            </a:r>
-            <a:r>
-              <a:rPr lang="ja-JP" altLang="en-US" sz="2000"/>
-              <a:t>： </a:t>
-            </a:r>
-            <a:r>
-              <a:rPr lang="zh-TW" altLang="en-US" sz="2000" dirty="0"/>
-              <a:t>各層抽取的樣本數應與該層在母體中的比例一致，以確保樣本結構與母體完全相同。</a:t>
-            </a:r>
-            <a:endParaRPr lang="en-US" altLang="ja-JP" sz="2000" dirty="0"/>
-          </a:p>
-          <a:p>
-            <a:pPr marL="0" indent="0">
-              <a:buNone/>
-            </a:pPr>
-            <a:endParaRPr lang="en-US" dirty="0"/>
-          </a:p>
-        </p:txBody>
-      </p:sp>
+      <mc:AlternateContent xmlns:mc="http://schemas.openxmlformats.org/markup-compatibility/2006">
+        <mc:Choice xmlns:a14="http://schemas.microsoft.com/office/drawing/2010/main" Requires="a14">
+          <p:sp>
+            <p:nvSpPr>
+              <p:cNvPr id="3" name="Content Placeholder 2">
+                <a:extLst>
+                  <a:ext uri="{FF2B5EF4-FFF2-40B4-BE49-F238E27FC236}">
+                    <a16:creationId xmlns:a16="http://schemas.microsoft.com/office/drawing/2014/main" id="{4F08E529-29DD-AB2C-94BF-694DBD41AB6D}"/>
+                  </a:ext>
+                </a:extLst>
+              </p:cNvPr>
+              <p:cNvSpPr>
+                <a:spLocks noGrp="1"/>
+              </p:cNvSpPr>
+              <p:nvPr>
+                <p:ph idx="1"/>
+              </p:nvPr>
+            </p:nvSpPr>
+            <p:spPr/>
+            <p:txBody>
+              <a:bodyPr>
+                <a:normAutofit lnSpcReduction="10000"/>
+              </a:bodyPr>
+              <a:lstStyle/>
+              <a:p>
+                <a:pPr>
+                  <a:lnSpc>
+                    <a:spcPct val="150000"/>
+                  </a:lnSpc>
+                  <a:buFont typeface="Wingdings" pitchFamily="2" charset="2"/>
+                  <a:buChar char="l"/>
+                </a:pPr>
+                <a:r>
+                  <a:rPr lang="en-US" altLang="ja-JP" sz="2000" dirty="0"/>
+                  <a:t>Bowley(1906)</a:t>
+                </a:r>
+                <a:r>
+                  <a:rPr lang="ja-JP" altLang="en-US" sz="2000"/>
+                  <a:t>提出大數法則：只要樣本量足夠大且具備隨機性，樣本的平均值就會趨近於母體的平均值。抽樣調查的精確度是可以透過數學公式（標準誤）來衡量的。</a:t>
+                </a:r>
+                <a:endParaRPr lang="en-US" altLang="ja-JP" sz="2000" dirty="0"/>
+              </a:p>
+              <a:p>
+                <a:pPr>
+                  <a:lnSpc>
+                    <a:spcPct val="150000"/>
+                  </a:lnSpc>
+                  <a:buFont typeface="Wingdings" pitchFamily="2" charset="2"/>
+                  <a:buChar char="l"/>
+                </a:pPr>
+                <a:r>
+                  <a:rPr lang="en-US" altLang="ja-JP" sz="2000" dirty="0"/>
+                  <a:t>Bowley (1926)</a:t>
+                </a:r>
+                <a:r>
+                  <a:rPr lang="ja-JP" altLang="en-US" sz="2000"/>
+                  <a:t>提出</a:t>
+                </a:r>
+                <a:r>
+                  <a:rPr lang="zh-TW" altLang="en-US" sz="2000" dirty="0"/>
+                  <a:t>分層抽樣理論：</a:t>
+                </a:r>
+                <a:endParaRPr lang="en-US" altLang="zh-TW" sz="2000" dirty="0"/>
+              </a:p>
+              <a:p>
+                <a:pPr marL="457200" indent="-457200">
+                  <a:lnSpc>
+                    <a:spcPct val="150000"/>
+                  </a:lnSpc>
+                  <a:buFont typeface="+mj-lt"/>
+                  <a:buAutoNum type="arabicPeriod"/>
+                </a:pPr>
+                <a:r>
+                  <a:rPr lang="zh-TW" altLang="en-US" sz="2000" dirty="0"/>
+                  <a:t>將母體依照已知特徵（如地區、職業）分成若干「層」（</a:t>
+                </a:r>
+                <a:r>
+                  <a:rPr lang="en-US" altLang="ja-JP" sz="2000" dirty="0"/>
+                  <a:t>Strata</a:t>
+                </a:r>
+                <a:r>
+                  <a:rPr lang="ja-JP" altLang="en-US" sz="2000"/>
+                  <a:t>）。</a:t>
+                </a:r>
+              </a:p>
+              <a:p>
+                <a:pPr marL="457200" indent="-457200">
+                  <a:lnSpc>
+                    <a:spcPct val="150000"/>
+                  </a:lnSpc>
+                  <a:buFont typeface="+mj-lt"/>
+                  <a:buAutoNum type="arabicPeriod"/>
+                </a:pPr>
+                <a:r>
+                  <a:rPr lang="zh-TW" altLang="en-US" sz="2000" dirty="0"/>
+                  <a:t>在每一層內進行隨機抽樣。</a:t>
+                </a:r>
+              </a:p>
+              <a:p>
+                <a:pPr marL="457200" indent="-457200">
+                  <a:lnSpc>
+                    <a:spcPct val="150000"/>
+                  </a:lnSpc>
+                  <a:buFont typeface="+mj-lt"/>
+                  <a:buAutoNum type="arabicPeriod"/>
+                </a:pPr>
+                <a:r>
+                  <a:rPr lang="zh-TW" altLang="en-US" sz="2000" dirty="0"/>
+                  <a:t>等比例分配 </a:t>
+                </a:r>
+                <a:r>
+                  <a:rPr lang="en-US" altLang="zh-TW" sz="2000" dirty="0"/>
+                  <a:t>(</a:t>
+                </a:r>
+                <a:r>
+                  <a:rPr lang="en-US" altLang="ja-JP" sz="2000" dirty="0"/>
+                  <a:t>Proportional Allocation)</a:t>
+                </a:r>
+                <a:r>
+                  <a:rPr lang="ja-JP" altLang="en-US" sz="2000"/>
+                  <a:t>： </a:t>
+                </a:r>
+                <a:r>
+                  <a:rPr lang="zh-TW" altLang="en-US" sz="2000" dirty="0"/>
+                  <a:t>各層抽取的樣本數應與該層在母體中的比例一致，以確保樣本結構與母體完全相同。</a:t>
+                </a:r>
+                <a:endParaRPr lang="en-US" altLang="zh-TW" sz="2000" dirty="0"/>
+              </a:p>
+              <a:p>
+                <a:pPr marL="457200" indent="-457200">
+                  <a:lnSpc>
+                    <a:spcPct val="150000"/>
+                  </a:lnSpc>
+                  <a:buFont typeface="+mj-lt"/>
+                  <a:buAutoNum type="arabicPeriod"/>
+                </a:pPr>
+                <a:r>
+                  <a:rPr lang="ja-JP" altLang="en-US" sz="2000"/>
+                  <a:t>母體平均數：</a:t>
+                </a:r>
+                <a14:m>
+                  <m:oMath xmlns:m="http://schemas.openxmlformats.org/officeDocument/2006/math">
+                    <m:acc>
+                      <m:accPr>
+                        <m:chr m:val="̅"/>
+                        <m:ctrlPr>
+                          <a:rPr lang="en-US" altLang="ja-JP" sz="2000" i="1" smtClean="0">
+                            <a:latin typeface="Cambria Math" panose="02040503050406030204" pitchFamily="18" charset="0"/>
+                          </a:rPr>
+                        </m:ctrlPr>
+                      </m:accPr>
+                      <m:e>
+                        <m:r>
+                          <a:rPr lang="en-US" altLang="ja-JP" sz="2000" b="0" i="1" smtClean="0">
+                            <a:latin typeface="Cambria Math" panose="02040503050406030204" pitchFamily="18" charset="0"/>
+                          </a:rPr>
+                          <m:t>𝑦</m:t>
+                        </m:r>
+                      </m:e>
+                    </m:acc>
+                    <m:r>
+                      <a:rPr lang="en-US" altLang="ja-JP" sz="2000" b="0" i="1" smtClean="0">
+                        <a:latin typeface="Cambria Math" panose="02040503050406030204" pitchFamily="18" charset="0"/>
+                      </a:rPr>
+                      <m:t>=</m:t>
+                    </m:r>
+                    <m:nary>
+                      <m:naryPr>
+                        <m:chr m:val="∑"/>
+                        <m:ctrlPr>
+                          <a:rPr lang="en-US" altLang="ja-JP" sz="2000" b="0" i="1" smtClean="0">
+                            <a:latin typeface="Cambria Math" panose="02040503050406030204" pitchFamily="18" charset="0"/>
+                          </a:rPr>
+                        </m:ctrlPr>
+                      </m:naryPr>
+                      <m:sub>
+                        <m:r>
+                          <m:rPr>
+                            <m:brk m:alnAt="23"/>
+                          </m:rPr>
+                          <a:rPr lang="en-US" altLang="ja-JP" sz="2000" b="0" i="1" smtClean="0">
+                            <a:latin typeface="Cambria Math" panose="02040503050406030204" pitchFamily="18" charset="0"/>
+                          </a:rPr>
+                          <m:t>h</m:t>
+                        </m:r>
+                        <m:r>
+                          <a:rPr lang="en-US" altLang="ja-JP" sz="2000" b="0" i="1" smtClean="0">
+                            <a:latin typeface="Cambria Math" panose="02040503050406030204" pitchFamily="18" charset="0"/>
+                          </a:rPr>
+                          <m:t>=1</m:t>
+                        </m:r>
+                      </m:sub>
+                      <m:sup>
+                        <m:r>
+                          <a:rPr lang="en-US" altLang="ja-JP" sz="2000" b="0" i="1" smtClean="0">
+                            <a:latin typeface="Cambria Math" panose="02040503050406030204" pitchFamily="18" charset="0"/>
+                          </a:rPr>
+                          <m:t>𝐻</m:t>
+                        </m:r>
+                      </m:sup>
+                      <m:e>
+                        <m:f>
+                          <m:fPr>
+                            <m:ctrlPr>
+                              <a:rPr lang="en-US" altLang="ja-JP" sz="2000" b="0" i="1" smtClean="0">
+                                <a:latin typeface="Cambria Math" panose="02040503050406030204" pitchFamily="18" charset="0"/>
+                              </a:rPr>
+                            </m:ctrlPr>
+                          </m:fPr>
+                          <m:num>
+                            <m:sSub>
+                              <m:sSubPr>
+                                <m:ctrlPr>
+                                  <a:rPr lang="en-US" altLang="ja-JP" sz="2000" b="0" i="1" smtClean="0">
+                                    <a:latin typeface="Cambria Math" panose="02040503050406030204" pitchFamily="18" charset="0"/>
+                                  </a:rPr>
+                                </m:ctrlPr>
+                              </m:sSubPr>
+                              <m:e>
+                                <m:r>
+                                  <a:rPr lang="en-US" altLang="ja-JP" sz="2000" b="0" i="1" smtClean="0">
+                                    <a:latin typeface="Cambria Math" panose="02040503050406030204" pitchFamily="18" charset="0"/>
+                                  </a:rPr>
+                                  <m:t>𝑁</m:t>
+                                </m:r>
+                              </m:e>
+                              <m:sub>
+                                <m:r>
+                                  <a:rPr lang="en-US" altLang="ja-JP" sz="2000" b="0" i="1" smtClean="0">
+                                    <a:latin typeface="Cambria Math" panose="02040503050406030204" pitchFamily="18" charset="0"/>
+                                  </a:rPr>
+                                  <m:t>h</m:t>
+                                </m:r>
+                              </m:sub>
+                            </m:sSub>
+                          </m:num>
+                          <m:den>
+                            <m:r>
+                              <a:rPr lang="en-US" altLang="ja-JP" sz="2000" b="0" i="1" smtClean="0">
+                                <a:latin typeface="Cambria Math" panose="02040503050406030204" pitchFamily="18" charset="0"/>
+                              </a:rPr>
+                              <m:t>𝑁</m:t>
+                            </m:r>
+                          </m:den>
+                        </m:f>
+                      </m:e>
+                    </m:nary>
+                    <m:sSub>
+                      <m:sSubPr>
+                        <m:ctrlPr>
+                          <a:rPr lang="en-US" altLang="ja-JP" sz="2000" b="0" i="1" smtClean="0">
+                            <a:latin typeface="Cambria Math" panose="02040503050406030204" pitchFamily="18" charset="0"/>
+                          </a:rPr>
+                        </m:ctrlPr>
+                      </m:sSubPr>
+                      <m:e>
+                        <m:acc>
+                          <m:accPr>
+                            <m:chr m:val="̅"/>
+                            <m:ctrlPr>
+                              <a:rPr lang="en-US" altLang="ja-JP" sz="2000" b="0" i="1" smtClean="0">
+                                <a:latin typeface="Cambria Math" panose="02040503050406030204" pitchFamily="18" charset="0"/>
+                              </a:rPr>
+                            </m:ctrlPr>
+                          </m:accPr>
+                          <m:e>
+                            <m:r>
+                              <a:rPr lang="en-US" altLang="ja-JP" sz="2000" b="0" i="1" smtClean="0">
+                                <a:latin typeface="Cambria Math" panose="02040503050406030204" pitchFamily="18" charset="0"/>
+                              </a:rPr>
+                              <m:t>𝑦</m:t>
+                            </m:r>
+                          </m:e>
+                        </m:acc>
+                      </m:e>
+                      <m:sub>
+                        <m:r>
+                          <a:rPr lang="en-US" altLang="ja-JP" sz="2000" b="0" i="1" smtClean="0">
+                            <a:latin typeface="Cambria Math" panose="02040503050406030204" pitchFamily="18" charset="0"/>
+                          </a:rPr>
+                          <m:t>h</m:t>
+                        </m:r>
+                      </m:sub>
+                    </m:sSub>
+                    <m:r>
+                      <a:rPr lang="en-US" altLang="ja-JP" sz="2000" b="0" i="1" smtClean="0">
+                        <a:latin typeface="Cambria Math" panose="02040503050406030204" pitchFamily="18" charset="0"/>
+                      </a:rPr>
+                      <m:t>=</m:t>
+                    </m:r>
+                    <m:f>
+                      <m:fPr>
+                        <m:ctrlPr>
+                          <a:rPr lang="en-US" altLang="ja-JP" sz="2000" b="0" i="1" smtClean="0">
+                            <a:latin typeface="Cambria Math" panose="02040503050406030204" pitchFamily="18" charset="0"/>
+                          </a:rPr>
+                        </m:ctrlPr>
+                      </m:fPr>
+                      <m:num>
+                        <m:r>
+                          <a:rPr lang="en-US" altLang="ja-JP" sz="2000" b="0" i="1" smtClean="0">
+                            <a:latin typeface="Cambria Math" panose="02040503050406030204" pitchFamily="18" charset="0"/>
+                          </a:rPr>
+                          <m:t>1</m:t>
+                        </m:r>
+                      </m:num>
+                      <m:den>
+                        <m:r>
+                          <a:rPr lang="en-US" altLang="ja-JP" sz="2000" b="0" i="1" smtClean="0">
+                            <a:latin typeface="Cambria Math" panose="02040503050406030204" pitchFamily="18" charset="0"/>
+                          </a:rPr>
+                          <m:t>𝑛</m:t>
+                        </m:r>
+                      </m:den>
+                    </m:f>
+                    <m:nary>
+                      <m:naryPr>
+                        <m:chr m:val="∑"/>
+                        <m:ctrlPr>
+                          <a:rPr lang="en-US" altLang="ja-JP" sz="2000" b="0" i="1" smtClean="0">
+                            <a:latin typeface="Cambria Math" panose="02040503050406030204" pitchFamily="18" charset="0"/>
+                          </a:rPr>
+                        </m:ctrlPr>
+                      </m:naryPr>
+                      <m:sub>
+                        <m:r>
+                          <m:rPr>
+                            <m:brk m:alnAt="23"/>
+                          </m:rPr>
+                          <a:rPr lang="en-US" altLang="ja-JP" sz="2000" b="0" i="1" smtClean="0">
+                            <a:latin typeface="Cambria Math" panose="02040503050406030204" pitchFamily="18" charset="0"/>
+                          </a:rPr>
+                          <m:t>𝑖</m:t>
+                        </m:r>
+                        <m:r>
+                          <a:rPr lang="en-US" altLang="ja-JP" sz="2000" b="0" i="1" smtClean="0">
+                            <a:latin typeface="Cambria Math" panose="02040503050406030204" pitchFamily="18" charset="0"/>
+                          </a:rPr>
+                          <m:t>=1</m:t>
+                        </m:r>
+                      </m:sub>
+                      <m:sup>
+                        <m:r>
+                          <a:rPr lang="en-US" altLang="ja-JP" sz="2000" b="0" i="1" smtClean="0">
+                            <a:latin typeface="Cambria Math" panose="02040503050406030204" pitchFamily="18" charset="0"/>
+                          </a:rPr>
+                          <m:t>𝑁</m:t>
+                        </m:r>
+                      </m:sup>
+                      <m:e>
+                        <m:sSub>
+                          <m:sSubPr>
+                            <m:ctrlPr>
+                              <a:rPr lang="en-US" altLang="ja-JP" sz="2000" b="0" i="1" smtClean="0">
+                                <a:latin typeface="Cambria Math" panose="02040503050406030204" pitchFamily="18" charset="0"/>
+                              </a:rPr>
+                            </m:ctrlPr>
+                          </m:sSubPr>
+                          <m:e>
+                            <m:r>
+                              <a:rPr lang="en-US" altLang="ja-JP" sz="2000" b="0" i="1" smtClean="0">
+                                <a:latin typeface="Cambria Math" panose="02040503050406030204" pitchFamily="18" charset="0"/>
+                              </a:rPr>
+                              <m:t>𝑦</m:t>
+                            </m:r>
+                          </m:e>
+                          <m:sub>
+                            <m:r>
+                              <a:rPr lang="en-US" altLang="ja-JP" sz="2000" b="0" i="1" smtClean="0">
+                                <a:latin typeface="Cambria Math" panose="02040503050406030204" pitchFamily="18" charset="0"/>
+                              </a:rPr>
+                              <m:t>𝑖</m:t>
+                            </m:r>
+                          </m:sub>
+                        </m:sSub>
+                      </m:e>
+                    </m:nary>
+                  </m:oMath>
+                </a14:m>
+                <a:r>
+                  <a:rPr lang="en-US" altLang="ja-JP" sz="2000" dirty="0"/>
+                  <a:t> . </a:t>
+                </a:r>
+                <a14:m>
+                  <m:oMath xmlns:m="http://schemas.openxmlformats.org/officeDocument/2006/math">
+                    <m:sSub>
+                      <m:sSubPr>
+                        <m:ctrlPr>
+                          <a:rPr lang="en-US" altLang="ja-JP" sz="2000" i="1" smtClean="0">
+                            <a:latin typeface="Cambria Math" panose="02040503050406030204" pitchFamily="18" charset="0"/>
+                          </a:rPr>
+                        </m:ctrlPr>
+                      </m:sSubPr>
+                      <m:e>
+                        <m:acc>
+                          <m:accPr>
+                            <m:chr m:val="̅"/>
+                            <m:ctrlPr>
+                              <a:rPr lang="en-US" altLang="ja-JP" sz="2000" i="1" smtClean="0">
+                                <a:latin typeface="Cambria Math" panose="02040503050406030204" pitchFamily="18" charset="0"/>
+                              </a:rPr>
+                            </m:ctrlPr>
+                          </m:accPr>
+                          <m:e>
+                            <m:r>
+                              <a:rPr lang="en-US" altLang="ja-JP" sz="2000" b="0" i="1" smtClean="0">
+                                <a:latin typeface="Cambria Math" panose="02040503050406030204" pitchFamily="18" charset="0"/>
+                              </a:rPr>
+                              <m:t>𝑦</m:t>
+                            </m:r>
+                          </m:e>
+                        </m:acc>
+                      </m:e>
+                      <m:sub>
+                        <m:r>
+                          <a:rPr lang="en-US" altLang="ja-JP" sz="2000" b="0" i="1" smtClean="0">
+                            <a:latin typeface="Cambria Math" panose="02040503050406030204" pitchFamily="18" charset="0"/>
+                          </a:rPr>
+                          <m:t>h</m:t>
+                        </m:r>
+                      </m:sub>
+                    </m:sSub>
+                  </m:oMath>
+                </a14:m>
+                <a:r>
+                  <a:rPr lang="ja-JP" altLang="en-US" sz="2000"/>
+                  <a:t>是</a:t>
+                </a:r>
+                <a:r>
+                  <a:rPr lang="en-US" altLang="ja-JP" sz="2000" dirty="0"/>
+                  <a:t>h</a:t>
+                </a:r>
+                <a:r>
+                  <a:rPr lang="ja-JP" altLang="en-US" sz="2000"/>
+                  <a:t>層的</a:t>
+                </a:r>
+                <a:r>
+                  <a:rPr lang="en-US" altLang="ja-JP" sz="2000" dirty="0"/>
+                  <a:t>y</a:t>
+                </a:r>
+                <a:r>
+                  <a:rPr lang="ja-JP" altLang="en-US" sz="2000"/>
+                  <a:t>的平均數</a:t>
+                </a:r>
+                <a:endParaRPr lang="en-US" altLang="ja-JP" sz="2000" dirty="0"/>
+              </a:p>
+            </p:txBody>
+          </p:sp>
+        </mc:Choice>
+        <mc:Fallback>
+          <p:sp>
+            <p:nvSpPr>
+              <p:cNvPr id="3" name="Content Placeholder 2">
+                <a:extLst>
+                  <a:ext uri="{FF2B5EF4-FFF2-40B4-BE49-F238E27FC236}">
+                    <a16:creationId xmlns:a16="http://schemas.microsoft.com/office/drawing/2014/main" id="{4F08E529-29DD-AB2C-94BF-694DBD41AB6D}"/>
+                  </a:ext>
+                </a:extLst>
+              </p:cNvPr>
+              <p:cNvSpPr>
+                <a:spLocks noGrp="1" noRot="1" noChangeAspect="1" noMove="1" noResize="1" noEditPoints="1" noAdjustHandles="1" noChangeArrowheads="1" noChangeShapeType="1" noTextEdit="1"/>
+              </p:cNvSpPr>
+              <p:nvPr>
+                <p:ph idx="1"/>
+              </p:nvPr>
+            </p:nvSpPr>
+            <p:spPr>
+              <a:blipFill>
+                <a:blip r:embed="rId2"/>
+                <a:stretch>
+                  <a:fillRect l="-724" r="-121" b="-13372"/>
+                </a:stretch>
+              </a:blipFill>
+            </p:spPr>
+            <p:txBody>
+              <a:bodyPr/>
+              <a:lstStyle/>
+              <a:p>
+                <a:r>
+                  <a:rPr lang="en-US">
+                    <a:noFill/>
+                  </a:rPr>
+                  <a:t> </a:t>
+                </a:r>
+              </a:p>
+            </p:txBody>
+          </p:sp>
+        </mc:Fallback>
+      </mc:AlternateContent>
       <p:sp>
         <p:nvSpPr>
           <p:cNvPr id="4" name="Slide Number Placeholder 3">
@@ -8832,7 +10958,7 @@
           <a:p>
             <a:r>
               <a:rPr lang="zh-TW" altLang="en-US" sz="4400" dirty="0"/>
-              <a:t>等比例分配</a:t>
+              <a:t>等比例分配抽樣（一）</a:t>
             </a:r>
             <a:endParaRPr lang="zh-TW" altLang="en-US" dirty="0"/>
           </a:p>
@@ -8940,6 +11066,243 @@
   <p:cSld>
     <p:spTree>
       <p:nvGrpSpPr>
+        <p:cNvPr id="1" name=""/>
+        <p:cNvGrpSpPr/>
+        <p:nvPr/>
+      </p:nvGrpSpPr>
+      <p:grpSpPr>
+        <a:xfrm>
+          <a:off x="0" y="0"/>
+          <a:ext cx="0" cy="0"/>
+          <a:chOff x="0" y="0"/>
+          <a:chExt cx="0" cy="0"/>
+        </a:xfrm>
+      </p:grpSpPr>
+      <p:sp>
+        <p:nvSpPr>
+          <p:cNvPr id="2" name="Title 1">
+            <a:extLst>
+              <a:ext uri="{FF2B5EF4-FFF2-40B4-BE49-F238E27FC236}">
+                <a16:creationId xmlns:a16="http://schemas.microsoft.com/office/drawing/2014/main" id="{02972734-D2C9-0C65-A2E0-CD4C641ABDA6}"/>
+              </a:ext>
+            </a:extLst>
+          </p:cNvPr>
+          <p:cNvSpPr>
+            <a:spLocks noGrp="1"/>
+          </p:cNvSpPr>
+          <p:nvPr>
+            <p:ph type="title"/>
+          </p:nvPr>
+        </p:nvSpPr>
+        <p:spPr/>
+        <p:txBody>
+          <a:bodyPr/>
+          <a:lstStyle/>
+          <a:p>
+            <a:r>
+              <a:rPr lang="zh-TW" altLang="en-US" sz="4400" dirty="0"/>
+              <a:t>等比例分配抽樣（二）</a:t>
+            </a:r>
+            <a:endParaRPr lang="en-US" dirty="0"/>
+          </a:p>
+        </p:txBody>
+      </p:sp>
+      <p:sp>
+        <p:nvSpPr>
+          <p:cNvPr id="3" name="Content Placeholder 2">
+            <a:extLst>
+              <a:ext uri="{FF2B5EF4-FFF2-40B4-BE49-F238E27FC236}">
+                <a16:creationId xmlns:a16="http://schemas.microsoft.com/office/drawing/2014/main" id="{3B9892E5-C8AF-75C8-8D00-780C5863A6B6}"/>
+              </a:ext>
+            </a:extLst>
+          </p:cNvPr>
+          <p:cNvSpPr>
+            <a:spLocks noGrp="1"/>
+          </p:cNvSpPr>
+          <p:nvPr>
+            <p:ph idx="1"/>
+          </p:nvPr>
+        </p:nvSpPr>
+        <p:spPr/>
+        <p:txBody>
+          <a:bodyPr>
+            <a:normAutofit fontScale="92500" lnSpcReduction="10000"/>
+          </a:bodyPr>
+          <a:lstStyle/>
+          <a:p>
+            <a:pPr>
+              <a:lnSpc>
+                <a:spcPct val="150000"/>
+              </a:lnSpc>
+            </a:pPr>
+            <a:r>
+              <a:rPr lang="ja-JP" altLang="en-US" sz="2000"/>
+              <a:t>自我加權 </a:t>
+            </a:r>
+            <a:r>
+              <a:rPr lang="en-US" altLang="ja-JP" sz="2000" dirty="0"/>
+              <a:t>(Self-weighting)</a:t>
+            </a:r>
+            <a:r>
+              <a:rPr lang="ja-JP" altLang="en-US" sz="2000"/>
+              <a:t>：因為每一層的抽樣機率 都一樣（例如都是 </a:t>
+            </a:r>
+            <a:r>
+              <a:rPr lang="en-US" altLang="ja-JP" sz="2000" dirty="0"/>
+              <a:t>1%</a:t>
+            </a:r>
+            <a:r>
+              <a:rPr lang="ja-JP" altLang="en-US" sz="2000"/>
+              <a:t>），所以每個樣本的權重 </a:t>
+            </a:r>
+            <a:r>
+              <a:rPr lang="en-US" altLang="ja-JP" sz="2000" dirty="0"/>
+              <a:t> </a:t>
+            </a:r>
+            <a:r>
+              <a:rPr lang="ja-JP" altLang="en-US" sz="2000"/>
+              <a:t>也都一樣 。</a:t>
+            </a:r>
+            <a:endParaRPr lang="en-US" altLang="ja-JP" sz="2000" dirty="0"/>
+          </a:p>
+          <a:p>
+            <a:pPr>
+              <a:lnSpc>
+                <a:spcPct val="150000"/>
+              </a:lnSpc>
+            </a:pPr>
+            <a:r>
+              <a:rPr lang="ja-JP" altLang="en-US" sz="2000"/>
+              <a:t>如果母體中某些族群比例極低（例如：</a:t>
+            </a:r>
+            <a:r>
+              <a:rPr lang="en-US" altLang="ja-JP" sz="2000" dirty="0"/>
+              <a:t>80 </a:t>
+            </a:r>
+            <a:r>
+              <a:rPr lang="ja-JP" altLang="en-US" sz="2000"/>
+              <a:t>歲以上長者僅佔 </a:t>
+            </a:r>
+            <a:r>
+              <a:rPr lang="en-US" altLang="ja-JP" sz="2000" dirty="0"/>
+              <a:t>2%</a:t>
+            </a:r>
+            <a:r>
+              <a:rPr lang="ja-JP" altLang="en-US" sz="2000"/>
+              <a:t>），在總樣本 </a:t>
+            </a:r>
+            <a:r>
+              <a:rPr lang="en-US" altLang="ja-JP" sz="2000" dirty="0"/>
+              <a:t>1000 </a:t>
+            </a:r>
+            <a:r>
+              <a:rPr lang="ja-JP" altLang="en-US" sz="2000"/>
+              <a:t>人的情況下，該族群只會分配到 </a:t>
+            </a:r>
+            <a:r>
+              <a:rPr lang="en-US" altLang="ja-JP" sz="2000" dirty="0"/>
+              <a:t>20 </a:t>
+            </a:r>
+            <a:r>
+              <a:rPr lang="ja-JP" altLang="en-US" sz="2000"/>
+              <a:t>人 ，訪問這些少數人，有可能出現誤差。</a:t>
+            </a:r>
+            <a:endParaRPr lang="en-US" altLang="ja-JP" sz="2000" dirty="0"/>
+          </a:p>
+          <a:p>
+            <a:pPr>
+              <a:lnSpc>
+                <a:spcPct val="150000"/>
+              </a:lnSpc>
+            </a:pPr>
+            <a:r>
+              <a:rPr lang="ja-JP" altLang="en-US" sz="2000"/>
+              <a:t>等比例分配假設每個人被抽中的機率是均等的，但現實中不同族群「被找到」與「願意回答」的機率可能差異很大。</a:t>
+            </a:r>
+            <a:endParaRPr lang="en-US" altLang="ja-JP" sz="2000" dirty="0"/>
+          </a:p>
+          <a:p>
+            <a:pPr>
+              <a:lnSpc>
+                <a:spcPct val="150000"/>
+              </a:lnSpc>
+            </a:pPr>
+            <a:r>
+              <a:rPr lang="zh-TW" altLang="en-US" sz="2000" dirty="0"/>
+              <a:t>等比例分配抽樣沒有考慮不同群體內部的變異程度，而是假設每個群體內部的變異程度相同。因此無法降低抽樣的誤差。</a:t>
+            </a:r>
+            <a:endParaRPr lang="en-US" altLang="zh-TW" sz="2000" dirty="0"/>
+          </a:p>
+          <a:p>
+            <a:pPr>
+              <a:lnSpc>
+                <a:spcPct val="150000"/>
+              </a:lnSpc>
+            </a:pPr>
+            <a:r>
+              <a:rPr lang="ja-JP" altLang="en-US" sz="2000"/>
+              <a:t>因此，即使一開始設計是等比例抽樣，最終得到的有效樣本結構依然會與母體嚴重脫節。</a:t>
+            </a:r>
+            <a:endParaRPr lang="en-US" altLang="ja-JP" sz="2000" dirty="0"/>
+          </a:p>
+          <a:p>
+            <a:pPr marL="0" indent="0">
+              <a:lnSpc>
+                <a:spcPct val="150000"/>
+              </a:lnSpc>
+              <a:buNone/>
+            </a:pPr>
+            <a:endParaRPr lang="en-US" sz="2000" dirty="0"/>
+          </a:p>
+        </p:txBody>
+      </p:sp>
+      <p:sp>
+        <p:nvSpPr>
+          <p:cNvPr id="4" name="Slide Number Placeholder 3">
+            <a:extLst>
+              <a:ext uri="{FF2B5EF4-FFF2-40B4-BE49-F238E27FC236}">
+                <a16:creationId xmlns:a16="http://schemas.microsoft.com/office/drawing/2014/main" id="{E8F29AD5-D53A-396D-419C-76DD8804299F}"/>
+              </a:ext>
+            </a:extLst>
+          </p:cNvPr>
+          <p:cNvSpPr>
+            <a:spLocks noGrp="1"/>
+          </p:cNvSpPr>
+          <p:nvPr>
+            <p:ph type="sldNum" sz="quarter" idx="12"/>
+          </p:nvPr>
+        </p:nvSpPr>
+        <p:spPr/>
+        <p:txBody>
+          <a:bodyPr/>
+          <a:lstStyle/>
+          <a:p>
+            <a:fld id="{34E21383-B02B-694B-B2AD-A967203CDE86}" type="slidenum">
+              <a:rPr lang="en-US" smtClean="0"/>
+              <a:t>7</a:t>
+            </a:fld>
+            <a:endParaRPr lang="en-US"/>
+          </a:p>
+        </p:txBody>
+      </p:sp>
+    </p:spTree>
+    <p:extLst>
+      <p:ext uri="{BB962C8B-B14F-4D97-AF65-F5344CB8AC3E}">
+        <p14:creationId xmlns:p14="http://schemas.microsoft.com/office/powerpoint/2010/main" val="3122633317"/>
+      </p:ext>
+    </p:extLst>
+  </p:cSld>
+  <p:clrMapOvr>
+    <a:masterClrMapping/>
+  </p:clrMapOvr>
+</p:sld>
+</file>
+
+<file path=ppt/slides/slide8.xml><?xml version="1.0" encoding="utf-8"?>
+<p:sld xmlns:a="http://schemas.openxmlformats.org/drawingml/2006/main" xmlns:r="http://schemas.openxmlformats.org/officeDocument/2006/relationships" xmlns:p="http://schemas.openxmlformats.org/presentationml/2006/main">
+  <p:cSld>
+    <p:spTree>
+      <p:nvGrpSpPr>
         <p:cNvPr id="1" name="">
           <a:extLst>
             <a:ext uri="{FF2B5EF4-FFF2-40B4-BE49-F238E27FC236}">
@@ -9302,7 +11665,7 @@
           <a:p>
             <a:fld id="{34E21383-B02B-694B-B2AD-A967203CDE86}" type="slidenum">
               <a:rPr lang="en-US" smtClean="0"/>
-              <a:t>7</a:t>
+              <a:t>8</a:t>
             </a:fld>
             <a:endParaRPr lang="en-US"/>
           </a:p>
@@ -9312,926 +11675,6 @@
     <p:extLst>
       <p:ext uri="{BB962C8B-B14F-4D97-AF65-F5344CB8AC3E}">
         <p14:creationId xmlns:p14="http://schemas.microsoft.com/office/powerpoint/2010/main" val="2689928673"/>
-      </p:ext>
-    </p:extLst>
-  </p:cSld>
-  <p:clrMapOvr>
-    <a:masterClrMapping/>
-  </p:clrMapOvr>
-</p:sld>
-</file>
-
-<file path=ppt/slides/slide8.xml><?xml version="1.0" encoding="utf-8"?>
-<p:sld xmlns:a="http://schemas.openxmlformats.org/drawingml/2006/main" xmlns:r="http://schemas.openxmlformats.org/officeDocument/2006/relationships" xmlns:p="http://schemas.openxmlformats.org/presentationml/2006/main">
-  <p:cSld>
-    <p:spTree>
-      <p:nvGrpSpPr>
-        <p:cNvPr id="1" name="">
-          <a:extLst>
-            <a:ext uri="{FF2B5EF4-FFF2-40B4-BE49-F238E27FC236}">
-              <a16:creationId xmlns:a16="http://schemas.microsoft.com/office/drawing/2014/main" id="{02C106E1-CF63-3145-5A92-C69BD208B292}"/>
-            </a:ext>
-          </a:extLst>
-        </p:cNvPr>
-        <p:cNvGrpSpPr/>
-        <p:nvPr/>
-      </p:nvGrpSpPr>
-      <p:grpSpPr>
-        <a:xfrm>
-          <a:off x="0" y="0"/>
-          <a:ext cx="0" cy="0"/>
-          <a:chOff x="0" y="0"/>
-          <a:chExt cx="0" cy="0"/>
-        </a:xfrm>
-      </p:grpSpPr>
-      <p:sp>
-        <p:nvSpPr>
-          <p:cNvPr id="2" name="Title 1">
-            <a:extLst>
-              <a:ext uri="{FF2B5EF4-FFF2-40B4-BE49-F238E27FC236}">
-                <a16:creationId xmlns:a16="http://schemas.microsoft.com/office/drawing/2014/main" id="{B3778C6F-211A-7AA3-0C69-B61C040A1E77}"/>
-              </a:ext>
-            </a:extLst>
-          </p:cNvPr>
-          <p:cNvSpPr>
-            <a:spLocks noGrp="1"/>
-          </p:cNvSpPr>
-          <p:nvPr>
-            <p:ph type="title"/>
-          </p:nvPr>
-        </p:nvSpPr>
-        <p:spPr/>
-        <p:txBody>
-          <a:bodyPr/>
-          <a:lstStyle/>
-          <a:p>
-            <a:r>
-              <a:rPr lang="ja-JP" altLang="en-US"/>
-              <a:t>機率抽樣的元素（三）</a:t>
-            </a:r>
-            <a:endParaRPr lang="en-US" dirty="0"/>
-          </a:p>
-        </p:txBody>
-      </p:sp>
-      <mc:AlternateContent xmlns:mc="http://schemas.openxmlformats.org/markup-compatibility/2006">
-        <mc:Choice xmlns:a14="http://schemas.microsoft.com/office/drawing/2010/main" Requires="a14">
-          <p:sp>
-            <p:nvSpPr>
-              <p:cNvPr id="3" name="Content Placeholder 2">
-                <a:extLst>
-                  <a:ext uri="{FF2B5EF4-FFF2-40B4-BE49-F238E27FC236}">
-                    <a16:creationId xmlns:a16="http://schemas.microsoft.com/office/drawing/2014/main" id="{CFAE9C41-B4EA-2EE4-7488-91928CBB72B4}"/>
-                  </a:ext>
-                </a:extLst>
-              </p:cNvPr>
-              <p:cNvSpPr>
-                <a:spLocks noGrp="1"/>
-              </p:cNvSpPr>
-              <p:nvPr>
-                <p:ph idx="1"/>
-              </p:nvPr>
-            </p:nvSpPr>
-            <p:spPr/>
-            <p:txBody>
-              <a:bodyPr>
-                <a:normAutofit fontScale="92500" lnSpcReduction="10000"/>
-              </a:bodyPr>
-              <a:lstStyle/>
-              <a:p>
-                <a:pPr>
-                  <a:lnSpc>
-                    <a:spcPct val="150000"/>
-                  </a:lnSpc>
-                  <a:buFont typeface="Wingdings" pitchFamily="2" charset="2"/>
-                  <a:buChar char="l"/>
-                </a:pPr>
-                <a:r>
-                  <a:rPr lang="en-US" altLang="zh-TW" sz="2000" dirty="0"/>
-                  <a:t>Horvitz &amp; Thompson (1952)</a:t>
-                </a:r>
-                <a:r>
-                  <a:rPr lang="zh-TW" altLang="en-US" sz="2000" dirty="0"/>
-                  <a:t>提出不論抽樣設計多麼複雜，只要我們計算出每個樣本的入選機率或者權重，都能得到母體總和的不偏估計。</a:t>
-                </a:r>
-                <a:r>
-                  <a:rPr lang="en-US" altLang="zh-TW" sz="2000" dirty="0"/>
-                  <a:t>H-Y</a:t>
-                </a:r>
-                <a:r>
-                  <a:rPr lang="zh-TW" altLang="en-US" sz="2000" dirty="0"/>
-                  <a:t>估計式：</a:t>
-                </a:r>
-                <a14:m>
-                  <m:oMath xmlns:m="http://schemas.openxmlformats.org/officeDocument/2006/math">
-                    <m:acc>
-                      <m:accPr>
-                        <m:chr m:val="̂"/>
-                        <m:ctrlPr>
-                          <a:rPr lang="zh-TW" altLang="en-US" sz="2000" i="1" smtClean="0">
-                            <a:latin typeface="Cambria Math" panose="02040503050406030204" pitchFamily="18" charset="0"/>
-                          </a:rPr>
-                        </m:ctrlPr>
-                      </m:accPr>
-                      <m:e>
-                        <m:r>
-                          <a:rPr lang="zh-TW" altLang="en-US" sz="2000" i="1">
-                            <a:latin typeface="Cambria Math" panose="02040503050406030204" pitchFamily="18" charset="0"/>
-                          </a:rPr>
-                          <m:t>Ｙ</m:t>
-                        </m:r>
-                      </m:e>
-                    </m:acc>
-                  </m:oMath>
-                </a14:m>
-                <a:r>
-                  <a:rPr lang="en-US" altLang="zh-TW" sz="2000" dirty="0"/>
-                  <a:t>=</a:t>
-                </a:r>
-                <a14:m>
-                  <m:oMath xmlns:m="http://schemas.openxmlformats.org/officeDocument/2006/math">
-                    <m:nary>
-                      <m:naryPr>
-                        <m:chr m:val="∑"/>
-                        <m:supHide m:val="on"/>
-                        <m:ctrlPr>
-                          <a:rPr lang="en-US" altLang="zh-TW" sz="2000" i="1" dirty="0" smtClean="0">
-                            <a:latin typeface="Cambria Math" panose="02040503050406030204" pitchFamily="18" charset="0"/>
-                          </a:rPr>
-                        </m:ctrlPr>
-                      </m:naryPr>
-                      <m:sub>
-                        <m:r>
-                          <m:rPr>
-                            <m:brk m:alnAt="7"/>
-                          </m:rPr>
-                          <a:rPr lang="en-US" altLang="zh-TW" sz="2000" b="0" i="1" dirty="0" smtClean="0">
-                            <a:latin typeface="Cambria Math" panose="02040503050406030204" pitchFamily="18" charset="0"/>
-                          </a:rPr>
-                          <m:t>𝑖</m:t>
-                        </m:r>
-                        <m:r>
-                          <a:rPr lang="en-US" altLang="zh-TW" sz="2000" b="0" i="1" dirty="0" smtClean="0">
-                            <a:latin typeface="Cambria Math" panose="02040503050406030204" pitchFamily="18" charset="0"/>
-                            <a:ea typeface="Cambria Math" panose="02040503050406030204" pitchFamily="18" charset="0"/>
-                          </a:rPr>
-                          <m:t>∈</m:t>
-                        </m:r>
-                        <m:r>
-                          <a:rPr lang="en-US" altLang="zh-TW" sz="2000" b="0" i="1" dirty="0" smtClean="0">
-                            <a:latin typeface="Cambria Math" panose="02040503050406030204" pitchFamily="18" charset="0"/>
-                            <a:ea typeface="Cambria Math" panose="02040503050406030204" pitchFamily="18" charset="0"/>
-                          </a:rPr>
-                          <m:t>𝑆</m:t>
-                        </m:r>
-                      </m:sub>
-                      <m:sup/>
-                      <m:e>
-                        <m:f>
-                          <m:fPr>
-                            <m:ctrlPr>
-                              <a:rPr lang="en-US" altLang="zh-TW" sz="2000" i="1" dirty="0" smtClean="0">
-                                <a:latin typeface="Cambria Math" panose="02040503050406030204" pitchFamily="18" charset="0"/>
-                              </a:rPr>
-                            </m:ctrlPr>
-                          </m:fPr>
-                          <m:num>
-                            <m:sSub>
-                              <m:sSubPr>
-                                <m:ctrlPr>
-                                  <a:rPr lang="en-US" altLang="zh-TW" sz="2000" i="1" dirty="0" smtClean="0">
-                                    <a:latin typeface="Cambria Math" panose="02040503050406030204" pitchFamily="18" charset="0"/>
-                                  </a:rPr>
-                                </m:ctrlPr>
-                              </m:sSubPr>
-                              <m:e>
-                                <m:r>
-                                  <a:rPr lang="en-US" altLang="zh-TW" sz="2000" b="0" i="1" dirty="0" smtClean="0">
-                                    <a:latin typeface="Cambria Math" panose="02040503050406030204" pitchFamily="18" charset="0"/>
-                                  </a:rPr>
-                                  <m:t>𝑦</m:t>
-                                </m:r>
-                              </m:e>
-                              <m:sub>
-                                <m:r>
-                                  <a:rPr lang="en-US" altLang="zh-TW" sz="2000" b="0" i="1" dirty="0" smtClean="0">
-                                    <a:latin typeface="Cambria Math" panose="02040503050406030204" pitchFamily="18" charset="0"/>
-                                  </a:rPr>
-                                  <m:t>𝑖</m:t>
-                                </m:r>
-                              </m:sub>
-                            </m:sSub>
-                          </m:num>
-                          <m:den>
-                            <m:sSub>
-                              <m:sSubPr>
-                                <m:ctrlPr>
-                                  <a:rPr lang="en-US" altLang="zh-TW" sz="2000" i="1" dirty="0" smtClean="0">
-                                    <a:latin typeface="Cambria Math" panose="02040503050406030204" pitchFamily="18" charset="0"/>
-                                  </a:rPr>
-                                </m:ctrlPr>
-                              </m:sSubPr>
-                              <m:e>
-                                <m:r>
-                                  <a:rPr lang="en-US" altLang="zh-TW" sz="2000" i="1" dirty="0" smtClean="0">
-                                    <a:latin typeface="Cambria Math" panose="02040503050406030204" pitchFamily="18" charset="0"/>
-                                    <a:ea typeface="Cambria Math" panose="02040503050406030204" pitchFamily="18" charset="0"/>
-                                  </a:rPr>
-                                  <m:t>𝜋</m:t>
-                                </m:r>
-                              </m:e>
-                              <m:sub>
-                                <m:r>
-                                  <a:rPr lang="en-US" altLang="zh-TW" sz="2000" b="0" i="1" dirty="0" smtClean="0">
-                                    <a:latin typeface="Cambria Math" panose="02040503050406030204" pitchFamily="18" charset="0"/>
-                                  </a:rPr>
-                                  <m:t>𝑖</m:t>
-                                </m:r>
-                              </m:sub>
-                            </m:sSub>
-                          </m:den>
-                        </m:f>
-                      </m:e>
-                    </m:nary>
-                  </m:oMath>
-                </a14:m>
-                <a:r>
-                  <a:rPr lang="en-US" altLang="zh-TW" sz="2000" dirty="0"/>
-                  <a:t> </a:t>
-                </a:r>
-                <a:r>
-                  <a:rPr lang="zh-TW" altLang="en-US" sz="2000" dirty="0"/>
-                  <a:t>。</a:t>
-                </a:r>
-                <a14:m>
-                  <m:oMath xmlns:m="http://schemas.openxmlformats.org/officeDocument/2006/math">
-                    <m:sSub>
-                      <m:sSubPr>
-                        <m:ctrlPr>
-                          <a:rPr lang="en-US" altLang="zh-TW" sz="2000" i="1" dirty="0" smtClean="0">
-                            <a:latin typeface="Cambria Math" panose="02040503050406030204" pitchFamily="18" charset="0"/>
-                          </a:rPr>
-                        </m:ctrlPr>
-                      </m:sSubPr>
-                      <m:e>
-                        <m:r>
-                          <a:rPr lang="en-US" altLang="zh-TW" sz="2000" i="1" dirty="0" smtClean="0">
-                            <a:latin typeface="Cambria Math" panose="02040503050406030204" pitchFamily="18" charset="0"/>
-                            <a:ea typeface="Cambria Math" panose="02040503050406030204" pitchFamily="18" charset="0"/>
-                          </a:rPr>
-                          <m:t>𝜋</m:t>
-                        </m:r>
-                      </m:e>
-                      <m:sub>
-                        <m:r>
-                          <a:rPr lang="en-US" altLang="zh-TW" sz="2000" b="0" i="1" dirty="0" smtClean="0">
-                            <a:latin typeface="Cambria Math" panose="02040503050406030204" pitchFamily="18" charset="0"/>
-                          </a:rPr>
-                          <m:t>𝑖</m:t>
-                        </m:r>
-                      </m:sub>
-                    </m:sSub>
-                  </m:oMath>
-                </a14:m>
-                <a:r>
-                  <a:rPr lang="zh-TW" altLang="en-US" sz="2000" dirty="0"/>
-                  <a:t>是被抽中的機率。</a:t>
-                </a:r>
-                <a:endParaRPr lang="en-US" altLang="zh-TW" sz="2000" dirty="0"/>
-              </a:p>
-              <a:p>
-                <a:pPr>
-                  <a:lnSpc>
-                    <a:spcPct val="150000"/>
-                  </a:lnSpc>
-                  <a:buFont typeface="Wingdings" pitchFamily="2" charset="2"/>
-                  <a:buChar char="l"/>
-                </a:pPr>
-                <a:r>
-                  <a:rPr lang="zh-TW" altLang="en-US" sz="2000" dirty="0"/>
-                  <a:t>例如有</a:t>
-                </a:r>
-                <a:r>
-                  <a:rPr lang="en-US" altLang="zh-TW" sz="2000" dirty="0"/>
-                  <a:t>10</a:t>
-                </a:r>
-                <a:r>
-                  <a:rPr lang="zh-TW" altLang="en-US" sz="2000" dirty="0"/>
-                  <a:t>人，已知有</a:t>
-                </a:r>
-                <a:r>
-                  <a:rPr lang="en-US" altLang="zh-TW" sz="2000" dirty="0"/>
-                  <a:t>8</a:t>
-                </a:r>
-                <a:r>
-                  <a:rPr lang="zh-TW" altLang="en-US" sz="2000" dirty="0"/>
-                  <a:t>人的年薪是</a:t>
-                </a:r>
-                <a:r>
-                  <a:rPr lang="en-US" altLang="zh-TW" sz="2000" dirty="0"/>
-                  <a:t>100</a:t>
-                </a:r>
-                <a:r>
-                  <a:rPr lang="zh-TW" altLang="en-US" sz="2000" dirty="0"/>
-                  <a:t>萬，</a:t>
-                </a:r>
-                <a:r>
-                  <a:rPr lang="en-US" altLang="zh-TW" sz="2000" dirty="0"/>
-                  <a:t>2</a:t>
-                </a:r>
-                <a:r>
-                  <a:rPr lang="zh-TW" altLang="en-US" sz="2000" dirty="0"/>
-                  <a:t>人的年薪是</a:t>
-                </a:r>
-                <a:r>
-                  <a:rPr lang="en-US" altLang="zh-TW" sz="2000" dirty="0"/>
-                  <a:t>20</a:t>
-                </a:r>
-                <a:r>
-                  <a:rPr lang="zh-TW" altLang="en-US" sz="2000" dirty="0"/>
-                  <a:t>萬，如果只能抽出一位，請問年薪的估計是多少？如果抽中年薪</a:t>
-                </a:r>
-                <a:r>
-                  <a:rPr lang="en-US" altLang="zh-TW" sz="2000" dirty="0"/>
-                  <a:t>100</a:t>
-                </a:r>
-                <a:r>
-                  <a:rPr lang="zh-TW" altLang="en-US" sz="2000" dirty="0"/>
-                  <a:t>萬的</a:t>
-                </a:r>
-                <a:r>
-                  <a:rPr lang="en-US" altLang="zh-TW" sz="2000" dirty="0"/>
-                  <a:t>8</a:t>
-                </a:r>
-                <a:r>
-                  <a:rPr lang="zh-TW" altLang="en-US" sz="2000" dirty="0"/>
-                  <a:t>個人其中之一，</a:t>
-                </a:r>
-                <a:r>
-                  <a:rPr lang="en-US" altLang="zh-TW" sz="2000" dirty="0"/>
-                  <a:t>100</a:t>
-                </a:r>
-                <a:r>
-                  <a:rPr lang="zh-TW" altLang="en-US" sz="2000" dirty="0"/>
-                  <a:t>萬雖然是無偏估計，卻不如用</a:t>
-                </a:r>
-                <a:r>
-                  <a:rPr lang="en-US" altLang="zh-TW" sz="2000" dirty="0"/>
-                  <a:t>H-Y</a:t>
-                </a:r>
-                <a:r>
-                  <a:rPr lang="zh-TW" altLang="en-US" sz="2000" dirty="0"/>
-                  <a:t>估計式：</a:t>
-                </a:r>
-                <a14:m>
-                  <m:oMath xmlns:m="http://schemas.openxmlformats.org/officeDocument/2006/math">
-                    <m:f>
-                      <m:fPr>
-                        <m:ctrlPr>
-                          <a:rPr lang="en-US" altLang="zh-TW" sz="2000" i="1" smtClean="0">
-                            <a:latin typeface="Cambria Math" panose="02040503050406030204" pitchFamily="18" charset="0"/>
-                          </a:rPr>
-                        </m:ctrlPr>
-                      </m:fPr>
-                      <m:num>
-                        <m:r>
-                          <a:rPr lang="en-US" altLang="zh-TW" sz="2000" b="0" i="1" smtClean="0">
-                            <a:latin typeface="Cambria Math" panose="02040503050406030204" pitchFamily="18" charset="0"/>
-                          </a:rPr>
-                          <m:t>100</m:t>
-                        </m:r>
-                      </m:num>
-                      <m:den>
-                        <m:r>
-                          <a:rPr lang="en-US" altLang="zh-TW" sz="2000" b="0" i="1" smtClean="0">
-                            <a:latin typeface="Cambria Math" panose="02040503050406030204" pitchFamily="18" charset="0"/>
-                          </a:rPr>
-                          <m:t>0.1</m:t>
-                        </m:r>
-                      </m:den>
-                    </m:f>
-                    <m:r>
-                      <a:rPr lang="en-US" altLang="zh-TW" sz="2000" b="0" i="1" smtClean="0">
-                        <a:latin typeface="Cambria Math" panose="02040503050406030204" pitchFamily="18" charset="0"/>
-                      </a:rPr>
-                      <m:t>=1000</m:t>
-                    </m:r>
-                    <m:r>
-                      <a:rPr lang="zh-TW" altLang="en-US" sz="2000" i="1">
-                        <a:latin typeface="Cambria Math" panose="02040503050406030204" pitchFamily="18" charset="0"/>
-                      </a:rPr>
-                      <m:t>萬</m:t>
-                    </m:r>
-                    <m:r>
-                      <a:rPr lang="zh-TW" altLang="en-US" sz="2000" i="1" smtClean="0">
-                        <a:latin typeface="Cambria Math" panose="02040503050406030204" pitchFamily="18" charset="0"/>
-                      </a:rPr>
-                      <m:t>。</m:t>
-                    </m:r>
-                    <m:r>
-                      <a:rPr lang="en-US" altLang="zh-TW" sz="2000" b="0" i="1" smtClean="0">
-                        <a:latin typeface="Cambria Math" panose="02040503050406030204" pitchFamily="18" charset="0"/>
-                      </a:rPr>
-                      <m:t> </m:t>
-                    </m:r>
-                    <m:r>
-                      <a:rPr lang="zh-TW" altLang="en-US" sz="2000" i="1">
-                        <a:latin typeface="Cambria Math" panose="02040503050406030204" pitchFamily="18" charset="0"/>
-                      </a:rPr>
-                      <m:t>如果抽中</m:t>
-                    </m:r>
-                    <m:r>
-                      <a:rPr lang="zh-TW" altLang="en-US" sz="2000" i="1" smtClean="0">
-                        <a:latin typeface="Cambria Math" panose="02040503050406030204" pitchFamily="18" charset="0"/>
-                      </a:rPr>
-                      <m:t>年薪</m:t>
-                    </m:r>
-                    <m:r>
-                      <a:rPr lang="en-US" altLang="zh-TW" sz="2000" b="0" i="1" smtClean="0">
-                        <a:latin typeface="Cambria Math" panose="02040503050406030204" pitchFamily="18" charset="0"/>
-                      </a:rPr>
-                      <m:t>20</m:t>
-                    </m:r>
-                    <m:r>
-                      <a:rPr lang="zh-TW" altLang="en-US" sz="2000" i="1">
-                        <a:latin typeface="Cambria Math" panose="02040503050406030204" pitchFamily="18" charset="0"/>
-                      </a:rPr>
-                      <m:t>萬，則是</m:t>
-                    </m:r>
-                    <m:f>
-                      <m:fPr>
-                        <m:ctrlPr>
-                          <a:rPr lang="en-US" altLang="zh-TW" sz="2000" b="0" i="1" smtClean="0">
-                            <a:latin typeface="Cambria Math" panose="02040503050406030204" pitchFamily="18" charset="0"/>
-                          </a:rPr>
-                        </m:ctrlPr>
-                      </m:fPr>
-                      <m:num>
-                        <m:r>
-                          <a:rPr lang="en-US" altLang="zh-TW" sz="2000" b="0" i="1" smtClean="0">
-                            <a:latin typeface="Cambria Math" panose="02040503050406030204" pitchFamily="18" charset="0"/>
-                          </a:rPr>
-                          <m:t>20</m:t>
-                        </m:r>
-                      </m:num>
-                      <m:den>
-                        <m:r>
-                          <a:rPr lang="en-US" altLang="zh-TW" sz="2000" b="0" i="1" smtClean="0">
-                            <a:latin typeface="Cambria Math" panose="02040503050406030204" pitchFamily="18" charset="0"/>
-                          </a:rPr>
-                          <m:t>0.1</m:t>
-                        </m:r>
-                      </m:den>
-                    </m:f>
-                    <m:r>
-                      <a:rPr lang="en-US" altLang="zh-TW" sz="2000" b="0" i="1" smtClean="0">
-                        <a:latin typeface="Cambria Math" panose="02040503050406030204" pitchFamily="18" charset="0"/>
-                      </a:rPr>
-                      <m:t>=200</m:t>
-                    </m:r>
-                    <m:r>
-                      <a:rPr lang="zh-TW" altLang="en-US" sz="2000" i="1">
-                        <a:latin typeface="Cambria Math" panose="02040503050406030204" pitchFamily="18" charset="0"/>
-                      </a:rPr>
-                      <m:t>萬。</m:t>
-                    </m:r>
-                    <m:r>
-                      <a:rPr lang="zh-TW" altLang="en-US" sz="2000" i="1" smtClean="0">
-                        <a:latin typeface="Cambria Math" panose="02040503050406030204" pitchFamily="18" charset="0"/>
-                      </a:rPr>
-                      <m:t>期望值</m:t>
-                    </m:r>
-                    <m:r>
-                      <a:rPr lang="en-US" altLang="zh-TW" sz="2000" b="0" i="1" smtClean="0">
-                        <a:latin typeface="Cambria Math" panose="02040503050406030204" pitchFamily="18" charset="0"/>
-                      </a:rPr>
-                      <m:t>=</m:t>
-                    </m:r>
-                    <m:d>
-                      <m:dPr>
-                        <m:ctrlPr>
-                          <a:rPr lang="en-US" altLang="zh-TW" sz="2000" b="0" i="1" smtClean="0">
-                            <a:latin typeface="Cambria Math" panose="02040503050406030204" pitchFamily="18" charset="0"/>
-                          </a:rPr>
-                        </m:ctrlPr>
-                      </m:dPr>
-                      <m:e>
-                        <m:r>
-                          <a:rPr lang="en-US" altLang="zh-TW" sz="2000" b="0" i="1" smtClean="0">
-                            <a:latin typeface="Cambria Math" panose="02040503050406030204" pitchFamily="18" charset="0"/>
-                          </a:rPr>
-                          <m:t>0.8</m:t>
-                        </m:r>
-                        <m:r>
-                          <a:rPr lang="en-US" altLang="zh-TW" sz="2000" b="0" i="1" smtClean="0">
-                            <a:latin typeface="Cambria Math" panose="02040503050406030204" pitchFamily="18" charset="0"/>
-                            <a:ea typeface="Cambria Math" panose="02040503050406030204" pitchFamily="18" charset="0"/>
-                          </a:rPr>
-                          <m:t>×1000</m:t>
-                        </m:r>
-                      </m:e>
-                    </m:d>
-                    <m:r>
-                      <a:rPr lang="en-US" altLang="zh-TW" sz="2000" b="0" i="1" smtClean="0">
-                        <a:latin typeface="Cambria Math" panose="02040503050406030204" pitchFamily="18" charset="0"/>
-                        <a:ea typeface="Cambria Math" panose="02040503050406030204" pitchFamily="18" charset="0"/>
-                      </a:rPr>
-                      <m:t>+</m:t>
-                    </m:r>
-                    <m:d>
-                      <m:dPr>
-                        <m:ctrlPr>
-                          <a:rPr lang="en-US" altLang="zh-TW" sz="2000" b="0" i="1" smtClean="0">
-                            <a:latin typeface="Cambria Math" panose="02040503050406030204" pitchFamily="18" charset="0"/>
-                            <a:ea typeface="Cambria Math" panose="02040503050406030204" pitchFamily="18" charset="0"/>
-                          </a:rPr>
-                        </m:ctrlPr>
-                      </m:dPr>
-                      <m:e>
-                        <m:r>
-                          <a:rPr lang="en-US" altLang="zh-TW" sz="2000" b="0" i="1" smtClean="0">
-                            <a:latin typeface="Cambria Math" panose="02040503050406030204" pitchFamily="18" charset="0"/>
-                            <a:ea typeface="Cambria Math" panose="02040503050406030204" pitchFamily="18" charset="0"/>
-                          </a:rPr>
-                          <m:t>0.2×200</m:t>
-                        </m:r>
-                      </m:e>
-                    </m:d>
-                    <m:r>
-                      <a:rPr lang="en-US" altLang="zh-TW" sz="2000" b="0" i="1" smtClean="0">
-                        <a:latin typeface="Cambria Math" panose="02040503050406030204" pitchFamily="18" charset="0"/>
-                        <a:ea typeface="Cambria Math" panose="02040503050406030204" pitchFamily="18" charset="0"/>
-                      </a:rPr>
-                      <m:t>=800+40=840</m:t>
-                    </m:r>
-                    <m:r>
-                      <a:rPr lang="zh-TW" altLang="en-US" sz="2000" i="1">
-                        <a:latin typeface="Cambria Math" panose="02040503050406030204" pitchFamily="18" charset="0"/>
-                        <a:ea typeface="Cambria Math" panose="02040503050406030204" pitchFamily="18" charset="0"/>
-                      </a:rPr>
-                      <m:t>萬。</m:t>
-                    </m:r>
-                  </m:oMath>
-                </a14:m>
-                <a:r>
-                  <a:rPr lang="en-US" altLang="zh-TW" sz="2000" dirty="0"/>
-                  <a:t> 840</a:t>
-                </a:r>
-                <a:r>
-                  <a:rPr lang="zh-TW" altLang="en-US" sz="2000" dirty="0"/>
-                  <a:t>萬剛好是這</a:t>
-                </a:r>
-                <a:r>
-                  <a:rPr lang="en-US" altLang="zh-TW" sz="2000" dirty="0"/>
-                  <a:t>10</a:t>
-                </a:r>
-                <a:r>
-                  <a:rPr lang="zh-TW" altLang="en-US" sz="2000" dirty="0"/>
-                  <a:t>個人的總年薪。</a:t>
-                </a:r>
-                <a:endParaRPr lang="en-US" altLang="zh-TW" sz="2000" dirty="0"/>
-              </a:p>
-              <a:p>
-                <a:pPr>
-                  <a:lnSpc>
-                    <a:spcPct val="150000"/>
-                  </a:lnSpc>
-                  <a:buFont typeface="Wingdings" pitchFamily="2" charset="2"/>
-                  <a:buChar char="l"/>
-                </a:pPr>
-                <a:r>
-                  <a:rPr lang="zh-TW" altLang="en-US" sz="2000" dirty="0"/>
-                  <a:t>入選機率只要不是 </a:t>
-                </a:r>
-                <a:r>
-                  <a:rPr lang="en-US" altLang="zh-TW" sz="2000" dirty="0"/>
-                  <a:t>0</a:t>
-                </a:r>
-                <a:r>
-                  <a:rPr lang="zh-TW" altLang="en-US" sz="2000" dirty="0"/>
-                  <a:t>，在計算時除回正確的 </a:t>
-                </a:r>
-                <a14:m>
-                  <m:oMath xmlns:m="http://schemas.openxmlformats.org/officeDocument/2006/math">
-                    <m:sSub>
-                      <m:sSubPr>
-                        <m:ctrlPr>
-                          <a:rPr lang="en-US" altLang="zh-TW" sz="2000" i="1" smtClean="0">
-                            <a:latin typeface="Cambria Math" panose="02040503050406030204" pitchFamily="18" charset="0"/>
-                          </a:rPr>
-                        </m:ctrlPr>
-                      </m:sSubPr>
-                      <m:e>
-                        <m:r>
-                          <a:rPr lang="en-US" altLang="zh-TW" sz="2000" i="1" smtClean="0">
-                            <a:latin typeface="Cambria Math" panose="02040503050406030204" pitchFamily="18" charset="0"/>
-                            <a:ea typeface="Cambria Math" panose="02040503050406030204" pitchFamily="18" charset="0"/>
-                          </a:rPr>
-                          <m:t>𝜋</m:t>
-                        </m:r>
-                      </m:e>
-                      <m:sub>
-                        <m:r>
-                          <a:rPr lang="en-US" altLang="zh-TW" sz="2000" b="0" i="1" smtClean="0">
-                            <a:latin typeface="Cambria Math" panose="02040503050406030204" pitchFamily="18" charset="0"/>
-                          </a:rPr>
-                          <m:t>𝑖</m:t>
-                        </m:r>
-                      </m:sub>
-                    </m:sSub>
-                  </m:oMath>
-                </a14:m>
-                <a:r>
-                  <a:rPr lang="zh-TW" altLang="en" sz="2000" dirty="0"/>
-                  <a:t>，</a:t>
-                </a:r>
-                <a:r>
-                  <a:rPr lang="zh-TW" altLang="en-US" sz="2000" dirty="0"/>
-                  <a:t>算出的總收入會等於母體。期望值寫成：</a:t>
-                </a:r>
-                <a14:m>
-                  <m:oMath xmlns:m="http://schemas.openxmlformats.org/officeDocument/2006/math">
-                    <m:nary>
-                      <m:naryPr>
-                        <m:chr m:val="∑"/>
-                        <m:ctrlPr>
-                          <a:rPr lang="zh-TW" altLang="en-US" sz="2000" i="1" smtClean="0">
-                            <a:latin typeface="Cambria Math" panose="02040503050406030204" pitchFamily="18" charset="0"/>
-                          </a:rPr>
-                        </m:ctrlPr>
-                      </m:naryPr>
-                      <m:sub>
-                        <m:r>
-                          <m:rPr>
-                            <m:brk m:alnAt="23"/>
-                          </m:rPr>
-                          <a:rPr lang="en-US" altLang="zh-TW" sz="2000" b="0" i="1" smtClean="0">
-                            <a:latin typeface="Cambria Math" panose="02040503050406030204" pitchFamily="18" charset="0"/>
-                          </a:rPr>
-                          <m:t>𝑖</m:t>
-                        </m:r>
-                        <m:r>
-                          <a:rPr lang="en-US" altLang="zh-TW" sz="2000" b="0" i="1" smtClean="0">
-                            <a:latin typeface="Cambria Math" panose="02040503050406030204" pitchFamily="18" charset="0"/>
-                          </a:rPr>
-                          <m:t>=1</m:t>
-                        </m:r>
-                      </m:sub>
-                      <m:sup>
-                        <m:r>
-                          <a:rPr lang="en-US" altLang="zh-TW" sz="2000" b="0" i="1" smtClean="0">
-                            <a:latin typeface="Cambria Math" panose="02040503050406030204" pitchFamily="18" charset="0"/>
-                          </a:rPr>
-                          <m:t>𝑁</m:t>
-                        </m:r>
-                      </m:sup>
-                      <m:e>
-                        <m:sSub>
-                          <m:sSubPr>
-                            <m:ctrlPr>
-                              <a:rPr lang="en-US" altLang="zh-TW" sz="2000" i="1" smtClean="0">
-                                <a:latin typeface="Cambria Math" panose="02040503050406030204" pitchFamily="18" charset="0"/>
-                              </a:rPr>
-                            </m:ctrlPr>
-                          </m:sSubPr>
-                          <m:e>
-                            <m:r>
-                              <a:rPr lang="en-US" altLang="zh-TW" sz="2000" i="1" smtClean="0">
-                                <a:latin typeface="Cambria Math" panose="02040503050406030204" pitchFamily="18" charset="0"/>
-                                <a:ea typeface="Cambria Math" panose="02040503050406030204" pitchFamily="18" charset="0"/>
-                              </a:rPr>
-                              <m:t>𝜋</m:t>
-                            </m:r>
-                          </m:e>
-                          <m:sub>
-                            <m:r>
-                              <a:rPr lang="en-US" altLang="zh-TW" sz="2000" b="0" i="1" smtClean="0">
-                                <a:latin typeface="Cambria Math" panose="02040503050406030204" pitchFamily="18" charset="0"/>
-                              </a:rPr>
-                              <m:t>𝑖</m:t>
-                            </m:r>
-                          </m:sub>
-                        </m:sSub>
-                        <m:f>
-                          <m:fPr>
-                            <m:ctrlPr>
-                              <a:rPr lang="en-US" altLang="zh-TW" sz="2000" i="1" smtClean="0">
-                                <a:latin typeface="Cambria Math" panose="02040503050406030204" pitchFamily="18" charset="0"/>
-                              </a:rPr>
-                            </m:ctrlPr>
-                          </m:fPr>
-                          <m:num>
-                            <m:sSub>
-                              <m:sSubPr>
-                                <m:ctrlPr>
-                                  <a:rPr lang="en-US" altLang="zh-TW" sz="2000" i="1" smtClean="0">
-                                    <a:latin typeface="Cambria Math" panose="02040503050406030204" pitchFamily="18" charset="0"/>
-                                  </a:rPr>
-                                </m:ctrlPr>
-                              </m:sSubPr>
-                              <m:e>
-                                <m:r>
-                                  <a:rPr lang="en-US" altLang="zh-TW" sz="2000" b="0" i="1" smtClean="0">
-                                    <a:latin typeface="Cambria Math" panose="02040503050406030204" pitchFamily="18" charset="0"/>
-                                  </a:rPr>
-                                  <m:t>𝑦</m:t>
-                                </m:r>
-                              </m:e>
-                              <m:sub>
-                                <m:r>
-                                  <a:rPr lang="en-US" altLang="zh-TW" sz="2000" b="0" i="1" smtClean="0">
-                                    <a:latin typeface="Cambria Math" panose="02040503050406030204" pitchFamily="18" charset="0"/>
-                                  </a:rPr>
-                                  <m:t>𝑖</m:t>
-                                </m:r>
-                              </m:sub>
-                            </m:sSub>
-                          </m:num>
-                          <m:den>
-                            <m:sSub>
-                              <m:sSubPr>
-                                <m:ctrlPr>
-                                  <a:rPr lang="en-US" altLang="zh-TW" sz="2000" i="1" smtClean="0">
-                                    <a:latin typeface="Cambria Math" panose="02040503050406030204" pitchFamily="18" charset="0"/>
-                                  </a:rPr>
-                                </m:ctrlPr>
-                              </m:sSubPr>
-                              <m:e>
-                                <m:r>
-                                  <a:rPr lang="en-US" altLang="zh-TW" sz="2000" i="1" smtClean="0">
-                                    <a:latin typeface="Cambria Math" panose="02040503050406030204" pitchFamily="18" charset="0"/>
-                                    <a:ea typeface="Cambria Math" panose="02040503050406030204" pitchFamily="18" charset="0"/>
-                                  </a:rPr>
-                                  <m:t>𝜋</m:t>
-                                </m:r>
-                              </m:e>
-                              <m:sub>
-                                <m:r>
-                                  <a:rPr lang="en-US" altLang="zh-TW" sz="2000" b="0" i="1" smtClean="0">
-                                    <a:latin typeface="Cambria Math" panose="02040503050406030204" pitchFamily="18" charset="0"/>
-                                  </a:rPr>
-                                  <m:t>𝑖</m:t>
-                                </m:r>
-                              </m:sub>
-                            </m:sSub>
-                          </m:den>
-                        </m:f>
-                        <m:r>
-                          <a:rPr lang="en-US" altLang="zh-TW" sz="2000" b="0" i="1" smtClean="0">
-                            <a:latin typeface="Cambria Math" panose="02040503050406030204" pitchFamily="18" charset="0"/>
-                          </a:rPr>
-                          <m:t>=</m:t>
-                        </m:r>
-                      </m:e>
-                    </m:nary>
-                    <m:nary>
-                      <m:naryPr>
-                        <m:chr m:val="∑"/>
-                        <m:ctrlPr>
-                          <a:rPr lang="zh-TW" altLang="en-US" sz="2000" i="1">
-                            <a:latin typeface="Cambria Math" panose="02040503050406030204" pitchFamily="18" charset="0"/>
-                          </a:rPr>
-                        </m:ctrlPr>
-                      </m:naryPr>
-                      <m:sub>
-                        <m:r>
-                          <m:rPr>
-                            <m:brk m:alnAt="23"/>
-                          </m:rPr>
-                          <a:rPr lang="en-US" altLang="zh-TW" sz="2000" i="1">
-                            <a:latin typeface="Cambria Math" panose="02040503050406030204" pitchFamily="18" charset="0"/>
-                          </a:rPr>
-                          <m:t>𝑖</m:t>
-                        </m:r>
-                        <m:r>
-                          <a:rPr lang="en-US" altLang="zh-TW" sz="2000" i="1">
-                            <a:latin typeface="Cambria Math" panose="02040503050406030204" pitchFamily="18" charset="0"/>
-                          </a:rPr>
-                          <m:t>=1</m:t>
-                        </m:r>
-                      </m:sub>
-                      <m:sup>
-                        <m:r>
-                          <a:rPr lang="en-US" altLang="zh-TW" sz="2000" i="1">
-                            <a:latin typeface="Cambria Math" panose="02040503050406030204" pitchFamily="18" charset="0"/>
-                          </a:rPr>
-                          <m:t>𝑁</m:t>
-                        </m:r>
-                      </m:sup>
-                      <m:e>
-                        <m:sSub>
-                          <m:sSubPr>
-                            <m:ctrlPr>
-                              <a:rPr lang="en-US" altLang="zh-TW" sz="2000" i="1">
-                                <a:latin typeface="Cambria Math" panose="02040503050406030204" pitchFamily="18" charset="0"/>
-                              </a:rPr>
-                            </m:ctrlPr>
-                          </m:sSubPr>
-                          <m:e>
-                            <m:r>
-                              <a:rPr lang="en-US" altLang="zh-TW" sz="2000" b="0" i="1" smtClean="0">
-                                <a:latin typeface="Cambria Math" panose="02040503050406030204" pitchFamily="18" charset="0"/>
-                                <a:ea typeface="Cambria Math" panose="02040503050406030204" pitchFamily="18" charset="0"/>
-                              </a:rPr>
-                              <m:t>𝑦</m:t>
-                            </m:r>
-                          </m:e>
-                          <m:sub>
-                            <m:r>
-                              <a:rPr lang="en-US" altLang="zh-TW" sz="2000" i="1">
-                                <a:latin typeface="Cambria Math" panose="02040503050406030204" pitchFamily="18" charset="0"/>
-                              </a:rPr>
-                              <m:t>𝑖</m:t>
-                            </m:r>
-                          </m:sub>
-                        </m:sSub>
-                      </m:e>
-                    </m:nary>
-                  </m:oMath>
-                </a14:m>
-                <a:endParaRPr lang="en-US" altLang="ja-JP" sz="2000" dirty="0"/>
-              </a:p>
-              <a:p>
-                <a:pPr marL="0" indent="0">
-                  <a:buNone/>
-                </a:pPr>
-                <a:endParaRPr lang="en-US" dirty="0"/>
-              </a:p>
-            </p:txBody>
-          </p:sp>
-        </mc:Choice>
-        <mc:Fallback>
-          <p:sp>
-            <p:nvSpPr>
-              <p:cNvPr id="3" name="Content Placeholder 2">
-                <a:extLst>
-                  <a:ext uri="{FF2B5EF4-FFF2-40B4-BE49-F238E27FC236}">
-                    <a16:creationId xmlns:a16="http://schemas.microsoft.com/office/drawing/2014/main" id="{CFAE9C41-B4EA-2EE4-7488-91928CBB72B4}"/>
-                  </a:ext>
-                </a:extLst>
-              </p:cNvPr>
-              <p:cNvSpPr>
-                <a:spLocks noGrp="1" noRot="1" noChangeAspect="1" noMove="1" noResize="1" noEditPoints="1" noAdjustHandles="1" noChangeArrowheads="1" noChangeShapeType="1" noTextEdit="1"/>
-              </p:cNvSpPr>
-              <p:nvPr>
-                <p:ph idx="1"/>
-              </p:nvPr>
-            </p:nvSpPr>
-            <p:spPr>
-              <a:blipFill>
-                <a:blip r:embed="rId2"/>
-                <a:stretch>
-                  <a:fillRect l="-1086" r="-603" b="-8721"/>
-                </a:stretch>
-              </a:blipFill>
-            </p:spPr>
-            <p:txBody>
-              <a:bodyPr/>
-              <a:lstStyle/>
-              <a:p>
-                <a:r>
-                  <a:rPr lang="en-US">
-                    <a:noFill/>
-                  </a:rPr>
-                  <a:t> </a:t>
-                </a:r>
-              </a:p>
-            </p:txBody>
-          </p:sp>
-        </mc:Fallback>
-      </mc:AlternateContent>
-      <p:sp>
-        <p:nvSpPr>
-          <p:cNvPr id="4" name="Slide Number Placeholder 3">
-            <a:extLst>
-              <a:ext uri="{FF2B5EF4-FFF2-40B4-BE49-F238E27FC236}">
-                <a16:creationId xmlns:a16="http://schemas.microsoft.com/office/drawing/2014/main" id="{2A1B54FE-2AC9-E283-7F28-80727A4EC28D}"/>
-              </a:ext>
-            </a:extLst>
-          </p:cNvPr>
-          <p:cNvSpPr>
-            <a:spLocks noGrp="1"/>
-          </p:cNvSpPr>
-          <p:nvPr>
-            <p:ph type="sldNum" sz="quarter" idx="12"/>
-          </p:nvPr>
-        </p:nvSpPr>
-        <p:spPr/>
-        <p:txBody>
-          <a:bodyPr/>
-          <a:lstStyle/>
-          <a:p>
-            <a:fld id="{34E21383-B02B-694B-B2AD-A967203CDE86}" type="slidenum">
-              <a:rPr lang="en-US" smtClean="0"/>
-              <a:t>8</a:t>
-            </a:fld>
-            <a:endParaRPr lang="en-US"/>
-          </a:p>
-        </p:txBody>
-      </p:sp>
-    </p:spTree>
-    <p:extLst>
-      <p:ext uri="{BB962C8B-B14F-4D97-AF65-F5344CB8AC3E}">
-        <p14:creationId xmlns:p14="http://schemas.microsoft.com/office/powerpoint/2010/main" val="1597800765"/>
       </p:ext>
     </p:extLst>
   </p:cSld>
@@ -10260,10 +11703,10 @@
       </p:grpSpPr>
       <p:sp>
         <p:nvSpPr>
-          <p:cNvPr id="2" name="標題 1">
+          <p:cNvPr id="2" name="Title 1">
             <a:extLst>
               <a:ext uri="{FF2B5EF4-FFF2-40B4-BE49-F238E27FC236}">
-                <a16:creationId xmlns:a16="http://schemas.microsoft.com/office/drawing/2014/main" id="{16EB92D8-39C7-1636-8E9E-421E554925B5}"/>
+                <a16:creationId xmlns:a16="http://schemas.microsoft.com/office/drawing/2014/main" id="{B0FA50E9-273A-656E-EAB1-480C40C71E2F}"/>
               </a:ext>
             </a:extLst>
           </p:cNvPr>
@@ -10280,21 +11723,32 @@
           <a:lstStyle/>
           <a:p>
             <a:r>
-              <a:rPr lang="ja-JP" altLang="en-US"/>
-              <a:t>機率抽樣的元素（四）</a:t>
+              <a:rPr lang="en-US" dirty="0" err="1"/>
+              <a:t>Neyman最適分配</a:t>
             </a:r>
-            <a:endParaRPr kumimoji="1" lang="zh-TW" altLang="en-US" dirty="0"/>
+            <a:r>
+              <a:rPr lang="en-US" dirty="0"/>
+              <a:t>(</a:t>
+            </a:r>
+            <a:r>
+              <a:rPr lang="en-US" dirty="0" err="1"/>
+              <a:t>Neyman</a:t>
+            </a:r>
+            <a:r>
+              <a:rPr lang="en-US" dirty="0"/>
+              <a:t> allocation)</a:t>
+            </a:r>
           </a:p>
         </p:txBody>
       </p:sp>
-      <mc:AlternateContent xmlns:mc="http://schemas.openxmlformats.org/markup-compatibility/2006" xmlns:a14="http://schemas.microsoft.com/office/drawing/2010/main">
-        <mc:Choice Requires="a14">
+      <mc:AlternateContent xmlns:mc="http://schemas.openxmlformats.org/markup-compatibility/2006">
+        <mc:Choice xmlns:a14="http://schemas.microsoft.com/office/drawing/2010/main" Requires="a14">
           <p:sp>
             <p:nvSpPr>
-              <p:cNvPr id="3" name="內容版面配置區 2">
+              <p:cNvPr id="3" name="Content Placeholder 2">
                 <a:extLst>
                   <a:ext uri="{FF2B5EF4-FFF2-40B4-BE49-F238E27FC236}">
-                    <a16:creationId xmlns:a16="http://schemas.microsoft.com/office/drawing/2014/main" id="{D77F4EED-7909-5AF8-5411-8811C2034F9D}"/>
+                    <a16:creationId xmlns:a16="http://schemas.microsoft.com/office/drawing/2014/main" id="{53BAB9BA-AE87-96E3-003F-24B402A7B57A}"/>
                   </a:ext>
                 </a:extLst>
               </p:cNvPr>
@@ -10308,7 +11762,7 @@
             <p:spPr/>
             <p:txBody>
               <a:bodyPr>
-                <a:normAutofit lnSpcReduction="10000"/>
+                <a:normAutofit/>
               </a:bodyPr>
               <a:lstStyle/>
               <a:p>
@@ -10318,101 +11772,22 @@
                   </a:lnSpc>
                 </a:pPr>
                 <a:r>
-                  <a:rPr kumimoji="1" lang="zh-TW" altLang="en-US" sz="2000" dirty="0"/>
-                  <a:t>如果已經知道收入高的人的中選機率是收入低的人的</a:t>
-                </a:r>
-                <a:r>
-                  <a:rPr kumimoji="1" lang="en-US" altLang="zh-TW" sz="2000" dirty="0"/>
-                  <a:t>4</a:t>
-                </a:r>
-                <a:r>
-                  <a:rPr kumimoji="1" lang="zh-TW" altLang="en-US" sz="2000" dirty="0"/>
-                  <a:t>倍，只抽出</a:t>
-                </a:r>
-                <a:r>
-                  <a:rPr kumimoji="1" lang="en-US" altLang="zh-TW" sz="2000" dirty="0"/>
-                  <a:t>1</a:t>
-                </a:r>
-                <a:r>
-                  <a:rPr kumimoji="1" lang="zh-TW" altLang="en-US" sz="2000" dirty="0"/>
-                  <a:t>人，也可以用</a:t>
-                </a:r>
-                <a:r>
-                  <a:rPr kumimoji="1" lang="en-US" altLang="zh-TW" sz="2000" dirty="0"/>
-                  <a:t>H-T</a:t>
-                </a:r>
-                <a:r>
-                  <a:rPr kumimoji="1" lang="zh-TW" altLang="en-US" sz="2000" dirty="0"/>
-                  <a:t>估計式。先計算每個人的中選機率：</a:t>
-                </a:r>
-                <a14:m>
-                  <m:oMath xmlns:m="http://schemas.openxmlformats.org/officeDocument/2006/math">
-                    <m:f>
-                      <m:fPr>
-                        <m:ctrlPr>
-                          <a:rPr kumimoji="1" lang="en-US" altLang="zh-TW" sz="2000" i="1" smtClean="0">
-                            <a:latin typeface="Cambria Math" panose="02040503050406030204" pitchFamily="18" charset="0"/>
-                          </a:rPr>
-                        </m:ctrlPr>
-                      </m:fPr>
-                      <m:num>
-                        <m:r>
-                          <a:rPr kumimoji="1" lang="en-US" altLang="zh-TW" sz="2000" b="0" i="1" smtClean="0">
-                            <a:latin typeface="Cambria Math" panose="02040503050406030204" pitchFamily="18" charset="0"/>
-                          </a:rPr>
-                          <m:t>1</m:t>
-                        </m:r>
-                      </m:num>
-                      <m:den>
-                        <m:r>
-                          <a:rPr kumimoji="1" lang="en-US" altLang="zh-TW" sz="2000" b="0" i="1" smtClean="0">
-                            <a:latin typeface="Cambria Math" panose="02040503050406030204" pitchFamily="18" charset="0"/>
-                          </a:rPr>
-                          <m:t>8</m:t>
-                        </m:r>
-                        <m:r>
-                          <a:rPr kumimoji="1" lang="en-US" altLang="zh-TW" sz="2000" b="0" i="1" smtClean="0">
-                            <a:latin typeface="Cambria Math" panose="02040503050406030204" pitchFamily="18" charset="0"/>
-                            <a:ea typeface="Cambria Math" panose="02040503050406030204" pitchFamily="18" charset="0"/>
-                          </a:rPr>
-                          <m:t>×4+2</m:t>
-                        </m:r>
-                      </m:den>
-                    </m:f>
-                    <m:r>
-                      <a:rPr kumimoji="1" lang="en-US" altLang="zh-TW" sz="2000" b="0" i="1" smtClean="0">
-                        <a:latin typeface="Cambria Math" panose="02040503050406030204" pitchFamily="18" charset="0"/>
-                      </a:rPr>
-                      <m:t>=</m:t>
-                    </m:r>
-                    <m:f>
-                      <m:fPr>
-                        <m:ctrlPr>
-                          <a:rPr kumimoji="1" lang="en-US" altLang="zh-TW" sz="2000" b="0" i="1" smtClean="0">
-                            <a:latin typeface="Cambria Math" panose="02040503050406030204" pitchFamily="18" charset="0"/>
-                          </a:rPr>
-                        </m:ctrlPr>
-                      </m:fPr>
-                      <m:num>
-                        <m:r>
-                          <a:rPr kumimoji="1" lang="en-US" altLang="zh-TW" sz="2000" b="0" i="1" smtClean="0">
-                            <a:latin typeface="Cambria Math" panose="02040503050406030204" pitchFamily="18" charset="0"/>
-                          </a:rPr>
-                          <m:t>1</m:t>
-                        </m:r>
-                      </m:num>
-                      <m:den>
-                        <m:r>
-                          <a:rPr kumimoji="1" lang="en-US" altLang="zh-TW" sz="2000" b="0" i="1" smtClean="0">
-                            <a:latin typeface="Cambria Math" panose="02040503050406030204" pitchFamily="18" charset="0"/>
-                          </a:rPr>
-                          <m:t>34</m:t>
-                        </m:r>
-                      </m:den>
-                    </m:f>
-                  </m:oMath>
-                </a14:m>
-                <a:endParaRPr kumimoji="1" lang="en-US" altLang="zh-TW" sz="2000" dirty="0"/>
+                  <a:rPr lang="ja-JP" altLang="en-US" sz="2000"/>
+                  <a:t>等比例抽樣考慮的是「各層的大小」；而 </a:t>
+                </a:r>
+                <a:r>
+                  <a:rPr lang="en-US" sz="2000" dirty="0" err="1"/>
+                  <a:t>Neyman</a:t>
+                </a:r>
+                <a:r>
+                  <a:rPr lang="en-US" sz="2000" dirty="0"/>
+                  <a:t> </a:t>
+                </a:r>
+                <a:r>
+                  <a:rPr lang="ja-JP" altLang="en-US" sz="2000"/>
+                  <a:t>最適分配同時考慮了「各層的大小」與「各層內部的變異程度（標準差）」。</a:t>
+                </a:r>
+                <a:endParaRPr lang="en-US" altLang="ja-JP" sz="2000" dirty="0"/>
               </a:p>
               <a:p>
                 <a:pPr>
@@ -10421,20 +11796,319 @@
                   </a:lnSpc>
                 </a:pPr>
                 <a:r>
-                  <a:rPr kumimoji="1" lang="zh-TW" altLang="en-US" sz="2000" dirty="0"/>
-                  <a:t>期望值：</a:t>
-                </a:r>
-                <a:r>
-                  <a:rPr lang="zh-TW" altLang="en-US" sz="2000" dirty="0"/>
+                  <a:rPr lang="ja-JP" altLang="en-US" sz="2000"/>
+                  <a:t>根據</a:t>
+                </a:r>
+                <a:r>
+                  <a:rPr lang="en-US" altLang="ja-JP" sz="2000" dirty="0" err="1"/>
+                  <a:t>Neyman</a:t>
+                </a:r>
+                <a:r>
+                  <a:rPr lang="en-US" altLang="ja-JP" sz="2000" dirty="0"/>
                   <a:t> </a:t>
+                </a:r>
+                <a:r>
+                  <a:rPr lang="ja-JP" altLang="en-US" sz="2000"/>
+                  <a:t>最適分配公式，每一層應分配的樣本數是：</a:t>
                 </a:r>
                 <a14:m>
                   <m:oMath xmlns:m="http://schemas.openxmlformats.org/officeDocument/2006/math">
+                    <m:sSub>
+                      <m:sSubPr>
+                        <m:ctrlPr>
+                          <a:rPr lang="en-US" altLang="ja-JP" sz="2000" i="1" smtClean="0">
+                            <a:latin typeface="Cambria Math" panose="02040503050406030204" pitchFamily="18" charset="0"/>
+                          </a:rPr>
+                        </m:ctrlPr>
+                      </m:sSubPr>
+                      <m:e>
+                        <m:r>
+                          <a:rPr lang="en-US" altLang="ja-JP" sz="2000" b="0" i="1" smtClean="0">
+                            <a:latin typeface="Cambria Math" panose="02040503050406030204" pitchFamily="18" charset="0"/>
+                          </a:rPr>
+                          <m:t>𝑛</m:t>
+                        </m:r>
+                      </m:e>
+                      <m:sub>
+                        <m:r>
+                          <a:rPr lang="en-US" altLang="ja-JP" sz="2000" b="0" i="1" smtClean="0">
+                            <a:latin typeface="Cambria Math" panose="02040503050406030204" pitchFamily="18" charset="0"/>
+                          </a:rPr>
+                          <m:t>h</m:t>
+                        </m:r>
+                      </m:sub>
+                    </m:sSub>
+                    <m:r>
+                      <a:rPr lang="en-US" altLang="ja-JP" sz="2000" b="0" i="1" smtClean="0">
+                        <a:latin typeface="Cambria Math" panose="02040503050406030204" pitchFamily="18" charset="0"/>
+                      </a:rPr>
+                      <m:t>=</m:t>
+                    </m:r>
+                    <m:r>
+                      <a:rPr lang="en-US" altLang="ja-JP" sz="2000" b="0" i="1" smtClean="0">
+                        <a:latin typeface="Cambria Math" panose="02040503050406030204" pitchFamily="18" charset="0"/>
+                      </a:rPr>
+                      <m:t>𝑛</m:t>
+                    </m:r>
+                    <m:r>
+                      <a:rPr lang="en-US" altLang="ja-JP" sz="2000" b="0" i="1" smtClean="0">
+                        <a:latin typeface="Cambria Math" panose="02040503050406030204" pitchFamily="18" charset="0"/>
+                        <a:ea typeface="Cambria Math" panose="02040503050406030204" pitchFamily="18" charset="0"/>
+                      </a:rPr>
+                      <m:t>×</m:t>
+                    </m:r>
+                    <m:f>
+                      <m:fPr>
+                        <m:ctrlPr>
+                          <a:rPr lang="en-US" altLang="ja-JP" sz="2000" b="0" i="1" smtClean="0">
+                            <a:latin typeface="Cambria Math" panose="02040503050406030204" pitchFamily="18" charset="0"/>
+                            <a:ea typeface="Cambria Math" panose="02040503050406030204" pitchFamily="18" charset="0"/>
+                          </a:rPr>
+                        </m:ctrlPr>
+                      </m:fPr>
+                      <m:num>
+                        <m:sSub>
+                          <m:sSubPr>
+                            <m:ctrlPr>
+                              <a:rPr lang="en-US" altLang="ja-JP" sz="2000" b="0" i="1" smtClean="0">
+                                <a:latin typeface="Cambria Math" panose="02040503050406030204" pitchFamily="18" charset="0"/>
+                                <a:ea typeface="Cambria Math" panose="02040503050406030204" pitchFamily="18" charset="0"/>
+                              </a:rPr>
+                            </m:ctrlPr>
+                          </m:sSubPr>
+                          <m:e>
+                            <m:r>
+                              <a:rPr lang="en-US" altLang="ja-JP" sz="2000" b="0" i="1" smtClean="0">
+                                <a:latin typeface="Cambria Math" panose="02040503050406030204" pitchFamily="18" charset="0"/>
+                                <a:ea typeface="Cambria Math" panose="02040503050406030204" pitchFamily="18" charset="0"/>
+                              </a:rPr>
+                              <m:t>𝑁</m:t>
+                            </m:r>
+                          </m:e>
+                          <m:sub>
+                            <m:r>
+                              <a:rPr lang="en-US" altLang="ja-JP" sz="2000" b="0" i="1" smtClean="0">
+                                <a:latin typeface="Cambria Math" panose="02040503050406030204" pitchFamily="18" charset="0"/>
+                                <a:ea typeface="Cambria Math" panose="02040503050406030204" pitchFamily="18" charset="0"/>
+                              </a:rPr>
+                              <m:t>h</m:t>
+                            </m:r>
+                          </m:sub>
+                        </m:sSub>
+                        <m:r>
+                          <a:rPr lang="en-US" altLang="ja-JP" sz="2000" b="0" i="1" smtClean="0">
+                            <a:latin typeface="Cambria Math" panose="02040503050406030204" pitchFamily="18" charset="0"/>
+                            <a:ea typeface="Cambria Math" panose="02040503050406030204" pitchFamily="18" charset="0"/>
+                          </a:rPr>
+                          <m:t>×</m:t>
+                        </m:r>
+                        <m:sSub>
+                          <m:sSubPr>
+                            <m:ctrlPr>
+                              <a:rPr lang="en-US" altLang="ja-JP" sz="2000" b="0" i="1" smtClean="0">
+                                <a:latin typeface="Cambria Math" panose="02040503050406030204" pitchFamily="18" charset="0"/>
+                                <a:ea typeface="Cambria Math" panose="02040503050406030204" pitchFamily="18" charset="0"/>
+                              </a:rPr>
+                            </m:ctrlPr>
+                          </m:sSubPr>
+                          <m:e>
+                            <m:r>
+                              <a:rPr lang="en-US" altLang="ja-JP" sz="2000" b="0" i="1" smtClean="0">
+                                <a:latin typeface="Cambria Math" panose="02040503050406030204" pitchFamily="18" charset="0"/>
+                                <a:ea typeface="Cambria Math" panose="02040503050406030204" pitchFamily="18" charset="0"/>
+                              </a:rPr>
+                              <m:t>𝑆</m:t>
+                            </m:r>
+                          </m:e>
+                          <m:sub>
+                            <m:r>
+                              <a:rPr lang="en-US" altLang="ja-JP" sz="2000" b="0" i="1" smtClean="0">
+                                <a:latin typeface="Cambria Math" panose="02040503050406030204" pitchFamily="18" charset="0"/>
+                                <a:ea typeface="Cambria Math" panose="02040503050406030204" pitchFamily="18" charset="0"/>
+                              </a:rPr>
+                              <m:t>h</m:t>
+                            </m:r>
+                          </m:sub>
+                        </m:sSub>
+                      </m:num>
+                      <m:den>
+                        <m:nary>
+                          <m:naryPr>
+                            <m:chr m:val="∑"/>
+                            <m:ctrlPr>
+                              <a:rPr lang="en-US" altLang="ja-JP" sz="2000" b="0" i="1" smtClean="0">
+                                <a:latin typeface="Cambria Math" panose="02040503050406030204" pitchFamily="18" charset="0"/>
+                                <a:ea typeface="Cambria Math" panose="02040503050406030204" pitchFamily="18" charset="0"/>
+                              </a:rPr>
+                            </m:ctrlPr>
+                          </m:naryPr>
+                          <m:sub>
+                            <m:r>
+                              <m:rPr>
+                                <m:brk m:alnAt="23"/>
+                              </m:rPr>
+                              <a:rPr lang="en-US" altLang="ja-JP" sz="2000" b="0" i="1" smtClean="0">
+                                <a:latin typeface="Cambria Math" panose="02040503050406030204" pitchFamily="18" charset="0"/>
+                                <a:ea typeface="Cambria Math" panose="02040503050406030204" pitchFamily="18" charset="0"/>
+                              </a:rPr>
+                              <m:t>𝑖</m:t>
+                            </m:r>
+                            <m:r>
+                              <a:rPr lang="en-US" altLang="ja-JP" sz="2000" b="0" i="1" smtClean="0">
+                                <a:latin typeface="Cambria Math" panose="02040503050406030204" pitchFamily="18" charset="0"/>
+                                <a:ea typeface="Cambria Math" panose="02040503050406030204" pitchFamily="18" charset="0"/>
+                              </a:rPr>
+                              <m:t>=1</m:t>
+                            </m:r>
+                          </m:sub>
+                          <m:sup>
+                            <m:r>
+                              <a:rPr lang="en-US" altLang="ja-JP" sz="2000" b="0" i="1" smtClean="0">
+                                <a:latin typeface="Cambria Math" panose="02040503050406030204" pitchFamily="18" charset="0"/>
+                                <a:ea typeface="Cambria Math" panose="02040503050406030204" pitchFamily="18" charset="0"/>
+                              </a:rPr>
+                              <m:t>𝐻</m:t>
+                            </m:r>
+                          </m:sup>
+                          <m:e>
+                            <m:sSub>
+                              <m:sSubPr>
+                                <m:ctrlPr>
+                                  <a:rPr lang="en-US" altLang="ja-JP" sz="2000" b="0" i="1" smtClean="0">
+                                    <a:latin typeface="Cambria Math" panose="02040503050406030204" pitchFamily="18" charset="0"/>
+                                    <a:ea typeface="Cambria Math" panose="02040503050406030204" pitchFamily="18" charset="0"/>
+                                  </a:rPr>
+                                </m:ctrlPr>
+                              </m:sSubPr>
+                              <m:e>
+                                <m:r>
+                                  <a:rPr lang="en-US" altLang="ja-JP" sz="2000" b="0" i="1" smtClean="0">
+                                    <a:latin typeface="Cambria Math" panose="02040503050406030204" pitchFamily="18" charset="0"/>
+                                    <a:ea typeface="Cambria Math" panose="02040503050406030204" pitchFamily="18" charset="0"/>
+                                  </a:rPr>
+                                  <m:t>𝑁</m:t>
+                                </m:r>
+                              </m:e>
+                              <m:sub>
+                                <m:r>
+                                  <a:rPr lang="en-US" altLang="ja-JP" sz="2000" b="0" i="1" smtClean="0">
+                                    <a:latin typeface="Cambria Math" panose="02040503050406030204" pitchFamily="18" charset="0"/>
+                                    <a:ea typeface="Cambria Math" panose="02040503050406030204" pitchFamily="18" charset="0"/>
+                                  </a:rPr>
+                                  <m:t>𝑖</m:t>
+                                </m:r>
+                              </m:sub>
+                            </m:sSub>
+                            <m:sSub>
+                              <m:sSubPr>
+                                <m:ctrlPr>
+                                  <a:rPr lang="en-US" altLang="ja-JP" sz="2000" b="0" i="1" smtClean="0">
+                                    <a:latin typeface="Cambria Math" panose="02040503050406030204" pitchFamily="18" charset="0"/>
+                                    <a:ea typeface="Cambria Math" panose="02040503050406030204" pitchFamily="18" charset="0"/>
+                                  </a:rPr>
+                                </m:ctrlPr>
+                              </m:sSubPr>
+                              <m:e>
+                                <m:r>
+                                  <a:rPr lang="en-US" altLang="ja-JP" sz="2000" b="0" i="1" smtClean="0">
+                                    <a:latin typeface="Cambria Math" panose="02040503050406030204" pitchFamily="18" charset="0"/>
+                                    <a:ea typeface="Cambria Math" panose="02040503050406030204" pitchFamily="18" charset="0"/>
+                                  </a:rPr>
+                                  <m:t>𝑆</m:t>
+                                </m:r>
+                              </m:e>
+                              <m:sub>
+                                <m:r>
+                                  <a:rPr lang="en-US" altLang="ja-JP" sz="2000" b="0" i="1" smtClean="0">
+                                    <a:latin typeface="Cambria Math" panose="02040503050406030204" pitchFamily="18" charset="0"/>
+                                    <a:ea typeface="Cambria Math" panose="02040503050406030204" pitchFamily="18" charset="0"/>
+                                  </a:rPr>
+                                  <m:t>𝑖</m:t>
+                                </m:r>
+                              </m:sub>
+                            </m:sSub>
+                          </m:e>
+                        </m:nary>
+                      </m:den>
+                    </m:f>
+                  </m:oMath>
+                </a14:m>
+                <a:r>
+                  <a:rPr lang="en-US" sz="2000" dirty="0"/>
+                  <a:t>  </a:t>
+                </a:r>
+                <a14:m>
+                  <m:oMath xmlns:m="http://schemas.openxmlformats.org/officeDocument/2006/math">
+                    <m:sSub>
+                      <m:sSubPr>
+                        <m:ctrlPr>
+                          <a:rPr lang="en-US" sz="2000" i="1" dirty="0" smtClean="0">
+                            <a:latin typeface="Cambria Math" panose="02040503050406030204" pitchFamily="18" charset="0"/>
+                          </a:rPr>
+                        </m:ctrlPr>
+                      </m:sSubPr>
+                      <m:e>
+                        <m:r>
+                          <a:rPr lang="en-US" sz="2000" b="0" i="1" dirty="0" smtClean="0">
+                            <a:latin typeface="Cambria Math" panose="02040503050406030204" pitchFamily="18" charset="0"/>
+                          </a:rPr>
+                          <m:t>𝑆</m:t>
+                        </m:r>
+                      </m:e>
+                      <m:sub>
+                        <m:r>
+                          <a:rPr lang="en-US" sz="2000" b="0" i="1" dirty="0" smtClean="0">
+                            <a:latin typeface="Cambria Math" panose="02040503050406030204" pitchFamily="18" charset="0"/>
+                          </a:rPr>
+                          <m:t>h</m:t>
+                        </m:r>
+                      </m:sub>
+                    </m:sSub>
+                  </m:oMath>
+                </a14:m>
+                <a:r>
+                  <a:rPr lang="en-US" sz="2000" dirty="0" err="1"/>
+                  <a:t>代表第h層母體的標準差。母體平均數估計式</a:t>
+                </a:r>
+                <a:r>
+                  <a:rPr lang="en-US" sz="2000" dirty="0"/>
+                  <a:t>：</a:t>
+                </a:r>
+                <a:r>
+                  <a:rPr lang="en-US" altLang="ja-JP" sz="2000" dirty="0"/>
+                  <a:t> </a:t>
+                </a:r>
+                <a14:m>
+                  <m:oMath xmlns:m="http://schemas.openxmlformats.org/officeDocument/2006/math">
+                    <m:acc>
+                      <m:accPr>
+                        <m:chr m:val="̅"/>
+                        <m:ctrlPr>
+                          <a:rPr lang="en-US" altLang="ja-JP" sz="2000" i="1">
+                            <a:latin typeface="Cambria Math" panose="02040503050406030204" pitchFamily="18" charset="0"/>
+                          </a:rPr>
+                        </m:ctrlPr>
+                      </m:accPr>
+                      <m:e>
+                        <m:r>
+                          <a:rPr lang="en-US" altLang="ja-JP" sz="2000" i="1">
+                            <a:latin typeface="Cambria Math" panose="02040503050406030204" pitchFamily="18" charset="0"/>
+                          </a:rPr>
+                          <m:t>𝑦</m:t>
+                        </m:r>
+                      </m:e>
+                    </m:acc>
+                    <m:r>
+                      <a:rPr lang="en-US" altLang="ja-JP" sz="2000" i="1">
+                        <a:latin typeface="Cambria Math" panose="02040503050406030204" pitchFamily="18" charset="0"/>
+                      </a:rPr>
+                      <m:t>=</m:t>
+                    </m:r>
                     <m:nary>
                       <m:naryPr>
                         <m:chr m:val="∑"/>
                         <m:ctrlPr>
-                          <a:rPr lang="zh-TW" altLang="en-US" sz="2000" i="1" smtClean="0">
+                          <a:rPr lang="en-US" altLang="ja-JP" sz="2000" i="1">
                             <a:latin typeface="Cambria Math" panose="02040503050406030204" pitchFamily="18" charset="0"/>
                           </a:rPr>
                         </m:ctrlPr>
@@ -10444,13 +12118,13 @@
                           <m:rPr>
                             <m:brk m:alnAt="23"/>
                           </m:rPr>
-                          <a:rPr lang="en-US" altLang="zh-TW" sz="2000" b="0" i="1" smtClean="0">
-                            <a:latin typeface="Cambria Math" panose="02040503050406030204" pitchFamily="18" charset="0"/>
-                          </a:rPr>
-                          <m:t>𝑖</m:t>
+                          <a:rPr lang="en-US" altLang="ja-JP" sz="2000" i="1">
+                            <a:latin typeface="Cambria Math" panose="02040503050406030204" pitchFamily="18" charset="0"/>
+                          </a:rPr>
+                          <m:t>h</m:t>
                         </m:r>
                         <m:r>
-                          <a:rPr lang="en-US" altLang="zh-TW" sz="2000" b="0" i="1" smtClean="0">
+                          <a:rPr lang="en-US" altLang="ja-JP" sz="2000" i="1">
                             <a:latin typeface="Cambria Math" panose="02040503050406030204" pitchFamily="18" charset="0"/>
                           </a:rPr>
                           <m:t>=1</m:t>
@@ -10458,43 +12132,17 @@
                       </m:sub>
                       <m:sup>
                         <m:r>
-                          <a:rPr lang="en-US" altLang="zh-TW" sz="2000" b="0" i="1" smtClean="0">
-                            <a:latin typeface="Cambria Math" panose="02040503050406030204" pitchFamily="18" charset="0"/>
-                          </a:rPr>
-                          <m:t>𝑁</m:t>
+                          <a:rPr lang="en-US" altLang="ja-JP" sz="2000" i="1">
+                            <a:latin typeface="Cambria Math" panose="02040503050406030204" pitchFamily="18" charset="0"/>
+                          </a:rPr>
+                          <m:t>𝐻</m:t>
                         </m:r>
                       </m:sup>
                       <m:e>
-                        <m:sSub>
-                          <m:sSubPr>
-                            <m:ctrlPr>
-                              <a:rPr lang="en-US" altLang="zh-TW" sz="2000" i="1" smtClean="0">
-                                <a:latin typeface="Cambria Math" panose="02040503050406030204" pitchFamily="18" charset="0"/>
-                              </a:rPr>
-                            </m:ctrlPr>
-                          </m:sSubPr>
-                          <m:e>
-                            <m:r>
-                              <a:rPr lang="en-US" altLang="zh-TW" sz="2000" i="1" smtClean="0">
-                                <a:latin typeface="Cambria Math" panose="02040503050406030204" pitchFamily="18" charset="0"/>
-                                <a:ea typeface="Cambria Math" panose="02040503050406030204" pitchFamily="18" charset="0"/>
-                              </a:rPr>
-                              <m:t>𝜋</m:t>
-                            </m:r>
-                          </m:e>
-                          <m:sub>
-                            <m:r>
-                              <a:rPr lang="en-US" altLang="zh-TW" sz="2000" b="0" i="1" smtClean="0">
-                                <a:latin typeface="Cambria Math" panose="02040503050406030204" pitchFamily="18" charset="0"/>
-                              </a:rPr>
-                              <m:t>𝑖</m:t>
-                            </m:r>
-                          </m:sub>
-                        </m:sSub>
                         <m:f>
                           <m:fPr>
                             <m:ctrlPr>
-                              <a:rPr lang="en-US" altLang="zh-TW" sz="2000" i="1" smtClean="0">
+                              <a:rPr lang="en-US" altLang="ja-JP" sz="2000" i="1">
                                 <a:latin typeface="Cambria Math" panose="02040503050406030204" pitchFamily="18" charset="0"/>
                               </a:rPr>
                             </m:ctrlPr>
@@ -10503,370 +12151,91 @@
                             <m:sSub>
                               <m:sSubPr>
                                 <m:ctrlPr>
-                                  <a:rPr lang="en-US" altLang="zh-TW" sz="2000" i="1" smtClean="0">
+                                  <a:rPr lang="en-US" altLang="ja-JP" sz="2000" i="1">
                                     <a:latin typeface="Cambria Math" panose="02040503050406030204" pitchFamily="18" charset="0"/>
                                   </a:rPr>
                                 </m:ctrlPr>
                               </m:sSubPr>
                               <m:e>
                                 <m:r>
-                                  <a:rPr lang="en-US" altLang="zh-TW" sz="2000" b="0" i="1" smtClean="0">
+                                  <a:rPr lang="en-US" altLang="ja-JP" sz="2000" i="1">
                                     <a:latin typeface="Cambria Math" panose="02040503050406030204" pitchFamily="18" charset="0"/>
                                   </a:rPr>
-                                  <m:t>𝑦</m:t>
+                                  <m:t>𝑁</m:t>
                                 </m:r>
                               </m:e>
                               <m:sub>
                                 <m:r>
-                                  <a:rPr lang="en-US" altLang="zh-TW" sz="2000" b="0" i="1" smtClean="0">
+                                  <a:rPr lang="en-US" altLang="ja-JP" sz="2000" i="1">
                                     <a:latin typeface="Cambria Math" panose="02040503050406030204" pitchFamily="18" charset="0"/>
                                   </a:rPr>
-                                  <m:t>𝑖</m:t>
+                                  <m:t>h</m:t>
                                 </m:r>
                               </m:sub>
                             </m:sSub>
                           </m:num>
                           <m:den>
-                            <m:sSub>
-                              <m:sSubPr>
-                                <m:ctrlPr>
-                                  <a:rPr lang="en-US" altLang="zh-TW" sz="2000" i="1" smtClean="0">
-                                    <a:latin typeface="Cambria Math" panose="02040503050406030204" pitchFamily="18" charset="0"/>
-                                  </a:rPr>
-                                </m:ctrlPr>
-                              </m:sSubPr>
-                              <m:e>
-                                <m:r>
-                                  <a:rPr lang="en-US" altLang="zh-TW" sz="2000" i="1" smtClean="0">
-                                    <a:latin typeface="Cambria Math" panose="02040503050406030204" pitchFamily="18" charset="0"/>
-                                    <a:ea typeface="Cambria Math" panose="02040503050406030204" pitchFamily="18" charset="0"/>
-                                  </a:rPr>
-                                  <m:t>𝜋</m:t>
-                                </m:r>
-                              </m:e>
-                              <m:sub>
-                                <m:r>
-                                  <a:rPr lang="en-US" altLang="zh-TW" sz="2000" b="0" i="1" smtClean="0">
-                                    <a:latin typeface="Cambria Math" panose="02040503050406030204" pitchFamily="18" charset="0"/>
-                                  </a:rPr>
-                                  <m:t>𝑖</m:t>
-                                </m:r>
-                              </m:sub>
-                            </m:sSub>
-                          </m:den>
-                        </m:f>
-                        <m:r>
-                          <a:rPr lang="en-US" altLang="zh-TW" sz="2000" b="0" i="1" smtClean="0">
-                            <a:latin typeface="Cambria Math" panose="02040503050406030204" pitchFamily="18" charset="0"/>
-                          </a:rPr>
-                          <m:t>=</m:t>
-                        </m:r>
-                      </m:e>
-                    </m:nary>
-                    <m:r>
-                      <a:rPr lang="en-US" altLang="zh-TW" sz="2000" b="0" i="1" smtClean="0">
-                        <a:latin typeface="Cambria Math" panose="02040503050406030204" pitchFamily="18" charset="0"/>
-                      </a:rPr>
-                      <m:t>8</m:t>
-                    </m:r>
-                    <m:r>
-                      <a:rPr lang="en-US" altLang="zh-TW" sz="2000" b="0" i="1" smtClean="0">
-                        <a:latin typeface="Cambria Math" panose="02040503050406030204" pitchFamily="18" charset="0"/>
-                        <a:ea typeface="Cambria Math" panose="02040503050406030204" pitchFamily="18" charset="0"/>
-                      </a:rPr>
-                      <m:t>×</m:t>
-                    </m:r>
-                    <m:d>
-                      <m:dPr>
-                        <m:ctrlPr>
-                          <a:rPr lang="en-US" altLang="zh-TW" sz="2000" b="0" i="1" smtClean="0">
-                            <a:latin typeface="Cambria Math" panose="02040503050406030204" pitchFamily="18" charset="0"/>
-                          </a:rPr>
-                        </m:ctrlPr>
-                      </m:dPr>
-                      <m:e>
-                        <m:r>
-                          <a:rPr lang="en-US" altLang="zh-TW" sz="2000" b="0" i="1" smtClean="0">
-                            <a:latin typeface="Cambria Math" panose="02040503050406030204" pitchFamily="18" charset="0"/>
-                          </a:rPr>
-                          <m:t>4</m:t>
-                        </m:r>
-                        <m:r>
-                          <a:rPr lang="en-US" altLang="zh-TW" sz="2000" b="0" i="1" smtClean="0">
-                            <a:latin typeface="Cambria Math" panose="02040503050406030204" pitchFamily="18" charset="0"/>
-                            <a:ea typeface="Cambria Math" panose="02040503050406030204" pitchFamily="18" charset="0"/>
-                          </a:rPr>
-                          <m:t>×</m:t>
-                        </m:r>
-                        <m:f>
-                          <m:fPr>
-                            <m:ctrlPr>
-                              <a:rPr lang="en-US" altLang="zh-TW" sz="2000" b="0" i="1" smtClean="0">
+                            <m:r>
+                              <a:rPr lang="en-US" altLang="ja-JP" sz="2000" i="1">
                                 <a:latin typeface="Cambria Math" panose="02040503050406030204" pitchFamily="18" charset="0"/>
-                                <a:ea typeface="Cambria Math" panose="02040503050406030204" pitchFamily="18" charset="0"/>
                               </a:rPr>
-                            </m:ctrlPr>
-                          </m:fPr>
-                          <m:num>
-                            <m:r>
-                              <a:rPr lang="en-US" altLang="zh-TW" sz="2000" b="0" i="1" smtClean="0">
-                                <a:latin typeface="Cambria Math" panose="02040503050406030204" pitchFamily="18" charset="0"/>
-                                <a:ea typeface="Cambria Math" panose="02040503050406030204" pitchFamily="18" charset="0"/>
-                              </a:rPr>
-                              <m:t>1</m:t>
-                            </m:r>
-                          </m:num>
-                          <m:den>
-                            <m:r>
-                              <a:rPr lang="en-US" altLang="zh-TW" sz="2000" b="0" i="1" smtClean="0">
-                                <a:latin typeface="Cambria Math" panose="02040503050406030204" pitchFamily="18" charset="0"/>
-                                <a:ea typeface="Cambria Math" panose="02040503050406030204" pitchFamily="18" charset="0"/>
-                              </a:rPr>
-                              <m:t>34</m:t>
+                              <m:t>𝑁</m:t>
                             </m:r>
                           </m:den>
                         </m:f>
-                        <m:r>
-                          <a:rPr lang="en-US" altLang="zh-TW" sz="2000" b="0" i="1" smtClean="0">
-                            <a:latin typeface="Cambria Math" panose="02040503050406030204" pitchFamily="18" charset="0"/>
-                            <a:ea typeface="Cambria Math" panose="02040503050406030204" pitchFamily="18" charset="0"/>
-                          </a:rPr>
-                          <m:t>×</m:t>
-                        </m:r>
-                        <m:f>
-                          <m:fPr>
+                      </m:e>
+                    </m:nary>
+                    <m:sSub>
+                      <m:sSubPr>
+                        <m:ctrlPr>
+                          <a:rPr lang="en-US" altLang="ja-JP" sz="2000" i="1">
+                            <a:latin typeface="Cambria Math" panose="02040503050406030204" pitchFamily="18" charset="0"/>
+                          </a:rPr>
+                        </m:ctrlPr>
+                      </m:sSubPr>
+                      <m:e>
+                        <m:acc>
+                          <m:accPr>
+                            <m:chr m:val="̅"/>
                             <m:ctrlPr>
-                              <a:rPr lang="en-US" altLang="zh-TW" sz="2000" b="0" i="1" smtClean="0">
-                                <a:latin typeface="Cambria Math" panose="02040503050406030204" pitchFamily="18" charset="0"/>
-                                <a:ea typeface="Cambria Math" panose="02040503050406030204" pitchFamily="18" charset="0"/>
-                              </a:rPr>
-                            </m:ctrlPr>
-                          </m:fPr>
-                          <m:num>
-                            <m:r>
-                              <a:rPr lang="en-US" altLang="zh-TW" sz="2000" b="0" i="1" smtClean="0">
-                                <a:latin typeface="Cambria Math" panose="02040503050406030204" pitchFamily="18" charset="0"/>
-                                <a:ea typeface="Cambria Math" panose="02040503050406030204" pitchFamily="18" charset="0"/>
-                              </a:rPr>
-                              <m:t>100</m:t>
-                            </m:r>
-                          </m:num>
-                          <m:den>
-                            <m:r>
-                              <a:rPr lang="en-US" altLang="zh-TW" sz="2000" b="0" i="1" smtClean="0">
-                                <a:latin typeface="Cambria Math" panose="02040503050406030204" pitchFamily="18" charset="0"/>
-                                <a:ea typeface="Cambria Math" panose="02040503050406030204" pitchFamily="18" charset="0"/>
-                              </a:rPr>
-                              <m:t>4×</m:t>
-                            </m:r>
-                            <m:f>
-                              <m:fPr>
-                                <m:ctrlPr>
-                                  <a:rPr lang="en-US" altLang="zh-TW" sz="2000" b="0" i="1" smtClean="0">
-                                    <a:latin typeface="Cambria Math" panose="02040503050406030204" pitchFamily="18" charset="0"/>
-                                    <a:ea typeface="Cambria Math" panose="02040503050406030204" pitchFamily="18" charset="0"/>
-                                  </a:rPr>
-                                </m:ctrlPr>
-                              </m:fPr>
-                              <m:num>
-                                <m:r>
-                                  <a:rPr lang="en-US" altLang="zh-TW" sz="2000" b="0" i="1" smtClean="0">
-                                    <a:latin typeface="Cambria Math" panose="02040503050406030204" pitchFamily="18" charset="0"/>
-                                    <a:ea typeface="Cambria Math" panose="02040503050406030204" pitchFamily="18" charset="0"/>
-                                  </a:rPr>
-                                  <m:t>1</m:t>
-                                </m:r>
-                              </m:num>
-                              <m:den>
-                                <m:r>
-                                  <a:rPr lang="en-US" altLang="zh-TW" sz="2000" b="0" i="1" smtClean="0">
-                                    <a:latin typeface="Cambria Math" panose="02040503050406030204" pitchFamily="18" charset="0"/>
-                                    <a:ea typeface="Cambria Math" panose="02040503050406030204" pitchFamily="18" charset="0"/>
-                                  </a:rPr>
-                                  <m:t>34</m:t>
-                                </m:r>
-                              </m:den>
-                            </m:f>
-                          </m:den>
-                        </m:f>
-                      </m:e>
-                    </m:d>
-                    <m:r>
-                      <a:rPr lang="en-US" altLang="zh-TW" sz="2000" b="0" i="1" smtClean="0">
-                        <a:latin typeface="Cambria Math" panose="02040503050406030204" pitchFamily="18" charset="0"/>
-                        <a:ea typeface="Cambria Math" panose="02040503050406030204" pitchFamily="18" charset="0"/>
-                      </a:rPr>
-                      <m:t>+2×</m:t>
-                    </m:r>
-                    <m:d>
-                      <m:dPr>
-                        <m:ctrlPr>
-                          <a:rPr lang="en-US" altLang="zh-TW" sz="2000" b="0" i="1" smtClean="0">
-                            <a:latin typeface="Cambria Math" panose="02040503050406030204" pitchFamily="18" charset="0"/>
-                            <a:ea typeface="Cambria Math" panose="02040503050406030204" pitchFamily="18" charset="0"/>
-                          </a:rPr>
-                        </m:ctrlPr>
-                      </m:dPr>
-                      <m:e>
-                        <m:f>
-                          <m:fPr>
-                            <m:ctrlPr>
-                              <a:rPr lang="en-US" altLang="zh-TW" sz="2000" b="0" i="1" smtClean="0">
-                                <a:latin typeface="Cambria Math" panose="02040503050406030204" pitchFamily="18" charset="0"/>
-                                <a:ea typeface="Cambria Math" panose="02040503050406030204" pitchFamily="18" charset="0"/>
-                              </a:rPr>
-                            </m:ctrlPr>
-                          </m:fPr>
-                          <m:num>
-                            <m:r>
-                              <a:rPr lang="en-US" altLang="zh-TW" sz="2000" b="0" i="1" smtClean="0">
-                                <a:latin typeface="Cambria Math" panose="02040503050406030204" pitchFamily="18" charset="0"/>
-                                <a:ea typeface="Cambria Math" panose="02040503050406030204" pitchFamily="18" charset="0"/>
-                              </a:rPr>
-                              <m:t>1</m:t>
-                            </m:r>
-                          </m:num>
-                          <m:den>
-                            <m:r>
-                              <a:rPr lang="en-US" altLang="zh-TW" sz="2000" b="0" i="1" smtClean="0">
-                                <a:latin typeface="Cambria Math" panose="02040503050406030204" pitchFamily="18" charset="0"/>
-                                <a:ea typeface="Cambria Math" panose="02040503050406030204" pitchFamily="18" charset="0"/>
-                              </a:rPr>
-                              <m:t>34</m:t>
-                            </m:r>
-                          </m:den>
-                        </m:f>
-                        <m:r>
-                          <a:rPr lang="en-US" altLang="zh-TW" sz="2000" i="1">
-                            <a:latin typeface="Cambria Math" panose="02040503050406030204" pitchFamily="18" charset="0"/>
-                            <a:ea typeface="Cambria Math" panose="02040503050406030204" pitchFamily="18" charset="0"/>
-                          </a:rPr>
-                          <m:t>×</m:t>
-                        </m:r>
-                        <m:f>
-                          <m:fPr>
-                            <m:ctrlPr>
-                              <a:rPr lang="en-US" altLang="zh-TW" sz="2000" i="1" smtClean="0">
-                                <a:latin typeface="Cambria Math" panose="02040503050406030204" pitchFamily="18" charset="0"/>
-                                <a:ea typeface="Cambria Math" panose="02040503050406030204" pitchFamily="18" charset="0"/>
-                              </a:rPr>
-                            </m:ctrlPr>
-                          </m:fPr>
-                          <m:num>
-                            <m:r>
-                              <a:rPr lang="en-US" altLang="zh-TW" sz="2000" b="0" i="1" smtClean="0">
-                                <a:latin typeface="Cambria Math" panose="02040503050406030204" pitchFamily="18" charset="0"/>
-                                <a:ea typeface="Cambria Math" panose="02040503050406030204" pitchFamily="18" charset="0"/>
-                              </a:rPr>
-                              <m:t>20</m:t>
-                            </m:r>
-                          </m:num>
-                          <m:den>
-                            <m:f>
-                              <m:fPr>
-                                <m:ctrlPr>
-                                  <a:rPr lang="en-US" altLang="zh-TW" sz="2000" i="1" smtClean="0">
-                                    <a:latin typeface="Cambria Math" panose="02040503050406030204" pitchFamily="18" charset="0"/>
-                                    <a:ea typeface="Cambria Math" panose="02040503050406030204" pitchFamily="18" charset="0"/>
-                                  </a:rPr>
-                                </m:ctrlPr>
-                              </m:fPr>
-                              <m:num>
-                                <m:r>
-                                  <a:rPr lang="en-US" altLang="zh-TW" sz="2000" b="0" i="1" smtClean="0">
-                                    <a:latin typeface="Cambria Math" panose="02040503050406030204" pitchFamily="18" charset="0"/>
-                                    <a:ea typeface="Cambria Math" panose="02040503050406030204" pitchFamily="18" charset="0"/>
-                                  </a:rPr>
-                                  <m:t>1</m:t>
-                                </m:r>
-                              </m:num>
-                              <m:den>
-                                <m:r>
-                                  <a:rPr lang="en-US" altLang="zh-TW" sz="2000" b="0" i="1" smtClean="0">
-                                    <a:latin typeface="Cambria Math" panose="02040503050406030204" pitchFamily="18" charset="0"/>
-                                    <a:ea typeface="Cambria Math" panose="02040503050406030204" pitchFamily="18" charset="0"/>
-                                  </a:rPr>
-                                  <m:t>34</m:t>
-                                </m:r>
-                              </m:den>
-                            </m:f>
-                          </m:den>
-                        </m:f>
-                      </m:e>
-                    </m:d>
-                    <m:r>
-                      <a:rPr lang="en-US" altLang="zh-TW" sz="2000" b="0" i="1" smtClean="0">
-                        <a:latin typeface="Cambria Math" panose="02040503050406030204" pitchFamily="18" charset="0"/>
-                        <a:ea typeface="Cambria Math" panose="02040503050406030204" pitchFamily="18" charset="0"/>
-                      </a:rPr>
-                      <m:t>=800+40=840=</m:t>
-                    </m:r>
-                    <m:nary>
-                      <m:naryPr>
-                        <m:chr m:val="∑"/>
-                        <m:ctrlPr>
-                          <a:rPr lang="zh-TW" altLang="en-US" sz="2000" i="1">
-                            <a:latin typeface="Cambria Math" panose="02040503050406030204" pitchFamily="18" charset="0"/>
-                          </a:rPr>
-                        </m:ctrlPr>
-                      </m:naryPr>
-                      <m:sub>
-                        <m:r>
-                          <m:rPr>
-                            <m:brk m:alnAt="23"/>
-                          </m:rPr>
-                          <a:rPr lang="en-US" altLang="zh-TW" sz="2000" i="1">
-                            <a:latin typeface="Cambria Math" panose="02040503050406030204" pitchFamily="18" charset="0"/>
-                          </a:rPr>
-                          <m:t>𝑖</m:t>
-                        </m:r>
-                        <m:r>
-                          <a:rPr lang="en-US" altLang="zh-TW" sz="2000" i="1">
-                            <a:latin typeface="Cambria Math" panose="02040503050406030204" pitchFamily="18" charset="0"/>
-                          </a:rPr>
-                          <m:t>=1</m:t>
-                        </m:r>
-                      </m:sub>
-                      <m:sup>
-                        <m:r>
-                          <a:rPr lang="en-US" altLang="zh-TW" sz="2000" i="1">
-                            <a:latin typeface="Cambria Math" panose="02040503050406030204" pitchFamily="18" charset="0"/>
-                          </a:rPr>
-                          <m:t>𝑁</m:t>
-                        </m:r>
-                      </m:sup>
-                      <m:e>
-                        <m:sSub>
-                          <m:sSubPr>
-                            <m:ctrlPr>
-                              <a:rPr lang="en-US" altLang="zh-TW" sz="2000" i="1">
+                              <a:rPr lang="en-US" altLang="ja-JP" sz="2000" i="1">
                                 <a:latin typeface="Cambria Math" panose="02040503050406030204" pitchFamily="18" charset="0"/>
                               </a:rPr>
                             </m:ctrlPr>
-                          </m:sSubPr>
+                          </m:accPr>
                           <m:e>
                             <m:r>
-                              <a:rPr lang="en-US" altLang="zh-TW" sz="2000" b="0" i="1" smtClean="0">
+                              <a:rPr lang="en-US" altLang="ja-JP" sz="2000" i="1">
                                 <a:latin typeface="Cambria Math" panose="02040503050406030204" pitchFamily="18" charset="0"/>
-                                <a:ea typeface="Cambria Math" panose="02040503050406030204" pitchFamily="18" charset="0"/>
                               </a:rPr>
                               <m:t>𝑦</m:t>
                             </m:r>
                           </m:e>
-                          <m:sub>
-                            <m:r>
-                              <a:rPr lang="en-US" altLang="zh-TW" sz="2000" i="1">
-                                <a:latin typeface="Cambria Math" panose="02040503050406030204" pitchFamily="18" charset="0"/>
-                              </a:rPr>
-                              <m:t>𝑖</m:t>
-                            </m:r>
-                          </m:sub>
-                        </m:sSub>
+                        </m:acc>
                       </m:e>
-                    </m:nary>
+                      <m:sub>
+                        <m:r>
+                          <a:rPr lang="en-US" altLang="ja-JP" sz="2000" i="1">
+                            <a:latin typeface="Cambria Math" panose="02040503050406030204" pitchFamily="18" charset="0"/>
+                          </a:rPr>
+                          <m:t>h</m:t>
+                        </m:r>
+                      </m:sub>
+                    </m:sSub>
                   </m:oMath>
                 </a14:m>
-                <a:endParaRPr kumimoji="1" lang="en-US" altLang="zh-TW" sz="2000" dirty="0"/>
+                <a:r>
+                  <a:rPr lang="en-US" sz="2000" dirty="0"/>
+                  <a:t>。</a:t>
+                </a:r>
+                <a:r>
+                  <a:rPr lang="en-US" sz="2000" dirty="0" err="1"/>
+                  <a:t>類似等比例分配抽樣的估計式</a:t>
+                </a:r>
+                <a:r>
+                  <a:rPr lang="en-US" sz="2000" dirty="0"/>
+                  <a:t>。</a:t>
+                </a:r>
               </a:p>
               <a:p>
                 <a:pPr>
@@ -10875,152 +12244,72 @@
                   </a:lnSpc>
                 </a:pPr>
                 <a:r>
-                  <a:rPr kumimoji="1" lang="zh-TW" altLang="en-US" sz="2000" dirty="0"/>
-                  <a:t>如果樣本從</a:t>
-                </a:r>
-                <a:r>
-                  <a:rPr kumimoji="1" lang="en-US" altLang="zh-TW" sz="2000" dirty="0"/>
-                  <a:t>1</a:t>
-                </a:r>
-                <a:r>
-                  <a:rPr kumimoji="1" lang="zh-TW" altLang="en-US" sz="2000" dirty="0"/>
-                  <a:t>人增加到</a:t>
-                </a:r>
-                <a:r>
-                  <a:rPr kumimoji="1" lang="en-US" altLang="zh-TW" sz="2000" dirty="0"/>
-                  <a:t>2</a:t>
-                </a:r>
-                <a:r>
-                  <a:rPr kumimoji="1" lang="zh-TW" altLang="en-US" sz="2000" dirty="0"/>
-                  <a:t>人，其他條件不變，那麼每個人中選機率變成</a:t>
+                  <a:rPr lang="ja-JP" altLang="en-US" sz="2000"/>
+                  <a:t>因為我們通常事先不知道各層的真實標準差 </a:t>
                 </a:r>
                 <a14:m>
                   <m:oMath xmlns:m="http://schemas.openxmlformats.org/officeDocument/2006/math">
-                    <m:f>
-                      <m:fPr>
+                    <m:sSub>
+                      <m:sSubPr>
                         <m:ctrlPr>
-                          <a:rPr kumimoji="1" lang="en-US" altLang="zh-TW" sz="2000" i="1" smtClean="0">
+                          <a:rPr lang="en-US" sz="2000" i="1" dirty="0" smtClean="0">
                             <a:latin typeface="Cambria Math" panose="02040503050406030204" pitchFamily="18" charset="0"/>
                           </a:rPr>
                         </m:ctrlPr>
-                      </m:fPr>
-                      <m:num>
+                      </m:sSubPr>
+                      <m:e>
                         <m:r>
-                          <a:rPr kumimoji="1" lang="en-US" altLang="zh-TW" sz="2000" b="0" i="1" smtClean="0">
-                            <a:latin typeface="Cambria Math" panose="02040503050406030204" pitchFamily="18" charset="0"/>
-                          </a:rPr>
-                          <m:t>2</m:t>
+                          <a:rPr lang="en-US" sz="2000" b="0" i="1" dirty="0" smtClean="0">
+                            <a:latin typeface="Cambria Math" panose="02040503050406030204" pitchFamily="18" charset="0"/>
+                          </a:rPr>
+                          <m:t>𝑆</m:t>
                         </m:r>
-                      </m:num>
-                      <m:den>
+                      </m:e>
+                      <m:sub>
                         <m:r>
-                          <a:rPr kumimoji="1" lang="en-US" altLang="zh-TW" sz="2000" b="0" i="1" smtClean="0">
-                            <a:latin typeface="Cambria Math" panose="02040503050406030204" pitchFamily="18" charset="0"/>
-                          </a:rPr>
-                          <m:t>34</m:t>
+                          <a:rPr lang="en-US" sz="2000" b="0" i="1" dirty="0" smtClean="0">
+                            <a:latin typeface="Cambria Math" panose="02040503050406030204" pitchFamily="18" charset="0"/>
+                          </a:rPr>
+                          <m:t>h</m:t>
                         </m:r>
-                      </m:den>
-                    </m:f>
+                      </m:sub>
+                    </m:sSub>
                     <m:r>
-                      <a:rPr kumimoji="1" lang="en-US" altLang="zh-TW" sz="2000" b="0" i="1" smtClean="0">
+                      <a:rPr lang="en-US" sz="2000" b="0" i="1" dirty="0" smtClean="0">
                         <a:latin typeface="Cambria Math" panose="02040503050406030204" pitchFamily="18" charset="0"/>
                       </a:rPr>
-                      <m:t>=</m:t>
+                      <m:t> </m:t>
                     </m:r>
-                    <m:f>
-                      <m:fPr>
-                        <m:ctrlPr>
-                          <a:rPr kumimoji="1" lang="en-US" altLang="zh-TW" sz="2000" b="0" i="1" smtClean="0">
-                            <a:latin typeface="Cambria Math" panose="02040503050406030204" pitchFamily="18" charset="0"/>
-                          </a:rPr>
-                        </m:ctrlPr>
-                      </m:fPr>
-                      <m:num>
-                        <m:r>
-                          <a:rPr kumimoji="1" lang="en-US" altLang="zh-TW" sz="2000" b="0" i="1" smtClean="0">
-                            <a:latin typeface="Cambria Math" panose="02040503050406030204" pitchFamily="18" charset="0"/>
-                          </a:rPr>
-                          <m:t>1</m:t>
-                        </m:r>
-                      </m:num>
-                      <m:den>
-                        <m:r>
-                          <a:rPr kumimoji="1" lang="en-US" altLang="zh-TW" sz="2000" b="0" i="1" smtClean="0">
-                            <a:latin typeface="Cambria Math" panose="02040503050406030204" pitchFamily="18" charset="0"/>
-                          </a:rPr>
-                          <m:t>17</m:t>
-                        </m:r>
-                      </m:den>
-                    </m:f>
                   </m:oMath>
                 </a14:m>
-                <a:endParaRPr kumimoji="1" lang="en-US" altLang="zh-TW" sz="2000" b="0" dirty="0"/>
-              </a:p>
-              <a:p>
-                <a:pPr>
-                  <a:lnSpc>
-                    <a:spcPct val="150000"/>
-                  </a:lnSpc>
-                </a:pPr>
-                <a:r>
-                  <a:rPr kumimoji="1" lang="zh-TW" altLang="en-US" sz="2000" dirty="0"/>
-                  <a:t>抽出</a:t>
-                </a:r>
-                <a:r>
-                  <a:rPr kumimoji="1" lang="en-US" altLang="zh-TW" sz="2000" dirty="0"/>
-                  <a:t>2</a:t>
-                </a:r>
-                <a:r>
-                  <a:rPr kumimoji="1" lang="zh-TW" altLang="en-US" sz="2000" dirty="0"/>
-                  <a:t>人可能是一個高薪一個低薪、兩個高薪、兩個低薪，分別計算這三種組合的期望值，</a:t>
-                </a:r>
-                <a:r>
-                  <a:rPr kumimoji="1" lang="zh-TW" altLang="en-US" sz="2000"/>
-                  <a:t>然後再加權平均</a:t>
-                </a:r>
-                <a:r>
-                  <a:rPr kumimoji="1" lang="zh-TW" altLang="en-US" sz="2000" dirty="0"/>
-                  <a:t>，會得到</a:t>
-                </a:r>
-                <a:r>
-                  <a:rPr kumimoji="1" lang="en-US" altLang="zh-TW" sz="2000" dirty="0"/>
-                  <a:t>840</a:t>
-                </a:r>
-                <a:r>
-                  <a:rPr kumimoji="1" lang="zh-TW" altLang="en-US" sz="2000" dirty="0"/>
-                  <a:t>萬（為什麼？）</a:t>
-                </a:r>
-                <a:endParaRPr kumimoji="1" lang="en-US" altLang="zh-TW" sz="2000" dirty="0"/>
-              </a:p>
-              <a:p>
-                <a:pPr>
-                  <a:lnSpc>
-                    <a:spcPct val="150000"/>
-                  </a:lnSpc>
-                </a:pPr>
-                <a:r>
-                  <a:rPr kumimoji="1" lang="zh-TW" altLang="en-US" sz="2000" dirty="0"/>
-                  <a:t>比起只抽</a:t>
-                </a:r>
-                <a:r>
-                  <a:rPr kumimoji="1" lang="en-US" altLang="zh-TW" sz="2000" dirty="0"/>
-                  <a:t>1</a:t>
-                </a:r>
-                <a:r>
-                  <a:rPr kumimoji="1" lang="zh-TW" altLang="en-US" sz="2000" dirty="0"/>
-                  <a:t>人，如果抽中組合是一個高薪一個低薪，會更接近最後的期望值。</a:t>
-                </a:r>
+                <a:r>
+                  <a:rPr lang="en-US" sz="2000" dirty="0"/>
+                  <a:t>，</a:t>
+                </a:r>
+                <a:r>
+                  <a:rPr lang="ja-JP" altLang="en-US" sz="2000"/>
+                  <a:t>所以常會用「事前調查（</a:t>
+                </a:r>
+                <a:r>
+                  <a:rPr lang="en-US" sz="2000" dirty="0"/>
+                  <a:t>Pilot Survey）」</a:t>
+                </a:r>
+                <a:r>
+                  <a:rPr lang="ja-JP" altLang="en-US" sz="2000"/>
+                  <a:t>或過去的資料來預估。</a:t>
+                </a:r>
+                <a:endParaRPr lang="en-US" sz="2000" dirty="0"/>
               </a:p>
             </p:txBody>
           </p:sp>
         </mc:Choice>
-        <mc:Fallback xmlns="">
+        <mc:Fallback>
           <p:sp>
             <p:nvSpPr>
-              <p:cNvPr id="3" name="內容版面配置區 2">
+              <p:cNvPr id="3" name="Content Placeholder 2">
                 <a:extLst>
                   <a:ext uri="{FF2B5EF4-FFF2-40B4-BE49-F238E27FC236}">
-                    <a16:creationId xmlns:a16="http://schemas.microsoft.com/office/drawing/2014/main" id="{D77F4EED-7909-5AF8-5411-8811C2034F9D}"/>
+                    <a16:creationId xmlns:a16="http://schemas.microsoft.com/office/drawing/2014/main" id="{53BAB9BA-AE87-96E3-003F-24B402A7B57A}"/>
                   </a:ext>
                 </a:extLst>
               </p:cNvPr>
@@ -11035,7 +12324,7 @@
               <a:blipFill>
                 <a:blip r:embed="rId2"/>
                 <a:stretch>
-                  <a:fillRect l="-603" r="-2171"/>
+                  <a:fillRect l="-603" r="-241"/>
                 </a:stretch>
               </a:blipFill>
             </p:spPr>
@@ -11044,7 +12333,7 @@
               <a:lstStyle/>
               <a:p>
                 <a:r>
-                  <a:rPr lang="zh-TW" altLang="en-US">
+                  <a:rPr lang="en-US">
                     <a:noFill/>
                   </a:rPr>
                   <a:t> </a:t>
@@ -11056,10 +12345,10 @@
       </mc:AlternateContent>
       <p:sp>
         <p:nvSpPr>
-          <p:cNvPr id="4" name="投影片編號版面配置區 3">
+          <p:cNvPr id="4" name="Slide Number Placeholder 3">
             <a:extLst>
               <a:ext uri="{FF2B5EF4-FFF2-40B4-BE49-F238E27FC236}">
-                <a16:creationId xmlns:a16="http://schemas.microsoft.com/office/drawing/2014/main" id="{BF4C5D14-5932-A53B-6231-86CE0BBFB842}"/>
+                <a16:creationId xmlns:a16="http://schemas.microsoft.com/office/drawing/2014/main" id="{4703A207-C8D9-1CB0-9A5C-DF9B18AB16B0}"/>
               </a:ext>
             </a:extLst>
           </p:cNvPr>
@@ -11086,7 +12375,7 @@
     </p:spTree>
     <p:extLst>
       <p:ext uri="{BB962C8B-B14F-4D97-AF65-F5344CB8AC3E}">
-        <p14:creationId xmlns:p14="http://schemas.microsoft.com/office/powerpoint/2010/main" val="3414733"/>
+        <p14:creationId xmlns:p14="http://schemas.microsoft.com/office/powerpoint/2010/main" val="3580137284"/>
       </p:ext>
     </p:extLst>
   </p:cSld>

--- a/投影片/民意與調查Week5.pptx
+++ b/投影片/民意與調查Week5.pptx
@@ -5,7 +5,7 @@
     <p:sldMasterId id="2147483648" r:id="rId1"/>
   </p:sldMasterIdLst>
   <p:notesMasterIdLst>
-    <p:notesMasterId r:id="rId17"/>
+    <p:notesMasterId r:id="rId27"/>
   </p:notesMasterIdLst>
   <p:sldIdLst>
     <p:sldId id="256" r:id="rId2"/>
@@ -23,6 +23,16 @@
     <p:sldId id="278" r:id="rId14"/>
     <p:sldId id="279" r:id="rId15"/>
     <p:sldId id="280" r:id="rId16"/>
+    <p:sldId id="283" r:id="rId17"/>
+    <p:sldId id="284" r:id="rId18"/>
+    <p:sldId id="285" r:id="rId19"/>
+    <p:sldId id="287" r:id="rId20"/>
+    <p:sldId id="288" r:id="rId21"/>
+    <p:sldId id="286" r:id="rId22"/>
+    <p:sldId id="289" r:id="rId23"/>
+    <p:sldId id="290" r:id="rId24"/>
+    <p:sldId id="291" r:id="rId25"/>
+    <p:sldId id="292" r:id="rId26"/>
   </p:sldIdLst>
   <p:sldSz cx="12192000" cy="6858000"/>
   <p:notesSz cx="6858000" cy="9144000"/>
@@ -211,7 +221,7 @@
           <a:p>
             <a:fld id="{308549C9-F1F2-A344-9318-AC3AB4654B7E}" type="datetimeFigureOut">
               <a:rPr lang="en-US" smtClean="0"/>
-              <a:t>3/26/26</a:t>
+              <a:t>3/31/26</a:t>
             </a:fld>
             <a:endParaRPr lang="en-US"/>
           </a:p>
@@ -625,7 +635,7 @@
           <a:p>
             <a:fld id="{0ECB731F-7F54-EF4E-BC14-D4454C95FF4D}" type="datetime1">
               <a:rPr lang="en-US" smtClean="0"/>
-              <a:t>3/26/26</a:t>
+              <a:t>3/31/26</a:t>
             </a:fld>
             <a:endParaRPr lang="en-US"/>
           </a:p>
@@ -823,7 +833,7 @@
           <a:p>
             <a:fld id="{5FC0AAEB-F940-CA44-B742-2110711973A7}" type="datetime1">
               <a:rPr lang="en-US" smtClean="0"/>
-              <a:t>3/26/26</a:t>
+              <a:t>3/31/26</a:t>
             </a:fld>
             <a:endParaRPr lang="en-US"/>
           </a:p>
@@ -1031,7 +1041,7 @@
           <a:p>
             <a:fld id="{0C0FC7EA-A73C-4146-9B14-54C11597AA40}" type="datetime1">
               <a:rPr lang="en-US" smtClean="0"/>
-              <a:t>3/26/26</a:t>
+              <a:t>3/31/26</a:t>
             </a:fld>
             <a:endParaRPr lang="en-US"/>
           </a:p>
@@ -1229,7 +1239,7 @@
           <a:p>
             <a:fld id="{24943121-CDD1-174D-9095-06B3974B3CC1}" type="datetime1">
               <a:rPr lang="en-US" smtClean="0"/>
-              <a:t>3/26/26</a:t>
+              <a:t>3/31/26</a:t>
             </a:fld>
             <a:endParaRPr lang="en-US"/>
           </a:p>
@@ -1504,7 +1514,7 @@
           <a:p>
             <a:fld id="{21F2BAF9-EAD3-1641-87AF-ADC71D8222CD}" type="datetime1">
               <a:rPr lang="en-US" smtClean="0"/>
-              <a:t>3/26/26</a:t>
+              <a:t>3/31/26</a:t>
             </a:fld>
             <a:endParaRPr lang="en-US"/>
           </a:p>
@@ -1769,7 +1779,7 @@
           <a:p>
             <a:fld id="{F8F7A49D-4C23-6A49-AF9D-C0E1C1130921}" type="datetime1">
               <a:rPr lang="en-US" smtClean="0"/>
-              <a:t>3/26/26</a:t>
+              <a:t>3/31/26</a:t>
             </a:fld>
             <a:endParaRPr lang="en-US"/>
           </a:p>
@@ -2181,7 +2191,7 @@
           <a:p>
             <a:fld id="{9F516F59-8951-4749-B49C-6C88C0B4B6BD}" type="datetime1">
               <a:rPr lang="en-US" smtClean="0"/>
-              <a:t>3/26/26</a:t>
+              <a:t>3/31/26</a:t>
             </a:fld>
             <a:endParaRPr lang="en-US"/>
           </a:p>
@@ -2322,7 +2332,7 @@
           <a:p>
             <a:fld id="{CA82BBDF-C485-174D-8051-FF3ED3DF33C6}" type="datetime1">
               <a:rPr lang="en-US" smtClean="0"/>
-              <a:t>3/26/26</a:t>
+              <a:t>3/31/26</a:t>
             </a:fld>
             <a:endParaRPr lang="en-US"/>
           </a:p>
@@ -2435,7 +2445,7 @@
           <a:p>
             <a:fld id="{3CA316C8-35EA-C448-A7DB-295F753FB635}" type="datetime1">
               <a:rPr lang="en-US" smtClean="0"/>
-              <a:t>3/26/26</a:t>
+              <a:t>3/31/26</a:t>
             </a:fld>
             <a:endParaRPr lang="en-US"/>
           </a:p>
@@ -2746,7 +2756,7 @@
           <a:p>
             <a:fld id="{3EBA6818-685C-B142-BE10-A6D54A85D7FF}" type="datetime1">
               <a:rPr lang="en-US" smtClean="0"/>
-              <a:t>3/26/26</a:t>
+              <a:t>3/31/26</a:t>
             </a:fld>
             <a:endParaRPr lang="en-US"/>
           </a:p>
@@ -3034,7 +3044,7 @@
           <a:p>
             <a:fld id="{D444D57B-5B66-2F49-AB7C-362DD22B45D8}" type="datetime1">
               <a:rPr lang="en-US" smtClean="0"/>
-              <a:t>3/26/26</a:t>
+              <a:t>3/31/26</a:t>
             </a:fld>
             <a:endParaRPr lang="en-US"/>
           </a:p>
@@ -3275,7 +3285,7 @@
           <a:p>
             <a:fld id="{4025DC53-D744-A54C-8957-51F9F93FF803}" type="datetime1">
               <a:rPr lang="en-US" smtClean="0"/>
-              <a:t>3/26/26</a:t>
+              <a:t>3/31/26</a:t>
             </a:fld>
             <a:endParaRPr lang="en-US"/>
           </a:p>
@@ -7271,7 +7281,37 @@
                       <a:rPr lang="en-US" sz="2000" b="1" i="1" smtClean="0">
                         <a:latin typeface="Cambria Math" panose="02040503050406030204" pitchFamily="18" charset="0"/>
                       </a:rPr>
-                      <m:t>前面是</m:t>
+                      <m:t>前面</m:t>
+                    </m:r>
+                    <m:r>
+                      <a:rPr lang="en-US" sz="2000" b="1" i="1" smtClean="0">
+                        <a:latin typeface="Cambria Math" panose="02040503050406030204" pitchFamily="18" charset="0"/>
+                      </a:rPr>
+                      <m:t>𝑯</m:t>
+                    </m:r>
+                    <m:r>
+                      <a:rPr lang="en-US" sz="2000" b="1" i="1" smtClean="0">
+                        <a:latin typeface="Cambria Math" panose="02040503050406030204" pitchFamily="18" charset="0"/>
+                      </a:rPr>
+                      <m:t>−</m:t>
+                    </m:r>
+                    <m:r>
+                      <a:rPr lang="en-US" sz="2000" b="1" i="1" smtClean="0">
+                        <a:latin typeface="Cambria Math" panose="02040503050406030204" pitchFamily="18" charset="0"/>
+                      </a:rPr>
+                      <m:t>𝑽</m:t>
+                    </m:r>
+                    <m:r>
+                      <a:rPr lang="en-US" sz="2000" b="1" i="1">
+                        <a:latin typeface="Cambria Math" panose="02040503050406030204" pitchFamily="18" charset="0"/>
+                      </a:rPr>
+                      <m:t>估計式</m:t>
+                    </m:r>
+                    <m:r>
+                      <a:rPr lang="en-US" sz="2000" b="1" i="1" smtClean="0">
+                        <a:latin typeface="Cambria Math" panose="02040503050406030204" pitchFamily="18" charset="0"/>
+                      </a:rPr>
+                      <m:t>是</m:t>
                     </m:r>
                     <m:r>
                       <a:rPr lang="zh-TW" altLang="en-US" sz="2000" b="1" i="1">
@@ -9092,11 +9132,18 @@
                   <a:t>是 </a:t>
                 </a:r>
                 <a:r>
+                  <a:rPr lang="en-US" sz="2000" i="1" dirty="0">
+                    <a:effectLst/>
+                    <a:latin typeface="Google Sans Text"/>
+                  </a:rPr>
+                  <a:t>k</a:t>
+                </a:r>
+                <a:r>
                   <a:rPr lang="en-US" sz="2000" dirty="0">
                     <a:effectLst/>
                     <a:latin typeface="Google Sans Text"/>
                   </a:rPr>
-                  <a:t>k </a:t>
+                  <a:t> </a:t>
                 </a:r>
                 <a:r>
                   <a:rPr lang="ja-JP" altLang="en-US" sz="2000">
@@ -9106,18 +9153,25 @@
                   <a:t>與 </a:t>
                 </a:r>
                 <a:r>
+                  <a:rPr lang="en-US" sz="2000" i="1" dirty="0">
+                    <a:effectLst/>
+                    <a:latin typeface="Google Sans Text"/>
+                  </a:rPr>
+                  <a:t>l</a:t>
+                </a:r>
+                <a:r>
                   <a:rPr lang="en-US" sz="2000" dirty="0">
                     <a:effectLst/>
                     <a:latin typeface="Google Sans Text"/>
                   </a:rPr>
-                  <a:t>l </a:t>
+                  <a:t> </a:t>
                 </a:r>
                 <a:r>
                   <a:rPr lang="ja-JP" altLang="en-US" sz="2000">
                     <a:effectLst/>
                     <a:latin typeface="Google Sans Text"/>
                   </a:rPr>
-                  <a:t>抽樣的</a:t>
+                  <a:t>樣本的</a:t>
                 </a:r>
                 <a:r>
                   <a:rPr lang="ja-JP" altLang="en-US" sz="2000" b="1">
@@ -9142,17 +9196,22 @@
                 </a:r>
                 <a:r>
                   <a:rPr lang="en-US" sz="2000" dirty="0">
-                    <a:effectLst/>
-                    <a:latin typeface="Google Sans Text"/>
-                  </a:rPr>
-                  <a:t>。</a:t>
+                    <a:latin typeface="Google Sans Text"/>
+                  </a:rPr>
+                  <a:t>，</a:t>
+                </a:r>
+                <a:r>
+                  <a:rPr lang="en-US" sz="2000" dirty="0" err="1">
+                    <a:latin typeface="Google Sans Text"/>
+                  </a:rPr>
+                  <a:t>代表</a:t>
                 </a:r>
                 <a:r>
                   <a:rPr lang="ja-JP" altLang="en-US" sz="2000">
                     <a:effectLst/>
                     <a:latin typeface="Google Sans Text"/>
                   </a:rPr>
-                  <a:t>它描述了個體之間入選機率的「相關性」。</a:t>
+                  <a:t>個體之間入選機率的「相關性」。</a:t>
                 </a:r>
               </a:p>
               <a:p>
@@ -9171,11 +9230,18 @@
                   <a:t>如果這個值是負的，代表抽到 </a:t>
                 </a:r>
                 <a:r>
+                  <a:rPr lang="en-US" sz="2000" i="1" dirty="0">
+                    <a:effectLst/>
+                    <a:latin typeface="Google Sans Text"/>
+                  </a:rPr>
+                  <a:t>k</a:t>
+                </a:r>
+                <a:r>
                   <a:rPr lang="en-US" sz="2000" dirty="0">
                     <a:effectLst/>
                     <a:latin typeface="Google Sans Text"/>
                   </a:rPr>
-                  <a:t>k </a:t>
+                  <a:t> </a:t>
                 </a:r>
                 <a:r>
                   <a:rPr lang="ja-JP" altLang="en-US" sz="2000">
@@ -9185,18 +9251,48 @@
                   <a:t>就不容易抽到 </a:t>
                 </a:r>
                 <a:r>
-                  <a:rPr lang="en-US" sz="2000" dirty="0">
-                    <a:effectLst/>
-                    <a:latin typeface="Google Sans Text"/>
-                  </a:rPr>
-                  <a:t>l（</a:t>
+                  <a:rPr lang="en-US" altLang="ja-JP" sz="2000" i="1" dirty="0">
+                    <a:latin typeface="Google Sans Text"/>
+                  </a:rPr>
+                  <a:t>l</a:t>
+                </a:r>
+                <a:r>
+                  <a:rPr lang="ja-JP" altLang="en-US" sz="2000" i="1">
+                    <a:latin typeface="Google Sans Text"/>
+                  </a:rPr>
+                  <a:t>。</a:t>
                 </a:r>
                 <a:r>
                   <a:rPr lang="ja-JP" altLang="en-US" sz="2000">
                     <a:effectLst/>
                     <a:latin typeface="Google Sans Text"/>
                   </a:rPr>
-                  <a:t>例如：簡單隨機抽樣）。</a:t>
+                  <a:t>例如：簡單隨機抽樣就是只會抽到</a:t>
+                </a:r>
+                <a:r>
+                  <a:rPr lang="en-US" altLang="ja-JP" sz="2000" dirty="0">
+                    <a:latin typeface="Google Sans Text"/>
+                  </a:rPr>
+                  <a:t>k</a:t>
+                </a:r>
+                <a:r>
+                  <a:rPr lang="ja-JP" altLang="en-US" sz="2000">
+                    <a:latin typeface="Google Sans Text"/>
+                  </a:rPr>
+                  <a:t>或是</a:t>
+                </a:r>
+                <a:r>
+                  <a:rPr lang="en-US" altLang="ja-JP" sz="2000" dirty="0">
+                    <a:latin typeface="Google Sans Text"/>
+                  </a:rPr>
+                  <a:t>l</a:t>
+                </a:r>
+                <a:r>
+                  <a:rPr lang="ja-JP" altLang="en-US" sz="2000">
+                    <a:effectLst/>
+                    <a:latin typeface="Google Sans Text"/>
+                  </a:rPr>
+                  <a:t>。</a:t>
                 </a:r>
                 <a:endParaRPr lang="en-US" sz="2000" dirty="0">
                   <a:effectLst/>
@@ -9230,7 +9326,7 @@
               <a:blipFill>
                 <a:blip r:embed="rId2"/>
                 <a:stretch>
-                  <a:fillRect l="-603"/>
+                  <a:fillRect l="-603" r="-1206"/>
                 </a:stretch>
               </a:blipFill>
             </p:spPr>
@@ -9369,7 +9465,6 @@
                 </a:pPr>
                 <a:r>
                   <a:rPr lang="en-US" sz="2200" dirty="0">
-                    <a:effectLst/>
                     <a:latin typeface="Google Sans Text"/>
                   </a:rPr>
                   <a:t>H-T </a:t>
@@ -9497,21 +9592,7 @@
                     <a:effectLst/>
                     <a:latin typeface="Google Sans Text"/>
                   </a:rPr>
-                  <a:t>如果某個人的中選機率</a:t>
-                </a:r>
-                <a:r>
-                  <a:rPr lang="en-US" sz="2200" dirty="0">
-                    <a:effectLst/>
-                    <a:latin typeface="Google Sans Text"/>
-                  </a:rPr>
-                  <a:t> </a:t>
-                </a:r>
-                <a:r>
-                  <a:rPr lang="ja-JP" altLang="en-US" sz="2200">
-                    <a:effectLst/>
-                    <a:latin typeface="Google Sans Text"/>
-                  </a:rPr>
-                  <a:t>非常小（窮人），權重會變大。這會直接增加變異數。這就是為什麼「抽到窮人會跟母體真相差很大」的數學原因。</a:t>
+                  <a:t>如果某個人的中選機率非常小（窮人），權重會變大。會直接增加變異數。這是「抽到窮人會跟母體真相差很大」的數學原因。</a:t>
                 </a:r>
               </a:p>
               <a:p>
@@ -9616,7 +9697,7 @@
               <a:blipFill>
                 <a:blip r:embed="rId2"/>
                 <a:stretch>
-                  <a:fillRect l="-724" r="-2895"/>
+                  <a:fillRect l="-724" r="-241"/>
                 </a:stretch>
               </a:blipFill>
             </p:spPr>
@@ -9668,6 +9749,3035 @@
     <p:extLst>
       <p:ext uri="{BB962C8B-B14F-4D97-AF65-F5344CB8AC3E}">
         <p14:creationId xmlns:p14="http://schemas.microsoft.com/office/powerpoint/2010/main" val="1931281032"/>
+      </p:ext>
+    </p:extLst>
+  </p:cSld>
+  <p:clrMapOvr>
+    <a:masterClrMapping/>
+  </p:clrMapOvr>
+</p:sld>
+</file>
+
+<file path=ppt/slides/slide16.xml><?xml version="1.0" encoding="utf-8"?>
+<p:sld xmlns:a="http://schemas.openxmlformats.org/drawingml/2006/main" xmlns:r="http://schemas.openxmlformats.org/officeDocument/2006/relationships" xmlns:p="http://schemas.openxmlformats.org/presentationml/2006/main">
+  <p:cSld>
+    <p:spTree>
+      <p:nvGrpSpPr>
+        <p:cNvPr id="1" name=""/>
+        <p:cNvGrpSpPr/>
+        <p:nvPr/>
+      </p:nvGrpSpPr>
+      <p:grpSpPr>
+        <a:xfrm>
+          <a:off x="0" y="0"/>
+          <a:ext cx="0" cy="0"/>
+          <a:chOff x="0" y="0"/>
+          <a:chExt cx="0" cy="0"/>
+        </a:xfrm>
+      </p:grpSpPr>
+      <p:sp>
+        <p:nvSpPr>
+          <p:cNvPr id="2" name="Title 1">
+            <a:extLst>
+              <a:ext uri="{FF2B5EF4-FFF2-40B4-BE49-F238E27FC236}">
+                <a16:creationId xmlns:a16="http://schemas.microsoft.com/office/drawing/2014/main" id="{31C60B46-553E-18AD-A4BE-E745BAB0CAA0}"/>
+              </a:ext>
+            </a:extLst>
+          </p:cNvPr>
+          <p:cNvSpPr>
+            <a:spLocks noGrp="1"/>
+          </p:cNvSpPr>
+          <p:nvPr>
+            <p:ph type="title"/>
+          </p:nvPr>
+        </p:nvSpPr>
+        <p:spPr/>
+        <p:txBody>
+          <a:bodyPr/>
+          <a:lstStyle/>
+          <a:p>
+            <a:r>
+              <a:rPr lang="ja-JP" altLang="en-US"/>
+              <a:t>機率抽樣的元素（九）</a:t>
+            </a:r>
+            <a:endParaRPr lang="en-US" dirty="0"/>
+          </a:p>
+        </p:txBody>
+      </p:sp>
+      <mc:AlternateContent xmlns:mc="http://schemas.openxmlformats.org/markup-compatibility/2006" xmlns:a14="http://schemas.microsoft.com/office/drawing/2010/main">
+        <mc:Choice Requires="a14">
+          <p:sp>
+            <p:nvSpPr>
+              <p:cNvPr id="3" name="Content Placeholder 2">
+                <a:extLst>
+                  <a:ext uri="{FF2B5EF4-FFF2-40B4-BE49-F238E27FC236}">
+                    <a16:creationId xmlns:a16="http://schemas.microsoft.com/office/drawing/2014/main" id="{659579A7-244A-1B4E-A6EF-9B1F87EA3242}"/>
+                  </a:ext>
+                </a:extLst>
+              </p:cNvPr>
+              <p:cNvSpPr>
+                <a:spLocks noGrp="1"/>
+              </p:cNvSpPr>
+              <p:nvPr>
+                <p:ph idx="1"/>
+              </p:nvPr>
+            </p:nvSpPr>
+            <p:spPr/>
+            <p:txBody>
+              <a:bodyPr>
+                <a:normAutofit/>
+              </a:bodyPr>
+              <a:lstStyle/>
+              <a:p>
+                <a:pPr>
+                  <a:lnSpc>
+                    <a:spcPct val="150000"/>
+                  </a:lnSpc>
+                </a:pPr>
+                <a:r>
+                  <a:rPr lang="en-US" sz="2000" dirty="0">
+                    <a:latin typeface="Google Sans Text"/>
+                  </a:rPr>
+                  <a:t>當估計式得出無偏估計後，我們建立一個有95%機率包含母體真正平均值的信賴區間</a:t>
+                </a:r>
+                <a:r>
+                  <a:rPr lang="ja-JP" altLang="en-US" sz="2000">
+                    <a:latin typeface="Google Sans Text"/>
+                    <a:sym typeface="Wingdings" pitchFamily="2" charset="2"/>
+                  </a:rPr>
+                  <a:t>：</a:t>
+                </a:r>
+                <a14:m>
+                  <m:oMath xmlns:m="http://schemas.openxmlformats.org/officeDocument/2006/math">
+                    <m:r>
+                      <a:rPr lang="en-US" altLang="ja-JP" sz="2000" i="1">
+                        <a:latin typeface="Cambria Math" panose="02040503050406030204" pitchFamily="18" charset="0"/>
+                        <a:sym typeface="Wingdings" pitchFamily="2" charset="2"/>
+                      </a:rPr>
+                      <m:t>[</m:t>
+                    </m:r>
+                    <m:sSub>
+                      <m:sSubPr>
+                        <m:ctrlPr>
+                          <a:rPr lang="en-US" altLang="ja-JP" sz="2000" b="0" i="1" smtClean="0">
+                            <a:latin typeface="Cambria Math" panose="02040503050406030204" pitchFamily="18" charset="0"/>
+                            <a:sym typeface="Wingdings" pitchFamily="2" charset="2"/>
+                          </a:rPr>
+                        </m:ctrlPr>
+                      </m:sSubPr>
+                      <m:e>
+                        <m:acc>
+                          <m:accPr>
+                            <m:chr m:val="̅"/>
+                            <m:ctrlPr>
+                              <a:rPr lang="en-US" altLang="ja-JP" sz="2000" b="0" i="1" smtClean="0">
+                                <a:latin typeface="Cambria Math" panose="02040503050406030204" pitchFamily="18" charset="0"/>
+                                <a:sym typeface="Wingdings" pitchFamily="2" charset="2"/>
+                              </a:rPr>
+                            </m:ctrlPr>
+                          </m:accPr>
+                          <m:e>
+                            <m:r>
+                              <a:rPr lang="en-US" altLang="ja-JP" sz="2000" b="0" i="1" smtClean="0">
+                                <a:latin typeface="Cambria Math" panose="02040503050406030204" pitchFamily="18" charset="0"/>
+                                <a:sym typeface="Wingdings" pitchFamily="2" charset="2"/>
+                              </a:rPr>
+                              <m:t>𝑦</m:t>
+                            </m:r>
+                          </m:e>
+                        </m:acc>
+                      </m:e>
+                      <m:sub>
+                        <m:r>
+                          <a:rPr lang="en-US" altLang="ja-JP" sz="2000" b="0" i="1" smtClean="0">
+                            <a:latin typeface="Cambria Math" panose="02040503050406030204" pitchFamily="18" charset="0"/>
+                            <a:sym typeface="Wingdings" pitchFamily="2" charset="2"/>
+                          </a:rPr>
+                          <m:t>𝐻𝑇</m:t>
+                        </m:r>
+                      </m:sub>
+                    </m:sSub>
+                    <m:r>
+                      <a:rPr lang="en-US" altLang="ja-JP" sz="2000" b="0" i="0" smtClean="0">
+                        <a:latin typeface="Cambria Math" panose="02040503050406030204" pitchFamily="18" charset="0"/>
+                        <a:sym typeface="Wingdings" pitchFamily="2" charset="2"/>
+                      </a:rPr>
+                      <m:t>−</m:t>
+                    </m:r>
+                  </m:oMath>
+                </a14:m>
+                <a:r>
+                  <a:rPr lang="en-US" altLang="ja-JP" sz="2000" dirty="0">
+                    <a:effectLst/>
+                    <a:latin typeface="Google Sans Text"/>
+                  </a:rPr>
+                  <a:t>1.96</a:t>
+                </a:r>
+                <a14:m>
+                  <m:oMath xmlns:m="http://schemas.openxmlformats.org/officeDocument/2006/math">
+                    <m:r>
+                      <a:rPr lang="en-US" altLang="ja-JP" sz="2000" i="1" smtClean="0">
+                        <a:effectLst/>
+                        <a:latin typeface="Cambria Math" panose="02040503050406030204" pitchFamily="18" charset="0"/>
+                        <a:ea typeface="Cambria Math" panose="02040503050406030204" pitchFamily="18" charset="0"/>
+                      </a:rPr>
+                      <m:t>×</m:t>
+                    </m:r>
+                    <m:r>
+                      <a:rPr lang="en-US" altLang="ja-JP" sz="2000" b="0" i="1" smtClean="0">
+                        <a:effectLst/>
+                        <a:latin typeface="Cambria Math" panose="02040503050406030204" pitchFamily="18" charset="0"/>
+                        <a:ea typeface="Cambria Math" panose="02040503050406030204" pitchFamily="18" charset="0"/>
+                      </a:rPr>
+                      <m:t>𝑆</m:t>
+                    </m:r>
+                    <m:d>
+                      <m:dPr>
+                        <m:ctrlPr>
+                          <a:rPr lang="en-US" altLang="ja-JP" sz="2000" b="0" i="1" smtClean="0">
+                            <a:effectLst/>
+                            <a:latin typeface="Cambria Math" panose="02040503050406030204" pitchFamily="18" charset="0"/>
+                            <a:ea typeface="Cambria Math" panose="02040503050406030204" pitchFamily="18" charset="0"/>
+                          </a:rPr>
+                        </m:ctrlPr>
+                      </m:dPr>
+                      <m:e>
+                        <m:sSub>
+                          <m:sSubPr>
+                            <m:ctrlPr>
+                              <a:rPr lang="en-US" altLang="ja-JP" sz="2000" i="1">
+                                <a:latin typeface="Cambria Math" panose="02040503050406030204" pitchFamily="18" charset="0"/>
+                                <a:sym typeface="Wingdings" pitchFamily="2" charset="2"/>
+                              </a:rPr>
+                            </m:ctrlPr>
+                          </m:sSubPr>
+                          <m:e>
+                            <m:acc>
+                              <m:accPr>
+                                <m:chr m:val="̅"/>
+                                <m:ctrlPr>
+                                  <a:rPr lang="en-US" altLang="ja-JP" sz="2000" i="1">
+                                    <a:latin typeface="Cambria Math" panose="02040503050406030204" pitchFamily="18" charset="0"/>
+                                    <a:sym typeface="Wingdings" pitchFamily="2" charset="2"/>
+                                  </a:rPr>
+                                </m:ctrlPr>
+                              </m:accPr>
+                              <m:e>
+                                <m:r>
+                                  <a:rPr lang="en-US" altLang="ja-JP" sz="2000" i="1">
+                                    <a:latin typeface="Cambria Math" panose="02040503050406030204" pitchFamily="18" charset="0"/>
+                                    <a:sym typeface="Wingdings" pitchFamily="2" charset="2"/>
+                                  </a:rPr>
+                                  <m:t>𝑦</m:t>
+                                </m:r>
+                              </m:e>
+                            </m:acc>
+                          </m:e>
+                          <m:sub>
+                            <m:r>
+                              <a:rPr lang="en-US" altLang="ja-JP" sz="2000" i="1">
+                                <a:latin typeface="Cambria Math" panose="02040503050406030204" pitchFamily="18" charset="0"/>
+                                <a:sym typeface="Wingdings" pitchFamily="2" charset="2"/>
+                              </a:rPr>
+                              <m:t>𝐻𝑇</m:t>
+                            </m:r>
+                          </m:sub>
+                        </m:sSub>
+                      </m:e>
+                    </m:d>
+                    <m:r>
+                      <a:rPr lang="en-US" altLang="ja-JP" sz="2000" b="0" i="1" smtClean="0">
+                        <a:effectLst/>
+                        <a:latin typeface="Cambria Math" panose="02040503050406030204" pitchFamily="18" charset="0"/>
+                        <a:ea typeface="Cambria Math" panose="02040503050406030204" pitchFamily="18" charset="0"/>
+                      </a:rPr>
+                      <m:t>,</m:t>
+                    </m:r>
+                  </m:oMath>
+                </a14:m>
+                <a:r>
+                  <a:rPr lang="en-US" altLang="ja-JP" sz="2000" dirty="0">
+                    <a:effectLst/>
+                    <a:latin typeface="Google Sans Text"/>
+                  </a:rPr>
+                  <a:t> </a:t>
+                </a:r>
+                <a14:m>
+                  <m:oMath xmlns:m="http://schemas.openxmlformats.org/officeDocument/2006/math">
+                    <m:sSub>
+                      <m:sSubPr>
+                        <m:ctrlPr>
+                          <a:rPr lang="en-US" altLang="ja-JP" sz="2000" i="1">
+                            <a:latin typeface="Cambria Math" panose="02040503050406030204" pitchFamily="18" charset="0"/>
+                            <a:sym typeface="Wingdings" pitchFamily="2" charset="2"/>
+                          </a:rPr>
+                        </m:ctrlPr>
+                      </m:sSubPr>
+                      <m:e>
+                        <m:acc>
+                          <m:accPr>
+                            <m:chr m:val="̅"/>
+                            <m:ctrlPr>
+                              <a:rPr lang="en-US" altLang="ja-JP" sz="2000" i="1">
+                                <a:latin typeface="Cambria Math" panose="02040503050406030204" pitchFamily="18" charset="0"/>
+                                <a:sym typeface="Wingdings" pitchFamily="2" charset="2"/>
+                              </a:rPr>
+                            </m:ctrlPr>
+                          </m:accPr>
+                          <m:e>
+                            <m:r>
+                              <a:rPr lang="en-US" altLang="ja-JP" sz="2000" i="1">
+                                <a:latin typeface="Cambria Math" panose="02040503050406030204" pitchFamily="18" charset="0"/>
+                                <a:sym typeface="Wingdings" pitchFamily="2" charset="2"/>
+                              </a:rPr>
+                              <m:t>𝑦</m:t>
+                            </m:r>
+                          </m:e>
+                        </m:acc>
+                      </m:e>
+                      <m:sub>
+                        <m:r>
+                          <a:rPr lang="en-US" altLang="ja-JP" sz="2000" i="1">
+                            <a:latin typeface="Cambria Math" panose="02040503050406030204" pitchFamily="18" charset="0"/>
+                            <a:sym typeface="Wingdings" pitchFamily="2" charset="2"/>
+                          </a:rPr>
+                          <m:t>𝐻𝑇</m:t>
+                        </m:r>
+                      </m:sub>
+                    </m:sSub>
+                    <m:r>
+                      <a:rPr lang="en-US" altLang="ja-JP" sz="2000" b="0" i="0" smtClean="0">
+                        <a:latin typeface="Cambria Math" panose="02040503050406030204" pitchFamily="18" charset="0"/>
+                        <a:sym typeface="Wingdings" pitchFamily="2" charset="2"/>
+                      </a:rPr>
+                      <m:t>+</m:t>
+                    </m:r>
+                  </m:oMath>
+                </a14:m>
+                <a:r>
+                  <a:rPr lang="en-US" altLang="ja-JP" sz="2000" dirty="0">
+                    <a:latin typeface="Google Sans Text"/>
+                  </a:rPr>
+                  <a:t>1.96</a:t>
+                </a:r>
+                <a14:m>
+                  <m:oMath xmlns:m="http://schemas.openxmlformats.org/officeDocument/2006/math">
+                    <m:r>
+                      <a:rPr lang="en-US" altLang="ja-JP" sz="2000" i="1">
+                        <a:latin typeface="Cambria Math" panose="02040503050406030204" pitchFamily="18" charset="0"/>
+                        <a:ea typeface="Cambria Math" panose="02040503050406030204" pitchFamily="18" charset="0"/>
+                      </a:rPr>
+                      <m:t>×</m:t>
+                    </m:r>
+                    <m:r>
+                      <a:rPr lang="en-US" altLang="ja-JP" sz="2000" i="1">
+                        <a:latin typeface="Cambria Math" panose="02040503050406030204" pitchFamily="18" charset="0"/>
+                        <a:ea typeface="Cambria Math" panose="02040503050406030204" pitchFamily="18" charset="0"/>
+                      </a:rPr>
+                      <m:t>𝑆</m:t>
+                    </m:r>
+                    <m:d>
+                      <m:dPr>
+                        <m:ctrlPr>
+                          <a:rPr lang="en-US" altLang="ja-JP" sz="2000" i="1">
+                            <a:latin typeface="Cambria Math" panose="02040503050406030204" pitchFamily="18" charset="0"/>
+                            <a:ea typeface="Cambria Math" panose="02040503050406030204" pitchFamily="18" charset="0"/>
+                          </a:rPr>
+                        </m:ctrlPr>
+                      </m:dPr>
+                      <m:e>
+                        <m:sSub>
+                          <m:sSubPr>
+                            <m:ctrlPr>
+                              <a:rPr lang="en-US" altLang="ja-JP" sz="2000" i="1">
+                                <a:latin typeface="Cambria Math" panose="02040503050406030204" pitchFamily="18" charset="0"/>
+                                <a:sym typeface="Wingdings" pitchFamily="2" charset="2"/>
+                              </a:rPr>
+                            </m:ctrlPr>
+                          </m:sSubPr>
+                          <m:e>
+                            <m:acc>
+                              <m:accPr>
+                                <m:chr m:val="̅"/>
+                                <m:ctrlPr>
+                                  <a:rPr lang="en-US" altLang="ja-JP" sz="2000" i="1">
+                                    <a:latin typeface="Cambria Math" panose="02040503050406030204" pitchFamily="18" charset="0"/>
+                                    <a:sym typeface="Wingdings" pitchFamily="2" charset="2"/>
+                                  </a:rPr>
+                                </m:ctrlPr>
+                              </m:accPr>
+                              <m:e>
+                                <m:r>
+                                  <a:rPr lang="en-US" altLang="ja-JP" sz="2000" i="1">
+                                    <a:latin typeface="Cambria Math" panose="02040503050406030204" pitchFamily="18" charset="0"/>
+                                    <a:sym typeface="Wingdings" pitchFamily="2" charset="2"/>
+                                  </a:rPr>
+                                  <m:t>𝑦</m:t>
+                                </m:r>
+                              </m:e>
+                            </m:acc>
+                          </m:e>
+                          <m:sub>
+                            <m:r>
+                              <a:rPr lang="en-US" altLang="ja-JP" sz="2000" i="1">
+                                <a:latin typeface="Cambria Math" panose="02040503050406030204" pitchFamily="18" charset="0"/>
+                                <a:sym typeface="Wingdings" pitchFamily="2" charset="2"/>
+                              </a:rPr>
+                              <m:t>𝐻𝑇</m:t>
+                            </m:r>
+                          </m:sub>
+                        </m:sSub>
+                      </m:e>
+                    </m:d>
+                    <m:r>
+                      <a:rPr lang="en-US" altLang="ja-JP" sz="2000" b="0" i="0" smtClean="0">
+                        <a:latin typeface="Cambria Math" panose="02040503050406030204" pitchFamily="18" charset="0"/>
+                        <a:sym typeface="Wingdings" pitchFamily="2" charset="2"/>
+                      </a:rPr>
+                      <m:t>]</m:t>
+                    </m:r>
+                  </m:oMath>
+                </a14:m>
+                <a:endParaRPr lang="en-US" altLang="ja-JP" sz="2000" dirty="0">
+                  <a:effectLst/>
+                  <a:latin typeface="Google Sans Text"/>
+                </a:endParaRPr>
+              </a:p>
+              <a:p>
+                <a:pPr>
+                  <a:lnSpc>
+                    <a:spcPct val="150000"/>
+                  </a:lnSpc>
+                </a:pPr>
+                <a:r>
+                  <a:rPr lang="en-US" altLang="ja-JP" sz="2000" dirty="0">
+                    <a:latin typeface="Google Sans Text"/>
+                  </a:rPr>
+                  <a:t>95%</a:t>
+                </a:r>
+                <a:r>
+                  <a:rPr lang="ja-JP" altLang="en-US" sz="2000">
+                    <a:latin typeface="Google Sans Text"/>
+                  </a:rPr>
+                  <a:t>又可表示為</a:t>
+                </a:r>
+                <a:r>
+                  <a:rPr lang="en-US" altLang="ja-JP" sz="2000" dirty="0">
+                    <a:latin typeface="Google Sans Text"/>
+                  </a:rPr>
+                  <a:t>1-5%</a:t>
+                </a:r>
+                <a:r>
+                  <a:rPr lang="ja-JP" altLang="en-US" sz="2000">
+                    <a:latin typeface="Google Sans Text"/>
+                  </a:rPr>
+                  <a:t>，</a:t>
+                </a:r>
+                <a:r>
+                  <a:rPr lang="en-US" altLang="ja-JP" sz="2000" dirty="0">
+                    <a:latin typeface="Google Sans Text"/>
+                  </a:rPr>
+                  <a:t>5%</a:t>
+                </a:r>
+                <a:r>
+                  <a:rPr lang="ja-JP" altLang="en-US" sz="2000">
+                    <a:latin typeface="Google Sans Text"/>
+                  </a:rPr>
+                  <a:t>被稱為</a:t>
+                </a:r>
+                <a14:m>
+                  <m:oMath xmlns:m="http://schemas.openxmlformats.org/officeDocument/2006/math">
+                    <m:r>
+                      <a:rPr lang="ja-JP" altLang="en-US" sz="2000" i="1" smtClean="0">
+                        <a:latin typeface="Cambria Math" panose="02040503050406030204" pitchFamily="18" charset="0"/>
+                      </a:rPr>
+                      <m:t>𝛼</m:t>
+                    </m:r>
+                  </m:oMath>
+                </a14:m>
+                <a:r>
+                  <a:rPr lang="ja-JP" altLang="en-US" sz="2000">
+                    <a:latin typeface="Google Sans Text"/>
+                  </a:rPr>
+                  <a:t>，也就是容許有</a:t>
+                </a:r>
+                <a:r>
+                  <a:rPr lang="en-US" altLang="ja-JP" sz="2000" dirty="0">
+                    <a:latin typeface="Google Sans Text"/>
+                  </a:rPr>
+                  <a:t>5%</a:t>
+                </a:r>
+                <a:r>
+                  <a:rPr lang="ja-JP" altLang="en-US" sz="2000">
+                    <a:latin typeface="Google Sans Text"/>
+                  </a:rPr>
+                  <a:t>的機會，這個區間沒有包括母體真正的平均值。</a:t>
+                </a:r>
+                <a:endParaRPr lang="en-US" altLang="ja-JP" sz="2000" dirty="0">
+                  <a:latin typeface="Google Sans Text"/>
+                </a:endParaRPr>
+              </a:p>
+              <a:p>
+                <a:pPr>
+                  <a:lnSpc>
+                    <a:spcPct val="150000"/>
+                  </a:lnSpc>
+                </a:pPr>
+                <a:r>
+                  <a:rPr lang="ja-JP" altLang="en-US" sz="2000">
+                    <a:effectLst/>
+                    <a:latin typeface="Google Sans Text"/>
+                  </a:rPr>
+                  <a:t>雖然我們不知道母體的變異數</a:t>
+                </a:r>
+                <a14:m>
+                  <m:oMath xmlns:m="http://schemas.openxmlformats.org/officeDocument/2006/math">
+                    <m:r>
+                      <a:rPr lang="en-US" altLang="ja-JP" sz="2000" b="0" i="1" smtClean="0">
+                        <a:effectLst/>
+                        <a:latin typeface="Cambria Math" panose="02040503050406030204" pitchFamily="18" charset="0"/>
+                        <a:ea typeface="Cambria Math" panose="02040503050406030204" pitchFamily="18" charset="0"/>
+                      </a:rPr>
+                      <m:t>𝑆</m:t>
+                    </m:r>
+                    <m:d>
+                      <m:dPr>
+                        <m:ctrlPr>
+                          <a:rPr lang="en-US" altLang="ja-JP" sz="2000" b="0" i="1" smtClean="0">
+                            <a:effectLst/>
+                            <a:latin typeface="Cambria Math" panose="02040503050406030204" pitchFamily="18" charset="0"/>
+                            <a:ea typeface="Cambria Math" panose="02040503050406030204" pitchFamily="18" charset="0"/>
+                          </a:rPr>
+                        </m:ctrlPr>
+                      </m:dPr>
+                      <m:e>
+                        <m:sSub>
+                          <m:sSubPr>
+                            <m:ctrlPr>
+                              <a:rPr lang="en-US" altLang="ja-JP" sz="2000" i="1">
+                                <a:latin typeface="Cambria Math" panose="02040503050406030204" pitchFamily="18" charset="0"/>
+                                <a:sym typeface="Wingdings" pitchFamily="2" charset="2"/>
+                              </a:rPr>
+                            </m:ctrlPr>
+                          </m:sSubPr>
+                          <m:e>
+                            <m:acc>
+                              <m:accPr>
+                                <m:chr m:val="̅"/>
+                                <m:ctrlPr>
+                                  <a:rPr lang="en-US" altLang="ja-JP" sz="2000" i="1">
+                                    <a:latin typeface="Cambria Math" panose="02040503050406030204" pitchFamily="18" charset="0"/>
+                                    <a:sym typeface="Wingdings" pitchFamily="2" charset="2"/>
+                                  </a:rPr>
+                                </m:ctrlPr>
+                              </m:accPr>
+                              <m:e>
+                                <m:r>
+                                  <a:rPr lang="en-US" altLang="ja-JP" sz="2000" i="1">
+                                    <a:latin typeface="Cambria Math" panose="02040503050406030204" pitchFamily="18" charset="0"/>
+                                    <a:sym typeface="Wingdings" pitchFamily="2" charset="2"/>
+                                  </a:rPr>
+                                  <m:t>𝑦</m:t>
+                                </m:r>
+                              </m:e>
+                            </m:acc>
+                          </m:e>
+                          <m:sub>
+                            <m:r>
+                              <a:rPr lang="en-US" altLang="ja-JP" sz="2000" i="1">
+                                <a:latin typeface="Cambria Math" panose="02040503050406030204" pitchFamily="18" charset="0"/>
+                                <a:sym typeface="Wingdings" pitchFamily="2" charset="2"/>
+                              </a:rPr>
+                              <m:t>𝐻𝑇</m:t>
+                            </m:r>
+                          </m:sub>
+                        </m:sSub>
+                      </m:e>
+                    </m:d>
+                    <m:r>
+                      <a:rPr lang="en-US" altLang="ja-JP" sz="2000" i="1">
+                        <a:latin typeface="Cambria Math" panose="02040503050406030204" pitchFamily="18" charset="0"/>
+                        <a:sym typeface="Wingdings" pitchFamily="2" charset="2"/>
+                      </a:rPr>
+                      <m:t> </m:t>
+                    </m:r>
+                  </m:oMath>
+                </a14:m>
+                <a:r>
+                  <a:rPr lang="ja-JP" altLang="en-US" sz="2000">
+                    <a:effectLst/>
+                    <a:latin typeface="Google Sans Text"/>
+                  </a:rPr>
+                  <a:t>，</a:t>
+                </a:r>
+                <a:r>
+                  <a:rPr lang="ja-JP" altLang="en-US" sz="2000">
+                    <a:latin typeface="Google Sans Text"/>
+                  </a:rPr>
+                  <a:t>但是可以用樣本的變異數</a:t>
+                </a:r>
+                <a14:m>
+                  <m:oMath xmlns:m="http://schemas.openxmlformats.org/officeDocument/2006/math">
+                    <m:r>
+                      <a:rPr lang="en-US" altLang="ja-JP" sz="2000" b="0" i="1" smtClean="0">
+                        <a:latin typeface="Cambria Math" panose="02040503050406030204" pitchFamily="18" charset="0"/>
+                        <a:ea typeface="Cambria Math" panose="02040503050406030204" pitchFamily="18" charset="0"/>
+                      </a:rPr>
+                      <m:t>𝑠</m:t>
+                    </m:r>
+                    <m:d>
+                      <m:dPr>
+                        <m:ctrlPr>
+                          <a:rPr lang="en-US" altLang="ja-JP" sz="2000" i="1">
+                            <a:latin typeface="Cambria Math" panose="02040503050406030204" pitchFamily="18" charset="0"/>
+                            <a:ea typeface="Cambria Math" panose="02040503050406030204" pitchFamily="18" charset="0"/>
+                          </a:rPr>
+                        </m:ctrlPr>
+                      </m:dPr>
+                      <m:e>
+                        <m:sSub>
+                          <m:sSubPr>
+                            <m:ctrlPr>
+                              <a:rPr lang="en-US" altLang="ja-JP" sz="2000" i="1">
+                                <a:latin typeface="Cambria Math" panose="02040503050406030204" pitchFamily="18" charset="0"/>
+                                <a:sym typeface="Wingdings" pitchFamily="2" charset="2"/>
+                              </a:rPr>
+                            </m:ctrlPr>
+                          </m:sSubPr>
+                          <m:e>
+                            <m:acc>
+                              <m:accPr>
+                                <m:chr m:val="̅"/>
+                                <m:ctrlPr>
+                                  <a:rPr lang="en-US" altLang="ja-JP" sz="2000" i="1">
+                                    <a:latin typeface="Cambria Math" panose="02040503050406030204" pitchFamily="18" charset="0"/>
+                                    <a:sym typeface="Wingdings" pitchFamily="2" charset="2"/>
+                                  </a:rPr>
+                                </m:ctrlPr>
+                              </m:accPr>
+                              <m:e>
+                                <m:r>
+                                  <a:rPr lang="en-US" altLang="ja-JP" sz="2000" i="1">
+                                    <a:latin typeface="Cambria Math" panose="02040503050406030204" pitchFamily="18" charset="0"/>
+                                    <a:sym typeface="Wingdings" pitchFamily="2" charset="2"/>
+                                  </a:rPr>
+                                  <m:t>𝑦</m:t>
+                                </m:r>
+                              </m:e>
+                            </m:acc>
+                          </m:e>
+                          <m:sub>
+                            <m:r>
+                              <a:rPr lang="en-US" altLang="ja-JP" sz="2000" i="1">
+                                <a:latin typeface="Cambria Math" panose="02040503050406030204" pitchFamily="18" charset="0"/>
+                                <a:sym typeface="Wingdings" pitchFamily="2" charset="2"/>
+                              </a:rPr>
+                              <m:t>𝐻𝑇</m:t>
+                            </m:r>
+                          </m:sub>
+                        </m:sSub>
+                      </m:e>
+                    </m:d>
+                  </m:oMath>
+                </a14:m>
+                <a:r>
+                  <a:rPr lang="ja-JP" altLang="en-US" sz="2000">
+                    <a:latin typeface="Google Sans Text"/>
+                  </a:rPr>
+                  <a:t>估計母體的變異數。</a:t>
+                </a:r>
+                <a14:m>
+                  <m:oMath xmlns:m="http://schemas.openxmlformats.org/officeDocument/2006/math">
+                    <m:sSup>
+                      <m:sSupPr>
+                        <m:ctrlPr>
+                          <a:rPr lang="en-US" altLang="ja-JP" sz="2000" i="1" smtClean="0">
+                            <a:latin typeface="Cambria Math" panose="02040503050406030204" pitchFamily="18" charset="0"/>
+                          </a:rPr>
+                        </m:ctrlPr>
+                      </m:sSupPr>
+                      <m:e>
+                        <m:r>
+                          <a:rPr lang="en-US" altLang="ja-JP" sz="2000" b="0" i="1" smtClean="0">
+                            <a:latin typeface="Cambria Math" panose="02040503050406030204" pitchFamily="18" charset="0"/>
+                          </a:rPr>
+                          <m:t>𝑠</m:t>
+                        </m:r>
+                      </m:e>
+                      <m:sup>
+                        <m:r>
+                          <a:rPr lang="en-US" altLang="ja-JP" sz="2000" b="0" i="1" smtClean="0">
+                            <a:latin typeface="Cambria Math" panose="02040503050406030204" pitchFamily="18" charset="0"/>
+                          </a:rPr>
+                          <m:t>2</m:t>
+                        </m:r>
+                      </m:sup>
+                    </m:sSup>
+                    <m:r>
+                      <a:rPr lang="en-US" altLang="ja-JP" sz="2000" b="0" i="1" smtClean="0">
+                        <a:latin typeface="Cambria Math" panose="02040503050406030204" pitchFamily="18" charset="0"/>
+                      </a:rPr>
+                      <m:t>=</m:t>
+                    </m:r>
+                    <m:f>
+                      <m:fPr>
+                        <m:ctrlPr>
+                          <a:rPr lang="en-US" altLang="ja-JP" sz="2000" b="0" i="1" smtClean="0">
+                            <a:latin typeface="Cambria Math" panose="02040503050406030204" pitchFamily="18" charset="0"/>
+                          </a:rPr>
+                        </m:ctrlPr>
+                      </m:fPr>
+                      <m:num>
+                        <m:r>
+                          <a:rPr lang="en-US" altLang="ja-JP" sz="2000" b="0" i="1" smtClean="0">
+                            <a:latin typeface="Cambria Math" panose="02040503050406030204" pitchFamily="18" charset="0"/>
+                          </a:rPr>
+                          <m:t>1</m:t>
+                        </m:r>
+                      </m:num>
+                      <m:den>
+                        <m:r>
+                          <a:rPr lang="en-US" altLang="ja-JP" sz="2000" b="0" i="1" smtClean="0">
+                            <a:latin typeface="Cambria Math" panose="02040503050406030204" pitchFamily="18" charset="0"/>
+                          </a:rPr>
+                          <m:t>𝑛</m:t>
+                        </m:r>
+                        <m:r>
+                          <a:rPr lang="en-US" altLang="ja-JP" sz="2000" b="0" i="1" smtClean="0">
+                            <a:latin typeface="Cambria Math" panose="02040503050406030204" pitchFamily="18" charset="0"/>
+                          </a:rPr>
+                          <m:t>−1</m:t>
+                        </m:r>
+                      </m:den>
+                    </m:f>
+                    <m:nary>
+                      <m:naryPr>
+                        <m:chr m:val="∑"/>
+                        <m:ctrlPr>
+                          <a:rPr lang="en-US" altLang="ja-JP" sz="2000" b="0" i="1" smtClean="0">
+                            <a:latin typeface="Cambria Math" panose="02040503050406030204" pitchFamily="18" charset="0"/>
+                          </a:rPr>
+                        </m:ctrlPr>
+                      </m:naryPr>
+                      <m:sub>
+                        <m:r>
+                          <m:rPr>
+                            <m:brk m:alnAt="23"/>
+                          </m:rPr>
+                          <a:rPr lang="en-US" altLang="ja-JP" sz="2000" b="0" i="1" smtClean="0">
+                            <a:latin typeface="Cambria Math" panose="02040503050406030204" pitchFamily="18" charset="0"/>
+                          </a:rPr>
+                          <m:t>𝑖</m:t>
+                        </m:r>
+                        <m:r>
+                          <a:rPr lang="en-US" altLang="ja-JP" sz="2000" b="0" i="1" smtClean="0">
+                            <a:latin typeface="Cambria Math" panose="02040503050406030204" pitchFamily="18" charset="0"/>
+                          </a:rPr>
+                          <m:t>=1</m:t>
+                        </m:r>
+                      </m:sub>
+                      <m:sup>
+                        <m:r>
+                          <a:rPr lang="en-US" altLang="ja-JP" sz="2000" b="0" i="1" smtClean="0">
+                            <a:latin typeface="Cambria Math" panose="02040503050406030204" pitchFamily="18" charset="0"/>
+                          </a:rPr>
+                          <m:t>𝑁</m:t>
+                        </m:r>
+                      </m:sup>
+                      <m:e>
+                        <m:sSup>
+                          <m:sSupPr>
+                            <m:ctrlPr>
+                              <a:rPr lang="en-US" altLang="ja-JP" sz="2000" b="0" i="1" smtClean="0">
+                                <a:latin typeface="Cambria Math" panose="02040503050406030204" pitchFamily="18" charset="0"/>
+                              </a:rPr>
+                            </m:ctrlPr>
+                          </m:sSupPr>
+                          <m:e>
+                            <m:r>
+                              <a:rPr lang="en-US" altLang="ja-JP" sz="2000" b="0" i="1" smtClean="0">
+                                <a:latin typeface="Cambria Math" panose="02040503050406030204" pitchFamily="18" charset="0"/>
+                              </a:rPr>
+                              <m:t>(</m:t>
+                            </m:r>
+                            <m:sSubSup>
+                              <m:sSubSupPr>
+                                <m:ctrlPr>
+                                  <a:rPr lang="en-US" altLang="ja-JP" sz="2000" b="0" i="1" smtClean="0">
+                                    <a:latin typeface="Cambria Math" panose="02040503050406030204" pitchFamily="18" charset="0"/>
+                                  </a:rPr>
+                                </m:ctrlPr>
+                              </m:sSubSupPr>
+                              <m:e>
+                                <m:r>
+                                  <a:rPr lang="en-US" altLang="ja-JP" sz="2000" b="0" i="1" smtClean="0">
+                                    <a:latin typeface="Cambria Math" panose="02040503050406030204" pitchFamily="18" charset="0"/>
+                                  </a:rPr>
+                                  <m:t>𝑦</m:t>
+                                </m:r>
+                              </m:e>
+                              <m:sub>
+                                <m:r>
+                                  <a:rPr lang="en-US" altLang="ja-JP" sz="2000" b="0" i="1" smtClean="0">
+                                    <a:latin typeface="Cambria Math" panose="02040503050406030204" pitchFamily="18" charset="0"/>
+                                  </a:rPr>
+                                  <m:t>𝑖</m:t>
+                                </m:r>
+                              </m:sub>
+                              <m:sup/>
+                            </m:sSubSup>
+                            <m:r>
+                              <a:rPr lang="en-US" altLang="ja-JP" sz="2000" b="0" i="1" smtClean="0">
+                                <a:latin typeface="Cambria Math" panose="02040503050406030204" pitchFamily="18" charset="0"/>
+                              </a:rPr>
+                              <m:t>−</m:t>
+                            </m:r>
+                            <m:acc>
+                              <m:accPr>
+                                <m:chr m:val="̅"/>
+                                <m:ctrlPr>
+                                  <a:rPr lang="en-US" altLang="ja-JP" sz="2000" b="0" i="1" smtClean="0">
+                                    <a:latin typeface="Cambria Math" panose="02040503050406030204" pitchFamily="18" charset="0"/>
+                                  </a:rPr>
+                                </m:ctrlPr>
+                              </m:accPr>
+                              <m:e>
+                                <m:r>
+                                  <a:rPr lang="en-US" altLang="ja-JP" sz="2000" b="0" i="1" smtClean="0">
+                                    <a:latin typeface="Cambria Math" panose="02040503050406030204" pitchFamily="18" charset="0"/>
+                                  </a:rPr>
+                                  <m:t>𝑦</m:t>
+                                </m:r>
+                              </m:e>
+                            </m:acc>
+                            <m:r>
+                              <a:rPr lang="en-US" altLang="ja-JP" sz="2000" b="0" i="1" smtClean="0">
+                                <a:latin typeface="Cambria Math" panose="02040503050406030204" pitchFamily="18" charset="0"/>
+                              </a:rPr>
+                              <m:t>)</m:t>
+                            </m:r>
+                          </m:e>
+                          <m:sup>
+                            <m:r>
+                              <a:rPr lang="en-US" altLang="ja-JP" sz="2000" b="0" i="1" smtClean="0">
+                                <a:latin typeface="Cambria Math" panose="02040503050406030204" pitchFamily="18" charset="0"/>
+                              </a:rPr>
+                              <m:t>2</m:t>
+                            </m:r>
+                          </m:sup>
+                        </m:sSup>
+                      </m:e>
+                    </m:nary>
+                  </m:oMath>
+                </a14:m>
+                <a:endParaRPr lang="en-US" altLang="ja-JP" sz="2000" dirty="0">
+                  <a:latin typeface="Google Sans Text"/>
+                </a:endParaRPr>
+              </a:p>
+              <a:p>
+                <a:pPr marL="0" indent="0">
+                  <a:lnSpc>
+                    <a:spcPct val="150000"/>
+                  </a:lnSpc>
+                  <a:buNone/>
+                </a:pPr>
+                <a:endParaRPr lang="en-US" altLang="ja-JP" sz="2000" dirty="0">
+                  <a:effectLst/>
+                  <a:latin typeface="Google Sans Text"/>
+                </a:endParaRPr>
+              </a:p>
+              <a:p>
+                <a:pPr>
+                  <a:lnSpc>
+                    <a:spcPct val="150000"/>
+                  </a:lnSpc>
+                </a:pPr>
+                <a:endParaRPr lang="ja-JP" altLang="en-US" sz="2000">
+                  <a:effectLst/>
+                  <a:latin typeface="Google Sans Text"/>
+                </a:endParaRPr>
+              </a:p>
+              <a:p>
+                <a:endParaRPr lang="en-US" dirty="0"/>
+              </a:p>
+            </p:txBody>
+          </p:sp>
+        </mc:Choice>
+        <mc:Fallback xmlns="">
+          <p:sp>
+            <p:nvSpPr>
+              <p:cNvPr id="3" name="Content Placeholder 2">
+                <a:extLst>
+                  <a:ext uri="{FF2B5EF4-FFF2-40B4-BE49-F238E27FC236}">
+                    <a16:creationId xmlns:a16="http://schemas.microsoft.com/office/drawing/2014/main" id="{659579A7-244A-1B4E-A6EF-9B1F87EA3242}"/>
+                  </a:ext>
+                </a:extLst>
+              </p:cNvPr>
+              <p:cNvSpPr>
+                <a:spLocks noGrp="1" noRot="1" noChangeAspect="1" noMove="1" noResize="1" noEditPoints="1" noAdjustHandles="1" noChangeArrowheads="1" noChangeShapeType="1" noTextEdit="1"/>
+              </p:cNvSpPr>
+              <p:nvPr>
+                <p:ph idx="1"/>
+              </p:nvPr>
+            </p:nvSpPr>
+            <p:spPr>
+              <a:blipFill>
+                <a:blip r:embed="rId2"/>
+                <a:stretch>
+                  <a:fillRect l="-603" r="-2895"/>
+                </a:stretch>
+              </a:blipFill>
+            </p:spPr>
+            <p:txBody>
+              <a:bodyPr/>
+              <a:lstStyle/>
+              <a:p>
+                <a:r>
+                  <a:rPr lang="en-US">
+                    <a:noFill/>
+                  </a:rPr>
+                  <a:t> </a:t>
+                </a:r>
+              </a:p>
+            </p:txBody>
+          </p:sp>
+        </mc:Fallback>
+      </mc:AlternateContent>
+      <p:sp>
+        <p:nvSpPr>
+          <p:cNvPr id="4" name="Slide Number Placeholder 3">
+            <a:extLst>
+              <a:ext uri="{FF2B5EF4-FFF2-40B4-BE49-F238E27FC236}">
+                <a16:creationId xmlns:a16="http://schemas.microsoft.com/office/drawing/2014/main" id="{49069B59-1518-4C2D-ABA7-09A5F449F58E}"/>
+              </a:ext>
+            </a:extLst>
+          </p:cNvPr>
+          <p:cNvSpPr>
+            <a:spLocks noGrp="1"/>
+          </p:cNvSpPr>
+          <p:nvPr>
+            <p:ph type="sldNum" sz="quarter" idx="12"/>
+          </p:nvPr>
+        </p:nvSpPr>
+        <p:spPr/>
+        <p:txBody>
+          <a:bodyPr/>
+          <a:lstStyle/>
+          <a:p>
+            <a:fld id="{34E21383-B02B-694B-B2AD-A967203CDE86}" type="slidenum">
+              <a:rPr lang="en-US" smtClean="0"/>
+              <a:t>16</a:t>
+            </a:fld>
+            <a:endParaRPr lang="en-US"/>
+          </a:p>
+        </p:txBody>
+      </p:sp>
+    </p:spTree>
+    <p:extLst>
+      <p:ext uri="{BB962C8B-B14F-4D97-AF65-F5344CB8AC3E}">
+        <p14:creationId xmlns:p14="http://schemas.microsoft.com/office/powerpoint/2010/main" val="1719834507"/>
+      </p:ext>
+    </p:extLst>
+  </p:cSld>
+  <p:clrMapOvr>
+    <a:masterClrMapping/>
+  </p:clrMapOvr>
+</p:sld>
+</file>
+
+<file path=ppt/slides/slide17.xml><?xml version="1.0" encoding="utf-8"?>
+<p:sld xmlns:a="http://schemas.openxmlformats.org/drawingml/2006/main" xmlns:r="http://schemas.openxmlformats.org/officeDocument/2006/relationships" xmlns:p="http://schemas.openxmlformats.org/presentationml/2006/main">
+  <p:cSld>
+    <p:spTree>
+      <p:nvGrpSpPr>
+        <p:cNvPr id="1" name=""/>
+        <p:cNvGrpSpPr/>
+        <p:nvPr/>
+      </p:nvGrpSpPr>
+      <p:grpSpPr>
+        <a:xfrm>
+          <a:off x="0" y="0"/>
+          <a:ext cx="0" cy="0"/>
+          <a:chOff x="0" y="0"/>
+          <a:chExt cx="0" cy="0"/>
+        </a:xfrm>
+      </p:grpSpPr>
+      <p:sp>
+        <p:nvSpPr>
+          <p:cNvPr id="2" name="Title 1">
+            <a:extLst>
+              <a:ext uri="{FF2B5EF4-FFF2-40B4-BE49-F238E27FC236}">
+                <a16:creationId xmlns:a16="http://schemas.microsoft.com/office/drawing/2014/main" id="{31C60B46-553E-18AD-A4BE-E745BAB0CAA0}"/>
+              </a:ext>
+            </a:extLst>
+          </p:cNvPr>
+          <p:cNvSpPr>
+            <a:spLocks noGrp="1"/>
+          </p:cNvSpPr>
+          <p:nvPr>
+            <p:ph type="title"/>
+          </p:nvPr>
+        </p:nvSpPr>
+        <p:spPr/>
+        <p:txBody>
+          <a:bodyPr/>
+          <a:lstStyle/>
+          <a:p>
+            <a:r>
+              <a:rPr lang="ja-JP" altLang="en-US"/>
+              <a:t>簡單隨機抽樣（一）</a:t>
+            </a:r>
+            <a:endParaRPr lang="en-US" dirty="0"/>
+          </a:p>
+        </p:txBody>
+      </p:sp>
+      <mc:AlternateContent xmlns:mc="http://schemas.openxmlformats.org/markup-compatibility/2006" xmlns:a14="http://schemas.microsoft.com/office/drawing/2010/main">
+        <mc:Choice Requires="a14">
+          <p:sp>
+            <p:nvSpPr>
+              <p:cNvPr id="3" name="Content Placeholder 2">
+                <a:extLst>
+                  <a:ext uri="{FF2B5EF4-FFF2-40B4-BE49-F238E27FC236}">
+                    <a16:creationId xmlns:a16="http://schemas.microsoft.com/office/drawing/2014/main" id="{659579A7-244A-1B4E-A6EF-9B1F87EA3242}"/>
+                  </a:ext>
+                </a:extLst>
+              </p:cNvPr>
+              <p:cNvSpPr>
+                <a:spLocks noGrp="1"/>
+              </p:cNvSpPr>
+              <p:nvPr>
+                <p:ph idx="1"/>
+              </p:nvPr>
+            </p:nvSpPr>
+            <p:spPr/>
+            <p:txBody>
+              <a:bodyPr>
+                <a:normAutofit lnSpcReduction="10000"/>
+              </a:bodyPr>
+              <a:lstStyle/>
+              <a:p>
+                <a:pPr>
+                  <a:lnSpc>
+                    <a:spcPct val="150000"/>
+                  </a:lnSpc>
+                </a:pPr>
+                <a:r>
+                  <a:rPr lang="ja-JP" altLang="en-US" sz="2000">
+                    <a:latin typeface="Google Sans Text"/>
+                  </a:rPr>
+                  <a:t>在一個包含 </a:t>
+                </a:r>
+                <a:r>
+                  <a:rPr lang="en-US" altLang="ja-JP" sz="2000" i="1" dirty="0">
+                    <a:latin typeface="Times New Roman" panose="02020603050405020304" pitchFamily="18" charset="0"/>
+                    <a:cs typeface="Times New Roman" panose="02020603050405020304" pitchFamily="18" charset="0"/>
+                  </a:rPr>
+                  <a:t>N </a:t>
+                </a:r>
+                <a:r>
+                  <a:rPr lang="ja-JP" altLang="en-US" sz="2000">
+                    <a:latin typeface="Google Sans Text"/>
+                  </a:rPr>
+                  <a:t>個個體的母體中，</a:t>
+                </a:r>
+                <a:r>
+                  <a:rPr lang="ja-JP" altLang="en-US" sz="2000"/>
+                  <a:t>若每一組大小為 </a:t>
+                </a:r>
+                <a:r>
+                  <a:rPr lang="en-US" altLang="ja-JP" sz="2000" i="1" dirty="0">
+                    <a:latin typeface="Times New Roman" panose="02020603050405020304" pitchFamily="18" charset="0"/>
+                    <a:cs typeface="Times New Roman" panose="02020603050405020304" pitchFamily="18" charset="0"/>
+                  </a:rPr>
+                  <a:t>n</a:t>
+                </a:r>
+                <a:r>
+                  <a:rPr lang="ja-JP" altLang="en-US" sz="2000"/>
+                  <a:t>的可能樣本被抽中的機率都相等，</a:t>
+                </a:r>
+                <a:r>
+                  <a:rPr lang="ja-JP" altLang="en-US" sz="2000">
+                    <a:latin typeface="Google Sans Text"/>
+                  </a:rPr>
+                  <a:t>每一個體 </a:t>
+                </a:r>
+                <a:r>
+                  <a:rPr lang="en-US" altLang="ja-JP" sz="2000" i="1" dirty="0">
+                    <a:latin typeface="Times New Roman" panose="02020603050405020304" pitchFamily="18" charset="0"/>
+                    <a:cs typeface="Times New Roman" panose="02020603050405020304" pitchFamily="18" charset="0"/>
+                  </a:rPr>
+                  <a:t>k</a:t>
+                </a:r>
+                <a:r>
+                  <a:rPr lang="en-US" altLang="ja-JP" sz="2000" dirty="0">
+                    <a:latin typeface="Google Sans Text"/>
+                  </a:rPr>
+                  <a:t> </a:t>
+                </a:r>
+                <a:r>
+                  <a:rPr lang="ja-JP" altLang="en-US" sz="2000">
+                    <a:latin typeface="Google Sans Text"/>
+                  </a:rPr>
+                  <a:t>的被抽中的機率都相等，稱為簡單隨機抽樣</a:t>
+                </a:r>
+                <a:r>
+                  <a:rPr lang="en-US" altLang="ja-JP" sz="2000" dirty="0">
+                    <a:latin typeface="Google Sans Text"/>
+                  </a:rPr>
+                  <a:t>(SRS)</a:t>
+                </a:r>
+                <a:r>
+                  <a:rPr lang="ja-JP" altLang="en-US" sz="2000">
+                    <a:latin typeface="Google Sans Text"/>
+                  </a:rPr>
+                  <a:t>。</a:t>
+                </a:r>
+                <a:r>
+                  <a:rPr lang="ja-JP" altLang="en-US" sz="2000"/>
+                  <a:t> 對於所有個體</a:t>
+                </a:r>
+                <a:r>
+                  <a:rPr lang="en-US" altLang="ja-JP" sz="2000" i="1" dirty="0">
+                    <a:latin typeface="Times New Roman" panose="02020603050405020304" pitchFamily="18" charset="0"/>
+                    <a:cs typeface="Times New Roman" panose="02020603050405020304" pitchFamily="18" charset="0"/>
+                  </a:rPr>
+                  <a:t>k</a:t>
+                </a:r>
+                <a:r>
+                  <a:rPr lang="ja-JP" altLang="en-US" sz="2000" i="1">
+                    <a:latin typeface="Times New Roman" panose="02020603050405020304" pitchFamily="18" charset="0"/>
+                    <a:cs typeface="Times New Roman" panose="02020603050405020304" pitchFamily="18" charset="0"/>
+                  </a:rPr>
+                  <a:t>，</a:t>
+                </a:r>
+                <a:r>
+                  <a:rPr lang="ja-JP" altLang="en-US" sz="2000">
+                    <a:latin typeface="Google Sans Text"/>
+                  </a:rPr>
+                  <a:t>包含機率是</a:t>
+                </a:r>
+                <a14:m>
+                  <m:oMath xmlns:m="http://schemas.openxmlformats.org/officeDocument/2006/math">
+                    <m:sSub>
+                      <m:sSubPr>
+                        <m:ctrlPr>
+                          <a:rPr lang="en-US" altLang="ja-JP" sz="2000" i="1" smtClean="0">
+                            <a:latin typeface="Cambria Math" panose="02040503050406030204" pitchFamily="18" charset="0"/>
+                          </a:rPr>
+                        </m:ctrlPr>
+                      </m:sSubPr>
+                      <m:e>
+                        <m:r>
+                          <a:rPr lang="en-US" altLang="ja-JP" sz="2000" i="1" smtClean="0">
+                            <a:latin typeface="Cambria Math" panose="02040503050406030204" pitchFamily="18" charset="0"/>
+                            <a:ea typeface="Cambria Math" panose="02040503050406030204" pitchFamily="18" charset="0"/>
+                          </a:rPr>
+                          <m:t>𝜋</m:t>
+                        </m:r>
+                      </m:e>
+                      <m:sub>
+                        <m:r>
+                          <a:rPr lang="en-US" altLang="ja-JP" sz="2000" b="0" i="1" smtClean="0">
+                            <a:latin typeface="Cambria Math" panose="02040503050406030204" pitchFamily="18" charset="0"/>
+                          </a:rPr>
+                          <m:t>𝑘</m:t>
+                        </m:r>
+                      </m:sub>
+                    </m:sSub>
+                    <m:r>
+                      <a:rPr lang="en-US" altLang="ja-JP" sz="2000" b="0" i="1" smtClean="0">
+                        <a:latin typeface="Cambria Math" panose="02040503050406030204" pitchFamily="18" charset="0"/>
+                      </a:rPr>
+                      <m:t>=</m:t>
+                    </m:r>
+                    <m:f>
+                      <m:fPr>
+                        <m:ctrlPr>
+                          <a:rPr lang="en-US" altLang="ja-JP" sz="2000" b="0" i="1" smtClean="0">
+                            <a:latin typeface="Cambria Math" panose="02040503050406030204" pitchFamily="18" charset="0"/>
+                          </a:rPr>
+                        </m:ctrlPr>
+                      </m:fPr>
+                      <m:num>
+                        <m:r>
+                          <a:rPr lang="en-US" altLang="ja-JP" sz="2000" b="0" i="1" smtClean="0">
+                            <a:latin typeface="Cambria Math" panose="02040503050406030204" pitchFamily="18" charset="0"/>
+                          </a:rPr>
+                          <m:t>𝑛</m:t>
+                        </m:r>
+                      </m:num>
+                      <m:den>
+                        <m:r>
+                          <a:rPr lang="en-US" altLang="ja-JP" sz="2000" b="0" i="1" smtClean="0">
+                            <a:latin typeface="Cambria Math" panose="02040503050406030204" pitchFamily="18" charset="0"/>
+                          </a:rPr>
+                          <m:t>𝑁</m:t>
+                        </m:r>
+                      </m:den>
+                    </m:f>
+                  </m:oMath>
+                </a14:m>
+                <a:r>
+                  <a:rPr lang="ja-JP" altLang="en-US" sz="2000" dirty="0">
+                    <a:latin typeface="Google Sans Text"/>
+                  </a:rPr>
+                  <a:t>。</a:t>
+                </a:r>
+                <a:endParaRPr lang="en-US" altLang="ja-JP" sz="2000" dirty="0">
+                  <a:latin typeface="Google Sans Text"/>
+                </a:endParaRPr>
+              </a:p>
+              <a:p>
+                <a:pPr>
+                  <a:lnSpc>
+                    <a:spcPct val="150000"/>
+                  </a:lnSpc>
+                </a:pPr>
+                <a:r>
+                  <a:rPr lang="en-US" altLang="ja-JP" sz="2000" dirty="0">
+                    <a:latin typeface="Google Sans Text"/>
+                  </a:rPr>
+                  <a:t>H-V</a:t>
+                </a:r>
+                <a:r>
+                  <a:rPr lang="ja-JP" altLang="en-US" sz="2000">
+                    <a:latin typeface="Google Sans Text"/>
+                  </a:rPr>
+                  <a:t>估計式：</a:t>
+                </a:r>
+                <a14:m>
+                  <m:oMath xmlns:m="http://schemas.openxmlformats.org/officeDocument/2006/math">
+                    <m:sSub>
+                      <m:sSubPr>
+                        <m:ctrlPr>
+                          <a:rPr lang="en-US" altLang="ja-JP" sz="2000" i="1" smtClean="0">
+                            <a:latin typeface="Cambria Math" panose="02040503050406030204" pitchFamily="18" charset="0"/>
+                          </a:rPr>
+                        </m:ctrlPr>
+                      </m:sSubPr>
+                      <m:e>
+                        <m:r>
+                          <a:rPr lang="en-US" altLang="ja-JP" sz="2000" b="0" i="1" smtClean="0">
+                            <a:latin typeface="Cambria Math" panose="02040503050406030204" pitchFamily="18" charset="0"/>
+                          </a:rPr>
+                          <m:t>𝑦</m:t>
+                        </m:r>
+                      </m:e>
+                      <m:sub>
+                        <m:r>
+                          <a:rPr lang="en-US" altLang="ja-JP" sz="2000" b="0" i="1" smtClean="0">
+                            <a:latin typeface="Cambria Math" panose="02040503050406030204" pitchFamily="18" charset="0"/>
+                          </a:rPr>
+                          <m:t>𝐻𝑇</m:t>
+                        </m:r>
+                      </m:sub>
+                    </m:sSub>
+                    <m:r>
+                      <a:rPr lang="en-US" altLang="ja-JP" sz="2000" b="0" i="1" smtClean="0">
+                        <a:latin typeface="Cambria Math" panose="02040503050406030204" pitchFamily="18" charset="0"/>
+                      </a:rPr>
+                      <m:t>=</m:t>
+                    </m:r>
+                    <m:f>
+                      <m:fPr>
+                        <m:ctrlPr>
+                          <a:rPr lang="en-US" altLang="ja-JP" sz="2000" b="0" i="1" smtClean="0">
+                            <a:latin typeface="Cambria Math" panose="02040503050406030204" pitchFamily="18" charset="0"/>
+                          </a:rPr>
+                        </m:ctrlPr>
+                      </m:fPr>
+                      <m:num>
+                        <m:r>
+                          <a:rPr lang="en-US" altLang="ja-JP" sz="2000" b="0" i="1" smtClean="0">
+                            <a:latin typeface="Cambria Math" panose="02040503050406030204" pitchFamily="18" charset="0"/>
+                          </a:rPr>
+                          <m:t>1</m:t>
+                        </m:r>
+                      </m:num>
+                      <m:den>
+                        <m:r>
+                          <a:rPr lang="en-US" altLang="ja-JP" sz="2000" b="0" i="1" smtClean="0">
+                            <a:latin typeface="Cambria Math" panose="02040503050406030204" pitchFamily="18" charset="0"/>
+                          </a:rPr>
+                          <m:t>𝑁</m:t>
+                        </m:r>
+                      </m:den>
+                    </m:f>
+                    <m:nary>
+                      <m:naryPr>
+                        <m:chr m:val="∑"/>
+                        <m:ctrlPr>
+                          <a:rPr lang="en-US" altLang="ja-JP" sz="2000" b="0" i="1" smtClean="0">
+                            <a:latin typeface="Cambria Math" panose="02040503050406030204" pitchFamily="18" charset="0"/>
+                          </a:rPr>
+                        </m:ctrlPr>
+                      </m:naryPr>
+                      <m:sub>
+                        <m:r>
+                          <m:rPr>
+                            <m:brk m:alnAt="23"/>
+                          </m:rPr>
+                          <a:rPr lang="en-US" altLang="ja-JP" sz="2000" b="0" i="1" smtClean="0">
+                            <a:latin typeface="Cambria Math" panose="02040503050406030204" pitchFamily="18" charset="0"/>
+                          </a:rPr>
+                          <m:t>𝑘</m:t>
+                        </m:r>
+                        <m:r>
+                          <a:rPr lang="en-US" altLang="ja-JP" sz="2000" b="0" i="1" smtClean="0">
+                            <a:latin typeface="Cambria Math" panose="02040503050406030204" pitchFamily="18" charset="0"/>
+                            <a:ea typeface="Cambria Math" panose="02040503050406030204" pitchFamily="18" charset="0"/>
+                          </a:rPr>
+                          <m:t>∈</m:t>
+                        </m:r>
+                        <m:r>
+                          <a:rPr lang="en-US" altLang="ja-JP" sz="2000" b="0" i="1" smtClean="0">
+                            <a:latin typeface="Cambria Math" panose="02040503050406030204" pitchFamily="18" charset="0"/>
+                            <a:ea typeface="Cambria Math" panose="02040503050406030204" pitchFamily="18" charset="0"/>
+                          </a:rPr>
+                          <m:t>𝑆</m:t>
+                        </m:r>
+                      </m:sub>
+                      <m:sup/>
+                      <m:e>
+                        <m:sSub>
+                          <m:sSubPr>
+                            <m:ctrlPr>
+                              <a:rPr lang="en-US" altLang="ja-JP" sz="2000" b="0" i="1" smtClean="0">
+                                <a:latin typeface="Cambria Math" panose="02040503050406030204" pitchFamily="18" charset="0"/>
+                              </a:rPr>
+                            </m:ctrlPr>
+                          </m:sSubPr>
+                          <m:e>
+                            <m:r>
+                              <a:rPr lang="en-US" altLang="ja-JP" sz="2000" b="0" i="1" smtClean="0">
+                                <a:latin typeface="Cambria Math" panose="02040503050406030204" pitchFamily="18" charset="0"/>
+                              </a:rPr>
+                              <m:t>𝑦</m:t>
+                            </m:r>
+                          </m:e>
+                          <m:sub>
+                            <m:r>
+                              <a:rPr lang="en-US" altLang="ja-JP" sz="2000" b="0" i="1" smtClean="0">
+                                <a:latin typeface="Cambria Math" panose="02040503050406030204" pitchFamily="18" charset="0"/>
+                              </a:rPr>
+                              <m:t>𝑘</m:t>
+                            </m:r>
+                          </m:sub>
+                        </m:sSub>
+                        <m:r>
+                          <a:rPr lang="en-US" altLang="ja-JP" sz="2000" b="0" i="1" smtClean="0">
+                            <a:latin typeface="Cambria Math" panose="02040503050406030204" pitchFamily="18" charset="0"/>
+                            <a:ea typeface="Cambria Math" panose="02040503050406030204" pitchFamily="18" charset="0"/>
+                          </a:rPr>
+                          <m:t>×</m:t>
+                        </m:r>
+                        <m:f>
+                          <m:fPr>
+                            <m:ctrlPr>
+                              <a:rPr lang="en-US" altLang="ja-JP" sz="2000" b="0" i="1" smtClean="0">
+                                <a:latin typeface="Cambria Math" panose="02040503050406030204" pitchFamily="18" charset="0"/>
+                                <a:ea typeface="Cambria Math" panose="02040503050406030204" pitchFamily="18" charset="0"/>
+                              </a:rPr>
+                            </m:ctrlPr>
+                          </m:fPr>
+                          <m:num>
+                            <m:r>
+                              <a:rPr lang="en-US" altLang="ja-JP" sz="2000" b="0" i="1" smtClean="0">
+                                <a:latin typeface="Cambria Math" panose="02040503050406030204" pitchFamily="18" charset="0"/>
+                                <a:ea typeface="Cambria Math" panose="02040503050406030204" pitchFamily="18" charset="0"/>
+                              </a:rPr>
+                              <m:t>𝑁</m:t>
+                            </m:r>
+                          </m:num>
+                          <m:den>
+                            <m:r>
+                              <a:rPr lang="en-US" altLang="ja-JP" sz="2000" b="0" i="1" smtClean="0">
+                                <a:latin typeface="Cambria Math" panose="02040503050406030204" pitchFamily="18" charset="0"/>
+                                <a:ea typeface="Cambria Math" panose="02040503050406030204" pitchFamily="18" charset="0"/>
+                              </a:rPr>
+                              <m:t>𝑛</m:t>
+                            </m:r>
+                          </m:den>
+                        </m:f>
+                      </m:e>
+                    </m:nary>
+                    <m:r>
+                      <a:rPr lang="en-US" altLang="ja-JP" sz="2000" b="0" i="1" smtClean="0">
+                        <a:latin typeface="Cambria Math" panose="02040503050406030204" pitchFamily="18" charset="0"/>
+                      </a:rPr>
+                      <m:t>=</m:t>
+                    </m:r>
+                    <m:f>
+                      <m:fPr>
+                        <m:ctrlPr>
+                          <a:rPr lang="en-US" altLang="ja-JP" sz="2000" b="0" i="1" smtClean="0">
+                            <a:latin typeface="Cambria Math" panose="02040503050406030204" pitchFamily="18" charset="0"/>
+                          </a:rPr>
+                        </m:ctrlPr>
+                      </m:fPr>
+                      <m:num>
+                        <m:r>
+                          <a:rPr lang="en-US" altLang="ja-JP" sz="2000" b="0" i="1" smtClean="0">
+                            <a:latin typeface="Cambria Math" panose="02040503050406030204" pitchFamily="18" charset="0"/>
+                          </a:rPr>
+                          <m:t>1</m:t>
+                        </m:r>
+                      </m:num>
+                      <m:den>
+                        <m:r>
+                          <a:rPr lang="en-US" altLang="ja-JP" sz="2000" b="0" i="1" smtClean="0">
+                            <a:latin typeface="Cambria Math" panose="02040503050406030204" pitchFamily="18" charset="0"/>
+                          </a:rPr>
+                          <m:t>𝑛</m:t>
+                        </m:r>
+                      </m:den>
+                    </m:f>
+                    <m:nary>
+                      <m:naryPr>
+                        <m:chr m:val="∑"/>
+                        <m:ctrlPr>
+                          <a:rPr lang="en-US" altLang="ja-JP" sz="2000" b="0" i="1" smtClean="0">
+                            <a:latin typeface="Cambria Math" panose="02040503050406030204" pitchFamily="18" charset="0"/>
+                          </a:rPr>
+                        </m:ctrlPr>
+                      </m:naryPr>
+                      <m:sub>
+                        <m:r>
+                          <m:rPr>
+                            <m:brk m:alnAt="23"/>
+                          </m:rPr>
+                          <a:rPr lang="en-US" altLang="ja-JP" sz="2000" b="0" i="1" smtClean="0">
+                            <a:latin typeface="Cambria Math" panose="02040503050406030204" pitchFamily="18" charset="0"/>
+                          </a:rPr>
+                          <m:t>𝑘</m:t>
+                        </m:r>
+                        <m:r>
+                          <a:rPr lang="en-US" altLang="ja-JP" sz="2000" b="0" i="1" smtClean="0">
+                            <a:latin typeface="Cambria Math" panose="02040503050406030204" pitchFamily="18" charset="0"/>
+                            <a:ea typeface="Cambria Math" panose="02040503050406030204" pitchFamily="18" charset="0"/>
+                          </a:rPr>
+                          <m:t>∈</m:t>
+                        </m:r>
+                        <m:r>
+                          <a:rPr lang="en-US" altLang="ja-JP" sz="2000" b="0" i="1" smtClean="0">
+                            <a:latin typeface="Cambria Math" panose="02040503050406030204" pitchFamily="18" charset="0"/>
+                            <a:ea typeface="Cambria Math" panose="02040503050406030204" pitchFamily="18" charset="0"/>
+                          </a:rPr>
+                          <m:t>𝑆</m:t>
+                        </m:r>
+                      </m:sub>
+                      <m:sup/>
+                      <m:e>
+                        <m:sSub>
+                          <m:sSubPr>
+                            <m:ctrlPr>
+                              <a:rPr lang="en-US" altLang="ja-JP" sz="2000" b="0" i="1" smtClean="0">
+                                <a:latin typeface="Cambria Math" panose="02040503050406030204" pitchFamily="18" charset="0"/>
+                              </a:rPr>
+                            </m:ctrlPr>
+                          </m:sSubPr>
+                          <m:e>
+                            <m:r>
+                              <a:rPr lang="en-US" altLang="ja-JP" sz="2000" b="0" i="1" smtClean="0">
+                                <a:latin typeface="Cambria Math" panose="02040503050406030204" pitchFamily="18" charset="0"/>
+                              </a:rPr>
+                              <m:t>𝑦</m:t>
+                            </m:r>
+                          </m:e>
+                          <m:sub>
+                            <m:r>
+                              <a:rPr lang="en-US" altLang="ja-JP" sz="2000" b="0" i="1" smtClean="0">
+                                <a:latin typeface="Cambria Math" panose="02040503050406030204" pitchFamily="18" charset="0"/>
+                              </a:rPr>
+                              <m:t>𝑘</m:t>
+                            </m:r>
+                          </m:sub>
+                        </m:sSub>
+                      </m:e>
+                    </m:nary>
+                  </m:oMath>
+                </a14:m>
+                <a:endParaRPr lang="en-US" altLang="ja-JP" sz="2000" dirty="0">
+                  <a:latin typeface="Google Sans Text"/>
+                </a:endParaRPr>
+              </a:p>
+              <a:p>
+                <a:pPr>
+                  <a:lnSpc>
+                    <a:spcPct val="150000"/>
+                  </a:lnSpc>
+                </a:pPr>
+                <a:r>
+                  <a:rPr lang="ja-JP" altLang="en-US" sz="2000">
+                    <a:latin typeface="Google Sans Text"/>
+                  </a:rPr>
+                  <a:t>假設某大學有 </a:t>
+                </a:r>
+                <a:r>
+                  <a:rPr lang="en-US" altLang="ja-JP" sz="2000" i="1" dirty="0">
+                    <a:latin typeface="Times New Roman" panose="02020603050405020304" pitchFamily="18" charset="0"/>
+                    <a:cs typeface="Times New Roman" panose="02020603050405020304" pitchFamily="18" charset="0"/>
+                  </a:rPr>
+                  <a:t>N = </a:t>
+                </a:r>
+                <a:r>
+                  <a:rPr lang="en-US" altLang="ja-JP" sz="2000" dirty="0">
+                    <a:latin typeface="Times New Roman" panose="02020603050405020304" pitchFamily="18" charset="0"/>
+                    <a:cs typeface="Times New Roman" panose="02020603050405020304" pitchFamily="18" charset="0"/>
+                  </a:rPr>
+                  <a:t>10,000</a:t>
+                </a:r>
+                <a:r>
+                  <a:rPr lang="en-US" altLang="ja-JP" sz="2000" dirty="0">
+                    <a:latin typeface="Google Sans Text"/>
+                  </a:rPr>
+                  <a:t> </a:t>
+                </a:r>
+                <a:r>
+                  <a:rPr lang="ja-JP" altLang="en-US" sz="2000">
+                    <a:latin typeface="Google Sans Text"/>
+                  </a:rPr>
+                  <a:t>名學生，我們想估計全校學生的月平均生活費。我們決定隨機抽取 </a:t>
+                </a:r>
+                <a:r>
+                  <a:rPr lang="en-US" altLang="ja-JP" sz="2000" i="1" dirty="0">
+                    <a:latin typeface="Times New Roman" panose="02020603050405020304" pitchFamily="18" charset="0"/>
+                    <a:cs typeface="Times New Roman" panose="02020603050405020304" pitchFamily="18" charset="0"/>
+                  </a:rPr>
+                  <a:t>n</a:t>
+                </a:r>
+                <a:r>
+                  <a:rPr lang="en-US" altLang="ja-JP" sz="2000" dirty="0">
+                    <a:latin typeface="Google Sans Text"/>
+                  </a:rPr>
+                  <a:t> = 100 </a:t>
+                </a:r>
+                <a:r>
+                  <a:rPr lang="ja-JP" altLang="en-US" sz="2000">
+                    <a:latin typeface="Google Sans Text"/>
+                  </a:rPr>
+                  <a:t>名學生。根據 </a:t>
+                </a:r>
+                <a:r>
+                  <a:rPr lang="en-US" altLang="ja-JP" sz="2000" dirty="0">
+                    <a:latin typeface="Google Sans Text"/>
+                  </a:rPr>
+                  <a:t>SRS</a:t>
+                </a:r>
+                <a:r>
+                  <a:rPr lang="ja-JP" altLang="en-US" sz="2000">
+                    <a:latin typeface="Google Sans Text"/>
+                  </a:rPr>
+                  <a:t>，每位同學被抽中的機率</a:t>
+                </a:r>
+                <a14:m>
+                  <m:oMath xmlns:m="http://schemas.openxmlformats.org/officeDocument/2006/math">
+                    <m:sSub>
+                      <m:sSubPr>
+                        <m:ctrlPr>
+                          <a:rPr lang="en-US" altLang="ja-JP" sz="2000" i="1" smtClean="0">
+                            <a:latin typeface="Cambria Math" panose="02040503050406030204" pitchFamily="18" charset="0"/>
+                          </a:rPr>
+                        </m:ctrlPr>
+                      </m:sSubPr>
+                      <m:e>
+                        <m:r>
+                          <a:rPr lang="en-US" altLang="ja-JP" sz="2000" i="1" smtClean="0">
+                            <a:latin typeface="Cambria Math" panose="02040503050406030204" pitchFamily="18" charset="0"/>
+                            <a:ea typeface="Cambria Math" panose="02040503050406030204" pitchFamily="18" charset="0"/>
+                          </a:rPr>
+                          <m:t>𝜋</m:t>
+                        </m:r>
+                      </m:e>
+                      <m:sub>
+                        <m:r>
+                          <a:rPr lang="en-US" altLang="ja-JP" sz="2000" b="0" i="1" smtClean="0">
+                            <a:latin typeface="Cambria Math" panose="02040503050406030204" pitchFamily="18" charset="0"/>
+                          </a:rPr>
+                          <m:t>𝑘</m:t>
+                        </m:r>
+                      </m:sub>
+                    </m:sSub>
+                    <m:r>
+                      <a:rPr lang="en-US" altLang="ja-JP" sz="2000" b="0" i="1" smtClean="0">
+                        <a:latin typeface="Cambria Math" panose="02040503050406030204" pitchFamily="18" charset="0"/>
+                      </a:rPr>
+                      <m:t>=</m:t>
+                    </m:r>
+                    <m:f>
+                      <m:fPr>
+                        <m:ctrlPr>
+                          <a:rPr lang="en-US" altLang="ja-JP" sz="2000" b="0" i="1" smtClean="0">
+                            <a:latin typeface="Cambria Math" panose="02040503050406030204" pitchFamily="18" charset="0"/>
+                          </a:rPr>
+                        </m:ctrlPr>
+                      </m:fPr>
+                      <m:num>
+                        <m:r>
+                          <a:rPr lang="en-US" altLang="ja-JP" sz="2000" b="0" i="1" smtClean="0">
+                            <a:latin typeface="Cambria Math" panose="02040503050406030204" pitchFamily="18" charset="0"/>
+                          </a:rPr>
+                          <m:t>100</m:t>
+                        </m:r>
+                      </m:num>
+                      <m:den>
+                        <m:r>
+                          <a:rPr lang="en-US" altLang="ja-JP" sz="2000" b="0" i="1" smtClean="0">
+                            <a:latin typeface="Cambria Math" panose="02040503050406030204" pitchFamily="18" charset="0"/>
+                          </a:rPr>
+                          <m:t>1000</m:t>
+                        </m:r>
+                      </m:den>
+                    </m:f>
+                    <m:r>
+                      <a:rPr lang="en-US" altLang="ja-JP" sz="2000" b="0" i="1" smtClean="0">
+                        <a:latin typeface="Cambria Math" panose="02040503050406030204" pitchFamily="18" charset="0"/>
+                      </a:rPr>
+                      <m:t>=0.01</m:t>
+                    </m:r>
+                  </m:oMath>
+                </a14:m>
+                <a:r>
+                  <a:rPr lang="en-US" altLang="ja-JP" sz="2000" dirty="0">
+                    <a:latin typeface="Google Sans Text"/>
+                  </a:rPr>
+                  <a:t> </a:t>
+                </a:r>
+                <a:r>
+                  <a:rPr lang="ja-JP" altLang="en-US" sz="2000">
+                    <a:latin typeface="Google Sans Text"/>
+                  </a:rPr>
+                  <a:t>。</a:t>
+                </a:r>
+                <a:endParaRPr lang="en-US" altLang="ja-JP" sz="2000" dirty="0">
+                  <a:latin typeface="Google Sans Text"/>
+                </a:endParaRPr>
+              </a:p>
+              <a:p>
+                <a:pPr>
+                  <a:lnSpc>
+                    <a:spcPct val="150000"/>
+                  </a:lnSpc>
+                </a:pPr>
+                <a:r>
+                  <a:rPr lang="ja-JP" altLang="en-US" sz="2000">
+                    <a:latin typeface="Google Sans Text"/>
+                  </a:rPr>
+                  <a:t>根據 </a:t>
+                </a:r>
+                <a:r>
+                  <a:rPr lang="en-US" altLang="ja-JP" sz="2000" dirty="0">
+                    <a:latin typeface="Google Sans Text"/>
+                  </a:rPr>
+                  <a:t>H-T </a:t>
+                </a:r>
+                <a:r>
+                  <a:rPr lang="ja-JP" altLang="en-US" sz="2000">
+                    <a:latin typeface="Google Sans Text"/>
+                  </a:rPr>
+                  <a:t>邏輯，每位被抽中同學的權重為機率的倒數：</a:t>
+                </a:r>
+                <a14:m>
+                  <m:oMath xmlns:m="http://schemas.openxmlformats.org/officeDocument/2006/math">
+                    <m:sSub>
+                      <m:sSubPr>
+                        <m:ctrlPr>
+                          <a:rPr lang="en-US" altLang="ja-JP" sz="2000" i="1" smtClean="0">
+                            <a:latin typeface="Cambria Math" panose="02040503050406030204" pitchFamily="18" charset="0"/>
+                          </a:rPr>
+                        </m:ctrlPr>
+                      </m:sSubPr>
+                      <m:e>
+                        <m:r>
+                          <a:rPr lang="en-US" altLang="ja-JP" sz="2000" b="0" i="1" smtClean="0">
+                            <a:latin typeface="Cambria Math" panose="02040503050406030204" pitchFamily="18" charset="0"/>
+                          </a:rPr>
+                          <m:t>𝑤</m:t>
+                        </m:r>
+                      </m:e>
+                      <m:sub>
+                        <m:r>
+                          <a:rPr lang="en-US" altLang="ja-JP" sz="2000" b="0" i="1" smtClean="0">
+                            <a:latin typeface="Cambria Math" panose="02040503050406030204" pitchFamily="18" charset="0"/>
+                          </a:rPr>
+                          <m:t>𝑘</m:t>
+                        </m:r>
+                      </m:sub>
+                    </m:sSub>
+                    <m:r>
+                      <a:rPr lang="en-US" altLang="ja-JP" sz="2000" b="0" i="1" smtClean="0">
+                        <a:latin typeface="Cambria Math" panose="02040503050406030204" pitchFamily="18" charset="0"/>
+                      </a:rPr>
+                      <m:t>=</m:t>
+                    </m:r>
+                    <m:f>
+                      <m:fPr>
+                        <m:ctrlPr>
+                          <a:rPr lang="en-US" altLang="ja-JP" sz="2000" b="0" i="1" smtClean="0">
+                            <a:latin typeface="Cambria Math" panose="02040503050406030204" pitchFamily="18" charset="0"/>
+                          </a:rPr>
+                        </m:ctrlPr>
+                      </m:fPr>
+                      <m:num>
+                        <m:r>
+                          <a:rPr lang="en-US" altLang="ja-JP" sz="2000" b="0" i="1" smtClean="0">
+                            <a:latin typeface="Cambria Math" panose="02040503050406030204" pitchFamily="18" charset="0"/>
+                          </a:rPr>
+                          <m:t>1</m:t>
+                        </m:r>
+                      </m:num>
+                      <m:den>
+                        <m:r>
+                          <a:rPr lang="en-US" altLang="ja-JP" sz="2000" b="0" i="1" smtClean="0">
+                            <a:latin typeface="Cambria Math" panose="02040503050406030204" pitchFamily="18" charset="0"/>
+                          </a:rPr>
+                          <m:t>0.01</m:t>
+                        </m:r>
+                      </m:den>
+                    </m:f>
+                    <m:r>
+                      <a:rPr lang="en-US" altLang="ja-JP" sz="2000" b="0" i="1" smtClean="0">
+                        <a:latin typeface="Cambria Math" panose="02040503050406030204" pitchFamily="18" charset="0"/>
+                      </a:rPr>
+                      <m:t>=100</m:t>
+                    </m:r>
+                  </m:oMath>
+                </a14:m>
+                <a:endParaRPr lang="en-US" altLang="ja-JP" sz="2000" dirty="0">
+                  <a:latin typeface="Google Sans Text"/>
+                </a:endParaRPr>
+              </a:p>
+              <a:p>
+                <a:pPr marL="0" indent="0">
+                  <a:lnSpc>
+                    <a:spcPct val="150000"/>
+                  </a:lnSpc>
+                  <a:buNone/>
+                </a:pPr>
+                <a:endParaRPr lang="en-US" altLang="ja-JP" sz="2000" dirty="0">
+                  <a:effectLst/>
+                  <a:latin typeface="Google Sans Text"/>
+                </a:endParaRPr>
+              </a:p>
+              <a:p>
+                <a:pPr>
+                  <a:lnSpc>
+                    <a:spcPct val="150000"/>
+                  </a:lnSpc>
+                </a:pPr>
+                <a:endParaRPr lang="ja-JP" altLang="en-US" sz="2000">
+                  <a:effectLst/>
+                  <a:latin typeface="Google Sans Text"/>
+                </a:endParaRPr>
+              </a:p>
+              <a:p>
+                <a:endParaRPr lang="en-US" dirty="0"/>
+              </a:p>
+            </p:txBody>
+          </p:sp>
+        </mc:Choice>
+        <mc:Fallback xmlns="">
+          <p:sp>
+            <p:nvSpPr>
+              <p:cNvPr id="3" name="Content Placeholder 2">
+                <a:extLst>
+                  <a:ext uri="{FF2B5EF4-FFF2-40B4-BE49-F238E27FC236}">
+                    <a16:creationId xmlns:a16="http://schemas.microsoft.com/office/drawing/2014/main" id="{659579A7-244A-1B4E-A6EF-9B1F87EA3242}"/>
+                  </a:ext>
+                </a:extLst>
+              </p:cNvPr>
+              <p:cNvSpPr>
+                <a:spLocks noGrp="1" noRot="1" noChangeAspect="1" noMove="1" noResize="1" noEditPoints="1" noAdjustHandles="1" noChangeArrowheads="1" noChangeShapeType="1" noTextEdit="1"/>
+              </p:cNvSpPr>
+              <p:nvPr>
+                <p:ph idx="1"/>
+              </p:nvPr>
+            </p:nvSpPr>
+            <p:spPr>
+              <a:blipFill>
+                <a:blip r:embed="rId2"/>
+                <a:stretch>
+                  <a:fillRect l="-603"/>
+                </a:stretch>
+              </a:blipFill>
+            </p:spPr>
+            <p:txBody>
+              <a:bodyPr/>
+              <a:lstStyle/>
+              <a:p>
+                <a:r>
+                  <a:rPr lang="en-US">
+                    <a:noFill/>
+                  </a:rPr>
+                  <a:t> </a:t>
+                </a:r>
+              </a:p>
+            </p:txBody>
+          </p:sp>
+        </mc:Fallback>
+      </mc:AlternateContent>
+      <p:sp>
+        <p:nvSpPr>
+          <p:cNvPr id="4" name="Slide Number Placeholder 3">
+            <a:extLst>
+              <a:ext uri="{FF2B5EF4-FFF2-40B4-BE49-F238E27FC236}">
+                <a16:creationId xmlns:a16="http://schemas.microsoft.com/office/drawing/2014/main" id="{49069B59-1518-4C2D-ABA7-09A5F449F58E}"/>
+              </a:ext>
+            </a:extLst>
+          </p:cNvPr>
+          <p:cNvSpPr>
+            <a:spLocks noGrp="1"/>
+          </p:cNvSpPr>
+          <p:nvPr>
+            <p:ph type="sldNum" sz="quarter" idx="12"/>
+          </p:nvPr>
+        </p:nvSpPr>
+        <p:spPr/>
+        <p:txBody>
+          <a:bodyPr/>
+          <a:lstStyle/>
+          <a:p>
+            <a:fld id="{34E21383-B02B-694B-B2AD-A967203CDE86}" type="slidenum">
+              <a:rPr lang="en-US" smtClean="0"/>
+              <a:t>17</a:t>
+            </a:fld>
+            <a:endParaRPr lang="en-US"/>
+          </a:p>
+        </p:txBody>
+      </p:sp>
+    </p:spTree>
+    <p:extLst>
+      <p:ext uri="{BB962C8B-B14F-4D97-AF65-F5344CB8AC3E}">
+        <p14:creationId xmlns:p14="http://schemas.microsoft.com/office/powerpoint/2010/main" val="1092903997"/>
+      </p:ext>
+    </p:extLst>
+  </p:cSld>
+  <p:clrMapOvr>
+    <a:masterClrMapping/>
+  </p:clrMapOvr>
+</p:sld>
+</file>
+
+<file path=ppt/slides/slide18.xml><?xml version="1.0" encoding="utf-8"?>
+<p:sld xmlns:a="http://schemas.openxmlformats.org/drawingml/2006/main" xmlns:r="http://schemas.openxmlformats.org/officeDocument/2006/relationships" xmlns:p="http://schemas.openxmlformats.org/presentationml/2006/main">
+  <p:cSld>
+    <p:spTree>
+      <p:nvGrpSpPr>
+        <p:cNvPr id="1" name=""/>
+        <p:cNvGrpSpPr/>
+        <p:nvPr/>
+      </p:nvGrpSpPr>
+      <p:grpSpPr>
+        <a:xfrm>
+          <a:off x="0" y="0"/>
+          <a:ext cx="0" cy="0"/>
+          <a:chOff x="0" y="0"/>
+          <a:chExt cx="0" cy="0"/>
+        </a:xfrm>
+      </p:grpSpPr>
+      <p:sp>
+        <p:nvSpPr>
+          <p:cNvPr id="2" name="Title 1">
+            <a:extLst>
+              <a:ext uri="{FF2B5EF4-FFF2-40B4-BE49-F238E27FC236}">
+                <a16:creationId xmlns:a16="http://schemas.microsoft.com/office/drawing/2014/main" id="{31C60B46-553E-18AD-A4BE-E745BAB0CAA0}"/>
+              </a:ext>
+            </a:extLst>
+          </p:cNvPr>
+          <p:cNvSpPr>
+            <a:spLocks noGrp="1"/>
+          </p:cNvSpPr>
+          <p:nvPr>
+            <p:ph type="title"/>
+          </p:nvPr>
+        </p:nvSpPr>
+        <p:spPr/>
+        <p:txBody>
+          <a:bodyPr/>
+          <a:lstStyle/>
+          <a:p>
+            <a:r>
+              <a:rPr lang="ja-JP" altLang="en-US"/>
+              <a:t>簡單隨機抽樣（二）</a:t>
+            </a:r>
+            <a:endParaRPr lang="en-US" dirty="0"/>
+          </a:p>
+        </p:txBody>
+      </p:sp>
+      <mc:AlternateContent xmlns:mc="http://schemas.openxmlformats.org/markup-compatibility/2006" xmlns:a14="http://schemas.microsoft.com/office/drawing/2010/main">
+        <mc:Choice Requires="a14">
+          <p:sp>
+            <p:nvSpPr>
+              <p:cNvPr id="3" name="Content Placeholder 2">
+                <a:extLst>
+                  <a:ext uri="{FF2B5EF4-FFF2-40B4-BE49-F238E27FC236}">
+                    <a16:creationId xmlns:a16="http://schemas.microsoft.com/office/drawing/2014/main" id="{659579A7-244A-1B4E-A6EF-9B1F87EA3242}"/>
+                  </a:ext>
+                </a:extLst>
+              </p:cNvPr>
+              <p:cNvSpPr>
+                <a:spLocks noGrp="1"/>
+              </p:cNvSpPr>
+              <p:nvPr>
+                <p:ph idx="1"/>
+              </p:nvPr>
+            </p:nvSpPr>
+            <p:spPr/>
+            <p:txBody>
+              <a:bodyPr>
+                <a:normAutofit/>
+              </a:bodyPr>
+              <a:lstStyle/>
+              <a:p>
+                <a:pPr>
+                  <a:lnSpc>
+                    <a:spcPct val="150000"/>
+                  </a:lnSpc>
+                </a:pPr>
+                <a:r>
+                  <a:rPr lang="ja-JP" altLang="en-US" sz="2000">
+                    <a:latin typeface="Google Sans Text"/>
+                  </a:rPr>
+                  <a:t>假設這 </a:t>
+                </a:r>
+                <a:r>
+                  <a:rPr lang="en-US" altLang="ja-JP" sz="2000" dirty="0">
+                    <a:latin typeface="Google Sans Text"/>
+                  </a:rPr>
+                  <a:t>100 </a:t>
+                </a:r>
+                <a:r>
+                  <a:rPr lang="ja-JP" altLang="en-US" sz="2000">
+                    <a:latin typeface="Google Sans Text"/>
+                  </a:rPr>
+                  <a:t>位同學的生活費總和為 </a:t>
+                </a:r>
+                <a:r>
+                  <a:rPr lang="en-US" altLang="ja-JP" sz="2000" dirty="0">
+                    <a:latin typeface="Times New Roman" panose="02020603050405020304" pitchFamily="18" charset="0"/>
+                    <a:cs typeface="Times New Roman" panose="02020603050405020304" pitchFamily="18" charset="0"/>
+                  </a:rPr>
+                  <a:t>1,200,000</a:t>
+                </a:r>
+                <a:r>
+                  <a:rPr lang="en-US" altLang="ja-JP" sz="2000" dirty="0">
+                    <a:latin typeface="Google Sans Text"/>
+                  </a:rPr>
+                  <a:t> </a:t>
+                </a:r>
+                <a:r>
+                  <a:rPr lang="ja-JP" altLang="en-US" sz="2000">
+                    <a:latin typeface="Google Sans Text"/>
+                  </a:rPr>
+                  <a:t>元（平均每人 </a:t>
+                </a:r>
+                <a:r>
+                  <a:rPr lang="en-US" altLang="ja-JP" sz="2000" dirty="0">
+                    <a:latin typeface="Times New Roman" panose="02020603050405020304" pitchFamily="18" charset="0"/>
+                    <a:cs typeface="Times New Roman" panose="02020603050405020304" pitchFamily="18" charset="0"/>
+                  </a:rPr>
+                  <a:t>12,000</a:t>
+                </a:r>
+                <a:r>
+                  <a:rPr lang="en-US" altLang="ja-JP" sz="2000" dirty="0">
+                    <a:latin typeface="Google Sans Text"/>
+                  </a:rPr>
+                  <a:t> </a:t>
+                </a:r>
+                <a:r>
+                  <a:rPr lang="ja-JP" altLang="en-US" sz="2000">
+                    <a:latin typeface="Google Sans Text"/>
+                  </a:rPr>
+                  <a:t>元）。使用 </a:t>
+                </a:r>
+                <a:r>
+                  <a:rPr lang="en-US" altLang="ja-JP" sz="2000" dirty="0">
+                    <a:latin typeface="Google Sans Text"/>
+                  </a:rPr>
+                  <a:t>H-T </a:t>
+                </a:r>
+                <a:r>
+                  <a:rPr lang="ja-JP" altLang="en-US" sz="2000">
+                    <a:latin typeface="Google Sans Text"/>
+                  </a:rPr>
+                  <a:t>公式計算全校總生活費。</a:t>
+                </a:r>
+                <a:endParaRPr lang="en-US" altLang="ja-JP" sz="2000" dirty="0">
+                  <a:latin typeface="Google Sans Text"/>
+                </a:endParaRPr>
+              </a:p>
+              <a:p>
+                <a:pPr>
+                  <a:lnSpc>
+                    <a:spcPct val="150000"/>
+                  </a:lnSpc>
+                </a:pPr>
+                <a:r>
+                  <a:rPr lang="en-US" altLang="ja-JP" sz="2000" dirty="0">
+                    <a:latin typeface="Google Sans Text"/>
+                  </a:rPr>
+                  <a:t>H-V</a:t>
+                </a:r>
+                <a:r>
+                  <a:rPr lang="ja-JP" altLang="en-US" sz="2000">
+                    <a:latin typeface="Google Sans Text"/>
+                  </a:rPr>
+                  <a:t>估計式：</a:t>
+                </a:r>
+                <a14:m>
+                  <m:oMath xmlns:m="http://schemas.openxmlformats.org/officeDocument/2006/math">
+                    <m:sSub>
+                      <m:sSubPr>
+                        <m:ctrlPr>
+                          <a:rPr lang="en-US" altLang="ja-JP" sz="2000" i="1" smtClean="0">
+                            <a:latin typeface="Cambria Math" panose="02040503050406030204" pitchFamily="18" charset="0"/>
+                          </a:rPr>
+                        </m:ctrlPr>
+                      </m:sSubPr>
+                      <m:e>
+                        <m:acc>
+                          <m:accPr>
+                            <m:chr m:val="̂"/>
+                            <m:ctrlPr>
+                              <a:rPr lang="en-US" altLang="ja-JP" sz="2000" i="1" smtClean="0">
+                                <a:latin typeface="Cambria Math" panose="02040503050406030204" pitchFamily="18" charset="0"/>
+                              </a:rPr>
+                            </m:ctrlPr>
+                          </m:accPr>
+                          <m:e>
+                            <m:r>
+                              <a:rPr lang="en-US" altLang="ja-JP" sz="2000" b="0" i="1" smtClean="0">
+                                <a:latin typeface="Cambria Math" panose="02040503050406030204" pitchFamily="18" charset="0"/>
+                              </a:rPr>
+                              <m:t>𝑌</m:t>
+                            </m:r>
+                          </m:e>
+                        </m:acc>
+                      </m:e>
+                      <m:sub>
+                        <m:r>
+                          <a:rPr lang="en-US" altLang="ja-JP" sz="2000" b="0" i="1" smtClean="0">
+                            <a:latin typeface="Cambria Math" panose="02040503050406030204" pitchFamily="18" charset="0"/>
+                          </a:rPr>
+                          <m:t>𝐻𝑇</m:t>
+                        </m:r>
+                      </m:sub>
+                    </m:sSub>
+                    <m:r>
+                      <a:rPr lang="en-US" altLang="ja-JP" sz="2000" b="0" i="1" smtClean="0">
+                        <a:latin typeface="Cambria Math" panose="02040503050406030204" pitchFamily="18" charset="0"/>
+                      </a:rPr>
+                      <m:t>=</m:t>
+                    </m:r>
+                    <m:nary>
+                      <m:naryPr>
+                        <m:chr m:val="∑"/>
+                        <m:subHide m:val="on"/>
+                        <m:ctrlPr>
+                          <a:rPr lang="en-US" altLang="ja-JP" sz="2000" b="0" i="1" smtClean="0">
+                            <a:latin typeface="Cambria Math" panose="02040503050406030204" pitchFamily="18" charset="0"/>
+                          </a:rPr>
+                        </m:ctrlPr>
+                      </m:naryPr>
+                      <m:sub/>
+                      <m:sup/>
+                      <m:e>
+                        <m:sSub>
+                          <m:sSubPr>
+                            <m:ctrlPr>
+                              <a:rPr lang="en-US" altLang="ja-JP" sz="2000" b="0" i="1" smtClean="0">
+                                <a:latin typeface="Cambria Math" panose="02040503050406030204" pitchFamily="18" charset="0"/>
+                              </a:rPr>
+                            </m:ctrlPr>
+                          </m:sSubPr>
+                          <m:e>
+                            <m:r>
+                              <a:rPr lang="en-US" altLang="ja-JP" sz="2000" b="0" i="1" smtClean="0">
+                                <a:latin typeface="Cambria Math" panose="02040503050406030204" pitchFamily="18" charset="0"/>
+                              </a:rPr>
+                              <m:t>𝑦</m:t>
+                            </m:r>
+                          </m:e>
+                          <m:sub>
+                            <m:r>
+                              <a:rPr lang="en-US" altLang="ja-JP" sz="2000" b="0" i="1" smtClean="0">
+                                <a:latin typeface="Cambria Math" panose="02040503050406030204" pitchFamily="18" charset="0"/>
+                              </a:rPr>
+                              <m:t>𝑘</m:t>
+                            </m:r>
+                          </m:sub>
+                        </m:sSub>
+                        <m:r>
+                          <a:rPr lang="en-US" altLang="ja-JP" sz="2000" b="0" i="1" smtClean="0">
+                            <a:latin typeface="Cambria Math" panose="02040503050406030204" pitchFamily="18" charset="0"/>
+                            <a:ea typeface="Cambria Math" panose="02040503050406030204" pitchFamily="18" charset="0"/>
+                          </a:rPr>
+                          <m:t>×</m:t>
+                        </m:r>
+                        <m:sSub>
+                          <m:sSubPr>
+                            <m:ctrlPr>
+                              <a:rPr lang="en-US" altLang="ja-JP" sz="2000" b="0" i="1" smtClean="0">
+                                <a:latin typeface="Cambria Math" panose="02040503050406030204" pitchFamily="18" charset="0"/>
+                                <a:ea typeface="Cambria Math" panose="02040503050406030204" pitchFamily="18" charset="0"/>
+                              </a:rPr>
+                            </m:ctrlPr>
+                          </m:sSubPr>
+                          <m:e>
+                            <m:r>
+                              <a:rPr lang="en-US" altLang="ja-JP" sz="2000" b="0" i="1" smtClean="0">
+                                <a:latin typeface="Cambria Math" panose="02040503050406030204" pitchFamily="18" charset="0"/>
+                                <a:ea typeface="Cambria Math" panose="02040503050406030204" pitchFamily="18" charset="0"/>
+                              </a:rPr>
+                              <m:t>𝑤</m:t>
+                            </m:r>
+                          </m:e>
+                          <m:sub>
+                            <m:r>
+                              <a:rPr lang="en-US" altLang="ja-JP" sz="2000" b="0" i="1" smtClean="0">
+                                <a:latin typeface="Cambria Math" panose="02040503050406030204" pitchFamily="18" charset="0"/>
+                                <a:ea typeface="Cambria Math" panose="02040503050406030204" pitchFamily="18" charset="0"/>
+                              </a:rPr>
+                              <m:t>𝑘</m:t>
+                            </m:r>
+                          </m:sub>
+                        </m:sSub>
+                      </m:e>
+                    </m:nary>
+                    <m:r>
+                      <a:rPr lang="en-US" altLang="ja-JP" sz="2000" b="0" i="1" smtClean="0">
+                        <a:latin typeface="Cambria Math" panose="02040503050406030204" pitchFamily="18" charset="0"/>
+                        <a:ea typeface="Cambria Math" panose="02040503050406030204" pitchFamily="18" charset="0"/>
+                      </a:rPr>
+                      <m:t>=1,200,000×100</m:t>
+                    </m:r>
+                    <m:r>
+                      <a:rPr lang="en-US" altLang="ja-JP" sz="2000" b="0" i="1" smtClean="0">
+                        <a:latin typeface="Cambria Math" panose="02040503050406030204" pitchFamily="18" charset="0"/>
+                      </a:rPr>
+                      <m:t>=120,000,000</m:t>
+                    </m:r>
+                  </m:oMath>
+                </a14:m>
+                <a:endParaRPr lang="en-US" altLang="ja-JP" sz="2000" dirty="0">
+                  <a:latin typeface="Google Sans Text"/>
+                </a:endParaRPr>
+              </a:p>
+              <a:p>
+                <a:pPr>
+                  <a:lnSpc>
+                    <a:spcPct val="150000"/>
+                  </a:lnSpc>
+                </a:pPr>
+                <a:r>
+                  <a:rPr lang="ja-JP" altLang="en-US" sz="2000">
+                    <a:latin typeface="Google Sans Text"/>
+                  </a:rPr>
+                  <a:t>計算全校學生的月平均生活費：</a:t>
+                </a:r>
+                <a14:m>
+                  <m:oMath xmlns:m="http://schemas.openxmlformats.org/officeDocument/2006/math">
+                    <m:f>
+                      <m:fPr>
+                        <m:ctrlPr>
+                          <a:rPr lang="en-US" altLang="ja-JP" sz="2000" b="0" i="1" smtClean="0">
+                            <a:latin typeface="Cambria Math" panose="02040503050406030204" pitchFamily="18" charset="0"/>
+                          </a:rPr>
+                        </m:ctrlPr>
+                      </m:fPr>
+                      <m:num>
+                        <m:r>
+                          <a:rPr lang="en-US" altLang="ja-JP" sz="2000" b="0" i="1" smtClean="0">
+                            <a:latin typeface="Cambria Math" panose="02040503050406030204" pitchFamily="18" charset="0"/>
+                          </a:rPr>
+                          <m:t>120000000</m:t>
+                        </m:r>
+                      </m:num>
+                      <m:den>
+                        <m:r>
+                          <a:rPr lang="en-US" altLang="ja-JP" sz="2000" b="0" i="1" smtClean="0">
+                            <a:latin typeface="Cambria Math" panose="02040503050406030204" pitchFamily="18" charset="0"/>
+                          </a:rPr>
+                          <m:t>10,000</m:t>
+                        </m:r>
+                      </m:den>
+                    </m:f>
+                    <m:r>
+                      <a:rPr lang="en-US" altLang="ja-JP" sz="2000" b="0" i="1" smtClean="0">
+                        <a:latin typeface="Cambria Math" panose="02040503050406030204" pitchFamily="18" charset="0"/>
+                      </a:rPr>
+                      <m:t>=</m:t>
+                    </m:r>
+                    <m:r>
+                      <a:rPr lang="en-US" altLang="ja-JP" sz="2000" b="0" i="0" smtClean="0">
+                        <a:latin typeface="Cambria Math" panose="02040503050406030204" pitchFamily="18" charset="0"/>
+                      </a:rPr>
+                      <m:t>12,000</m:t>
+                    </m:r>
+                  </m:oMath>
+                </a14:m>
+                <a:r>
+                  <a:rPr lang="en-US" altLang="ja-JP" sz="2000" dirty="0">
+                    <a:latin typeface="Google Sans Text"/>
+                  </a:rPr>
+                  <a:t> </a:t>
+                </a:r>
+                <a:r>
+                  <a:rPr lang="ja-JP" altLang="en-US" sz="2000">
+                    <a:latin typeface="Google Sans Text"/>
+                  </a:rPr>
+                  <a:t>。</a:t>
+                </a:r>
+                <a:endParaRPr lang="en-US" altLang="ja-JP" sz="2000" dirty="0">
+                  <a:latin typeface="Google Sans Text"/>
+                </a:endParaRPr>
+              </a:p>
+              <a:p>
+                <a:pPr>
+                  <a:lnSpc>
+                    <a:spcPct val="150000"/>
+                  </a:lnSpc>
+                </a:pPr>
+                <a:r>
+                  <a:rPr lang="ja-JP" altLang="en-US" sz="2000"/>
+                  <a:t>假設生活費的樣本標準差為 </a:t>
+                </a:r>
+                <a:r>
+                  <a:rPr lang="en-US" altLang="ja-JP" sz="2000" dirty="0">
+                    <a:latin typeface="Times New Roman" panose="02020603050405020304" pitchFamily="18" charset="0"/>
+                    <a:cs typeface="Times New Roman" panose="02020603050405020304" pitchFamily="18" charset="0"/>
+                  </a:rPr>
+                  <a:t>2,000</a:t>
+                </a:r>
+                <a:r>
+                  <a:rPr lang="en-US" altLang="ja-JP" sz="2000" dirty="0"/>
+                  <a:t> </a:t>
+                </a:r>
+                <a:r>
+                  <a:rPr lang="ja-JP" altLang="en-US" sz="2000"/>
+                  <a:t>元，因為標準誤 </a:t>
+                </a:r>
+                <a:r>
+                  <a:rPr lang="en-US" altLang="ja-JP" sz="2000" dirty="0"/>
+                  <a:t>(</a:t>
+                </a:r>
+                <a:r>
+                  <a:rPr lang="en-US" altLang="ja-JP" sz="2000" i="1" dirty="0">
+                    <a:latin typeface="Times New Roman" panose="02020603050405020304" pitchFamily="18" charset="0"/>
+                    <a:cs typeface="Times New Roman" panose="02020603050405020304" pitchFamily="18" charset="0"/>
+                  </a:rPr>
+                  <a:t>SE</a:t>
+                </a:r>
+                <a:r>
+                  <a:rPr lang="en-US" altLang="ja-JP" sz="2000" dirty="0"/>
+                  <a:t>)</a:t>
+                </a:r>
+                <a:r>
+                  <a:rPr lang="ja-JP" altLang="en-US" sz="2000"/>
+                  <a:t>是估計值的標準差，計算方式為樣本標準差除以樣本數的平方根，所以</a:t>
+                </a:r>
+                <a14:m>
+                  <m:oMath xmlns:m="http://schemas.openxmlformats.org/officeDocument/2006/math">
+                    <m:sSub>
+                      <m:sSubPr>
+                        <m:ctrlPr>
+                          <a:rPr lang="en-US" altLang="ja-JP" sz="2000" i="1" smtClean="0">
+                            <a:latin typeface="Cambria Math" panose="02040503050406030204" pitchFamily="18" charset="0"/>
+                          </a:rPr>
+                        </m:ctrlPr>
+                      </m:sSubPr>
+                      <m:e>
+                        <m:r>
+                          <a:rPr lang="en-US" altLang="ja-JP" sz="2000" b="0" i="1" smtClean="0">
+                            <a:latin typeface="Cambria Math" panose="02040503050406030204" pitchFamily="18" charset="0"/>
+                          </a:rPr>
+                          <m:t>𝑆𝐸</m:t>
+                        </m:r>
+                      </m:e>
+                      <m:sub/>
+                    </m:sSub>
+                    <m:r>
+                      <a:rPr lang="en-US" altLang="ja-JP" sz="2000" b="0" i="1" smtClean="0">
+                        <a:latin typeface="Cambria Math" panose="02040503050406030204" pitchFamily="18" charset="0"/>
+                      </a:rPr>
+                      <m:t>=</m:t>
+                    </m:r>
+                    <m:f>
+                      <m:fPr>
+                        <m:ctrlPr>
+                          <a:rPr lang="en-US" altLang="ja-JP" sz="2000" b="0" i="1" smtClean="0">
+                            <a:latin typeface="Cambria Math" panose="02040503050406030204" pitchFamily="18" charset="0"/>
+                          </a:rPr>
+                        </m:ctrlPr>
+                      </m:fPr>
+                      <m:num>
+                        <m:r>
+                          <a:rPr lang="en-US" altLang="ja-JP" sz="2000" b="0" i="1" smtClean="0">
+                            <a:latin typeface="Cambria Math" panose="02040503050406030204" pitchFamily="18" charset="0"/>
+                          </a:rPr>
+                          <m:t>2000</m:t>
+                        </m:r>
+                      </m:num>
+                      <m:den>
+                        <m:r>
+                          <a:rPr lang="en-US" altLang="ja-JP" sz="2000" b="0" i="1" smtClean="0">
+                            <a:latin typeface="Cambria Math" panose="02040503050406030204" pitchFamily="18" charset="0"/>
+                            <a:ea typeface="Cambria Math" panose="02040503050406030204" pitchFamily="18" charset="0"/>
+                          </a:rPr>
+                          <m:t>√100</m:t>
+                        </m:r>
+                      </m:den>
+                    </m:f>
+                    <m:r>
+                      <a:rPr lang="en-US" altLang="ja-JP" sz="2000" b="0" i="1" smtClean="0">
+                        <a:latin typeface="Cambria Math" panose="02040503050406030204" pitchFamily="18" charset="0"/>
+                      </a:rPr>
+                      <m:t>=200</m:t>
+                    </m:r>
+                  </m:oMath>
+                </a14:m>
+                <a:endParaRPr lang="en-US" altLang="ja-JP" sz="2000" dirty="0">
+                  <a:latin typeface="Google Sans Text"/>
+                </a:endParaRPr>
+              </a:p>
+              <a:p>
+                <a:pPr>
+                  <a:lnSpc>
+                    <a:spcPct val="150000"/>
+                  </a:lnSpc>
+                </a:pPr>
+                <a:r>
+                  <a:rPr lang="ja-JP" altLang="en-US" sz="2000">
+                    <a:latin typeface="Google Sans Text"/>
+                  </a:rPr>
+                  <a:t>因此，生活費的信賴區間估計為：</a:t>
+                </a:r>
+                <a14:m>
+                  <m:oMath xmlns:m="http://schemas.openxmlformats.org/officeDocument/2006/math">
+                    <m:r>
+                      <a:rPr lang="en-US" altLang="ja-JP" sz="2000" b="0" i="1" smtClean="0">
+                        <a:latin typeface="Cambria Math" panose="02040503050406030204" pitchFamily="18" charset="0"/>
+                      </a:rPr>
+                      <m:t>12,000</m:t>
+                    </m:r>
+                    <m:r>
+                      <a:rPr lang="en-US" altLang="ja-JP" sz="2000" b="0" i="1" smtClean="0">
+                        <a:latin typeface="Cambria Math" panose="02040503050406030204" pitchFamily="18" charset="0"/>
+                        <a:ea typeface="Cambria Math" panose="02040503050406030204" pitchFamily="18" charset="0"/>
+                      </a:rPr>
+                      <m:t>±1.96×200→[11,608,12,392]</m:t>
+                    </m:r>
+                  </m:oMath>
+                </a14:m>
+                <a:endParaRPr lang="en-US" altLang="ja-JP" sz="2000" dirty="0">
+                  <a:latin typeface="Google Sans Text"/>
+                </a:endParaRPr>
+              </a:p>
+              <a:p>
+                <a:pPr marL="0" indent="0">
+                  <a:lnSpc>
+                    <a:spcPct val="150000"/>
+                  </a:lnSpc>
+                  <a:buNone/>
+                </a:pPr>
+                <a:endParaRPr lang="en-US" altLang="ja-JP" sz="2000" dirty="0">
+                  <a:effectLst/>
+                  <a:latin typeface="Google Sans Text"/>
+                </a:endParaRPr>
+              </a:p>
+              <a:p>
+                <a:pPr>
+                  <a:lnSpc>
+                    <a:spcPct val="150000"/>
+                  </a:lnSpc>
+                </a:pPr>
+                <a:endParaRPr lang="ja-JP" altLang="en-US" sz="2000">
+                  <a:effectLst/>
+                  <a:latin typeface="Google Sans Text"/>
+                </a:endParaRPr>
+              </a:p>
+              <a:p>
+                <a:endParaRPr lang="en-US" dirty="0"/>
+              </a:p>
+            </p:txBody>
+          </p:sp>
+        </mc:Choice>
+        <mc:Fallback xmlns="">
+          <p:sp>
+            <p:nvSpPr>
+              <p:cNvPr id="3" name="Content Placeholder 2">
+                <a:extLst>
+                  <a:ext uri="{FF2B5EF4-FFF2-40B4-BE49-F238E27FC236}">
+                    <a16:creationId xmlns:a16="http://schemas.microsoft.com/office/drawing/2014/main" id="{659579A7-244A-1B4E-A6EF-9B1F87EA3242}"/>
+                  </a:ext>
+                </a:extLst>
+              </p:cNvPr>
+              <p:cNvSpPr>
+                <a:spLocks noGrp="1" noRot="1" noChangeAspect="1" noMove="1" noResize="1" noEditPoints="1" noAdjustHandles="1" noChangeArrowheads="1" noChangeShapeType="1" noTextEdit="1"/>
+              </p:cNvSpPr>
+              <p:nvPr>
+                <p:ph idx="1"/>
+              </p:nvPr>
+            </p:nvSpPr>
+            <p:spPr>
+              <a:blipFill>
+                <a:blip r:embed="rId2"/>
+                <a:stretch>
+                  <a:fillRect l="-603" r="-241"/>
+                </a:stretch>
+              </a:blipFill>
+            </p:spPr>
+            <p:txBody>
+              <a:bodyPr/>
+              <a:lstStyle/>
+              <a:p>
+                <a:r>
+                  <a:rPr lang="en-US">
+                    <a:noFill/>
+                  </a:rPr>
+                  <a:t> </a:t>
+                </a:r>
+              </a:p>
+            </p:txBody>
+          </p:sp>
+        </mc:Fallback>
+      </mc:AlternateContent>
+      <p:sp>
+        <p:nvSpPr>
+          <p:cNvPr id="4" name="Slide Number Placeholder 3">
+            <a:extLst>
+              <a:ext uri="{FF2B5EF4-FFF2-40B4-BE49-F238E27FC236}">
+                <a16:creationId xmlns:a16="http://schemas.microsoft.com/office/drawing/2014/main" id="{49069B59-1518-4C2D-ABA7-09A5F449F58E}"/>
+              </a:ext>
+            </a:extLst>
+          </p:cNvPr>
+          <p:cNvSpPr>
+            <a:spLocks noGrp="1"/>
+          </p:cNvSpPr>
+          <p:nvPr>
+            <p:ph type="sldNum" sz="quarter" idx="12"/>
+          </p:nvPr>
+        </p:nvSpPr>
+        <p:spPr/>
+        <p:txBody>
+          <a:bodyPr/>
+          <a:lstStyle/>
+          <a:p>
+            <a:fld id="{34E21383-B02B-694B-B2AD-A967203CDE86}" type="slidenum">
+              <a:rPr lang="en-US" smtClean="0"/>
+              <a:t>18</a:t>
+            </a:fld>
+            <a:endParaRPr lang="en-US"/>
+          </a:p>
+        </p:txBody>
+      </p:sp>
+    </p:spTree>
+    <p:extLst>
+      <p:ext uri="{BB962C8B-B14F-4D97-AF65-F5344CB8AC3E}">
+        <p14:creationId xmlns:p14="http://schemas.microsoft.com/office/powerpoint/2010/main" val="3888340206"/>
+      </p:ext>
+    </p:extLst>
+  </p:cSld>
+  <p:clrMapOvr>
+    <a:masterClrMapping/>
+  </p:clrMapOvr>
+</p:sld>
+</file>
+
+<file path=ppt/slides/slide19.xml><?xml version="1.0" encoding="utf-8"?>
+<p:sld xmlns:a="http://schemas.openxmlformats.org/drawingml/2006/main" xmlns:r="http://schemas.openxmlformats.org/officeDocument/2006/relationships" xmlns:p="http://schemas.openxmlformats.org/presentationml/2006/main">
+  <p:cSld>
+    <p:spTree>
+      <p:nvGrpSpPr>
+        <p:cNvPr id="1" name=""/>
+        <p:cNvGrpSpPr/>
+        <p:nvPr/>
+      </p:nvGrpSpPr>
+      <p:grpSpPr>
+        <a:xfrm>
+          <a:off x="0" y="0"/>
+          <a:ext cx="0" cy="0"/>
+          <a:chOff x="0" y="0"/>
+          <a:chExt cx="0" cy="0"/>
+        </a:xfrm>
+      </p:grpSpPr>
+      <p:sp>
+        <p:nvSpPr>
+          <p:cNvPr id="2" name="Title 1">
+            <a:extLst>
+              <a:ext uri="{FF2B5EF4-FFF2-40B4-BE49-F238E27FC236}">
+                <a16:creationId xmlns:a16="http://schemas.microsoft.com/office/drawing/2014/main" id="{31C60B46-553E-18AD-A4BE-E745BAB0CAA0}"/>
+              </a:ext>
+            </a:extLst>
+          </p:cNvPr>
+          <p:cNvSpPr>
+            <a:spLocks noGrp="1"/>
+          </p:cNvSpPr>
+          <p:nvPr>
+            <p:ph type="title"/>
+          </p:nvPr>
+        </p:nvSpPr>
+        <p:spPr/>
+        <p:txBody>
+          <a:bodyPr/>
+          <a:lstStyle/>
+          <a:p>
+            <a:r>
+              <a:rPr lang="ja-JP" altLang="en-US"/>
+              <a:t>簡單隨機抽樣（三）</a:t>
+            </a:r>
+            <a:endParaRPr lang="en-US" dirty="0"/>
+          </a:p>
+        </p:txBody>
+      </p:sp>
+      <mc:AlternateContent xmlns:mc="http://schemas.openxmlformats.org/markup-compatibility/2006" xmlns:a14="http://schemas.microsoft.com/office/drawing/2010/main">
+        <mc:Choice Requires="a14">
+          <p:sp>
+            <p:nvSpPr>
+              <p:cNvPr id="3" name="Content Placeholder 2">
+                <a:extLst>
+                  <a:ext uri="{FF2B5EF4-FFF2-40B4-BE49-F238E27FC236}">
+                    <a16:creationId xmlns:a16="http://schemas.microsoft.com/office/drawing/2014/main" id="{659579A7-244A-1B4E-A6EF-9B1F87EA3242}"/>
+                  </a:ext>
+                </a:extLst>
+              </p:cNvPr>
+              <p:cNvSpPr>
+                <a:spLocks noGrp="1"/>
+              </p:cNvSpPr>
+              <p:nvPr>
+                <p:ph idx="1"/>
+              </p:nvPr>
+            </p:nvSpPr>
+            <p:spPr/>
+            <p:txBody>
+              <a:bodyPr>
+                <a:normAutofit fontScale="85000" lnSpcReduction="10000"/>
+              </a:bodyPr>
+              <a:lstStyle/>
+              <a:p>
+                <a:pPr>
+                  <a:lnSpc>
+                    <a:spcPct val="150000"/>
+                  </a:lnSpc>
+                </a:pPr>
+                <a:r>
+                  <a:rPr lang="ja-JP" altLang="en-US" sz="2000">
+                    <a:latin typeface="Google Sans Text"/>
+                  </a:rPr>
+                  <a:t>當我們要估計全校一萬名大學生的「平均生活費」。因為不可能問完每一個人，所以假設抽了 </a:t>
+                </a:r>
+                <a:r>
+                  <a:rPr lang="en-US" altLang="ja-JP" sz="2000" dirty="0">
+                    <a:latin typeface="Google Sans Text"/>
+                  </a:rPr>
+                  <a:t>100 </a:t>
+                </a:r>
+                <a:r>
+                  <a:rPr lang="ja-JP" altLang="en-US" sz="2000">
+                    <a:latin typeface="Google Sans Text"/>
+                  </a:rPr>
+                  <a:t>個人。要把這 </a:t>
+                </a:r>
+                <a:r>
+                  <a:rPr lang="en-US" altLang="ja-JP" sz="2000" dirty="0">
+                    <a:latin typeface="Google Sans Text"/>
+                  </a:rPr>
+                  <a:t>100 </a:t>
+                </a:r>
+                <a:r>
+                  <a:rPr lang="ja-JP" altLang="en-US" sz="2000">
+                    <a:latin typeface="Google Sans Text"/>
+                  </a:rPr>
+                  <a:t>人的結果推回全校。在簡單隨機抽樣中，每個人被抽中的機率 </a:t>
+                </a:r>
+                <a14:m>
+                  <m:oMath xmlns:m="http://schemas.openxmlformats.org/officeDocument/2006/math">
+                    <m:sSub>
+                      <m:sSubPr>
+                        <m:ctrlPr>
+                          <a:rPr lang="en-US" altLang="ja-JP" sz="2000" i="1" smtClean="0">
+                            <a:latin typeface="Cambria Math" panose="02040503050406030204" pitchFamily="18" charset="0"/>
+                          </a:rPr>
+                        </m:ctrlPr>
+                      </m:sSubPr>
+                      <m:e>
+                        <m:r>
+                          <a:rPr lang="en-US" altLang="ja-JP" sz="2000" i="1" smtClean="0">
+                            <a:latin typeface="Cambria Math" panose="02040503050406030204" pitchFamily="18" charset="0"/>
+                            <a:ea typeface="Cambria Math" panose="02040503050406030204" pitchFamily="18" charset="0"/>
+                          </a:rPr>
+                          <m:t>𝜋</m:t>
+                        </m:r>
+                      </m:e>
+                      <m:sub>
+                        <m:r>
+                          <a:rPr lang="en-US" altLang="ja-JP" sz="2000" b="0" i="1" smtClean="0">
+                            <a:latin typeface="Cambria Math" panose="02040503050406030204" pitchFamily="18" charset="0"/>
+                          </a:rPr>
+                          <m:t>𝑘</m:t>
+                        </m:r>
+                      </m:sub>
+                    </m:sSub>
+                    <m:r>
+                      <a:rPr lang="en-US" altLang="ja-JP" sz="2000" b="0" i="1" smtClean="0">
+                        <a:latin typeface="Cambria Math" panose="02040503050406030204" pitchFamily="18" charset="0"/>
+                      </a:rPr>
+                      <m:t>=</m:t>
+                    </m:r>
+                    <m:f>
+                      <m:fPr>
+                        <m:ctrlPr>
+                          <a:rPr lang="en-US" altLang="ja-JP" sz="2000" b="0" i="1" smtClean="0">
+                            <a:latin typeface="Cambria Math" panose="02040503050406030204" pitchFamily="18" charset="0"/>
+                          </a:rPr>
+                        </m:ctrlPr>
+                      </m:fPr>
+                      <m:num>
+                        <m:r>
+                          <a:rPr lang="en-US" altLang="ja-JP" sz="2000" b="0" i="1" smtClean="0">
+                            <a:latin typeface="Cambria Math" panose="02040503050406030204" pitchFamily="18" charset="0"/>
+                          </a:rPr>
+                          <m:t>100</m:t>
+                        </m:r>
+                      </m:num>
+                      <m:den>
+                        <m:r>
+                          <a:rPr lang="en-US" altLang="ja-JP" sz="2000" b="0" i="1" smtClean="0">
+                            <a:latin typeface="Cambria Math" panose="02040503050406030204" pitchFamily="18" charset="0"/>
+                          </a:rPr>
+                          <m:t>1000</m:t>
+                        </m:r>
+                      </m:den>
+                    </m:f>
+                    <m:r>
+                      <a:rPr lang="en-US" altLang="ja-JP" sz="2000" b="0" i="1" smtClean="0">
+                        <a:latin typeface="Cambria Math" panose="02040503050406030204" pitchFamily="18" charset="0"/>
+                      </a:rPr>
+                      <m:t>=0.01</m:t>
+                    </m:r>
+                  </m:oMath>
+                </a14:m>
+                <a:r>
+                  <a:rPr lang="en-US" altLang="ja-JP" sz="2000" dirty="0">
+                    <a:latin typeface="Google Sans Text"/>
+                  </a:rPr>
+                  <a:t> </a:t>
+                </a:r>
+                <a:r>
+                  <a:rPr lang="ja-JP" altLang="en-US" sz="2000">
+                    <a:latin typeface="Google Sans Text"/>
+                  </a:rPr>
+                  <a:t>。</a:t>
+                </a:r>
+                <a:endParaRPr lang="en-US" altLang="ja-JP" sz="2000" dirty="0">
+                  <a:latin typeface="Google Sans Text"/>
+                </a:endParaRPr>
+              </a:p>
+              <a:p>
+                <a:pPr>
+                  <a:lnSpc>
+                    <a:spcPct val="150000"/>
+                  </a:lnSpc>
+                </a:pPr>
+                <a:r>
+                  <a:rPr lang="en-US" altLang="ja-JP" sz="2000" dirty="0">
+                    <a:latin typeface="Google Sans Text"/>
+                  </a:rPr>
+                  <a:t>0.01</a:t>
+                </a:r>
+                <a:r>
+                  <a:rPr lang="ja-JP" altLang="en-US" sz="2000">
+                    <a:latin typeface="Google Sans Text"/>
+                  </a:rPr>
+                  <a:t>代表被抽中的這 </a:t>
+                </a:r>
+                <a:r>
+                  <a:rPr lang="en-US" altLang="ja-JP" sz="2000" dirty="0">
+                    <a:latin typeface="Google Sans Text"/>
+                  </a:rPr>
+                  <a:t>100 </a:t>
+                </a:r>
+                <a:r>
+                  <a:rPr lang="ja-JP" altLang="en-US" sz="2000">
+                    <a:latin typeface="Google Sans Text"/>
+                  </a:rPr>
+                  <a:t>個人，每個人身上都背負著另外 </a:t>
+                </a:r>
+                <a:r>
+                  <a:rPr lang="en-US" altLang="ja-JP" sz="2000" dirty="0">
+                    <a:latin typeface="Google Sans Text"/>
+                  </a:rPr>
+                  <a:t>99 </a:t>
+                </a:r>
+                <a:r>
+                  <a:rPr lang="ja-JP" altLang="en-US" sz="2000">
+                    <a:latin typeface="Google Sans Text"/>
+                  </a:rPr>
+                  <a:t>個沒被抽中同學的影子。</a:t>
+                </a:r>
+                <a:endParaRPr lang="en-US" altLang="ja-JP" sz="2000" dirty="0">
+                  <a:latin typeface="Google Sans Text"/>
+                </a:endParaRPr>
+              </a:p>
+              <a:p>
+                <a:pPr>
+                  <a:lnSpc>
+                    <a:spcPct val="150000"/>
+                  </a:lnSpc>
+                </a:pPr>
+                <a:r>
+                  <a:rPr lang="ja-JP" altLang="en-US" sz="2000">
+                    <a:latin typeface="Google Sans Text"/>
+                  </a:rPr>
+                  <a:t>根據</a:t>
+                </a:r>
+                <a:r>
+                  <a:rPr lang="en-US" altLang="ja-JP" sz="2000" dirty="0">
+                    <a:latin typeface="Google Sans Text"/>
+                  </a:rPr>
+                  <a:t>H-T</a:t>
+                </a:r>
+                <a:r>
+                  <a:rPr lang="ja-JP" altLang="en-US" sz="2000">
+                    <a:latin typeface="Google Sans Text"/>
+                  </a:rPr>
+                  <a:t>估計式，每個人的數值都要乘以 </a:t>
+                </a:r>
+                <a:r>
+                  <a:rPr lang="en-US" altLang="ja-JP" sz="2000" dirty="0">
+                    <a:latin typeface="Google Sans Text"/>
+                  </a:rPr>
+                  <a:t>100</a:t>
+                </a:r>
+                <a:r>
+                  <a:rPr lang="ja-JP" altLang="en-US" sz="2000">
+                    <a:latin typeface="Google Sans Text"/>
+                  </a:rPr>
+                  <a:t>（也就是</a:t>
+                </a:r>
+                <a14:m>
+                  <m:oMath xmlns:m="http://schemas.openxmlformats.org/officeDocument/2006/math">
+                    <m:sSub>
+                      <m:sSubPr>
+                        <m:ctrlPr>
+                          <a:rPr lang="en-US" altLang="ja-JP" sz="2000" i="1" smtClean="0">
+                            <a:latin typeface="Cambria Math" panose="02040503050406030204" pitchFamily="18" charset="0"/>
+                          </a:rPr>
+                        </m:ctrlPr>
+                      </m:sSubPr>
+                      <m:e>
+                        <m:r>
+                          <a:rPr lang="en-US" altLang="ja-JP" sz="2000" b="0" i="1" smtClean="0">
+                            <a:latin typeface="Cambria Math" panose="02040503050406030204" pitchFamily="18" charset="0"/>
+                          </a:rPr>
+                          <m:t>𝑤</m:t>
+                        </m:r>
+                      </m:e>
+                      <m:sub>
+                        <m:r>
+                          <a:rPr lang="en-US" altLang="ja-JP" sz="2000" b="0" i="1" smtClean="0">
+                            <a:latin typeface="Cambria Math" panose="02040503050406030204" pitchFamily="18" charset="0"/>
+                          </a:rPr>
+                          <m:t>𝑘</m:t>
+                        </m:r>
+                      </m:sub>
+                    </m:sSub>
+                    <m:r>
+                      <a:rPr lang="en-US" altLang="ja-JP" sz="2000" b="0" i="1" smtClean="0">
+                        <a:latin typeface="Cambria Math" panose="02040503050406030204" pitchFamily="18" charset="0"/>
+                      </a:rPr>
+                      <m:t>=</m:t>
+                    </m:r>
+                    <m:f>
+                      <m:fPr>
+                        <m:ctrlPr>
+                          <a:rPr lang="en-US" altLang="ja-JP" sz="2000" b="0" i="1" smtClean="0">
+                            <a:latin typeface="Cambria Math" panose="02040503050406030204" pitchFamily="18" charset="0"/>
+                          </a:rPr>
+                        </m:ctrlPr>
+                      </m:fPr>
+                      <m:num>
+                        <m:r>
+                          <a:rPr lang="en-US" altLang="ja-JP" sz="2000" b="0" i="1" smtClean="0">
+                            <a:latin typeface="Cambria Math" panose="02040503050406030204" pitchFamily="18" charset="0"/>
+                          </a:rPr>
+                          <m:t>1</m:t>
+                        </m:r>
+                      </m:num>
+                      <m:den>
+                        <m:r>
+                          <a:rPr lang="en-US" altLang="ja-JP" sz="2000" b="0" i="1" smtClean="0">
+                            <a:latin typeface="Cambria Math" panose="02040503050406030204" pitchFamily="18" charset="0"/>
+                          </a:rPr>
+                          <m:t>0.01</m:t>
+                        </m:r>
+                      </m:den>
+                    </m:f>
+                    <m:r>
+                      <a:rPr lang="en-US" altLang="ja-JP" sz="2000" b="0" i="1" smtClean="0">
+                        <a:latin typeface="Cambria Math" panose="02040503050406030204" pitchFamily="18" charset="0"/>
+                      </a:rPr>
+                      <m:t>=100</m:t>
+                    </m:r>
+                  </m:oMath>
+                </a14:m>
+                <a:r>
+                  <a:rPr lang="ja-JP" altLang="en-US" sz="2000">
+                    <a:latin typeface="Google Sans Text"/>
+                  </a:rPr>
+                  <a:t>） 。</a:t>
+                </a:r>
+                <a:endParaRPr lang="en-US" altLang="ja-JP" sz="2000" dirty="0">
+                  <a:latin typeface="Google Sans Text"/>
+                </a:endParaRPr>
+              </a:p>
+              <a:p>
+                <a:pPr>
+                  <a:lnSpc>
+                    <a:spcPct val="150000"/>
+                  </a:lnSpc>
+                </a:pPr>
+                <a:r>
+                  <a:rPr lang="ja-JP" altLang="en-US" sz="2000">
+                    <a:latin typeface="Google Sans Text"/>
+                  </a:rPr>
+                  <a:t>把這 </a:t>
+                </a:r>
+                <a:r>
+                  <a:rPr lang="en-US" altLang="ja-JP" sz="2000" dirty="0">
+                    <a:latin typeface="Google Sans Text"/>
+                  </a:rPr>
+                  <a:t>100 </a:t>
+                </a:r>
+                <a:r>
+                  <a:rPr lang="ja-JP" altLang="en-US" sz="2000">
+                    <a:latin typeface="Google Sans Text"/>
+                  </a:rPr>
+                  <a:t>個人的生活費加起來，算出平均是 </a:t>
+                </a:r>
+                <a:r>
+                  <a:rPr lang="en-US" altLang="ja-JP" sz="2000" dirty="0">
+                    <a:latin typeface="Google Sans Text"/>
+                  </a:rPr>
+                  <a:t>12,000 </a:t>
+                </a:r>
+                <a:r>
+                  <a:rPr lang="ja-JP" altLang="en-US" sz="2000">
+                    <a:latin typeface="Google Sans Text"/>
+                  </a:rPr>
+                  <a:t>元。這是「最佳猜測」。如果這 </a:t>
+                </a:r>
+                <a:r>
+                  <a:rPr lang="en-US" altLang="ja-JP" sz="2000" dirty="0">
+                    <a:latin typeface="Google Sans Text"/>
+                  </a:rPr>
+                  <a:t>100 </a:t>
+                </a:r>
+                <a:r>
+                  <a:rPr lang="ja-JP" altLang="en-US" sz="2000">
+                    <a:latin typeface="Google Sans Text"/>
+                  </a:rPr>
+                  <a:t>人之中有人花 </a:t>
+                </a:r>
+                <a:r>
+                  <a:rPr lang="en-US" altLang="ja-JP" sz="2000" dirty="0">
+                    <a:latin typeface="Google Sans Text"/>
+                  </a:rPr>
+                  <a:t>5,000</a:t>
+                </a:r>
+                <a:r>
+                  <a:rPr lang="ja-JP" altLang="en-US" sz="2000">
+                    <a:latin typeface="Google Sans Text"/>
+                  </a:rPr>
+                  <a:t>，有人花 </a:t>
+                </a:r>
+                <a:r>
+                  <a:rPr lang="en-US" altLang="ja-JP" sz="2000" dirty="0">
+                    <a:latin typeface="Google Sans Text"/>
+                  </a:rPr>
+                  <a:t>50,000</a:t>
+                </a:r>
+                <a:r>
+                  <a:rPr lang="ja-JP" altLang="en-US" sz="2000">
+                    <a:latin typeface="Google Sans Text"/>
+                  </a:rPr>
+                  <a:t>，剛剛的猜測就不太精確，每一次猜測會差別很大。</a:t>
+                </a:r>
+                <a:endParaRPr lang="en-US" altLang="ja-JP" sz="2000" dirty="0">
+                  <a:latin typeface="Google Sans Text"/>
+                </a:endParaRPr>
+              </a:p>
+              <a:p>
+                <a:pPr>
+                  <a:lnSpc>
+                    <a:spcPct val="150000"/>
+                  </a:lnSpc>
+                </a:pPr>
+                <a:r>
+                  <a:rPr lang="ja-JP" altLang="en-US" sz="2000"/>
+                  <a:t>為了保險起見，用區間估計描述而不是點估計。統計學家告訴我們，通常在平均值左右各加減約 </a:t>
+                </a:r>
+                <a:r>
+                  <a:rPr lang="en-US" altLang="ja-JP" sz="2000" dirty="0"/>
+                  <a:t>2 </a:t>
+                </a:r>
+                <a:r>
+                  <a:rPr lang="ja-JP" altLang="en-US" sz="2000"/>
+                  <a:t>個標準誤（精確說是 </a:t>
+                </a:r>
+                <a:r>
+                  <a:rPr lang="en-US" altLang="ja-JP" sz="2000" dirty="0"/>
+                  <a:t>1.96</a:t>
+                </a:r>
+                <a:r>
+                  <a:rPr lang="ja-JP" altLang="en-US" sz="2000"/>
+                  <a:t>），就能涵蓋 </a:t>
+                </a:r>
+                <a:r>
+                  <a:rPr lang="en-US" altLang="ja-JP" sz="2000" dirty="0"/>
+                  <a:t>95% </a:t>
+                </a:r>
+                <a:r>
+                  <a:rPr lang="ja-JP" altLang="en-US" sz="2000"/>
+                  <a:t>的可能性。如果算出來標準誤是 </a:t>
+                </a:r>
+                <a:r>
+                  <a:rPr lang="en-US" altLang="ja-JP" sz="2000" dirty="0"/>
+                  <a:t>200 </a:t>
+                </a:r>
+                <a:r>
+                  <a:rPr lang="ja-JP" altLang="en-US" sz="2000"/>
+                  <a:t>元，</a:t>
+                </a:r>
+                <a:r>
+                  <a:rPr lang="ja-JP" altLang="en-US" sz="2000">
+                    <a:latin typeface="Google Sans Text"/>
+                  </a:rPr>
+                  <a:t>生活費的信賴區間估計為：</a:t>
+                </a:r>
+                <a14:m>
+                  <m:oMath xmlns:m="http://schemas.openxmlformats.org/officeDocument/2006/math">
+                    <m:r>
+                      <a:rPr lang="en-US" altLang="ja-JP" sz="2000" b="0" i="1" smtClean="0">
+                        <a:latin typeface="Cambria Math" panose="02040503050406030204" pitchFamily="18" charset="0"/>
+                      </a:rPr>
+                      <m:t>12,000</m:t>
+                    </m:r>
+                    <m:r>
+                      <a:rPr lang="en-US" altLang="ja-JP" sz="2000" b="0" i="1" smtClean="0">
+                        <a:latin typeface="Cambria Math" panose="02040503050406030204" pitchFamily="18" charset="0"/>
+                        <a:ea typeface="Cambria Math" panose="02040503050406030204" pitchFamily="18" charset="0"/>
+                      </a:rPr>
+                      <m:t>±1.96×200→[11,608,12,392]</m:t>
+                    </m:r>
+                  </m:oMath>
+                </a14:m>
+                <a:endParaRPr lang="en-US" altLang="ja-JP" sz="2000" dirty="0">
+                  <a:latin typeface="Google Sans Text"/>
+                </a:endParaRPr>
+              </a:p>
+              <a:p>
+                <a:pPr marL="0" indent="0">
+                  <a:lnSpc>
+                    <a:spcPct val="150000"/>
+                  </a:lnSpc>
+                  <a:buNone/>
+                </a:pPr>
+                <a:endParaRPr lang="en-US" altLang="ja-JP" sz="2000" dirty="0">
+                  <a:effectLst/>
+                  <a:latin typeface="Google Sans Text"/>
+                </a:endParaRPr>
+              </a:p>
+              <a:p>
+                <a:pPr>
+                  <a:lnSpc>
+                    <a:spcPct val="150000"/>
+                  </a:lnSpc>
+                </a:pPr>
+                <a:endParaRPr lang="ja-JP" altLang="en-US" sz="2000">
+                  <a:effectLst/>
+                  <a:latin typeface="Google Sans Text"/>
+                </a:endParaRPr>
+              </a:p>
+              <a:p>
+                <a:endParaRPr lang="en-US" dirty="0"/>
+              </a:p>
+            </p:txBody>
+          </p:sp>
+        </mc:Choice>
+        <mc:Fallback xmlns="">
+          <p:sp>
+            <p:nvSpPr>
+              <p:cNvPr id="3" name="Content Placeholder 2">
+                <a:extLst>
+                  <a:ext uri="{FF2B5EF4-FFF2-40B4-BE49-F238E27FC236}">
+                    <a16:creationId xmlns:a16="http://schemas.microsoft.com/office/drawing/2014/main" id="{659579A7-244A-1B4E-A6EF-9B1F87EA3242}"/>
+                  </a:ext>
+                </a:extLst>
+              </p:cNvPr>
+              <p:cNvSpPr>
+                <a:spLocks noGrp="1" noRot="1" noChangeAspect="1" noMove="1" noResize="1" noEditPoints="1" noAdjustHandles="1" noChangeArrowheads="1" noChangeShapeType="1" noTextEdit="1"/>
+              </p:cNvSpPr>
+              <p:nvPr>
+                <p:ph idx="1"/>
+              </p:nvPr>
+            </p:nvSpPr>
+            <p:spPr>
+              <a:blipFill>
+                <a:blip r:embed="rId2"/>
+                <a:stretch>
+                  <a:fillRect l="-362" r="-2171"/>
+                </a:stretch>
+              </a:blipFill>
+            </p:spPr>
+            <p:txBody>
+              <a:bodyPr/>
+              <a:lstStyle/>
+              <a:p>
+                <a:r>
+                  <a:rPr lang="en-US">
+                    <a:noFill/>
+                  </a:rPr>
+                  <a:t> </a:t>
+                </a:r>
+              </a:p>
+            </p:txBody>
+          </p:sp>
+        </mc:Fallback>
+      </mc:AlternateContent>
+      <p:sp>
+        <p:nvSpPr>
+          <p:cNvPr id="4" name="Slide Number Placeholder 3">
+            <a:extLst>
+              <a:ext uri="{FF2B5EF4-FFF2-40B4-BE49-F238E27FC236}">
+                <a16:creationId xmlns:a16="http://schemas.microsoft.com/office/drawing/2014/main" id="{49069B59-1518-4C2D-ABA7-09A5F449F58E}"/>
+              </a:ext>
+            </a:extLst>
+          </p:cNvPr>
+          <p:cNvSpPr>
+            <a:spLocks noGrp="1"/>
+          </p:cNvSpPr>
+          <p:nvPr>
+            <p:ph type="sldNum" sz="quarter" idx="12"/>
+          </p:nvPr>
+        </p:nvSpPr>
+        <p:spPr/>
+        <p:txBody>
+          <a:bodyPr/>
+          <a:lstStyle/>
+          <a:p>
+            <a:fld id="{34E21383-B02B-694B-B2AD-A967203CDE86}" type="slidenum">
+              <a:rPr lang="en-US" smtClean="0"/>
+              <a:t>19</a:t>
+            </a:fld>
+            <a:endParaRPr lang="en-US"/>
+          </a:p>
+        </p:txBody>
+      </p:sp>
+    </p:spTree>
+    <p:extLst>
+      <p:ext uri="{BB962C8B-B14F-4D97-AF65-F5344CB8AC3E}">
+        <p14:creationId xmlns:p14="http://schemas.microsoft.com/office/powerpoint/2010/main" val="4004838775"/>
       </p:ext>
     </p:extLst>
   </p:cSld>
@@ -9895,6 +13005,4547 @@
     <p:extLst>
       <p:ext uri="{BB962C8B-B14F-4D97-AF65-F5344CB8AC3E}">
         <p14:creationId xmlns:p14="http://schemas.microsoft.com/office/powerpoint/2010/main" val="3913136485"/>
+      </p:ext>
+    </p:extLst>
+  </p:cSld>
+  <p:clrMapOvr>
+    <a:masterClrMapping/>
+  </p:clrMapOvr>
+</p:sld>
+</file>
+
+<file path=ppt/slides/slide20.xml><?xml version="1.0" encoding="utf-8"?>
+<p:sld xmlns:a="http://schemas.openxmlformats.org/drawingml/2006/main" xmlns:r="http://schemas.openxmlformats.org/officeDocument/2006/relationships" xmlns:p="http://schemas.openxmlformats.org/presentationml/2006/main">
+  <p:cSld>
+    <p:spTree>
+      <p:nvGrpSpPr>
+        <p:cNvPr id="1" name=""/>
+        <p:cNvGrpSpPr/>
+        <p:nvPr/>
+      </p:nvGrpSpPr>
+      <p:grpSpPr>
+        <a:xfrm>
+          <a:off x="0" y="0"/>
+          <a:ext cx="0" cy="0"/>
+          <a:chOff x="0" y="0"/>
+          <a:chExt cx="0" cy="0"/>
+        </a:xfrm>
+      </p:grpSpPr>
+      <p:sp>
+        <p:nvSpPr>
+          <p:cNvPr id="2" name="Title 1">
+            <a:extLst>
+              <a:ext uri="{FF2B5EF4-FFF2-40B4-BE49-F238E27FC236}">
+                <a16:creationId xmlns:a16="http://schemas.microsoft.com/office/drawing/2014/main" id="{31C60B46-553E-18AD-A4BE-E745BAB0CAA0}"/>
+              </a:ext>
+            </a:extLst>
+          </p:cNvPr>
+          <p:cNvSpPr>
+            <a:spLocks noGrp="1"/>
+          </p:cNvSpPr>
+          <p:nvPr>
+            <p:ph type="title"/>
+          </p:nvPr>
+        </p:nvSpPr>
+        <p:spPr/>
+        <p:txBody>
+          <a:bodyPr/>
+          <a:lstStyle/>
+          <a:p>
+            <a:r>
+              <a:rPr lang="ja-JP" altLang="en-US"/>
+              <a:t>簡單隨機抽樣（四）</a:t>
+            </a:r>
+            <a:endParaRPr lang="en-US" dirty="0"/>
+          </a:p>
+        </p:txBody>
+      </p:sp>
+      <mc:AlternateContent xmlns:mc="http://schemas.openxmlformats.org/markup-compatibility/2006" xmlns:a14="http://schemas.microsoft.com/office/drawing/2010/main">
+        <mc:Choice Requires="a14">
+          <p:sp>
+            <p:nvSpPr>
+              <p:cNvPr id="3" name="Content Placeholder 2">
+                <a:extLst>
+                  <a:ext uri="{FF2B5EF4-FFF2-40B4-BE49-F238E27FC236}">
+                    <a16:creationId xmlns:a16="http://schemas.microsoft.com/office/drawing/2014/main" id="{659579A7-244A-1B4E-A6EF-9B1F87EA3242}"/>
+                  </a:ext>
+                </a:extLst>
+              </p:cNvPr>
+              <p:cNvSpPr>
+                <a:spLocks noGrp="1"/>
+              </p:cNvSpPr>
+              <p:nvPr>
+                <p:ph idx="1"/>
+              </p:nvPr>
+            </p:nvSpPr>
+            <p:spPr/>
+            <p:txBody>
+              <a:bodyPr>
+                <a:normAutofit fontScale="92500"/>
+              </a:bodyPr>
+              <a:lstStyle/>
+              <a:p>
+                <a:pPr marL="457200" indent="-457200">
+                  <a:lnSpc>
+                    <a:spcPct val="150000"/>
+                  </a:lnSpc>
+                  <a:buAutoNum type="arabicPeriod"/>
+                </a:pPr>
+                <a:r>
+                  <a:rPr lang="ja-JP" altLang="en-US" sz="2000">
+                    <a:effectLst/>
+                    <a:latin typeface="Google Sans Text"/>
+                  </a:rPr>
+                  <a:t>為什麼是「</a:t>
+                </a:r>
+                <a:r>
+                  <a:rPr lang="en-US" altLang="ja-JP" sz="2000" dirty="0">
+                    <a:effectLst/>
+                    <a:latin typeface="Google Sans Text"/>
+                  </a:rPr>
+                  <a:t>2</a:t>
+                </a:r>
+                <a:r>
+                  <a:rPr lang="ja-JP" altLang="en-US" sz="2000">
+                    <a:effectLst/>
+                    <a:latin typeface="Google Sans Text"/>
+                  </a:rPr>
+                  <a:t>」個標準誤？（</a:t>
+                </a:r>
+                <a:r>
+                  <a:rPr lang="en-US" altLang="ja-JP" sz="2000" dirty="0">
+                    <a:effectLst/>
+                    <a:latin typeface="Google Sans Text"/>
+                  </a:rPr>
+                  <a:t>68-95-99.7 </a:t>
+                </a:r>
+                <a:r>
+                  <a:rPr lang="ja-JP" altLang="en-US" sz="2000">
+                    <a:effectLst/>
+                    <a:latin typeface="Google Sans Text"/>
+                  </a:rPr>
+                  <a:t>法則）在統計學中，當樣本數夠大時，樣本平均數的分佈會趨近於常態分佈。常態分佈有一個特殊的數學比例：加減 </a:t>
+                </a:r>
+                <a:r>
+                  <a:rPr lang="en-US" altLang="ja-JP" sz="2000" dirty="0">
+                    <a:effectLst/>
+                    <a:latin typeface="Google Sans Text"/>
+                  </a:rPr>
+                  <a:t>1 </a:t>
+                </a:r>
+                <a:r>
+                  <a:rPr lang="ja-JP" altLang="en-US" sz="2000">
+                    <a:effectLst/>
+                    <a:latin typeface="Google Sans Text"/>
+                  </a:rPr>
+                  <a:t>個標準誤：大約涵蓋 </a:t>
+                </a:r>
+                <a:r>
+                  <a:rPr lang="en-US" altLang="ja-JP" sz="2000" dirty="0">
+                    <a:effectLst/>
+                    <a:latin typeface="Google Sans Text"/>
+                  </a:rPr>
+                  <a:t>68% </a:t>
+                </a:r>
+                <a:r>
+                  <a:rPr lang="ja-JP" altLang="en-US" sz="2000">
+                    <a:effectLst/>
+                    <a:latin typeface="Google Sans Text"/>
+                  </a:rPr>
+                  <a:t>的可能性。加減 </a:t>
+                </a:r>
+                <a:r>
+                  <a:rPr lang="en-US" altLang="ja-JP" sz="2000" dirty="0">
+                    <a:effectLst/>
+                    <a:latin typeface="Google Sans Text"/>
+                  </a:rPr>
+                  <a:t>2 </a:t>
+                </a:r>
+                <a:r>
+                  <a:rPr lang="ja-JP" altLang="en-US" sz="2000">
+                    <a:effectLst/>
+                    <a:latin typeface="Google Sans Text"/>
+                  </a:rPr>
+                  <a:t>個標準誤：大約涵蓋 </a:t>
+                </a:r>
+                <a:r>
+                  <a:rPr lang="en-US" altLang="ja-JP" sz="2000" dirty="0">
+                    <a:effectLst/>
+                    <a:latin typeface="Google Sans Text"/>
+                  </a:rPr>
+                  <a:t>95% </a:t>
+                </a:r>
+                <a:r>
+                  <a:rPr lang="ja-JP" altLang="en-US" sz="2000">
+                    <a:effectLst/>
+                    <a:latin typeface="Google Sans Text"/>
+                  </a:rPr>
+                  <a:t>的可能性（更精確的數字是 </a:t>
+                </a:r>
+                <a:r>
+                  <a:rPr lang="en-US" altLang="ja-JP" sz="2000" dirty="0">
+                    <a:effectLst/>
+                    <a:latin typeface="Google Sans Text"/>
+                  </a:rPr>
+                  <a:t>$1.96$ </a:t>
+                </a:r>
+                <a:r>
+                  <a:rPr lang="ja-JP" altLang="en-US" sz="2000">
+                    <a:effectLst/>
+                    <a:latin typeface="Google Sans Text"/>
+                  </a:rPr>
+                  <a:t>倍）。加減 </a:t>
+                </a:r>
+                <a:r>
+                  <a:rPr lang="en-US" altLang="ja-JP" sz="2000" dirty="0">
+                    <a:effectLst/>
+                    <a:latin typeface="Google Sans Text"/>
+                  </a:rPr>
+                  <a:t>3 </a:t>
+                </a:r>
+                <a:r>
+                  <a:rPr lang="ja-JP" altLang="en-US" sz="2000">
+                    <a:effectLst/>
+                    <a:latin typeface="Google Sans Text"/>
+                  </a:rPr>
+                  <a:t>個標準誤：大約涵蓋 </a:t>
+                </a:r>
+                <a:r>
+                  <a:rPr lang="en-US" altLang="ja-JP" sz="2000" dirty="0">
+                    <a:effectLst/>
+                    <a:latin typeface="Google Sans Text"/>
+                  </a:rPr>
+                  <a:t>99.7% </a:t>
+                </a:r>
+                <a:r>
+                  <a:rPr lang="ja-JP" altLang="en-US" sz="2000">
+                    <a:effectLst/>
+                    <a:latin typeface="Google Sans Text"/>
+                  </a:rPr>
+                  <a:t>的可能性。「</a:t>
+                </a:r>
+                <a:r>
+                  <a:rPr lang="en-US" altLang="ja-JP" sz="2000" dirty="0">
+                    <a:effectLst/>
+                    <a:latin typeface="Google Sans Text"/>
+                  </a:rPr>
+                  <a:t>2 </a:t>
+                </a:r>
+                <a:r>
+                  <a:rPr lang="ja-JP" altLang="en-US" sz="2000">
+                    <a:effectLst/>
+                    <a:latin typeface="Google Sans Text"/>
+                  </a:rPr>
+                  <a:t>個標準誤」之所以成為標準，是因為它在「精確度」與「保險程度」之間取得了一個完美的平衡。它告訴我們：「如果你重複做 </a:t>
+                </a:r>
+                <a:r>
+                  <a:rPr lang="en-US" altLang="ja-JP" sz="2000" dirty="0">
+                    <a:effectLst/>
+                    <a:latin typeface="Google Sans Text"/>
+                  </a:rPr>
+                  <a:t>100 </a:t>
+                </a:r>
+                <a:r>
+                  <a:rPr lang="ja-JP" altLang="en-US" sz="2000">
+                    <a:effectLst/>
+                    <a:latin typeface="Google Sans Text"/>
+                  </a:rPr>
+                  <a:t>次調查，大約有 </a:t>
+                </a:r>
+                <a:r>
+                  <a:rPr lang="en-US" altLang="ja-JP" sz="2000" dirty="0">
+                    <a:effectLst/>
+                    <a:latin typeface="Google Sans Text"/>
+                  </a:rPr>
+                  <a:t>95 </a:t>
+                </a:r>
+                <a:r>
+                  <a:rPr lang="ja-JP" altLang="en-US" sz="2000">
+                    <a:effectLst/>
+                    <a:latin typeface="Google Sans Text"/>
+                  </a:rPr>
+                  <a:t>次算出母體真相會落在這個加減 </a:t>
+                </a:r>
+                <a:r>
+                  <a:rPr lang="en-US" altLang="ja-JP" sz="2000" dirty="0">
+                    <a:effectLst/>
+                    <a:latin typeface="Google Sans Text"/>
+                  </a:rPr>
+                  <a:t>2 </a:t>
+                </a:r>
+                <a:r>
+                  <a:rPr lang="ja-JP" altLang="en-US" sz="2000">
+                    <a:effectLst/>
+                    <a:latin typeface="Google Sans Text"/>
+                  </a:rPr>
+                  <a:t>倍的範圍內。」</a:t>
+                </a:r>
+                <a:endParaRPr lang="en-US" altLang="ja-JP" sz="2000" dirty="0">
+                  <a:effectLst/>
+                  <a:latin typeface="Google Sans Text"/>
+                </a:endParaRPr>
+              </a:p>
+              <a:p>
+                <a:pPr marL="457200" indent="-457200">
+                  <a:lnSpc>
+                    <a:spcPct val="150000"/>
+                  </a:lnSpc>
+                  <a:buAutoNum type="arabicPeriod"/>
+                </a:pPr>
+                <a:r>
+                  <a:rPr lang="ja-JP" altLang="en-US" sz="2000">
+                    <a:effectLst/>
+                    <a:latin typeface="Google Sans Text"/>
+                  </a:rPr>
+                  <a:t>標準誤（</a:t>
+                </a:r>
+                <a:r>
+                  <a:rPr lang="en-US" altLang="ja-JP" sz="2000" dirty="0">
+                    <a:effectLst/>
+                    <a:latin typeface="Google Sans Text"/>
+                  </a:rPr>
+                  <a:t>Standard Error, SE</a:t>
+                </a:r>
+                <a:r>
+                  <a:rPr lang="ja-JP" altLang="en-US" sz="2000">
+                    <a:effectLst/>
+                    <a:latin typeface="Google Sans Text"/>
+                  </a:rPr>
+                  <a:t>）是衡量「估計有多準確」的程度。如果抽樣設計很穩定（例如包含機率 </a:t>
+                </a:r>
+                <a:r>
+                  <a:rPr lang="en-US" altLang="ja-JP" sz="2000" dirty="0">
+                    <a:effectLst/>
+                    <a:latin typeface="Google Sans Text"/>
+                  </a:rPr>
+                  <a:t> </a:t>
+                </a:r>
+                <a14:m>
+                  <m:oMath xmlns:m="http://schemas.openxmlformats.org/officeDocument/2006/math">
+                    <m:sSub>
+                      <m:sSubPr>
+                        <m:ctrlPr>
+                          <a:rPr lang="en-US" altLang="ja-JP" sz="2000" i="1" smtClean="0">
+                            <a:effectLst/>
+                            <a:latin typeface="Cambria Math" panose="02040503050406030204" pitchFamily="18" charset="0"/>
+                          </a:rPr>
+                        </m:ctrlPr>
+                      </m:sSubPr>
+                      <m:e>
+                        <m:r>
+                          <a:rPr lang="en-US" altLang="ja-JP" sz="2000" i="1" smtClean="0">
+                            <a:effectLst/>
+                            <a:latin typeface="Cambria Math" panose="02040503050406030204" pitchFamily="18" charset="0"/>
+                            <a:ea typeface="Cambria Math" panose="02040503050406030204" pitchFamily="18" charset="0"/>
+                          </a:rPr>
+                          <m:t>𝜋</m:t>
+                        </m:r>
+                      </m:e>
+                      <m:sub>
+                        <m:r>
+                          <a:rPr lang="en-US" altLang="ja-JP" sz="2000" b="0" i="1" smtClean="0">
+                            <a:effectLst/>
+                            <a:latin typeface="Cambria Math" panose="02040503050406030204" pitchFamily="18" charset="0"/>
+                          </a:rPr>
+                          <m:t>𝑘</m:t>
+                        </m:r>
+                      </m:sub>
+                    </m:sSub>
+                  </m:oMath>
+                </a14:m>
+                <a:r>
+                  <a:rPr lang="ja-JP" altLang="en-US" sz="2000">
+                    <a:effectLst/>
+                    <a:latin typeface="Google Sans Text"/>
+                  </a:rPr>
+                  <a:t>很大且平均），</a:t>
+                </a:r>
+                <a:r>
+                  <a:rPr lang="en-US" altLang="ja-JP" sz="2000" dirty="0">
+                    <a:effectLst/>
+                    <a:latin typeface="Google Sans Text"/>
+                  </a:rPr>
+                  <a:t>SE </a:t>
+                </a:r>
+                <a:r>
+                  <a:rPr lang="ja-JP" altLang="en-US" sz="2000">
+                    <a:effectLst/>
+                    <a:latin typeface="Google Sans Text"/>
+                  </a:rPr>
+                  <a:t>就會很小，代表估計很精確。根據 </a:t>
+                </a:r>
+                <a:r>
+                  <a:rPr lang="en-US" altLang="ja-JP" sz="2000" dirty="0">
+                    <a:effectLst/>
+                    <a:latin typeface="Google Sans Text"/>
+                  </a:rPr>
+                  <a:t>H-T </a:t>
+                </a:r>
+                <a:r>
+                  <a:rPr lang="ja-JP" altLang="en-US" sz="2000">
+                    <a:effectLst/>
+                    <a:latin typeface="Google Sans Text"/>
+                  </a:rPr>
+                  <a:t>變異數公式，如果你的樣本中出現了「權重極大」的個體</a:t>
+                </a:r>
+                <a:r>
+                  <a:rPr lang="ja-JP" altLang="en-US" sz="2000">
+                    <a:latin typeface="Google Sans Text"/>
+                  </a:rPr>
+                  <a:t>，</a:t>
+                </a:r>
+                <a:r>
+                  <a:rPr lang="ja-JP" altLang="en-US" sz="2000">
+                    <a:effectLst/>
+                    <a:latin typeface="Google Sans Text"/>
+                  </a:rPr>
+                  <a:t>會劇烈拉大變異數 </a:t>
+                </a:r>
+                <a14:m>
+                  <m:oMath xmlns:m="http://schemas.openxmlformats.org/officeDocument/2006/math">
+                    <m:r>
+                      <a:rPr lang="en-US" altLang="ja-JP" sz="2000" b="0" i="1" smtClean="0">
+                        <a:effectLst/>
+                        <a:latin typeface="Cambria Math" panose="02040503050406030204" pitchFamily="18" charset="0"/>
+                      </a:rPr>
+                      <m:t>𝑉</m:t>
+                    </m:r>
+                    <m:r>
+                      <a:rPr lang="en-US" altLang="ja-JP" sz="2000" b="0" i="1" smtClean="0">
+                        <a:effectLst/>
+                        <a:latin typeface="Cambria Math" panose="02040503050406030204" pitchFamily="18" charset="0"/>
+                      </a:rPr>
+                      <m:t>(</m:t>
+                    </m:r>
+                    <m:sSub>
+                      <m:sSubPr>
+                        <m:ctrlPr>
+                          <a:rPr lang="en-US" altLang="ja-JP" sz="2000" b="0" i="1" smtClean="0">
+                            <a:effectLst/>
+                            <a:latin typeface="Cambria Math" panose="02040503050406030204" pitchFamily="18" charset="0"/>
+                          </a:rPr>
+                        </m:ctrlPr>
+                      </m:sSubPr>
+                      <m:e>
+                        <m:acc>
+                          <m:accPr>
+                            <m:chr m:val="̅"/>
+                            <m:ctrlPr>
+                              <a:rPr lang="en-US" altLang="ja-JP" sz="2000" b="0" i="1" smtClean="0">
+                                <a:effectLst/>
+                                <a:latin typeface="Cambria Math" panose="02040503050406030204" pitchFamily="18" charset="0"/>
+                              </a:rPr>
+                            </m:ctrlPr>
+                          </m:accPr>
+                          <m:e>
+                            <m:r>
+                              <a:rPr lang="en-US" altLang="ja-JP" sz="2000" b="0" i="1" smtClean="0">
+                                <a:effectLst/>
+                                <a:latin typeface="Cambria Math" panose="02040503050406030204" pitchFamily="18" charset="0"/>
+                              </a:rPr>
+                              <m:t>𝑌</m:t>
+                            </m:r>
+                          </m:e>
+                        </m:acc>
+                      </m:e>
+                      <m:sub>
+                        <m:r>
+                          <a:rPr lang="en-US" altLang="ja-JP" sz="2000" b="0" i="1" smtClean="0">
+                            <a:effectLst/>
+                            <a:latin typeface="Cambria Math" panose="02040503050406030204" pitchFamily="18" charset="0"/>
+                          </a:rPr>
+                          <m:t>𝐻𝑇</m:t>
+                        </m:r>
+                      </m:sub>
+                    </m:sSub>
+                    <m:r>
+                      <a:rPr lang="en-US" altLang="ja-JP" sz="2000" b="0" i="1" smtClean="0">
+                        <a:effectLst/>
+                        <a:latin typeface="Cambria Math" panose="02040503050406030204" pitchFamily="18" charset="0"/>
+                      </a:rPr>
+                      <m:t>)</m:t>
+                    </m:r>
+                  </m:oMath>
+                </a14:m>
+                <a:r>
+                  <a:rPr lang="en-US" altLang="ja-JP" sz="2000" dirty="0">
+                    <a:effectLst/>
+                    <a:latin typeface="Google Sans Text"/>
+                  </a:rPr>
+                  <a:t> </a:t>
+                </a:r>
+                <a:r>
+                  <a:rPr lang="ja-JP" altLang="en-US" sz="2000">
+                    <a:effectLst/>
+                    <a:latin typeface="Google Sans Text"/>
+                  </a:rPr>
+                  <a:t>。</a:t>
+                </a:r>
+                <a:endParaRPr lang="en-US" altLang="ja-JP" sz="2000" dirty="0">
+                  <a:effectLst/>
+                  <a:latin typeface="Google Sans Text"/>
+                </a:endParaRPr>
+              </a:p>
+              <a:p>
+                <a:pPr>
+                  <a:lnSpc>
+                    <a:spcPct val="150000"/>
+                  </a:lnSpc>
+                </a:pPr>
+                <a:endParaRPr lang="ja-JP" altLang="en-US" sz="2000">
+                  <a:effectLst/>
+                  <a:latin typeface="Google Sans Text"/>
+                </a:endParaRPr>
+              </a:p>
+              <a:p>
+                <a:endParaRPr lang="en-US" dirty="0"/>
+              </a:p>
+            </p:txBody>
+          </p:sp>
+        </mc:Choice>
+        <mc:Fallback xmlns="">
+          <p:sp>
+            <p:nvSpPr>
+              <p:cNvPr id="3" name="Content Placeholder 2">
+                <a:extLst>
+                  <a:ext uri="{FF2B5EF4-FFF2-40B4-BE49-F238E27FC236}">
+                    <a16:creationId xmlns:a16="http://schemas.microsoft.com/office/drawing/2014/main" id="{659579A7-244A-1B4E-A6EF-9B1F87EA3242}"/>
+                  </a:ext>
+                </a:extLst>
+              </p:cNvPr>
+              <p:cNvSpPr>
+                <a:spLocks noGrp="1" noRot="1" noChangeAspect="1" noMove="1" noResize="1" noEditPoints="1" noAdjustHandles="1" noChangeArrowheads="1" noChangeShapeType="1" noTextEdit="1"/>
+              </p:cNvSpPr>
+              <p:nvPr>
+                <p:ph idx="1"/>
+              </p:nvPr>
+            </p:nvSpPr>
+            <p:spPr>
+              <a:blipFill>
+                <a:blip r:embed="rId2"/>
+                <a:stretch>
+                  <a:fillRect l="-603" r="-603"/>
+                </a:stretch>
+              </a:blipFill>
+            </p:spPr>
+            <p:txBody>
+              <a:bodyPr/>
+              <a:lstStyle/>
+              <a:p>
+                <a:r>
+                  <a:rPr lang="en-US">
+                    <a:noFill/>
+                  </a:rPr>
+                  <a:t> </a:t>
+                </a:r>
+              </a:p>
+            </p:txBody>
+          </p:sp>
+        </mc:Fallback>
+      </mc:AlternateContent>
+      <p:sp>
+        <p:nvSpPr>
+          <p:cNvPr id="4" name="Slide Number Placeholder 3">
+            <a:extLst>
+              <a:ext uri="{FF2B5EF4-FFF2-40B4-BE49-F238E27FC236}">
+                <a16:creationId xmlns:a16="http://schemas.microsoft.com/office/drawing/2014/main" id="{49069B59-1518-4C2D-ABA7-09A5F449F58E}"/>
+              </a:ext>
+            </a:extLst>
+          </p:cNvPr>
+          <p:cNvSpPr>
+            <a:spLocks noGrp="1"/>
+          </p:cNvSpPr>
+          <p:nvPr>
+            <p:ph type="sldNum" sz="quarter" idx="12"/>
+          </p:nvPr>
+        </p:nvSpPr>
+        <p:spPr/>
+        <p:txBody>
+          <a:bodyPr/>
+          <a:lstStyle/>
+          <a:p>
+            <a:fld id="{34E21383-B02B-694B-B2AD-A967203CDE86}" type="slidenum">
+              <a:rPr lang="en-US" smtClean="0"/>
+              <a:t>20</a:t>
+            </a:fld>
+            <a:endParaRPr lang="en-US"/>
+          </a:p>
+        </p:txBody>
+      </p:sp>
+    </p:spTree>
+    <p:extLst>
+      <p:ext uri="{BB962C8B-B14F-4D97-AF65-F5344CB8AC3E}">
+        <p14:creationId xmlns:p14="http://schemas.microsoft.com/office/powerpoint/2010/main" val="3124742044"/>
+      </p:ext>
+    </p:extLst>
+  </p:cSld>
+  <p:clrMapOvr>
+    <a:masterClrMapping/>
+  </p:clrMapOvr>
+</p:sld>
+</file>
+
+<file path=ppt/slides/slide21.xml><?xml version="1.0" encoding="utf-8"?>
+<p:sld xmlns:a="http://schemas.openxmlformats.org/drawingml/2006/main" xmlns:r="http://schemas.openxmlformats.org/officeDocument/2006/relationships" xmlns:p="http://schemas.openxmlformats.org/presentationml/2006/main">
+  <p:cSld>
+    <p:spTree>
+      <p:nvGrpSpPr>
+        <p:cNvPr id="1" name=""/>
+        <p:cNvGrpSpPr/>
+        <p:nvPr/>
+      </p:nvGrpSpPr>
+      <p:grpSpPr>
+        <a:xfrm>
+          <a:off x="0" y="0"/>
+          <a:ext cx="0" cy="0"/>
+          <a:chOff x="0" y="0"/>
+          <a:chExt cx="0" cy="0"/>
+        </a:xfrm>
+      </p:grpSpPr>
+      <p:sp>
+        <p:nvSpPr>
+          <p:cNvPr id="2" name="Title 1">
+            <a:extLst>
+              <a:ext uri="{FF2B5EF4-FFF2-40B4-BE49-F238E27FC236}">
+                <a16:creationId xmlns:a16="http://schemas.microsoft.com/office/drawing/2014/main" id="{72569343-5791-A650-E866-2F604E3046AF}"/>
+              </a:ext>
+            </a:extLst>
+          </p:cNvPr>
+          <p:cNvSpPr>
+            <a:spLocks noGrp="1"/>
+          </p:cNvSpPr>
+          <p:nvPr>
+            <p:ph type="title"/>
+          </p:nvPr>
+        </p:nvSpPr>
+        <p:spPr/>
+        <p:txBody>
+          <a:bodyPr/>
+          <a:lstStyle/>
+          <a:p>
+            <a:r>
+              <a:rPr lang="en-US" dirty="0" err="1"/>
+              <a:t>常態分佈機率圖</a:t>
+            </a:r>
+            <a:endParaRPr lang="en-US" dirty="0"/>
+          </a:p>
+        </p:txBody>
+      </p:sp>
+      <p:pic>
+        <p:nvPicPr>
+          <p:cNvPr id="6" name="Content Placeholder 5">
+            <a:extLst>
+              <a:ext uri="{FF2B5EF4-FFF2-40B4-BE49-F238E27FC236}">
+                <a16:creationId xmlns:a16="http://schemas.microsoft.com/office/drawing/2014/main" id="{5DEE3738-3304-B7A0-D842-5AA5ADEB0A45}"/>
+              </a:ext>
+            </a:extLst>
+          </p:cNvPr>
+          <p:cNvPicPr>
+            <a:picLocks noGrp="1" noChangeAspect="1"/>
+          </p:cNvPicPr>
+          <p:nvPr>
+            <p:ph idx="1"/>
+          </p:nvPr>
+        </p:nvPicPr>
+        <p:blipFill>
+          <a:blip r:embed="rId2"/>
+          <a:stretch>
+            <a:fillRect/>
+          </a:stretch>
+        </p:blipFill>
+        <p:spPr>
+          <a:xfrm>
+            <a:off x="1835079" y="1825625"/>
+            <a:ext cx="8521841" cy="4351338"/>
+          </a:xfrm>
+        </p:spPr>
+      </p:pic>
+      <p:sp>
+        <p:nvSpPr>
+          <p:cNvPr id="4" name="Slide Number Placeholder 3">
+            <a:extLst>
+              <a:ext uri="{FF2B5EF4-FFF2-40B4-BE49-F238E27FC236}">
+                <a16:creationId xmlns:a16="http://schemas.microsoft.com/office/drawing/2014/main" id="{4CE25201-1381-E289-C6CB-2D8BC3788355}"/>
+              </a:ext>
+            </a:extLst>
+          </p:cNvPr>
+          <p:cNvSpPr>
+            <a:spLocks noGrp="1"/>
+          </p:cNvSpPr>
+          <p:nvPr>
+            <p:ph type="sldNum" sz="quarter" idx="12"/>
+          </p:nvPr>
+        </p:nvSpPr>
+        <p:spPr/>
+        <p:txBody>
+          <a:bodyPr/>
+          <a:lstStyle/>
+          <a:p>
+            <a:fld id="{34E21383-B02B-694B-B2AD-A967203CDE86}" type="slidenum">
+              <a:rPr lang="en-US" smtClean="0"/>
+              <a:t>21</a:t>
+            </a:fld>
+            <a:endParaRPr lang="en-US"/>
+          </a:p>
+        </p:txBody>
+      </p:sp>
+    </p:spTree>
+    <p:extLst>
+      <p:ext uri="{BB962C8B-B14F-4D97-AF65-F5344CB8AC3E}">
+        <p14:creationId xmlns:p14="http://schemas.microsoft.com/office/powerpoint/2010/main" val="3677515029"/>
+      </p:ext>
+    </p:extLst>
+  </p:cSld>
+  <p:clrMapOvr>
+    <a:masterClrMapping/>
+  </p:clrMapOvr>
+</p:sld>
+</file>
+
+<file path=ppt/slides/slide22.xml><?xml version="1.0" encoding="utf-8"?>
+<p:sld xmlns:a="http://schemas.openxmlformats.org/drawingml/2006/main" xmlns:r="http://schemas.openxmlformats.org/officeDocument/2006/relationships" xmlns:p="http://schemas.openxmlformats.org/presentationml/2006/main">
+  <p:cSld>
+    <p:spTree>
+      <p:nvGrpSpPr>
+        <p:cNvPr id="1" name=""/>
+        <p:cNvGrpSpPr/>
+        <p:nvPr/>
+      </p:nvGrpSpPr>
+      <p:grpSpPr>
+        <a:xfrm>
+          <a:off x="0" y="0"/>
+          <a:ext cx="0" cy="0"/>
+          <a:chOff x="0" y="0"/>
+          <a:chExt cx="0" cy="0"/>
+        </a:xfrm>
+      </p:grpSpPr>
+      <p:sp>
+        <p:nvSpPr>
+          <p:cNvPr id="2" name="Title 1">
+            <a:extLst>
+              <a:ext uri="{FF2B5EF4-FFF2-40B4-BE49-F238E27FC236}">
+                <a16:creationId xmlns:a16="http://schemas.microsoft.com/office/drawing/2014/main" id="{31C60B46-553E-18AD-A4BE-E745BAB0CAA0}"/>
+              </a:ext>
+            </a:extLst>
+          </p:cNvPr>
+          <p:cNvSpPr>
+            <a:spLocks noGrp="1"/>
+          </p:cNvSpPr>
+          <p:nvPr>
+            <p:ph type="title"/>
+          </p:nvPr>
+        </p:nvSpPr>
+        <p:spPr/>
+        <p:txBody>
+          <a:bodyPr/>
+          <a:lstStyle/>
+          <a:p>
+            <a:r>
+              <a:rPr lang="ja-JP" altLang="en-US"/>
+              <a:t>簡單隨機抽樣（五）</a:t>
+            </a:r>
+            <a:endParaRPr lang="en-US" dirty="0"/>
+          </a:p>
+        </p:txBody>
+      </p:sp>
+      <mc:AlternateContent xmlns:mc="http://schemas.openxmlformats.org/markup-compatibility/2006" xmlns:a14="http://schemas.microsoft.com/office/drawing/2010/main">
+        <mc:Choice Requires="a14">
+          <p:sp>
+            <p:nvSpPr>
+              <p:cNvPr id="3" name="Content Placeholder 2">
+                <a:extLst>
+                  <a:ext uri="{FF2B5EF4-FFF2-40B4-BE49-F238E27FC236}">
+                    <a16:creationId xmlns:a16="http://schemas.microsoft.com/office/drawing/2014/main" id="{659579A7-244A-1B4E-A6EF-9B1F87EA3242}"/>
+                  </a:ext>
+                </a:extLst>
+              </p:cNvPr>
+              <p:cNvSpPr>
+                <a:spLocks noGrp="1"/>
+              </p:cNvSpPr>
+              <p:nvPr>
+                <p:ph idx="1"/>
+              </p:nvPr>
+            </p:nvSpPr>
+            <p:spPr/>
+            <p:txBody>
+              <a:bodyPr>
+                <a:normAutofit/>
+              </a:bodyPr>
+              <a:lstStyle/>
+              <a:p>
+                <a:pPr>
+                  <a:lnSpc>
+                    <a:spcPct val="150000"/>
+                  </a:lnSpc>
+                </a:pPr>
+                <a:r>
+                  <a:rPr lang="ja-JP" altLang="en-US" sz="2000">
+                    <a:effectLst/>
+                    <a:latin typeface="Google Sans Text"/>
+                  </a:rPr>
+                  <a:t>生活中經常估計比例，例如考生通過考試的比例、一年之中下雨的比例等等。</a:t>
+                </a:r>
+                <a:r>
+                  <a:rPr lang="ja-JP" altLang="en-US" sz="2000">
+                    <a:latin typeface="Google Sans Text"/>
+                  </a:rPr>
+                  <a:t>或者抽樣出</a:t>
+                </a:r>
+                <a:r>
+                  <a:rPr lang="en-US" altLang="ja-JP" sz="2000" dirty="0">
+                    <a:latin typeface="Google Sans Text"/>
+                  </a:rPr>
+                  <a:t>100</a:t>
+                </a:r>
+                <a:r>
+                  <a:rPr lang="ja-JP" altLang="en-US" sz="2000">
+                    <a:latin typeface="Google Sans Text"/>
+                  </a:rPr>
+                  <a:t>位受訪者，詢問他們是否支持週休三天的政策。</a:t>
+                </a:r>
+                <a:endParaRPr lang="en-US" altLang="ja-JP" sz="2000" dirty="0">
+                  <a:effectLst/>
+                  <a:latin typeface="Google Sans Text"/>
+                </a:endParaRPr>
+              </a:p>
+              <a:p>
+                <a:pPr>
+                  <a:lnSpc>
+                    <a:spcPct val="150000"/>
+                  </a:lnSpc>
+                </a:pPr>
+                <a:r>
+                  <a:rPr lang="ja-JP" altLang="en-US" sz="2000">
+                    <a:latin typeface="Google Sans Text"/>
+                  </a:rPr>
+                  <a:t>估計式寫成</a:t>
+                </a:r>
+                <a14:m>
+                  <m:oMath xmlns:m="http://schemas.openxmlformats.org/officeDocument/2006/math">
+                    <m:r>
+                      <a:rPr lang="en-US" altLang="ja-JP" sz="2000" b="0" i="1" smtClean="0">
+                        <a:latin typeface="Cambria Math" panose="02040503050406030204" pitchFamily="18" charset="0"/>
+                      </a:rPr>
+                      <m:t>𝑝</m:t>
+                    </m:r>
+                    <m:r>
+                      <a:rPr lang="en-US" altLang="ja-JP" sz="2000" b="0" i="1" smtClean="0">
+                        <a:latin typeface="Cambria Math" panose="02040503050406030204" pitchFamily="18" charset="0"/>
+                      </a:rPr>
+                      <m:t>=</m:t>
+                    </m:r>
+                    <m:d>
+                      <m:dPr>
+                        <m:ctrlPr>
+                          <a:rPr lang="en-US" altLang="ja-JP" sz="2000" b="0" i="1" smtClean="0">
+                            <a:latin typeface="Cambria Math" panose="02040503050406030204" pitchFamily="18" charset="0"/>
+                          </a:rPr>
+                        </m:ctrlPr>
+                      </m:dPr>
+                      <m:e>
+                        <m:r>
+                          <a:rPr lang="en-US" altLang="ja-JP" sz="2000" b="0" i="1" smtClean="0">
+                            <a:latin typeface="Cambria Math" panose="02040503050406030204" pitchFamily="18" charset="0"/>
+                          </a:rPr>
+                          <m:t>100</m:t>
+                        </m:r>
+                        <m:r>
+                          <a:rPr lang="en-US" altLang="ja-JP" sz="2000" b="0" i="1" smtClean="0">
+                            <a:latin typeface="Cambria Math" panose="02040503050406030204" pitchFamily="18" charset="0"/>
+                            <a:ea typeface="Cambria Math" panose="02040503050406030204" pitchFamily="18" charset="0"/>
+                          </a:rPr>
+                          <m:t>∙</m:t>
+                        </m:r>
+                        <m:acc>
+                          <m:accPr>
+                            <m:chr m:val="̅"/>
+                            <m:ctrlPr>
+                              <a:rPr lang="en-US" altLang="ja-JP" sz="2000" b="0" i="1" smtClean="0">
+                                <a:latin typeface="Cambria Math" panose="02040503050406030204" pitchFamily="18" charset="0"/>
+                                <a:ea typeface="Cambria Math" panose="02040503050406030204" pitchFamily="18" charset="0"/>
+                              </a:rPr>
+                            </m:ctrlPr>
+                          </m:accPr>
+                          <m:e>
+                            <m:r>
+                              <a:rPr lang="en-US" altLang="ja-JP" sz="2000" b="0" i="1" smtClean="0">
+                                <a:latin typeface="Cambria Math" panose="02040503050406030204" pitchFamily="18" charset="0"/>
+                                <a:ea typeface="Cambria Math" panose="02040503050406030204" pitchFamily="18" charset="0"/>
+                              </a:rPr>
+                              <m:t>𝑦</m:t>
+                            </m:r>
+                          </m:e>
+                        </m:acc>
+                      </m:e>
+                    </m:d>
+                    <m:r>
+                      <a:rPr lang="en-US" altLang="ja-JP" sz="2000" b="0" i="1" smtClean="0">
+                        <a:latin typeface="Cambria Math" panose="02040503050406030204" pitchFamily="18" charset="0"/>
+                      </a:rPr>
+                      <m:t>%</m:t>
+                    </m:r>
+                  </m:oMath>
+                </a14:m>
+                <a:r>
+                  <a:rPr lang="ja-JP" altLang="en-US" sz="2000">
+                    <a:effectLst/>
+                    <a:latin typeface="Google Sans Text"/>
+                  </a:rPr>
+                  <a:t>，例如</a:t>
+                </a:r>
+                <a:r>
+                  <a:rPr lang="en-US" altLang="ja-JP" sz="2000" dirty="0">
+                    <a:latin typeface="Google Sans Text"/>
+                  </a:rPr>
+                  <a:t>100</a:t>
+                </a:r>
+                <a:r>
+                  <a:rPr lang="ja-JP" altLang="en-US" sz="2000">
+                    <a:latin typeface="Google Sans Text"/>
+                  </a:rPr>
+                  <a:t>位受訪者中，只有</a:t>
+                </a:r>
+                <a:r>
+                  <a:rPr lang="en-US" altLang="ja-JP" sz="2000" dirty="0">
+                    <a:latin typeface="Google Sans Text"/>
+                  </a:rPr>
+                  <a:t>30</a:t>
+                </a:r>
+                <a:r>
+                  <a:rPr lang="ja-JP" altLang="en-US" sz="2000">
+                    <a:latin typeface="Google Sans Text"/>
+                  </a:rPr>
+                  <a:t>位贊成，記為</a:t>
+                </a:r>
+                <a:r>
+                  <a:rPr lang="en-US" altLang="ja-JP" sz="2000" dirty="0">
+                    <a:latin typeface="Google Sans Text"/>
+                  </a:rPr>
+                  <a:t>1</a:t>
+                </a:r>
+                <a:r>
+                  <a:rPr lang="ja-JP" altLang="en-US" sz="2000">
+                    <a:latin typeface="Google Sans Text"/>
+                  </a:rPr>
+                  <a:t>，</a:t>
+                </a:r>
+                <a:r>
+                  <a:rPr lang="en-US" altLang="ja-JP" sz="2000" dirty="0">
+                    <a:latin typeface="Google Sans Text"/>
+                  </a:rPr>
+                  <a:t>70</a:t>
+                </a:r>
+                <a:r>
+                  <a:rPr lang="ja-JP" altLang="en-US" sz="2000">
+                    <a:latin typeface="Google Sans Text"/>
+                  </a:rPr>
+                  <a:t>位不贊成的值是</a:t>
+                </a:r>
+                <a:r>
+                  <a:rPr lang="en-US" altLang="ja-JP" sz="2000" dirty="0">
+                    <a:latin typeface="Google Sans Text"/>
+                  </a:rPr>
+                  <a:t>0</a:t>
+                </a:r>
+                <a:r>
+                  <a:rPr lang="ja-JP" altLang="en-US" sz="2000">
+                    <a:latin typeface="Google Sans Text"/>
+                  </a:rPr>
+                  <a:t>，平均值</a:t>
+                </a:r>
+                <a14:m>
+                  <m:oMath xmlns:m="http://schemas.openxmlformats.org/officeDocument/2006/math">
+                    <m:acc>
+                      <m:accPr>
+                        <m:chr m:val="̅"/>
+                        <m:ctrlPr>
+                          <a:rPr lang="ja-JP" altLang="en-US" sz="2000" i="1" smtClean="0">
+                            <a:latin typeface="Cambria Math" panose="02040503050406030204" pitchFamily="18" charset="0"/>
+                          </a:rPr>
+                        </m:ctrlPr>
+                      </m:accPr>
+                      <m:e>
+                        <m:r>
+                          <a:rPr lang="en-US" altLang="ja-JP" sz="2000" b="0" i="1" smtClean="0">
+                            <a:latin typeface="Cambria Math" panose="02040503050406030204" pitchFamily="18" charset="0"/>
+                          </a:rPr>
+                          <m:t>𝑦</m:t>
+                        </m:r>
+                      </m:e>
+                    </m:acc>
+                    <m:r>
+                      <a:rPr lang="en-US" altLang="ja-JP" sz="2000" b="0" i="1" smtClean="0">
+                        <a:latin typeface="Cambria Math" panose="02040503050406030204" pitchFamily="18" charset="0"/>
+                      </a:rPr>
+                      <m:t>=</m:t>
+                    </m:r>
+                    <m:f>
+                      <m:fPr>
+                        <m:ctrlPr>
+                          <a:rPr lang="en-US" altLang="ja-JP" sz="2000" b="0" i="1" smtClean="0">
+                            <a:latin typeface="Cambria Math" panose="02040503050406030204" pitchFamily="18" charset="0"/>
+                          </a:rPr>
+                        </m:ctrlPr>
+                      </m:fPr>
+                      <m:num>
+                        <m:r>
+                          <a:rPr lang="en-US" altLang="ja-JP" sz="2000" b="0" i="1" smtClean="0">
+                            <a:latin typeface="Cambria Math" panose="02040503050406030204" pitchFamily="18" charset="0"/>
+                          </a:rPr>
+                          <m:t>30</m:t>
+                        </m:r>
+                        <m:r>
+                          <a:rPr lang="en-US" altLang="ja-JP" sz="2000" b="0" i="1" smtClean="0">
+                            <a:latin typeface="Cambria Math" panose="02040503050406030204" pitchFamily="18" charset="0"/>
+                            <a:ea typeface="Cambria Math" panose="02040503050406030204" pitchFamily="18" charset="0"/>
+                          </a:rPr>
+                          <m:t>×1+70×0</m:t>
+                        </m:r>
+                      </m:num>
+                      <m:den>
+                        <m:r>
+                          <a:rPr lang="en-US" altLang="ja-JP" sz="2000" b="0" i="1" smtClean="0">
+                            <a:latin typeface="Cambria Math" panose="02040503050406030204" pitchFamily="18" charset="0"/>
+                          </a:rPr>
+                          <m:t>100</m:t>
+                        </m:r>
+                      </m:den>
+                    </m:f>
+                    <m:r>
+                      <a:rPr lang="en-US" altLang="ja-JP" sz="2000" b="0" i="1" smtClean="0">
+                        <a:latin typeface="Cambria Math" panose="02040503050406030204" pitchFamily="18" charset="0"/>
+                      </a:rPr>
+                      <m:t>=0.3</m:t>
+                    </m:r>
+                  </m:oMath>
+                </a14:m>
+                <a:r>
+                  <a:rPr lang="ja-JP" altLang="en-US" sz="2000" dirty="0">
+                    <a:effectLst/>
+                    <a:latin typeface="Google Sans Text"/>
+                  </a:rPr>
+                  <a:t>。</a:t>
+                </a:r>
+                <a14:m>
+                  <m:oMath xmlns:m="http://schemas.openxmlformats.org/officeDocument/2006/math">
+                    <m:r>
+                      <a:rPr lang="en-US" altLang="ja-JP" sz="2000" b="0" i="1" dirty="0" smtClean="0">
+                        <a:effectLst/>
+                        <a:latin typeface="Cambria Math" panose="02040503050406030204" pitchFamily="18" charset="0"/>
+                      </a:rPr>
+                      <m:t>𝑝</m:t>
+                    </m:r>
+                    <m:r>
+                      <a:rPr lang="en-US" altLang="ja-JP" sz="2000" b="0" i="1" dirty="0" smtClean="0">
+                        <a:effectLst/>
+                        <a:latin typeface="Cambria Math" panose="02040503050406030204" pitchFamily="18" charset="0"/>
+                      </a:rPr>
+                      <m:t>=</m:t>
+                    </m:r>
+                    <m:d>
+                      <m:dPr>
+                        <m:ctrlPr>
+                          <a:rPr lang="en-US" altLang="ja-JP" sz="2000" b="0" i="1" dirty="0" smtClean="0">
+                            <a:effectLst/>
+                            <a:latin typeface="Cambria Math" panose="02040503050406030204" pitchFamily="18" charset="0"/>
+                          </a:rPr>
+                        </m:ctrlPr>
+                      </m:dPr>
+                      <m:e>
+                        <m:r>
+                          <a:rPr lang="en-US" altLang="ja-JP" sz="2000" b="0" i="1" dirty="0" smtClean="0">
+                            <a:effectLst/>
+                            <a:latin typeface="Cambria Math" panose="02040503050406030204" pitchFamily="18" charset="0"/>
+                          </a:rPr>
+                          <m:t>100</m:t>
+                        </m:r>
+                        <m:r>
+                          <a:rPr lang="en-US" altLang="ja-JP" sz="2000" b="0" i="1" dirty="0" smtClean="0">
+                            <a:effectLst/>
+                            <a:latin typeface="Cambria Math" panose="02040503050406030204" pitchFamily="18" charset="0"/>
+                            <a:ea typeface="Cambria Math" panose="02040503050406030204" pitchFamily="18" charset="0"/>
+                          </a:rPr>
+                          <m:t>∙0.3</m:t>
+                        </m:r>
+                      </m:e>
+                    </m:d>
+                    <m:r>
+                      <a:rPr lang="en-US" altLang="ja-JP" sz="2000" b="0" i="1" dirty="0" smtClean="0">
+                        <a:effectLst/>
+                        <a:latin typeface="Cambria Math" panose="02040503050406030204" pitchFamily="18" charset="0"/>
+                        <a:ea typeface="Cambria Math" panose="02040503050406030204" pitchFamily="18" charset="0"/>
+                      </a:rPr>
+                      <m:t>%=30%</m:t>
+                    </m:r>
+                  </m:oMath>
+                </a14:m>
+                <a:r>
+                  <a:rPr lang="ja-JP" altLang="en-US" sz="2000">
+                    <a:effectLst/>
+                    <a:latin typeface="Google Sans Text"/>
+                  </a:rPr>
+                  <a:t>。用這個樣本估計值推論母體。</a:t>
+                </a:r>
+                <a:endParaRPr lang="en-US" altLang="ja-JP" sz="2000" dirty="0">
+                  <a:latin typeface="Google Sans Text"/>
+                </a:endParaRPr>
+              </a:p>
+              <a:p>
+                <a:pPr>
+                  <a:lnSpc>
+                    <a:spcPct val="150000"/>
+                  </a:lnSpc>
+                </a:pPr>
+                <a:r>
+                  <a:rPr lang="ja-JP" altLang="en-US" sz="2000">
+                    <a:effectLst/>
+                    <a:latin typeface="Google Sans Text"/>
+                  </a:rPr>
+                  <a:t>變異數：</a:t>
+                </a:r>
+                <a14:m>
+                  <m:oMath xmlns:m="http://schemas.openxmlformats.org/officeDocument/2006/math">
+                    <m:r>
+                      <a:rPr lang="en-US" altLang="ja-JP" sz="2000" b="0" i="1" smtClean="0">
+                        <a:effectLst/>
+                        <a:latin typeface="Cambria Math" panose="02040503050406030204" pitchFamily="18" charset="0"/>
+                      </a:rPr>
+                      <m:t>𝑣</m:t>
+                    </m:r>
+                    <m:d>
+                      <m:dPr>
+                        <m:ctrlPr>
+                          <a:rPr lang="en-US" altLang="ja-JP" sz="2000" b="0" i="1" smtClean="0">
+                            <a:effectLst/>
+                            <a:latin typeface="Cambria Math" panose="02040503050406030204" pitchFamily="18" charset="0"/>
+                          </a:rPr>
+                        </m:ctrlPr>
+                      </m:dPr>
+                      <m:e>
+                        <m:r>
+                          <a:rPr lang="en-US" altLang="ja-JP" sz="2000" b="0" i="1" smtClean="0">
+                            <a:effectLst/>
+                            <a:latin typeface="Cambria Math" panose="02040503050406030204" pitchFamily="18" charset="0"/>
+                          </a:rPr>
+                          <m:t>𝑝</m:t>
+                        </m:r>
+                      </m:e>
+                    </m:d>
+                    <m:r>
+                      <a:rPr lang="en-US" altLang="ja-JP" sz="2000" b="0" i="1" smtClean="0">
+                        <a:effectLst/>
+                        <a:latin typeface="Cambria Math" panose="02040503050406030204" pitchFamily="18" charset="0"/>
+                      </a:rPr>
+                      <m:t>=</m:t>
+                    </m:r>
+                    <m:f>
+                      <m:fPr>
+                        <m:ctrlPr>
+                          <a:rPr lang="en-US" altLang="ja-JP" sz="2000" b="0" i="1" smtClean="0">
+                            <a:effectLst/>
+                            <a:latin typeface="Cambria Math" panose="02040503050406030204" pitchFamily="18" charset="0"/>
+                          </a:rPr>
+                        </m:ctrlPr>
+                      </m:fPr>
+                      <m:num>
+                        <m:r>
+                          <a:rPr lang="en-US" altLang="ja-JP" sz="2000" b="0" i="1" smtClean="0">
+                            <a:effectLst/>
+                            <a:latin typeface="Cambria Math" panose="02040503050406030204" pitchFamily="18" charset="0"/>
+                          </a:rPr>
+                          <m:t>1−</m:t>
+                        </m:r>
+                        <m:r>
+                          <a:rPr lang="en-US" altLang="ja-JP" sz="2000" b="0" i="1" smtClean="0">
+                            <a:effectLst/>
+                            <a:latin typeface="Cambria Math" panose="02040503050406030204" pitchFamily="18" charset="0"/>
+                          </a:rPr>
+                          <m:t>𝑓</m:t>
+                        </m:r>
+                      </m:num>
+                      <m:den>
+                        <m:r>
+                          <a:rPr lang="en-US" altLang="ja-JP" sz="2000" b="0" i="1" smtClean="0">
+                            <a:effectLst/>
+                            <a:latin typeface="Cambria Math" panose="02040503050406030204" pitchFamily="18" charset="0"/>
+                          </a:rPr>
+                          <m:t>𝑛</m:t>
+                        </m:r>
+                        <m:r>
+                          <a:rPr lang="en-US" altLang="ja-JP" sz="2000" b="0" i="1" smtClean="0">
+                            <a:effectLst/>
+                            <a:latin typeface="Cambria Math" panose="02040503050406030204" pitchFamily="18" charset="0"/>
+                          </a:rPr>
+                          <m:t>−1</m:t>
+                        </m:r>
+                      </m:den>
+                    </m:f>
+                    <m:r>
+                      <a:rPr lang="en-US" altLang="ja-JP" sz="2000" b="0" i="1" smtClean="0">
+                        <a:effectLst/>
+                        <a:latin typeface="Cambria Math" panose="02040503050406030204" pitchFamily="18" charset="0"/>
+                      </a:rPr>
+                      <m:t>𝑝</m:t>
+                    </m:r>
+                    <m:r>
+                      <a:rPr lang="en-US" altLang="ja-JP" sz="2000" b="0" i="1" smtClean="0">
+                        <a:effectLst/>
+                        <a:latin typeface="Cambria Math" panose="02040503050406030204" pitchFamily="18" charset="0"/>
+                      </a:rPr>
+                      <m:t>(100−</m:t>
+                    </m:r>
+                    <m:r>
+                      <a:rPr lang="en-US" altLang="ja-JP" sz="2000" b="0" i="1" smtClean="0">
+                        <a:effectLst/>
+                        <a:latin typeface="Cambria Math" panose="02040503050406030204" pitchFamily="18" charset="0"/>
+                      </a:rPr>
+                      <m:t>𝑝</m:t>
+                    </m:r>
+                    <m:r>
+                      <a:rPr lang="en-US" altLang="ja-JP" sz="2000" b="0" i="1" smtClean="0">
+                        <a:effectLst/>
+                        <a:latin typeface="Cambria Math" panose="02040503050406030204" pitchFamily="18" charset="0"/>
+                      </a:rPr>
+                      <m:t>)</m:t>
+                    </m:r>
+                  </m:oMath>
+                </a14:m>
+                <a:r>
+                  <a:rPr lang="zh-TW" altLang="en-US" sz="2000" dirty="0">
+                    <a:effectLst/>
+                    <a:latin typeface="Google Sans Text"/>
+                  </a:rPr>
+                  <a:t> 。</a:t>
+                </a:r>
+                <a14:m>
+                  <m:oMath xmlns:m="http://schemas.openxmlformats.org/officeDocument/2006/math">
+                    <m:r>
+                      <a:rPr lang="en-US" altLang="zh-TW" sz="2000" b="0" i="1" dirty="0" smtClean="0">
+                        <a:effectLst/>
+                        <a:latin typeface="Cambria Math" panose="02040503050406030204" pitchFamily="18" charset="0"/>
+                      </a:rPr>
+                      <m:t>𝑓</m:t>
+                    </m:r>
+                  </m:oMath>
+                </a14:m>
+                <a:r>
+                  <a:rPr lang="zh-TW" altLang="en-US" sz="2000" dirty="0">
+                    <a:effectLst/>
+                    <a:latin typeface="Google Sans Text"/>
+                  </a:rPr>
+                  <a:t>是樣本佔母體的比例，因為比例可能接近</a:t>
+                </a:r>
+                <a:r>
+                  <a:rPr lang="en-US" altLang="zh-TW" sz="2000" dirty="0">
+                    <a:effectLst/>
+                    <a:latin typeface="Google Sans Text"/>
+                  </a:rPr>
+                  <a:t>0</a:t>
+                </a:r>
+                <a:r>
+                  <a:rPr lang="zh-TW" altLang="en-US" sz="2000" dirty="0">
+                    <a:effectLst/>
+                    <a:latin typeface="Google Sans Text"/>
+                  </a:rPr>
+                  <a:t>，所以可以忽略</a:t>
+                </a:r>
+                <a14:m>
+                  <m:oMath xmlns:m="http://schemas.openxmlformats.org/officeDocument/2006/math">
+                    <m:r>
+                      <a:rPr lang="en-US" altLang="zh-TW" sz="2000" i="1" dirty="0">
+                        <a:latin typeface="Cambria Math" panose="02040503050406030204" pitchFamily="18" charset="0"/>
+                      </a:rPr>
+                      <m:t>𝑓</m:t>
+                    </m:r>
+                    <m:r>
+                      <a:rPr lang="en-US" altLang="zh-TW" sz="2000" i="1" dirty="0">
+                        <a:latin typeface="Cambria Math" panose="02040503050406030204" pitchFamily="18" charset="0"/>
+                      </a:rPr>
+                      <m:t> </m:t>
+                    </m:r>
+                  </m:oMath>
+                </a14:m>
+                <a:r>
+                  <a:rPr lang="zh-TW" altLang="en-US" sz="2000" dirty="0">
+                    <a:effectLst/>
+                    <a:latin typeface="Google Sans Text"/>
+                  </a:rPr>
+                  <a:t>。</a:t>
+                </a:r>
+                <a:endParaRPr lang="en-US" altLang="ja-JP" sz="2000" dirty="0">
+                  <a:effectLst/>
+                  <a:latin typeface="Google Sans Text"/>
+                </a:endParaRPr>
+              </a:p>
+            </p:txBody>
+          </p:sp>
+        </mc:Choice>
+        <mc:Fallback xmlns="">
+          <p:sp>
+            <p:nvSpPr>
+              <p:cNvPr id="3" name="Content Placeholder 2">
+                <a:extLst>
+                  <a:ext uri="{FF2B5EF4-FFF2-40B4-BE49-F238E27FC236}">
+                    <a16:creationId xmlns:a16="http://schemas.microsoft.com/office/drawing/2014/main" id="{659579A7-244A-1B4E-A6EF-9B1F87EA3242}"/>
+                  </a:ext>
+                </a:extLst>
+              </p:cNvPr>
+              <p:cNvSpPr>
+                <a:spLocks noGrp="1" noRot="1" noChangeAspect="1" noMove="1" noResize="1" noEditPoints="1" noAdjustHandles="1" noChangeArrowheads="1" noChangeShapeType="1" noTextEdit="1"/>
+              </p:cNvSpPr>
+              <p:nvPr>
+                <p:ph idx="1"/>
+              </p:nvPr>
+            </p:nvSpPr>
+            <p:spPr>
+              <a:blipFill>
+                <a:blip r:embed="rId2"/>
+                <a:stretch>
+                  <a:fillRect l="-603" r="-483"/>
+                </a:stretch>
+              </a:blipFill>
+            </p:spPr>
+            <p:txBody>
+              <a:bodyPr/>
+              <a:lstStyle/>
+              <a:p>
+                <a:r>
+                  <a:rPr lang="en-US">
+                    <a:noFill/>
+                  </a:rPr>
+                  <a:t> </a:t>
+                </a:r>
+              </a:p>
+            </p:txBody>
+          </p:sp>
+        </mc:Fallback>
+      </mc:AlternateContent>
+      <p:sp>
+        <p:nvSpPr>
+          <p:cNvPr id="4" name="Slide Number Placeholder 3">
+            <a:extLst>
+              <a:ext uri="{FF2B5EF4-FFF2-40B4-BE49-F238E27FC236}">
+                <a16:creationId xmlns:a16="http://schemas.microsoft.com/office/drawing/2014/main" id="{49069B59-1518-4C2D-ABA7-09A5F449F58E}"/>
+              </a:ext>
+            </a:extLst>
+          </p:cNvPr>
+          <p:cNvSpPr>
+            <a:spLocks noGrp="1"/>
+          </p:cNvSpPr>
+          <p:nvPr>
+            <p:ph type="sldNum" sz="quarter" idx="12"/>
+          </p:nvPr>
+        </p:nvSpPr>
+        <p:spPr/>
+        <p:txBody>
+          <a:bodyPr/>
+          <a:lstStyle/>
+          <a:p>
+            <a:fld id="{34E21383-B02B-694B-B2AD-A967203CDE86}" type="slidenum">
+              <a:rPr lang="en-US" smtClean="0"/>
+              <a:t>22</a:t>
+            </a:fld>
+            <a:endParaRPr lang="en-US"/>
+          </a:p>
+        </p:txBody>
+      </p:sp>
+    </p:spTree>
+    <p:extLst>
+      <p:ext uri="{BB962C8B-B14F-4D97-AF65-F5344CB8AC3E}">
+        <p14:creationId xmlns:p14="http://schemas.microsoft.com/office/powerpoint/2010/main" val="2495023950"/>
+      </p:ext>
+    </p:extLst>
+  </p:cSld>
+  <p:clrMapOvr>
+    <a:masterClrMapping/>
+  </p:clrMapOvr>
+</p:sld>
+</file>
+
+<file path=ppt/slides/slide23.xml><?xml version="1.0" encoding="utf-8"?>
+<p:sld xmlns:a="http://schemas.openxmlformats.org/drawingml/2006/main" xmlns:r="http://schemas.openxmlformats.org/officeDocument/2006/relationships" xmlns:p="http://schemas.openxmlformats.org/presentationml/2006/main">
+  <p:cSld>
+    <p:spTree>
+      <p:nvGrpSpPr>
+        <p:cNvPr id="1" name=""/>
+        <p:cNvGrpSpPr/>
+        <p:nvPr/>
+      </p:nvGrpSpPr>
+      <p:grpSpPr>
+        <a:xfrm>
+          <a:off x="0" y="0"/>
+          <a:ext cx="0" cy="0"/>
+          <a:chOff x="0" y="0"/>
+          <a:chExt cx="0" cy="0"/>
+        </a:xfrm>
+      </p:grpSpPr>
+      <p:sp>
+        <p:nvSpPr>
+          <p:cNvPr id="2" name="Title 1">
+            <a:extLst>
+              <a:ext uri="{FF2B5EF4-FFF2-40B4-BE49-F238E27FC236}">
+                <a16:creationId xmlns:a16="http://schemas.microsoft.com/office/drawing/2014/main" id="{31C60B46-553E-18AD-A4BE-E745BAB0CAA0}"/>
+              </a:ext>
+            </a:extLst>
+          </p:cNvPr>
+          <p:cNvSpPr>
+            <a:spLocks noGrp="1"/>
+          </p:cNvSpPr>
+          <p:nvPr>
+            <p:ph type="title"/>
+          </p:nvPr>
+        </p:nvSpPr>
+        <p:spPr/>
+        <p:txBody>
+          <a:bodyPr/>
+          <a:lstStyle/>
+          <a:p>
+            <a:r>
+              <a:rPr lang="ja-JP" altLang="en-US"/>
+              <a:t>抽樣數（一）</a:t>
+            </a:r>
+            <a:endParaRPr lang="en-US" dirty="0"/>
+          </a:p>
+        </p:txBody>
+      </p:sp>
+      <mc:AlternateContent xmlns:mc="http://schemas.openxmlformats.org/markup-compatibility/2006" xmlns:a14="http://schemas.microsoft.com/office/drawing/2010/main">
+        <mc:Choice Requires="a14">
+          <p:sp>
+            <p:nvSpPr>
+              <p:cNvPr id="3" name="Content Placeholder 2">
+                <a:extLst>
+                  <a:ext uri="{FF2B5EF4-FFF2-40B4-BE49-F238E27FC236}">
+                    <a16:creationId xmlns:a16="http://schemas.microsoft.com/office/drawing/2014/main" id="{659579A7-244A-1B4E-A6EF-9B1F87EA3242}"/>
+                  </a:ext>
+                </a:extLst>
+              </p:cNvPr>
+              <p:cNvSpPr>
+                <a:spLocks noGrp="1"/>
+              </p:cNvSpPr>
+              <p:nvPr>
+                <p:ph idx="1"/>
+              </p:nvPr>
+            </p:nvSpPr>
+            <p:spPr/>
+            <p:txBody>
+              <a:bodyPr>
+                <a:normAutofit/>
+              </a:bodyPr>
+              <a:lstStyle/>
+              <a:p>
+                <a:pPr>
+                  <a:lnSpc>
+                    <a:spcPct val="150000"/>
+                  </a:lnSpc>
+                </a:pPr>
+                <a:r>
+                  <a:rPr lang="ja-JP" altLang="en-US" sz="2000">
+                    <a:latin typeface="Google Sans Text"/>
+                  </a:rPr>
+                  <a:t>樣本數越大，樣本估計越準確，但是也需要更多成本。</a:t>
+                </a:r>
+                <a:endParaRPr lang="en-US" altLang="ja-JP" sz="2000" dirty="0">
+                  <a:effectLst/>
+                  <a:latin typeface="Google Sans Text"/>
+                </a:endParaRPr>
+              </a:p>
+              <a:p>
+                <a:pPr>
+                  <a:lnSpc>
+                    <a:spcPct val="150000"/>
+                  </a:lnSpc>
+                </a:pPr>
+                <a:r>
+                  <a:rPr lang="ja-JP" altLang="en-US" sz="2000">
+                    <a:latin typeface="Google Sans Text"/>
+                  </a:rPr>
+                  <a:t>最小樣本數的計算公式：</a:t>
+                </a:r>
+                <a14:m>
+                  <m:oMath xmlns:m="http://schemas.openxmlformats.org/officeDocument/2006/math">
+                    <m:r>
+                      <a:rPr lang="en-US" altLang="ja-JP" sz="2000" b="0" i="1" smtClean="0">
+                        <a:latin typeface="Cambria Math" panose="02040503050406030204" pitchFamily="18" charset="0"/>
+                      </a:rPr>
+                      <m:t>𝑛</m:t>
+                    </m:r>
+                    <m:r>
+                      <a:rPr lang="en-US" altLang="ja-JP" sz="2000" b="0" i="1" smtClean="0">
+                        <a:latin typeface="Cambria Math" panose="02040503050406030204" pitchFamily="18" charset="0"/>
+                        <a:ea typeface="Cambria Math" panose="02040503050406030204" pitchFamily="18" charset="0"/>
+                      </a:rPr>
+                      <m:t>≥</m:t>
+                    </m:r>
+                    <m:sSup>
+                      <m:sSupPr>
+                        <m:ctrlPr>
+                          <a:rPr lang="en-US" altLang="ja-JP" sz="2000" b="0" i="1" smtClean="0">
+                            <a:latin typeface="Cambria Math" panose="02040503050406030204" pitchFamily="18" charset="0"/>
+                            <a:ea typeface="Cambria Math" panose="02040503050406030204" pitchFamily="18" charset="0"/>
+                          </a:rPr>
+                        </m:ctrlPr>
+                      </m:sSupPr>
+                      <m:e>
+                        <m:d>
+                          <m:dPr>
+                            <m:ctrlPr>
+                              <a:rPr lang="en-US" altLang="ja-JP" sz="2000" b="0" i="1" smtClean="0">
+                                <a:latin typeface="Cambria Math" panose="02040503050406030204" pitchFamily="18" charset="0"/>
+                                <a:ea typeface="Cambria Math" panose="02040503050406030204" pitchFamily="18" charset="0"/>
+                              </a:rPr>
+                            </m:ctrlPr>
+                          </m:dPr>
+                          <m:e>
+                            <m:f>
+                              <m:fPr>
+                                <m:ctrlPr>
+                                  <a:rPr lang="en-US" altLang="ja-JP" sz="2000" b="0" i="1" smtClean="0">
+                                    <a:latin typeface="Cambria Math" panose="02040503050406030204" pitchFamily="18" charset="0"/>
+                                    <a:ea typeface="Cambria Math" panose="02040503050406030204" pitchFamily="18" charset="0"/>
+                                  </a:rPr>
+                                </m:ctrlPr>
+                              </m:fPr>
+                              <m:num>
+                                <m:r>
+                                  <a:rPr lang="en-US" altLang="ja-JP" sz="2000" b="0" i="1" smtClean="0">
+                                    <a:latin typeface="Cambria Math" panose="02040503050406030204" pitchFamily="18" charset="0"/>
+                                    <a:ea typeface="Cambria Math" panose="02040503050406030204" pitchFamily="18" charset="0"/>
+                                  </a:rPr>
+                                  <m:t>1.96</m:t>
+                                </m:r>
+                              </m:num>
+                              <m:den>
+                                <m:r>
+                                  <a:rPr lang="en-US" altLang="ja-JP" sz="2000" b="0" i="1" smtClean="0">
+                                    <a:latin typeface="Cambria Math" panose="02040503050406030204" pitchFamily="18" charset="0"/>
+                                    <a:ea typeface="Cambria Math" panose="02040503050406030204" pitchFamily="18" charset="0"/>
+                                  </a:rPr>
+                                  <m:t>𝑀</m:t>
+                                </m:r>
+                              </m:den>
+                            </m:f>
+                          </m:e>
+                        </m:d>
+                      </m:e>
+                      <m:sup>
+                        <m:r>
+                          <a:rPr lang="en-US" altLang="ja-JP" sz="2000" b="0" i="1" smtClean="0">
+                            <a:latin typeface="Cambria Math" panose="02040503050406030204" pitchFamily="18" charset="0"/>
+                            <a:ea typeface="Cambria Math" panose="02040503050406030204" pitchFamily="18" charset="0"/>
+                          </a:rPr>
+                          <m:t>2</m:t>
+                        </m:r>
+                      </m:sup>
+                    </m:sSup>
+                    <m:r>
+                      <a:rPr lang="en-US" altLang="ja-JP" sz="2000" b="0" i="1" smtClean="0">
+                        <a:latin typeface="Cambria Math" panose="02040503050406030204" pitchFamily="18" charset="0"/>
+                        <a:ea typeface="Cambria Math" panose="02040503050406030204" pitchFamily="18" charset="0"/>
+                      </a:rPr>
+                      <m:t>𝑝</m:t>
+                    </m:r>
+                    <m:r>
+                      <a:rPr lang="en-US" altLang="ja-JP" sz="2000" b="0" i="1" smtClean="0">
+                        <a:latin typeface="Cambria Math" panose="02040503050406030204" pitchFamily="18" charset="0"/>
+                        <a:ea typeface="Cambria Math" panose="02040503050406030204" pitchFamily="18" charset="0"/>
+                      </a:rPr>
+                      <m:t>(1−</m:t>
+                    </m:r>
+                    <m:r>
+                      <a:rPr lang="en-US" altLang="ja-JP" sz="2000" b="0" i="1" smtClean="0">
+                        <a:latin typeface="Cambria Math" panose="02040503050406030204" pitchFamily="18" charset="0"/>
+                        <a:ea typeface="Cambria Math" panose="02040503050406030204" pitchFamily="18" charset="0"/>
+                      </a:rPr>
+                      <m:t>𝑝</m:t>
+                    </m:r>
+                    <m:r>
+                      <a:rPr lang="en-US" altLang="ja-JP" sz="2000" b="0" i="1" smtClean="0">
+                        <a:latin typeface="Cambria Math" panose="02040503050406030204" pitchFamily="18" charset="0"/>
+                        <a:ea typeface="Cambria Math" panose="02040503050406030204" pitchFamily="18" charset="0"/>
+                      </a:rPr>
+                      <m:t>)</m:t>
+                    </m:r>
+                  </m:oMath>
+                </a14:m>
+                <a:r>
+                  <a:rPr lang="en-US" altLang="ja-JP" sz="2000" dirty="0">
+                    <a:latin typeface="Google Sans Text"/>
+                  </a:rPr>
+                  <a:t>  </a:t>
+                </a:r>
+                <a:r>
+                  <a:rPr lang="ja-JP" altLang="en-US" sz="2000" dirty="0">
+                    <a:latin typeface="Google Sans Text"/>
+                  </a:rPr>
+                  <a:t>。其</a:t>
+                </a:r>
+                <a:r>
+                  <a:rPr lang="ja-JP" altLang="en-US" sz="2000">
+                    <a:latin typeface="Google Sans Text"/>
+                  </a:rPr>
+                  <a:t>中，</a:t>
+                </a:r>
+                <a14:m>
+                  <m:oMath xmlns:m="http://schemas.openxmlformats.org/officeDocument/2006/math">
+                    <m:r>
+                      <a:rPr lang="en-US" altLang="ja-JP" sz="2000" b="0" i="1" smtClean="0">
+                        <a:latin typeface="Cambria Math" panose="02040503050406030204" pitchFamily="18" charset="0"/>
+                      </a:rPr>
+                      <m:t>𝑀</m:t>
+                    </m:r>
+                  </m:oMath>
+                </a14:m>
+                <a:r>
+                  <a:rPr lang="ja-JP" altLang="en-US" sz="2000">
+                    <a:latin typeface="Google Sans Text"/>
+                  </a:rPr>
+                  <a:t>代表抽樣誤差，通常設定為</a:t>
+                </a:r>
+                <a:r>
+                  <a:rPr lang="en-US" altLang="ja-JP" sz="2000" dirty="0">
+                    <a:latin typeface="Google Sans Text"/>
+                  </a:rPr>
+                  <a:t>3%</a:t>
+                </a:r>
+                <a:r>
+                  <a:rPr lang="ja-JP" altLang="en-US" sz="2000">
+                    <a:latin typeface="Google Sans Text"/>
+                  </a:rPr>
+                  <a:t>。</a:t>
+                </a:r>
+                <a:endParaRPr lang="en-US" altLang="ja-JP" sz="2000" dirty="0">
+                  <a:latin typeface="Google Sans Text"/>
+                </a:endParaRPr>
+              </a:p>
+              <a:p>
+                <a:pPr>
+                  <a:lnSpc>
+                    <a:spcPct val="150000"/>
+                  </a:lnSpc>
+                </a:pPr>
+                <a:r>
+                  <a:rPr lang="zh-TW" altLang="en-US" sz="2000" dirty="0">
+                    <a:effectLst/>
+                    <a:latin typeface="Google Sans Text"/>
+                  </a:rPr>
+                  <a:t>例如，上一次的調查顯示</a:t>
+                </a:r>
+                <a:r>
+                  <a:rPr lang="en-US" altLang="zh-TW" sz="2000" dirty="0">
+                    <a:effectLst/>
+                    <a:latin typeface="Google Sans Text"/>
+                  </a:rPr>
+                  <a:t>21%</a:t>
+                </a:r>
+                <a:r>
+                  <a:rPr lang="zh-TW" altLang="en-US" sz="2000" dirty="0">
+                    <a:effectLst/>
+                    <a:latin typeface="Google Sans Text"/>
+                  </a:rPr>
+                  <a:t>的受訪者曾經使用</a:t>
+                </a:r>
+                <a:r>
+                  <a:rPr lang="en-US" altLang="zh-TW" sz="2000" dirty="0">
+                    <a:effectLst/>
+                    <a:latin typeface="Google Sans Text"/>
+                  </a:rPr>
+                  <a:t>AI</a:t>
+                </a:r>
+                <a:r>
+                  <a:rPr lang="zh-TW" altLang="en-US" sz="2000" dirty="0">
+                    <a:effectLst/>
+                    <a:latin typeface="Google Sans Text"/>
+                  </a:rPr>
+                  <a:t>，那麼如果要做新的民調需要多少樣本數？</a:t>
+                </a:r>
+                <a14:m>
+                  <m:oMath xmlns:m="http://schemas.openxmlformats.org/officeDocument/2006/math">
+                    <m:r>
+                      <a:rPr lang="en-US" altLang="zh-TW" sz="2000" b="0" i="1" smtClean="0">
+                        <a:effectLst/>
+                        <a:latin typeface="Cambria Math" panose="02040503050406030204" pitchFamily="18" charset="0"/>
+                      </a:rPr>
+                      <m:t>𝑛</m:t>
+                    </m:r>
+                    <m:r>
+                      <a:rPr lang="en-US" altLang="zh-TW" sz="2000" b="0" i="1" smtClean="0">
+                        <a:effectLst/>
+                        <a:latin typeface="Cambria Math" panose="02040503050406030204" pitchFamily="18" charset="0"/>
+                        <a:ea typeface="Cambria Math" panose="02040503050406030204" pitchFamily="18" charset="0"/>
+                      </a:rPr>
+                      <m:t>≥</m:t>
+                    </m:r>
+                    <m:sSup>
+                      <m:sSupPr>
+                        <m:ctrlPr>
+                          <a:rPr lang="en-US" altLang="zh-TW" sz="2000" b="0" i="1" smtClean="0">
+                            <a:effectLst/>
+                            <a:latin typeface="Cambria Math" panose="02040503050406030204" pitchFamily="18" charset="0"/>
+                            <a:ea typeface="Cambria Math" panose="02040503050406030204" pitchFamily="18" charset="0"/>
+                          </a:rPr>
+                        </m:ctrlPr>
+                      </m:sSupPr>
+                      <m:e>
+                        <m:d>
+                          <m:dPr>
+                            <m:ctrlPr>
+                              <a:rPr lang="en-US" altLang="zh-TW" sz="2000" b="0" i="1" smtClean="0">
+                                <a:effectLst/>
+                                <a:latin typeface="Cambria Math" panose="02040503050406030204" pitchFamily="18" charset="0"/>
+                                <a:ea typeface="Cambria Math" panose="02040503050406030204" pitchFamily="18" charset="0"/>
+                              </a:rPr>
+                            </m:ctrlPr>
+                          </m:dPr>
+                          <m:e>
+                            <m:f>
+                              <m:fPr>
+                                <m:ctrlPr>
+                                  <a:rPr lang="en-US" altLang="zh-TW" sz="2000" b="0" i="1" smtClean="0">
+                                    <a:effectLst/>
+                                    <a:latin typeface="Cambria Math" panose="02040503050406030204" pitchFamily="18" charset="0"/>
+                                    <a:ea typeface="Cambria Math" panose="02040503050406030204" pitchFamily="18" charset="0"/>
+                                  </a:rPr>
+                                </m:ctrlPr>
+                              </m:fPr>
+                              <m:num>
+                                <m:r>
+                                  <a:rPr lang="en-US" altLang="zh-TW" sz="2000" b="0" i="1" smtClean="0">
+                                    <a:effectLst/>
+                                    <a:latin typeface="Cambria Math" panose="02040503050406030204" pitchFamily="18" charset="0"/>
+                                    <a:ea typeface="Cambria Math" panose="02040503050406030204" pitchFamily="18" charset="0"/>
+                                  </a:rPr>
+                                  <m:t>1.96</m:t>
+                                </m:r>
+                              </m:num>
+                              <m:den>
+                                <m:r>
+                                  <a:rPr lang="en-US" altLang="zh-TW" sz="2000" b="0" i="1" smtClean="0">
+                                    <a:effectLst/>
+                                    <a:latin typeface="Cambria Math" panose="02040503050406030204" pitchFamily="18" charset="0"/>
+                                    <a:ea typeface="Cambria Math" panose="02040503050406030204" pitchFamily="18" charset="0"/>
+                                  </a:rPr>
+                                  <m:t>3</m:t>
+                                </m:r>
+                              </m:den>
+                            </m:f>
+                          </m:e>
+                        </m:d>
+                      </m:e>
+                      <m:sup>
+                        <m:r>
+                          <a:rPr lang="en-US" altLang="zh-TW" sz="2000" b="0" i="1" smtClean="0">
+                            <a:effectLst/>
+                            <a:latin typeface="Cambria Math" panose="02040503050406030204" pitchFamily="18" charset="0"/>
+                            <a:ea typeface="Cambria Math" panose="02040503050406030204" pitchFamily="18" charset="0"/>
+                          </a:rPr>
+                          <m:t>2</m:t>
+                        </m:r>
+                      </m:sup>
+                    </m:sSup>
+                    <m:r>
+                      <a:rPr lang="en-US" altLang="zh-TW" sz="2000" b="0" i="1" smtClean="0">
+                        <a:effectLst/>
+                        <a:latin typeface="Cambria Math" panose="02040503050406030204" pitchFamily="18" charset="0"/>
+                        <a:ea typeface="Cambria Math" panose="02040503050406030204" pitchFamily="18" charset="0"/>
+                      </a:rPr>
+                      <m:t>21×79=708.1</m:t>
+                    </m:r>
+                  </m:oMath>
+                </a14:m>
+                <a:endParaRPr lang="en-US" altLang="ja-JP" sz="2000" dirty="0">
+                  <a:effectLst/>
+                  <a:latin typeface="Google Sans Text"/>
+                </a:endParaRPr>
+              </a:p>
+              <a:p>
+                <a:pPr>
+                  <a:lnSpc>
+                    <a:spcPct val="150000"/>
+                  </a:lnSpc>
+                </a:pPr>
+                <a:r>
+                  <a:rPr lang="ja-JP" altLang="en-US" sz="2000">
+                    <a:effectLst/>
+                    <a:latin typeface="Google Sans Text"/>
+                  </a:rPr>
+                  <a:t>估計樣本平均值的樣本數需要</a:t>
+                </a:r>
+                <a14:m>
+                  <m:oMath xmlns:m="http://schemas.openxmlformats.org/officeDocument/2006/math">
+                    <m:r>
+                      <a:rPr lang="en-US" altLang="ja-JP" sz="2000" b="0" i="1" smtClean="0">
+                        <a:effectLst/>
+                        <a:latin typeface="Cambria Math" panose="02040503050406030204" pitchFamily="18" charset="0"/>
+                      </a:rPr>
+                      <m:t>𝑛</m:t>
+                    </m:r>
+                    <m:r>
+                      <a:rPr lang="en-US" altLang="ja-JP" sz="2000" b="0" i="1" smtClean="0">
+                        <a:effectLst/>
+                        <a:latin typeface="Cambria Math" panose="02040503050406030204" pitchFamily="18" charset="0"/>
+                        <a:ea typeface="Cambria Math" panose="02040503050406030204" pitchFamily="18" charset="0"/>
+                      </a:rPr>
+                      <m:t>≥</m:t>
+                    </m:r>
+                    <m:sSup>
+                      <m:sSupPr>
+                        <m:ctrlPr>
+                          <a:rPr lang="en-US" altLang="ja-JP" sz="2000" b="0" i="1" smtClean="0">
+                            <a:effectLst/>
+                            <a:latin typeface="Cambria Math" panose="02040503050406030204" pitchFamily="18" charset="0"/>
+                            <a:ea typeface="Cambria Math" panose="02040503050406030204" pitchFamily="18" charset="0"/>
+                          </a:rPr>
+                        </m:ctrlPr>
+                      </m:sSupPr>
+                      <m:e>
+                        <m:d>
+                          <m:dPr>
+                            <m:ctrlPr>
+                              <a:rPr lang="en-US" altLang="ja-JP" sz="2000" b="0" i="1" smtClean="0">
+                                <a:effectLst/>
+                                <a:latin typeface="Cambria Math" panose="02040503050406030204" pitchFamily="18" charset="0"/>
+                                <a:ea typeface="Cambria Math" panose="02040503050406030204" pitchFamily="18" charset="0"/>
+                              </a:rPr>
+                            </m:ctrlPr>
+                          </m:dPr>
+                          <m:e>
+                            <m:f>
+                              <m:fPr>
+                                <m:ctrlPr>
+                                  <a:rPr lang="en-US" altLang="ja-JP" sz="2000" b="0" i="1" smtClean="0">
+                                    <a:effectLst/>
+                                    <a:latin typeface="Cambria Math" panose="02040503050406030204" pitchFamily="18" charset="0"/>
+                                    <a:ea typeface="Cambria Math" panose="02040503050406030204" pitchFamily="18" charset="0"/>
+                                  </a:rPr>
+                                </m:ctrlPr>
+                              </m:fPr>
+                              <m:num>
+                                <m:r>
+                                  <a:rPr lang="en-US" altLang="ja-JP" sz="2000" b="0" i="1" smtClean="0">
+                                    <a:effectLst/>
+                                    <a:latin typeface="Cambria Math" panose="02040503050406030204" pitchFamily="18" charset="0"/>
+                                    <a:ea typeface="Cambria Math" panose="02040503050406030204" pitchFamily="18" charset="0"/>
+                                  </a:rPr>
+                                  <m:t>1.96</m:t>
+                                </m:r>
+                                <m:r>
+                                  <a:rPr lang="en-US" altLang="ja-JP" sz="2000" b="0" i="1" smtClean="0">
+                                    <a:effectLst/>
+                                    <a:latin typeface="Cambria Math" panose="02040503050406030204" pitchFamily="18" charset="0"/>
+                                    <a:ea typeface="Cambria Math" panose="02040503050406030204" pitchFamily="18" charset="0"/>
+                                  </a:rPr>
+                                  <m:t>𝑆</m:t>
+                                </m:r>
+                              </m:num>
+                              <m:den>
+                                <m:r>
+                                  <a:rPr lang="en-US" altLang="ja-JP" sz="2000" b="0" i="1" smtClean="0">
+                                    <a:effectLst/>
+                                    <a:latin typeface="Cambria Math" panose="02040503050406030204" pitchFamily="18" charset="0"/>
+                                    <a:ea typeface="Cambria Math" panose="02040503050406030204" pitchFamily="18" charset="0"/>
+                                  </a:rPr>
+                                  <m:t>𝑀</m:t>
+                                </m:r>
+                              </m:den>
+                            </m:f>
+                          </m:e>
+                        </m:d>
+                      </m:e>
+                      <m:sup>
+                        <m:r>
+                          <a:rPr lang="en-US" altLang="ja-JP" sz="2000" b="0" i="1" smtClean="0">
+                            <a:effectLst/>
+                            <a:latin typeface="Cambria Math" panose="02040503050406030204" pitchFamily="18" charset="0"/>
+                            <a:ea typeface="Cambria Math" panose="02040503050406030204" pitchFamily="18" charset="0"/>
+                          </a:rPr>
+                          <m:t>2</m:t>
+                        </m:r>
+                      </m:sup>
+                    </m:sSup>
+                  </m:oMath>
+                </a14:m>
+                <a:r>
+                  <a:rPr lang="en-US" altLang="ja-JP" sz="2000" dirty="0">
+                    <a:effectLst/>
+                    <a:latin typeface="Google Sans Text"/>
+                  </a:rPr>
+                  <a:t> </a:t>
+                </a:r>
+                <a:r>
+                  <a:rPr lang="ja-JP" altLang="en-US" sz="2000" dirty="0">
+                    <a:effectLst/>
+                    <a:latin typeface="Google Sans Text"/>
+                  </a:rPr>
+                  <a:t>其</a:t>
+                </a:r>
+                <a:r>
+                  <a:rPr lang="ja-JP" altLang="en-US" sz="2000">
+                    <a:effectLst/>
+                    <a:latin typeface="Google Sans Text"/>
+                  </a:rPr>
+                  <a:t>中，</a:t>
+                </a:r>
+                <a14:m>
+                  <m:oMath xmlns:m="http://schemas.openxmlformats.org/officeDocument/2006/math">
+                    <m:r>
+                      <a:rPr lang="en-US" altLang="ja-JP" sz="2000" b="0" i="1" smtClean="0">
+                        <a:effectLst/>
+                        <a:latin typeface="Cambria Math" panose="02040503050406030204" pitchFamily="18" charset="0"/>
+                      </a:rPr>
+                      <m:t>𝑆</m:t>
+                    </m:r>
+                  </m:oMath>
+                </a14:m>
+                <a:r>
+                  <a:rPr lang="ja-JP" altLang="en-US" sz="2000">
+                    <a:effectLst/>
+                    <a:latin typeface="Google Sans Text"/>
+                  </a:rPr>
+                  <a:t>代表母體的變異數。</a:t>
+                </a:r>
+                <a:endParaRPr lang="en-US" altLang="ja-JP" sz="2000" dirty="0">
+                  <a:effectLst/>
+                  <a:latin typeface="Google Sans Text"/>
+                </a:endParaRPr>
+              </a:p>
+              <a:p>
+                <a:pPr>
+                  <a:lnSpc>
+                    <a:spcPct val="150000"/>
+                  </a:lnSpc>
+                </a:pPr>
+                <a:r>
+                  <a:rPr lang="ja-JP" altLang="en-US" sz="2000">
+                    <a:effectLst/>
+                    <a:latin typeface="Google Sans Text"/>
+                  </a:rPr>
+                  <a:t>先隨機抽取一小批人（例如 </a:t>
+                </a:r>
+                <a:r>
+                  <a:rPr lang="en-US" altLang="ja-JP" sz="2000" dirty="0">
+                    <a:effectLst/>
+                    <a:latin typeface="Google Sans Text"/>
+                  </a:rPr>
+                  <a:t>30~50 </a:t>
+                </a:r>
+                <a:r>
+                  <a:rPr lang="ja-JP" altLang="en-US" sz="2000">
+                    <a:effectLst/>
+                    <a:latin typeface="Google Sans Text"/>
+                  </a:rPr>
+                  <a:t>人）進行小規模預測調查，再決定正式調查的樣本數。</a:t>
+                </a:r>
+                <a:endParaRPr lang="en-US" altLang="ja-JP" sz="2000" dirty="0">
+                  <a:effectLst/>
+                  <a:latin typeface="Google Sans Text"/>
+                </a:endParaRPr>
+              </a:p>
+            </p:txBody>
+          </p:sp>
+        </mc:Choice>
+        <mc:Fallback xmlns="">
+          <p:sp>
+            <p:nvSpPr>
+              <p:cNvPr id="3" name="Content Placeholder 2">
+                <a:extLst>
+                  <a:ext uri="{FF2B5EF4-FFF2-40B4-BE49-F238E27FC236}">
+                    <a16:creationId xmlns:a16="http://schemas.microsoft.com/office/drawing/2014/main" id="{659579A7-244A-1B4E-A6EF-9B1F87EA3242}"/>
+                  </a:ext>
+                </a:extLst>
+              </p:cNvPr>
+              <p:cNvSpPr>
+                <a:spLocks noGrp="1" noRot="1" noChangeAspect="1" noMove="1" noResize="1" noEditPoints="1" noAdjustHandles="1" noChangeArrowheads="1" noChangeShapeType="1" noTextEdit="1"/>
+              </p:cNvSpPr>
+              <p:nvPr>
+                <p:ph idx="1"/>
+              </p:nvPr>
+            </p:nvSpPr>
+            <p:spPr>
+              <a:blipFill>
+                <a:blip r:embed="rId2"/>
+                <a:stretch>
+                  <a:fillRect l="-603" r="-2413" b="-291"/>
+                </a:stretch>
+              </a:blipFill>
+            </p:spPr>
+            <p:txBody>
+              <a:bodyPr/>
+              <a:lstStyle/>
+              <a:p>
+                <a:r>
+                  <a:rPr lang="en-US">
+                    <a:noFill/>
+                  </a:rPr>
+                  <a:t> </a:t>
+                </a:r>
+              </a:p>
+            </p:txBody>
+          </p:sp>
+        </mc:Fallback>
+      </mc:AlternateContent>
+      <p:sp>
+        <p:nvSpPr>
+          <p:cNvPr id="4" name="Slide Number Placeholder 3">
+            <a:extLst>
+              <a:ext uri="{FF2B5EF4-FFF2-40B4-BE49-F238E27FC236}">
+                <a16:creationId xmlns:a16="http://schemas.microsoft.com/office/drawing/2014/main" id="{49069B59-1518-4C2D-ABA7-09A5F449F58E}"/>
+              </a:ext>
+            </a:extLst>
+          </p:cNvPr>
+          <p:cNvSpPr>
+            <a:spLocks noGrp="1"/>
+          </p:cNvSpPr>
+          <p:nvPr>
+            <p:ph type="sldNum" sz="quarter" idx="12"/>
+          </p:nvPr>
+        </p:nvSpPr>
+        <p:spPr/>
+        <p:txBody>
+          <a:bodyPr/>
+          <a:lstStyle/>
+          <a:p>
+            <a:fld id="{34E21383-B02B-694B-B2AD-A967203CDE86}" type="slidenum">
+              <a:rPr lang="en-US" smtClean="0"/>
+              <a:t>23</a:t>
+            </a:fld>
+            <a:endParaRPr lang="en-US"/>
+          </a:p>
+        </p:txBody>
+      </p:sp>
+    </p:spTree>
+    <p:extLst>
+      <p:ext uri="{BB962C8B-B14F-4D97-AF65-F5344CB8AC3E}">
+        <p14:creationId xmlns:p14="http://schemas.microsoft.com/office/powerpoint/2010/main" val="3447803180"/>
+      </p:ext>
+    </p:extLst>
+  </p:cSld>
+  <p:clrMapOvr>
+    <a:masterClrMapping/>
+  </p:clrMapOvr>
+</p:sld>
+</file>
+
+<file path=ppt/slides/slide24.xml><?xml version="1.0" encoding="utf-8"?>
+<p:sld xmlns:a="http://schemas.openxmlformats.org/drawingml/2006/main" xmlns:r="http://schemas.openxmlformats.org/officeDocument/2006/relationships" xmlns:p="http://schemas.openxmlformats.org/presentationml/2006/main">
+  <p:cSld>
+    <p:spTree>
+      <p:nvGrpSpPr>
+        <p:cNvPr id="1" name="">
+          <a:extLst>
+            <a:ext uri="{FF2B5EF4-FFF2-40B4-BE49-F238E27FC236}">
+              <a16:creationId xmlns:a16="http://schemas.microsoft.com/office/drawing/2014/main" id="{5B305295-9EAE-0C08-2338-F1412883A5B8}"/>
+            </a:ext>
+          </a:extLst>
+        </p:cNvPr>
+        <p:cNvGrpSpPr/>
+        <p:nvPr/>
+      </p:nvGrpSpPr>
+      <p:grpSpPr>
+        <a:xfrm>
+          <a:off x="0" y="0"/>
+          <a:ext cx="0" cy="0"/>
+          <a:chOff x="0" y="0"/>
+          <a:chExt cx="0" cy="0"/>
+        </a:xfrm>
+      </p:grpSpPr>
+      <p:sp>
+        <p:nvSpPr>
+          <p:cNvPr id="2" name="Title 1">
+            <a:extLst>
+              <a:ext uri="{FF2B5EF4-FFF2-40B4-BE49-F238E27FC236}">
+                <a16:creationId xmlns:a16="http://schemas.microsoft.com/office/drawing/2014/main" id="{353A38AA-4092-7A98-23FF-6DFA5DF44A7C}"/>
+              </a:ext>
+            </a:extLst>
+          </p:cNvPr>
+          <p:cNvSpPr>
+            <a:spLocks noGrp="1"/>
+          </p:cNvSpPr>
+          <p:nvPr>
+            <p:ph type="title"/>
+          </p:nvPr>
+        </p:nvSpPr>
+        <p:spPr/>
+        <p:txBody>
+          <a:bodyPr/>
+          <a:lstStyle/>
+          <a:p>
+            <a:r>
+              <a:rPr lang="ja-JP" altLang="en-US"/>
+              <a:t>分層抽樣（一）</a:t>
+            </a:r>
+            <a:endParaRPr lang="en-US" dirty="0"/>
+          </a:p>
+        </p:txBody>
+      </p:sp>
+      <mc:AlternateContent xmlns:mc="http://schemas.openxmlformats.org/markup-compatibility/2006">
+        <mc:Choice xmlns:a14="http://schemas.microsoft.com/office/drawing/2010/main" Requires="a14">
+          <p:sp>
+            <p:nvSpPr>
+              <p:cNvPr id="3" name="Content Placeholder 2">
+                <a:extLst>
+                  <a:ext uri="{FF2B5EF4-FFF2-40B4-BE49-F238E27FC236}">
+                    <a16:creationId xmlns:a16="http://schemas.microsoft.com/office/drawing/2014/main" id="{E313E33E-8198-B80A-A27B-92AC8F3C1AD5}"/>
+                  </a:ext>
+                </a:extLst>
+              </p:cNvPr>
+              <p:cNvSpPr>
+                <a:spLocks noGrp="1"/>
+              </p:cNvSpPr>
+              <p:nvPr>
+                <p:ph idx="1"/>
+              </p:nvPr>
+            </p:nvSpPr>
+            <p:spPr/>
+            <p:txBody>
+              <a:bodyPr>
+                <a:normAutofit fontScale="85000" lnSpcReduction="20000"/>
+              </a:bodyPr>
+              <a:lstStyle/>
+              <a:p>
+                <a:pPr>
+                  <a:lnSpc>
+                    <a:spcPct val="150000"/>
+                  </a:lnSpc>
+                </a:pPr>
+                <a:r>
+                  <a:rPr lang="ja-JP" altLang="en-US" sz="2000">
+                    <a:latin typeface="Google Sans Text"/>
+                  </a:rPr>
+                  <a:t>把母體分成一些群體，稱為分層</a:t>
+                </a:r>
+                <a:r>
+                  <a:rPr lang="en-US" altLang="ja-JP" sz="2000" dirty="0">
+                    <a:latin typeface="Google Sans Text"/>
+                  </a:rPr>
+                  <a:t>(strata)</a:t>
+                </a:r>
+                <a:r>
+                  <a:rPr lang="ja-JP" altLang="en-US" sz="2000">
+                    <a:latin typeface="Google Sans Text"/>
+                  </a:rPr>
+                  <a:t>。每一層抽出的樣本都可以計算無偏的平均值與變異數，組合起來成為可以推估母體的平均值與變異數。</a:t>
+                </a:r>
+                <a:endParaRPr lang="en-US" altLang="ja-JP" sz="2000" dirty="0">
+                  <a:latin typeface="Google Sans Text"/>
+                </a:endParaRPr>
+              </a:p>
+              <a:p>
+                <a:pPr>
+                  <a:lnSpc>
+                    <a:spcPct val="150000"/>
+                  </a:lnSpc>
+                </a:pPr>
+                <a:r>
+                  <a:rPr lang="ja-JP" altLang="en-US" sz="2000"/>
+                  <a:t>母體每一層</a:t>
+                </a:r>
+                <a14:m>
+                  <m:oMath xmlns:m="http://schemas.openxmlformats.org/officeDocument/2006/math">
+                    <m:r>
+                      <a:rPr lang="en-US" altLang="ja-JP" sz="2000" b="0" i="1" smtClean="0">
+                        <a:latin typeface="Cambria Math" panose="02040503050406030204" pitchFamily="18" charset="0"/>
+                      </a:rPr>
+                      <m:t>(</m:t>
+                    </m:r>
+                    <m:r>
+                      <a:rPr lang="en-US" altLang="ja-JP" sz="2000" b="0" i="1" smtClean="0">
+                        <a:latin typeface="Cambria Math" panose="02040503050406030204" pitchFamily="18" charset="0"/>
+                      </a:rPr>
+                      <m:t>h</m:t>
+                    </m:r>
+                    <m:r>
+                      <a:rPr lang="en-US" altLang="ja-JP" sz="2000" b="0" i="1" smtClean="0">
+                        <a:latin typeface="Cambria Math" panose="02040503050406030204" pitchFamily="18" charset="0"/>
+                      </a:rPr>
+                      <m:t>)</m:t>
+                    </m:r>
+                  </m:oMath>
+                </a14:m>
+                <a:r>
+                  <a:rPr lang="ja-JP" altLang="en-US" sz="2000"/>
+                  <a:t>的平均數：</a:t>
+                </a:r>
+                <a:r>
+                  <a:rPr lang="en-US" altLang="ja-JP" sz="2000" b="0" dirty="0">
+                    <a:effectLst/>
+                  </a:rPr>
+                  <a:t> </a:t>
+                </a:r>
+                <a14:m>
+                  <m:oMath xmlns:m="http://schemas.openxmlformats.org/officeDocument/2006/math">
+                    <m:sSup>
+                      <m:sSupPr>
+                        <m:ctrlPr>
+                          <a:rPr lang="en-US" altLang="ja-JP" sz="2000" b="0" i="1" smtClean="0">
+                            <a:effectLst/>
+                            <a:latin typeface="Cambria Math" panose="02040503050406030204" pitchFamily="18" charset="0"/>
+                          </a:rPr>
+                        </m:ctrlPr>
+                      </m:sSupPr>
+                      <m:e>
+                        <m:acc>
+                          <m:accPr>
+                            <m:chr m:val="̅"/>
+                            <m:ctrlPr>
+                              <a:rPr lang="en-US" altLang="ja-JP" sz="2000" b="0" i="1" smtClean="0">
+                                <a:effectLst/>
+                                <a:latin typeface="Cambria Math" panose="02040503050406030204" pitchFamily="18" charset="0"/>
+                              </a:rPr>
+                            </m:ctrlPr>
+                          </m:accPr>
+                          <m:e>
+                            <m:r>
+                              <a:rPr lang="en-US" altLang="ja-JP" sz="2000" b="0" i="1" smtClean="0">
+                                <a:effectLst/>
+                                <a:latin typeface="Cambria Math" panose="02040503050406030204" pitchFamily="18" charset="0"/>
+                              </a:rPr>
+                              <m:t>𝑌</m:t>
+                            </m:r>
+                          </m:e>
+                        </m:acc>
+                      </m:e>
+                      <m:sup>
+                        <m:r>
+                          <a:rPr lang="en-US" altLang="ja-JP" sz="2000" b="0" i="1" smtClean="0">
+                            <a:effectLst/>
+                            <a:latin typeface="Cambria Math" panose="02040503050406030204" pitchFamily="18" charset="0"/>
+                          </a:rPr>
+                          <m:t>(</m:t>
+                        </m:r>
+                        <m:r>
+                          <a:rPr lang="en-US" altLang="ja-JP" sz="2000" b="0" i="1" smtClean="0">
+                            <a:effectLst/>
+                            <a:latin typeface="Cambria Math" panose="02040503050406030204" pitchFamily="18" charset="0"/>
+                          </a:rPr>
+                          <m:t>h</m:t>
+                        </m:r>
+                        <m:r>
+                          <a:rPr lang="en-US" altLang="ja-JP" sz="2000" b="0" i="1" smtClean="0">
+                            <a:effectLst/>
+                            <a:latin typeface="Cambria Math" panose="02040503050406030204" pitchFamily="18" charset="0"/>
+                          </a:rPr>
+                          <m:t>)</m:t>
+                        </m:r>
+                      </m:sup>
+                    </m:sSup>
+                    <m:r>
+                      <a:rPr lang="en-US" altLang="ja-JP" sz="2000" b="0" i="1" smtClean="0">
+                        <a:effectLst/>
+                        <a:latin typeface="Cambria Math" panose="02040503050406030204" pitchFamily="18" charset="0"/>
+                      </a:rPr>
+                      <m:t>=</m:t>
+                    </m:r>
+                    <m:f>
+                      <m:fPr>
+                        <m:ctrlPr>
+                          <a:rPr lang="en-US" altLang="ja-JP" sz="2000" b="0" i="1" smtClean="0">
+                            <a:effectLst/>
+                            <a:latin typeface="Cambria Math" panose="02040503050406030204" pitchFamily="18" charset="0"/>
+                          </a:rPr>
+                        </m:ctrlPr>
+                      </m:fPr>
+                      <m:num>
+                        <m:r>
+                          <a:rPr lang="en-US" altLang="ja-JP" sz="2000" b="0" i="1" smtClean="0">
+                            <a:effectLst/>
+                            <a:latin typeface="Cambria Math" panose="02040503050406030204" pitchFamily="18" charset="0"/>
+                          </a:rPr>
+                          <m:t>1</m:t>
+                        </m:r>
+                      </m:num>
+                      <m:den>
+                        <m:sSub>
+                          <m:sSubPr>
+                            <m:ctrlPr>
+                              <a:rPr lang="en-US" altLang="ja-JP" sz="2000" b="0" i="1" smtClean="0">
+                                <a:effectLst/>
+                                <a:latin typeface="Cambria Math" panose="02040503050406030204" pitchFamily="18" charset="0"/>
+                              </a:rPr>
+                            </m:ctrlPr>
+                          </m:sSubPr>
+                          <m:e>
+                            <m:r>
+                              <a:rPr lang="en-US" altLang="ja-JP" sz="2000" b="0" i="1" smtClean="0">
+                                <a:effectLst/>
+                                <a:latin typeface="Cambria Math" panose="02040503050406030204" pitchFamily="18" charset="0"/>
+                              </a:rPr>
+                              <m:t>𝑁</m:t>
+                            </m:r>
+                          </m:e>
+                          <m:sub>
+                            <m:r>
+                              <a:rPr lang="en-US" altLang="ja-JP" sz="2000" b="0" i="1" smtClean="0">
+                                <a:effectLst/>
+                                <a:latin typeface="Cambria Math" panose="02040503050406030204" pitchFamily="18" charset="0"/>
+                              </a:rPr>
+                              <m:t>h</m:t>
+                            </m:r>
+                          </m:sub>
+                        </m:sSub>
+                      </m:den>
+                    </m:f>
+                    <m:nary>
+                      <m:naryPr>
+                        <m:chr m:val="∑"/>
+                        <m:ctrlPr>
+                          <a:rPr lang="en-US" altLang="ja-JP" sz="2000" b="0" i="1" smtClean="0">
+                            <a:effectLst/>
+                            <a:latin typeface="Cambria Math" panose="02040503050406030204" pitchFamily="18" charset="0"/>
+                          </a:rPr>
+                        </m:ctrlPr>
+                      </m:naryPr>
+                      <m:sub>
+                        <m:r>
+                          <m:rPr>
+                            <m:brk m:alnAt="23"/>
+                          </m:rPr>
+                          <a:rPr lang="en-US" altLang="ja-JP" sz="2000" b="0" i="1" smtClean="0">
+                            <a:effectLst/>
+                            <a:latin typeface="Cambria Math" panose="02040503050406030204" pitchFamily="18" charset="0"/>
+                          </a:rPr>
+                          <m:t>𝑘</m:t>
+                        </m:r>
+                        <m:r>
+                          <a:rPr lang="en-US" altLang="ja-JP" sz="2000" b="0" i="1" smtClean="0">
+                            <a:effectLst/>
+                            <a:latin typeface="Cambria Math" panose="02040503050406030204" pitchFamily="18" charset="0"/>
+                          </a:rPr>
+                          <m:t>=1</m:t>
+                        </m:r>
+                      </m:sub>
+                      <m:sup>
+                        <m:sSub>
+                          <m:sSubPr>
+                            <m:ctrlPr>
+                              <a:rPr lang="en-US" altLang="ja-JP" sz="2000" b="0" i="1" smtClean="0">
+                                <a:effectLst/>
+                                <a:latin typeface="Cambria Math" panose="02040503050406030204" pitchFamily="18" charset="0"/>
+                              </a:rPr>
+                            </m:ctrlPr>
+                          </m:sSubPr>
+                          <m:e>
+                            <m:r>
+                              <a:rPr lang="en-US" altLang="ja-JP" sz="2000" b="0" i="1" smtClean="0">
+                                <a:effectLst/>
+                                <a:latin typeface="Cambria Math" panose="02040503050406030204" pitchFamily="18" charset="0"/>
+                              </a:rPr>
+                              <m:t>𝑁</m:t>
+                            </m:r>
+                          </m:e>
+                          <m:sub>
+                            <m:r>
+                              <a:rPr lang="en-US" altLang="ja-JP" sz="2000" b="0" i="1" smtClean="0">
+                                <a:effectLst/>
+                                <a:latin typeface="Cambria Math" panose="02040503050406030204" pitchFamily="18" charset="0"/>
+                              </a:rPr>
+                              <m:t>h</m:t>
+                            </m:r>
+                          </m:sub>
+                        </m:sSub>
+                      </m:sup>
+                      <m:e>
+                        <m:sSup>
+                          <m:sSupPr>
+                            <m:ctrlPr>
+                              <a:rPr lang="en-US" altLang="ja-JP" sz="2000" b="0" i="1" smtClean="0">
+                                <a:effectLst/>
+                                <a:latin typeface="Cambria Math" panose="02040503050406030204" pitchFamily="18" charset="0"/>
+                              </a:rPr>
+                            </m:ctrlPr>
+                          </m:sSupPr>
+                          <m:e>
+                            <m:sSub>
+                              <m:sSubPr>
+                                <m:ctrlPr>
+                                  <a:rPr lang="en-US" altLang="ja-JP" sz="2000" b="0" i="1" smtClean="0">
+                                    <a:effectLst/>
+                                    <a:latin typeface="Cambria Math" panose="02040503050406030204" pitchFamily="18" charset="0"/>
+                                  </a:rPr>
+                                </m:ctrlPr>
+                              </m:sSubPr>
+                              <m:e>
+                                <m:r>
+                                  <a:rPr lang="en-US" altLang="ja-JP" sz="2000" b="0" i="1" smtClean="0">
+                                    <a:effectLst/>
+                                    <a:latin typeface="Cambria Math" panose="02040503050406030204" pitchFamily="18" charset="0"/>
+                                  </a:rPr>
+                                  <m:t>𝑌</m:t>
+                                </m:r>
+                              </m:e>
+                              <m:sub>
+                                <m:r>
+                                  <a:rPr lang="en-US" altLang="ja-JP" sz="2000" b="0" i="1" smtClean="0">
+                                    <a:effectLst/>
+                                    <a:latin typeface="Cambria Math" panose="02040503050406030204" pitchFamily="18" charset="0"/>
+                                  </a:rPr>
+                                  <m:t>𝑘</m:t>
+                                </m:r>
+                              </m:sub>
+                            </m:sSub>
+                          </m:e>
+                          <m:sup>
+                            <m:r>
+                              <a:rPr lang="en-US" altLang="ja-JP" sz="2000" b="0" i="1" smtClean="0">
+                                <a:effectLst/>
+                                <a:latin typeface="Cambria Math" panose="02040503050406030204" pitchFamily="18" charset="0"/>
+                              </a:rPr>
+                              <m:t>(</m:t>
+                            </m:r>
+                            <m:r>
+                              <a:rPr lang="en-US" altLang="ja-JP" sz="2000" b="0" i="1" smtClean="0">
+                                <a:effectLst/>
+                                <a:latin typeface="Cambria Math" panose="02040503050406030204" pitchFamily="18" charset="0"/>
+                              </a:rPr>
+                              <m:t>h</m:t>
+                            </m:r>
+                            <m:r>
+                              <a:rPr lang="en-US" altLang="ja-JP" sz="2000" b="0" i="1" smtClean="0">
+                                <a:effectLst/>
+                                <a:latin typeface="Cambria Math" panose="02040503050406030204" pitchFamily="18" charset="0"/>
+                              </a:rPr>
+                              <m:t>)</m:t>
+                            </m:r>
+                          </m:sup>
+                        </m:sSup>
+                      </m:e>
+                    </m:nary>
+                  </m:oMath>
+                </a14:m>
+                <a:r>
+                  <a:rPr lang="en-US" altLang="ja-JP" sz="2000" dirty="0"/>
+                  <a:t> </a:t>
+                </a:r>
+                <a:r>
+                  <a:rPr lang="ja-JP" altLang="en-US" sz="2000"/>
+                  <a:t>母體的平均數：</a:t>
+                </a:r>
+                <a14:m>
+                  <m:oMath xmlns:m="http://schemas.openxmlformats.org/officeDocument/2006/math">
+                    <m:acc>
+                      <m:accPr>
+                        <m:chr m:val="̅"/>
+                        <m:ctrlPr>
+                          <a:rPr lang="en-US" altLang="ja-JP" sz="2000" i="1" smtClean="0">
+                            <a:effectLst/>
+                            <a:latin typeface="Cambria Math" panose="02040503050406030204" pitchFamily="18" charset="0"/>
+                          </a:rPr>
+                        </m:ctrlPr>
+                      </m:accPr>
+                      <m:e>
+                        <m:r>
+                          <a:rPr lang="ja-JP" altLang="en-US" sz="2000" i="1">
+                            <a:latin typeface="Cambria Math" panose="02040503050406030204" pitchFamily="18" charset="0"/>
+                          </a:rPr>
+                          <m:t>Ｙ</m:t>
+                        </m:r>
+                      </m:e>
+                    </m:acc>
+                    <m:r>
+                      <a:rPr lang="en-US" altLang="ja-JP" sz="2000" b="0" i="1" smtClean="0">
+                        <a:effectLst/>
+                        <a:latin typeface="Cambria Math" panose="02040503050406030204" pitchFamily="18" charset="0"/>
+                      </a:rPr>
+                      <m:t>=</m:t>
+                    </m:r>
+                    <m:f>
+                      <m:fPr>
+                        <m:ctrlPr>
+                          <a:rPr lang="en-US" altLang="ja-JP" sz="2000" b="0" i="1" smtClean="0">
+                            <a:effectLst/>
+                            <a:latin typeface="Cambria Math" panose="02040503050406030204" pitchFamily="18" charset="0"/>
+                          </a:rPr>
+                        </m:ctrlPr>
+                      </m:fPr>
+                      <m:num>
+                        <m:r>
+                          <a:rPr lang="en-US" altLang="ja-JP" sz="2000" b="0" i="1" smtClean="0">
+                            <a:effectLst/>
+                            <a:latin typeface="Cambria Math" panose="02040503050406030204" pitchFamily="18" charset="0"/>
+                          </a:rPr>
+                          <m:t>1</m:t>
+                        </m:r>
+                      </m:num>
+                      <m:den>
+                        <m:r>
+                          <a:rPr lang="en-US" altLang="ja-JP" sz="2000" b="0" i="1" smtClean="0">
+                            <a:effectLst/>
+                            <a:latin typeface="Cambria Math" panose="02040503050406030204" pitchFamily="18" charset="0"/>
+                          </a:rPr>
+                          <m:t>𝑁</m:t>
+                        </m:r>
+                      </m:den>
+                    </m:f>
+                    <m:nary>
+                      <m:naryPr>
+                        <m:chr m:val="∑"/>
+                        <m:ctrlPr>
+                          <a:rPr lang="en-US" altLang="ja-JP" sz="2000" b="0" i="1" smtClean="0">
+                            <a:effectLst/>
+                            <a:latin typeface="Cambria Math" panose="02040503050406030204" pitchFamily="18" charset="0"/>
+                          </a:rPr>
+                        </m:ctrlPr>
+                      </m:naryPr>
+                      <m:sub>
+                        <m:r>
+                          <m:rPr>
+                            <m:brk m:alnAt="23"/>
+                          </m:rPr>
+                          <a:rPr lang="en-US" altLang="ja-JP" sz="2000" b="0" i="1" smtClean="0">
+                            <a:effectLst/>
+                            <a:latin typeface="Cambria Math" panose="02040503050406030204" pitchFamily="18" charset="0"/>
+                          </a:rPr>
+                          <m:t>h</m:t>
+                        </m:r>
+                        <m:r>
+                          <a:rPr lang="en-US" altLang="ja-JP" sz="2000" b="0" i="1" smtClean="0">
+                            <a:effectLst/>
+                            <a:latin typeface="Cambria Math" panose="02040503050406030204" pitchFamily="18" charset="0"/>
+                          </a:rPr>
+                          <m:t>=1</m:t>
+                        </m:r>
+                      </m:sub>
+                      <m:sup>
+                        <m:r>
+                          <a:rPr lang="en-US" altLang="ja-JP" sz="2000" b="0" i="1" smtClean="0">
+                            <a:effectLst/>
+                            <a:latin typeface="Cambria Math" panose="02040503050406030204" pitchFamily="18" charset="0"/>
+                          </a:rPr>
+                          <m:t>𝐿</m:t>
+                        </m:r>
+                      </m:sup>
+                      <m:e>
+                        <m:sSub>
+                          <m:sSubPr>
+                            <m:ctrlPr>
+                              <a:rPr lang="en-US" altLang="ja-JP" sz="2000" b="0" i="1" smtClean="0">
+                                <a:effectLst/>
+                                <a:latin typeface="Cambria Math" panose="02040503050406030204" pitchFamily="18" charset="0"/>
+                              </a:rPr>
+                            </m:ctrlPr>
+                          </m:sSubPr>
+                          <m:e>
+                            <m:r>
+                              <a:rPr lang="en-US" altLang="ja-JP" sz="2000" b="0" i="1" smtClean="0">
+                                <a:effectLst/>
+                                <a:latin typeface="Cambria Math" panose="02040503050406030204" pitchFamily="18" charset="0"/>
+                              </a:rPr>
+                              <m:t>𝑁</m:t>
+                            </m:r>
+                          </m:e>
+                          <m:sub>
+                            <m:r>
+                              <a:rPr lang="en-US" altLang="ja-JP" sz="2000" b="0" i="1" smtClean="0">
+                                <a:effectLst/>
+                                <a:latin typeface="Cambria Math" panose="02040503050406030204" pitchFamily="18" charset="0"/>
+                              </a:rPr>
+                              <m:t>h</m:t>
+                            </m:r>
+                          </m:sub>
+                        </m:sSub>
+                        <m:sSup>
+                          <m:sSupPr>
+                            <m:ctrlPr>
+                              <a:rPr lang="en-US" altLang="ja-JP" sz="2000" b="0" i="1" smtClean="0">
+                                <a:effectLst/>
+                                <a:latin typeface="Cambria Math" panose="02040503050406030204" pitchFamily="18" charset="0"/>
+                              </a:rPr>
+                            </m:ctrlPr>
+                          </m:sSupPr>
+                          <m:e>
+                            <m:acc>
+                              <m:accPr>
+                                <m:chr m:val="̅"/>
+                                <m:ctrlPr>
+                                  <a:rPr lang="en-US" altLang="ja-JP" sz="2000" b="0" i="1" smtClean="0">
+                                    <a:effectLst/>
+                                    <a:latin typeface="Cambria Math" panose="02040503050406030204" pitchFamily="18" charset="0"/>
+                                  </a:rPr>
+                                </m:ctrlPr>
+                              </m:accPr>
+                              <m:e>
+                                <m:r>
+                                  <a:rPr lang="en-US" altLang="ja-JP" sz="2000" b="0" i="1" smtClean="0">
+                                    <a:effectLst/>
+                                    <a:latin typeface="Cambria Math" panose="02040503050406030204" pitchFamily="18" charset="0"/>
+                                  </a:rPr>
+                                  <m:t>𝑌</m:t>
+                                </m:r>
+                              </m:e>
+                            </m:acc>
+                          </m:e>
+                          <m:sup>
+                            <m:r>
+                              <a:rPr lang="en-US" altLang="ja-JP" sz="2000" b="0" i="1" smtClean="0">
+                                <a:effectLst/>
+                                <a:latin typeface="Cambria Math" panose="02040503050406030204" pitchFamily="18" charset="0"/>
+                              </a:rPr>
+                              <m:t>(</m:t>
+                            </m:r>
+                            <m:r>
+                              <a:rPr lang="en-US" altLang="ja-JP" sz="2000" b="0" i="1" smtClean="0">
+                                <a:effectLst/>
+                                <a:latin typeface="Cambria Math" panose="02040503050406030204" pitchFamily="18" charset="0"/>
+                              </a:rPr>
+                              <m:t>h</m:t>
+                            </m:r>
+                            <m:r>
+                              <a:rPr lang="en-US" altLang="ja-JP" sz="2000" b="0" i="1" smtClean="0">
+                                <a:effectLst/>
+                                <a:latin typeface="Cambria Math" panose="02040503050406030204" pitchFamily="18" charset="0"/>
+                              </a:rPr>
+                              <m:t>)</m:t>
+                            </m:r>
+                          </m:sup>
+                        </m:sSup>
+                      </m:e>
+                    </m:nary>
+                  </m:oMath>
+                </a14:m>
+                <a:endParaRPr lang="en-US" altLang="ja-JP" sz="2000" b="0" dirty="0">
+                  <a:effectLst/>
+                </a:endParaRPr>
+              </a:p>
+              <a:p>
+                <a:pPr>
+                  <a:lnSpc>
+                    <a:spcPct val="150000"/>
+                  </a:lnSpc>
+                </a:pPr>
+                <a:r>
+                  <a:rPr lang="ja-JP" altLang="en-US" sz="2000">
+                    <a:effectLst/>
+                    <a:latin typeface="Google Sans Text"/>
+                  </a:rPr>
+                  <a:t>每一層樣本的平均數，</a:t>
+                </a:r>
+                <a14:m>
+                  <m:oMath xmlns:m="http://schemas.openxmlformats.org/officeDocument/2006/math">
+                    <m:sSub>
+                      <m:sSubPr>
+                        <m:ctrlPr>
+                          <a:rPr lang="en-US" altLang="ja-JP" sz="2000" b="0" i="1" smtClean="0">
+                            <a:effectLst/>
+                            <a:latin typeface="Cambria Math" panose="02040503050406030204" pitchFamily="18" charset="0"/>
+                          </a:rPr>
+                        </m:ctrlPr>
+                      </m:sSubPr>
+                      <m:e>
+                        <m:acc>
+                          <m:accPr>
+                            <m:chr m:val="̅"/>
+                            <m:ctrlPr>
+                              <a:rPr lang="en-US" altLang="ja-JP" sz="2000" b="0" i="1" smtClean="0">
+                                <a:effectLst/>
+                                <a:latin typeface="Cambria Math" panose="02040503050406030204" pitchFamily="18" charset="0"/>
+                              </a:rPr>
+                            </m:ctrlPr>
+                          </m:accPr>
+                          <m:e>
+                            <m:r>
+                              <a:rPr lang="en-US" altLang="ja-JP" sz="2000" b="0" i="1" smtClean="0">
+                                <a:effectLst/>
+                                <a:latin typeface="Cambria Math" panose="02040503050406030204" pitchFamily="18" charset="0"/>
+                              </a:rPr>
+                              <m:t>𝑦</m:t>
+                            </m:r>
+                          </m:e>
+                        </m:acc>
+                      </m:e>
+                      <m:sub>
+                        <m:r>
+                          <a:rPr lang="en-US" altLang="ja-JP" sz="2000" b="0" i="1" smtClean="0">
+                            <a:effectLst/>
+                            <a:latin typeface="Cambria Math" panose="02040503050406030204" pitchFamily="18" charset="0"/>
+                          </a:rPr>
+                          <m:t>𝑆</m:t>
+                        </m:r>
+                      </m:sub>
+                    </m:sSub>
+                    <m:r>
+                      <a:rPr lang="en-US" altLang="ja-JP" sz="2000" b="0" i="1" smtClean="0">
+                        <a:effectLst/>
+                        <a:latin typeface="Cambria Math" panose="02040503050406030204" pitchFamily="18" charset="0"/>
+                      </a:rPr>
+                      <m:t>=</m:t>
+                    </m:r>
+                    <m:f>
+                      <m:fPr>
+                        <m:ctrlPr>
+                          <a:rPr lang="en-US" altLang="ja-JP" sz="2000" b="0" i="1" smtClean="0">
+                            <a:effectLst/>
+                            <a:latin typeface="Cambria Math" panose="02040503050406030204" pitchFamily="18" charset="0"/>
+                          </a:rPr>
+                        </m:ctrlPr>
+                      </m:fPr>
+                      <m:num>
+                        <m:r>
+                          <a:rPr lang="en-US" altLang="ja-JP" sz="2000" b="0" i="1" smtClean="0">
+                            <a:effectLst/>
+                            <a:latin typeface="Cambria Math" panose="02040503050406030204" pitchFamily="18" charset="0"/>
+                          </a:rPr>
+                          <m:t>1</m:t>
+                        </m:r>
+                      </m:num>
+                      <m:den>
+                        <m:r>
+                          <a:rPr lang="en-US" altLang="ja-JP" sz="2000" b="0" i="1" smtClean="0">
+                            <a:effectLst/>
+                            <a:latin typeface="Cambria Math" panose="02040503050406030204" pitchFamily="18" charset="0"/>
+                          </a:rPr>
+                          <m:t>𝑁</m:t>
+                        </m:r>
+                      </m:den>
+                    </m:f>
+                    <m:nary>
+                      <m:naryPr>
+                        <m:chr m:val="∑"/>
+                        <m:ctrlPr>
+                          <a:rPr lang="en-US" altLang="ja-JP" sz="2000" b="0" i="1" smtClean="0">
+                            <a:effectLst/>
+                            <a:latin typeface="Cambria Math" panose="02040503050406030204" pitchFamily="18" charset="0"/>
+                          </a:rPr>
+                        </m:ctrlPr>
+                      </m:naryPr>
+                      <m:sub>
+                        <m:r>
+                          <m:rPr>
+                            <m:brk m:alnAt="23"/>
+                          </m:rPr>
+                          <a:rPr lang="en-US" altLang="ja-JP" sz="2000" b="0" i="1" smtClean="0">
+                            <a:effectLst/>
+                            <a:latin typeface="Cambria Math" panose="02040503050406030204" pitchFamily="18" charset="0"/>
+                          </a:rPr>
+                          <m:t>h</m:t>
+                        </m:r>
+                        <m:r>
+                          <a:rPr lang="en-US" altLang="ja-JP" sz="2000" b="0" i="1" smtClean="0">
+                            <a:effectLst/>
+                            <a:latin typeface="Cambria Math" panose="02040503050406030204" pitchFamily="18" charset="0"/>
+                          </a:rPr>
+                          <m:t>=1</m:t>
+                        </m:r>
+                      </m:sub>
+                      <m:sup>
+                        <m:r>
+                          <a:rPr lang="en-US" altLang="ja-JP" sz="2000" b="0" i="1" smtClean="0">
+                            <a:effectLst/>
+                            <a:latin typeface="Cambria Math" panose="02040503050406030204" pitchFamily="18" charset="0"/>
+                          </a:rPr>
+                          <m:t>𝐿</m:t>
+                        </m:r>
+                      </m:sup>
+                      <m:e>
+                        <m:sSub>
+                          <m:sSubPr>
+                            <m:ctrlPr>
+                              <a:rPr lang="en-US" altLang="ja-JP" sz="2000" b="0" i="1" smtClean="0">
+                                <a:effectLst/>
+                                <a:latin typeface="Cambria Math" panose="02040503050406030204" pitchFamily="18" charset="0"/>
+                              </a:rPr>
+                            </m:ctrlPr>
+                          </m:sSubPr>
+                          <m:e>
+                            <m:r>
+                              <a:rPr lang="en-US" altLang="ja-JP" sz="2000" b="0" i="1" smtClean="0">
+                                <a:effectLst/>
+                                <a:latin typeface="Cambria Math" panose="02040503050406030204" pitchFamily="18" charset="0"/>
+                              </a:rPr>
+                              <m:t>𝑁</m:t>
+                            </m:r>
+                          </m:e>
+                          <m:sub>
+                            <m:r>
+                              <a:rPr lang="en-US" altLang="ja-JP" sz="2000" b="0" i="1" smtClean="0">
+                                <a:effectLst/>
+                                <a:latin typeface="Cambria Math" panose="02040503050406030204" pitchFamily="18" charset="0"/>
+                              </a:rPr>
+                              <m:t>h</m:t>
+                            </m:r>
+                          </m:sub>
+                        </m:sSub>
+                        <m:sSup>
+                          <m:sSupPr>
+                            <m:ctrlPr>
+                              <a:rPr lang="en-US" altLang="ja-JP" sz="2000" b="0" i="1" smtClean="0">
+                                <a:effectLst/>
+                                <a:latin typeface="Cambria Math" panose="02040503050406030204" pitchFamily="18" charset="0"/>
+                              </a:rPr>
+                            </m:ctrlPr>
+                          </m:sSupPr>
+                          <m:e>
+                            <m:acc>
+                              <m:accPr>
+                                <m:chr m:val="̅"/>
+                                <m:ctrlPr>
+                                  <a:rPr lang="en-US" altLang="ja-JP" sz="2000" b="0" i="1" smtClean="0">
+                                    <a:effectLst/>
+                                    <a:latin typeface="Cambria Math" panose="02040503050406030204" pitchFamily="18" charset="0"/>
+                                  </a:rPr>
+                                </m:ctrlPr>
+                              </m:accPr>
+                              <m:e>
+                                <m:r>
+                                  <a:rPr lang="en-US" altLang="ja-JP" sz="2000" b="0" i="1" smtClean="0">
+                                    <a:effectLst/>
+                                    <a:latin typeface="Cambria Math" panose="02040503050406030204" pitchFamily="18" charset="0"/>
+                                  </a:rPr>
+                                  <m:t>𝑦</m:t>
+                                </m:r>
+                              </m:e>
+                            </m:acc>
+                          </m:e>
+                          <m:sup>
+                            <m:r>
+                              <a:rPr lang="en-US" altLang="ja-JP" sz="2000" b="0" i="1" smtClean="0">
+                                <a:effectLst/>
+                                <a:latin typeface="Cambria Math" panose="02040503050406030204" pitchFamily="18" charset="0"/>
+                              </a:rPr>
+                              <m:t>(</m:t>
+                            </m:r>
+                            <m:r>
+                              <a:rPr lang="en-US" altLang="ja-JP" sz="2000" b="0" i="1" smtClean="0">
+                                <a:effectLst/>
+                                <a:latin typeface="Cambria Math" panose="02040503050406030204" pitchFamily="18" charset="0"/>
+                              </a:rPr>
+                              <m:t>h</m:t>
+                            </m:r>
+                            <m:r>
+                              <a:rPr lang="en-US" altLang="ja-JP" sz="2000" b="0" i="1" smtClean="0">
+                                <a:effectLst/>
+                                <a:latin typeface="Cambria Math" panose="02040503050406030204" pitchFamily="18" charset="0"/>
+                              </a:rPr>
+                              <m:t>)</m:t>
+                            </m:r>
+                          </m:sup>
+                        </m:sSup>
+                      </m:e>
+                    </m:nary>
+                  </m:oMath>
+                </a14:m>
+                <a:r>
+                  <a:rPr lang="zh-TW" altLang="en-US" sz="2000" dirty="0">
+                    <a:effectLst/>
+                    <a:latin typeface="Google Sans Text"/>
+                  </a:rPr>
+                  <a:t> </a:t>
+                </a:r>
+                <a:r>
+                  <a:rPr lang="ja-JP" altLang="en-US" sz="2000">
+                    <a:effectLst/>
+                    <a:latin typeface="Google Sans Text"/>
+                  </a:rPr>
+                  <a:t>可推估母體平均數。</a:t>
+                </a:r>
+                <a:endParaRPr lang="en-US" altLang="ja-JP" sz="2000" dirty="0">
+                  <a:effectLst/>
+                  <a:latin typeface="Google Sans Text"/>
+                </a:endParaRPr>
+              </a:p>
+              <a:p>
+                <a:pPr>
+                  <a:lnSpc>
+                    <a:spcPct val="150000"/>
+                  </a:lnSpc>
+                </a:pPr>
+                <a:r>
+                  <a:rPr lang="ja-JP" altLang="en-US" sz="2000">
+                    <a:latin typeface="Google Sans Text"/>
+                  </a:rPr>
+                  <a:t>每一層樣本的平均數的變異程度：</a:t>
+                </a:r>
+                <a14:m>
+                  <m:oMath xmlns:m="http://schemas.openxmlformats.org/officeDocument/2006/math">
+                    <m:r>
+                      <a:rPr lang="en-US" altLang="ja-JP" sz="2000" b="0" i="1" smtClean="0">
+                        <a:latin typeface="Cambria Math" panose="02040503050406030204" pitchFamily="18" charset="0"/>
+                      </a:rPr>
+                      <m:t>𝑉</m:t>
+                    </m:r>
+                    <m:d>
+                      <m:dPr>
+                        <m:ctrlPr>
+                          <a:rPr lang="en-US" altLang="ja-JP" sz="2000" b="0" i="1" smtClean="0">
+                            <a:latin typeface="Cambria Math" panose="02040503050406030204" pitchFamily="18" charset="0"/>
+                          </a:rPr>
+                        </m:ctrlPr>
+                      </m:dPr>
+                      <m:e>
+                        <m:sSub>
+                          <m:sSubPr>
+                            <m:ctrlPr>
+                              <a:rPr lang="en-US" altLang="ja-JP" sz="2000" i="1">
+                                <a:latin typeface="Cambria Math" panose="02040503050406030204" pitchFamily="18" charset="0"/>
+                              </a:rPr>
+                            </m:ctrlPr>
+                          </m:sSubPr>
+                          <m:e>
+                            <m:acc>
+                              <m:accPr>
+                                <m:chr m:val="̅"/>
+                                <m:ctrlPr>
+                                  <a:rPr lang="en-US" altLang="ja-JP" sz="2000" i="1">
+                                    <a:latin typeface="Cambria Math" panose="02040503050406030204" pitchFamily="18" charset="0"/>
+                                  </a:rPr>
+                                </m:ctrlPr>
+                              </m:accPr>
+                              <m:e>
+                                <m:r>
+                                  <a:rPr lang="en-US" altLang="ja-JP" sz="2000" i="1">
+                                    <a:latin typeface="Cambria Math" panose="02040503050406030204" pitchFamily="18" charset="0"/>
+                                  </a:rPr>
+                                  <m:t>𝑦</m:t>
+                                </m:r>
+                              </m:e>
+                            </m:acc>
+                          </m:e>
+                          <m:sub>
+                            <m:r>
+                              <a:rPr lang="en-US" altLang="ja-JP" sz="2000" i="1">
+                                <a:latin typeface="Cambria Math" panose="02040503050406030204" pitchFamily="18" charset="0"/>
+                              </a:rPr>
+                              <m:t>𝑆</m:t>
+                            </m:r>
+                          </m:sub>
+                        </m:sSub>
+                      </m:e>
+                    </m:d>
+                    <m:r>
+                      <a:rPr lang="en-US" altLang="ja-JP" sz="2000" b="0" i="1" smtClean="0">
+                        <a:latin typeface="Cambria Math" panose="02040503050406030204" pitchFamily="18" charset="0"/>
+                      </a:rPr>
+                      <m:t>=</m:t>
+                    </m:r>
+                  </m:oMath>
+                </a14:m>
+                <a:r>
+                  <a:rPr lang="en-US" altLang="ja-JP" sz="2000" dirty="0"/>
+                  <a:t> </a:t>
+                </a:r>
+                <a14:m>
+                  <m:oMath xmlns:m="http://schemas.openxmlformats.org/officeDocument/2006/math">
+                    <m:f>
+                      <m:fPr>
+                        <m:ctrlPr>
+                          <a:rPr lang="en-US" altLang="ja-JP" sz="2000" i="1">
+                            <a:latin typeface="Cambria Math" panose="02040503050406030204" pitchFamily="18" charset="0"/>
+                          </a:rPr>
+                        </m:ctrlPr>
+                      </m:fPr>
+                      <m:num>
+                        <m:r>
+                          <a:rPr lang="en-US" altLang="ja-JP" sz="2000" i="1">
+                            <a:latin typeface="Cambria Math" panose="02040503050406030204" pitchFamily="18" charset="0"/>
+                          </a:rPr>
+                          <m:t>1</m:t>
+                        </m:r>
+                      </m:num>
+                      <m:den>
+                        <m:sSup>
+                          <m:sSupPr>
+                            <m:ctrlPr>
+                              <a:rPr lang="en-US" altLang="ja-JP" sz="2000" i="1" smtClean="0">
+                                <a:latin typeface="Cambria Math" panose="02040503050406030204" pitchFamily="18" charset="0"/>
+                              </a:rPr>
+                            </m:ctrlPr>
+                          </m:sSupPr>
+                          <m:e>
+                            <m:r>
+                              <a:rPr lang="en-US" altLang="ja-JP" sz="2000" b="0" i="1" smtClean="0">
+                                <a:latin typeface="Cambria Math" panose="02040503050406030204" pitchFamily="18" charset="0"/>
+                              </a:rPr>
+                              <m:t>𝑁</m:t>
+                            </m:r>
+                          </m:e>
+                          <m:sup>
+                            <m:r>
+                              <a:rPr lang="en-US" altLang="ja-JP" sz="2000" b="0" i="1" smtClean="0">
+                                <a:latin typeface="Cambria Math" panose="02040503050406030204" pitchFamily="18" charset="0"/>
+                              </a:rPr>
+                              <m:t>2</m:t>
+                            </m:r>
+                          </m:sup>
+                        </m:sSup>
+                      </m:den>
+                    </m:f>
+                  </m:oMath>
+                </a14:m>
+                <a:r>
+                  <a:rPr lang="en-US" altLang="ja-JP" sz="2000" dirty="0"/>
+                  <a:t> </a:t>
+                </a:r>
+                <a14:m>
+                  <m:oMath xmlns:m="http://schemas.openxmlformats.org/officeDocument/2006/math">
+                    <m:nary>
+                      <m:naryPr>
+                        <m:chr m:val="∑"/>
+                        <m:ctrlPr>
+                          <a:rPr lang="en-US" altLang="ja-JP" sz="2000" i="1">
+                            <a:latin typeface="Cambria Math" panose="02040503050406030204" pitchFamily="18" charset="0"/>
+                          </a:rPr>
+                        </m:ctrlPr>
+                      </m:naryPr>
+                      <m:sub>
+                        <m:r>
+                          <m:rPr>
+                            <m:brk m:alnAt="23"/>
+                          </m:rPr>
+                          <a:rPr lang="en-US" altLang="ja-JP" sz="2000" i="1">
+                            <a:latin typeface="Cambria Math" panose="02040503050406030204" pitchFamily="18" charset="0"/>
+                          </a:rPr>
+                          <m:t>h</m:t>
+                        </m:r>
+                        <m:r>
+                          <a:rPr lang="en-US" altLang="ja-JP" sz="2000" i="1">
+                            <a:latin typeface="Cambria Math" panose="02040503050406030204" pitchFamily="18" charset="0"/>
+                          </a:rPr>
+                          <m:t>=1</m:t>
+                        </m:r>
+                      </m:sub>
+                      <m:sup>
+                        <m:r>
+                          <a:rPr lang="en-US" altLang="ja-JP" sz="2000" i="1">
+                            <a:latin typeface="Cambria Math" panose="02040503050406030204" pitchFamily="18" charset="0"/>
+                          </a:rPr>
+                          <m:t>𝐿</m:t>
+                        </m:r>
+                      </m:sup>
+                      <m:e>
+                        <m:sSubSup>
+                          <m:sSubSupPr>
+                            <m:ctrlPr>
+                              <a:rPr lang="en-US" altLang="ja-JP" sz="2000" i="1" smtClean="0">
+                                <a:latin typeface="Cambria Math" panose="02040503050406030204" pitchFamily="18" charset="0"/>
+                              </a:rPr>
+                            </m:ctrlPr>
+                          </m:sSubSupPr>
+                          <m:e>
+                            <m:r>
+                              <a:rPr lang="en-US" altLang="ja-JP" sz="2000" b="0" i="1" smtClean="0">
+                                <a:latin typeface="Cambria Math" panose="02040503050406030204" pitchFamily="18" charset="0"/>
+                              </a:rPr>
+                              <m:t>𝑁</m:t>
+                            </m:r>
+                          </m:e>
+                          <m:sub>
+                            <m:r>
+                              <a:rPr lang="en-US" altLang="ja-JP" sz="2000" b="0" i="1" smtClean="0">
+                                <a:latin typeface="Cambria Math" panose="02040503050406030204" pitchFamily="18" charset="0"/>
+                              </a:rPr>
+                              <m:t>h</m:t>
+                            </m:r>
+                          </m:sub>
+                          <m:sup>
+                            <m:r>
+                              <a:rPr lang="en-US" altLang="ja-JP" sz="2000" b="0" i="1" smtClean="0">
+                                <a:latin typeface="Cambria Math" panose="02040503050406030204" pitchFamily="18" charset="0"/>
+                              </a:rPr>
+                              <m:t>2</m:t>
+                            </m:r>
+                          </m:sup>
+                        </m:sSubSup>
+                        <m:f>
+                          <m:fPr>
+                            <m:ctrlPr>
+                              <a:rPr lang="en-US" altLang="ja-JP" sz="2000" i="1" smtClean="0">
+                                <a:latin typeface="Cambria Math" panose="02040503050406030204" pitchFamily="18" charset="0"/>
+                              </a:rPr>
+                            </m:ctrlPr>
+                          </m:fPr>
+                          <m:num>
+                            <m:r>
+                              <a:rPr lang="en-US" altLang="ja-JP" sz="2000" b="0" i="1" smtClean="0">
+                                <a:latin typeface="Cambria Math" panose="02040503050406030204" pitchFamily="18" charset="0"/>
+                              </a:rPr>
+                              <m:t>1</m:t>
+                            </m:r>
+                          </m:num>
+                          <m:den>
+                            <m:sSub>
+                              <m:sSubPr>
+                                <m:ctrlPr>
+                                  <a:rPr lang="en-US" altLang="ja-JP" sz="2000" i="1" smtClean="0">
+                                    <a:latin typeface="Cambria Math" panose="02040503050406030204" pitchFamily="18" charset="0"/>
+                                  </a:rPr>
+                                </m:ctrlPr>
+                              </m:sSubPr>
+                              <m:e>
+                                <m:r>
+                                  <a:rPr lang="en-US" altLang="ja-JP" sz="2000" b="0" i="1" smtClean="0">
+                                    <a:latin typeface="Cambria Math" panose="02040503050406030204" pitchFamily="18" charset="0"/>
+                                  </a:rPr>
+                                  <m:t>𝑁</m:t>
+                                </m:r>
+                              </m:e>
+                              <m:sub>
+                                <m:r>
+                                  <a:rPr lang="en-US" altLang="ja-JP" sz="2000" b="0" i="1" smtClean="0">
+                                    <a:latin typeface="Cambria Math" panose="02040503050406030204" pitchFamily="18" charset="0"/>
+                                  </a:rPr>
+                                  <m:t>h</m:t>
+                                </m:r>
+                              </m:sub>
+                            </m:sSub>
+                          </m:den>
+                        </m:f>
+                        <m:sSubSup>
+                          <m:sSubSupPr>
+                            <m:ctrlPr>
+                              <a:rPr lang="en-US" altLang="ja-JP" sz="2000" i="1" smtClean="0">
+                                <a:latin typeface="Cambria Math" panose="02040503050406030204" pitchFamily="18" charset="0"/>
+                              </a:rPr>
+                            </m:ctrlPr>
+                          </m:sSubSupPr>
+                          <m:e>
+                            <m:r>
+                              <a:rPr lang="en-US" altLang="ja-JP" sz="2000" b="0" i="1" smtClean="0">
+                                <a:latin typeface="Cambria Math" panose="02040503050406030204" pitchFamily="18" charset="0"/>
+                              </a:rPr>
+                              <m:t>𝑠</m:t>
+                            </m:r>
+                          </m:e>
+                          <m:sub>
+                            <m:r>
+                              <a:rPr lang="en-US" altLang="ja-JP" sz="2000" b="0" i="1" smtClean="0">
+                                <a:latin typeface="Cambria Math" panose="02040503050406030204" pitchFamily="18" charset="0"/>
+                              </a:rPr>
+                              <m:t>h</m:t>
+                            </m:r>
+                          </m:sub>
+                          <m:sup>
+                            <m:r>
+                              <a:rPr lang="en-US" altLang="ja-JP" sz="2000" b="0" i="1" smtClean="0">
+                                <a:latin typeface="Cambria Math" panose="02040503050406030204" pitchFamily="18" charset="0"/>
+                              </a:rPr>
+                              <m:t>2</m:t>
+                            </m:r>
+                          </m:sup>
+                        </m:sSubSup>
+                      </m:e>
+                    </m:nary>
+                    <m:r>
+                      <a:rPr lang="zh-TW" altLang="en-US" sz="2000" b="0" i="1" smtClean="0">
+                        <a:latin typeface="Cambria Math" panose="02040503050406030204" pitchFamily="18" charset="0"/>
+                      </a:rPr>
+                      <m:t> </m:t>
+                    </m:r>
+                    <m:sSubSup>
+                      <m:sSubSupPr>
+                        <m:ctrlPr>
+                          <a:rPr lang="en-US" altLang="ja-JP" sz="2000" i="1">
+                            <a:latin typeface="Cambria Math" panose="02040503050406030204" pitchFamily="18" charset="0"/>
+                          </a:rPr>
+                        </m:ctrlPr>
+                      </m:sSubSupPr>
+                      <m:e>
+                        <m:r>
+                          <a:rPr lang="en-US" altLang="ja-JP" sz="2000" i="1">
+                            <a:latin typeface="Cambria Math" panose="02040503050406030204" pitchFamily="18" charset="0"/>
+                          </a:rPr>
+                          <m:t>𝑠</m:t>
+                        </m:r>
+                      </m:e>
+                      <m:sub>
+                        <m:r>
+                          <a:rPr lang="en-US" altLang="ja-JP" sz="2000" i="1">
+                            <a:latin typeface="Cambria Math" panose="02040503050406030204" pitchFamily="18" charset="0"/>
+                          </a:rPr>
+                          <m:t>h</m:t>
+                        </m:r>
+                      </m:sub>
+                      <m:sup>
+                        <m:r>
+                          <a:rPr lang="en-US" altLang="ja-JP" sz="2000" i="1">
+                            <a:latin typeface="Cambria Math" panose="02040503050406030204" pitchFamily="18" charset="0"/>
+                          </a:rPr>
+                          <m:t>2</m:t>
+                        </m:r>
+                      </m:sup>
+                    </m:sSubSup>
+                  </m:oMath>
+                </a14:m>
+                <a:r>
+                  <a:rPr lang="ja-JP" altLang="en-US" sz="2000" dirty="0">
+                    <a:latin typeface="Google Sans Text"/>
+                  </a:rPr>
+                  <a:t>代表該分層裡面的變異程度。</a:t>
+                </a:r>
+                <a:endParaRPr lang="en-US" altLang="ja-JP" sz="2000" dirty="0">
+                  <a:latin typeface="Google Sans Text"/>
+                </a:endParaRPr>
+              </a:p>
+              <a:p>
+                <a:pPr>
+                  <a:lnSpc>
+                    <a:spcPct val="150000"/>
+                  </a:lnSpc>
+                </a:pPr>
+                <a:r>
+                  <a:rPr lang="ja-JP" altLang="en-US" sz="2000">
+                    <a:latin typeface="Google Sans Text"/>
+                  </a:rPr>
+                  <a:t>需要可抽樣的清單，才能加以分層。例如，把台灣的鄉鎮市區按照都市化程度分層，在中選的層之中，抽出村里。</a:t>
+                </a:r>
+                <a:endParaRPr lang="en-US" altLang="ja-JP" sz="2000" dirty="0">
+                  <a:latin typeface="Google Sans Text"/>
+                </a:endParaRPr>
+              </a:p>
+              <a:p>
+                <a:pPr>
+                  <a:lnSpc>
+                    <a:spcPct val="150000"/>
+                  </a:lnSpc>
+                </a:pPr>
+                <a:r>
+                  <a:rPr lang="ja-JP" altLang="en-US" sz="2000">
+                    <a:latin typeface="Google Sans Text"/>
+                  </a:rPr>
+                  <a:t>實務上，一個層之中有比較難進行訪問的鄉鎮市區，可以考慮挑選比較容易訪問的，但是要注意區域的均衡。</a:t>
+                </a:r>
+                <a:endParaRPr lang="en-US" altLang="ja-JP" sz="2000" dirty="0">
+                  <a:latin typeface="Google Sans Text"/>
+                </a:endParaRPr>
+              </a:p>
+            </p:txBody>
+          </p:sp>
+        </mc:Choice>
+        <mc:Fallback>
+          <p:sp>
+            <p:nvSpPr>
+              <p:cNvPr id="3" name="Content Placeholder 2">
+                <a:extLst>
+                  <a:ext uri="{FF2B5EF4-FFF2-40B4-BE49-F238E27FC236}">
+                    <a16:creationId xmlns:a16="http://schemas.microsoft.com/office/drawing/2014/main" id="{E313E33E-8198-B80A-A27B-92AC8F3C1AD5}"/>
+                  </a:ext>
+                </a:extLst>
+              </p:cNvPr>
+              <p:cNvSpPr>
+                <a:spLocks noGrp="1" noRot="1" noChangeAspect="1" noMove="1" noResize="1" noEditPoints="1" noAdjustHandles="1" noChangeArrowheads="1" noChangeShapeType="1" noTextEdit="1"/>
+              </p:cNvSpPr>
+              <p:nvPr>
+                <p:ph idx="1"/>
+              </p:nvPr>
+            </p:nvSpPr>
+            <p:spPr>
+              <a:blipFill>
+                <a:blip r:embed="rId2"/>
+                <a:stretch>
+                  <a:fillRect l="-362"/>
+                </a:stretch>
+              </a:blipFill>
+            </p:spPr>
+            <p:txBody>
+              <a:bodyPr/>
+              <a:lstStyle/>
+              <a:p>
+                <a:r>
+                  <a:rPr lang="zh-TW" altLang="en-US">
+                    <a:noFill/>
+                  </a:rPr>
+                  <a:t> </a:t>
+                </a:r>
+              </a:p>
+            </p:txBody>
+          </p:sp>
+        </mc:Fallback>
+      </mc:AlternateContent>
+      <p:sp>
+        <p:nvSpPr>
+          <p:cNvPr id="4" name="Slide Number Placeholder 3">
+            <a:extLst>
+              <a:ext uri="{FF2B5EF4-FFF2-40B4-BE49-F238E27FC236}">
+                <a16:creationId xmlns:a16="http://schemas.microsoft.com/office/drawing/2014/main" id="{8E02FD09-9E03-78BE-CC5C-027BA33D31D6}"/>
+              </a:ext>
+            </a:extLst>
+          </p:cNvPr>
+          <p:cNvSpPr>
+            <a:spLocks noGrp="1"/>
+          </p:cNvSpPr>
+          <p:nvPr>
+            <p:ph type="sldNum" sz="quarter" idx="12"/>
+          </p:nvPr>
+        </p:nvSpPr>
+        <p:spPr/>
+        <p:txBody>
+          <a:bodyPr/>
+          <a:lstStyle/>
+          <a:p>
+            <a:fld id="{34E21383-B02B-694B-B2AD-A967203CDE86}" type="slidenum">
+              <a:rPr lang="en-US" smtClean="0"/>
+              <a:t>24</a:t>
+            </a:fld>
+            <a:endParaRPr lang="en-US"/>
+          </a:p>
+        </p:txBody>
+      </p:sp>
+    </p:spTree>
+    <p:extLst>
+      <p:ext uri="{BB962C8B-B14F-4D97-AF65-F5344CB8AC3E}">
+        <p14:creationId xmlns:p14="http://schemas.microsoft.com/office/powerpoint/2010/main" val="3511808344"/>
+      </p:ext>
+    </p:extLst>
+  </p:cSld>
+  <p:clrMapOvr>
+    <a:masterClrMapping/>
+  </p:clrMapOvr>
+</p:sld>
+</file>
+
+<file path=ppt/slides/slide25.xml><?xml version="1.0" encoding="utf-8"?>
+<p:sld xmlns:a="http://schemas.openxmlformats.org/drawingml/2006/main" xmlns:r="http://schemas.openxmlformats.org/officeDocument/2006/relationships" xmlns:p="http://schemas.openxmlformats.org/presentationml/2006/main">
+  <p:cSld>
+    <p:spTree>
+      <p:nvGrpSpPr>
+        <p:cNvPr id="1" name="">
+          <a:extLst>
+            <a:ext uri="{FF2B5EF4-FFF2-40B4-BE49-F238E27FC236}">
+              <a16:creationId xmlns:a16="http://schemas.microsoft.com/office/drawing/2014/main" id="{7BDFFA82-5FF3-F28E-84BF-024BAB71ACFC}"/>
+            </a:ext>
+          </a:extLst>
+        </p:cNvPr>
+        <p:cNvGrpSpPr/>
+        <p:nvPr/>
+      </p:nvGrpSpPr>
+      <p:grpSpPr>
+        <a:xfrm>
+          <a:off x="0" y="0"/>
+          <a:ext cx="0" cy="0"/>
+          <a:chOff x="0" y="0"/>
+          <a:chExt cx="0" cy="0"/>
+        </a:xfrm>
+      </p:grpSpPr>
+      <p:sp>
+        <p:nvSpPr>
+          <p:cNvPr id="2" name="Title 1">
+            <a:extLst>
+              <a:ext uri="{FF2B5EF4-FFF2-40B4-BE49-F238E27FC236}">
+                <a16:creationId xmlns:a16="http://schemas.microsoft.com/office/drawing/2014/main" id="{285BCC34-601C-CB89-85AA-CA2D1998D4D2}"/>
+              </a:ext>
+            </a:extLst>
+          </p:cNvPr>
+          <p:cNvSpPr>
+            <a:spLocks noGrp="1"/>
+          </p:cNvSpPr>
+          <p:nvPr>
+            <p:ph type="title"/>
+          </p:nvPr>
+        </p:nvSpPr>
+        <p:spPr/>
+        <p:txBody>
+          <a:bodyPr/>
+          <a:lstStyle/>
+          <a:p>
+            <a:r>
+              <a:rPr lang="ja-JP" altLang="en-US"/>
+              <a:t>集群抽樣（一）</a:t>
+            </a:r>
+            <a:endParaRPr lang="en-US" dirty="0"/>
+          </a:p>
+        </p:txBody>
+      </p:sp>
+      <mc:AlternateContent xmlns:mc="http://schemas.openxmlformats.org/markup-compatibility/2006">
+        <mc:Choice xmlns:a14="http://schemas.microsoft.com/office/drawing/2010/main" Requires="a14">
+          <p:sp>
+            <p:nvSpPr>
+              <p:cNvPr id="3" name="Content Placeholder 2">
+                <a:extLst>
+                  <a:ext uri="{FF2B5EF4-FFF2-40B4-BE49-F238E27FC236}">
+                    <a16:creationId xmlns:a16="http://schemas.microsoft.com/office/drawing/2014/main" id="{0DD5815E-3ECC-D100-8CCB-1C5673521472}"/>
+                  </a:ext>
+                </a:extLst>
+              </p:cNvPr>
+              <p:cNvSpPr>
+                <a:spLocks noGrp="1"/>
+              </p:cNvSpPr>
+              <p:nvPr>
+                <p:ph idx="1"/>
+              </p:nvPr>
+            </p:nvSpPr>
+            <p:spPr/>
+            <p:txBody>
+              <a:bodyPr>
+                <a:normAutofit fontScale="85000" lnSpcReduction="20000"/>
+              </a:bodyPr>
+              <a:lstStyle/>
+              <a:p>
+                <a:pPr>
+                  <a:lnSpc>
+                    <a:spcPct val="150000"/>
+                  </a:lnSpc>
+                </a:pPr>
+                <a:r>
+                  <a:rPr lang="ja-JP" altLang="en-US" sz="2000">
+                    <a:latin typeface="Google Sans Text"/>
+                  </a:rPr>
+                  <a:t>把母體分成一些群體，稱為分層</a:t>
+                </a:r>
+                <a:r>
+                  <a:rPr lang="en-US" altLang="ja-JP" sz="2000" dirty="0">
+                    <a:latin typeface="Google Sans Text"/>
+                  </a:rPr>
+                  <a:t>(strata)</a:t>
+                </a:r>
+                <a:r>
+                  <a:rPr lang="ja-JP" altLang="en-US" sz="2000">
+                    <a:latin typeface="Google Sans Text"/>
+                  </a:rPr>
+                  <a:t>。每一層抽出的樣本都可以計算無偏的平均值與變異數，組合起來成為可以推估母體的平均值與變異數。</a:t>
+                </a:r>
+                <a:endParaRPr lang="en-US" altLang="ja-JP" sz="2000" dirty="0">
+                  <a:latin typeface="Google Sans Text"/>
+                </a:endParaRPr>
+              </a:p>
+              <a:p>
+                <a:pPr>
+                  <a:lnSpc>
+                    <a:spcPct val="150000"/>
+                  </a:lnSpc>
+                </a:pPr>
+                <a:r>
+                  <a:rPr lang="ja-JP" altLang="en-US" sz="2000"/>
+                  <a:t>母體每一層</a:t>
+                </a:r>
+                <a14:m>
+                  <m:oMath xmlns:m="http://schemas.openxmlformats.org/officeDocument/2006/math">
+                    <m:r>
+                      <a:rPr lang="en-US" altLang="ja-JP" sz="2000" b="0" i="1" smtClean="0">
+                        <a:latin typeface="Cambria Math" panose="02040503050406030204" pitchFamily="18" charset="0"/>
+                      </a:rPr>
+                      <m:t>(</m:t>
+                    </m:r>
+                    <m:r>
+                      <a:rPr lang="en-US" altLang="ja-JP" sz="2000" b="0" i="1" smtClean="0">
+                        <a:latin typeface="Cambria Math" panose="02040503050406030204" pitchFamily="18" charset="0"/>
+                      </a:rPr>
+                      <m:t>h</m:t>
+                    </m:r>
+                    <m:r>
+                      <a:rPr lang="en-US" altLang="ja-JP" sz="2000" b="0" i="1" smtClean="0">
+                        <a:latin typeface="Cambria Math" panose="02040503050406030204" pitchFamily="18" charset="0"/>
+                      </a:rPr>
+                      <m:t>)</m:t>
+                    </m:r>
+                  </m:oMath>
+                </a14:m>
+                <a:r>
+                  <a:rPr lang="ja-JP" altLang="en-US" sz="2000"/>
+                  <a:t>的平均數：</a:t>
+                </a:r>
+                <a:r>
+                  <a:rPr lang="en-US" altLang="ja-JP" sz="2000" b="0" dirty="0">
+                    <a:effectLst/>
+                  </a:rPr>
+                  <a:t> </a:t>
+                </a:r>
+                <a14:m>
+                  <m:oMath xmlns:m="http://schemas.openxmlformats.org/officeDocument/2006/math">
+                    <m:sSup>
+                      <m:sSupPr>
+                        <m:ctrlPr>
+                          <a:rPr lang="en-US" altLang="ja-JP" sz="2000" b="0" i="1" smtClean="0">
+                            <a:effectLst/>
+                            <a:latin typeface="Cambria Math" panose="02040503050406030204" pitchFamily="18" charset="0"/>
+                          </a:rPr>
+                        </m:ctrlPr>
+                      </m:sSupPr>
+                      <m:e>
+                        <m:acc>
+                          <m:accPr>
+                            <m:chr m:val="̅"/>
+                            <m:ctrlPr>
+                              <a:rPr lang="en-US" altLang="ja-JP" sz="2000" b="0" i="1" smtClean="0">
+                                <a:effectLst/>
+                                <a:latin typeface="Cambria Math" panose="02040503050406030204" pitchFamily="18" charset="0"/>
+                              </a:rPr>
+                            </m:ctrlPr>
+                          </m:accPr>
+                          <m:e>
+                            <m:r>
+                              <a:rPr lang="en-US" altLang="ja-JP" sz="2000" b="0" i="1" smtClean="0">
+                                <a:effectLst/>
+                                <a:latin typeface="Cambria Math" panose="02040503050406030204" pitchFamily="18" charset="0"/>
+                              </a:rPr>
+                              <m:t>𝑌</m:t>
+                            </m:r>
+                          </m:e>
+                        </m:acc>
+                      </m:e>
+                      <m:sup>
+                        <m:r>
+                          <a:rPr lang="en-US" altLang="ja-JP" sz="2000" b="0" i="1" smtClean="0">
+                            <a:effectLst/>
+                            <a:latin typeface="Cambria Math" panose="02040503050406030204" pitchFamily="18" charset="0"/>
+                          </a:rPr>
+                          <m:t>(</m:t>
+                        </m:r>
+                        <m:r>
+                          <a:rPr lang="en-US" altLang="ja-JP" sz="2000" b="0" i="1" smtClean="0">
+                            <a:effectLst/>
+                            <a:latin typeface="Cambria Math" panose="02040503050406030204" pitchFamily="18" charset="0"/>
+                          </a:rPr>
+                          <m:t>h</m:t>
+                        </m:r>
+                        <m:r>
+                          <a:rPr lang="en-US" altLang="ja-JP" sz="2000" b="0" i="1" smtClean="0">
+                            <a:effectLst/>
+                            <a:latin typeface="Cambria Math" panose="02040503050406030204" pitchFamily="18" charset="0"/>
+                          </a:rPr>
+                          <m:t>)</m:t>
+                        </m:r>
+                      </m:sup>
+                    </m:sSup>
+                    <m:r>
+                      <a:rPr lang="en-US" altLang="ja-JP" sz="2000" b="0" i="1" smtClean="0">
+                        <a:effectLst/>
+                        <a:latin typeface="Cambria Math" panose="02040503050406030204" pitchFamily="18" charset="0"/>
+                      </a:rPr>
+                      <m:t>=</m:t>
+                    </m:r>
+                    <m:f>
+                      <m:fPr>
+                        <m:ctrlPr>
+                          <a:rPr lang="en-US" altLang="ja-JP" sz="2000" b="0" i="1" smtClean="0">
+                            <a:effectLst/>
+                            <a:latin typeface="Cambria Math" panose="02040503050406030204" pitchFamily="18" charset="0"/>
+                          </a:rPr>
+                        </m:ctrlPr>
+                      </m:fPr>
+                      <m:num>
+                        <m:r>
+                          <a:rPr lang="en-US" altLang="ja-JP" sz="2000" b="0" i="1" smtClean="0">
+                            <a:effectLst/>
+                            <a:latin typeface="Cambria Math" panose="02040503050406030204" pitchFamily="18" charset="0"/>
+                          </a:rPr>
+                          <m:t>1</m:t>
+                        </m:r>
+                      </m:num>
+                      <m:den>
+                        <m:sSub>
+                          <m:sSubPr>
+                            <m:ctrlPr>
+                              <a:rPr lang="en-US" altLang="ja-JP" sz="2000" b="0" i="1" smtClean="0">
+                                <a:effectLst/>
+                                <a:latin typeface="Cambria Math" panose="02040503050406030204" pitchFamily="18" charset="0"/>
+                              </a:rPr>
+                            </m:ctrlPr>
+                          </m:sSubPr>
+                          <m:e>
+                            <m:r>
+                              <a:rPr lang="en-US" altLang="ja-JP" sz="2000" b="0" i="1" smtClean="0">
+                                <a:effectLst/>
+                                <a:latin typeface="Cambria Math" panose="02040503050406030204" pitchFamily="18" charset="0"/>
+                              </a:rPr>
+                              <m:t>𝑁</m:t>
+                            </m:r>
+                          </m:e>
+                          <m:sub>
+                            <m:r>
+                              <a:rPr lang="en-US" altLang="ja-JP" sz="2000" b="0" i="1" smtClean="0">
+                                <a:effectLst/>
+                                <a:latin typeface="Cambria Math" panose="02040503050406030204" pitchFamily="18" charset="0"/>
+                              </a:rPr>
+                              <m:t>h</m:t>
+                            </m:r>
+                          </m:sub>
+                        </m:sSub>
+                      </m:den>
+                    </m:f>
+                    <m:nary>
+                      <m:naryPr>
+                        <m:chr m:val="∑"/>
+                        <m:ctrlPr>
+                          <a:rPr lang="en-US" altLang="ja-JP" sz="2000" b="0" i="1" smtClean="0">
+                            <a:effectLst/>
+                            <a:latin typeface="Cambria Math" panose="02040503050406030204" pitchFamily="18" charset="0"/>
+                          </a:rPr>
+                        </m:ctrlPr>
+                      </m:naryPr>
+                      <m:sub>
+                        <m:r>
+                          <m:rPr>
+                            <m:brk m:alnAt="23"/>
+                          </m:rPr>
+                          <a:rPr lang="en-US" altLang="ja-JP" sz="2000" b="0" i="1" smtClean="0">
+                            <a:effectLst/>
+                            <a:latin typeface="Cambria Math" panose="02040503050406030204" pitchFamily="18" charset="0"/>
+                          </a:rPr>
+                          <m:t>𝑘</m:t>
+                        </m:r>
+                        <m:r>
+                          <a:rPr lang="en-US" altLang="ja-JP" sz="2000" b="0" i="1" smtClean="0">
+                            <a:effectLst/>
+                            <a:latin typeface="Cambria Math" panose="02040503050406030204" pitchFamily="18" charset="0"/>
+                          </a:rPr>
+                          <m:t>=1</m:t>
+                        </m:r>
+                      </m:sub>
+                      <m:sup>
+                        <m:sSub>
+                          <m:sSubPr>
+                            <m:ctrlPr>
+                              <a:rPr lang="en-US" altLang="ja-JP" sz="2000" b="0" i="1" smtClean="0">
+                                <a:effectLst/>
+                                <a:latin typeface="Cambria Math" panose="02040503050406030204" pitchFamily="18" charset="0"/>
+                              </a:rPr>
+                            </m:ctrlPr>
+                          </m:sSubPr>
+                          <m:e>
+                            <m:r>
+                              <a:rPr lang="en-US" altLang="ja-JP" sz="2000" b="0" i="1" smtClean="0">
+                                <a:effectLst/>
+                                <a:latin typeface="Cambria Math" panose="02040503050406030204" pitchFamily="18" charset="0"/>
+                              </a:rPr>
+                              <m:t>𝑁</m:t>
+                            </m:r>
+                          </m:e>
+                          <m:sub>
+                            <m:r>
+                              <a:rPr lang="en-US" altLang="ja-JP" sz="2000" b="0" i="1" smtClean="0">
+                                <a:effectLst/>
+                                <a:latin typeface="Cambria Math" panose="02040503050406030204" pitchFamily="18" charset="0"/>
+                              </a:rPr>
+                              <m:t>h</m:t>
+                            </m:r>
+                          </m:sub>
+                        </m:sSub>
+                      </m:sup>
+                      <m:e>
+                        <m:sSup>
+                          <m:sSupPr>
+                            <m:ctrlPr>
+                              <a:rPr lang="en-US" altLang="ja-JP" sz="2000" b="0" i="1" smtClean="0">
+                                <a:effectLst/>
+                                <a:latin typeface="Cambria Math" panose="02040503050406030204" pitchFamily="18" charset="0"/>
+                              </a:rPr>
+                            </m:ctrlPr>
+                          </m:sSupPr>
+                          <m:e>
+                            <m:sSub>
+                              <m:sSubPr>
+                                <m:ctrlPr>
+                                  <a:rPr lang="en-US" altLang="ja-JP" sz="2000" b="0" i="1" smtClean="0">
+                                    <a:effectLst/>
+                                    <a:latin typeface="Cambria Math" panose="02040503050406030204" pitchFamily="18" charset="0"/>
+                                  </a:rPr>
+                                </m:ctrlPr>
+                              </m:sSubPr>
+                              <m:e>
+                                <m:r>
+                                  <a:rPr lang="en-US" altLang="ja-JP" sz="2000" b="0" i="1" smtClean="0">
+                                    <a:effectLst/>
+                                    <a:latin typeface="Cambria Math" panose="02040503050406030204" pitchFamily="18" charset="0"/>
+                                  </a:rPr>
+                                  <m:t>𝑌</m:t>
+                                </m:r>
+                              </m:e>
+                              <m:sub>
+                                <m:r>
+                                  <a:rPr lang="en-US" altLang="ja-JP" sz="2000" b="0" i="1" smtClean="0">
+                                    <a:effectLst/>
+                                    <a:latin typeface="Cambria Math" panose="02040503050406030204" pitchFamily="18" charset="0"/>
+                                  </a:rPr>
+                                  <m:t>𝑘</m:t>
+                                </m:r>
+                              </m:sub>
+                            </m:sSub>
+                          </m:e>
+                          <m:sup>
+                            <m:r>
+                              <a:rPr lang="en-US" altLang="ja-JP" sz="2000" b="0" i="1" smtClean="0">
+                                <a:effectLst/>
+                                <a:latin typeface="Cambria Math" panose="02040503050406030204" pitchFamily="18" charset="0"/>
+                              </a:rPr>
+                              <m:t>(</m:t>
+                            </m:r>
+                            <m:r>
+                              <a:rPr lang="en-US" altLang="ja-JP" sz="2000" b="0" i="1" smtClean="0">
+                                <a:effectLst/>
+                                <a:latin typeface="Cambria Math" panose="02040503050406030204" pitchFamily="18" charset="0"/>
+                              </a:rPr>
+                              <m:t>h</m:t>
+                            </m:r>
+                            <m:r>
+                              <a:rPr lang="en-US" altLang="ja-JP" sz="2000" b="0" i="1" smtClean="0">
+                                <a:effectLst/>
+                                <a:latin typeface="Cambria Math" panose="02040503050406030204" pitchFamily="18" charset="0"/>
+                              </a:rPr>
+                              <m:t>)</m:t>
+                            </m:r>
+                          </m:sup>
+                        </m:sSup>
+                      </m:e>
+                    </m:nary>
+                  </m:oMath>
+                </a14:m>
+                <a:r>
+                  <a:rPr lang="en-US" altLang="ja-JP" sz="2000" dirty="0"/>
+                  <a:t> </a:t>
+                </a:r>
+                <a:r>
+                  <a:rPr lang="ja-JP" altLang="en-US" sz="2000"/>
+                  <a:t>母體的平均數：</a:t>
+                </a:r>
+                <a14:m>
+                  <m:oMath xmlns:m="http://schemas.openxmlformats.org/officeDocument/2006/math">
+                    <m:acc>
+                      <m:accPr>
+                        <m:chr m:val="̅"/>
+                        <m:ctrlPr>
+                          <a:rPr lang="en-US" altLang="ja-JP" sz="2000" i="1" smtClean="0">
+                            <a:effectLst/>
+                            <a:latin typeface="Cambria Math" panose="02040503050406030204" pitchFamily="18" charset="0"/>
+                          </a:rPr>
+                        </m:ctrlPr>
+                      </m:accPr>
+                      <m:e>
+                        <m:r>
+                          <a:rPr lang="ja-JP" altLang="en-US" sz="2000" i="1">
+                            <a:latin typeface="Cambria Math" panose="02040503050406030204" pitchFamily="18" charset="0"/>
+                          </a:rPr>
+                          <m:t>Ｙ</m:t>
+                        </m:r>
+                      </m:e>
+                    </m:acc>
+                    <m:r>
+                      <a:rPr lang="en-US" altLang="ja-JP" sz="2000" b="0" i="1" smtClean="0">
+                        <a:effectLst/>
+                        <a:latin typeface="Cambria Math" panose="02040503050406030204" pitchFamily="18" charset="0"/>
+                      </a:rPr>
+                      <m:t>=</m:t>
+                    </m:r>
+                    <m:f>
+                      <m:fPr>
+                        <m:ctrlPr>
+                          <a:rPr lang="en-US" altLang="ja-JP" sz="2000" b="0" i="1" smtClean="0">
+                            <a:effectLst/>
+                            <a:latin typeface="Cambria Math" panose="02040503050406030204" pitchFamily="18" charset="0"/>
+                          </a:rPr>
+                        </m:ctrlPr>
+                      </m:fPr>
+                      <m:num>
+                        <m:r>
+                          <a:rPr lang="en-US" altLang="ja-JP" sz="2000" b="0" i="1" smtClean="0">
+                            <a:effectLst/>
+                            <a:latin typeface="Cambria Math" panose="02040503050406030204" pitchFamily="18" charset="0"/>
+                          </a:rPr>
+                          <m:t>1</m:t>
+                        </m:r>
+                      </m:num>
+                      <m:den>
+                        <m:r>
+                          <a:rPr lang="en-US" altLang="ja-JP" sz="2000" b="0" i="1" smtClean="0">
+                            <a:effectLst/>
+                            <a:latin typeface="Cambria Math" panose="02040503050406030204" pitchFamily="18" charset="0"/>
+                          </a:rPr>
+                          <m:t>𝑁</m:t>
+                        </m:r>
+                      </m:den>
+                    </m:f>
+                    <m:nary>
+                      <m:naryPr>
+                        <m:chr m:val="∑"/>
+                        <m:ctrlPr>
+                          <a:rPr lang="en-US" altLang="ja-JP" sz="2000" b="0" i="1" smtClean="0">
+                            <a:effectLst/>
+                            <a:latin typeface="Cambria Math" panose="02040503050406030204" pitchFamily="18" charset="0"/>
+                          </a:rPr>
+                        </m:ctrlPr>
+                      </m:naryPr>
+                      <m:sub>
+                        <m:r>
+                          <m:rPr>
+                            <m:brk m:alnAt="23"/>
+                          </m:rPr>
+                          <a:rPr lang="en-US" altLang="ja-JP" sz="2000" b="0" i="1" smtClean="0">
+                            <a:effectLst/>
+                            <a:latin typeface="Cambria Math" panose="02040503050406030204" pitchFamily="18" charset="0"/>
+                          </a:rPr>
+                          <m:t>h</m:t>
+                        </m:r>
+                        <m:r>
+                          <a:rPr lang="en-US" altLang="ja-JP" sz="2000" b="0" i="1" smtClean="0">
+                            <a:effectLst/>
+                            <a:latin typeface="Cambria Math" panose="02040503050406030204" pitchFamily="18" charset="0"/>
+                          </a:rPr>
+                          <m:t>=1</m:t>
+                        </m:r>
+                      </m:sub>
+                      <m:sup>
+                        <m:r>
+                          <a:rPr lang="en-US" altLang="ja-JP" sz="2000" b="0" i="1" smtClean="0">
+                            <a:effectLst/>
+                            <a:latin typeface="Cambria Math" panose="02040503050406030204" pitchFamily="18" charset="0"/>
+                          </a:rPr>
+                          <m:t>𝐿</m:t>
+                        </m:r>
+                      </m:sup>
+                      <m:e>
+                        <m:sSub>
+                          <m:sSubPr>
+                            <m:ctrlPr>
+                              <a:rPr lang="en-US" altLang="ja-JP" sz="2000" b="0" i="1" smtClean="0">
+                                <a:effectLst/>
+                                <a:latin typeface="Cambria Math" panose="02040503050406030204" pitchFamily="18" charset="0"/>
+                              </a:rPr>
+                            </m:ctrlPr>
+                          </m:sSubPr>
+                          <m:e>
+                            <m:r>
+                              <a:rPr lang="en-US" altLang="ja-JP" sz="2000" b="0" i="1" smtClean="0">
+                                <a:effectLst/>
+                                <a:latin typeface="Cambria Math" panose="02040503050406030204" pitchFamily="18" charset="0"/>
+                              </a:rPr>
+                              <m:t>𝑁</m:t>
+                            </m:r>
+                          </m:e>
+                          <m:sub>
+                            <m:r>
+                              <a:rPr lang="en-US" altLang="ja-JP" sz="2000" b="0" i="1" smtClean="0">
+                                <a:effectLst/>
+                                <a:latin typeface="Cambria Math" panose="02040503050406030204" pitchFamily="18" charset="0"/>
+                              </a:rPr>
+                              <m:t>h</m:t>
+                            </m:r>
+                          </m:sub>
+                        </m:sSub>
+                        <m:sSup>
+                          <m:sSupPr>
+                            <m:ctrlPr>
+                              <a:rPr lang="en-US" altLang="ja-JP" sz="2000" b="0" i="1" smtClean="0">
+                                <a:effectLst/>
+                                <a:latin typeface="Cambria Math" panose="02040503050406030204" pitchFamily="18" charset="0"/>
+                              </a:rPr>
+                            </m:ctrlPr>
+                          </m:sSupPr>
+                          <m:e>
+                            <m:acc>
+                              <m:accPr>
+                                <m:chr m:val="̅"/>
+                                <m:ctrlPr>
+                                  <a:rPr lang="en-US" altLang="ja-JP" sz="2000" b="0" i="1" smtClean="0">
+                                    <a:effectLst/>
+                                    <a:latin typeface="Cambria Math" panose="02040503050406030204" pitchFamily="18" charset="0"/>
+                                  </a:rPr>
+                                </m:ctrlPr>
+                              </m:accPr>
+                              <m:e>
+                                <m:r>
+                                  <a:rPr lang="en-US" altLang="ja-JP" sz="2000" b="0" i="1" smtClean="0">
+                                    <a:effectLst/>
+                                    <a:latin typeface="Cambria Math" panose="02040503050406030204" pitchFamily="18" charset="0"/>
+                                  </a:rPr>
+                                  <m:t>𝑌</m:t>
+                                </m:r>
+                              </m:e>
+                            </m:acc>
+                          </m:e>
+                          <m:sup>
+                            <m:r>
+                              <a:rPr lang="en-US" altLang="ja-JP" sz="2000" b="0" i="1" smtClean="0">
+                                <a:effectLst/>
+                                <a:latin typeface="Cambria Math" panose="02040503050406030204" pitchFamily="18" charset="0"/>
+                              </a:rPr>
+                              <m:t>(</m:t>
+                            </m:r>
+                            <m:r>
+                              <a:rPr lang="en-US" altLang="ja-JP" sz="2000" b="0" i="1" smtClean="0">
+                                <a:effectLst/>
+                                <a:latin typeface="Cambria Math" panose="02040503050406030204" pitchFamily="18" charset="0"/>
+                              </a:rPr>
+                              <m:t>h</m:t>
+                            </m:r>
+                            <m:r>
+                              <a:rPr lang="en-US" altLang="ja-JP" sz="2000" b="0" i="1" smtClean="0">
+                                <a:effectLst/>
+                                <a:latin typeface="Cambria Math" panose="02040503050406030204" pitchFamily="18" charset="0"/>
+                              </a:rPr>
+                              <m:t>)</m:t>
+                            </m:r>
+                          </m:sup>
+                        </m:sSup>
+                      </m:e>
+                    </m:nary>
+                  </m:oMath>
+                </a14:m>
+                <a:endParaRPr lang="en-US" altLang="ja-JP" sz="2000" b="0" dirty="0">
+                  <a:effectLst/>
+                </a:endParaRPr>
+              </a:p>
+              <a:p>
+                <a:pPr>
+                  <a:lnSpc>
+                    <a:spcPct val="150000"/>
+                  </a:lnSpc>
+                </a:pPr>
+                <a:r>
+                  <a:rPr lang="ja-JP" altLang="en-US" sz="2000">
+                    <a:effectLst/>
+                    <a:latin typeface="Google Sans Text"/>
+                  </a:rPr>
+                  <a:t>每一層樣本的平均數，</a:t>
+                </a:r>
+                <a14:m>
+                  <m:oMath xmlns:m="http://schemas.openxmlformats.org/officeDocument/2006/math">
+                    <m:sSub>
+                      <m:sSubPr>
+                        <m:ctrlPr>
+                          <a:rPr lang="en-US" altLang="ja-JP" sz="2000" b="0" i="1" smtClean="0">
+                            <a:effectLst/>
+                            <a:latin typeface="Cambria Math" panose="02040503050406030204" pitchFamily="18" charset="0"/>
+                          </a:rPr>
+                        </m:ctrlPr>
+                      </m:sSubPr>
+                      <m:e>
+                        <m:acc>
+                          <m:accPr>
+                            <m:chr m:val="̅"/>
+                            <m:ctrlPr>
+                              <a:rPr lang="en-US" altLang="ja-JP" sz="2000" b="0" i="1" smtClean="0">
+                                <a:effectLst/>
+                                <a:latin typeface="Cambria Math" panose="02040503050406030204" pitchFamily="18" charset="0"/>
+                              </a:rPr>
+                            </m:ctrlPr>
+                          </m:accPr>
+                          <m:e>
+                            <m:r>
+                              <a:rPr lang="en-US" altLang="ja-JP" sz="2000" b="0" i="1" smtClean="0">
+                                <a:effectLst/>
+                                <a:latin typeface="Cambria Math" panose="02040503050406030204" pitchFamily="18" charset="0"/>
+                              </a:rPr>
+                              <m:t>𝑦</m:t>
+                            </m:r>
+                          </m:e>
+                        </m:acc>
+                      </m:e>
+                      <m:sub>
+                        <m:r>
+                          <a:rPr lang="en-US" altLang="ja-JP" sz="2000" b="0" i="1" smtClean="0">
+                            <a:effectLst/>
+                            <a:latin typeface="Cambria Math" panose="02040503050406030204" pitchFamily="18" charset="0"/>
+                          </a:rPr>
+                          <m:t>𝑆</m:t>
+                        </m:r>
+                      </m:sub>
+                    </m:sSub>
+                    <m:r>
+                      <a:rPr lang="en-US" altLang="ja-JP" sz="2000" b="0" i="1" smtClean="0">
+                        <a:effectLst/>
+                        <a:latin typeface="Cambria Math" panose="02040503050406030204" pitchFamily="18" charset="0"/>
+                      </a:rPr>
+                      <m:t>=</m:t>
+                    </m:r>
+                    <m:f>
+                      <m:fPr>
+                        <m:ctrlPr>
+                          <a:rPr lang="en-US" altLang="ja-JP" sz="2000" b="0" i="1" smtClean="0">
+                            <a:effectLst/>
+                            <a:latin typeface="Cambria Math" panose="02040503050406030204" pitchFamily="18" charset="0"/>
+                          </a:rPr>
+                        </m:ctrlPr>
+                      </m:fPr>
+                      <m:num>
+                        <m:r>
+                          <a:rPr lang="en-US" altLang="ja-JP" sz="2000" b="0" i="1" smtClean="0">
+                            <a:effectLst/>
+                            <a:latin typeface="Cambria Math" panose="02040503050406030204" pitchFamily="18" charset="0"/>
+                          </a:rPr>
+                          <m:t>1</m:t>
+                        </m:r>
+                      </m:num>
+                      <m:den>
+                        <m:r>
+                          <a:rPr lang="en-US" altLang="ja-JP" sz="2000" b="0" i="1" smtClean="0">
+                            <a:effectLst/>
+                            <a:latin typeface="Cambria Math" panose="02040503050406030204" pitchFamily="18" charset="0"/>
+                          </a:rPr>
+                          <m:t>𝑁</m:t>
+                        </m:r>
+                      </m:den>
+                    </m:f>
+                    <m:nary>
+                      <m:naryPr>
+                        <m:chr m:val="∑"/>
+                        <m:ctrlPr>
+                          <a:rPr lang="en-US" altLang="ja-JP" sz="2000" b="0" i="1" smtClean="0">
+                            <a:effectLst/>
+                            <a:latin typeface="Cambria Math" panose="02040503050406030204" pitchFamily="18" charset="0"/>
+                          </a:rPr>
+                        </m:ctrlPr>
+                      </m:naryPr>
+                      <m:sub>
+                        <m:r>
+                          <m:rPr>
+                            <m:brk m:alnAt="23"/>
+                          </m:rPr>
+                          <a:rPr lang="en-US" altLang="ja-JP" sz="2000" b="0" i="1" smtClean="0">
+                            <a:effectLst/>
+                            <a:latin typeface="Cambria Math" panose="02040503050406030204" pitchFamily="18" charset="0"/>
+                          </a:rPr>
+                          <m:t>h</m:t>
+                        </m:r>
+                        <m:r>
+                          <a:rPr lang="en-US" altLang="ja-JP" sz="2000" b="0" i="1" smtClean="0">
+                            <a:effectLst/>
+                            <a:latin typeface="Cambria Math" panose="02040503050406030204" pitchFamily="18" charset="0"/>
+                          </a:rPr>
+                          <m:t>=1</m:t>
+                        </m:r>
+                      </m:sub>
+                      <m:sup>
+                        <m:r>
+                          <a:rPr lang="en-US" altLang="ja-JP" sz="2000" b="0" i="1" smtClean="0">
+                            <a:effectLst/>
+                            <a:latin typeface="Cambria Math" panose="02040503050406030204" pitchFamily="18" charset="0"/>
+                          </a:rPr>
+                          <m:t>𝐿</m:t>
+                        </m:r>
+                      </m:sup>
+                      <m:e>
+                        <m:sSub>
+                          <m:sSubPr>
+                            <m:ctrlPr>
+                              <a:rPr lang="en-US" altLang="ja-JP" sz="2000" b="0" i="1" smtClean="0">
+                                <a:effectLst/>
+                                <a:latin typeface="Cambria Math" panose="02040503050406030204" pitchFamily="18" charset="0"/>
+                              </a:rPr>
+                            </m:ctrlPr>
+                          </m:sSubPr>
+                          <m:e>
+                            <m:r>
+                              <a:rPr lang="en-US" altLang="ja-JP" sz="2000" b="0" i="1" smtClean="0">
+                                <a:effectLst/>
+                                <a:latin typeface="Cambria Math" panose="02040503050406030204" pitchFamily="18" charset="0"/>
+                              </a:rPr>
+                              <m:t>𝑁</m:t>
+                            </m:r>
+                          </m:e>
+                          <m:sub>
+                            <m:r>
+                              <a:rPr lang="en-US" altLang="ja-JP" sz="2000" b="0" i="1" smtClean="0">
+                                <a:effectLst/>
+                                <a:latin typeface="Cambria Math" panose="02040503050406030204" pitchFamily="18" charset="0"/>
+                              </a:rPr>
+                              <m:t>h</m:t>
+                            </m:r>
+                          </m:sub>
+                        </m:sSub>
+                        <m:sSup>
+                          <m:sSupPr>
+                            <m:ctrlPr>
+                              <a:rPr lang="en-US" altLang="ja-JP" sz="2000" b="0" i="1" smtClean="0">
+                                <a:effectLst/>
+                                <a:latin typeface="Cambria Math" panose="02040503050406030204" pitchFamily="18" charset="0"/>
+                              </a:rPr>
+                            </m:ctrlPr>
+                          </m:sSupPr>
+                          <m:e>
+                            <m:acc>
+                              <m:accPr>
+                                <m:chr m:val="̅"/>
+                                <m:ctrlPr>
+                                  <a:rPr lang="en-US" altLang="ja-JP" sz="2000" b="0" i="1" smtClean="0">
+                                    <a:effectLst/>
+                                    <a:latin typeface="Cambria Math" panose="02040503050406030204" pitchFamily="18" charset="0"/>
+                                  </a:rPr>
+                                </m:ctrlPr>
+                              </m:accPr>
+                              <m:e>
+                                <m:r>
+                                  <a:rPr lang="en-US" altLang="ja-JP" sz="2000" b="0" i="1" smtClean="0">
+                                    <a:effectLst/>
+                                    <a:latin typeface="Cambria Math" panose="02040503050406030204" pitchFamily="18" charset="0"/>
+                                  </a:rPr>
+                                  <m:t>𝑦</m:t>
+                                </m:r>
+                              </m:e>
+                            </m:acc>
+                          </m:e>
+                          <m:sup>
+                            <m:r>
+                              <a:rPr lang="en-US" altLang="ja-JP" sz="2000" b="0" i="1" smtClean="0">
+                                <a:effectLst/>
+                                <a:latin typeface="Cambria Math" panose="02040503050406030204" pitchFamily="18" charset="0"/>
+                              </a:rPr>
+                              <m:t>(</m:t>
+                            </m:r>
+                            <m:r>
+                              <a:rPr lang="en-US" altLang="ja-JP" sz="2000" b="0" i="1" smtClean="0">
+                                <a:effectLst/>
+                                <a:latin typeface="Cambria Math" panose="02040503050406030204" pitchFamily="18" charset="0"/>
+                              </a:rPr>
+                              <m:t>h</m:t>
+                            </m:r>
+                            <m:r>
+                              <a:rPr lang="en-US" altLang="ja-JP" sz="2000" b="0" i="1" smtClean="0">
+                                <a:effectLst/>
+                                <a:latin typeface="Cambria Math" panose="02040503050406030204" pitchFamily="18" charset="0"/>
+                              </a:rPr>
+                              <m:t>)</m:t>
+                            </m:r>
+                          </m:sup>
+                        </m:sSup>
+                      </m:e>
+                    </m:nary>
+                  </m:oMath>
+                </a14:m>
+                <a:r>
+                  <a:rPr lang="zh-TW" altLang="en-US" sz="2000" dirty="0">
+                    <a:effectLst/>
+                    <a:latin typeface="Google Sans Text"/>
+                  </a:rPr>
+                  <a:t> </a:t>
+                </a:r>
+                <a:r>
+                  <a:rPr lang="ja-JP" altLang="en-US" sz="2000">
+                    <a:effectLst/>
+                    <a:latin typeface="Google Sans Text"/>
+                  </a:rPr>
+                  <a:t>可推估母體平均數。</a:t>
+                </a:r>
+                <a:endParaRPr lang="en-US" altLang="ja-JP" sz="2000" dirty="0">
+                  <a:effectLst/>
+                  <a:latin typeface="Google Sans Text"/>
+                </a:endParaRPr>
+              </a:p>
+              <a:p>
+                <a:pPr>
+                  <a:lnSpc>
+                    <a:spcPct val="150000"/>
+                  </a:lnSpc>
+                </a:pPr>
+                <a:r>
+                  <a:rPr lang="ja-JP" altLang="en-US" sz="2000">
+                    <a:latin typeface="Google Sans Text"/>
+                  </a:rPr>
+                  <a:t>每一層樣本的平均數的變異程度：</a:t>
+                </a:r>
+                <a14:m>
+                  <m:oMath xmlns:m="http://schemas.openxmlformats.org/officeDocument/2006/math">
+                    <m:r>
+                      <a:rPr lang="en-US" altLang="ja-JP" sz="2000" b="0" i="1" smtClean="0">
+                        <a:latin typeface="Cambria Math" panose="02040503050406030204" pitchFamily="18" charset="0"/>
+                      </a:rPr>
+                      <m:t>𝑉</m:t>
+                    </m:r>
+                    <m:d>
+                      <m:dPr>
+                        <m:ctrlPr>
+                          <a:rPr lang="en-US" altLang="ja-JP" sz="2000" b="0" i="1" smtClean="0">
+                            <a:latin typeface="Cambria Math" panose="02040503050406030204" pitchFamily="18" charset="0"/>
+                          </a:rPr>
+                        </m:ctrlPr>
+                      </m:dPr>
+                      <m:e>
+                        <m:sSub>
+                          <m:sSubPr>
+                            <m:ctrlPr>
+                              <a:rPr lang="en-US" altLang="ja-JP" sz="2000" i="1">
+                                <a:latin typeface="Cambria Math" panose="02040503050406030204" pitchFamily="18" charset="0"/>
+                              </a:rPr>
+                            </m:ctrlPr>
+                          </m:sSubPr>
+                          <m:e>
+                            <m:acc>
+                              <m:accPr>
+                                <m:chr m:val="̅"/>
+                                <m:ctrlPr>
+                                  <a:rPr lang="en-US" altLang="ja-JP" sz="2000" i="1">
+                                    <a:latin typeface="Cambria Math" panose="02040503050406030204" pitchFamily="18" charset="0"/>
+                                  </a:rPr>
+                                </m:ctrlPr>
+                              </m:accPr>
+                              <m:e>
+                                <m:r>
+                                  <a:rPr lang="en-US" altLang="ja-JP" sz="2000" i="1">
+                                    <a:latin typeface="Cambria Math" panose="02040503050406030204" pitchFamily="18" charset="0"/>
+                                  </a:rPr>
+                                  <m:t>𝑦</m:t>
+                                </m:r>
+                              </m:e>
+                            </m:acc>
+                          </m:e>
+                          <m:sub>
+                            <m:r>
+                              <a:rPr lang="en-US" altLang="ja-JP" sz="2000" i="1">
+                                <a:latin typeface="Cambria Math" panose="02040503050406030204" pitchFamily="18" charset="0"/>
+                              </a:rPr>
+                              <m:t>𝑆</m:t>
+                            </m:r>
+                          </m:sub>
+                        </m:sSub>
+                      </m:e>
+                    </m:d>
+                    <m:r>
+                      <a:rPr lang="en-US" altLang="ja-JP" sz="2000" b="0" i="1" smtClean="0">
+                        <a:latin typeface="Cambria Math" panose="02040503050406030204" pitchFamily="18" charset="0"/>
+                      </a:rPr>
+                      <m:t>=</m:t>
+                    </m:r>
+                  </m:oMath>
+                </a14:m>
+                <a:r>
+                  <a:rPr lang="en-US" altLang="ja-JP" sz="2000" dirty="0"/>
+                  <a:t> </a:t>
+                </a:r>
+                <a14:m>
+                  <m:oMath xmlns:m="http://schemas.openxmlformats.org/officeDocument/2006/math">
+                    <m:f>
+                      <m:fPr>
+                        <m:ctrlPr>
+                          <a:rPr lang="en-US" altLang="ja-JP" sz="2000" i="1">
+                            <a:latin typeface="Cambria Math" panose="02040503050406030204" pitchFamily="18" charset="0"/>
+                          </a:rPr>
+                        </m:ctrlPr>
+                      </m:fPr>
+                      <m:num>
+                        <m:r>
+                          <a:rPr lang="en-US" altLang="ja-JP" sz="2000" i="1">
+                            <a:latin typeface="Cambria Math" panose="02040503050406030204" pitchFamily="18" charset="0"/>
+                          </a:rPr>
+                          <m:t>1</m:t>
+                        </m:r>
+                      </m:num>
+                      <m:den>
+                        <m:sSup>
+                          <m:sSupPr>
+                            <m:ctrlPr>
+                              <a:rPr lang="en-US" altLang="ja-JP" sz="2000" i="1" smtClean="0">
+                                <a:latin typeface="Cambria Math" panose="02040503050406030204" pitchFamily="18" charset="0"/>
+                              </a:rPr>
+                            </m:ctrlPr>
+                          </m:sSupPr>
+                          <m:e>
+                            <m:r>
+                              <a:rPr lang="en-US" altLang="ja-JP" sz="2000" b="0" i="1" smtClean="0">
+                                <a:latin typeface="Cambria Math" panose="02040503050406030204" pitchFamily="18" charset="0"/>
+                              </a:rPr>
+                              <m:t>𝑁</m:t>
+                            </m:r>
+                          </m:e>
+                          <m:sup>
+                            <m:r>
+                              <a:rPr lang="en-US" altLang="ja-JP" sz="2000" b="0" i="1" smtClean="0">
+                                <a:latin typeface="Cambria Math" panose="02040503050406030204" pitchFamily="18" charset="0"/>
+                              </a:rPr>
+                              <m:t>2</m:t>
+                            </m:r>
+                          </m:sup>
+                        </m:sSup>
+                      </m:den>
+                    </m:f>
+                  </m:oMath>
+                </a14:m>
+                <a:r>
+                  <a:rPr lang="en-US" altLang="ja-JP" sz="2000" dirty="0"/>
+                  <a:t> </a:t>
+                </a:r>
+                <a14:m>
+                  <m:oMath xmlns:m="http://schemas.openxmlformats.org/officeDocument/2006/math">
+                    <m:nary>
+                      <m:naryPr>
+                        <m:chr m:val="∑"/>
+                        <m:ctrlPr>
+                          <a:rPr lang="en-US" altLang="ja-JP" sz="2000" i="1">
+                            <a:latin typeface="Cambria Math" panose="02040503050406030204" pitchFamily="18" charset="0"/>
+                          </a:rPr>
+                        </m:ctrlPr>
+                      </m:naryPr>
+                      <m:sub>
+                        <m:r>
+                          <m:rPr>
+                            <m:brk m:alnAt="23"/>
+                          </m:rPr>
+                          <a:rPr lang="en-US" altLang="ja-JP" sz="2000" i="1">
+                            <a:latin typeface="Cambria Math" panose="02040503050406030204" pitchFamily="18" charset="0"/>
+                          </a:rPr>
+                          <m:t>h</m:t>
+                        </m:r>
+                        <m:r>
+                          <a:rPr lang="en-US" altLang="ja-JP" sz="2000" i="1">
+                            <a:latin typeface="Cambria Math" panose="02040503050406030204" pitchFamily="18" charset="0"/>
+                          </a:rPr>
+                          <m:t>=1</m:t>
+                        </m:r>
+                      </m:sub>
+                      <m:sup>
+                        <m:r>
+                          <a:rPr lang="en-US" altLang="ja-JP" sz="2000" i="1">
+                            <a:latin typeface="Cambria Math" panose="02040503050406030204" pitchFamily="18" charset="0"/>
+                          </a:rPr>
+                          <m:t>𝐿</m:t>
+                        </m:r>
+                      </m:sup>
+                      <m:e>
+                        <m:sSubSup>
+                          <m:sSubSupPr>
+                            <m:ctrlPr>
+                              <a:rPr lang="en-US" altLang="ja-JP" sz="2000" i="1" smtClean="0">
+                                <a:latin typeface="Cambria Math" panose="02040503050406030204" pitchFamily="18" charset="0"/>
+                              </a:rPr>
+                            </m:ctrlPr>
+                          </m:sSubSupPr>
+                          <m:e>
+                            <m:r>
+                              <a:rPr lang="en-US" altLang="ja-JP" sz="2000" b="0" i="1" smtClean="0">
+                                <a:latin typeface="Cambria Math" panose="02040503050406030204" pitchFamily="18" charset="0"/>
+                              </a:rPr>
+                              <m:t>𝑁</m:t>
+                            </m:r>
+                          </m:e>
+                          <m:sub>
+                            <m:r>
+                              <a:rPr lang="en-US" altLang="ja-JP" sz="2000" b="0" i="1" smtClean="0">
+                                <a:latin typeface="Cambria Math" panose="02040503050406030204" pitchFamily="18" charset="0"/>
+                              </a:rPr>
+                              <m:t>h</m:t>
+                            </m:r>
+                          </m:sub>
+                          <m:sup>
+                            <m:r>
+                              <a:rPr lang="en-US" altLang="ja-JP" sz="2000" b="0" i="1" smtClean="0">
+                                <a:latin typeface="Cambria Math" panose="02040503050406030204" pitchFamily="18" charset="0"/>
+                              </a:rPr>
+                              <m:t>2</m:t>
+                            </m:r>
+                          </m:sup>
+                        </m:sSubSup>
+                        <m:f>
+                          <m:fPr>
+                            <m:ctrlPr>
+                              <a:rPr lang="en-US" altLang="ja-JP" sz="2000" i="1" smtClean="0">
+                                <a:latin typeface="Cambria Math" panose="02040503050406030204" pitchFamily="18" charset="0"/>
+                              </a:rPr>
+                            </m:ctrlPr>
+                          </m:fPr>
+                          <m:num>
+                            <m:r>
+                              <a:rPr lang="en-US" altLang="ja-JP" sz="2000" b="0" i="1" smtClean="0">
+                                <a:latin typeface="Cambria Math" panose="02040503050406030204" pitchFamily="18" charset="0"/>
+                              </a:rPr>
+                              <m:t>1</m:t>
+                            </m:r>
+                          </m:num>
+                          <m:den>
+                            <m:sSub>
+                              <m:sSubPr>
+                                <m:ctrlPr>
+                                  <a:rPr lang="en-US" altLang="ja-JP" sz="2000" i="1" smtClean="0">
+                                    <a:latin typeface="Cambria Math" panose="02040503050406030204" pitchFamily="18" charset="0"/>
+                                  </a:rPr>
+                                </m:ctrlPr>
+                              </m:sSubPr>
+                              <m:e>
+                                <m:r>
+                                  <a:rPr lang="en-US" altLang="ja-JP" sz="2000" b="0" i="1" smtClean="0">
+                                    <a:latin typeface="Cambria Math" panose="02040503050406030204" pitchFamily="18" charset="0"/>
+                                  </a:rPr>
+                                  <m:t>𝑁</m:t>
+                                </m:r>
+                              </m:e>
+                              <m:sub>
+                                <m:r>
+                                  <a:rPr lang="en-US" altLang="ja-JP" sz="2000" b="0" i="1" smtClean="0">
+                                    <a:latin typeface="Cambria Math" panose="02040503050406030204" pitchFamily="18" charset="0"/>
+                                  </a:rPr>
+                                  <m:t>h</m:t>
+                                </m:r>
+                              </m:sub>
+                            </m:sSub>
+                          </m:den>
+                        </m:f>
+                        <m:sSubSup>
+                          <m:sSubSupPr>
+                            <m:ctrlPr>
+                              <a:rPr lang="en-US" altLang="ja-JP" sz="2000" i="1" smtClean="0">
+                                <a:latin typeface="Cambria Math" panose="02040503050406030204" pitchFamily="18" charset="0"/>
+                              </a:rPr>
+                            </m:ctrlPr>
+                          </m:sSubSupPr>
+                          <m:e>
+                            <m:r>
+                              <a:rPr lang="en-US" altLang="ja-JP" sz="2000" b="0" i="1" smtClean="0">
+                                <a:latin typeface="Cambria Math" panose="02040503050406030204" pitchFamily="18" charset="0"/>
+                              </a:rPr>
+                              <m:t>𝑠</m:t>
+                            </m:r>
+                          </m:e>
+                          <m:sub>
+                            <m:r>
+                              <a:rPr lang="en-US" altLang="ja-JP" sz="2000" b="0" i="1" smtClean="0">
+                                <a:latin typeface="Cambria Math" panose="02040503050406030204" pitchFamily="18" charset="0"/>
+                              </a:rPr>
+                              <m:t>h</m:t>
+                            </m:r>
+                          </m:sub>
+                          <m:sup>
+                            <m:r>
+                              <a:rPr lang="en-US" altLang="ja-JP" sz="2000" b="0" i="1" smtClean="0">
+                                <a:latin typeface="Cambria Math" panose="02040503050406030204" pitchFamily="18" charset="0"/>
+                              </a:rPr>
+                              <m:t>2</m:t>
+                            </m:r>
+                          </m:sup>
+                        </m:sSubSup>
+                      </m:e>
+                    </m:nary>
+                    <m:r>
+                      <a:rPr lang="zh-TW" altLang="en-US" sz="2000" b="0" i="1" smtClean="0">
+                        <a:latin typeface="Cambria Math" panose="02040503050406030204" pitchFamily="18" charset="0"/>
+                      </a:rPr>
+                      <m:t> </m:t>
+                    </m:r>
+                    <m:sSubSup>
+                      <m:sSubSupPr>
+                        <m:ctrlPr>
+                          <a:rPr lang="en-US" altLang="ja-JP" sz="2000" i="1">
+                            <a:latin typeface="Cambria Math" panose="02040503050406030204" pitchFamily="18" charset="0"/>
+                          </a:rPr>
+                        </m:ctrlPr>
+                      </m:sSubSupPr>
+                      <m:e>
+                        <m:r>
+                          <a:rPr lang="en-US" altLang="ja-JP" sz="2000" i="1">
+                            <a:latin typeface="Cambria Math" panose="02040503050406030204" pitchFamily="18" charset="0"/>
+                          </a:rPr>
+                          <m:t>𝑠</m:t>
+                        </m:r>
+                      </m:e>
+                      <m:sub>
+                        <m:r>
+                          <a:rPr lang="en-US" altLang="ja-JP" sz="2000" i="1">
+                            <a:latin typeface="Cambria Math" panose="02040503050406030204" pitchFamily="18" charset="0"/>
+                          </a:rPr>
+                          <m:t>h</m:t>
+                        </m:r>
+                      </m:sub>
+                      <m:sup>
+                        <m:r>
+                          <a:rPr lang="en-US" altLang="ja-JP" sz="2000" i="1">
+                            <a:latin typeface="Cambria Math" panose="02040503050406030204" pitchFamily="18" charset="0"/>
+                          </a:rPr>
+                          <m:t>2</m:t>
+                        </m:r>
+                      </m:sup>
+                    </m:sSubSup>
+                  </m:oMath>
+                </a14:m>
+                <a:r>
+                  <a:rPr lang="ja-JP" altLang="en-US" sz="2000" dirty="0">
+                    <a:latin typeface="Google Sans Text"/>
+                  </a:rPr>
+                  <a:t>代表該分層裡面的變異程度。</a:t>
+                </a:r>
+                <a:endParaRPr lang="en-US" altLang="ja-JP" sz="2000" dirty="0">
+                  <a:latin typeface="Google Sans Text"/>
+                </a:endParaRPr>
+              </a:p>
+              <a:p>
+                <a:pPr>
+                  <a:lnSpc>
+                    <a:spcPct val="150000"/>
+                  </a:lnSpc>
+                </a:pPr>
+                <a:r>
+                  <a:rPr lang="ja-JP" altLang="en-US" sz="2000">
+                    <a:latin typeface="Google Sans Text"/>
+                  </a:rPr>
+                  <a:t>需要可抽樣的清單，才能加以分層。例如，把台灣的鄉鎮市區按照都市化程度分層，在中選的層之中，抽出村里。</a:t>
+                </a:r>
+                <a:endParaRPr lang="en-US" altLang="ja-JP" sz="2000" dirty="0">
+                  <a:latin typeface="Google Sans Text"/>
+                </a:endParaRPr>
+              </a:p>
+              <a:p>
+                <a:pPr>
+                  <a:lnSpc>
+                    <a:spcPct val="150000"/>
+                  </a:lnSpc>
+                </a:pPr>
+                <a:r>
+                  <a:rPr lang="ja-JP" altLang="en-US" sz="2000">
+                    <a:latin typeface="Google Sans Text"/>
+                  </a:rPr>
+                  <a:t>實務上，一個層之中有比較難進行訪問的鄉鎮市區，可以考慮挑選比較容易訪問的，但是要注意區域的均衡。</a:t>
+                </a:r>
+                <a:endParaRPr lang="en-US" altLang="ja-JP" sz="2000" dirty="0">
+                  <a:latin typeface="Google Sans Text"/>
+                </a:endParaRPr>
+              </a:p>
+            </p:txBody>
+          </p:sp>
+        </mc:Choice>
+        <mc:Fallback>
+          <p:sp>
+            <p:nvSpPr>
+              <p:cNvPr id="3" name="Content Placeholder 2">
+                <a:extLst>
+                  <a:ext uri="{FF2B5EF4-FFF2-40B4-BE49-F238E27FC236}">
+                    <a16:creationId xmlns:a16="http://schemas.microsoft.com/office/drawing/2014/main" id="{0DD5815E-3ECC-D100-8CCB-1C5673521472}"/>
+                  </a:ext>
+                </a:extLst>
+              </p:cNvPr>
+              <p:cNvSpPr>
+                <a:spLocks noGrp="1" noRot="1" noChangeAspect="1" noMove="1" noResize="1" noEditPoints="1" noAdjustHandles="1" noChangeArrowheads="1" noChangeShapeType="1" noTextEdit="1"/>
+              </p:cNvSpPr>
+              <p:nvPr>
+                <p:ph idx="1"/>
+              </p:nvPr>
+            </p:nvSpPr>
+            <p:spPr>
+              <a:blipFill>
+                <a:blip r:embed="rId2"/>
+                <a:stretch>
+                  <a:fillRect l="-362"/>
+                </a:stretch>
+              </a:blipFill>
+            </p:spPr>
+            <p:txBody>
+              <a:bodyPr/>
+              <a:lstStyle/>
+              <a:p>
+                <a:r>
+                  <a:rPr lang="zh-TW" altLang="en-US">
+                    <a:noFill/>
+                  </a:rPr>
+                  <a:t> </a:t>
+                </a:r>
+              </a:p>
+            </p:txBody>
+          </p:sp>
+        </mc:Fallback>
+      </mc:AlternateContent>
+      <p:sp>
+        <p:nvSpPr>
+          <p:cNvPr id="4" name="Slide Number Placeholder 3">
+            <a:extLst>
+              <a:ext uri="{FF2B5EF4-FFF2-40B4-BE49-F238E27FC236}">
+                <a16:creationId xmlns:a16="http://schemas.microsoft.com/office/drawing/2014/main" id="{02677DDA-821F-27C1-DE27-756C20968055}"/>
+              </a:ext>
+            </a:extLst>
+          </p:cNvPr>
+          <p:cNvSpPr>
+            <a:spLocks noGrp="1"/>
+          </p:cNvSpPr>
+          <p:nvPr>
+            <p:ph type="sldNum" sz="quarter" idx="12"/>
+          </p:nvPr>
+        </p:nvSpPr>
+        <p:spPr/>
+        <p:txBody>
+          <a:bodyPr/>
+          <a:lstStyle/>
+          <a:p>
+            <a:fld id="{34E21383-B02B-694B-B2AD-A967203CDE86}" type="slidenum">
+              <a:rPr lang="en-US" smtClean="0"/>
+              <a:t>25</a:t>
+            </a:fld>
+            <a:endParaRPr lang="en-US"/>
+          </a:p>
+        </p:txBody>
+      </p:sp>
+    </p:spTree>
+    <p:extLst>
+      <p:ext uri="{BB962C8B-B14F-4D97-AF65-F5344CB8AC3E}">
+        <p14:creationId xmlns:p14="http://schemas.microsoft.com/office/powerpoint/2010/main" val="3003977298"/>
       </p:ext>
     </p:extLst>
   </p:cSld>
@@ -10387,8 +18038,8 @@
           </a:p>
         </p:txBody>
       </p:sp>
-      <mc:AlternateContent xmlns:mc="http://schemas.openxmlformats.org/markup-compatibility/2006">
-        <mc:Choice xmlns:a14="http://schemas.microsoft.com/office/drawing/2010/main" Requires="a14">
+      <mc:AlternateContent xmlns:mc="http://schemas.openxmlformats.org/markup-compatibility/2006" xmlns:a14="http://schemas.microsoft.com/office/drawing/2010/main">
+        <mc:Choice Requires="a14">
           <p:sp>
             <p:nvSpPr>
               <p:cNvPr id="3" name="Content Placeholder 2">
@@ -10836,7 +18487,7 @@
             </p:txBody>
           </p:sp>
         </mc:Choice>
-        <mc:Fallback>
+        <mc:Fallback xmlns="">
           <p:sp>
             <p:nvSpPr>
               <p:cNvPr id="3" name="Content Placeholder 2">
@@ -11153,15 +18804,7 @@
             </a:r>
             <a:r>
               <a:rPr lang="ja-JP" altLang="en-US" sz="2000"/>
-              <a:t>），所以每個樣本的權重 </a:t>
-            </a:r>
-            <a:r>
-              <a:rPr lang="en-US" altLang="ja-JP" sz="2000" dirty="0"/>
-              <a:t> </a:t>
-            </a:r>
-            <a:r>
-              <a:rPr lang="ja-JP" altLang="en-US" sz="2000"/>
-              <a:t>也都一樣 。</a:t>
+              <a:t>），所以每個樣本的權重也都一樣 。</a:t>
             </a:r>
             <a:endParaRPr lang="en-US" altLang="ja-JP" sz="2000" dirty="0"/>
           </a:p>
@@ -11741,8 +19384,8 @@
           </a:p>
         </p:txBody>
       </p:sp>
-      <mc:AlternateContent xmlns:mc="http://schemas.openxmlformats.org/markup-compatibility/2006">
-        <mc:Choice xmlns:a14="http://schemas.microsoft.com/office/drawing/2010/main" Requires="a14">
+      <mc:AlternateContent xmlns:mc="http://schemas.openxmlformats.org/markup-compatibility/2006" xmlns:a14="http://schemas.microsoft.com/office/drawing/2010/main">
+        <mc:Choice Requires="a14">
           <p:sp>
             <p:nvSpPr>
               <p:cNvPr id="3" name="Content Placeholder 2">
@@ -12303,7 +19946,7 @@
             </p:txBody>
           </p:sp>
         </mc:Choice>
-        <mc:Fallback>
+        <mc:Fallback xmlns="">
           <p:sp>
             <p:nvSpPr>
               <p:cNvPr id="3" name="Content Placeholder 2">

--- a/投影片/民意與調查Week5.pptx
+++ b/投影片/民意與調查Week5.pptx
@@ -5,7 +5,7 @@
     <p:sldMasterId id="2147483648" r:id="rId1"/>
   </p:sldMasterIdLst>
   <p:notesMasterIdLst>
-    <p:notesMasterId r:id="rId27"/>
+    <p:notesMasterId r:id="rId30"/>
   </p:notesMasterIdLst>
   <p:sldIdLst>
     <p:sldId id="256" r:id="rId2"/>
@@ -32,7 +32,10 @@
     <p:sldId id="289" r:id="rId23"/>
     <p:sldId id="290" r:id="rId24"/>
     <p:sldId id="291" r:id="rId25"/>
-    <p:sldId id="292" r:id="rId26"/>
+    <p:sldId id="294" r:id="rId26"/>
+    <p:sldId id="292" r:id="rId27"/>
+    <p:sldId id="293" r:id="rId28"/>
+    <p:sldId id="295" r:id="rId29"/>
   </p:sldIdLst>
   <p:sldSz cx="12192000" cy="6858000"/>
   <p:notesSz cx="6858000" cy="9144000"/>
@@ -3759,12 +3762,8 @@
           <a:lstStyle/>
           <a:p>
             <a:r>
-              <a:rPr lang="en-US" dirty="0"/>
-              <a:t>3</a:t>
-            </a:r>
-            <a:r>
               <a:rPr lang="en-US"/>
-              <a:t>/25/2025</a:t>
+              <a:t>3/25/2026</a:t>
             </a:r>
             <a:endParaRPr lang="en-US" dirty="0"/>
           </a:p>
@@ -8035,22 +8034,16 @@
                       <m:t>8.5</m:t>
                     </m:r>
                     <m:r>
-                      <a:rPr lang="en-US" sz="2000" i="1">
+                      <a:rPr lang="en-US" sz="2000" b="0" i="1" smtClean="0">
                         <a:latin typeface="Cambria Math" panose="02040503050406030204" pitchFamily="18" charset="0"/>
                       </a:rPr>
-                      <m:t>，就是</m:t>
+                      <m:t>，就是富人的權</m:t>
                     </m:r>
                     <m:r>
                       <a:rPr lang="en-US" sz="2000" i="1" smtClean="0">
                         <a:latin typeface="Cambria Math" panose="02040503050406030204" pitchFamily="18" charset="0"/>
                       </a:rPr>
-                      <m:t>富人的</m:t>
-                    </m:r>
-                    <m:r>
-                      <a:rPr lang="en-US" sz="2000" i="1">
-                        <a:latin typeface="Cambria Math" panose="02040503050406030204" pitchFamily="18" charset="0"/>
-                      </a:rPr>
-                      <m:t>權重。</m:t>
+                      <m:t>重。</m:t>
                     </m:r>
                   </m:oMath>
                 </a14:m>
@@ -15077,8 +15070,8 @@
           </a:p>
         </p:txBody>
       </p:sp>
-      <mc:AlternateContent xmlns:mc="http://schemas.openxmlformats.org/markup-compatibility/2006">
-        <mc:Choice xmlns:a14="http://schemas.microsoft.com/office/drawing/2010/main" Requires="a14">
+      <mc:AlternateContent xmlns:mc="http://schemas.openxmlformats.org/markup-compatibility/2006" xmlns:a14="http://schemas.microsoft.com/office/drawing/2010/main">
+        <mc:Choice Requires="a14">
           <p:sp>
             <p:nvSpPr>
               <p:cNvPr id="3" name="Content Placeholder 2">
@@ -15111,7 +15104,7 @@
                   <a:rPr lang="ja-JP" altLang="en-US" sz="2000">
                     <a:latin typeface="Google Sans Text"/>
                   </a:rPr>
-                  <a:t>把母體分成一些群體，稱為分層</a:t>
+                  <a:t>把母體分成一些群體，群體之間的差異盡可能放大，群體內的差異盡可能縮小，稱為分層</a:t>
                 </a:r>
                 <a:r>
                   <a:rPr lang="en-US" altLang="ja-JP" sz="2000" dirty="0">
@@ -16199,7 +16192,7 @@
                   <a:rPr lang="ja-JP" altLang="en-US" sz="2000">
                     <a:latin typeface="Google Sans Text"/>
                   </a:rPr>
-                  <a:t>實務上，一個層之中有比較難進行訪問的鄉鎮市區，可以考慮挑選比較容易訪問的，但是要注意區域的均衡。</a:t>
+                  <a:t>實務上，一個層之中有比較難進行訪問的鄉鎮市區，可以考慮挑選比較容易訪問的，但是最後要注意區域的均衡。</a:t>
                 </a:r>
                 <a:endParaRPr lang="en-US" altLang="ja-JP" sz="2000" dirty="0">
                   <a:latin typeface="Google Sans Text"/>
@@ -16208,7 +16201,7 @@
             </p:txBody>
           </p:sp>
         </mc:Choice>
-        <mc:Fallback>
+        <mc:Fallback xmlns="">
           <p:sp>
             <p:nvSpPr>
               <p:cNvPr id="3" name="Content Placeholder 2">
@@ -16238,7 +16231,7 @@
               <a:lstStyle/>
               <a:p>
                 <a:r>
-                  <a:rPr lang="zh-TW" altLang="en-US">
+                  <a:rPr lang="en-US">
                     <a:noFill/>
                   </a:rPr>
                   <a:t> </a:t>
@@ -16291,6 +16284,411 @@
 </file>
 
 <file path=ppt/slides/slide25.xml><?xml version="1.0" encoding="utf-8"?>
+<p:sld xmlns:a="http://schemas.openxmlformats.org/drawingml/2006/main" xmlns:r="http://schemas.openxmlformats.org/officeDocument/2006/relationships" xmlns:p="http://schemas.openxmlformats.org/presentationml/2006/main">
+  <p:cSld>
+    <p:spTree>
+      <p:nvGrpSpPr>
+        <p:cNvPr id="1" name="">
+          <a:extLst>
+            <a:ext uri="{FF2B5EF4-FFF2-40B4-BE49-F238E27FC236}">
+              <a16:creationId xmlns:a16="http://schemas.microsoft.com/office/drawing/2014/main" id="{5B305295-9EAE-0C08-2338-F1412883A5B8}"/>
+            </a:ext>
+          </a:extLst>
+        </p:cNvPr>
+        <p:cNvGrpSpPr/>
+        <p:nvPr/>
+      </p:nvGrpSpPr>
+      <p:grpSpPr>
+        <a:xfrm>
+          <a:off x="0" y="0"/>
+          <a:ext cx="0" cy="0"/>
+          <a:chOff x="0" y="0"/>
+          <a:chExt cx="0" cy="0"/>
+        </a:xfrm>
+      </p:grpSpPr>
+      <p:sp>
+        <p:nvSpPr>
+          <p:cNvPr id="2" name="Title 1">
+            <a:extLst>
+              <a:ext uri="{FF2B5EF4-FFF2-40B4-BE49-F238E27FC236}">
+                <a16:creationId xmlns:a16="http://schemas.microsoft.com/office/drawing/2014/main" id="{353A38AA-4092-7A98-23FF-6DFA5DF44A7C}"/>
+              </a:ext>
+            </a:extLst>
+          </p:cNvPr>
+          <p:cNvSpPr>
+            <a:spLocks noGrp="1"/>
+          </p:cNvSpPr>
+          <p:nvPr>
+            <p:ph type="title"/>
+          </p:nvPr>
+        </p:nvSpPr>
+        <p:spPr/>
+        <p:txBody>
+          <a:bodyPr/>
+          <a:lstStyle/>
+          <a:p>
+            <a:r>
+              <a:rPr lang="ja-JP" altLang="en-US"/>
+              <a:t>分層抽樣（二）</a:t>
+            </a:r>
+            <a:endParaRPr lang="en-US" dirty="0"/>
+          </a:p>
+        </p:txBody>
+      </p:sp>
+      <mc:AlternateContent xmlns:mc="http://schemas.openxmlformats.org/markup-compatibility/2006" xmlns:a14="http://schemas.microsoft.com/office/drawing/2010/main">
+        <mc:Choice Requires="a14">
+          <p:sp>
+            <p:nvSpPr>
+              <p:cNvPr id="3" name="Content Placeholder 2">
+                <a:extLst>
+                  <a:ext uri="{FF2B5EF4-FFF2-40B4-BE49-F238E27FC236}">
+                    <a16:creationId xmlns:a16="http://schemas.microsoft.com/office/drawing/2014/main" id="{E313E33E-8198-B80A-A27B-92AC8F3C1AD5}"/>
+                  </a:ext>
+                </a:extLst>
+              </p:cNvPr>
+              <p:cNvSpPr>
+                <a:spLocks noGrp="1"/>
+              </p:cNvSpPr>
+              <p:nvPr>
+                <p:ph idx="1"/>
+              </p:nvPr>
+            </p:nvSpPr>
+            <p:spPr/>
+            <p:txBody>
+              <a:bodyPr>
+                <a:normAutofit fontScale="92500" lnSpcReduction="10000"/>
+              </a:bodyPr>
+              <a:lstStyle/>
+              <a:p>
+                <a:pPr>
+                  <a:lnSpc>
+                    <a:spcPct val="150000"/>
+                  </a:lnSpc>
+                </a:pPr>
+                <a:r>
+                  <a:rPr lang="ja-JP" altLang="en-US" sz="2000">
+                    <a:latin typeface="Google Sans Text"/>
+                  </a:rPr>
+                  <a:t>分層抽樣可以結合系統抽樣。</a:t>
+                </a:r>
+                <a:endParaRPr lang="en-US" altLang="ja-JP" sz="2000" dirty="0">
+                  <a:latin typeface="Google Sans Text"/>
+                </a:endParaRPr>
+              </a:p>
+              <a:p>
+                <a:pPr>
+                  <a:lnSpc>
+                    <a:spcPct val="150000"/>
+                  </a:lnSpc>
+                </a:pPr>
+                <a:r>
+                  <a:rPr lang="ja-JP" altLang="en-US" sz="2000">
+                    <a:latin typeface="Google Sans Text"/>
+                  </a:rPr>
+                  <a:t>第一階段：分層 </a:t>
+                </a:r>
+                <a:r>
+                  <a:rPr lang="en-US" altLang="ja-JP" sz="2000" dirty="0">
+                    <a:latin typeface="Google Sans Text"/>
+                  </a:rPr>
+                  <a:t>(Stratification)</a:t>
+                </a:r>
+                <a:r>
+                  <a:rPr lang="ja-JP" altLang="en-US" sz="2000">
+                    <a:latin typeface="Google Sans Text"/>
+                  </a:rPr>
+                  <a:t>根據母體已知的重要特徵（與調查主題相關的變數），將母體名冊分成不重疊的組別。例子： 若要調查「大學生生活費」，先按「學院」（外語、理、資訊、商、教育、社科、創國）分成</a:t>
+                </a:r>
+                <a:r>
+                  <a:rPr lang="en-US" altLang="ja-JP" sz="2000" dirty="0">
+                    <a:latin typeface="Google Sans Text"/>
+                  </a:rPr>
+                  <a:t>7</a:t>
+                </a:r>
+                <a:r>
+                  <a:rPr lang="ja-JP" altLang="en-US" sz="2000">
+                    <a:latin typeface="Google Sans Text"/>
+                  </a:rPr>
+                  <a:t>層。每一種學院的學生都能按比例被抽到。</a:t>
+                </a:r>
+                <a:endParaRPr lang="en-US" altLang="ja-JP" sz="2000" dirty="0">
+                  <a:latin typeface="Google Sans Text"/>
+                </a:endParaRPr>
+              </a:p>
+              <a:p>
+                <a:pPr>
+                  <a:lnSpc>
+                    <a:spcPct val="150000"/>
+                  </a:lnSpc>
+                </a:pPr>
+                <a:r>
+                  <a:rPr lang="ja-JP" altLang="en-US" sz="2000">
+                    <a:latin typeface="Google Sans Text"/>
+                  </a:rPr>
+                  <a:t>第二階段：層內排序 </a:t>
+                </a:r>
+                <a:r>
+                  <a:rPr lang="en-US" altLang="ja-JP" sz="2000" dirty="0">
+                    <a:latin typeface="Google Sans Text"/>
+                  </a:rPr>
+                  <a:t>(Sorting within Strata)</a:t>
+                </a:r>
+                <a:r>
+                  <a:rPr lang="ja-JP" altLang="en-US" sz="2000">
+                    <a:latin typeface="Google Sans Text"/>
+                  </a:rPr>
+                  <a:t> 。在每一層內，將名冊依照某種「次要變數」進行排序（例如：系的人數）， 確保大系的樣本數比較多。</a:t>
+                </a:r>
+                <a:endParaRPr lang="en-US" altLang="ja-JP" sz="2000" dirty="0">
+                  <a:latin typeface="Google Sans Text"/>
+                </a:endParaRPr>
+              </a:p>
+              <a:p>
+                <a:pPr>
+                  <a:lnSpc>
+                    <a:spcPct val="150000"/>
+                  </a:lnSpc>
+                </a:pPr>
+                <a:r>
+                  <a:rPr lang="ja-JP" altLang="en-US" sz="2000">
+                    <a:latin typeface="Google Sans Text"/>
+                  </a:rPr>
+                  <a:t>第三階段：系統抽樣 </a:t>
+                </a:r>
+                <a:r>
+                  <a:rPr lang="en-US" altLang="ja-JP" sz="2000" dirty="0">
+                    <a:latin typeface="Google Sans Text"/>
+                  </a:rPr>
+                  <a:t>(Systematic Selection)</a:t>
+                </a:r>
+                <a:r>
+                  <a:rPr lang="ja-JP" altLang="en-US" sz="2000">
+                    <a:latin typeface="Google Sans Text"/>
+                  </a:rPr>
+                  <a:t>在每一層內分別執行系統抽樣：計算抽樣間隔 </a:t>
+                </a:r>
+                <a14:m>
+                  <m:oMath xmlns:m="http://schemas.openxmlformats.org/officeDocument/2006/math">
+                    <m:r>
+                      <a:rPr lang="en-US" altLang="ja-JP" sz="2000" b="0" i="1" smtClean="0">
+                        <a:latin typeface="Cambria Math" panose="02040503050406030204" pitchFamily="18" charset="0"/>
+                      </a:rPr>
+                      <m:t>𝑘</m:t>
+                    </m:r>
+                    <m:r>
+                      <a:rPr lang="en-US" altLang="ja-JP" sz="2000" b="0" i="1" smtClean="0">
+                        <a:latin typeface="Cambria Math" panose="02040503050406030204" pitchFamily="18" charset="0"/>
+                      </a:rPr>
+                      <m:t>=</m:t>
+                    </m:r>
+                    <m:f>
+                      <m:fPr>
+                        <m:ctrlPr>
+                          <a:rPr lang="en-US" altLang="ja-JP" sz="2000" b="0" i="1" smtClean="0">
+                            <a:latin typeface="Cambria Math" panose="02040503050406030204" pitchFamily="18" charset="0"/>
+                          </a:rPr>
+                        </m:ctrlPr>
+                      </m:fPr>
+                      <m:num>
+                        <m:sSub>
+                          <m:sSubPr>
+                            <m:ctrlPr>
+                              <a:rPr lang="en-US" altLang="ja-JP" sz="2000" b="0" i="1" smtClean="0">
+                                <a:latin typeface="Cambria Math" panose="02040503050406030204" pitchFamily="18" charset="0"/>
+                              </a:rPr>
+                            </m:ctrlPr>
+                          </m:sSubPr>
+                          <m:e>
+                            <m:r>
+                              <a:rPr lang="en-US" altLang="ja-JP" sz="2000" b="0" i="1" smtClean="0">
+                                <a:latin typeface="Cambria Math" panose="02040503050406030204" pitchFamily="18" charset="0"/>
+                              </a:rPr>
+                              <m:t>𝑁</m:t>
+                            </m:r>
+                          </m:e>
+                          <m:sub>
+                            <m:r>
+                              <a:rPr lang="en-US" altLang="ja-JP" sz="2000" b="0" i="1" smtClean="0">
+                                <a:latin typeface="Cambria Math" panose="02040503050406030204" pitchFamily="18" charset="0"/>
+                              </a:rPr>
+                              <m:t>h</m:t>
+                            </m:r>
+                          </m:sub>
+                        </m:sSub>
+                      </m:num>
+                      <m:den>
+                        <m:sSub>
+                          <m:sSubPr>
+                            <m:ctrlPr>
+                              <a:rPr lang="en-US" altLang="ja-JP" sz="2000" b="0" i="1" smtClean="0">
+                                <a:latin typeface="Cambria Math" panose="02040503050406030204" pitchFamily="18" charset="0"/>
+                              </a:rPr>
+                            </m:ctrlPr>
+                          </m:sSubPr>
+                          <m:e>
+                            <m:r>
+                              <a:rPr lang="en-US" altLang="ja-JP" sz="2000" b="0" i="1" smtClean="0">
+                                <a:latin typeface="Cambria Math" panose="02040503050406030204" pitchFamily="18" charset="0"/>
+                              </a:rPr>
+                              <m:t>𝑛</m:t>
+                            </m:r>
+                          </m:e>
+                          <m:sub>
+                            <m:r>
+                              <a:rPr lang="en-US" altLang="ja-JP" sz="2000" b="0" i="1" smtClean="0">
+                                <a:latin typeface="Cambria Math" panose="02040503050406030204" pitchFamily="18" charset="0"/>
+                              </a:rPr>
+                              <m:t>h</m:t>
+                            </m:r>
+                          </m:sub>
+                        </m:sSub>
+                      </m:den>
+                    </m:f>
+                  </m:oMath>
+                </a14:m>
+                <a:r>
+                  <a:rPr lang="ja-JP" altLang="en-US" sz="2000">
+                    <a:latin typeface="Google Sans Text"/>
+                  </a:rPr>
+                  <a:t>（該層總人數 </a:t>
+                </a:r>
+                <a:r>
+                  <a:rPr lang="en-US" altLang="ja-JP" sz="2000" dirty="0">
+                    <a:latin typeface="Google Sans Text"/>
+                  </a:rPr>
+                  <a:t>/ </a:t>
+                </a:r>
+                <a:r>
+                  <a:rPr lang="ja-JP" altLang="en-US" sz="2000">
+                    <a:latin typeface="Google Sans Text"/>
+                  </a:rPr>
+                  <a:t>該層應抽人數）。隨機選取一個起始點 </a:t>
+                </a:r>
+                <a14:m>
+                  <m:oMath xmlns:m="http://schemas.openxmlformats.org/officeDocument/2006/math">
+                    <m:r>
+                      <a:rPr lang="en-US" altLang="ja-JP" sz="2000" b="0" i="1" smtClean="0">
+                        <a:latin typeface="Cambria Math" panose="02040503050406030204" pitchFamily="18" charset="0"/>
+                      </a:rPr>
+                      <m:t>𝑟</m:t>
+                    </m:r>
+                  </m:oMath>
+                </a14:m>
+                <a:r>
+                  <a:rPr lang="ja-JP" altLang="en-US" sz="2000">
+                    <a:latin typeface="Google Sans Text"/>
+                  </a:rPr>
+                  <a:t>。每隔 </a:t>
+                </a:r>
+                <a:r>
+                  <a:rPr lang="en-US" altLang="ja-JP" sz="2000" i="1" dirty="0">
+                    <a:latin typeface="Times New Roman" panose="02020603050405020304" pitchFamily="18" charset="0"/>
+                    <a:cs typeface="Times New Roman" panose="02020603050405020304" pitchFamily="18" charset="0"/>
+                  </a:rPr>
+                  <a:t>k</a:t>
+                </a:r>
+                <a:r>
+                  <a:rPr lang="en-US" altLang="ja-JP" sz="2000" dirty="0">
+                    <a:latin typeface="Google Sans Text"/>
+                  </a:rPr>
+                  <a:t> </a:t>
+                </a:r>
+                <a:r>
+                  <a:rPr lang="ja-JP" altLang="en-US" sz="2000">
+                    <a:latin typeface="Google Sans Text"/>
+                  </a:rPr>
+                  <a:t>個人抽一個，直到完成該層配額。</a:t>
+                </a:r>
+                <a:endParaRPr lang="en-US" altLang="ja-JP" sz="2000" dirty="0">
+                  <a:latin typeface="Google Sans Text"/>
+                </a:endParaRPr>
+              </a:p>
+            </p:txBody>
+          </p:sp>
+        </mc:Choice>
+        <mc:Fallback xmlns="">
+          <p:sp>
+            <p:nvSpPr>
+              <p:cNvPr id="3" name="Content Placeholder 2">
+                <a:extLst>
+                  <a:ext uri="{FF2B5EF4-FFF2-40B4-BE49-F238E27FC236}">
+                    <a16:creationId xmlns:a16="http://schemas.microsoft.com/office/drawing/2014/main" id="{E313E33E-8198-B80A-A27B-92AC8F3C1AD5}"/>
+                  </a:ext>
+                </a:extLst>
+              </p:cNvPr>
+              <p:cNvSpPr>
+                <a:spLocks noGrp="1" noRot="1" noChangeAspect="1" noMove="1" noResize="1" noEditPoints="1" noAdjustHandles="1" noChangeArrowheads="1" noChangeShapeType="1" noTextEdit="1"/>
+              </p:cNvSpPr>
+              <p:nvPr>
+                <p:ph idx="1"/>
+              </p:nvPr>
+            </p:nvSpPr>
+            <p:spPr>
+              <a:blipFill>
+                <a:blip r:embed="rId2"/>
+                <a:stretch>
+                  <a:fillRect l="-483" b="-1453"/>
+                </a:stretch>
+              </a:blipFill>
+            </p:spPr>
+            <p:txBody>
+              <a:bodyPr/>
+              <a:lstStyle/>
+              <a:p>
+                <a:r>
+                  <a:rPr lang="en-US">
+                    <a:noFill/>
+                  </a:rPr>
+                  <a:t> </a:t>
+                </a:r>
+              </a:p>
+            </p:txBody>
+          </p:sp>
+        </mc:Fallback>
+      </mc:AlternateContent>
+      <p:sp>
+        <p:nvSpPr>
+          <p:cNvPr id="4" name="Slide Number Placeholder 3">
+            <a:extLst>
+              <a:ext uri="{FF2B5EF4-FFF2-40B4-BE49-F238E27FC236}">
+                <a16:creationId xmlns:a16="http://schemas.microsoft.com/office/drawing/2014/main" id="{8E02FD09-9E03-78BE-CC5C-027BA33D31D6}"/>
+              </a:ext>
+            </a:extLst>
+          </p:cNvPr>
+          <p:cNvSpPr>
+            <a:spLocks noGrp="1"/>
+          </p:cNvSpPr>
+          <p:nvPr>
+            <p:ph type="sldNum" sz="quarter" idx="12"/>
+          </p:nvPr>
+        </p:nvSpPr>
+        <p:spPr/>
+        <p:txBody>
+          <a:bodyPr/>
+          <a:lstStyle/>
+          <a:p>
+            <a:fld id="{34E21383-B02B-694B-B2AD-A967203CDE86}" type="slidenum">
+              <a:rPr lang="en-US" smtClean="0"/>
+              <a:t>25</a:t>
+            </a:fld>
+            <a:endParaRPr lang="en-US"/>
+          </a:p>
+        </p:txBody>
+      </p:sp>
+    </p:spTree>
+    <p:extLst>
+      <p:ext uri="{BB962C8B-B14F-4D97-AF65-F5344CB8AC3E}">
+        <p14:creationId xmlns:p14="http://schemas.microsoft.com/office/powerpoint/2010/main" val="3519421197"/>
+      </p:ext>
+    </p:extLst>
+  </p:cSld>
+  <p:clrMapOvr>
+    <a:masterClrMapping/>
+  </p:clrMapOvr>
+</p:sld>
+</file>
+
+<file path=ppt/slides/slide26.xml><?xml version="1.0" encoding="utf-8"?>
 <p:sld xmlns:a="http://schemas.openxmlformats.org/drawingml/2006/main" xmlns:r="http://schemas.openxmlformats.org/officeDocument/2006/relationships" xmlns:p="http://schemas.openxmlformats.org/presentationml/2006/main">
   <p:cSld>
     <p:spTree>
@@ -16336,1183 +16734,183 @@
           <a:p>
             <a:r>
               <a:rPr lang="ja-JP" altLang="en-US"/>
-              <a:t>集群抽樣（一）</a:t>
+              <a:t>集群抽樣</a:t>
             </a:r>
             <a:endParaRPr lang="en-US" dirty="0"/>
           </a:p>
         </p:txBody>
       </p:sp>
-      <mc:AlternateContent xmlns:mc="http://schemas.openxmlformats.org/markup-compatibility/2006">
-        <mc:Choice xmlns:a14="http://schemas.microsoft.com/office/drawing/2010/main" Requires="a14">
-          <p:sp>
-            <p:nvSpPr>
-              <p:cNvPr id="3" name="Content Placeholder 2">
-                <a:extLst>
-                  <a:ext uri="{FF2B5EF4-FFF2-40B4-BE49-F238E27FC236}">
-                    <a16:creationId xmlns:a16="http://schemas.microsoft.com/office/drawing/2014/main" id="{0DD5815E-3ECC-D100-8CCB-1C5673521472}"/>
-                  </a:ext>
-                </a:extLst>
-              </p:cNvPr>
-              <p:cNvSpPr>
-                <a:spLocks noGrp="1"/>
-              </p:cNvSpPr>
-              <p:nvPr>
-                <p:ph idx="1"/>
-              </p:nvPr>
-            </p:nvSpPr>
-            <p:spPr/>
-            <p:txBody>
-              <a:bodyPr>
-                <a:normAutofit fontScale="85000" lnSpcReduction="20000"/>
-              </a:bodyPr>
-              <a:lstStyle/>
-              <a:p>
-                <a:pPr>
-                  <a:lnSpc>
-                    <a:spcPct val="150000"/>
-                  </a:lnSpc>
-                </a:pPr>
-                <a:r>
-                  <a:rPr lang="ja-JP" altLang="en-US" sz="2000">
-                    <a:latin typeface="Google Sans Text"/>
-                  </a:rPr>
-                  <a:t>把母體分成一些群體，稱為分層</a:t>
-                </a:r>
-                <a:r>
-                  <a:rPr lang="en-US" altLang="ja-JP" sz="2000" dirty="0">
-                    <a:latin typeface="Google Sans Text"/>
-                  </a:rPr>
-                  <a:t>(strata)</a:t>
-                </a:r>
-                <a:r>
-                  <a:rPr lang="ja-JP" altLang="en-US" sz="2000">
-                    <a:latin typeface="Google Sans Text"/>
-                  </a:rPr>
-                  <a:t>。每一層抽出的樣本都可以計算無偏的平均值與變異數，組合起來成為可以推估母體的平均值與變異數。</a:t>
-                </a:r>
-                <a:endParaRPr lang="en-US" altLang="ja-JP" sz="2000" dirty="0">
-                  <a:latin typeface="Google Sans Text"/>
-                </a:endParaRPr>
-              </a:p>
-              <a:p>
-                <a:pPr>
-                  <a:lnSpc>
-                    <a:spcPct val="150000"/>
-                  </a:lnSpc>
-                </a:pPr>
-                <a:r>
-                  <a:rPr lang="ja-JP" altLang="en-US" sz="2000"/>
-                  <a:t>母體每一層</a:t>
-                </a:r>
-                <a14:m>
-                  <m:oMath xmlns:m="http://schemas.openxmlformats.org/officeDocument/2006/math">
-                    <m:r>
-                      <a:rPr lang="en-US" altLang="ja-JP" sz="2000" b="0" i="1" smtClean="0">
-                        <a:latin typeface="Cambria Math" panose="02040503050406030204" pitchFamily="18" charset="0"/>
-                      </a:rPr>
-                      <m:t>(</m:t>
-                    </m:r>
-                    <m:r>
-                      <a:rPr lang="en-US" altLang="ja-JP" sz="2000" b="0" i="1" smtClean="0">
-                        <a:latin typeface="Cambria Math" panose="02040503050406030204" pitchFamily="18" charset="0"/>
-                      </a:rPr>
-                      <m:t>h</m:t>
-                    </m:r>
-                    <m:r>
-                      <a:rPr lang="en-US" altLang="ja-JP" sz="2000" b="0" i="1" smtClean="0">
-                        <a:latin typeface="Cambria Math" panose="02040503050406030204" pitchFamily="18" charset="0"/>
-                      </a:rPr>
-                      <m:t>)</m:t>
-                    </m:r>
-                  </m:oMath>
-                </a14:m>
-                <a:r>
-                  <a:rPr lang="ja-JP" altLang="en-US" sz="2000"/>
-                  <a:t>的平均數：</a:t>
-                </a:r>
-                <a:r>
-                  <a:rPr lang="en-US" altLang="ja-JP" sz="2000" b="0" dirty="0">
-                    <a:effectLst/>
-                  </a:rPr>
-                  <a:t> </a:t>
-                </a:r>
-                <a14:m>
-                  <m:oMath xmlns:m="http://schemas.openxmlformats.org/officeDocument/2006/math">
-                    <m:sSup>
-                      <m:sSupPr>
-                        <m:ctrlPr>
-                          <a:rPr lang="en-US" altLang="ja-JP" sz="2000" b="0" i="1" smtClean="0">
-                            <a:effectLst/>
-                            <a:latin typeface="Cambria Math" panose="02040503050406030204" pitchFamily="18" charset="0"/>
-                          </a:rPr>
-                        </m:ctrlPr>
-                      </m:sSupPr>
-                      <m:e>
-                        <m:acc>
-                          <m:accPr>
-                            <m:chr m:val="̅"/>
-                            <m:ctrlPr>
-                              <a:rPr lang="en-US" altLang="ja-JP" sz="2000" b="0" i="1" smtClean="0">
-                                <a:effectLst/>
-                                <a:latin typeface="Cambria Math" panose="02040503050406030204" pitchFamily="18" charset="0"/>
-                              </a:rPr>
-                            </m:ctrlPr>
-                          </m:accPr>
-                          <m:e>
-                            <m:r>
-                              <a:rPr lang="en-US" altLang="ja-JP" sz="2000" b="0" i="1" smtClean="0">
-                                <a:effectLst/>
-                                <a:latin typeface="Cambria Math" panose="02040503050406030204" pitchFamily="18" charset="0"/>
-                              </a:rPr>
-                              <m:t>𝑌</m:t>
-                            </m:r>
-                          </m:e>
-                        </m:acc>
-                      </m:e>
-                      <m:sup>
-                        <m:r>
-                          <a:rPr lang="en-US" altLang="ja-JP" sz="2000" b="0" i="1" smtClean="0">
-                            <a:effectLst/>
-                            <a:latin typeface="Cambria Math" panose="02040503050406030204" pitchFamily="18" charset="0"/>
-                          </a:rPr>
-                          <m:t>(</m:t>
-                        </m:r>
-                        <m:r>
-                          <a:rPr lang="en-US" altLang="ja-JP" sz="2000" b="0" i="1" smtClean="0">
-                            <a:effectLst/>
-                            <a:latin typeface="Cambria Math" panose="02040503050406030204" pitchFamily="18" charset="0"/>
-                          </a:rPr>
-                          <m:t>h</m:t>
-                        </m:r>
-                        <m:r>
-                          <a:rPr lang="en-US" altLang="ja-JP" sz="2000" b="0" i="1" smtClean="0">
-                            <a:effectLst/>
-                            <a:latin typeface="Cambria Math" panose="02040503050406030204" pitchFamily="18" charset="0"/>
-                          </a:rPr>
-                          <m:t>)</m:t>
-                        </m:r>
-                      </m:sup>
-                    </m:sSup>
-                    <m:r>
-                      <a:rPr lang="en-US" altLang="ja-JP" sz="2000" b="0" i="1" smtClean="0">
-                        <a:effectLst/>
-                        <a:latin typeface="Cambria Math" panose="02040503050406030204" pitchFamily="18" charset="0"/>
-                      </a:rPr>
-                      <m:t>=</m:t>
-                    </m:r>
-                    <m:f>
-                      <m:fPr>
-                        <m:ctrlPr>
-                          <a:rPr lang="en-US" altLang="ja-JP" sz="2000" b="0" i="1" smtClean="0">
-                            <a:effectLst/>
-                            <a:latin typeface="Cambria Math" panose="02040503050406030204" pitchFamily="18" charset="0"/>
-                          </a:rPr>
-                        </m:ctrlPr>
-                      </m:fPr>
-                      <m:num>
-                        <m:r>
-                          <a:rPr lang="en-US" altLang="ja-JP" sz="2000" b="0" i="1" smtClean="0">
-                            <a:effectLst/>
-                            <a:latin typeface="Cambria Math" panose="02040503050406030204" pitchFamily="18" charset="0"/>
-                          </a:rPr>
-                          <m:t>1</m:t>
-                        </m:r>
-                      </m:num>
-                      <m:den>
-                        <m:sSub>
-                          <m:sSubPr>
-                            <m:ctrlPr>
-                              <a:rPr lang="en-US" altLang="ja-JP" sz="2000" b="0" i="1" smtClean="0">
-                                <a:effectLst/>
-                                <a:latin typeface="Cambria Math" panose="02040503050406030204" pitchFamily="18" charset="0"/>
-                              </a:rPr>
-                            </m:ctrlPr>
-                          </m:sSubPr>
-                          <m:e>
-                            <m:r>
-                              <a:rPr lang="en-US" altLang="ja-JP" sz="2000" b="0" i="1" smtClean="0">
-                                <a:effectLst/>
-                                <a:latin typeface="Cambria Math" panose="02040503050406030204" pitchFamily="18" charset="0"/>
-                              </a:rPr>
-                              <m:t>𝑁</m:t>
-                            </m:r>
-                          </m:e>
-                          <m:sub>
-                            <m:r>
-                              <a:rPr lang="en-US" altLang="ja-JP" sz="2000" b="0" i="1" smtClean="0">
-                                <a:effectLst/>
-                                <a:latin typeface="Cambria Math" panose="02040503050406030204" pitchFamily="18" charset="0"/>
-                              </a:rPr>
-                              <m:t>h</m:t>
-                            </m:r>
-                          </m:sub>
-                        </m:sSub>
-                      </m:den>
-                    </m:f>
-                    <m:nary>
-                      <m:naryPr>
-                        <m:chr m:val="∑"/>
-                        <m:ctrlPr>
-                          <a:rPr lang="en-US" altLang="ja-JP" sz="2000" b="0" i="1" smtClean="0">
-                            <a:effectLst/>
-                            <a:latin typeface="Cambria Math" panose="02040503050406030204" pitchFamily="18" charset="0"/>
-                          </a:rPr>
-                        </m:ctrlPr>
-                      </m:naryPr>
-                      <m:sub>
-                        <m:r>
-                          <m:rPr>
-                            <m:brk m:alnAt="23"/>
-                          </m:rPr>
-                          <a:rPr lang="en-US" altLang="ja-JP" sz="2000" b="0" i="1" smtClean="0">
-                            <a:effectLst/>
-                            <a:latin typeface="Cambria Math" panose="02040503050406030204" pitchFamily="18" charset="0"/>
-                          </a:rPr>
-                          <m:t>𝑘</m:t>
-                        </m:r>
-                        <m:r>
-                          <a:rPr lang="en-US" altLang="ja-JP" sz="2000" b="0" i="1" smtClean="0">
-                            <a:effectLst/>
-                            <a:latin typeface="Cambria Math" panose="02040503050406030204" pitchFamily="18" charset="0"/>
-                          </a:rPr>
-                          <m:t>=1</m:t>
-                        </m:r>
-                      </m:sub>
-                      <m:sup>
-                        <m:sSub>
-                          <m:sSubPr>
-                            <m:ctrlPr>
-                              <a:rPr lang="en-US" altLang="ja-JP" sz="2000" b="0" i="1" smtClean="0">
-                                <a:effectLst/>
-                                <a:latin typeface="Cambria Math" panose="02040503050406030204" pitchFamily="18" charset="0"/>
-                              </a:rPr>
-                            </m:ctrlPr>
-                          </m:sSubPr>
-                          <m:e>
-                            <m:r>
-                              <a:rPr lang="en-US" altLang="ja-JP" sz="2000" b="0" i="1" smtClean="0">
-                                <a:effectLst/>
-                                <a:latin typeface="Cambria Math" panose="02040503050406030204" pitchFamily="18" charset="0"/>
-                              </a:rPr>
-                              <m:t>𝑁</m:t>
-                            </m:r>
-                          </m:e>
-                          <m:sub>
-                            <m:r>
-                              <a:rPr lang="en-US" altLang="ja-JP" sz="2000" b="0" i="1" smtClean="0">
-                                <a:effectLst/>
-                                <a:latin typeface="Cambria Math" panose="02040503050406030204" pitchFamily="18" charset="0"/>
-                              </a:rPr>
-                              <m:t>h</m:t>
-                            </m:r>
-                          </m:sub>
-                        </m:sSub>
-                      </m:sup>
-                      <m:e>
-                        <m:sSup>
-                          <m:sSupPr>
-                            <m:ctrlPr>
-                              <a:rPr lang="en-US" altLang="ja-JP" sz="2000" b="0" i="1" smtClean="0">
-                                <a:effectLst/>
-                                <a:latin typeface="Cambria Math" panose="02040503050406030204" pitchFamily="18" charset="0"/>
-                              </a:rPr>
-                            </m:ctrlPr>
-                          </m:sSupPr>
-                          <m:e>
-                            <m:sSub>
-                              <m:sSubPr>
-                                <m:ctrlPr>
-                                  <a:rPr lang="en-US" altLang="ja-JP" sz="2000" b="0" i="1" smtClean="0">
-                                    <a:effectLst/>
-                                    <a:latin typeface="Cambria Math" panose="02040503050406030204" pitchFamily="18" charset="0"/>
-                                  </a:rPr>
-                                </m:ctrlPr>
-                              </m:sSubPr>
-                              <m:e>
-                                <m:r>
-                                  <a:rPr lang="en-US" altLang="ja-JP" sz="2000" b="0" i="1" smtClean="0">
-                                    <a:effectLst/>
-                                    <a:latin typeface="Cambria Math" panose="02040503050406030204" pitchFamily="18" charset="0"/>
-                                  </a:rPr>
-                                  <m:t>𝑌</m:t>
-                                </m:r>
-                              </m:e>
-                              <m:sub>
-                                <m:r>
-                                  <a:rPr lang="en-US" altLang="ja-JP" sz="2000" b="0" i="1" smtClean="0">
-                                    <a:effectLst/>
-                                    <a:latin typeface="Cambria Math" panose="02040503050406030204" pitchFamily="18" charset="0"/>
-                                  </a:rPr>
-                                  <m:t>𝑘</m:t>
-                                </m:r>
-                              </m:sub>
-                            </m:sSub>
-                          </m:e>
-                          <m:sup>
-                            <m:r>
-                              <a:rPr lang="en-US" altLang="ja-JP" sz="2000" b="0" i="1" smtClean="0">
-                                <a:effectLst/>
-                                <a:latin typeface="Cambria Math" panose="02040503050406030204" pitchFamily="18" charset="0"/>
-                              </a:rPr>
-                              <m:t>(</m:t>
-                            </m:r>
-                            <m:r>
-                              <a:rPr lang="en-US" altLang="ja-JP" sz="2000" b="0" i="1" smtClean="0">
-                                <a:effectLst/>
-                                <a:latin typeface="Cambria Math" panose="02040503050406030204" pitchFamily="18" charset="0"/>
-                              </a:rPr>
-                              <m:t>h</m:t>
-                            </m:r>
-                            <m:r>
-                              <a:rPr lang="en-US" altLang="ja-JP" sz="2000" b="0" i="1" smtClean="0">
-                                <a:effectLst/>
-                                <a:latin typeface="Cambria Math" panose="02040503050406030204" pitchFamily="18" charset="0"/>
-                              </a:rPr>
-                              <m:t>)</m:t>
-                            </m:r>
-                          </m:sup>
-                        </m:sSup>
-                      </m:e>
-                    </m:nary>
-                  </m:oMath>
-                </a14:m>
-                <a:r>
-                  <a:rPr lang="en-US" altLang="ja-JP" sz="2000" dirty="0"/>
-                  <a:t> </a:t>
-                </a:r>
-                <a:r>
-                  <a:rPr lang="ja-JP" altLang="en-US" sz="2000"/>
-                  <a:t>母體的平均數：</a:t>
-                </a:r>
-                <a14:m>
-                  <m:oMath xmlns:m="http://schemas.openxmlformats.org/officeDocument/2006/math">
-                    <m:acc>
-                      <m:accPr>
-                        <m:chr m:val="̅"/>
-                        <m:ctrlPr>
-                          <a:rPr lang="en-US" altLang="ja-JP" sz="2000" i="1" smtClean="0">
-                            <a:effectLst/>
-                            <a:latin typeface="Cambria Math" panose="02040503050406030204" pitchFamily="18" charset="0"/>
-                          </a:rPr>
-                        </m:ctrlPr>
-                      </m:accPr>
-                      <m:e>
-                        <m:r>
-                          <a:rPr lang="ja-JP" altLang="en-US" sz="2000" i="1">
-                            <a:latin typeface="Cambria Math" panose="02040503050406030204" pitchFamily="18" charset="0"/>
-                          </a:rPr>
-                          <m:t>Ｙ</m:t>
-                        </m:r>
-                      </m:e>
-                    </m:acc>
-                    <m:r>
-                      <a:rPr lang="en-US" altLang="ja-JP" sz="2000" b="0" i="1" smtClean="0">
-                        <a:effectLst/>
-                        <a:latin typeface="Cambria Math" panose="02040503050406030204" pitchFamily="18" charset="0"/>
-                      </a:rPr>
-                      <m:t>=</m:t>
-                    </m:r>
-                    <m:f>
-                      <m:fPr>
-                        <m:ctrlPr>
-                          <a:rPr lang="en-US" altLang="ja-JP" sz="2000" b="0" i="1" smtClean="0">
-                            <a:effectLst/>
-                            <a:latin typeface="Cambria Math" panose="02040503050406030204" pitchFamily="18" charset="0"/>
-                          </a:rPr>
-                        </m:ctrlPr>
-                      </m:fPr>
-                      <m:num>
-                        <m:r>
-                          <a:rPr lang="en-US" altLang="ja-JP" sz="2000" b="0" i="1" smtClean="0">
-                            <a:effectLst/>
-                            <a:latin typeface="Cambria Math" panose="02040503050406030204" pitchFamily="18" charset="0"/>
-                          </a:rPr>
-                          <m:t>1</m:t>
-                        </m:r>
-                      </m:num>
-                      <m:den>
-                        <m:r>
-                          <a:rPr lang="en-US" altLang="ja-JP" sz="2000" b="0" i="1" smtClean="0">
-                            <a:effectLst/>
-                            <a:latin typeface="Cambria Math" panose="02040503050406030204" pitchFamily="18" charset="0"/>
-                          </a:rPr>
-                          <m:t>𝑁</m:t>
-                        </m:r>
-                      </m:den>
-                    </m:f>
-                    <m:nary>
-                      <m:naryPr>
-                        <m:chr m:val="∑"/>
-                        <m:ctrlPr>
-                          <a:rPr lang="en-US" altLang="ja-JP" sz="2000" b="0" i="1" smtClean="0">
-                            <a:effectLst/>
-                            <a:latin typeface="Cambria Math" panose="02040503050406030204" pitchFamily="18" charset="0"/>
-                          </a:rPr>
-                        </m:ctrlPr>
-                      </m:naryPr>
-                      <m:sub>
-                        <m:r>
-                          <m:rPr>
-                            <m:brk m:alnAt="23"/>
-                          </m:rPr>
-                          <a:rPr lang="en-US" altLang="ja-JP" sz="2000" b="0" i="1" smtClean="0">
-                            <a:effectLst/>
-                            <a:latin typeface="Cambria Math" panose="02040503050406030204" pitchFamily="18" charset="0"/>
-                          </a:rPr>
-                          <m:t>h</m:t>
-                        </m:r>
-                        <m:r>
-                          <a:rPr lang="en-US" altLang="ja-JP" sz="2000" b="0" i="1" smtClean="0">
-                            <a:effectLst/>
-                            <a:latin typeface="Cambria Math" panose="02040503050406030204" pitchFamily="18" charset="0"/>
-                          </a:rPr>
-                          <m:t>=1</m:t>
-                        </m:r>
-                      </m:sub>
-                      <m:sup>
-                        <m:r>
-                          <a:rPr lang="en-US" altLang="ja-JP" sz="2000" b="0" i="1" smtClean="0">
-                            <a:effectLst/>
-                            <a:latin typeface="Cambria Math" panose="02040503050406030204" pitchFamily="18" charset="0"/>
-                          </a:rPr>
-                          <m:t>𝐿</m:t>
-                        </m:r>
-                      </m:sup>
-                      <m:e>
-                        <m:sSub>
-                          <m:sSubPr>
-                            <m:ctrlPr>
-                              <a:rPr lang="en-US" altLang="ja-JP" sz="2000" b="0" i="1" smtClean="0">
-                                <a:effectLst/>
-                                <a:latin typeface="Cambria Math" panose="02040503050406030204" pitchFamily="18" charset="0"/>
-                              </a:rPr>
-                            </m:ctrlPr>
-                          </m:sSubPr>
-                          <m:e>
-                            <m:r>
-                              <a:rPr lang="en-US" altLang="ja-JP" sz="2000" b="0" i="1" smtClean="0">
-                                <a:effectLst/>
-                                <a:latin typeface="Cambria Math" panose="02040503050406030204" pitchFamily="18" charset="0"/>
-                              </a:rPr>
-                              <m:t>𝑁</m:t>
-                            </m:r>
-                          </m:e>
-                          <m:sub>
-                            <m:r>
-                              <a:rPr lang="en-US" altLang="ja-JP" sz="2000" b="0" i="1" smtClean="0">
-                                <a:effectLst/>
-                                <a:latin typeface="Cambria Math" panose="02040503050406030204" pitchFamily="18" charset="0"/>
-                              </a:rPr>
-                              <m:t>h</m:t>
-                            </m:r>
-                          </m:sub>
-                        </m:sSub>
-                        <m:sSup>
-                          <m:sSupPr>
-                            <m:ctrlPr>
-                              <a:rPr lang="en-US" altLang="ja-JP" sz="2000" b="0" i="1" smtClean="0">
-                                <a:effectLst/>
-                                <a:latin typeface="Cambria Math" panose="02040503050406030204" pitchFamily="18" charset="0"/>
-                              </a:rPr>
-                            </m:ctrlPr>
-                          </m:sSupPr>
-                          <m:e>
-                            <m:acc>
-                              <m:accPr>
-                                <m:chr m:val="̅"/>
-                                <m:ctrlPr>
-                                  <a:rPr lang="en-US" altLang="ja-JP" sz="2000" b="0" i="1" smtClean="0">
-                                    <a:effectLst/>
-                                    <a:latin typeface="Cambria Math" panose="02040503050406030204" pitchFamily="18" charset="0"/>
-                                  </a:rPr>
-                                </m:ctrlPr>
-                              </m:accPr>
-                              <m:e>
-                                <m:r>
-                                  <a:rPr lang="en-US" altLang="ja-JP" sz="2000" b="0" i="1" smtClean="0">
-                                    <a:effectLst/>
-                                    <a:latin typeface="Cambria Math" panose="02040503050406030204" pitchFamily="18" charset="0"/>
-                                  </a:rPr>
-                                  <m:t>𝑌</m:t>
-                                </m:r>
-                              </m:e>
-                            </m:acc>
-                          </m:e>
-                          <m:sup>
-                            <m:r>
-                              <a:rPr lang="en-US" altLang="ja-JP" sz="2000" b="0" i="1" smtClean="0">
-                                <a:effectLst/>
-                                <a:latin typeface="Cambria Math" panose="02040503050406030204" pitchFamily="18" charset="0"/>
-                              </a:rPr>
-                              <m:t>(</m:t>
-                            </m:r>
-                            <m:r>
-                              <a:rPr lang="en-US" altLang="ja-JP" sz="2000" b="0" i="1" smtClean="0">
-                                <a:effectLst/>
-                                <a:latin typeface="Cambria Math" panose="02040503050406030204" pitchFamily="18" charset="0"/>
-                              </a:rPr>
-                              <m:t>h</m:t>
-                            </m:r>
-                            <m:r>
-                              <a:rPr lang="en-US" altLang="ja-JP" sz="2000" b="0" i="1" smtClean="0">
-                                <a:effectLst/>
-                                <a:latin typeface="Cambria Math" panose="02040503050406030204" pitchFamily="18" charset="0"/>
-                              </a:rPr>
-                              <m:t>)</m:t>
-                            </m:r>
-                          </m:sup>
-                        </m:sSup>
-                      </m:e>
-                    </m:nary>
-                  </m:oMath>
-                </a14:m>
-                <a:endParaRPr lang="en-US" altLang="ja-JP" sz="2000" b="0" dirty="0">
-                  <a:effectLst/>
-                </a:endParaRPr>
-              </a:p>
-              <a:p>
-                <a:pPr>
-                  <a:lnSpc>
-                    <a:spcPct val="150000"/>
-                  </a:lnSpc>
-                </a:pPr>
-                <a:r>
-                  <a:rPr lang="ja-JP" altLang="en-US" sz="2000">
-                    <a:effectLst/>
-                    <a:latin typeface="Google Sans Text"/>
-                  </a:rPr>
-                  <a:t>每一層樣本的平均數，</a:t>
-                </a:r>
-                <a14:m>
-                  <m:oMath xmlns:m="http://schemas.openxmlformats.org/officeDocument/2006/math">
-                    <m:sSub>
-                      <m:sSubPr>
-                        <m:ctrlPr>
-                          <a:rPr lang="en-US" altLang="ja-JP" sz="2000" b="0" i="1" smtClean="0">
-                            <a:effectLst/>
-                            <a:latin typeface="Cambria Math" panose="02040503050406030204" pitchFamily="18" charset="0"/>
-                          </a:rPr>
-                        </m:ctrlPr>
-                      </m:sSubPr>
-                      <m:e>
-                        <m:acc>
-                          <m:accPr>
-                            <m:chr m:val="̅"/>
-                            <m:ctrlPr>
-                              <a:rPr lang="en-US" altLang="ja-JP" sz="2000" b="0" i="1" smtClean="0">
-                                <a:effectLst/>
-                                <a:latin typeface="Cambria Math" panose="02040503050406030204" pitchFamily="18" charset="0"/>
-                              </a:rPr>
-                            </m:ctrlPr>
-                          </m:accPr>
-                          <m:e>
-                            <m:r>
-                              <a:rPr lang="en-US" altLang="ja-JP" sz="2000" b="0" i="1" smtClean="0">
-                                <a:effectLst/>
-                                <a:latin typeface="Cambria Math" panose="02040503050406030204" pitchFamily="18" charset="0"/>
-                              </a:rPr>
-                              <m:t>𝑦</m:t>
-                            </m:r>
-                          </m:e>
-                        </m:acc>
-                      </m:e>
-                      <m:sub>
-                        <m:r>
-                          <a:rPr lang="en-US" altLang="ja-JP" sz="2000" b="0" i="1" smtClean="0">
-                            <a:effectLst/>
-                            <a:latin typeface="Cambria Math" panose="02040503050406030204" pitchFamily="18" charset="0"/>
-                          </a:rPr>
-                          <m:t>𝑆</m:t>
-                        </m:r>
-                      </m:sub>
-                    </m:sSub>
-                    <m:r>
-                      <a:rPr lang="en-US" altLang="ja-JP" sz="2000" b="0" i="1" smtClean="0">
-                        <a:effectLst/>
-                        <a:latin typeface="Cambria Math" panose="02040503050406030204" pitchFamily="18" charset="0"/>
-                      </a:rPr>
-                      <m:t>=</m:t>
-                    </m:r>
-                    <m:f>
-                      <m:fPr>
-                        <m:ctrlPr>
-                          <a:rPr lang="en-US" altLang="ja-JP" sz="2000" b="0" i="1" smtClean="0">
-                            <a:effectLst/>
-                            <a:latin typeface="Cambria Math" panose="02040503050406030204" pitchFamily="18" charset="0"/>
-                          </a:rPr>
-                        </m:ctrlPr>
-                      </m:fPr>
-                      <m:num>
-                        <m:r>
-                          <a:rPr lang="en-US" altLang="ja-JP" sz="2000" b="0" i="1" smtClean="0">
-                            <a:effectLst/>
-                            <a:latin typeface="Cambria Math" panose="02040503050406030204" pitchFamily="18" charset="0"/>
-                          </a:rPr>
-                          <m:t>1</m:t>
-                        </m:r>
-                      </m:num>
-                      <m:den>
-                        <m:r>
-                          <a:rPr lang="en-US" altLang="ja-JP" sz="2000" b="0" i="1" smtClean="0">
-                            <a:effectLst/>
-                            <a:latin typeface="Cambria Math" panose="02040503050406030204" pitchFamily="18" charset="0"/>
-                          </a:rPr>
-                          <m:t>𝑁</m:t>
-                        </m:r>
-                      </m:den>
-                    </m:f>
-                    <m:nary>
-                      <m:naryPr>
-                        <m:chr m:val="∑"/>
-                        <m:ctrlPr>
-                          <a:rPr lang="en-US" altLang="ja-JP" sz="2000" b="0" i="1" smtClean="0">
-                            <a:effectLst/>
-                            <a:latin typeface="Cambria Math" panose="02040503050406030204" pitchFamily="18" charset="0"/>
-                          </a:rPr>
-                        </m:ctrlPr>
-                      </m:naryPr>
-                      <m:sub>
-                        <m:r>
-                          <m:rPr>
-                            <m:brk m:alnAt="23"/>
-                          </m:rPr>
-                          <a:rPr lang="en-US" altLang="ja-JP" sz="2000" b="0" i="1" smtClean="0">
-                            <a:effectLst/>
-                            <a:latin typeface="Cambria Math" panose="02040503050406030204" pitchFamily="18" charset="0"/>
-                          </a:rPr>
-                          <m:t>h</m:t>
-                        </m:r>
-                        <m:r>
-                          <a:rPr lang="en-US" altLang="ja-JP" sz="2000" b="0" i="1" smtClean="0">
-                            <a:effectLst/>
-                            <a:latin typeface="Cambria Math" panose="02040503050406030204" pitchFamily="18" charset="0"/>
-                          </a:rPr>
-                          <m:t>=1</m:t>
-                        </m:r>
-                      </m:sub>
-                      <m:sup>
-                        <m:r>
-                          <a:rPr lang="en-US" altLang="ja-JP" sz="2000" b="0" i="1" smtClean="0">
-                            <a:effectLst/>
-                            <a:latin typeface="Cambria Math" panose="02040503050406030204" pitchFamily="18" charset="0"/>
-                          </a:rPr>
-                          <m:t>𝐿</m:t>
-                        </m:r>
-                      </m:sup>
-                      <m:e>
-                        <m:sSub>
-                          <m:sSubPr>
-                            <m:ctrlPr>
-                              <a:rPr lang="en-US" altLang="ja-JP" sz="2000" b="0" i="1" smtClean="0">
-                                <a:effectLst/>
-                                <a:latin typeface="Cambria Math" panose="02040503050406030204" pitchFamily="18" charset="0"/>
-                              </a:rPr>
-                            </m:ctrlPr>
-                          </m:sSubPr>
-                          <m:e>
-                            <m:r>
-                              <a:rPr lang="en-US" altLang="ja-JP" sz="2000" b="0" i="1" smtClean="0">
-                                <a:effectLst/>
-                                <a:latin typeface="Cambria Math" panose="02040503050406030204" pitchFamily="18" charset="0"/>
-                              </a:rPr>
-                              <m:t>𝑁</m:t>
-                            </m:r>
-                          </m:e>
-                          <m:sub>
-                            <m:r>
-                              <a:rPr lang="en-US" altLang="ja-JP" sz="2000" b="0" i="1" smtClean="0">
-                                <a:effectLst/>
-                                <a:latin typeface="Cambria Math" panose="02040503050406030204" pitchFamily="18" charset="0"/>
-                              </a:rPr>
-                              <m:t>h</m:t>
-                            </m:r>
-                          </m:sub>
-                        </m:sSub>
-                        <m:sSup>
-                          <m:sSupPr>
-                            <m:ctrlPr>
-                              <a:rPr lang="en-US" altLang="ja-JP" sz="2000" b="0" i="1" smtClean="0">
-                                <a:effectLst/>
-                                <a:latin typeface="Cambria Math" panose="02040503050406030204" pitchFamily="18" charset="0"/>
-                              </a:rPr>
-                            </m:ctrlPr>
-                          </m:sSupPr>
-                          <m:e>
-                            <m:acc>
-                              <m:accPr>
-                                <m:chr m:val="̅"/>
-                                <m:ctrlPr>
-                                  <a:rPr lang="en-US" altLang="ja-JP" sz="2000" b="0" i="1" smtClean="0">
-                                    <a:effectLst/>
-                                    <a:latin typeface="Cambria Math" panose="02040503050406030204" pitchFamily="18" charset="0"/>
-                                  </a:rPr>
-                                </m:ctrlPr>
-                              </m:accPr>
-                              <m:e>
-                                <m:r>
-                                  <a:rPr lang="en-US" altLang="ja-JP" sz="2000" b="0" i="1" smtClean="0">
-                                    <a:effectLst/>
-                                    <a:latin typeface="Cambria Math" panose="02040503050406030204" pitchFamily="18" charset="0"/>
-                                  </a:rPr>
-                                  <m:t>𝑦</m:t>
-                                </m:r>
-                              </m:e>
-                            </m:acc>
-                          </m:e>
-                          <m:sup>
-                            <m:r>
-                              <a:rPr lang="en-US" altLang="ja-JP" sz="2000" b="0" i="1" smtClean="0">
-                                <a:effectLst/>
-                                <a:latin typeface="Cambria Math" panose="02040503050406030204" pitchFamily="18" charset="0"/>
-                              </a:rPr>
-                              <m:t>(</m:t>
-                            </m:r>
-                            <m:r>
-                              <a:rPr lang="en-US" altLang="ja-JP" sz="2000" b="0" i="1" smtClean="0">
-                                <a:effectLst/>
-                                <a:latin typeface="Cambria Math" panose="02040503050406030204" pitchFamily="18" charset="0"/>
-                              </a:rPr>
-                              <m:t>h</m:t>
-                            </m:r>
-                            <m:r>
-                              <a:rPr lang="en-US" altLang="ja-JP" sz="2000" b="0" i="1" smtClean="0">
-                                <a:effectLst/>
-                                <a:latin typeface="Cambria Math" panose="02040503050406030204" pitchFamily="18" charset="0"/>
-                              </a:rPr>
-                              <m:t>)</m:t>
-                            </m:r>
-                          </m:sup>
-                        </m:sSup>
-                      </m:e>
-                    </m:nary>
-                  </m:oMath>
-                </a14:m>
-                <a:r>
-                  <a:rPr lang="zh-TW" altLang="en-US" sz="2000" dirty="0">
-                    <a:effectLst/>
-                    <a:latin typeface="Google Sans Text"/>
-                  </a:rPr>
-                  <a:t> </a:t>
-                </a:r>
-                <a:r>
-                  <a:rPr lang="ja-JP" altLang="en-US" sz="2000">
-                    <a:effectLst/>
-                    <a:latin typeface="Google Sans Text"/>
-                  </a:rPr>
-                  <a:t>可推估母體平均數。</a:t>
-                </a:r>
-                <a:endParaRPr lang="en-US" altLang="ja-JP" sz="2000" dirty="0">
-                  <a:effectLst/>
-                  <a:latin typeface="Google Sans Text"/>
-                </a:endParaRPr>
-              </a:p>
-              <a:p>
-                <a:pPr>
-                  <a:lnSpc>
-                    <a:spcPct val="150000"/>
-                  </a:lnSpc>
-                </a:pPr>
-                <a:r>
-                  <a:rPr lang="ja-JP" altLang="en-US" sz="2000">
-                    <a:latin typeface="Google Sans Text"/>
-                  </a:rPr>
-                  <a:t>每一層樣本的平均數的變異程度：</a:t>
-                </a:r>
-                <a14:m>
-                  <m:oMath xmlns:m="http://schemas.openxmlformats.org/officeDocument/2006/math">
-                    <m:r>
-                      <a:rPr lang="en-US" altLang="ja-JP" sz="2000" b="0" i="1" smtClean="0">
-                        <a:latin typeface="Cambria Math" panose="02040503050406030204" pitchFamily="18" charset="0"/>
-                      </a:rPr>
-                      <m:t>𝑉</m:t>
-                    </m:r>
-                    <m:d>
-                      <m:dPr>
-                        <m:ctrlPr>
-                          <a:rPr lang="en-US" altLang="ja-JP" sz="2000" b="0" i="1" smtClean="0">
-                            <a:latin typeface="Cambria Math" panose="02040503050406030204" pitchFamily="18" charset="0"/>
-                          </a:rPr>
-                        </m:ctrlPr>
-                      </m:dPr>
-                      <m:e>
-                        <m:sSub>
-                          <m:sSubPr>
-                            <m:ctrlPr>
-                              <a:rPr lang="en-US" altLang="ja-JP" sz="2000" i="1">
-                                <a:latin typeface="Cambria Math" panose="02040503050406030204" pitchFamily="18" charset="0"/>
-                              </a:rPr>
-                            </m:ctrlPr>
-                          </m:sSubPr>
-                          <m:e>
-                            <m:acc>
-                              <m:accPr>
-                                <m:chr m:val="̅"/>
-                                <m:ctrlPr>
-                                  <a:rPr lang="en-US" altLang="ja-JP" sz="2000" i="1">
-                                    <a:latin typeface="Cambria Math" panose="02040503050406030204" pitchFamily="18" charset="0"/>
-                                  </a:rPr>
-                                </m:ctrlPr>
-                              </m:accPr>
-                              <m:e>
-                                <m:r>
-                                  <a:rPr lang="en-US" altLang="ja-JP" sz="2000" i="1">
-                                    <a:latin typeface="Cambria Math" panose="02040503050406030204" pitchFamily="18" charset="0"/>
-                                  </a:rPr>
-                                  <m:t>𝑦</m:t>
-                                </m:r>
-                              </m:e>
-                            </m:acc>
-                          </m:e>
-                          <m:sub>
-                            <m:r>
-                              <a:rPr lang="en-US" altLang="ja-JP" sz="2000" i="1">
-                                <a:latin typeface="Cambria Math" panose="02040503050406030204" pitchFamily="18" charset="0"/>
-                              </a:rPr>
-                              <m:t>𝑆</m:t>
-                            </m:r>
-                          </m:sub>
-                        </m:sSub>
-                      </m:e>
-                    </m:d>
-                    <m:r>
-                      <a:rPr lang="en-US" altLang="ja-JP" sz="2000" b="0" i="1" smtClean="0">
-                        <a:latin typeface="Cambria Math" panose="02040503050406030204" pitchFamily="18" charset="0"/>
-                      </a:rPr>
-                      <m:t>=</m:t>
-                    </m:r>
-                  </m:oMath>
-                </a14:m>
-                <a:r>
-                  <a:rPr lang="en-US" altLang="ja-JP" sz="2000" dirty="0"/>
-                  <a:t> </a:t>
-                </a:r>
-                <a14:m>
-                  <m:oMath xmlns:m="http://schemas.openxmlformats.org/officeDocument/2006/math">
-                    <m:f>
-                      <m:fPr>
-                        <m:ctrlPr>
-                          <a:rPr lang="en-US" altLang="ja-JP" sz="2000" i="1">
-                            <a:latin typeface="Cambria Math" panose="02040503050406030204" pitchFamily="18" charset="0"/>
-                          </a:rPr>
-                        </m:ctrlPr>
-                      </m:fPr>
-                      <m:num>
-                        <m:r>
-                          <a:rPr lang="en-US" altLang="ja-JP" sz="2000" i="1">
-                            <a:latin typeface="Cambria Math" panose="02040503050406030204" pitchFamily="18" charset="0"/>
-                          </a:rPr>
-                          <m:t>1</m:t>
-                        </m:r>
-                      </m:num>
-                      <m:den>
-                        <m:sSup>
-                          <m:sSupPr>
-                            <m:ctrlPr>
-                              <a:rPr lang="en-US" altLang="ja-JP" sz="2000" i="1" smtClean="0">
-                                <a:latin typeface="Cambria Math" panose="02040503050406030204" pitchFamily="18" charset="0"/>
-                              </a:rPr>
-                            </m:ctrlPr>
-                          </m:sSupPr>
-                          <m:e>
-                            <m:r>
-                              <a:rPr lang="en-US" altLang="ja-JP" sz="2000" b="0" i="1" smtClean="0">
-                                <a:latin typeface="Cambria Math" panose="02040503050406030204" pitchFamily="18" charset="0"/>
-                              </a:rPr>
-                              <m:t>𝑁</m:t>
-                            </m:r>
-                          </m:e>
-                          <m:sup>
-                            <m:r>
-                              <a:rPr lang="en-US" altLang="ja-JP" sz="2000" b="0" i="1" smtClean="0">
-                                <a:latin typeface="Cambria Math" panose="02040503050406030204" pitchFamily="18" charset="0"/>
-                              </a:rPr>
-                              <m:t>2</m:t>
-                            </m:r>
-                          </m:sup>
-                        </m:sSup>
-                      </m:den>
-                    </m:f>
-                  </m:oMath>
-                </a14:m>
-                <a:r>
-                  <a:rPr lang="en-US" altLang="ja-JP" sz="2000" dirty="0"/>
-                  <a:t> </a:t>
-                </a:r>
-                <a14:m>
-                  <m:oMath xmlns:m="http://schemas.openxmlformats.org/officeDocument/2006/math">
-                    <m:nary>
-                      <m:naryPr>
-                        <m:chr m:val="∑"/>
-                        <m:ctrlPr>
-                          <a:rPr lang="en-US" altLang="ja-JP" sz="2000" i="1">
-                            <a:latin typeface="Cambria Math" panose="02040503050406030204" pitchFamily="18" charset="0"/>
-                          </a:rPr>
-                        </m:ctrlPr>
-                      </m:naryPr>
-                      <m:sub>
-                        <m:r>
-                          <m:rPr>
-                            <m:brk m:alnAt="23"/>
-                          </m:rPr>
-                          <a:rPr lang="en-US" altLang="ja-JP" sz="2000" i="1">
-                            <a:latin typeface="Cambria Math" panose="02040503050406030204" pitchFamily="18" charset="0"/>
-                          </a:rPr>
-                          <m:t>h</m:t>
-                        </m:r>
-                        <m:r>
-                          <a:rPr lang="en-US" altLang="ja-JP" sz="2000" i="1">
-                            <a:latin typeface="Cambria Math" panose="02040503050406030204" pitchFamily="18" charset="0"/>
-                          </a:rPr>
-                          <m:t>=1</m:t>
-                        </m:r>
-                      </m:sub>
-                      <m:sup>
-                        <m:r>
-                          <a:rPr lang="en-US" altLang="ja-JP" sz="2000" i="1">
-                            <a:latin typeface="Cambria Math" panose="02040503050406030204" pitchFamily="18" charset="0"/>
-                          </a:rPr>
-                          <m:t>𝐿</m:t>
-                        </m:r>
-                      </m:sup>
-                      <m:e>
-                        <m:sSubSup>
-                          <m:sSubSupPr>
-                            <m:ctrlPr>
-                              <a:rPr lang="en-US" altLang="ja-JP" sz="2000" i="1" smtClean="0">
-                                <a:latin typeface="Cambria Math" panose="02040503050406030204" pitchFamily="18" charset="0"/>
-                              </a:rPr>
-                            </m:ctrlPr>
-                          </m:sSubSupPr>
-                          <m:e>
-                            <m:r>
-                              <a:rPr lang="en-US" altLang="ja-JP" sz="2000" b="0" i="1" smtClean="0">
-                                <a:latin typeface="Cambria Math" panose="02040503050406030204" pitchFamily="18" charset="0"/>
-                              </a:rPr>
-                              <m:t>𝑁</m:t>
-                            </m:r>
-                          </m:e>
-                          <m:sub>
-                            <m:r>
-                              <a:rPr lang="en-US" altLang="ja-JP" sz="2000" b="0" i="1" smtClean="0">
-                                <a:latin typeface="Cambria Math" panose="02040503050406030204" pitchFamily="18" charset="0"/>
-                              </a:rPr>
-                              <m:t>h</m:t>
-                            </m:r>
-                          </m:sub>
-                          <m:sup>
-                            <m:r>
-                              <a:rPr lang="en-US" altLang="ja-JP" sz="2000" b="0" i="1" smtClean="0">
-                                <a:latin typeface="Cambria Math" panose="02040503050406030204" pitchFamily="18" charset="0"/>
-                              </a:rPr>
-                              <m:t>2</m:t>
-                            </m:r>
-                          </m:sup>
-                        </m:sSubSup>
-                        <m:f>
-                          <m:fPr>
-                            <m:ctrlPr>
-                              <a:rPr lang="en-US" altLang="ja-JP" sz="2000" i="1" smtClean="0">
-                                <a:latin typeface="Cambria Math" panose="02040503050406030204" pitchFamily="18" charset="0"/>
-                              </a:rPr>
-                            </m:ctrlPr>
-                          </m:fPr>
-                          <m:num>
-                            <m:r>
-                              <a:rPr lang="en-US" altLang="ja-JP" sz="2000" b="0" i="1" smtClean="0">
-                                <a:latin typeface="Cambria Math" panose="02040503050406030204" pitchFamily="18" charset="0"/>
-                              </a:rPr>
-                              <m:t>1</m:t>
-                            </m:r>
-                          </m:num>
-                          <m:den>
-                            <m:sSub>
-                              <m:sSubPr>
-                                <m:ctrlPr>
-                                  <a:rPr lang="en-US" altLang="ja-JP" sz="2000" i="1" smtClean="0">
-                                    <a:latin typeface="Cambria Math" panose="02040503050406030204" pitchFamily="18" charset="0"/>
-                                  </a:rPr>
-                                </m:ctrlPr>
-                              </m:sSubPr>
-                              <m:e>
-                                <m:r>
-                                  <a:rPr lang="en-US" altLang="ja-JP" sz="2000" b="0" i="1" smtClean="0">
-                                    <a:latin typeface="Cambria Math" panose="02040503050406030204" pitchFamily="18" charset="0"/>
-                                  </a:rPr>
-                                  <m:t>𝑁</m:t>
-                                </m:r>
-                              </m:e>
-                              <m:sub>
-                                <m:r>
-                                  <a:rPr lang="en-US" altLang="ja-JP" sz="2000" b="0" i="1" smtClean="0">
-                                    <a:latin typeface="Cambria Math" panose="02040503050406030204" pitchFamily="18" charset="0"/>
-                                  </a:rPr>
-                                  <m:t>h</m:t>
-                                </m:r>
-                              </m:sub>
-                            </m:sSub>
-                          </m:den>
-                        </m:f>
-                        <m:sSubSup>
-                          <m:sSubSupPr>
-                            <m:ctrlPr>
-                              <a:rPr lang="en-US" altLang="ja-JP" sz="2000" i="1" smtClean="0">
-                                <a:latin typeface="Cambria Math" panose="02040503050406030204" pitchFamily="18" charset="0"/>
-                              </a:rPr>
-                            </m:ctrlPr>
-                          </m:sSubSupPr>
-                          <m:e>
-                            <m:r>
-                              <a:rPr lang="en-US" altLang="ja-JP" sz="2000" b="0" i="1" smtClean="0">
-                                <a:latin typeface="Cambria Math" panose="02040503050406030204" pitchFamily="18" charset="0"/>
-                              </a:rPr>
-                              <m:t>𝑠</m:t>
-                            </m:r>
-                          </m:e>
-                          <m:sub>
-                            <m:r>
-                              <a:rPr lang="en-US" altLang="ja-JP" sz="2000" b="0" i="1" smtClean="0">
-                                <a:latin typeface="Cambria Math" panose="02040503050406030204" pitchFamily="18" charset="0"/>
-                              </a:rPr>
-                              <m:t>h</m:t>
-                            </m:r>
-                          </m:sub>
-                          <m:sup>
-                            <m:r>
-                              <a:rPr lang="en-US" altLang="ja-JP" sz="2000" b="0" i="1" smtClean="0">
-                                <a:latin typeface="Cambria Math" panose="02040503050406030204" pitchFamily="18" charset="0"/>
-                              </a:rPr>
-                              <m:t>2</m:t>
-                            </m:r>
-                          </m:sup>
-                        </m:sSubSup>
-                      </m:e>
-                    </m:nary>
-                    <m:r>
-                      <a:rPr lang="zh-TW" altLang="en-US" sz="2000" b="0" i="1" smtClean="0">
-                        <a:latin typeface="Cambria Math" panose="02040503050406030204" pitchFamily="18" charset="0"/>
-                      </a:rPr>
-                      <m:t> </m:t>
-                    </m:r>
-                    <m:sSubSup>
-                      <m:sSubSupPr>
-                        <m:ctrlPr>
-                          <a:rPr lang="en-US" altLang="ja-JP" sz="2000" i="1">
-                            <a:latin typeface="Cambria Math" panose="02040503050406030204" pitchFamily="18" charset="0"/>
-                          </a:rPr>
-                        </m:ctrlPr>
-                      </m:sSubSupPr>
-                      <m:e>
-                        <m:r>
-                          <a:rPr lang="en-US" altLang="ja-JP" sz="2000" i="1">
-                            <a:latin typeface="Cambria Math" panose="02040503050406030204" pitchFamily="18" charset="0"/>
-                          </a:rPr>
-                          <m:t>𝑠</m:t>
-                        </m:r>
-                      </m:e>
-                      <m:sub>
-                        <m:r>
-                          <a:rPr lang="en-US" altLang="ja-JP" sz="2000" i="1">
-                            <a:latin typeface="Cambria Math" panose="02040503050406030204" pitchFamily="18" charset="0"/>
-                          </a:rPr>
-                          <m:t>h</m:t>
-                        </m:r>
-                      </m:sub>
-                      <m:sup>
-                        <m:r>
-                          <a:rPr lang="en-US" altLang="ja-JP" sz="2000" i="1">
-                            <a:latin typeface="Cambria Math" panose="02040503050406030204" pitchFamily="18" charset="0"/>
-                          </a:rPr>
-                          <m:t>2</m:t>
-                        </m:r>
-                      </m:sup>
-                    </m:sSubSup>
-                  </m:oMath>
-                </a14:m>
-                <a:r>
-                  <a:rPr lang="ja-JP" altLang="en-US" sz="2000" dirty="0">
-                    <a:latin typeface="Google Sans Text"/>
-                  </a:rPr>
-                  <a:t>代表該分層裡面的變異程度。</a:t>
-                </a:r>
-                <a:endParaRPr lang="en-US" altLang="ja-JP" sz="2000" dirty="0">
-                  <a:latin typeface="Google Sans Text"/>
-                </a:endParaRPr>
-              </a:p>
-              <a:p>
-                <a:pPr>
-                  <a:lnSpc>
-                    <a:spcPct val="150000"/>
-                  </a:lnSpc>
-                </a:pPr>
-                <a:r>
-                  <a:rPr lang="ja-JP" altLang="en-US" sz="2000">
-                    <a:latin typeface="Google Sans Text"/>
-                  </a:rPr>
-                  <a:t>需要可抽樣的清單，才能加以分層。例如，把台灣的鄉鎮市區按照都市化程度分層，在中選的層之中，抽出村里。</a:t>
-                </a:r>
-                <a:endParaRPr lang="en-US" altLang="ja-JP" sz="2000" dirty="0">
-                  <a:latin typeface="Google Sans Text"/>
-                </a:endParaRPr>
-              </a:p>
-              <a:p>
-                <a:pPr>
-                  <a:lnSpc>
-                    <a:spcPct val="150000"/>
-                  </a:lnSpc>
-                </a:pPr>
-                <a:r>
-                  <a:rPr lang="ja-JP" altLang="en-US" sz="2000">
-                    <a:latin typeface="Google Sans Text"/>
-                  </a:rPr>
-                  <a:t>實務上，一個層之中有比較難進行訪問的鄉鎮市區，可以考慮挑選比較容易訪問的，但是要注意區域的均衡。</a:t>
-                </a:r>
-                <a:endParaRPr lang="en-US" altLang="ja-JP" sz="2000" dirty="0">
-                  <a:latin typeface="Google Sans Text"/>
-                </a:endParaRPr>
-              </a:p>
-            </p:txBody>
-          </p:sp>
-        </mc:Choice>
-        <mc:Fallback>
-          <p:sp>
-            <p:nvSpPr>
-              <p:cNvPr id="3" name="Content Placeholder 2">
-                <a:extLst>
-                  <a:ext uri="{FF2B5EF4-FFF2-40B4-BE49-F238E27FC236}">
-                    <a16:creationId xmlns:a16="http://schemas.microsoft.com/office/drawing/2014/main" id="{0DD5815E-3ECC-D100-8CCB-1C5673521472}"/>
-                  </a:ext>
-                </a:extLst>
-              </p:cNvPr>
-              <p:cNvSpPr>
-                <a:spLocks noGrp="1" noRot="1" noChangeAspect="1" noMove="1" noResize="1" noEditPoints="1" noAdjustHandles="1" noChangeArrowheads="1" noChangeShapeType="1" noTextEdit="1"/>
-              </p:cNvSpPr>
-              <p:nvPr>
-                <p:ph idx="1"/>
-              </p:nvPr>
-            </p:nvSpPr>
-            <p:spPr>
-              <a:blipFill>
-                <a:blip r:embed="rId2"/>
-                <a:stretch>
-                  <a:fillRect l="-362"/>
-                </a:stretch>
-              </a:blipFill>
-            </p:spPr>
-            <p:txBody>
-              <a:bodyPr/>
-              <a:lstStyle/>
-              <a:p>
-                <a:r>
-                  <a:rPr lang="zh-TW" altLang="en-US">
-                    <a:noFill/>
-                  </a:rPr>
-                  <a:t> </a:t>
-                </a:r>
-              </a:p>
-            </p:txBody>
-          </p:sp>
-        </mc:Fallback>
-      </mc:AlternateContent>
+      <p:sp>
+        <p:nvSpPr>
+          <p:cNvPr id="3" name="Content Placeholder 2">
+            <a:extLst>
+              <a:ext uri="{FF2B5EF4-FFF2-40B4-BE49-F238E27FC236}">
+                <a16:creationId xmlns:a16="http://schemas.microsoft.com/office/drawing/2014/main" id="{0DD5815E-3ECC-D100-8CCB-1C5673521472}"/>
+              </a:ext>
+            </a:extLst>
+          </p:cNvPr>
+          <p:cNvSpPr>
+            <a:spLocks noGrp="1"/>
+          </p:cNvSpPr>
+          <p:nvPr>
+            <p:ph idx="1"/>
+          </p:nvPr>
+        </p:nvSpPr>
+        <p:spPr/>
+        <p:txBody>
+          <a:bodyPr>
+            <a:normAutofit fontScale="92500" lnSpcReduction="10000"/>
+          </a:bodyPr>
+          <a:lstStyle/>
+          <a:p>
+            <a:pPr>
+              <a:lnSpc>
+                <a:spcPct val="150000"/>
+              </a:lnSpc>
+            </a:pPr>
+            <a:r>
+              <a:rPr lang="ja-JP" altLang="en-US" sz="2000">
+                <a:latin typeface="Google Sans Text"/>
+              </a:rPr>
+              <a:t>把母體分成一些群體，但是沒有可抽樣的清單，也不知道群體內的觀察值有多少。</a:t>
+            </a:r>
+            <a:endParaRPr lang="en-US" altLang="ja-JP" sz="2000" dirty="0">
+              <a:latin typeface="Google Sans Text"/>
+            </a:endParaRPr>
+          </a:p>
+          <a:p>
+            <a:pPr>
+              <a:lnSpc>
+                <a:spcPct val="150000"/>
+              </a:lnSpc>
+            </a:pPr>
+            <a:r>
+              <a:rPr lang="ja-JP" altLang="en-US" sz="2000">
+                <a:latin typeface="Google Sans Text"/>
+              </a:rPr>
+              <a:t>例如：想調查全台灣大學生的政治知識，但是沒辦法取得全台灣所有學生的名冊（底冊）。 集群抽樣將各個大學視為一個個集群（</a:t>
+            </a:r>
+            <a:r>
+              <a:rPr lang="en-US" altLang="ja-JP" sz="2000" dirty="0">
+                <a:latin typeface="Google Sans Text"/>
+              </a:rPr>
+              <a:t>Cluster</a:t>
+            </a:r>
+            <a:r>
+              <a:rPr lang="ja-JP" altLang="en-US" sz="2000">
+                <a:latin typeface="Google Sans Text"/>
+              </a:rPr>
+              <a:t>）。從 </a:t>
+            </a:r>
+            <a:r>
+              <a:rPr lang="en-US" altLang="ja-JP" sz="2000" dirty="0">
+                <a:latin typeface="Google Sans Text"/>
+              </a:rPr>
+              <a:t>150 </a:t>
+            </a:r>
+            <a:r>
+              <a:rPr lang="ja-JP" altLang="en-US" sz="2000">
+                <a:latin typeface="Google Sans Text"/>
+              </a:rPr>
+              <a:t>多所大學中，隨機抽取出 </a:t>
+            </a:r>
+            <a:r>
+              <a:rPr lang="en-US" altLang="ja-JP" sz="2000" dirty="0">
+                <a:latin typeface="Google Sans Text"/>
+              </a:rPr>
+              <a:t>5 </a:t>
+            </a:r>
+            <a:r>
+              <a:rPr lang="ja-JP" altLang="en-US" sz="2000">
+                <a:latin typeface="Google Sans Text"/>
+              </a:rPr>
+              <a:t>所學校。 針對這 </a:t>
+            </a:r>
+            <a:r>
+              <a:rPr lang="en-US" altLang="ja-JP" sz="2000" dirty="0">
+                <a:latin typeface="Google Sans Text"/>
+              </a:rPr>
+              <a:t>5 </a:t>
+            </a:r>
+            <a:r>
+              <a:rPr lang="ja-JP" altLang="en-US" sz="2000">
+                <a:latin typeface="Google Sans Text"/>
+              </a:rPr>
+              <a:t>所學校裡面的「所有學生」進行調查，用這</a:t>
+            </a:r>
+            <a:r>
+              <a:rPr lang="en-US" altLang="ja-JP" sz="2000" dirty="0">
+                <a:latin typeface="Google Sans Text"/>
+              </a:rPr>
+              <a:t>5</a:t>
+            </a:r>
+            <a:r>
+              <a:rPr lang="ja-JP" altLang="en-US" sz="2000">
+                <a:latin typeface="Google Sans Text"/>
+              </a:rPr>
+              <a:t>所學校的學生代表所有的大學生。</a:t>
+            </a:r>
+            <a:endParaRPr lang="en-US" altLang="ja-JP" sz="2000" dirty="0">
+              <a:latin typeface="Google Sans Text"/>
+            </a:endParaRPr>
+          </a:p>
+          <a:p>
+            <a:pPr>
+              <a:lnSpc>
+                <a:spcPct val="150000"/>
+              </a:lnSpc>
+            </a:pPr>
+            <a:r>
+              <a:rPr lang="ja-JP" altLang="en-US" sz="2000">
+                <a:latin typeface="Google Sans Text"/>
+              </a:rPr>
+              <a:t>例如：想調查手機使用者的體驗，但是沒有手機門號的名冊，也不知道到底有哪些門號，只能將已知的特定的號碼區段視為集群，然後抽出一定的門號特定的號碼區段之後進行調查。</a:t>
+            </a:r>
+            <a:endParaRPr lang="en-US" altLang="ja-JP" sz="2000" dirty="0">
+              <a:latin typeface="Google Sans Text"/>
+            </a:endParaRPr>
+          </a:p>
+          <a:p>
+            <a:pPr>
+              <a:lnSpc>
+                <a:spcPct val="150000"/>
+              </a:lnSpc>
+            </a:pPr>
+            <a:r>
+              <a:rPr lang="ja-JP" altLang="en-US" sz="2000">
+                <a:latin typeface="Google Sans Text"/>
+              </a:rPr>
+              <a:t>分層抽樣：希望「層內異質性低」（層內越像越好），因為這樣每一層只要抽幾個人就很準。</a:t>
+            </a:r>
+          </a:p>
+          <a:p>
+            <a:pPr>
+              <a:lnSpc>
+                <a:spcPct val="150000"/>
+              </a:lnSpc>
+            </a:pPr>
+            <a:r>
+              <a:rPr lang="ja-JP" altLang="en-US" sz="2000">
+                <a:latin typeface="Google Sans Text"/>
+              </a:rPr>
+              <a:t>集群抽樣：希望「層內異質性高」（群體內越雜越好），因為這樣抽中一個群體就能看到整個世界的縮影。</a:t>
+            </a:r>
+            <a:endParaRPr lang="en-US" altLang="ja-JP" sz="2000" dirty="0">
+              <a:latin typeface="Google Sans Text"/>
+            </a:endParaRPr>
+          </a:p>
+          <a:p>
+            <a:pPr>
+              <a:lnSpc>
+                <a:spcPct val="150000"/>
+              </a:lnSpc>
+            </a:pPr>
+            <a:endParaRPr lang="en-US" altLang="ja-JP" sz="2000" dirty="0">
+              <a:latin typeface="Google Sans Text"/>
+            </a:endParaRPr>
+          </a:p>
+        </p:txBody>
+      </p:sp>
       <p:sp>
         <p:nvSpPr>
           <p:cNvPr id="4" name="Slide Number Placeholder 3">
@@ -17536,7 +16934,7 @@
           <a:p>
             <a:fld id="{34E21383-B02B-694B-B2AD-A967203CDE86}" type="slidenum">
               <a:rPr lang="en-US" smtClean="0"/>
-              <a:t>25</a:t>
+              <a:t>26</a:t>
             </a:fld>
             <a:endParaRPr lang="en-US"/>
           </a:p>
@@ -17546,6 +16944,471 @@
     <p:extLst>
       <p:ext uri="{BB962C8B-B14F-4D97-AF65-F5344CB8AC3E}">
         <p14:creationId xmlns:p14="http://schemas.microsoft.com/office/powerpoint/2010/main" val="3003977298"/>
+      </p:ext>
+    </p:extLst>
+  </p:cSld>
+  <p:clrMapOvr>
+    <a:masterClrMapping/>
+  </p:clrMapOvr>
+</p:sld>
+</file>
+
+<file path=ppt/slides/slide27.xml><?xml version="1.0" encoding="utf-8"?>
+<p:sld xmlns:a="http://schemas.openxmlformats.org/drawingml/2006/main" xmlns:r="http://schemas.openxmlformats.org/officeDocument/2006/relationships" xmlns:p="http://schemas.openxmlformats.org/presentationml/2006/main">
+  <p:cSld>
+    <p:spTree>
+      <p:nvGrpSpPr>
+        <p:cNvPr id="1" name="">
+          <a:extLst>
+            <a:ext uri="{FF2B5EF4-FFF2-40B4-BE49-F238E27FC236}">
+              <a16:creationId xmlns:a16="http://schemas.microsoft.com/office/drawing/2014/main" id="{7BDFFA82-5FF3-F28E-84BF-024BAB71ACFC}"/>
+            </a:ext>
+          </a:extLst>
+        </p:cNvPr>
+        <p:cNvGrpSpPr/>
+        <p:nvPr/>
+      </p:nvGrpSpPr>
+      <p:grpSpPr>
+        <a:xfrm>
+          <a:off x="0" y="0"/>
+          <a:ext cx="0" cy="0"/>
+          <a:chOff x="0" y="0"/>
+          <a:chExt cx="0" cy="0"/>
+        </a:xfrm>
+      </p:grpSpPr>
+      <p:sp>
+        <p:nvSpPr>
+          <p:cNvPr id="2" name="Title 1">
+            <a:extLst>
+              <a:ext uri="{FF2B5EF4-FFF2-40B4-BE49-F238E27FC236}">
+                <a16:creationId xmlns:a16="http://schemas.microsoft.com/office/drawing/2014/main" id="{285BCC34-601C-CB89-85AA-CA2D1998D4D2}"/>
+              </a:ext>
+            </a:extLst>
+          </p:cNvPr>
+          <p:cNvSpPr>
+            <a:spLocks noGrp="1"/>
+          </p:cNvSpPr>
+          <p:nvPr>
+            <p:ph type="title"/>
+          </p:nvPr>
+        </p:nvSpPr>
+        <p:spPr/>
+        <p:txBody>
+          <a:bodyPr/>
+          <a:lstStyle/>
+          <a:p>
+            <a:r>
+              <a:rPr lang="ja-JP" altLang="en-US"/>
+              <a:t>兩階段抽樣</a:t>
+            </a:r>
+            <a:endParaRPr lang="en-US" dirty="0"/>
+          </a:p>
+        </p:txBody>
+      </p:sp>
+      <p:sp>
+        <p:nvSpPr>
+          <p:cNvPr id="3" name="Content Placeholder 2">
+            <a:extLst>
+              <a:ext uri="{FF2B5EF4-FFF2-40B4-BE49-F238E27FC236}">
+                <a16:creationId xmlns:a16="http://schemas.microsoft.com/office/drawing/2014/main" id="{0DD5815E-3ECC-D100-8CCB-1C5673521472}"/>
+              </a:ext>
+            </a:extLst>
+          </p:cNvPr>
+          <p:cNvSpPr>
+            <a:spLocks noGrp="1"/>
+          </p:cNvSpPr>
+          <p:nvPr>
+            <p:ph idx="1"/>
+          </p:nvPr>
+        </p:nvSpPr>
+        <p:spPr/>
+        <p:txBody>
+          <a:bodyPr>
+            <a:normAutofit/>
+          </a:bodyPr>
+          <a:lstStyle/>
+          <a:p>
+            <a:pPr>
+              <a:lnSpc>
+                <a:spcPct val="150000"/>
+              </a:lnSpc>
+            </a:pPr>
+            <a:r>
+              <a:rPr lang="ja-JP" altLang="en-US" sz="2000">
+                <a:latin typeface="Google Sans Text"/>
+              </a:rPr>
+              <a:t>集群抽樣的好處是鎖定特定群體，不像分層抽樣，可能要在每一層到處調查。</a:t>
+            </a:r>
+            <a:endParaRPr lang="en-US" altLang="ja-JP" sz="2000" dirty="0">
+              <a:latin typeface="Google Sans Text"/>
+            </a:endParaRPr>
+          </a:p>
+          <a:p>
+            <a:pPr>
+              <a:lnSpc>
+                <a:spcPct val="150000"/>
+              </a:lnSpc>
+            </a:pPr>
+            <a:r>
+              <a:rPr lang="ja-JP" altLang="en-US" sz="2000">
+                <a:latin typeface="Google Sans Text"/>
+              </a:rPr>
+              <a:t>因此，兩階段抽樣集群以及隨機抽樣，分兩個步驟進行：</a:t>
+            </a:r>
+          </a:p>
+          <a:p>
+            <a:pPr>
+              <a:lnSpc>
+                <a:spcPct val="150000"/>
+              </a:lnSpc>
+            </a:pPr>
+            <a:r>
+              <a:rPr lang="ja-JP" altLang="en-US" sz="2000">
+                <a:latin typeface="Google Sans Text"/>
+              </a:rPr>
+              <a:t>第一階段 </a:t>
+            </a:r>
+            <a:r>
+              <a:rPr lang="en-US" altLang="ja-JP" sz="2000" dirty="0">
+                <a:latin typeface="Google Sans Text"/>
+              </a:rPr>
+              <a:t>(First Stage)</a:t>
+            </a:r>
+            <a:r>
+              <a:rPr lang="ja-JP" altLang="en-US" sz="2000">
+                <a:latin typeface="Google Sans Text"/>
+              </a:rPr>
+              <a:t>： 將母體分成多個群體（稱為初級抽樣單位，</a:t>
+            </a:r>
+            <a:r>
+              <a:rPr lang="en-US" altLang="ja-JP" sz="2000" dirty="0">
+                <a:latin typeface="Google Sans Text"/>
+              </a:rPr>
+              <a:t>PSU</a:t>
+            </a:r>
+            <a:r>
+              <a:rPr lang="ja-JP" altLang="en-US" sz="2000">
+                <a:latin typeface="Google Sans Text"/>
+              </a:rPr>
+              <a:t>），並從中隨機抽取一部分群體。</a:t>
+            </a:r>
+          </a:p>
+          <a:p>
+            <a:pPr>
+              <a:lnSpc>
+                <a:spcPct val="150000"/>
+              </a:lnSpc>
+            </a:pPr>
+            <a:r>
+              <a:rPr lang="ja-JP" altLang="en-US" sz="2000">
+                <a:latin typeface="Google Sans Text"/>
+              </a:rPr>
+              <a:t>第二階段 </a:t>
+            </a:r>
+            <a:r>
+              <a:rPr lang="en-US" altLang="ja-JP" sz="2000" dirty="0">
+                <a:latin typeface="Google Sans Text"/>
+              </a:rPr>
+              <a:t>(Second Stage)</a:t>
+            </a:r>
+            <a:r>
+              <a:rPr lang="ja-JP" altLang="en-US" sz="2000">
+                <a:latin typeface="Google Sans Text"/>
+              </a:rPr>
+              <a:t>： 從被抽中的每個群體中，再隨機抽取一部分個體（稱為次級抽樣單位，</a:t>
+            </a:r>
+            <a:r>
+              <a:rPr lang="en-US" altLang="ja-JP" sz="2000" dirty="0">
+                <a:latin typeface="Google Sans Text"/>
+              </a:rPr>
+              <a:t>SSU</a:t>
+            </a:r>
+            <a:r>
+              <a:rPr lang="ja-JP" altLang="en-US" sz="2000">
+                <a:latin typeface="Google Sans Text"/>
+              </a:rPr>
+              <a:t>）進行調查。</a:t>
+            </a:r>
+            <a:endParaRPr lang="en-US" altLang="ja-JP" sz="2000" dirty="0">
+              <a:latin typeface="Google Sans Text"/>
+            </a:endParaRPr>
+          </a:p>
+          <a:p>
+            <a:pPr>
+              <a:lnSpc>
+                <a:spcPct val="150000"/>
+              </a:lnSpc>
+            </a:pPr>
+            <a:r>
+              <a:rPr lang="ja-JP" altLang="en-US" sz="2000">
+                <a:latin typeface="Google Sans Text"/>
+              </a:rPr>
+              <a:t>好處是如果第一階段抽到比較多群，抽樣誤差可能比較小，但是成本也可能比較高。</a:t>
+            </a:r>
+            <a:endParaRPr lang="en-US" altLang="ja-JP" sz="2000" dirty="0">
+              <a:latin typeface="Google Sans Text"/>
+            </a:endParaRPr>
+          </a:p>
+          <a:p>
+            <a:pPr>
+              <a:lnSpc>
+                <a:spcPct val="150000"/>
+              </a:lnSpc>
+            </a:pPr>
+            <a:endParaRPr lang="en-US" altLang="ja-JP" sz="2000" dirty="0">
+              <a:latin typeface="Google Sans Text"/>
+            </a:endParaRPr>
+          </a:p>
+        </p:txBody>
+      </p:sp>
+      <p:sp>
+        <p:nvSpPr>
+          <p:cNvPr id="4" name="Slide Number Placeholder 3">
+            <a:extLst>
+              <a:ext uri="{FF2B5EF4-FFF2-40B4-BE49-F238E27FC236}">
+                <a16:creationId xmlns:a16="http://schemas.microsoft.com/office/drawing/2014/main" id="{02677DDA-821F-27C1-DE27-756C20968055}"/>
+              </a:ext>
+            </a:extLst>
+          </p:cNvPr>
+          <p:cNvSpPr>
+            <a:spLocks noGrp="1"/>
+          </p:cNvSpPr>
+          <p:nvPr>
+            <p:ph type="sldNum" sz="quarter" idx="12"/>
+          </p:nvPr>
+        </p:nvSpPr>
+        <p:spPr/>
+        <p:txBody>
+          <a:bodyPr/>
+          <a:lstStyle/>
+          <a:p>
+            <a:fld id="{34E21383-B02B-694B-B2AD-A967203CDE86}" type="slidenum">
+              <a:rPr lang="en-US" smtClean="0"/>
+              <a:t>27</a:t>
+            </a:fld>
+            <a:endParaRPr lang="en-US"/>
+          </a:p>
+        </p:txBody>
+      </p:sp>
+    </p:spTree>
+    <p:extLst>
+      <p:ext uri="{BB962C8B-B14F-4D97-AF65-F5344CB8AC3E}">
+        <p14:creationId xmlns:p14="http://schemas.microsoft.com/office/powerpoint/2010/main" val="1069776095"/>
+      </p:ext>
+    </p:extLst>
+  </p:cSld>
+  <p:clrMapOvr>
+    <a:masterClrMapping/>
+  </p:clrMapOvr>
+</p:sld>
+</file>
+
+<file path=ppt/slides/slide28.xml><?xml version="1.0" encoding="utf-8"?>
+<p:sld xmlns:a="http://schemas.openxmlformats.org/drawingml/2006/main" xmlns:r="http://schemas.openxmlformats.org/officeDocument/2006/relationships" xmlns:p="http://schemas.openxmlformats.org/presentationml/2006/main">
+  <p:cSld>
+    <p:spTree>
+      <p:nvGrpSpPr>
+        <p:cNvPr id="1" name=""/>
+        <p:cNvGrpSpPr/>
+        <p:nvPr/>
+      </p:nvGrpSpPr>
+      <p:grpSpPr>
+        <a:xfrm>
+          <a:off x="0" y="0"/>
+          <a:ext cx="0" cy="0"/>
+          <a:chOff x="0" y="0"/>
+          <a:chExt cx="0" cy="0"/>
+        </a:xfrm>
+      </p:grpSpPr>
+      <p:sp>
+        <p:nvSpPr>
+          <p:cNvPr id="2" name="Title 1">
+            <a:extLst>
+              <a:ext uri="{FF2B5EF4-FFF2-40B4-BE49-F238E27FC236}">
+                <a16:creationId xmlns:a16="http://schemas.microsoft.com/office/drawing/2014/main" id="{5F2DB8A1-2C55-6486-E944-BB963AF72D51}"/>
+              </a:ext>
+            </a:extLst>
+          </p:cNvPr>
+          <p:cNvSpPr>
+            <a:spLocks noGrp="1"/>
+          </p:cNvSpPr>
+          <p:nvPr>
+            <p:ph type="title"/>
+          </p:nvPr>
+        </p:nvSpPr>
+        <p:spPr/>
+        <p:txBody>
+          <a:bodyPr/>
+          <a:lstStyle/>
+          <a:p>
+            <a:r>
+              <a:rPr lang="en-US" dirty="0" err="1"/>
+              <a:t>結論</a:t>
+            </a:r>
+            <a:endParaRPr lang="en-US" dirty="0"/>
+          </a:p>
+        </p:txBody>
+      </p:sp>
+      <p:sp>
+        <p:nvSpPr>
+          <p:cNvPr id="3" name="Content Placeholder 2">
+            <a:extLst>
+              <a:ext uri="{FF2B5EF4-FFF2-40B4-BE49-F238E27FC236}">
+                <a16:creationId xmlns:a16="http://schemas.microsoft.com/office/drawing/2014/main" id="{C896E5C1-2BED-73D1-1313-69746A1640E3}"/>
+              </a:ext>
+            </a:extLst>
+          </p:cNvPr>
+          <p:cNvSpPr>
+            <a:spLocks noGrp="1"/>
+          </p:cNvSpPr>
+          <p:nvPr>
+            <p:ph idx="1"/>
+          </p:nvPr>
+        </p:nvSpPr>
+        <p:spPr/>
+        <p:txBody>
+          <a:bodyPr/>
+          <a:lstStyle/>
+          <a:p>
+            <a:r>
+              <a:rPr lang="en-US" sz="2000" dirty="0" err="1"/>
+              <a:t>樣本數越大，樣本估計</a:t>
+            </a:r>
+            <a:r>
+              <a:rPr lang="en-US" sz="2000" dirty="0"/>
+              <a:t>(estimator)</a:t>
+            </a:r>
+            <a:r>
+              <a:rPr lang="en-US" sz="2000" dirty="0" err="1"/>
+              <a:t>的變異數越小，也就是越接近母體</a:t>
+            </a:r>
+            <a:r>
+              <a:rPr lang="en-US" sz="2000" dirty="0"/>
+              <a:t>。</a:t>
+            </a:r>
+          </a:p>
+          <a:p>
+            <a:r>
+              <a:rPr lang="en-US" sz="2000" dirty="0" err="1"/>
+              <a:t>等比例抽樣只考慮每一層佔全部人數的比例</a:t>
+            </a:r>
+            <a:r>
+              <a:rPr lang="en-US" sz="2000" dirty="0"/>
+              <a:t>。</a:t>
+            </a:r>
+          </a:p>
+          <a:p>
+            <a:r>
+              <a:rPr lang="ja-JP" altLang="en-US" sz="2000"/>
+              <a:t>因為每一層的特性不同。最適分配在分配樣本時考慮：</a:t>
+            </a:r>
+            <a:endParaRPr lang="en-US" altLang="ja-JP" sz="2000" dirty="0"/>
+          </a:p>
+          <a:p>
+            <a:r>
+              <a:rPr lang="ja-JP" altLang="en-US" sz="2000"/>
+              <a:t>層的大小</a:t>
+            </a:r>
+            <a:r>
+              <a:rPr lang="en-US" sz="2000" dirty="0"/>
+              <a:t>：</a:t>
+            </a:r>
+            <a:r>
+              <a:rPr lang="ja-JP" altLang="en-US" sz="2000"/>
+              <a:t>母體中這一層的人數愈多，分配到的樣本就愈多。</a:t>
+            </a:r>
+            <a:endParaRPr lang="en-US" altLang="ja-JP" sz="2000" dirty="0"/>
+          </a:p>
+          <a:p>
+            <a:r>
+              <a:rPr lang="ja-JP" altLang="en-US" sz="2000"/>
+              <a:t>層內的變異程度</a:t>
+            </a:r>
+            <a:r>
+              <a:rPr lang="en-US" sz="2000" dirty="0"/>
+              <a:t>：</a:t>
+            </a:r>
+            <a:r>
+              <a:rPr lang="ja-JP" altLang="en-US" sz="2000"/>
+              <a:t>如果這一層內部的意見非常分歧（標準差大），我們需要更多樣本才能</a:t>
+            </a:r>
+            <a:r>
+              <a:rPr lang="en-US" altLang="ja-JP" sz="2000" dirty="0"/>
+              <a:t>r</a:t>
+            </a:r>
+            <a:r>
+              <a:rPr lang="ja-JP" altLang="en-US" sz="2000"/>
+              <a:t>減少誤差。</a:t>
+            </a:r>
+            <a:endParaRPr lang="en-US" altLang="ja-JP" sz="2000" dirty="0"/>
+          </a:p>
+          <a:p>
+            <a:r>
+              <a:rPr lang="ja-JP" altLang="en-US" sz="2000"/>
+              <a:t>抽樣的成本</a:t>
+            </a:r>
+            <a:r>
+              <a:rPr lang="en-US" sz="2000" dirty="0"/>
+              <a:t>：</a:t>
+            </a:r>
+            <a:r>
+              <a:rPr lang="ja-JP" altLang="en-US" sz="2000"/>
+              <a:t>如果抽某一層的人特別貴（例如需要派訪員去偏鄉），就會少抽一點。</a:t>
+            </a:r>
+            <a:endParaRPr lang="en-US" altLang="ja-JP" sz="2000" dirty="0"/>
+          </a:p>
+          <a:p>
+            <a:r>
+              <a:rPr lang="ja-JP" altLang="en-US" sz="2000"/>
+              <a:t>分層抽樣：層內差異性越小越好</a:t>
+            </a:r>
+            <a:endParaRPr lang="en-US" altLang="ja-JP" sz="2000" dirty="0"/>
+          </a:p>
+          <a:p>
+            <a:r>
+              <a:rPr lang="ja-JP" altLang="en-US" sz="2000"/>
+              <a:t>集群抽樣：層內差異越大越好</a:t>
+            </a:r>
+            <a:endParaRPr lang="en-US" sz="2000" dirty="0"/>
+          </a:p>
+          <a:p>
+            <a:endParaRPr lang="en-US" dirty="0"/>
+          </a:p>
+        </p:txBody>
+      </p:sp>
+      <p:sp>
+        <p:nvSpPr>
+          <p:cNvPr id="4" name="Slide Number Placeholder 3">
+            <a:extLst>
+              <a:ext uri="{FF2B5EF4-FFF2-40B4-BE49-F238E27FC236}">
+                <a16:creationId xmlns:a16="http://schemas.microsoft.com/office/drawing/2014/main" id="{C0711099-E7D7-E12A-B16A-60D9B405F4A8}"/>
+              </a:ext>
+            </a:extLst>
+          </p:cNvPr>
+          <p:cNvSpPr>
+            <a:spLocks noGrp="1"/>
+          </p:cNvSpPr>
+          <p:nvPr>
+            <p:ph type="sldNum" sz="quarter" idx="12"/>
+          </p:nvPr>
+        </p:nvSpPr>
+        <p:spPr/>
+        <p:txBody>
+          <a:bodyPr/>
+          <a:lstStyle/>
+          <a:p>
+            <a:fld id="{34E21383-B02B-694B-B2AD-A967203CDE86}" type="slidenum">
+              <a:rPr lang="en-US" smtClean="0"/>
+              <a:t>28</a:t>
+            </a:fld>
+            <a:endParaRPr lang="en-US"/>
+          </a:p>
+        </p:txBody>
+      </p:sp>
+    </p:spTree>
+    <p:extLst>
+      <p:ext uri="{BB962C8B-B14F-4D97-AF65-F5344CB8AC3E}">
+        <p14:creationId xmlns:p14="http://schemas.microsoft.com/office/powerpoint/2010/main" val="3836505644"/>
       </p:ext>
     </p:extLst>
   </p:cSld>

--- a/投影片/民意與調查Week5.pptx
+++ b/投影片/民意與調查Week5.pptx
@@ -224,7 +224,7 @@
           <a:p>
             <a:fld id="{308549C9-F1F2-A344-9318-AC3AB4654B7E}" type="datetimeFigureOut">
               <a:rPr lang="en-US" smtClean="0"/>
-              <a:t>3/31/26</a:t>
+              <a:t>4/1/26</a:t>
             </a:fld>
             <a:endParaRPr lang="en-US"/>
           </a:p>
@@ -638,7 +638,7 @@
           <a:p>
             <a:fld id="{0ECB731F-7F54-EF4E-BC14-D4454C95FF4D}" type="datetime1">
               <a:rPr lang="en-US" smtClean="0"/>
-              <a:t>3/31/26</a:t>
+              <a:t>4/1/26</a:t>
             </a:fld>
             <a:endParaRPr lang="en-US"/>
           </a:p>
@@ -836,7 +836,7 @@
           <a:p>
             <a:fld id="{5FC0AAEB-F940-CA44-B742-2110711973A7}" type="datetime1">
               <a:rPr lang="en-US" smtClean="0"/>
-              <a:t>3/31/26</a:t>
+              <a:t>4/1/26</a:t>
             </a:fld>
             <a:endParaRPr lang="en-US"/>
           </a:p>
@@ -1044,7 +1044,7 @@
           <a:p>
             <a:fld id="{0C0FC7EA-A73C-4146-9B14-54C11597AA40}" type="datetime1">
               <a:rPr lang="en-US" smtClean="0"/>
-              <a:t>3/31/26</a:t>
+              <a:t>4/1/26</a:t>
             </a:fld>
             <a:endParaRPr lang="en-US"/>
           </a:p>
@@ -1242,7 +1242,7 @@
           <a:p>
             <a:fld id="{24943121-CDD1-174D-9095-06B3974B3CC1}" type="datetime1">
               <a:rPr lang="en-US" smtClean="0"/>
-              <a:t>3/31/26</a:t>
+              <a:t>4/1/26</a:t>
             </a:fld>
             <a:endParaRPr lang="en-US"/>
           </a:p>
@@ -1517,7 +1517,7 @@
           <a:p>
             <a:fld id="{21F2BAF9-EAD3-1641-87AF-ADC71D8222CD}" type="datetime1">
               <a:rPr lang="en-US" smtClean="0"/>
-              <a:t>3/31/26</a:t>
+              <a:t>4/1/26</a:t>
             </a:fld>
             <a:endParaRPr lang="en-US"/>
           </a:p>
@@ -1782,7 +1782,7 @@
           <a:p>
             <a:fld id="{F8F7A49D-4C23-6A49-AF9D-C0E1C1130921}" type="datetime1">
               <a:rPr lang="en-US" smtClean="0"/>
-              <a:t>3/31/26</a:t>
+              <a:t>4/1/26</a:t>
             </a:fld>
             <a:endParaRPr lang="en-US"/>
           </a:p>
@@ -2194,7 +2194,7 @@
           <a:p>
             <a:fld id="{9F516F59-8951-4749-B49C-6C88C0B4B6BD}" type="datetime1">
               <a:rPr lang="en-US" smtClean="0"/>
-              <a:t>3/31/26</a:t>
+              <a:t>4/1/26</a:t>
             </a:fld>
             <a:endParaRPr lang="en-US"/>
           </a:p>
@@ -2335,7 +2335,7 @@
           <a:p>
             <a:fld id="{CA82BBDF-C485-174D-8051-FF3ED3DF33C6}" type="datetime1">
               <a:rPr lang="en-US" smtClean="0"/>
-              <a:t>3/31/26</a:t>
+              <a:t>4/1/26</a:t>
             </a:fld>
             <a:endParaRPr lang="en-US"/>
           </a:p>
@@ -2448,7 +2448,7 @@
           <a:p>
             <a:fld id="{3CA316C8-35EA-C448-A7DB-295F753FB635}" type="datetime1">
               <a:rPr lang="en-US" smtClean="0"/>
-              <a:t>3/31/26</a:t>
+              <a:t>4/1/26</a:t>
             </a:fld>
             <a:endParaRPr lang="en-US"/>
           </a:p>
@@ -2759,7 +2759,7 @@
           <a:p>
             <a:fld id="{3EBA6818-685C-B142-BE10-A6D54A85D7FF}" type="datetime1">
               <a:rPr lang="en-US" smtClean="0"/>
-              <a:t>3/31/26</a:t>
+              <a:t>4/1/26</a:t>
             </a:fld>
             <a:endParaRPr lang="en-US"/>
           </a:p>
@@ -3047,7 +3047,7 @@
           <a:p>
             <a:fld id="{D444D57B-5B66-2F49-AB7C-362DD22B45D8}" type="datetime1">
               <a:rPr lang="en-US" smtClean="0"/>
-              <a:t>3/31/26</a:t>
+              <a:t>4/1/26</a:t>
             </a:fld>
             <a:endParaRPr lang="en-US"/>
           </a:p>
@@ -3288,7 +3288,7 @@
           <a:p>
             <a:fld id="{4025DC53-D744-A54C-8957-51F9F93FF803}" type="datetime1">
               <a:rPr lang="en-US" smtClean="0"/>
-              <a:t>3/31/26</a:t>
+              <a:t>4/1/26</a:t>
             </a:fld>
             <a:endParaRPr lang="en-US"/>
           </a:p>
@@ -3834,8 +3834,8 @@
           </a:p>
         </p:txBody>
       </p:sp>
-      <mc:AlternateContent xmlns:mc="http://schemas.openxmlformats.org/markup-compatibility/2006" xmlns:a14="http://schemas.microsoft.com/office/drawing/2010/main">
-        <mc:Choice Requires="a14">
+      <mc:AlternateContent xmlns:mc="http://schemas.openxmlformats.org/markup-compatibility/2006">
+        <mc:Choice xmlns:a14="http://schemas.microsoft.com/office/drawing/2010/main" Requires="a14">
           <p:sp>
             <p:nvSpPr>
               <p:cNvPr id="3" name="Content Placeholder 2">
@@ -3855,7 +3855,7 @@
             <p:spPr/>
             <p:txBody>
               <a:bodyPr>
-                <a:normAutofit fontScale="92500" lnSpcReduction="10000"/>
+                <a:normAutofit fontScale="85000" lnSpcReduction="10000"/>
               </a:bodyPr>
               <a:lstStyle/>
               <a:p>
@@ -3872,7 +3872,15 @@
                 </a:r>
                 <a:r>
                   <a:rPr lang="zh-TW" altLang="en-US" sz="2000" dirty="0"/>
-                  <a:t>提出不論抽樣設計多麼複雜，只要我們計算出每個樣本的入選機率或者權重，都能得到母體總和的不偏估計。</a:t>
+                  <a:t>提出不論抽樣設計多麼複雜，只要我們計算出每個樣本的入選機率或者權重，</a:t>
+                </a:r>
+                <a:r>
+                  <a:rPr lang="en" altLang="zh-TW" sz="2000" dirty="0"/>
+                  <a:t>H-T </a:t>
+                </a:r>
+                <a:r>
+                  <a:rPr lang="zh-TW" altLang="en-US" sz="2000" dirty="0"/>
+                  <a:t>估計式是「不偏估計」。它在數學上保證了，雖然單次抽樣可能有誤差，但平均而言，它是完美的。都能得到母體總和的不偏估計。</a:t>
                 </a:r>
                 <a:r>
                   <a:rPr lang="en-US" altLang="zh-TW" sz="2000" dirty="0"/>
@@ -3880,7 +3888,7 @@
                 </a:r>
                 <a:r>
                   <a:rPr lang="zh-TW" altLang="en-US" sz="2000" dirty="0"/>
-                  <a:t>估計式：</a:t>
+                  <a:t>估計單一抽樣結果的公式：</a:t>
                 </a:r>
                 <a14:m>
                   <m:oMath xmlns:m="http://schemas.openxmlformats.org/officeDocument/2006/math">
@@ -4077,7 +4085,7 @@
                 </a:r>
                 <a:r>
                   <a:rPr lang="zh-TW" altLang="en-US" sz="2000" dirty="0"/>
-                  <a:t>人，已知有</a:t>
+                  <a:t>人，其中有</a:t>
                 </a:r>
                 <a:r>
                   <a:rPr lang="en-US" altLang="zh-TW" sz="2000" dirty="0"/>
@@ -4109,7 +4117,7 @@
                 </a:r>
                 <a:r>
                   <a:rPr lang="zh-TW" altLang="en-US" sz="2000" dirty="0"/>
-                  <a:t>萬，如果只能抽出一位，請問年薪的估計是多少？如果抽中年薪</a:t>
+                  <a:t>萬，如果抽中年薪</a:t>
                 </a:r>
                 <a:r>
                   <a:rPr lang="en-US" altLang="zh-TW" sz="2000" dirty="0"/>
@@ -4175,6 +4183,24 @@
                         <a:latin typeface="Cambria Math" panose="02040503050406030204" pitchFamily="18" charset="0"/>
                       </a:rPr>
                       <m:t>=1000</m:t>
+                    </m:r>
+                    <m:r>
+                      <a:rPr lang="zh-TW" altLang="en-US" sz="2000" i="1">
+                        <a:latin typeface="Cambria Math" panose="02040503050406030204" pitchFamily="18" charset="0"/>
+                      </a:rPr>
+                      <m:t>萬</m:t>
+                    </m:r>
+                    <m:r>
+                      <a:rPr lang="zh-TW" altLang="en-US" sz="2000" i="1">
+                        <a:latin typeface="Cambria Math" panose="02040503050406030204" pitchFamily="18" charset="0"/>
+                      </a:rPr>
+                      <m:t>，平均是</m:t>
+                    </m:r>
+                    <m:r>
+                      <a:rPr lang="en-US" altLang="zh-TW" sz="2000" b="0" i="1" smtClean="0">
+                        <a:latin typeface="Cambria Math" panose="02040503050406030204" pitchFamily="18" charset="0"/>
+                      </a:rPr>
+                      <m:t>100</m:t>
                     </m:r>
                     <m:r>
                       <a:rPr lang="zh-TW" altLang="en-US" sz="2000" i="1">
@@ -4253,7 +4279,89 @@
                       <a:rPr lang="zh-TW" altLang="en-US" sz="2000" i="1">
                         <a:latin typeface="Cambria Math" panose="02040503050406030204" pitchFamily="18" charset="0"/>
                       </a:rPr>
-                      <m:t>萬。</m:t>
+                      <m:t>萬</m:t>
+                    </m:r>
+                    <m:r>
+                      <a:rPr lang="zh-TW" altLang="en-US" sz="2000" i="1">
+                        <a:latin typeface="Cambria Math" panose="02040503050406030204" pitchFamily="18" charset="0"/>
+                      </a:rPr>
+                      <m:t>，平均是</m:t>
+                    </m:r>
+                    <m:r>
+                      <a:rPr lang="en-US" altLang="zh-TW" sz="2000" b="0" i="1" smtClean="0">
+                        <a:latin typeface="Cambria Math" panose="02040503050406030204" pitchFamily="18" charset="0"/>
+                      </a:rPr>
+                      <m:t>20</m:t>
+                    </m:r>
+                    <m:r>
+                      <a:rPr lang="zh-TW" altLang="en-US" sz="2000" i="1">
+                        <a:latin typeface="Cambria Math" panose="02040503050406030204" pitchFamily="18" charset="0"/>
+                      </a:rPr>
+                      <m:t>萬</m:t>
+                    </m:r>
+                    <m:r>
+                      <a:rPr lang="zh-TW" altLang="en-US" sz="2000" i="1">
+                        <a:latin typeface="Cambria Math" panose="02040503050406030204" pitchFamily="18" charset="0"/>
+                      </a:rPr>
+                      <m:t>。</m:t>
+                    </m:r>
+                  </m:oMath>
+                </a14:m>
+                <a:endParaRPr lang="en-US" altLang="zh-TW" sz="2000" dirty="0"/>
+              </a:p>
+              <a:p>
+                <a:pPr>
+                  <a:lnSpc>
+                    <a:spcPct val="150000"/>
+                  </a:lnSpc>
+                  <a:buFont typeface="Wingdings" pitchFamily="2" charset="2"/>
+                  <a:buChar char="l"/>
+                </a:pPr>
+                <a:r>
+                  <a:rPr lang="zh-TW" altLang="en-US" sz="2000" dirty="0"/>
+                  <a:t>「期望值是一種</a:t>
+                </a:r>
+                <a:r>
+                  <a:rPr lang="en-US" altLang="zh-TW" sz="2000" dirty="0"/>
+                  <a:t>『</a:t>
+                </a:r>
+                <a:r>
+                  <a:rPr lang="zh-TW" altLang="en-US" sz="2000" dirty="0"/>
+                  <a:t>平均來說會發生什麼事</a:t>
+                </a:r>
+                <a:r>
+                  <a:rPr lang="en-US" altLang="zh-TW" sz="2000" dirty="0"/>
+                  <a:t>』</a:t>
+                </a:r>
+                <a:r>
+                  <a:rPr lang="zh-TW" altLang="en-US" sz="2000" dirty="0"/>
+                  <a:t>的預測。」</a:t>
+                </a:r>
+                <a14:m>
+                  <m:oMath xmlns:m="http://schemas.openxmlformats.org/officeDocument/2006/math">
+                    <m:r>
+                      <a:rPr lang="en-US" altLang="zh-TW" sz="2000" b="0" i="0" smtClean="0">
+                        <a:latin typeface="Cambria Math" panose="02040503050406030204" pitchFamily="18" charset="0"/>
+                      </a:rPr>
+                      <m:t>10</m:t>
+                    </m:r>
+                    <m:r>
+                      <a:rPr lang="zh-TW" altLang="en-US" sz="2000" i="1">
+                        <a:latin typeface="Cambria Math" panose="02040503050406030204" pitchFamily="18" charset="0"/>
+                      </a:rPr>
+                      <m:t>人</m:t>
+                    </m:r>
+                    <m:r>
+                      <a:rPr lang="zh-TW" altLang="en-US" sz="2000" i="1" smtClean="0">
+                        <a:latin typeface="Cambria Math" panose="02040503050406030204" pitchFamily="18" charset="0"/>
+                      </a:rPr>
+                      <m:t>總</m:t>
+                    </m:r>
+                    <m:r>
+                      <a:rPr lang="zh-TW" altLang="en-US" sz="2000" i="1">
+                        <a:latin typeface="Cambria Math" panose="02040503050406030204" pitchFamily="18" charset="0"/>
+                      </a:rPr>
+                      <m:t>收入的</m:t>
                     </m:r>
                     <m:r>
                       <a:rPr lang="zh-TW" altLang="en-US" sz="2000" i="1" smtClean="0">
@@ -4407,7 +4515,7 @@
                 </a:r>
                 <a:r>
                   <a:rPr lang="zh-TW" altLang="en-US" sz="2000" dirty="0"/>
-                  <a:t>算出的總收入會等於母體。期望值寫成：</a:t>
+                  <a:t>算出的總收入會等於母體：</a:t>
                 </a:r>
                 <a14:m>
                   <m:oMath xmlns:m="http://schemas.openxmlformats.org/officeDocument/2006/math">
@@ -4620,7 +4728,7 @@
             </p:txBody>
           </p:sp>
         </mc:Choice>
-        <mc:Fallback xmlns="">
+        <mc:Fallback>
           <p:sp>
             <p:nvSpPr>
               <p:cNvPr id="3" name="Content Placeholder 2">
@@ -4641,7 +4749,7 @@
               <a:blipFill>
                 <a:blip r:embed="rId2"/>
                 <a:stretch>
-                  <a:fillRect l="-1086" r="-603" b="-8721"/>
+                  <a:fillRect l="-362" r="-483" b="-8721"/>
                 </a:stretch>
               </a:blipFill>
             </p:spPr>
@@ -4650,7 +4758,7 @@
               <a:lstStyle/>
               <a:p>
                 <a:r>
-                  <a:rPr lang="en-US">
+                  <a:rPr lang="zh-TW" altLang="en-US">
                     <a:noFill/>
                   </a:rPr>
                   <a:t> </a:t>
@@ -4748,8 +4856,8 @@
           </a:p>
         </p:txBody>
       </p:sp>
-      <mc:AlternateContent xmlns:mc="http://schemas.openxmlformats.org/markup-compatibility/2006" xmlns:a14="http://schemas.microsoft.com/office/drawing/2010/main">
-        <mc:Choice Requires="a14">
+      <mc:AlternateContent xmlns:mc="http://schemas.openxmlformats.org/markup-compatibility/2006">
+        <mc:Choice xmlns:a14="http://schemas.microsoft.com/office/drawing/2010/main" Requires="a14">
           <p:sp>
             <p:nvSpPr>
               <p:cNvPr id="3" name="內容版面配置區 2">
@@ -4769,7 +4877,7 @@
             <p:spPr/>
             <p:txBody>
               <a:bodyPr>
-                <a:normAutofit lnSpcReduction="10000"/>
+                <a:normAutofit fontScale="85000" lnSpcReduction="20000"/>
               </a:bodyPr>
               <a:lstStyle/>
               <a:p>
@@ -4780,7 +4888,7 @@
                 </a:pPr>
                 <a:r>
                   <a:rPr kumimoji="1" lang="zh-TW" altLang="en-US" sz="2000" dirty="0"/>
-                  <a:t>如果已經知道收入高的人的中選機率是收入低的人的</a:t>
+                  <a:t>假設收入高的人的中選機率是收入低的人的</a:t>
                 </a:r>
                 <a:r>
                   <a:rPr kumimoji="1" lang="en-US" altLang="zh-TW" sz="2000" dirty="0"/>
@@ -4788,7 +4896,7 @@
                 </a:r>
                 <a:r>
                   <a:rPr kumimoji="1" lang="zh-TW" altLang="en-US" sz="2000" dirty="0"/>
-                  <a:t>倍，只抽出</a:t>
+                  <a:t>倍（例如他們比較願意回答收入問題），只抽出</a:t>
                 </a:r>
                 <a:r>
                   <a:rPr kumimoji="1" lang="en-US" altLang="zh-TW" sz="2000" dirty="0"/>
@@ -4873,6 +4981,92 @@
                     </m:f>
                   </m:oMath>
                 </a14:m>
+                <a:r>
+                  <a:rPr kumimoji="1" lang="zh-TW" altLang="en-US" sz="2000" dirty="0"/>
+                  <a:t>。高收入的人中選機率</a:t>
+                </a:r>
+                <a14:m>
+                  <m:oMath xmlns:m="http://schemas.openxmlformats.org/officeDocument/2006/math">
+                    <m:f>
+                      <m:fPr>
+                        <m:ctrlPr>
+                          <a:rPr kumimoji="1" lang="en-US" altLang="zh-TW" sz="2000" i="1" smtClean="0">
+                            <a:latin typeface="Cambria Math" panose="02040503050406030204" pitchFamily="18" charset="0"/>
+                          </a:rPr>
+                        </m:ctrlPr>
+                      </m:fPr>
+                      <m:num>
+                        <m:r>
+                          <a:rPr kumimoji="1" lang="en-US" altLang="zh-TW" sz="2000" b="0" i="1" smtClean="0">
+                            <a:latin typeface="Cambria Math" panose="02040503050406030204" pitchFamily="18" charset="0"/>
+                          </a:rPr>
+                          <m:t>4</m:t>
+                        </m:r>
+                      </m:num>
+                      <m:den>
+                        <m:r>
+                          <a:rPr kumimoji="1" lang="en-US" altLang="zh-TW" sz="2000" b="0" i="1" smtClean="0">
+                            <a:latin typeface="Cambria Math" panose="02040503050406030204" pitchFamily="18" charset="0"/>
+                          </a:rPr>
+                          <m:t>34</m:t>
+                        </m:r>
+                      </m:den>
+                    </m:f>
+                  </m:oMath>
+                </a14:m>
+                <a:r>
+                  <a:rPr kumimoji="1" lang="zh-TW" altLang="en-US" sz="2000" dirty="0"/>
+                  <a:t>，低收入的人的機率</a:t>
+                </a:r>
+                <a14:m>
+                  <m:oMath xmlns:m="http://schemas.openxmlformats.org/officeDocument/2006/math">
+                    <m:f>
+                      <m:fPr>
+                        <m:ctrlPr>
+                          <a:rPr kumimoji="1" lang="en-US" altLang="zh-TW" sz="2000" i="1">
+                            <a:latin typeface="Cambria Math" panose="02040503050406030204" pitchFamily="18" charset="0"/>
+                          </a:rPr>
+                        </m:ctrlPr>
+                      </m:fPr>
+                      <m:num>
+                        <m:r>
+                          <a:rPr kumimoji="1" lang="en-US" altLang="zh-TW" sz="2000" i="1">
+                            <a:latin typeface="Cambria Math" panose="02040503050406030204" pitchFamily="18" charset="0"/>
+                          </a:rPr>
+                          <m:t>1</m:t>
+                        </m:r>
+                      </m:num>
+                      <m:den>
+                        <m:r>
+                          <a:rPr kumimoji="1" lang="en-US" altLang="zh-TW" sz="2000" i="1">
+                            <a:latin typeface="Cambria Math" panose="02040503050406030204" pitchFamily="18" charset="0"/>
+                          </a:rPr>
+                          <m:t>34</m:t>
+                        </m:r>
+                      </m:den>
+                    </m:f>
+                  </m:oMath>
+                </a14:m>
+                <a:r>
+                  <a:rPr kumimoji="1" lang="zh-TW" altLang="en-US" sz="2000" dirty="0"/>
+                  <a:t>。倒數分別是</a:t>
+                </a:r>
+                <a:r>
+                  <a:rPr kumimoji="1" lang="en-US" altLang="zh-TW" sz="2000" dirty="0"/>
+                  <a:t>8.5</a:t>
+                </a:r>
+                <a:r>
+                  <a:rPr kumimoji="1" lang="zh-TW" altLang="en-US" sz="2000" dirty="0"/>
+                  <a:t>、</a:t>
+                </a:r>
+                <a:r>
+                  <a:rPr kumimoji="1" lang="en-US" altLang="zh-TW" sz="2000" dirty="0"/>
+                  <a:t>34</a:t>
+                </a:r>
+                <a:r>
+                  <a:rPr kumimoji="1" lang="zh-TW" altLang="en-US" sz="2000" dirty="0"/>
+                  <a:t>。</a:t>
+                </a:r>
                 <a:endParaRPr kumimoji="1" lang="en-US" altLang="zh-TW" sz="2000" dirty="0"/>
               </a:p>
               <a:p>
@@ -4883,7 +5077,7 @@
                 </a:pPr>
                 <a:r>
                   <a:rPr kumimoji="1" lang="zh-TW" altLang="en-US" sz="2000" dirty="0"/>
-                  <a:t>期望值：</a:t>
+                  <a:t>期望值總和：</a:t>
                 </a:r>
                 <a:r>
                   <a:rPr lang="zh-TW" altLang="en-US" sz="2000" dirty="0"/>
@@ -5337,6 +5531,35 @@
                 </a:pPr>
                 <a:r>
                   <a:rPr kumimoji="1" lang="zh-TW" altLang="en-US" sz="2000" dirty="0"/>
+                  <a:t>期望平均值則是</a:t>
+                </a:r>
+                <a14:m>
+                  <m:oMath xmlns:m="http://schemas.openxmlformats.org/officeDocument/2006/math">
+                    <m:r>
+                      <a:rPr kumimoji="1" lang="en-US" altLang="zh-TW" sz="2000" b="0" i="1" smtClean="0">
+                        <a:latin typeface="Cambria Math" panose="02040503050406030204" pitchFamily="18" charset="0"/>
+                      </a:rPr>
+                      <m:t>0.8</m:t>
+                    </m:r>
+                    <m:r>
+                      <a:rPr kumimoji="1" lang="en-US" altLang="zh-TW" sz="2000" b="0" i="1" smtClean="0">
+                        <a:latin typeface="Cambria Math" panose="02040503050406030204" pitchFamily="18" charset="0"/>
+                        <a:ea typeface="Cambria Math" panose="02040503050406030204" pitchFamily="18" charset="0"/>
+                      </a:rPr>
+                      <m:t>×100+0.2×20=84</m:t>
+                    </m:r>
+                  </m:oMath>
+                </a14:m>
+                <a:endParaRPr kumimoji="1" lang="en-US" altLang="zh-TW" sz="2000" dirty="0"/>
+              </a:p>
+              <a:p>
+                <a:pPr>
+                  <a:lnSpc>
+                    <a:spcPct val="150000"/>
+                  </a:lnSpc>
+                </a:pPr>
+                <a:r>
+                  <a:rPr kumimoji="1" lang="zh-TW" altLang="en-US" sz="2000" dirty="0"/>
                   <a:t>如果樣本從</a:t>
                 </a:r>
                 <a:r>
@@ -5433,15 +5656,7 @@
                 </a:r>
                 <a:r>
                   <a:rPr kumimoji="1" lang="zh-TW" altLang="en-US" sz="2000" dirty="0"/>
-                  <a:t>人可能是一個高薪一個低薪、兩個高薪、兩個低薪，分別計算這三種組合的期望值，</a:t>
-                </a:r>
-                <a:r>
-                  <a:rPr kumimoji="1" lang="zh-TW" altLang="en-US" sz="2000"/>
-                  <a:t>然後再加權平均</a:t>
-                </a:r>
-                <a:r>
-                  <a:rPr kumimoji="1" lang="zh-TW" altLang="en-US" sz="2000" dirty="0"/>
-                  <a:t>，會得到</a:t>
+                  <a:t>人可能是一個高薪一個低薪、兩個高薪、兩個低薪，分別計算這三種組合的期望值，然後再加權平均，會得到</a:t>
                 </a:r>
                 <a:r>
                   <a:rPr kumimoji="1" lang="en-US" altLang="zh-TW" sz="2000" dirty="0"/>
@@ -5475,7 +5690,7 @@
             </p:txBody>
           </p:sp>
         </mc:Choice>
-        <mc:Fallback xmlns="">
+        <mc:Fallback>
           <p:sp>
             <p:nvSpPr>
               <p:cNvPr id="3" name="內容版面配置區 2">
@@ -5496,7 +5711,7 @@
               <a:blipFill>
                 <a:blip r:embed="rId2"/>
                 <a:stretch>
-                  <a:fillRect l="-603" r="-2171"/>
+                  <a:fillRect l="-362" r="-1809" b="-291"/>
                 </a:stretch>
               </a:blipFill>
             </p:spPr>
@@ -5657,1541 +5872,3291 @@
           </a:p>
         </p:txBody>
       </p:sp>
-      <p:graphicFrame>
-        <p:nvGraphicFramePr>
-          <p:cNvPr id="3" name="表格 2">
-            <a:extLst>
-              <a:ext uri="{FF2B5EF4-FFF2-40B4-BE49-F238E27FC236}">
-                <a16:creationId xmlns:a16="http://schemas.microsoft.com/office/drawing/2014/main" id="{58ABDC07-D2D8-76EB-255B-5B03BE0D1E35}"/>
-              </a:ext>
-            </a:extLst>
-          </p:cNvPr>
-          <p:cNvGraphicFramePr>
-            <a:graphicFrameLocks noGrp="1"/>
-          </p:cNvGraphicFramePr>
-          <p:nvPr>
-            <p:extLst>
-              <p:ext uri="{D42A27DB-BD31-4B8C-83A1-F6EECF244321}">
-                <p14:modId xmlns:p14="http://schemas.microsoft.com/office/powerpoint/2010/main" val="3756962315"/>
-              </p:ext>
-            </p:extLst>
-          </p:nvPr>
-        </p:nvGraphicFramePr>
-        <p:xfrm>
-          <a:off x="1425039" y="2553494"/>
-          <a:ext cx="9262754" cy="3048000"/>
-        </p:xfrm>
-        <a:graphic>
-          <a:graphicData uri="http://schemas.openxmlformats.org/drawingml/2006/table">
-            <a:tbl>
-              <a:tblPr/>
-              <a:tblGrid>
-                <a:gridCol w="1967260">
-                  <a:extLst>
-                    <a:ext uri="{9D8B030D-6E8A-4147-A177-3AD203B41FA5}">
-                      <a16:colId xmlns:a16="http://schemas.microsoft.com/office/drawing/2014/main" val="1092537034"/>
-                    </a:ext>
-                  </a:extLst>
-                </a:gridCol>
-                <a:gridCol w="2514735">
-                  <a:extLst>
-                    <a:ext uri="{9D8B030D-6E8A-4147-A177-3AD203B41FA5}">
-                      <a16:colId xmlns:a16="http://schemas.microsoft.com/office/drawing/2014/main" val="4071730486"/>
-                    </a:ext>
-                  </a:extLst>
-                </a:gridCol>
-                <a:gridCol w="2514735">
-                  <a:extLst>
-                    <a:ext uri="{9D8B030D-6E8A-4147-A177-3AD203B41FA5}">
-                      <a16:colId xmlns:a16="http://schemas.microsoft.com/office/drawing/2014/main" val="555145253"/>
-                    </a:ext>
-                  </a:extLst>
-                </a:gridCol>
-                <a:gridCol w="2266024">
-                  <a:extLst>
-                    <a:ext uri="{9D8B030D-6E8A-4147-A177-3AD203B41FA5}">
-                      <a16:colId xmlns:a16="http://schemas.microsoft.com/office/drawing/2014/main" val="3059292820"/>
-                    </a:ext>
-                  </a:extLst>
-                </a:gridCol>
-              </a:tblGrid>
-              <a:tr h="0">
-                <a:tc>
-                  <a:txBody>
-                    <a:bodyPr/>
-                    <a:lstStyle/>
-                    <a:p>
-                      <a:pPr rtl="0"/>
-                      <a:r>
-                        <a:rPr lang="zh-TW" altLang="en-US" sz="2000" b="1" dirty="0">
-                          <a:solidFill>
-                            <a:srgbClr val="1F1F1F"/>
-                          </a:solidFill>
-                          <a:effectLst/>
-                          <a:latin typeface="Google Sans Text"/>
-                        </a:rPr>
-                        <a:t>組合</a:t>
-                      </a:r>
-                      <a:endParaRPr lang="zh-TW" altLang="en-US" sz="2000" dirty="0">
-                        <a:solidFill>
-                          <a:srgbClr val="1F1F1F"/>
-                        </a:solidFill>
-                        <a:effectLst/>
-                        <a:latin typeface="Google Sans Text"/>
-                      </a:endParaRPr>
-                    </a:p>
-                  </a:txBody>
-                  <a:tcPr marR="114300" marT="152400" marB="152400" anchor="ctr">
-                    <a:lnL w="9525" cap="flat" cmpd="sng" algn="ctr">
-                      <a:solidFill>
-                        <a:schemeClr val="bg1"/>
-                      </a:solidFill>
-                      <a:prstDash val="solid"/>
-                      <a:round/>
-                      <a:headEnd type="none" w="med" len="med"/>
-                      <a:tailEnd type="none" w="med" len="med"/>
-                    </a:lnL>
-                    <a:lnR w="9525" cap="flat" cmpd="sng" algn="ctr">
-                      <a:solidFill>
-                        <a:schemeClr val="bg1"/>
-                      </a:solidFill>
-                      <a:prstDash val="solid"/>
-                      <a:round/>
-                      <a:headEnd type="none" w="med" len="med"/>
-                      <a:tailEnd type="none" w="med" len="med"/>
-                    </a:lnR>
-                    <a:lnT w="9525" cap="flat" cmpd="sng" algn="ctr">
-                      <a:solidFill>
-                        <a:schemeClr val="bg1"/>
-                      </a:solidFill>
-                      <a:prstDash val="solid"/>
-                      <a:round/>
-                      <a:headEnd type="none" w="med" len="med"/>
-                      <a:tailEnd type="none" w="med" len="med"/>
-                    </a:lnT>
-                    <a:lnB w="9525" cap="flat" cmpd="sng" algn="ctr">
-                      <a:solidFill>
-                        <a:schemeClr val="bg1"/>
-                      </a:solidFill>
-                      <a:prstDash val="solid"/>
-                      <a:round/>
-                      <a:headEnd type="none" w="med" len="med"/>
-                      <a:tailEnd type="none" w="med" len="med"/>
-                    </a:lnB>
-                    <a:noFill/>
-                  </a:tcPr>
-                </a:tc>
-                <a:tc>
-                  <a:txBody>
-                    <a:bodyPr/>
-                    <a:lstStyle/>
-                    <a:p>
-                      <a:pPr rtl="0"/>
-                      <a:r>
-                        <a:rPr lang="en" sz="2000" b="1">
-                          <a:solidFill>
-                            <a:srgbClr val="1F1F1F"/>
-                          </a:solidFill>
-                          <a:effectLst/>
-                          <a:latin typeface="Google Sans Text"/>
-                        </a:rPr>
-                        <a:t>H-T </a:t>
-                      </a:r>
-                      <a:r>
-                        <a:rPr lang="zh-TW" altLang="en-US" sz="2000" b="1">
-                          <a:solidFill>
-                            <a:srgbClr val="1F1F1F"/>
-                          </a:solidFill>
-                          <a:effectLst/>
-                          <a:latin typeface="Google Sans Text"/>
-                        </a:rPr>
-                        <a:t>估計值 </a:t>
-                      </a:r>
-                      <a:r>
-                        <a:rPr lang="en-US" altLang="zh-TW" sz="2000" b="1">
-                          <a:solidFill>
-                            <a:srgbClr val="1F1F1F"/>
-                          </a:solidFill>
-                          <a:effectLst/>
-                          <a:latin typeface="Google Sans Text"/>
-                        </a:rPr>
-                        <a:t>(</a:t>
-                      </a:r>
-                      <a:r>
-                        <a:rPr lang="en" sz="2000" b="1">
-                          <a:solidFill>
-                            <a:srgbClr val="1F1F1F"/>
-                          </a:solidFill>
-                          <a:effectLst/>
-                          <a:latin typeface="Google Sans Text"/>
-                        </a:rPr>
-                        <a:t>Y^)</a:t>
-                      </a:r>
-                      <a:endParaRPr lang="en" sz="2000">
-                        <a:solidFill>
-                          <a:srgbClr val="1F1F1F"/>
-                        </a:solidFill>
-                        <a:effectLst/>
-                        <a:latin typeface="Google Sans Text"/>
-                      </a:endParaRPr>
-                    </a:p>
-                  </a:txBody>
-                  <a:tcPr marR="114300" marT="152400" marB="152400" anchor="ctr">
-                    <a:lnL w="9525" cap="flat" cmpd="sng" algn="ctr">
-                      <a:solidFill>
-                        <a:schemeClr val="bg1"/>
-                      </a:solidFill>
-                      <a:prstDash val="solid"/>
-                      <a:round/>
-                      <a:headEnd type="none" w="med" len="med"/>
-                      <a:tailEnd type="none" w="med" len="med"/>
-                    </a:lnL>
-                    <a:lnR w="9525" cap="flat" cmpd="sng" algn="ctr">
-                      <a:solidFill>
-                        <a:schemeClr val="bg1"/>
-                      </a:solidFill>
-                      <a:prstDash val="solid"/>
-                      <a:round/>
-                      <a:headEnd type="none" w="med" len="med"/>
-                      <a:tailEnd type="none" w="med" len="med"/>
-                    </a:lnR>
-                    <a:lnT w="9525" cap="flat" cmpd="sng" algn="ctr">
-                      <a:solidFill>
-                        <a:schemeClr val="bg1"/>
-                      </a:solidFill>
-                      <a:prstDash val="solid"/>
-                      <a:round/>
-                      <a:headEnd type="none" w="med" len="med"/>
-                      <a:tailEnd type="none" w="med" len="med"/>
-                    </a:lnT>
-                    <a:lnB w="9525" cap="flat" cmpd="sng" algn="ctr">
-                      <a:solidFill>
-                        <a:schemeClr val="bg1"/>
-                      </a:solidFill>
-                      <a:prstDash val="solid"/>
-                      <a:round/>
-                      <a:headEnd type="none" w="med" len="med"/>
-                      <a:tailEnd type="none" w="med" len="med"/>
-                    </a:lnB>
-                    <a:noFill/>
-                  </a:tcPr>
-                </a:tc>
-                <a:tc>
-                  <a:txBody>
-                    <a:bodyPr/>
-                    <a:lstStyle/>
-                    <a:p>
-                      <a:pPr rtl="0"/>
-                      <a:r>
-                        <a:rPr lang="zh-TW" altLang="en-US" sz="2000" b="1">
-                          <a:solidFill>
-                            <a:srgbClr val="1F1F1F"/>
-                          </a:solidFill>
-                          <a:effectLst/>
-                          <a:latin typeface="Google Sans Text"/>
-                        </a:rPr>
-                        <a:t>發生機率 </a:t>
-                      </a:r>
-                      <a:r>
-                        <a:rPr lang="en-US" altLang="zh-TW" sz="2000" b="1">
-                          <a:solidFill>
-                            <a:srgbClr val="1F1F1F"/>
-                          </a:solidFill>
-                          <a:effectLst/>
-                          <a:latin typeface="Google Sans Text"/>
-                        </a:rPr>
-                        <a:t>(</a:t>
-                      </a:r>
-                      <a:r>
-                        <a:rPr lang="en" sz="2000" b="1">
-                          <a:solidFill>
-                            <a:srgbClr val="1F1F1F"/>
-                          </a:solidFill>
-                          <a:effectLst/>
-                          <a:latin typeface="Google Sans Text"/>
-                        </a:rPr>
-                        <a:t>P)</a:t>
-                      </a:r>
-                      <a:endParaRPr lang="en" sz="2000">
-                        <a:solidFill>
-                          <a:srgbClr val="1F1F1F"/>
-                        </a:solidFill>
-                        <a:effectLst/>
-                        <a:latin typeface="Google Sans Text"/>
-                      </a:endParaRPr>
-                    </a:p>
-                  </a:txBody>
-                  <a:tcPr marR="114300" marT="152400" marB="152400" anchor="ctr">
-                    <a:lnL w="9525" cap="flat" cmpd="sng" algn="ctr">
-                      <a:solidFill>
-                        <a:schemeClr val="bg1"/>
-                      </a:solidFill>
-                      <a:prstDash val="solid"/>
-                      <a:round/>
-                      <a:headEnd type="none" w="med" len="med"/>
-                      <a:tailEnd type="none" w="med" len="med"/>
-                    </a:lnL>
-                    <a:lnR w="9525" cap="flat" cmpd="sng" algn="ctr">
-                      <a:solidFill>
-                        <a:schemeClr val="bg1"/>
-                      </a:solidFill>
-                      <a:prstDash val="solid"/>
-                      <a:round/>
-                      <a:headEnd type="none" w="med" len="med"/>
-                      <a:tailEnd type="none" w="med" len="med"/>
-                    </a:lnR>
-                    <a:lnT w="9525" cap="flat" cmpd="sng" algn="ctr">
-                      <a:solidFill>
-                        <a:schemeClr val="bg1"/>
-                      </a:solidFill>
-                      <a:prstDash val="solid"/>
-                      <a:round/>
-                      <a:headEnd type="none" w="med" len="med"/>
-                      <a:tailEnd type="none" w="med" len="med"/>
-                    </a:lnT>
-                    <a:lnB w="9525" cap="flat" cmpd="sng" algn="ctr">
-                      <a:solidFill>
-                        <a:schemeClr val="bg1"/>
-                      </a:solidFill>
-                      <a:prstDash val="solid"/>
-                      <a:round/>
-                      <a:headEnd type="none" w="med" len="med"/>
-                      <a:tailEnd type="none" w="med" len="med"/>
-                    </a:lnB>
-                    <a:noFill/>
-                  </a:tcPr>
-                </a:tc>
-                <a:tc>
-                  <a:txBody>
-                    <a:bodyPr/>
-                    <a:lstStyle/>
-                    <a:p>
-                      <a:pPr rtl="0"/>
-                      <a:r>
-                        <a:rPr lang="zh-TW" altLang="en-US" sz="2000" b="1">
-                          <a:solidFill>
-                            <a:srgbClr val="1F1F1F"/>
-                          </a:solidFill>
-                          <a:effectLst/>
-                          <a:latin typeface="Google Sans Text"/>
-                        </a:rPr>
-                        <a:t>加權結果 </a:t>
-                      </a:r>
-                      <a:r>
-                        <a:rPr lang="en-US" altLang="zh-TW" sz="2000" b="1">
-                          <a:solidFill>
-                            <a:srgbClr val="1F1F1F"/>
-                          </a:solidFill>
-                          <a:effectLst/>
-                          <a:latin typeface="Google Sans Text"/>
-                        </a:rPr>
-                        <a:t>(</a:t>
-                      </a:r>
-                      <a:r>
-                        <a:rPr lang="en" sz="2000" b="1">
-                          <a:solidFill>
-                            <a:srgbClr val="1F1F1F"/>
-                          </a:solidFill>
-                          <a:effectLst/>
-                          <a:latin typeface="Google Sans Text"/>
-                        </a:rPr>
-                        <a:t>Y^×P)</a:t>
-                      </a:r>
-                      <a:endParaRPr lang="en" sz="2000">
-                        <a:solidFill>
-                          <a:srgbClr val="1F1F1F"/>
-                        </a:solidFill>
-                        <a:effectLst/>
-                        <a:latin typeface="Google Sans Text"/>
-                      </a:endParaRPr>
-                    </a:p>
-                  </a:txBody>
-                  <a:tcPr marT="152400" marB="152400" anchor="ctr">
-                    <a:lnL w="9525" cap="flat" cmpd="sng" algn="ctr">
-                      <a:solidFill>
-                        <a:schemeClr val="bg1"/>
-                      </a:solidFill>
-                      <a:prstDash val="solid"/>
-                      <a:round/>
-                      <a:headEnd type="none" w="med" len="med"/>
-                      <a:tailEnd type="none" w="med" len="med"/>
-                    </a:lnL>
-                    <a:lnR w="9525" cap="flat" cmpd="sng" algn="ctr">
-                      <a:solidFill>
-                        <a:schemeClr val="bg1"/>
-                      </a:solidFill>
-                      <a:prstDash val="solid"/>
-                      <a:round/>
-                      <a:headEnd type="none" w="med" len="med"/>
-                      <a:tailEnd type="none" w="med" len="med"/>
-                    </a:lnR>
-                    <a:lnT w="9525" cap="flat" cmpd="sng" algn="ctr">
-                      <a:solidFill>
-                        <a:schemeClr val="bg1"/>
-                      </a:solidFill>
-                      <a:prstDash val="solid"/>
-                      <a:round/>
-                      <a:headEnd type="none" w="med" len="med"/>
-                      <a:tailEnd type="none" w="med" len="med"/>
-                    </a:lnT>
-                    <a:lnB w="9525" cap="flat" cmpd="sng" algn="ctr">
-                      <a:solidFill>
-                        <a:schemeClr val="bg1"/>
-                      </a:solidFill>
-                      <a:prstDash val="solid"/>
-                      <a:round/>
-                      <a:headEnd type="none" w="med" len="med"/>
-                      <a:tailEnd type="none" w="med" len="med"/>
-                    </a:lnB>
-                    <a:noFill/>
-                  </a:tcPr>
-                </a:tc>
+      <mc:AlternateContent xmlns:mc="http://schemas.openxmlformats.org/markup-compatibility/2006">
+        <mc:Choice xmlns:a14="http://schemas.microsoft.com/office/drawing/2010/main" Requires="a14">
+          <p:graphicFrame>
+            <p:nvGraphicFramePr>
+              <p:cNvPr id="3" name="表格 2">
                 <a:extLst>
-                  <a:ext uri="{0D108BD9-81ED-4DB2-BD59-A6C34878D82A}">
-                    <a16:rowId xmlns:a16="http://schemas.microsoft.com/office/drawing/2014/main" val="1439181357"/>
+                  <a:ext uri="{FF2B5EF4-FFF2-40B4-BE49-F238E27FC236}">
+                    <a16:creationId xmlns:a16="http://schemas.microsoft.com/office/drawing/2014/main" id="{58ABDC07-D2D8-76EB-255B-5B03BE0D1E35}"/>
                   </a:ext>
                 </a:extLst>
-              </a:tr>
-              <a:tr h="0">
-                <a:tc>
-                  <a:txBody>
-                    <a:bodyPr/>
-                    <a:lstStyle/>
-                    <a:p>
-                      <a:pPr rtl="0"/>
-                      <a:r>
-                        <a:rPr lang="en-US" altLang="zh-TW" sz="2000" b="1" dirty="0">
+              </p:cNvPr>
+              <p:cNvGraphicFramePr>
+                <a:graphicFrameLocks noGrp="1"/>
+              </p:cNvGraphicFramePr>
+              <p:nvPr>
+                <p:extLst>
+                  <p:ext uri="{D42A27DB-BD31-4B8C-83A1-F6EECF244321}">
+                    <p14:modId xmlns:p14="http://schemas.microsoft.com/office/powerpoint/2010/main" val="2619474064"/>
+                  </p:ext>
+                </p:extLst>
+              </p:nvPr>
+            </p:nvGraphicFramePr>
+            <p:xfrm>
+              <a:off x="1425039" y="2553494"/>
+              <a:ext cx="9262754" cy="3659886"/>
+            </p:xfrm>
+            <a:graphic>
+              <a:graphicData uri="http://schemas.openxmlformats.org/drawingml/2006/table">
+                <a:tbl>
+                  <a:tblPr/>
+                  <a:tblGrid>
+                    <a:gridCol w="1288344">
+                      <a:extLst>
+                        <a:ext uri="{9D8B030D-6E8A-4147-A177-3AD203B41FA5}">
+                          <a16:colId xmlns:a16="http://schemas.microsoft.com/office/drawing/2014/main" val="1092537034"/>
+                        </a:ext>
+                      </a:extLst>
+                    </a:gridCol>
+                    <a:gridCol w="2027582">
+                      <a:extLst>
+                        <a:ext uri="{9D8B030D-6E8A-4147-A177-3AD203B41FA5}">
+                          <a16:colId xmlns:a16="http://schemas.microsoft.com/office/drawing/2014/main" val="4071730486"/>
+                        </a:ext>
+                      </a:extLst>
+                    </a:gridCol>
+                    <a:gridCol w="3680804">
+                      <a:extLst>
+                        <a:ext uri="{9D8B030D-6E8A-4147-A177-3AD203B41FA5}">
+                          <a16:colId xmlns:a16="http://schemas.microsoft.com/office/drawing/2014/main" val="555145253"/>
+                        </a:ext>
+                      </a:extLst>
+                    </a:gridCol>
+                    <a:gridCol w="2266024">
+                      <a:extLst>
+                        <a:ext uri="{9D8B030D-6E8A-4147-A177-3AD203B41FA5}">
+                          <a16:colId xmlns:a16="http://schemas.microsoft.com/office/drawing/2014/main" val="3059292820"/>
+                        </a:ext>
+                      </a:extLst>
+                    </a:gridCol>
+                  </a:tblGrid>
+                  <a:tr h="0">
+                    <a:tc>
+                      <a:txBody>
+                        <a:bodyPr/>
+                        <a:lstStyle/>
+                        <a:p>
+                          <a:pPr rtl="0"/>
+                          <a:r>
+                            <a:rPr lang="zh-TW" altLang="en-US" sz="2000" b="1" dirty="0">
+                              <a:solidFill>
+                                <a:srgbClr val="1F1F1F"/>
+                              </a:solidFill>
+                              <a:effectLst/>
+                              <a:latin typeface="Google Sans Text"/>
+                            </a:rPr>
+                            <a:t>組合</a:t>
+                          </a:r>
+                        </a:p>
+                      </a:txBody>
+                      <a:tcPr marR="114300" marT="152400" marB="152400" anchor="ctr">
+                        <a:lnL w="9525" cap="flat" cmpd="sng" algn="ctr">
                           <a:solidFill>
-                            <a:srgbClr val="1F1F1F"/>
+                            <a:schemeClr val="bg1"/>
                           </a:solidFill>
-                          <a:effectLst/>
-                          <a:latin typeface="Google Sans Text"/>
-                        </a:rPr>
-                        <a:t>2 </a:t>
-                      </a:r>
-                      <a:r>
-                        <a:rPr lang="zh-TW" altLang="en-US" sz="2000" b="1" dirty="0">
+                          <a:prstDash val="solid"/>
+                          <a:round/>
+                          <a:headEnd type="none" w="med" len="med"/>
+                          <a:tailEnd type="none" w="med" len="med"/>
+                        </a:lnL>
+                        <a:lnR w="9525" cap="flat" cmpd="sng" algn="ctr">
                           <a:solidFill>
-                            <a:srgbClr val="1F1F1F"/>
+                            <a:schemeClr val="bg1"/>
                           </a:solidFill>
-                          <a:effectLst/>
-                          <a:latin typeface="Google Sans Text"/>
-                        </a:rPr>
-                        <a:t>富人</a:t>
-                      </a:r>
-                      <a:endParaRPr lang="zh-TW" altLang="en-US" sz="2000" dirty="0">
-                        <a:solidFill>
-                          <a:srgbClr val="1F1F1F"/>
-                        </a:solidFill>
-                        <a:effectLst/>
-                        <a:latin typeface="Google Sans Text"/>
-                      </a:endParaRPr>
-                    </a:p>
-                  </a:txBody>
-                  <a:tcPr marR="114300" marT="152400" marB="152400" anchor="ctr">
-                    <a:lnL w="9525" cap="flat" cmpd="sng" algn="ctr">
-                      <a:solidFill>
-                        <a:schemeClr val="bg1"/>
-                      </a:solidFill>
-                      <a:prstDash val="solid"/>
-                      <a:round/>
-                      <a:headEnd type="none" w="med" len="med"/>
-                      <a:tailEnd type="none" w="med" len="med"/>
-                    </a:lnL>
-                    <a:lnR w="9525" cap="flat" cmpd="sng" algn="ctr">
-                      <a:solidFill>
-                        <a:schemeClr val="bg1"/>
-                      </a:solidFill>
-                      <a:prstDash val="solid"/>
-                      <a:round/>
-                      <a:headEnd type="none" w="med" len="med"/>
-                      <a:tailEnd type="none" w="med" len="med"/>
-                    </a:lnR>
-                    <a:lnT w="9525" cap="flat" cmpd="sng" algn="ctr">
-                      <a:solidFill>
-                        <a:schemeClr val="bg1"/>
-                      </a:solidFill>
-                      <a:prstDash val="solid"/>
-                      <a:round/>
-                      <a:headEnd type="none" w="med" len="med"/>
-                      <a:tailEnd type="none" w="med" len="med"/>
-                    </a:lnT>
-                    <a:lnB w="9525" cap="flat" cmpd="sng" algn="ctr">
-                      <a:solidFill>
-                        <a:schemeClr val="bg1"/>
-                      </a:solidFill>
-                      <a:prstDash val="solid"/>
-                      <a:round/>
-                      <a:headEnd type="none" w="med" len="med"/>
-                      <a:tailEnd type="none" w="med" len="med"/>
-                    </a:lnB>
-                    <a:noFill/>
-                  </a:tcPr>
-                </a:tc>
-                <a:tc>
-                  <a:txBody>
-                    <a:bodyPr/>
-                    <a:lstStyle/>
-                    <a:p>
-                      <a:pPr rtl="0"/>
-                      <a:r>
-                        <a:rPr lang="en-US" altLang="zh-TW" sz="2000">
+                          <a:prstDash val="solid"/>
+                          <a:round/>
+                          <a:headEnd type="none" w="med" len="med"/>
+                          <a:tailEnd type="none" w="med" len="med"/>
+                        </a:lnR>
+                        <a:lnT w="9525" cap="flat" cmpd="sng" algn="ctr">
                           <a:solidFill>
-                            <a:srgbClr val="1F1F1F"/>
+                            <a:schemeClr val="bg1"/>
                           </a:solidFill>
-                          <a:effectLst/>
-                          <a:latin typeface="Google Sans Text"/>
-                        </a:rPr>
-                        <a:t>850 </a:t>
-                      </a:r>
-                      <a:r>
-                        <a:rPr lang="zh-TW" altLang="en-US" sz="2000">
+                          <a:prstDash val="solid"/>
+                          <a:round/>
+                          <a:headEnd type="none" w="med" len="med"/>
+                          <a:tailEnd type="none" w="med" len="med"/>
+                        </a:lnT>
+                        <a:lnB w="9525" cap="flat" cmpd="sng" algn="ctr">
                           <a:solidFill>
-                            <a:srgbClr val="1F1F1F"/>
+                            <a:schemeClr val="bg1"/>
                           </a:solidFill>
-                          <a:effectLst/>
-                          <a:latin typeface="Google Sans Text"/>
-                        </a:rPr>
-                        <a:t>萬</a:t>
-                      </a:r>
-                    </a:p>
-                  </a:txBody>
-                  <a:tcPr marR="114300" marT="152400" marB="152400" anchor="ctr">
-                    <a:lnL w="9525" cap="flat" cmpd="sng" algn="ctr">
-                      <a:solidFill>
-                        <a:schemeClr val="bg1"/>
-                      </a:solidFill>
-                      <a:prstDash val="solid"/>
-                      <a:round/>
-                      <a:headEnd type="none" w="med" len="med"/>
-                      <a:tailEnd type="none" w="med" len="med"/>
-                    </a:lnL>
-                    <a:lnR w="9525" cap="flat" cmpd="sng" algn="ctr">
-                      <a:solidFill>
-                        <a:schemeClr val="bg1"/>
-                      </a:solidFill>
-                      <a:prstDash val="solid"/>
-                      <a:round/>
-                      <a:headEnd type="none" w="med" len="med"/>
-                      <a:tailEnd type="none" w="med" len="med"/>
-                    </a:lnR>
-                    <a:lnT w="9525" cap="flat" cmpd="sng" algn="ctr">
-                      <a:solidFill>
-                        <a:schemeClr val="bg1"/>
-                      </a:solidFill>
-                      <a:prstDash val="solid"/>
-                      <a:round/>
-                      <a:headEnd type="none" w="med" len="med"/>
-                      <a:tailEnd type="none" w="med" len="med"/>
-                    </a:lnT>
-                    <a:lnB w="9525" cap="flat" cmpd="sng" algn="ctr">
-                      <a:solidFill>
-                        <a:schemeClr val="bg1"/>
-                      </a:solidFill>
-                      <a:prstDash val="solid"/>
-                      <a:round/>
-                      <a:headEnd type="none" w="med" len="med"/>
-                      <a:tailEnd type="none" w="med" len="med"/>
-                    </a:lnB>
-                    <a:noFill/>
-                  </a:tcPr>
-                </a:tc>
-                <a:tc>
-                  <a:txBody>
-                    <a:bodyPr/>
-                    <a:lstStyle/>
-                    <a:p>
-                      <a:pPr rtl="0"/>
-                      <a:r>
-                        <a:rPr lang="en-US" altLang="zh-TW" sz="2000">
+                          <a:prstDash val="solid"/>
+                          <a:round/>
+                          <a:headEnd type="none" w="med" len="med"/>
+                          <a:tailEnd type="none" w="med" len="med"/>
+                        </a:lnB>
+                        <a:noFill/>
+                      </a:tcPr>
+                    </a:tc>
+                    <a:tc>
+                      <a:txBody>
+                        <a:bodyPr/>
+                        <a:lstStyle/>
+                        <a:p>
+                          <a:pPr algn="r" rtl="0"/>
+                          <a:r>
+                            <a:rPr lang="en" sz="2000" b="1" dirty="0">
+                              <a:solidFill>
+                                <a:srgbClr val="1F1F1F"/>
+                              </a:solidFill>
+                              <a:effectLst/>
+                              <a:latin typeface="Google Sans Text"/>
+                            </a:rPr>
+                            <a:t>H-T </a:t>
+                          </a:r>
+                          <a:r>
+                            <a:rPr lang="zh-TW" altLang="en-US" sz="2000" b="1" dirty="0">
+                              <a:solidFill>
+                                <a:srgbClr val="1F1F1F"/>
+                              </a:solidFill>
+                              <a:effectLst/>
+                              <a:latin typeface="Google Sans Text"/>
+                            </a:rPr>
+                            <a:t>估計值</a:t>
+                          </a:r>
+                          <a:r>
+                            <a:rPr lang="en-US" altLang="zh-TW" sz="2000" b="1" dirty="0">
+                              <a:solidFill>
+                                <a:srgbClr val="1F1F1F"/>
+                              </a:solidFill>
+                              <a:effectLst/>
+                              <a:latin typeface="Google Sans Text"/>
+                            </a:rPr>
+                            <a:t>(</a:t>
+                          </a:r>
+                          <a14:m>
+                            <m:oMath xmlns:m="http://schemas.openxmlformats.org/officeDocument/2006/math">
+                              <m:acc>
+                                <m:accPr>
+                                  <m:chr m:val="̂"/>
+                                  <m:ctrlPr>
+                                    <a:rPr lang="en-US" altLang="zh-TW" sz="2000" b="1" i="1" smtClean="0">
+                                      <a:solidFill>
+                                        <a:srgbClr val="1F1F1F"/>
+                                      </a:solidFill>
+                                      <a:effectLst/>
+                                      <a:latin typeface="Cambria Math" panose="02040503050406030204" pitchFamily="18" charset="0"/>
+                                    </a:rPr>
+                                  </m:ctrlPr>
+                                </m:accPr>
+                                <m:e>
+                                  <m:r>
+                                    <a:rPr lang="en-US" altLang="zh-TW" sz="2000" b="1" i="1" smtClean="0">
+                                      <a:solidFill>
+                                        <a:srgbClr val="1F1F1F"/>
+                                      </a:solidFill>
+                                      <a:effectLst/>
+                                      <a:latin typeface="Cambria Math" panose="02040503050406030204" pitchFamily="18" charset="0"/>
+                                    </a:rPr>
+                                    <m:t>𝒀</m:t>
+                                  </m:r>
+                                </m:e>
+                              </m:acc>
+                            </m:oMath>
+                          </a14:m>
+                          <a:r>
+                            <a:rPr lang="en-US" altLang="zh-TW" sz="2000" b="1" dirty="0">
+                              <a:solidFill>
+                                <a:srgbClr val="1F1F1F"/>
+                              </a:solidFill>
+                              <a:effectLst/>
+                              <a:latin typeface="Google Sans Text"/>
+                            </a:rPr>
+                            <a:t>)</a:t>
+                          </a:r>
+                          <a:r>
+                            <a:rPr lang="zh-TW" altLang="en-US" sz="2000" b="1" dirty="0">
+                              <a:solidFill>
+                                <a:srgbClr val="1F1F1F"/>
+                              </a:solidFill>
+                              <a:effectLst/>
+                              <a:latin typeface="Google Sans Text"/>
+                            </a:rPr>
+                            <a:t> </a:t>
+                          </a:r>
+                          <a:endParaRPr lang="en" sz="2000" dirty="0">
+                            <a:solidFill>
+                              <a:srgbClr val="1F1F1F"/>
+                            </a:solidFill>
+                            <a:effectLst/>
+                            <a:latin typeface="Google Sans Text"/>
+                          </a:endParaRPr>
+                        </a:p>
+                      </a:txBody>
+                      <a:tcPr marR="114300" marT="152400" marB="152400" anchor="ctr">
+                        <a:lnL w="9525" cap="flat" cmpd="sng" algn="ctr">
                           <a:solidFill>
-                            <a:srgbClr val="1F1F1F"/>
+                            <a:schemeClr val="bg1"/>
                           </a:solidFill>
-                          <a:effectLst/>
-                          <a:latin typeface="Google Sans Text"/>
-                        </a:rPr>
-                        <a:t>0.8784</a:t>
-                      </a:r>
-                    </a:p>
-                  </a:txBody>
-                  <a:tcPr marR="114300" marT="152400" marB="152400" anchor="ctr">
-                    <a:lnL w="9525" cap="flat" cmpd="sng" algn="ctr">
-                      <a:solidFill>
-                        <a:schemeClr val="bg1"/>
-                      </a:solidFill>
-                      <a:prstDash val="solid"/>
-                      <a:round/>
-                      <a:headEnd type="none" w="med" len="med"/>
-                      <a:tailEnd type="none" w="med" len="med"/>
-                    </a:lnL>
-                    <a:lnR w="9525" cap="flat" cmpd="sng" algn="ctr">
-                      <a:solidFill>
-                        <a:schemeClr val="bg1"/>
-                      </a:solidFill>
-                      <a:prstDash val="solid"/>
-                      <a:round/>
-                      <a:headEnd type="none" w="med" len="med"/>
-                      <a:tailEnd type="none" w="med" len="med"/>
-                    </a:lnR>
-                    <a:lnT w="9525" cap="flat" cmpd="sng" algn="ctr">
-                      <a:solidFill>
-                        <a:schemeClr val="bg1"/>
-                      </a:solidFill>
-                      <a:prstDash val="solid"/>
-                      <a:round/>
-                      <a:headEnd type="none" w="med" len="med"/>
-                      <a:tailEnd type="none" w="med" len="med"/>
-                    </a:lnT>
-                    <a:lnB w="9525" cap="flat" cmpd="sng" algn="ctr">
-                      <a:solidFill>
-                        <a:schemeClr val="bg1"/>
-                      </a:solidFill>
-                      <a:prstDash val="solid"/>
-                      <a:round/>
-                      <a:headEnd type="none" w="med" len="med"/>
-                      <a:tailEnd type="none" w="med" len="med"/>
-                    </a:lnB>
-                    <a:noFill/>
-                  </a:tcPr>
-                </a:tc>
-                <a:tc>
-                  <a:txBody>
-                    <a:bodyPr/>
-                    <a:lstStyle/>
-                    <a:p>
-                      <a:pPr rtl="0"/>
-                      <a:r>
-                        <a:rPr lang="en-US" altLang="zh-TW" sz="2000" b="1">
+                          <a:prstDash val="solid"/>
+                          <a:round/>
+                          <a:headEnd type="none" w="med" len="med"/>
+                          <a:tailEnd type="none" w="med" len="med"/>
+                        </a:lnL>
+                        <a:lnR w="9525" cap="flat" cmpd="sng" algn="ctr">
                           <a:solidFill>
-                            <a:srgbClr val="1F1F1F"/>
+                            <a:schemeClr val="bg1"/>
                           </a:solidFill>
-                          <a:effectLst/>
-                          <a:latin typeface="Google Sans Text"/>
-                        </a:rPr>
-                        <a:t>746.64 </a:t>
-                      </a:r>
-                      <a:r>
-                        <a:rPr lang="zh-TW" altLang="en-US" sz="2000" b="1">
+                          <a:prstDash val="solid"/>
+                          <a:round/>
+                          <a:headEnd type="none" w="med" len="med"/>
+                          <a:tailEnd type="none" w="med" len="med"/>
+                        </a:lnR>
+                        <a:lnT w="9525" cap="flat" cmpd="sng" algn="ctr">
                           <a:solidFill>
-                            <a:srgbClr val="1F1F1F"/>
+                            <a:schemeClr val="bg1"/>
                           </a:solidFill>
-                          <a:effectLst/>
-                          <a:latin typeface="Google Sans Text"/>
-                        </a:rPr>
-                        <a:t>萬</a:t>
-                      </a:r>
-                      <a:endParaRPr lang="zh-TW" altLang="en-US" sz="2000">
-                        <a:solidFill>
-                          <a:srgbClr val="1F1F1F"/>
-                        </a:solidFill>
-                        <a:effectLst/>
-                        <a:latin typeface="Google Sans Text"/>
-                      </a:endParaRPr>
-                    </a:p>
-                  </a:txBody>
-                  <a:tcPr marT="152400" marB="152400" anchor="ctr">
-                    <a:lnL w="9525" cap="flat" cmpd="sng" algn="ctr">
-                      <a:solidFill>
-                        <a:schemeClr val="bg1"/>
-                      </a:solidFill>
-                      <a:prstDash val="solid"/>
-                      <a:round/>
-                      <a:headEnd type="none" w="med" len="med"/>
-                      <a:tailEnd type="none" w="med" len="med"/>
-                    </a:lnL>
-                    <a:lnR w="9525" cap="flat" cmpd="sng" algn="ctr">
-                      <a:solidFill>
-                        <a:schemeClr val="bg1"/>
-                      </a:solidFill>
-                      <a:prstDash val="solid"/>
-                      <a:round/>
-                      <a:headEnd type="none" w="med" len="med"/>
-                      <a:tailEnd type="none" w="med" len="med"/>
-                    </a:lnR>
-                    <a:lnT w="9525" cap="flat" cmpd="sng" algn="ctr">
-                      <a:solidFill>
-                        <a:schemeClr val="bg1"/>
-                      </a:solidFill>
-                      <a:prstDash val="solid"/>
-                      <a:round/>
-                      <a:headEnd type="none" w="med" len="med"/>
-                      <a:tailEnd type="none" w="med" len="med"/>
-                    </a:lnT>
-                    <a:lnB w="9525" cap="flat" cmpd="sng" algn="ctr">
-                      <a:solidFill>
-                        <a:schemeClr val="bg1"/>
-                      </a:solidFill>
-                      <a:prstDash val="solid"/>
-                      <a:round/>
-                      <a:headEnd type="none" w="med" len="med"/>
-                      <a:tailEnd type="none" w="med" len="med"/>
-                    </a:lnB>
-                    <a:noFill/>
-                  </a:tcPr>
-                </a:tc>
+                          <a:prstDash val="solid"/>
+                          <a:round/>
+                          <a:headEnd type="none" w="med" len="med"/>
+                          <a:tailEnd type="none" w="med" len="med"/>
+                        </a:lnT>
+                        <a:lnB w="9525" cap="flat" cmpd="sng" algn="ctr">
+                          <a:solidFill>
+                            <a:schemeClr val="bg1"/>
+                          </a:solidFill>
+                          <a:prstDash val="solid"/>
+                          <a:round/>
+                          <a:headEnd type="none" w="med" len="med"/>
+                          <a:tailEnd type="none" w="med" len="med"/>
+                        </a:lnB>
+                        <a:noFill/>
+                      </a:tcPr>
+                    </a:tc>
+                    <a:tc>
+                      <a:txBody>
+                        <a:bodyPr/>
+                        <a:lstStyle/>
+                        <a:p>
+                          <a:pPr algn="r" rtl="0"/>
+                          <a:r>
+                            <a:rPr lang="zh-TW" altLang="en-US" sz="2000" b="1" dirty="0">
+                              <a:solidFill>
+                                <a:srgbClr val="1F1F1F"/>
+                              </a:solidFill>
+                              <a:effectLst/>
+                              <a:latin typeface="Google Sans Text"/>
+                            </a:rPr>
+                            <a:t>發生機率 </a:t>
+                          </a:r>
+                          <a:r>
+                            <a:rPr lang="en-US" altLang="zh-TW" sz="2000" b="1" dirty="0">
+                              <a:solidFill>
+                                <a:srgbClr val="1F1F1F"/>
+                              </a:solidFill>
+                              <a:effectLst/>
+                              <a:latin typeface="Google Sans Text"/>
+                            </a:rPr>
+                            <a:t>(</a:t>
+                          </a:r>
+                          <a:r>
+                            <a:rPr lang="en" sz="2000" b="1" dirty="0">
+                              <a:solidFill>
+                                <a:srgbClr val="1F1F1F"/>
+                              </a:solidFill>
+                              <a:effectLst/>
+                              <a:latin typeface="Google Sans Text"/>
+                            </a:rPr>
+                            <a:t>P)</a:t>
+                          </a:r>
+                          <a:endParaRPr lang="en" sz="2000" dirty="0">
+                            <a:solidFill>
+                              <a:srgbClr val="1F1F1F"/>
+                            </a:solidFill>
+                            <a:effectLst/>
+                            <a:latin typeface="Google Sans Text"/>
+                          </a:endParaRPr>
+                        </a:p>
+                      </a:txBody>
+                      <a:tcPr marR="114300" marT="152400" marB="152400" anchor="ctr">
+                        <a:lnL w="9525" cap="flat" cmpd="sng" algn="ctr">
+                          <a:solidFill>
+                            <a:schemeClr val="bg1"/>
+                          </a:solidFill>
+                          <a:prstDash val="solid"/>
+                          <a:round/>
+                          <a:headEnd type="none" w="med" len="med"/>
+                          <a:tailEnd type="none" w="med" len="med"/>
+                        </a:lnL>
+                        <a:lnR w="9525" cap="flat" cmpd="sng" algn="ctr">
+                          <a:solidFill>
+                            <a:schemeClr val="bg1"/>
+                          </a:solidFill>
+                          <a:prstDash val="solid"/>
+                          <a:round/>
+                          <a:headEnd type="none" w="med" len="med"/>
+                          <a:tailEnd type="none" w="med" len="med"/>
+                        </a:lnR>
+                        <a:lnT w="9525" cap="flat" cmpd="sng" algn="ctr">
+                          <a:solidFill>
+                            <a:schemeClr val="bg1"/>
+                          </a:solidFill>
+                          <a:prstDash val="solid"/>
+                          <a:round/>
+                          <a:headEnd type="none" w="med" len="med"/>
+                          <a:tailEnd type="none" w="med" len="med"/>
+                        </a:lnT>
+                        <a:lnB w="9525" cap="flat" cmpd="sng" algn="ctr">
+                          <a:solidFill>
+                            <a:schemeClr val="bg1"/>
+                          </a:solidFill>
+                          <a:prstDash val="solid"/>
+                          <a:round/>
+                          <a:headEnd type="none" w="med" len="med"/>
+                          <a:tailEnd type="none" w="med" len="med"/>
+                        </a:lnB>
+                        <a:noFill/>
+                      </a:tcPr>
+                    </a:tc>
+                    <a:tc>
+                      <a:txBody>
+                        <a:bodyPr/>
+                        <a:lstStyle/>
+                        <a:p>
+                          <a:pPr algn="r" rtl="0"/>
+                          <a:r>
+                            <a:rPr lang="zh-TW" altLang="en-US" sz="2000" b="1" dirty="0">
+                              <a:solidFill>
+                                <a:srgbClr val="1F1F1F"/>
+                              </a:solidFill>
+                              <a:effectLst/>
+                              <a:latin typeface="Google Sans Text"/>
+                            </a:rPr>
+                            <a:t>加權結果 </a:t>
+                          </a:r>
+                          <a:r>
+                            <a:rPr lang="en-US" altLang="zh-TW" sz="2000" b="1" dirty="0">
+                              <a:solidFill>
+                                <a:srgbClr val="1F1F1F"/>
+                              </a:solidFill>
+                              <a:effectLst/>
+                              <a:latin typeface="Google Sans Text"/>
+                            </a:rPr>
+                            <a:t>(</a:t>
+                          </a:r>
+                          <a14:m>
+                            <m:oMath xmlns:m="http://schemas.openxmlformats.org/officeDocument/2006/math">
+                              <m:acc>
+                                <m:accPr>
+                                  <m:chr m:val="̂"/>
+                                  <m:ctrlPr>
+                                    <a:rPr lang="en-US" altLang="zh-TW" sz="2000" b="1" i="1" smtClean="0">
+                                      <a:solidFill>
+                                        <a:srgbClr val="1F1F1F"/>
+                                      </a:solidFill>
+                                      <a:effectLst/>
+                                      <a:latin typeface="Cambria Math" panose="02040503050406030204" pitchFamily="18" charset="0"/>
+                                    </a:rPr>
+                                  </m:ctrlPr>
+                                </m:accPr>
+                                <m:e>
+                                  <m:r>
+                                    <a:rPr lang="en-US" altLang="zh-TW" sz="2000" b="1" i="1" smtClean="0">
+                                      <a:solidFill>
+                                        <a:srgbClr val="1F1F1F"/>
+                                      </a:solidFill>
+                                      <a:effectLst/>
+                                      <a:latin typeface="Cambria Math" panose="02040503050406030204" pitchFamily="18" charset="0"/>
+                                    </a:rPr>
+                                    <m:t>𝒀</m:t>
+                                  </m:r>
+                                </m:e>
+                              </m:acc>
+                            </m:oMath>
+                          </a14:m>
+                          <a:r>
+                            <a:rPr lang="en" sz="2000" b="1" dirty="0">
+                              <a:solidFill>
+                                <a:srgbClr val="1F1F1F"/>
+                              </a:solidFill>
+                              <a:effectLst/>
+                              <a:latin typeface="Google Sans Text"/>
+                            </a:rPr>
+                            <a:t>×P)</a:t>
+                          </a:r>
+                          <a:endParaRPr lang="en" sz="2000" dirty="0">
+                            <a:solidFill>
+                              <a:srgbClr val="1F1F1F"/>
+                            </a:solidFill>
+                            <a:effectLst/>
+                            <a:latin typeface="Google Sans Text"/>
+                          </a:endParaRPr>
+                        </a:p>
+                      </a:txBody>
+                      <a:tcPr marT="152400" marB="152400" anchor="ctr">
+                        <a:lnL w="9525" cap="flat" cmpd="sng" algn="ctr">
+                          <a:solidFill>
+                            <a:schemeClr val="bg1"/>
+                          </a:solidFill>
+                          <a:prstDash val="solid"/>
+                          <a:round/>
+                          <a:headEnd type="none" w="med" len="med"/>
+                          <a:tailEnd type="none" w="med" len="med"/>
+                        </a:lnL>
+                        <a:lnR w="9525" cap="flat" cmpd="sng" algn="ctr">
+                          <a:solidFill>
+                            <a:schemeClr val="bg1"/>
+                          </a:solidFill>
+                          <a:prstDash val="solid"/>
+                          <a:round/>
+                          <a:headEnd type="none" w="med" len="med"/>
+                          <a:tailEnd type="none" w="med" len="med"/>
+                        </a:lnR>
+                        <a:lnT w="9525" cap="flat" cmpd="sng" algn="ctr">
+                          <a:solidFill>
+                            <a:schemeClr val="bg1"/>
+                          </a:solidFill>
+                          <a:prstDash val="solid"/>
+                          <a:round/>
+                          <a:headEnd type="none" w="med" len="med"/>
+                          <a:tailEnd type="none" w="med" len="med"/>
+                        </a:lnT>
+                        <a:lnB w="9525" cap="flat" cmpd="sng" algn="ctr">
+                          <a:solidFill>
+                            <a:schemeClr val="bg1"/>
+                          </a:solidFill>
+                          <a:prstDash val="solid"/>
+                          <a:round/>
+                          <a:headEnd type="none" w="med" len="med"/>
+                          <a:tailEnd type="none" w="med" len="med"/>
+                        </a:lnB>
+                        <a:noFill/>
+                      </a:tcPr>
+                    </a:tc>
+                    <a:extLst>
+                      <a:ext uri="{0D108BD9-81ED-4DB2-BD59-A6C34878D82A}">
+                        <a16:rowId xmlns:a16="http://schemas.microsoft.com/office/drawing/2014/main" val="1439181357"/>
+                      </a:ext>
+                    </a:extLst>
+                  </a:tr>
+                  <a:tr h="0">
+                    <a:tc>
+                      <a:txBody>
+                        <a:bodyPr/>
+                        <a:lstStyle/>
+                        <a:p>
+                          <a:pPr rtl="0"/>
+                          <a:r>
+                            <a:rPr lang="en-US" altLang="zh-TW" sz="2000" b="0" dirty="0">
+                              <a:solidFill>
+                                <a:srgbClr val="1F1F1F"/>
+                              </a:solidFill>
+                              <a:effectLst/>
+                              <a:latin typeface="Google Sans Text"/>
+                            </a:rPr>
+                            <a:t>2 </a:t>
+                          </a:r>
+                          <a:r>
+                            <a:rPr lang="zh-TW" altLang="en-US" sz="2000" b="0" dirty="0">
+                              <a:solidFill>
+                                <a:srgbClr val="1F1F1F"/>
+                              </a:solidFill>
+                              <a:effectLst/>
+                              <a:latin typeface="Google Sans Text"/>
+                            </a:rPr>
+                            <a:t>富人</a:t>
+                          </a:r>
+                        </a:p>
+                      </a:txBody>
+                      <a:tcPr marR="114300" marT="152400" marB="152400" anchor="ctr">
+                        <a:lnL w="9525" cap="flat" cmpd="sng" algn="ctr">
+                          <a:solidFill>
+                            <a:schemeClr val="bg1"/>
+                          </a:solidFill>
+                          <a:prstDash val="solid"/>
+                          <a:round/>
+                          <a:headEnd type="none" w="med" len="med"/>
+                          <a:tailEnd type="none" w="med" len="med"/>
+                        </a:lnL>
+                        <a:lnR w="9525" cap="flat" cmpd="sng" algn="ctr">
+                          <a:solidFill>
+                            <a:schemeClr val="bg1"/>
+                          </a:solidFill>
+                          <a:prstDash val="solid"/>
+                          <a:round/>
+                          <a:headEnd type="none" w="med" len="med"/>
+                          <a:tailEnd type="none" w="med" len="med"/>
+                        </a:lnR>
+                        <a:lnT w="9525" cap="flat" cmpd="sng" algn="ctr">
+                          <a:solidFill>
+                            <a:schemeClr val="bg1"/>
+                          </a:solidFill>
+                          <a:prstDash val="solid"/>
+                          <a:round/>
+                          <a:headEnd type="none" w="med" len="med"/>
+                          <a:tailEnd type="none" w="med" len="med"/>
+                        </a:lnT>
+                        <a:lnB w="9525" cap="flat" cmpd="sng" algn="ctr">
+                          <a:solidFill>
+                            <a:schemeClr val="bg1"/>
+                          </a:solidFill>
+                          <a:prstDash val="solid"/>
+                          <a:round/>
+                          <a:headEnd type="none" w="med" len="med"/>
+                          <a:tailEnd type="none" w="med" len="med"/>
+                        </a:lnB>
+                        <a:noFill/>
+                      </a:tcPr>
+                    </a:tc>
+                    <a:tc>
+                      <a:txBody>
+                        <a:bodyPr/>
+                        <a:lstStyle/>
+                        <a:p>
+                          <a:pPr algn="r" rtl="0"/>
+                          <a14:m>
+                            <m:oMath xmlns:m="http://schemas.openxmlformats.org/officeDocument/2006/math">
+                              <m:r>
+                                <a:rPr lang="en-US" altLang="zh-TW" sz="1600" b="0" i="1" smtClean="0">
+                                  <a:solidFill>
+                                    <a:srgbClr val="1F1F1F"/>
+                                  </a:solidFill>
+                                  <a:effectLst/>
+                                  <a:latin typeface="Cambria Math" panose="02040503050406030204" pitchFamily="18" charset="0"/>
+                                </a:rPr>
+                                <m:t>100</m:t>
+                              </m:r>
+                              <m:r>
+                                <a:rPr lang="en-US" altLang="zh-TW" sz="1600" b="0" i="1" smtClean="0">
+                                  <a:solidFill>
+                                    <a:srgbClr val="1F1F1F"/>
+                                  </a:solidFill>
+                                  <a:effectLst/>
+                                  <a:latin typeface="Cambria Math" panose="02040503050406030204" pitchFamily="18" charset="0"/>
+                                  <a:ea typeface="Cambria Math" panose="02040503050406030204" pitchFamily="18" charset="0"/>
+                                </a:rPr>
+                                <m:t>×</m:t>
+                              </m:r>
+                              <m:f>
+                                <m:fPr>
+                                  <m:ctrlPr>
+                                    <a:rPr lang="en-US" altLang="zh-TW" sz="1600" b="0" i="1" smtClean="0">
+                                      <a:solidFill>
+                                        <a:srgbClr val="1F1F1F"/>
+                                      </a:solidFill>
+                                      <a:effectLst/>
+                                      <a:latin typeface="Cambria Math" panose="02040503050406030204" pitchFamily="18" charset="0"/>
+                                      <a:ea typeface="Cambria Math" panose="02040503050406030204" pitchFamily="18" charset="0"/>
+                                    </a:rPr>
+                                  </m:ctrlPr>
+                                </m:fPr>
+                                <m:num>
+                                  <m:r>
+                                    <a:rPr lang="en-US" altLang="zh-TW" sz="1600" b="0" i="1" smtClean="0">
+                                      <a:solidFill>
+                                        <a:srgbClr val="1F1F1F"/>
+                                      </a:solidFill>
+                                      <a:effectLst/>
+                                      <a:latin typeface="Cambria Math" panose="02040503050406030204" pitchFamily="18" charset="0"/>
+                                      <a:ea typeface="Cambria Math" panose="02040503050406030204" pitchFamily="18" charset="0"/>
+                                    </a:rPr>
+                                    <m:t>34</m:t>
+                                  </m:r>
+                                </m:num>
+                                <m:den>
+                                  <m:r>
+                                    <a:rPr lang="en-US" altLang="zh-TW" sz="1600" b="0" i="1" smtClean="0">
+                                      <a:solidFill>
+                                        <a:srgbClr val="1F1F1F"/>
+                                      </a:solidFill>
+                                      <a:effectLst/>
+                                      <a:latin typeface="Cambria Math" panose="02040503050406030204" pitchFamily="18" charset="0"/>
+                                      <a:ea typeface="Cambria Math" panose="02040503050406030204" pitchFamily="18" charset="0"/>
+                                    </a:rPr>
+                                    <m:t>16</m:t>
+                                  </m:r>
+                                </m:den>
+                              </m:f>
+                              <m:r>
+                                <a:rPr lang="en-US" altLang="zh-TW" sz="1600" b="0" i="1" smtClean="0">
+                                  <a:solidFill>
+                                    <a:srgbClr val="1F1F1F"/>
+                                  </a:solidFill>
+                                  <a:effectLst/>
+                                  <a:latin typeface="Cambria Math" panose="02040503050406030204" pitchFamily="18" charset="0"/>
+                                  <a:ea typeface="Cambria Math" panose="02040503050406030204" pitchFamily="18" charset="0"/>
+                                </a:rPr>
+                                <m:t>×2=</m:t>
+                              </m:r>
+                            </m:oMath>
+                          </a14:m>
+                          <a:r>
+                            <a:rPr lang="en-US" altLang="zh-TW" sz="1600" dirty="0">
+                              <a:solidFill>
+                                <a:srgbClr val="1F1F1F"/>
+                              </a:solidFill>
+                              <a:effectLst/>
+                              <a:latin typeface="Google Sans Text"/>
+                            </a:rPr>
+                            <a:t>425 </a:t>
+                          </a:r>
+                          <a:endParaRPr lang="zh-TW" altLang="en-US" sz="1600" dirty="0">
+                            <a:solidFill>
+                              <a:srgbClr val="1F1F1F"/>
+                            </a:solidFill>
+                            <a:effectLst/>
+                            <a:latin typeface="Google Sans Text"/>
+                          </a:endParaRPr>
+                        </a:p>
+                      </a:txBody>
+                      <a:tcPr marR="114300" marT="152400" marB="152400" anchor="ctr">
+                        <a:lnL w="9525" cap="flat" cmpd="sng" algn="ctr">
+                          <a:solidFill>
+                            <a:schemeClr val="bg1"/>
+                          </a:solidFill>
+                          <a:prstDash val="solid"/>
+                          <a:round/>
+                          <a:headEnd type="none" w="med" len="med"/>
+                          <a:tailEnd type="none" w="med" len="med"/>
+                        </a:lnL>
+                        <a:lnR w="9525" cap="flat" cmpd="sng" algn="ctr">
+                          <a:solidFill>
+                            <a:schemeClr val="bg1"/>
+                          </a:solidFill>
+                          <a:prstDash val="solid"/>
+                          <a:round/>
+                          <a:headEnd type="none" w="med" len="med"/>
+                          <a:tailEnd type="none" w="med" len="med"/>
+                        </a:lnR>
+                        <a:lnT w="9525" cap="flat" cmpd="sng" algn="ctr">
+                          <a:solidFill>
+                            <a:schemeClr val="bg1"/>
+                          </a:solidFill>
+                          <a:prstDash val="solid"/>
+                          <a:round/>
+                          <a:headEnd type="none" w="med" len="med"/>
+                          <a:tailEnd type="none" w="med" len="med"/>
+                        </a:lnT>
+                        <a:lnB w="9525" cap="flat" cmpd="sng" algn="ctr">
+                          <a:solidFill>
+                            <a:schemeClr val="bg1"/>
+                          </a:solidFill>
+                          <a:prstDash val="solid"/>
+                          <a:round/>
+                          <a:headEnd type="none" w="med" len="med"/>
+                          <a:tailEnd type="none" w="med" len="med"/>
+                        </a:lnB>
+                        <a:noFill/>
+                      </a:tcPr>
+                    </a:tc>
+                    <a:tc>
+                      <a:txBody>
+                        <a:bodyPr/>
+                        <a:lstStyle/>
+                        <a:p>
+                          <a:pPr algn="r" rtl="0"/>
+                          <a:r>
+                            <a:rPr lang="en-US" altLang="zh-TW" sz="1600" dirty="0">
+                              <a:solidFill>
+                                <a:srgbClr val="1F1F1F"/>
+                              </a:solidFill>
+                              <a:effectLst/>
+                              <a:latin typeface="Google Sans Text"/>
+                            </a:rPr>
+                            <a:t>0.8784=(32/34)</a:t>
+                          </a:r>
+                          <a:r>
+                            <a:rPr lang="zh-TW" altLang="en-US" sz="1600" dirty="0">
+                              <a:solidFill>
+                                <a:srgbClr val="1F1F1F"/>
+                              </a:solidFill>
+                              <a:effectLst/>
+                              <a:latin typeface="Google Sans Text"/>
+                            </a:rPr>
+                            <a:t>*</a:t>
+                          </a:r>
+                          <a:r>
+                            <a:rPr lang="en-US" altLang="zh-TW" sz="1600" dirty="0">
+                              <a:solidFill>
+                                <a:srgbClr val="1F1F1F"/>
+                              </a:solidFill>
+                              <a:effectLst/>
+                              <a:latin typeface="Google Sans Text"/>
+                            </a:rPr>
+                            <a:t>(28/30)</a:t>
+                          </a:r>
+                        </a:p>
+                      </a:txBody>
+                      <a:tcPr marR="114300" marT="152400" marB="152400" anchor="ctr">
+                        <a:lnL w="9525" cap="flat" cmpd="sng" algn="ctr">
+                          <a:solidFill>
+                            <a:schemeClr val="bg1"/>
+                          </a:solidFill>
+                          <a:prstDash val="solid"/>
+                          <a:round/>
+                          <a:headEnd type="none" w="med" len="med"/>
+                          <a:tailEnd type="none" w="med" len="med"/>
+                        </a:lnL>
+                        <a:lnR w="9525" cap="flat" cmpd="sng" algn="ctr">
+                          <a:solidFill>
+                            <a:schemeClr val="bg1"/>
+                          </a:solidFill>
+                          <a:prstDash val="solid"/>
+                          <a:round/>
+                          <a:headEnd type="none" w="med" len="med"/>
+                          <a:tailEnd type="none" w="med" len="med"/>
+                        </a:lnR>
+                        <a:lnT w="9525" cap="flat" cmpd="sng" algn="ctr">
+                          <a:solidFill>
+                            <a:schemeClr val="bg1"/>
+                          </a:solidFill>
+                          <a:prstDash val="solid"/>
+                          <a:round/>
+                          <a:headEnd type="none" w="med" len="med"/>
+                          <a:tailEnd type="none" w="med" len="med"/>
+                        </a:lnT>
+                        <a:lnB w="9525" cap="flat" cmpd="sng" algn="ctr">
+                          <a:solidFill>
+                            <a:schemeClr val="bg1"/>
+                          </a:solidFill>
+                          <a:prstDash val="solid"/>
+                          <a:round/>
+                          <a:headEnd type="none" w="med" len="med"/>
+                          <a:tailEnd type="none" w="med" len="med"/>
+                        </a:lnB>
+                        <a:noFill/>
+                      </a:tcPr>
+                    </a:tc>
+                    <a:tc>
+                      <a:txBody>
+                        <a:bodyPr/>
+                        <a:lstStyle/>
+                        <a:p>
+                          <a:pPr algn="r" rtl="0"/>
+                          <a:r>
+                            <a:rPr lang="en-US" altLang="zh-TW" sz="1600" b="1">
+                              <a:solidFill>
+                                <a:srgbClr val="1F1F1F"/>
+                              </a:solidFill>
+                              <a:effectLst/>
+                              <a:latin typeface="Google Sans Text"/>
+                            </a:rPr>
+                            <a:t>746.64 </a:t>
+                          </a:r>
+                          <a:r>
+                            <a:rPr lang="zh-TW" altLang="en-US" sz="1600" b="1">
+                              <a:solidFill>
+                                <a:srgbClr val="1F1F1F"/>
+                              </a:solidFill>
+                              <a:effectLst/>
+                              <a:latin typeface="Google Sans Text"/>
+                            </a:rPr>
+                            <a:t>萬</a:t>
+                          </a:r>
+                          <a:endParaRPr lang="zh-TW" altLang="en-US" sz="1600">
+                            <a:solidFill>
+                              <a:srgbClr val="1F1F1F"/>
+                            </a:solidFill>
+                            <a:effectLst/>
+                            <a:latin typeface="Google Sans Text"/>
+                          </a:endParaRPr>
+                        </a:p>
+                      </a:txBody>
+                      <a:tcPr marT="152400" marB="152400" anchor="ctr">
+                        <a:lnL w="9525" cap="flat" cmpd="sng" algn="ctr">
+                          <a:solidFill>
+                            <a:schemeClr val="bg1"/>
+                          </a:solidFill>
+                          <a:prstDash val="solid"/>
+                          <a:round/>
+                          <a:headEnd type="none" w="med" len="med"/>
+                          <a:tailEnd type="none" w="med" len="med"/>
+                        </a:lnL>
+                        <a:lnR w="9525" cap="flat" cmpd="sng" algn="ctr">
+                          <a:solidFill>
+                            <a:schemeClr val="bg1"/>
+                          </a:solidFill>
+                          <a:prstDash val="solid"/>
+                          <a:round/>
+                          <a:headEnd type="none" w="med" len="med"/>
+                          <a:tailEnd type="none" w="med" len="med"/>
+                        </a:lnR>
+                        <a:lnT w="9525" cap="flat" cmpd="sng" algn="ctr">
+                          <a:solidFill>
+                            <a:schemeClr val="bg1"/>
+                          </a:solidFill>
+                          <a:prstDash val="solid"/>
+                          <a:round/>
+                          <a:headEnd type="none" w="med" len="med"/>
+                          <a:tailEnd type="none" w="med" len="med"/>
+                        </a:lnT>
+                        <a:lnB w="9525" cap="flat" cmpd="sng" algn="ctr">
+                          <a:solidFill>
+                            <a:schemeClr val="bg1"/>
+                          </a:solidFill>
+                          <a:prstDash val="solid"/>
+                          <a:round/>
+                          <a:headEnd type="none" w="med" len="med"/>
+                          <a:tailEnd type="none" w="med" len="med"/>
+                        </a:lnB>
+                        <a:noFill/>
+                      </a:tcPr>
+                    </a:tc>
+                    <a:extLst>
+                      <a:ext uri="{0D108BD9-81ED-4DB2-BD59-A6C34878D82A}">
+                        <a16:rowId xmlns:a16="http://schemas.microsoft.com/office/drawing/2014/main" val="477083205"/>
+                      </a:ext>
+                    </a:extLst>
+                  </a:tr>
+                  <a:tr h="0">
+                    <a:tc>
+                      <a:txBody>
+                        <a:bodyPr/>
+                        <a:lstStyle/>
+                        <a:p>
+                          <a:pPr rtl="0"/>
+                          <a:r>
+                            <a:rPr lang="en-US" altLang="zh-TW" sz="2000" b="0" dirty="0">
+                              <a:solidFill>
+                                <a:srgbClr val="1F1F1F"/>
+                              </a:solidFill>
+                              <a:effectLst/>
+                              <a:latin typeface="Google Sans Text"/>
+                            </a:rPr>
+                            <a:t>1 </a:t>
+                          </a:r>
+                          <a:r>
+                            <a:rPr lang="zh-TW" altLang="en-US" sz="2000" b="0" dirty="0">
+                              <a:solidFill>
+                                <a:srgbClr val="1F1F1F"/>
+                              </a:solidFill>
+                              <a:effectLst/>
+                              <a:latin typeface="Google Sans Text"/>
+                            </a:rPr>
+                            <a:t>富 </a:t>
+                          </a:r>
+                          <a:r>
+                            <a:rPr lang="en-US" altLang="zh-TW" sz="2000" b="0" dirty="0">
+                              <a:solidFill>
+                                <a:srgbClr val="1F1F1F"/>
+                              </a:solidFill>
+                              <a:effectLst/>
+                              <a:latin typeface="Google Sans Text"/>
+                            </a:rPr>
+                            <a:t>1 </a:t>
+                          </a:r>
+                          <a:r>
+                            <a:rPr lang="zh-TW" altLang="en-US" sz="2000" b="0" dirty="0">
+                              <a:solidFill>
+                                <a:srgbClr val="1F1F1F"/>
+                              </a:solidFill>
+                              <a:effectLst/>
+                              <a:latin typeface="Google Sans Text"/>
+                            </a:rPr>
+                            <a:t>窮</a:t>
+                          </a:r>
+                        </a:p>
+                      </a:txBody>
+                      <a:tcPr marR="114300" marT="152400" marB="152400" anchor="ctr">
+                        <a:lnL w="9525" cap="flat" cmpd="sng" algn="ctr">
+                          <a:solidFill>
+                            <a:schemeClr val="bg1"/>
+                          </a:solidFill>
+                          <a:prstDash val="solid"/>
+                          <a:round/>
+                          <a:headEnd type="none" w="med" len="med"/>
+                          <a:tailEnd type="none" w="med" len="med"/>
+                        </a:lnL>
+                        <a:lnR w="9525" cap="flat" cmpd="sng" algn="ctr">
+                          <a:solidFill>
+                            <a:schemeClr val="bg1"/>
+                          </a:solidFill>
+                          <a:prstDash val="solid"/>
+                          <a:round/>
+                          <a:headEnd type="none" w="med" len="med"/>
+                          <a:tailEnd type="none" w="med" len="med"/>
+                        </a:lnR>
+                        <a:lnT w="9525" cap="flat" cmpd="sng" algn="ctr">
+                          <a:solidFill>
+                            <a:schemeClr val="bg1"/>
+                          </a:solidFill>
+                          <a:prstDash val="solid"/>
+                          <a:round/>
+                          <a:headEnd type="none" w="med" len="med"/>
+                          <a:tailEnd type="none" w="med" len="med"/>
+                        </a:lnT>
+                        <a:lnB w="9525" cap="flat" cmpd="sng" algn="ctr">
+                          <a:solidFill>
+                            <a:schemeClr val="bg1"/>
+                          </a:solidFill>
+                          <a:prstDash val="solid"/>
+                          <a:round/>
+                          <a:headEnd type="none" w="med" len="med"/>
+                          <a:tailEnd type="none" w="med" len="med"/>
+                        </a:lnB>
+                        <a:noFill/>
+                      </a:tcPr>
+                    </a:tc>
+                    <a:tc>
+                      <a:txBody>
+                        <a:bodyPr/>
+                        <a:lstStyle/>
+                        <a:p>
+                          <a:pPr algn="r" rtl="0"/>
+                          <a14:m>
+                            <m:oMath xmlns:m="http://schemas.openxmlformats.org/officeDocument/2006/math">
+                              <m:r>
+                                <a:rPr lang="en-US" altLang="zh-TW" sz="1600" b="0" i="1" smtClean="0">
+                                  <a:solidFill>
+                                    <a:srgbClr val="1F1F1F"/>
+                                  </a:solidFill>
+                                  <a:effectLst/>
+                                  <a:latin typeface="Cambria Math" panose="02040503050406030204" pitchFamily="18" charset="0"/>
+                                </a:rPr>
+                                <m:t>100</m:t>
+                              </m:r>
+                              <m:r>
+                                <a:rPr lang="en-US" altLang="zh-TW" sz="1600" b="0" i="1" smtClean="0">
+                                  <a:solidFill>
+                                    <a:srgbClr val="1F1F1F"/>
+                                  </a:solidFill>
+                                  <a:effectLst/>
+                                  <a:latin typeface="Cambria Math" panose="02040503050406030204" pitchFamily="18" charset="0"/>
+                                  <a:ea typeface="Cambria Math" panose="02040503050406030204" pitchFamily="18" charset="0"/>
+                                </a:rPr>
+                                <m:t>×</m:t>
+                              </m:r>
+                              <m:f>
+                                <m:fPr>
+                                  <m:ctrlPr>
+                                    <a:rPr lang="en-US" altLang="zh-TW" sz="1600" b="0" i="1" smtClean="0">
+                                      <a:solidFill>
+                                        <a:srgbClr val="1F1F1F"/>
+                                      </a:solidFill>
+                                      <a:effectLst/>
+                                      <a:latin typeface="Cambria Math" panose="02040503050406030204" pitchFamily="18" charset="0"/>
+                                      <a:ea typeface="Cambria Math" panose="02040503050406030204" pitchFamily="18" charset="0"/>
+                                    </a:rPr>
+                                  </m:ctrlPr>
+                                </m:fPr>
+                                <m:num>
+                                  <m:r>
+                                    <a:rPr lang="en-US" altLang="zh-TW" sz="1600" b="0" i="1" smtClean="0">
+                                      <a:solidFill>
+                                        <a:srgbClr val="1F1F1F"/>
+                                      </a:solidFill>
+                                      <a:effectLst/>
+                                      <a:latin typeface="Cambria Math" panose="02040503050406030204" pitchFamily="18" charset="0"/>
+                                      <a:ea typeface="Cambria Math" panose="02040503050406030204" pitchFamily="18" charset="0"/>
+                                    </a:rPr>
+                                    <m:t>32+2</m:t>
+                                  </m:r>
+                                </m:num>
+                                <m:den>
+                                  <m:r>
+                                    <a:rPr lang="en-US" altLang="zh-TW" sz="1600" b="0" i="1" smtClean="0">
+                                      <a:solidFill>
+                                        <a:srgbClr val="1F1F1F"/>
+                                      </a:solidFill>
+                                      <a:effectLst/>
+                                      <a:latin typeface="Cambria Math" panose="02040503050406030204" pitchFamily="18" charset="0"/>
+                                      <a:ea typeface="Cambria Math" panose="02040503050406030204" pitchFamily="18" charset="0"/>
+                                    </a:rPr>
+                                    <m:t>4×2</m:t>
+                                  </m:r>
+                                </m:den>
+                              </m:f>
+                              <m:r>
+                                <a:rPr lang="en-US" altLang="zh-TW" sz="1600" b="0" i="1" smtClean="0">
+                                  <a:solidFill>
+                                    <a:srgbClr val="1F1F1F"/>
+                                  </a:solidFill>
+                                  <a:effectLst/>
+                                  <a:latin typeface="Cambria Math" panose="02040503050406030204" pitchFamily="18" charset="0"/>
+                                  <a:ea typeface="Cambria Math" panose="02040503050406030204" pitchFamily="18" charset="0"/>
+                                </a:rPr>
+                                <m:t>+20×</m:t>
+                              </m:r>
+                              <m:f>
+                                <m:fPr>
+                                  <m:ctrlPr>
+                                    <a:rPr lang="en-US" altLang="zh-TW" sz="1600" b="0" i="1" smtClean="0">
+                                      <a:solidFill>
+                                        <a:srgbClr val="1F1F1F"/>
+                                      </a:solidFill>
+                                      <a:effectLst/>
+                                      <a:latin typeface="Cambria Math" panose="02040503050406030204" pitchFamily="18" charset="0"/>
+                                      <a:ea typeface="Cambria Math" panose="02040503050406030204" pitchFamily="18" charset="0"/>
+                                    </a:rPr>
+                                  </m:ctrlPr>
+                                </m:fPr>
+                                <m:num>
+                                  <m:r>
+                                    <a:rPr lang="en-US" altLang="zh-TW" sz="1600" b="0" i="1" smtClean="0">
+                                      <a:solidFill>
+                                        <a:srgbClr val="1F1F1F"/>
+                                      </a:solidFill>
+                                      <a:effectLst/>
+                                      <a:latin typeface="Cambria Math" panose="02040503050406030204" pitchFamily="18" charset="0"/>
+                                      <a:ea typeface="Cambria Math" panose="02040503050406030204" pitchFamily="18" charset="0"/>
+                                    </a:rPr>
+                                    <m:t>34</m:t>
+                                  </m:r>
+                                </m:num>
+                                <m:den>
+                                  <m:r>
+                                    <a:rPr lang="en-US" altLang="zh-TW" sz="1600" b="0" i="1" smtClean="0">
+                                      <a:solidFill>
+                                        <a:srgbClr val="1F1F1F"/>
+                                      </a:solidFill>
+                                      <a:effectLst/>
+                                      <a:latin typeface="Cambria Math" panose="02040503050406030204" pitchFamily="18" charset="0"/>
+                                      <a:ea typeface="Cambria Math" panose="02040503050406030204" pitchFamily="18" charset="0"/>
+                                    </a:rPr>
+                                    <m:t>2</m:t>
+                                  </m:r>
+                                </m:den>
+                              </m:f>
+                            </m:oMath>
+                          </a14:m>
+                          <a:r>
+                            <a:rPr lang="en-US" altLang="zh-TW" sz="1600" dirty="0">
+                              <a:solidFill>
+                                <a:srgbClr val="1F1F1F"/>
+                              </a:solidFill>
+                              <a:effectLst/>
+                              <a:latin typeface="Google Sans Text"/>
+                            </a:rPr>
+                            <a:t>=765 </a:t>
+                          </a:r>
+                          <a:endParaRPr lang="zh-TW" altLang="en-US" sz="1600" dirty="0">
+                            <a:solidFill>
+                              <a:srgbClr val="1F1F1F"/>
+                            </a:solidFill>
+                            <a:effectLst/>
+                            <a:latin typeface="Google Sans Text"/>
+                          </a:endParaRPr>
+                        </a:p>
+                      </a:txBody>
+                      <a:tcPr marR="114300" marT="152400" marB="152400" anchor="ctr">
+                        <a:lnL w="9525" cap="flat" cmpd="sng" algn="ctr">
+                          <a:solidFill>
+                            <a:schemeClr val="bg1"/>
+                          </a:solidFill>
+                          <a:prstDash val="solid"/>
+                          <a:round/>
+                          <a:headEnd type="none" w="med" len="med"/>
+                          <a:tailEnd type="none" w="med" len="med"/>
+                        </a:lnL>
+                        <a:lnR w="9525" cap="flat" cmpd="sng" algn="ctr">
+                          <a:solidFill>
+                            <a:schemeClr val="bg1"/>
+                          </a:solidFill>
+                          <a:prstDash val="solid"/>
+                          <a:round/>
+                          <a:headEnd type="none" w="med" len="med"/>
+                          <a:tailEnd type="none" w="med" len="med"/>
+                        </a:lnR>
+                        <a:lnT w="9525" cap="flat" cmpd="sng" algn="ctr">
+                          <a:solidFill>
+                            <a:schemeClr val="bg1"/>
+                          </a:solidFill>
+                          <a:prstDash val="solid"/>
+                          <a:round/>
+                          <a:headEnd type="none" w="med" len="med"/>
+                          <a:tailEnd type="none" w="med" len="med"/>
+                        </a:lnT>
+                        <a:lnB w="9525" cap="flat" cmpd="sng" algn="ctr">
+                          <a:solidFill>
+                            <a:schemeClr val="bg1"/>
+                          </a:solidFill>
+                          <a:prstDash val="solid"/>
+                          <a:round/>
+                          <a:headEnd type="none" w="med" len="med"/>
+                          <a:tailEnd type="none" w="med" len="med"/>
+                        </a:lnB>
+                        <a:noFill/>
+                      </a:tcPr>
+                    </a:tc>
+                    <a:tc>
+                      <a:txBody>
+                        <a:bodyPr/>
+                        <a:lstStyle/>
+                        <a:p>
+                          <a:pPr algn="r" rtl="0"/>
+                          <a:r>
+                            <a:rPr lang="en-US" altLang="zh-TW" sz="1600" dirty="0">
+                              <a:solidFill>
+                                <a:srgbClr val="1F1F1F"/>
+                              </a:solidFill>
+                              <a:effectLst/>
+                              <a:latin typeface="Google Sans Text"/>
+                            </a:rPr>
+                            <a:t>0.1197=(32/34)</a:t>
+                          </a:r>
+                          <a:r>
+                            <a:rPr lang="zh-TW" altLang="en-US" sz="1600" dirty="0">
+                              <a:solidFill>
+                                <a:srgbClr val="1F1F1F"/>
+                              </a:solidFill>
+                              <a:effectLst/>
+                              <a:latin typeface="Google Sans Text"/>
+                            </a:rPr>
+                            <a:t>*</a:t>
+                          </a:r>
+                          <a:r>
+                            <a:rPr lang="en-US" altLang="zh-TW" sz="1600" dirty="0">
+                              <a:solidFill>
+                                <a:srgbClr val="1F1F1F"/>
+                              </a:solidFill>
+                              <a:effectLst/>
+                              <a:latin typeface="Google Sans Text"/>
+                            </a:rPr>
+                            <a:t>(2/30)+(2/34)*(32/33)</a:t>
+                          </a:r>
+                        </a:p>
+                      </a:txBody>
+                      <a:tcPr marR="114300" marT="152400" marB="152400" anchor="ctr">
+                        <a:lnL w="9525" cap="flat" cmpd="sng" algn="ctr">
+                          <a:solidFill>
+                            <a:schemeClr val="bg1"/>
+                          </a:solidFill>
+                          <a:prstDash val="solid"/>
+                          <a:round/>
+                          <a:headEnd type="none" w="med" len="med"/>
+                          <a:tailEnd type="none" w="med" len="med"/>
+                        </a:lnL>
+                        <a:lnR w="9525" cap="flat" cmpd="sng" algn="ctr">
+                          <a:solidFill>
+                            <a:schemeClr val="bg1"/>
+                          </a:solidFill>
+                          <a:prstDash val="solid"/>
+                          <a:round/>
+                          <a:headEnd type="none" w="med" len="med"/>
+                          <a:tailEnd type="none" w="med" len="med"/>
+                        </a:lnR>
+                        <a:lnT w="9525" cap="flat" cmpd="sng" algn="ctr">
+                          <a:solidFill>
+                            <a:schemeClr val="bg1"/>
+                          </a:solidFill>
+                          <a:prstDash val="solid"/>
+                          <a:round/>
+                          <a:headEnd type="none" w="med" len="med"/>
+                          <a:tailEnd type="none" w="med" len="med"/>
+                        </a:lnT>
+                        <a:lnB w="9525" cap="flat" cmpd="sng" algn="ctr">
+                          <a:solidFill>
+                            <a:schemeClr val="bg1"/>
+                          </a:solidFill>
+                          <a:prstDash val="solid"/>
+                          <a:round/>
+                          <a:headEnd type="none" w="med" len="med"/>
+                          <a:tailEnd type="none" w="med" len="med"/>
+                        </a:lnB>
+                        <a:noFill/>
+                      </a:tcPr>
+                    </a:tc>
+                    <a:tc>
+                      <a:txBody>
+                        <a:bodyPr/>
+                        <a:lstStyle/>
+                        <a:p>
+                          <a:pPr algn="r" rtl="0"/>
+                          <a:r>
+                            <a:rPr lang="en-US" altLang="zh-TW" sz="1600" b="1">
+                              <a:solidFill>
+                                <a:srgbClr val="1F1F1F"/>
+                              </a:solidFill>
+                              <a:effectLst/>
+                              <a:latin typeface="Google Sans Text"/>
+                            </a:rPr>
+                            <a:t>91.57 </a:t>
+                          </a:r>
+                          <a:r>
+                            <a:rPr lang="zh-TW" altLang="en-US" sz="1600" b="1">
+                              <a:solidFill>
+                                <a:srgbClr val="1F1F1F"/>
+                              </a:solidFill>
+                              <a:effectLst/>
+                              <a:latin typeface="Google Sans Text"/>
+                            </a:rPr>
+                            <a:t>萬</a:t>
+                          </a:r>
+                          <a:endParaRPr lang="zh-TW" altLang="en-US" sz="1600">
+                            <a:solidFill>
+                              <a:srgbClr val="1F1F1F"/>
+                            </a:solidFill>
+                            <a:effectLst/>
+                            <a:latin typeface="Google Sans Text"/>
+                          </a:endParaRPr>
+                        </a:p>
+                      </a:txBody>
+                      <a:tcPr marT="152400" marB="152400" anchor="ctr">
+                        <a:lnL w="9525" cap="flat" cmpd="sng" algn="ctr">
+                          <a:solidFill>
+                            <a:schemeClr val="bg1"/>
+                          </a:solidFill>
+                          <a:prstDash val="solid"/>
+                          <a:round/>
+                          <a:headEnd type="none" w="med" len="med"/>
+                          <a:tailEnd type="none" w="med" len="med"/>
+                        </a:lnL>
+                        <a:lnR w="9525" cap="flat" cmpd="sng" algn="ctr">
+                          <a:solidFill>
+                            <a:schemeClr val="bg1"/>
+                          </a:solidFill>
+                          <a:prstDash val="solid"/>
+                          <a:round/>
+                          <a:headEnd type="none" w="med" len="med"/>
+                          <a:tailEnd type="none" w="med" len="med"/>
+                        </a:lnR>
+                        <a:lnT w="9525" cap="flat" cmpd="sng" algn="ctr">
+                          <a:solidFill>
+                            <a:schemeClr val="bg1"/>
+                          </a:solidFill>
+                          <a:prstDash val="solid"/>
+                          <a:round/>
+                          <a:headEnd type="none" w="med" len="med"/>
+                          <a:tailEnd type="none" w="med" len="med"/>
+                        </a:lnT>
+                        <a:lnB w="9525" cap="flat" cmpd="sng" algn="ctr">
+                          <a:solidFill>
+                            <a:schemeClr val="bg1"/>
+                          </a:solidFill>
+                          <a:prstDash val="solid"/>
+                          <a:round/>
+                          <a:headEnd type="none" w="med" len="med"/>
+                          <a:tailEnd type="none" w="med" len="med"/>
+                        </a:lnB>
+                        <a:noFill/>
+                      </a:tcPr>
+                    </a:tc>
+                    <a:extLst>
+                      <a:ext uri="{0D108BD9-81ED-4DB2-BD59-A6C34878D82A}">
+                        <a16:rowId xmlns:a16="http://schemas.microsoft.com/office/drawing/2014/main" val="2251357188"/>
+                      </a:ext>
+                    </a:extLst>
+                  </a:tr>
+                  <a:tr h="0">
+                    <a:tc>
+                      <a:txBody>
+                        <a:bodyPr/>
+                        <a:lstStyle/>
+                        <a:p>
+                          <a:pPr rtl="0"/>
+                          <a:r>
+                            <a:rPr lang="en-US" altLang="zh-TW" sz="2000" b="0" dirty="0">
+                              <a:solidFill>
+                                <a:srgbClr val="1F1F1F"/>
+                              </a:solidFill>
+                              <a:effectLst/>
+                              <a:latin typeface="Google Sans Text"/>
+                            </a:rPr>
+                            <a:t>2 </a:t>
+                          </a:r>
+                          <a:r>
+                            <a:rPr lang="zh-TW" altLang="en-US" sz="2000" b="0" dirty="0">
+                              <a:solidFill>
+                                <a:srgbClr val="1F1F1F"/>
+                              </a:solidFill>
+                              <a:effectLst/>
+                              <a:latin typeface="Google Sans Text"/>
+                            </a:rPr>
+                            <a:t>窮人</a:t>
+                          </a:r>
+                        </a:p>
+                      </a:txBody>
+                      <a:tcPr marR="114300" marT="152400" marB="152400" anchor="ctr">
+                        <a:lnL w="9525" cap="flat" cmpd="sng" algn="ctr">
+                          <a:solidFill>
+                            <a:schemeClr val="bg1"/>
+                          </a:solidFill>
+                          <a:prstDash val="solid"/>
+                          <a:round/>
+                          <a:headEnd type="none" w="med" len="med"/>
+                          <a:tailEnd type="none" w="med" len="med"/>
+                        </a:lnL>
+                        <a:lnR w="9525" cap="flat" cmpd="sng" algn="ctr">
+                          <a:solidFill>
+                            <a:schemeClr val="bg1"/>
+                          </a:solidFill>
+                          <a:prstDash val="solid"/>
+                          <a:round/>
+                          <a:headEnd type="none" w="med" len="med"/>
+                          <a:tailEnd type="none" w="med" len="med"/>
+                        </a:lnR>
+                        <a:lnT w="9525" cap="flat" cmpd="sng" algn="ctr">
+                          <a:solidFill>
+                            <a:schemeClr val="bg1"/>
+                          </a:solidFill>
+                          <a:prstDash val="solid"/>
+                          <a:round/>
+                          <a:headEnd type="none" w="med" len="med"/>
+                          <a:tailEnd type="none" w="med" len="med"/>
+                        </a:lnT>
+                        <a:lnB w="9525" cap="flat" cmpd="sng" algn="ctr">
+                          <a:solidFill>
+                            <a:schemeClr val="bg1"/>
+                          </a:solidFill>
+                          <a:prstDash val="solid"/>
+                          <a:round/>
+                          <a:headEnd type="none" w="med" len="med"/>
+                          <a:tailEnd type="none" w="med" len="med"/>
+                        </a:lnB>
+                        <a:noFill/>
+                      </a:tcPr>
+                    </a:tc>
+                    <a:tc>
+                      <a:txBody>
+                        <a:bodyPr/>
+                        <a:lstStyle/>
+                        <a:p>
+                          <a:pPr algn="r" rtl="0"/>
+                          <a14:m>
+                            <m:oMath xmlns:m="http://schemas.openxmlformats.org/officeDocument/2006/math">
+                              <m:r>
+                                <a:rPr lang="en-US" altLang="zh-TW" sz="1600" b="0" i="1" smtClean="0">
+                                  <a:solidFill>
+                                    <a:srgbClr val="1F1F1F"/>
+                                  </a:solidFill>
+                                  <a:effectLst/>
+                                  <a:latin typeface="Cambria Math" panose="02040503050406030204" pitchFamily="18" charset="0"/>
+                                </a:rPr>
+                                <m:t>20</m:t>
+                              </m:r>
+                              <m:r>
+                                <a:rPr lang="en-US" altLang="zh-TW" sz="1600" b="0" i="1" smtClean="0">
+                                  <a:solidFill>
+                                    <a:srgbClr val="1F1F1F"/>
+                                  </a:solidFill>
+                                  <a:effectLst/>
+                                  <a:latin typeface="Cambria Math" panose="02040503050406030204" pitchFamily="18" charset="0"/>
+                                  <a:ea typeface="Cambria Math" panose="02040503050406030204" pitchFamily="18" charset="0"/>
+                                </a:rPr>
+                                <m:t>×34+20×34=</m:t>
+                              </m:r>
+                            </m:oMath>
+                          </a14:m>
+                          <a:r>
+                            <a:rPr lang="en-US" altLang="zh-TW" sz="1600" dirty="0">
+                              <a:solidFill>
+                                <a:srgbClr val="1F1F1F"/>
+                              </a:solidFill>
+                              <a:effectLst/>
+                              <a:latin typeface="Google Sans Text"/>
+                            </a:rPr>
+                            <a:t>1360 </a:t>
+                          </a:r>
+                          <a:endParaRPr lang="zh-TW" altLang="en-US" sz="1600" dirty="0">
+                            <a:solidFill>
+                              <a:srgbClr val="1F1F1F"/>
+                            </a:solidFill>
+                            <a:effectLst/>
+                            <a:latin typeface="Google Sans Text"/>
+                          </a:endParaRPr>
+                        </a:p>
+                      </a:txBody>
+                      <a:tcPr marR="114300" marT="152400" marB="152400" anchor="ctr">
+                        <a:lnL w="9525" cap="flat" cmpd="sng" algn="ctr">
+                          <a:solidFill>
+                            <a:schemeClr val="bg1"/>
+                          </a:solidFill>
+                          <a:prstDash val="solid"/>
+                          <a:round/>
+                          <a:headEnd type="none" w="med" len="med"/>
+                          <a:tailEnd type="none" w="med" len="med"/>
+                        </a:lnL>
+                        <a:lnR w="9525" cap="flat" cmpd="sng" algn="ctr">
+                          <a:solidFill>
+                            <a:schemeClr val="bg1"/>
+                          </a:solidFill>
+                          <a:prstDash val="solid"/>
+                          <a:round/>
+                          <a:headEnd type="none" w="med" len="med"/>
+                          <a:tailEnd type="none" w="med" len="med"/>
+                        </a:lnR>
+                        <a:lnT w="9525" cap="flat" cmpd="sng" algn="ctr">
+                          <a:solidFill>
+                            <a:schemeClr val="bg1"/>
+                          </a:solidFill>
+                          <a:prstDash val="solid"/>
+                          <a:round/>
+                          <a:headEnd type="none" w="med" len="med"/>
+                          <a:tailEnd type="none" w="med" len="med"/>
+                        </a:lnT>
+                        <a:lnB w="9525" cap="flat" cmpd="sng" algn="ctr">
+                          <a:solidFill>
+                            <a:schemeClr val="bg1"/>
+                          </a:solidFill>
+                          <a:prstDash val="solid"/>
+                          <a:round/>
+                          <a:headEnd type="none" w="med" len="med"/>
+                          <a:tailEnd type="none" w="med" len="med"/>
+                        </a:lnB>
+                        <a:noFill/>
+                      </a:tcPr>
+                    </a:tc>
+                    <a:tc>
+                      <a:txBody>
+                        <a:bodyPr/>
+                        <a:lstStyle/>
+                        <a:p>
+                          <a:pPr algn="r" rtl="0"/>
+                          <a:r>
+                            <a:rPr lang="en-US" altLang="zh-TW" sz="1600" dirty="0">
+                              <a:solidFill>
+                                <a:srgbClr val="1F1F1F"/>
+                              </a:solidFill>
+                              <a:effectLst/>
+                              <a:latin typeface="Google Sans Text"/>
+                            </a:rPr>
+                            <a:t>0.0018=(2/34)</a:t>
+                          </a:r>
+                          <a:r>
+                            <a:rPr lang="zh-TW" altLang="en-US" sz="1600" dirty="0">
+                              <a:solidFill>
+                                <a:srgbClr val="1F1F1F"/>
+                              </a:solidFill>
+                              <a:effectLst/>
+                              <a:latin typeface="Google Sans Text"/>
+                            </a:rPr>
+                            <a:t>*</a:t>
+                          </a:r>
+                          <a:r>
+                            <a:rPr lang="en-US" altLang="zh-TW" sz="1600" dirty="0">
+                              <a:solidFill>
+                                <a:srgbClr val="1F1F1F"/>
+                              </a:solidFill>
+                              <a:effectLst/>
+                              <a:latin typeface="Google Sans Text"/>
+                            </a:rPr>
+                            <a:t>(1/33)</a:t>
+                          </a:r>
+                        </a:p>
+                      </a:txBody>
+                      <a:tcPr marR="114300" marT="152400" marB="152400" anchor="ctr">
+                        <a:lnL w="9525" cap="flat" cmpd="sng" algn="ctr">
+                          <a:solidFill>
+                            <a:schemeClr val="bg1"/>
+                          </a:solidFill>
+                          <a:prstDash val="solid"/>
+                          <a:round/>
+                          <a:headEnd type="none" w="med" len="med"/>
+                          <a:tailEnd type="none" w="med" len="med"/>
+                        </a:lnL>
+                        <a:lnR w="9525" cap="flat" cmpd="sng" algn="ctr">
+                          <a:solidFill>
+                            <a:schemeClr val="bg1"/>
+                          </a:solidFill>
+                          <a:prstDash val="solid"/>
+                          <a:round/>
+                          <a:headEnd type="none" w="med" len="med"/>
+                          <a:tailEnd type="none" w="med" len="med"/>
+                        </a:lnR>
+                        <a:lnT w="9525" cap="flat" cmpd="sng" algn="ctr">
+                          <a:solidFill>
+                            <a:schemeClr val="bg1"/>
+                          </a:solidFill>
+                          <a:prstDash val="solid"/>
+                          <a:round/>
+                          <a:headEnd type="none" w="med" len="med"/>
+                          <a:tailEnd type="none" w="med" len="med"/>
+                        </a:lnT>
+                        <a:lnB w="9525" cap="flat" cmpd="sng" algn="ctr">
+                          <a:solidFill>
+                            <a:schemeClr val="bg1"/>
+                          </a:solidFill>
+                          <a:prstDash val="solid"/>
+                          <a:round/>
+                          <a:headEnd type="none" w="med" len="med"/>
+                          <a:tailEnd type="none" w="med" len="med"/>
+                        </a:lnB>
+                        <a:noFill/>
+                      </a:tcPr>
+                    </a:tc>
+                    <a:tc>
+                      <a:txBody>
+                        <a:bodyPr/>
+                        <a:lstStyle/>
+                        <a:p>
+                          <a:pPr algn="r" rtl="0"/>
+                          <a:r>
+                            <a:rPr lang="en-US" altLang="zh-TW" sz="1600" b="1">
+                              <a:solidFill>
+                                <a:srgbClr val="1F1F1F"/>
+                              </a:solidFill>
+                              <a:effectLst/>
+                              <a:latin typeface="Google Sans Text"/>
+                            </a:rPr>
+                            <a:t>1.22 </a:t>
+                          </a:r>
+                          <a:r>
+                            <a:rPr lang="zh-TW" altLang="en-US" sz="1600" b="1">
+                              <a:solidFill>
+                                <a:srgbClr val="1F1F1F"/>
+                              </a:solidFill>
+                              <a:effectLst/>
+                              <a:latin typeface="Google Sans Text"/>
+                            </a:rPr>
+                            <a:t>萬</a:t>
+                          </a:r>
+                          <a:endParaRPr lang="zh-TW" altLang="en-US" sz="1600">
+                            <a:solidFill>
+                              <a:srgbClr val="1F1F1F"/>
+                            </a:solidFill>
+                            <a:effectLst/>
+                            <a:latin typeface="Google Sans Text"/>
+                          </a:endParaRPr>
+                        </a:p>
+                      </a:txBody>
+                      <a:tcPr marT="152400" marB="152400" anchor="ctr">
+                        <a:lnL w="9525" cap="flat" cmpd="sng" algn="ctr">
+                          <a:solidFill>
+                            <a:schemeClr val="bg1"/>
+                          </a:solidFill>
+                          <a:prstDash val="solid"/>
+                          <a:round/>
+                          <a:headEnd type="none" w="med" len="med"/>
+                          <a:tailEnd type="none" w="med" len="med"/>
+                        </a:lnL>
+                        <a:lnR w="9525" cap="flat" cmpd="sng" algn="ctr">
+                          <a:solidFill>
+                            <a:schemeClr val="bg1"/>
+                          </a:solidFill>
+                          <a:prstDash val="solid"/>
+                          <a:round/>
+                          <a:headEnd type="none" w="med" len="med"/>
+                          <a:tailEnd type="none" w="med" len="med"/>
+                        </a:lnR>
+                        <a:lnT w="9525" cap="flat" cmpd="sng" algn="ctr">
+                          <a:solidFill>
+                            <a:schemeClr val="bg1"/>
+                          </a:solidFill>
+                          <a:prstDash val="solid"/>
+                          <a:round/>
+                          <a:headEnd type="none" w="med" len="med"/>
+                          <a:tailEnd type="none" w="med" len="med"/>
+                        </a:lnT>
+                        <a:lnB w="9525" cap="flat" cmpd="sng" algn="ctr">
+                          <a:solidFill>
+                            <a:schemeClr val="bg1"/>
+                          </a:solidFill>
+                          <a:prstDash val="solid"/>
+                          <a:round/>
+                          <a:headEnd type="none" w="med" len="med"/>
+                          <a:tailEnd type="none" w="med" len="med"/>
+                        </a:lnB>
+                        <a:noFill/>
+                      </a:tcPr>
+                    </a:tc>
+                    <a:extLst>
+                      <a:ext uri="{0D108BD9-81ED-4DB2-BD59-A6C34878D82A}">
+                        <a16:rowId xmlns:a16="http://schemas.microsoft.com/office/drawing/2014/main" val="3926020851"/>
+                      </a:ext>
+                    </a:extLst>
+                  </a:tr>
+                  <a:tr h="0">
+                    <a:tc>
+                      <a:txBody>
+                        <a:bodyPr/>
+                        <a:lstStyle/>
+                        <a:p>
+                          <a:pPr rtl="0"/>
+                          <a:r>
+                            <a:rPr lang="zh-TW" altLang="en-US" sz="2000" b="0" dirty="0">
+                              <a:solidFill>
+                                <a:srgbClr val="1F1F1F"/>
+                              </a:solidFill>
+                              <a:effectLst/>
+                              <a:latin typeface="Google Sans Text"/>
+                            </a:rPr>
+                            <a:t>總計</a:t>
+                          </a:r>
+                        </a:p>
+                      </a:txBody>
+                      <a:tcPr marR="114300" marT="152400" marB="152400" anchor="ctr">
+                        <a:lnL w="9525" cap="flat" cmpd="sng" algn="ctr">
+                          <a:solidFill>
+                            <a:schemeClr val="bg1"/>
+                          </a:solidFill>
+                          <a:prstDash val="solid"/>
+                          <a:round/>
+                          <a:headEnd type="none" w="med" len="med"/>
+                          <a:tailEnd type="none" w="med" len="med"/>
+                        </a:lnL>
+                        <a:lnR w="9525" cap="flat" cmpd="sng" algn="ctr">
+                          <a:solidFill>
+                            <a:schemeClr val="bg1"/>
+                          </a:solidFill>
+                          <a:prstDash val="solid"/>
+                          <a:round/>
+                          <a:headEnd type="none" w="med" len="med"/>
+                          <a:tailEnd type="none" w="med" len="med"/>
+                        </a:lnR>
+                        <a:lnT w="9525" cap="flat" cmpd="sng" algn="ctr">
+                          <a:solidFill>
+                            <a:schemeClr val="bg1"/>
+                          </a:solidFill>
+                          <a:prstDash val="solid"/>
+                          <a:round/>
+                          <a:headEnd type="none" w="med" len="med"/>
+                          <a:tailEnd type="none" w="med" len="med"/>
+                        </a:lnT>
+                        <a:lnB w="9525" cap="flat" cmpd="sng" algn="ctr">
+                          <a:solidFill>
+                            <a:schemeClr val="bg1"/>
+                          </a:solidFill>
+                          <a:prstDash val="solid"/>
+                          <a:round/>
+                          <a:headEnd type="none" w="med" len="med"/>
+                          <a:tailEnd type="none" w="med" len="med"/>
+                        </a:lnB>
+                        <a:noFill/>
+                      </a:tcPr>
+                    </a:tc>
+                    <a:tc>
+                      <a:txBody>
+                        <a:bodyPr/>
+                        <a:lstStyle/>
+                        <a:p>
+                          <a:pPr algn="r" rtl="0"/>
+                          <a:endParaRPr lang="zh-TW" altLang="en-US" sz="1600" dirty="0">
+                            <a:solidFill>
+                              <a:srgbClr val="1F1F1F"/>
+                            </a:solidFill>
+                            <a:effectLst/>
+                            <a:latin typeface="Google Sans Text"/>
+                          </a:endParaRPr>
+                        </a:p>
+                      </a:txBody>
+                      <a:tcPr marR="114300" marT="152400" marB="152400" anchor="ctr">
+                        <a:lnL w="9525" cap="flat" cmpd="sng" algn="ctr">
+                          <a:solidFill>
+                            <a:schemeClr val="bg1"/>
+                          </a:solidFill>
+                          <a:prstDash val="solid"/>
+                          <a:round/>
+                          <a:headEnd type="none" w="med" len="med"/>
+                          <a:tailEnd type="none" w="med" len="med"/>
+                        </a:lnL>
+                        <a:lnR w="9525" cap="flat" cmpd="sng" algn="ctr">
+                          <a:solidFill>
+                            <a:schemeClr val="bg1"/>
+                          </a:solidFill>
+                          <a:prstDash val="solid"/>
+                          <a:round/>
+                          <a:headEnd type="none" w="med" len="med"/>
+                          <a:tailEnd type="none" w="med" len="med"/>
+                        </a:lnR>
+                        <a:lnT w="9525" cap="flat" cmpd="sng" algn="ctr">
+                          <a:solidFill>
+                            <a:schemeClr val="bg1"/>
+                          </a:solidFill>
+                          <a:prstDash val="solid"/>
+                          <a:round/>
+                          <a:headEnd type="none" w="med" len="med"/>
+                          <a:tailEnd type="none" w="med" len="med"/>
+                        </a:lnT>
+                        <a:lnB w="9525" cap="flat" cmpd="sng" algn="ctr">
+                          <a:solidFill>
+                            <a:schemeClr val="bg1"/>
+                          </a:solidFill>
+                          <a:prstDash val="solid"/>
+                          <a:round/>
+                          <a:headEnd type="none" w="med" len="med"/>
+                          <a:tailEnd type="none" w="med" len="med"/>
+                        </a:lnB>
+                        <a:noFill/>
+                      </a:tcPr>
+                    </a:tc>
+                    <a:tc>
+                      <a:txBody>
+                        <a:bodyPr/>
+                        <a:lstStyle/>
+                        <a:p>
+                          <a:pPr algn="r" rtl="0"/>
+                          <a:r>
+                            <a:rPr lang="en-US" altLang="zh-TW" sz="1600" b="1" dirty="0">
+                              <a:solidFill>
+                                <a:srgbClr val="1F1F1F"/>
+                              </a:solidFill>
+                              <a:effectLst/>
+                              <a:latin typeface="Google Sans Text"/>
+                            </a:rPr>
+                            <a:t>1.0000</a:t>
+                          </a:r>
+                          <a:endParaRPr lang="zh-TW" altLang="en-US" sz="1600" dirty="0">
+                            <a:solidFill>
+                              <a:srgbClr val="1F1F1F"/>
+                            </a:solidFill>
+                            <a:effectLst/>
+                            <a:latin typeface="Google Sans Text"/>
+                          </a:endParaRPr>
+                        </a:p>
+                      </a:txBody>
+                      <a:tcPr marR="114300" marT="152400" marB="152400" anchor="ctr">
+                        <a:lnL w="9525" cap="flat" cmpd="sng" algn="ctr">
+                          <a:solidFill>
+                            <a:schemeClr val="bg1"/>
+                          </a:solidFill>
+                          <a:prstDash val="solid"/>
+                          <a:round/>
+                          <a:headEnd type="none" w="med" len="med"/>
+                          <a:tailEnd type="none" w="med" len="med"/>
+                        </a:lnL>
+                        <a:lnR w="9525" cap="flat" cmpd="sng" algn="ctr">
+                          <a:solidFill>
+                            <a:schemeClr val="bg1"/>
+                          </a:solidFill>
+                          <a:prstDash val="solid"/>
+                          <a:round/>
+                          <a:headEnd type="none" w="med" len="med"/>
+                          <a:tailEnd type="none" w="med" len="med"/>
+                        </a:lnR>
+                        <a:lnT w="9525" cap="flat" cmpd="sng" algn="ctr">
+                          <a:solidFill>
+                            <a:schemeClr val="bg1"/>
+                          </a:solidFill>
+                          <a:prstDash val="solid"/>
+                          <a:round/>
+                          <a:headEnd type="none" w="med" len="med"/>
+                          <a:tailEnd type="none" w="med" len="med"/>
+                        </a:lnT>
+                        <a:lnB w="9525" cap="flat" cmpd="sng" algn="ctr">
+                          <a:solidFill>
+                            <a:schemeClr val="bg1"/>
+                          </a:solidFill>
+                          <a:prstDash val="solid"/>
+                          <a:round/>
+                          <a:headEnd type="none" w="med" len="med"/>
+                          <a:tailEnd type="none" w="med" len="med"/>
+                        </a:lnB>
+                        <a:noFill/>
+                      </a:tcPr>
+                    </a:tc>
+                    <a:tc>
+                      <a:txBody>
+                        <a:bodyPr/>
+                        <a:lstStyle/>
+                        <a:p>
+                          <a:pPr algn="r" rtl="0"/>
+                          <a:r>
+                            <a:rPr lang="en-US" altLang="zh-TW" sz="1600" b="1" dirty="0">
+                              <a:solidFill>
+                                <a:srgbClr val="1F1F1F"/>
+                              </a:solidFill>
+                              <a:effectLst/>
+                              <a:latin typeface="Google Sans Text"/>
+                            </a:rPr>
+                            <a:t>839.43 </a:t>
+                          </a:r>
+                          <a:r>
+                            <a:rPr lang="zh-TW" altLang="en-US" sz="1600" b="1" dirty="0">
+                              <a:solidFill>
+                                <a:srgbClr val="1F1F1F"/>
+                              </a:solidFill>
+                              <a:effectLst/>
+                              <a:latin typeface="Google Sans Text"/>
+                            </a:rPr>
+                            <a:t>萬</a:t>
+                          </a:r>
+                          <a:endParaRPr lang="zh-TW" altLang="en-US" sz="1600" dirty="0">
+                            <a:solidFill>
+                              <a:srgbClr val="1F1F1F"/>
+                            </a:solidFill>
+                            <a:effectLst/>
+                            <a:latin typeface="Google Sans Text"/>
+                          </a:endParaRPr>
+                        </a:p>
+                      </a:txBody>
+                      <a:tcPr marT="152400" marB="152400" anchor="ctr">
+                        <a:lnL w="9525" cap="flat" cmpd="sng" algn="ctr">
+                          <a:solidFill>
+                            <a:schemeClr val="bg1"/>
+                          </a:solidFill>
+                          <a:prstDash val="solid"/>
+                          <a:round/>
+                          <a:headEnd type="none" w="med" len="med"/>
+                          <a:tailEnd type="none" w="med" len="med"/>
+                        </a:lnL>
+                        <a:lnR w="9525" cap="flat" cmpd="sng" algn="ctr">
+                          <a:solidFill>
+                            <a:schemeClr val="bg1"/>
+                          </a:solidFill>
+                          <a:prstDash val="solid"/>
+                          <a:round/>
+                          <a:headEnd type="none" w="med" len="med"/>
+                          <a:tailEnd type="none" w="med" len="med"/>
+                        </a:lnR>
+                        <a:lnT w="9525" cap="flat" cmpd="sng" algn="ctr">
+                          <a:solidFill>
+                            <a:schemeClr val="bg1"/>
+                          </a:solidFill>
+                          <a:prstDash val="solid"/>
+                          <a:round/>
+                          <a:headEnd type="none" w="med" len="med"/>
+                          <a:tailEnd type="none" w="med" len="med"/>
+                        </a:lnT>
+                        <a:lnB w="9525" cap="flat" cmpd="sng" algn="ctr">
+                          <a:solidFill>
+                            <a:schemeClr val="bg1"/>
+                          </a:solidFill>
+                          <a:prstDash val="solid"/>
+                          <a:round/>
+                          <a:headEnd type="none" w="med" len="med"/>
+                          <a:tailEnd type="none" w="med" len="med"/>
+                        </a:lnB>
+                        <a:noFill/>
+                      </a:tcPr>
+                    </a:tc>
+                    <a:extLst>
+                      <a:ext uri="{0D108BD9-81ED-4DB2-BD59-A6C34878D82A}">
+                        <a16:rowId xmlns:a16="http://schemas.microsoft.com/office/drawing/2014/main" val="124635869"/>
+                      </a:ext>
+                    </a:extLst>
+                  </a:tr>
+                </a:tbl>
+              </a:graphicData>
+            </a:graphic>
+          </p:graphicFrame>
+        </mc:Choice>
+        <mc:Fallback>
+          <p:graphicFrame>
+            <p:nvGraphicFramePr>
+              <p:cNvPr id="3" name="表格 2">
                 <a:extLst>
-                  <a:ext uri="{0D108BD9-81ED-4DB2-BD59-A6C34878D82A}">
-                    <a16:rowId xmlns:a16="http://schemas.microsoft.com/office/drawing/2014/main" val="477083205"/>
+                  <a:ext uri="{FF2B5EF4-FFF2-40B4-BE49-F238E27FC236}">
+                    <a16:creationId xmlns:a16="http://schemas.microsoft.com/office/drawing/2014/main" id="{58ABDC07-D2D8-76EB-255B-5B03BE0D1E35}"/>
                   </a:ext>
                 </a:extLst>
-              </a:tr>
-              <a:tr h="0">
-                <a:tc>
-                  <a:txBody>
-                    <a:bodyPr/>
-                    <a:lstStyle/>
-                    <a:p>
-                      <a:pPr rtl="0"/>
-                      <a:r>
-                        <a:rPr lang="en-US" altLang="zh-TW" sz="2000" b="1" dirty="0">
+              </p:cNvPr>
+              <p:cNvGraphicFramePr>
+                <a:graphicFrameLocks noGrp="1"/>
+              </p:cNvGraphicFramePr>
+              <p:nvPr>
+                <p:extLst>
+                  <p:ext uri="{D42A27DB-BD31-4B8C-83A1-F6EECF244321}">
+                    <p14:modId xmlns:p14="http://schemas.microsoft.com/office/powerpoint/2010/main" val="2619474064"/>
+                  </p:ext>
+                </p:extLst>
+              </p:nvPr>
+            </p:nvGraphicFramePr>
+            <p:xfrm>
+              <a:off x="1425039" y="2553494"/>
+              <a:ext cx="9262754" cy="3659886"/>
+            </p:xfrm>
+            <a:graphic>
+              <a:graphicData uri="http://schemas.openxmlformats.org/drawingml/2006/table">
+                <a:tbl>
+                  <a:tblPr/>
+                  <a:tblGrid>
+                    <a:gridCol w="1288344">
+                      <a:extLst>
+                        <a:ext uri="{9D8B030D-6E8A-4147-A177-3AD203B41FA5}">
+                          <a16:colId xmlns:a16="http://schemas.microsoft.com/office/drawing/2014/main" val="1092537034"/>
+                        </a:ext>
+                      </a:extLst>
+                    </a:gridCol>
+                    <a:gridCol w="2027582">
+                      <a:extLst>
+                        <a:ext uri="{9D8B030D-6E8A-4147-A177-3AD203B41FA5}">
+                          <a16:colId xmlns:a16="http://schemas.microsoft.com/office/drawing/2014/main" val="4071730486"/>
+                        </a:ext>
+                      </a:extLst>
+                    </a:gridCol>
+                    <a:gridCol w="3680804">
+                      <a:extLst>
+                        <a:ext uri="{9D8B030D-6E8A-4147-A177-3AD203B41FA5}">
+                          <a16:colId xmlns:a16="http://schemas.microsoft.com/office/drawing/2014/main" val="555145253"/>
+                        </a:ext>
+                      </a:extLst>
+                    </a:gridCol>
+                    <a:gridCol w="2266024">
+                      <a:extLst>
+                        <a:ext uri="{9D8B030D-6E8A-4147-A177-3AD203B41FA5}">
+                          <a16:colId xmlns:a16="http://schemas.microsoft.com/office/drawing/2014/main" val="3059292820"/>
+                        </a:ext>
+                      </a:extLst>
+                    </a:gridCol>
+                  </a:tblGrid>
+                  <a:tr h="617855">
+                    <a:tc>
+                      <a:txBody>
+                        <a:bodyPr/>
+                        <a:lstStyle/>
+                        <a:p>
+                          <a:pPr rtl="0"/>
+                          <a:r>
+                            <a:rPr lang="zh-TW" altLang="en-US" sz="2000" b="1" dirty="0">
+                              <a:solidFill>
+                                <a:srgbClr val="1F1F1F"/>
+                              </a:solidFill>
+                              <a:effectLst/>
+                              <a:latin typeface="Google Sans Text"/>
+                            </a:rPr>
+                            <a:t>組合</a:t>
+                          </a:r>
+                        </a:p>
+                      </a:txBody>
+                      <a:tcPr marR="114300" marT="152400" marB="152400" anchor="ctr">
+                        <a:lnL w="9525" cap="flat" cmpd="sng" algn="ctr">
                           <a:solidFill>
-                            <a:srgbClr val="1F1F1F"/>
+                            <a:schemeClr val="bg1"/>
                           </a:solidFill>
-                          <a:effectLst/>
-                          <a:latin typeface="Google Sans Text"/>
-                        </a:rPr>
-                        <a:t>1 </a:t>
-                      </a:r>
-                      <a:r>
-                        <a:rPr lang="zh-TW" altLang="en-US" sz="2000" b="1" dirty="0">
+                          <a:prstDash val="solid"/>
+                          <a:round/>
+                          <a:headEnd type="none" w="med" len="med"/>
+                          <a:tailEnd type="none" w="med" len="med"/>
+                        </a:lnL>
+                        <a:lnR w="9525" cap="flat" cmpd="sng" algn="ctr">
                           <a:solidFill>
-                            <a:srgbClr val="1F1F1F"/>
+                            <a:schemeClr val="bg1"/>
                           </a:solidFill>
-                          <a:effectLst/>
-                          <a:latin typeface="Google Sans Text"/>
-                        </a:rPr>
-                        <a:t>富 </a:t>
-                      </a:r>
-                      <a:r>
-                        <a:rPr lang="en-US" altLang="zh-TW" sz="2000" b="1" dirty="0">
+                          <a:prstDash val="solid"/>
+                          <a:round/>
+                          <a:headEnd type="none" w="med" len="med"/>
+                          <a:tailEnd type="none" w="med" len="med"/>
+                        </a:lnR>
+                        <a:lnT w="9525" cap="flat" cmpd="sng" algn="ctr">
                           <a:solidFill>
-                            <a:srgbClr val="1F1F1F"/>
+                            <a:schemeClr val="bg1"/>
                           </a:solidFill>
-                          <a:effectLst/>
-                          <a:latin typeface="Google Sans Text"/>
-                        </a:rPr>
-                        <a:t>1 </a:t>
-                      </a:r>
-                      <a:r>
-                        <a:rPr lang="zh-TW" altLang="en-US" sz="2000" b="1" dirty="0">
+                          <a:prstDash val="solid"/>
+                          <a:round/>
+                          <a:headEnd type="none" w="med" len="med"/>
+                          <a:tailEnd type="none" w="med" len="med"/>
+                        </a:lnT>
+                        <a:lnB w="9525" cap="flat" cmpd="sng" algn="ctr">
                           <a:solidFill>
-                            <a:srgbClr val="1F1F1F"/>
+                            <a:schemeClr val="bg1"/>
                           </a:solidFill>
-                          <a:effectLst/>
-                          <a:latin typeface="Google Sans Text"/>
-                        </a:rPr>
-                        <a:t>窮</a:t>
-                      </a:r>
-                      <a:endParaRPr lang="zh-TW" altLang="en-US" sz="2000" dirty="0">
-                        <a:solidFill>
-                          <a:srgbClr val="1F1F1F"/>
-                        </a:solidFill>
-                        <a:effectLst/>
-                        <a:latin typeface="Google Sans Text"/>
-                      </a:endParaRPr>
-                    </a:p>
-                  </a:txBody>
-                  <a:tcPr marR="114300" marT="152400" marB="152400" anchor="ctr">
-                    <a:lnL w="9525" cap="flat" cmpd="sng" algn="ctr">
-                      <a:solidFill>
-                        <a:schemeClr val="bg1"/>
-                      </a:solidFill>
-                      <a:prstDash val="solid"/>
-                      <a:round/>
-                      <a:headEnd type="none" w="med" len="med"/>
-                      <a:tailEnd type="none" w="med" len="med"/>
-                    </a:lnL>
-                    <a:lnR w="9525" cap="flat" cmpd="sng" algn="ctr">
-                      <a:solidFill>
-                        <a:schemeClr val="bg1"/>
-                      </a:solidFill>
-                      <a:prstDash val="solid"/>
-                      <a:round/>
-                      <a:headEnd type="none" w="med" len="med"/>
-                      <a:tailEnd type="none" w="med" len="med"/>
-                    </a:lnR>
-                    <a:lnT w="9525" cap="flat" cmpd="sng" algn="ctr">
-                      <a:solidFill>
-                        <a:schemeClr val="bg1"/>
-                      </a:solidFill>
-                      <a:prstDash val="solid"/>
-                      <a:round/>
-                      <a:headEnd type="none" w="med" len="med"/>
-                      <a:tailEnd type="none" w="med" len="med"/>
-                    </a:lnT>
-                    <a:lnB w="9525" cap="flat" cmpd="sng" algn="ctr">
-                      <a:solidFill>
-                        <a:schemeClr val="bg1"/>
-                      </a:solidFill>
-                      <a:prstDash val="solid"/>
-                      <a:round/>
-                      <a:headEnd type="none" w="med" len="med"/>
-                      <a:tailEnd type="none" w="med" len="med"/>
-                    </a:lnB>
-                    <a:noFill/>
-                  </a:tcPr>
-                </a:tc>
-                <a:tc>
-                  <a:txBody>
-                    <a:bodyPr/>
-                    <a:lstStyle/>
-                    <a:p>
-                      <a:pPr rtl="0"/>
-                      <a:r>
-                        <a:rPr lang="en-US" altLang="zh-TW" sz="2000">
+                          <a:prstDash val="solid"/>
+                          <a:round/>
+                          <a:headEnd type="none" w="med" len="med"/>
+                          <a:tailEnd type="none" w="med" len="med"/>
+                        </a:lnB>
+                        <a:noFill/>
+                      </a:tcPr>
+                    </a:tc>
+                    <a:tc>
+                      <a:txBody>
+                        <a:bodyPr/>
+                        <a:lstStyle/>
+                        <a:p>
+                          <a:endParaRPr lang="zh-TW"/>
+                        </a:p>
+                      </a:txBody>
+                      <a:tcPr marR="114300" marT="152400" marB="152400" anchor="ctr">
+                        <a:lnL w="9525" cap="flat" cmpd="sng" algn="ctr">
                           <a:solidFill>
-                            <a:srgbClr val="1F1F1F"/>
+                            <a:schemeClr val="bg1"/>
                           </a:solidFill>
-                          <a:effectLst/>
-                          <a:latin typeface="Google Sans Text"/>
-                        </a:rPr>
-                        <a:t>765 </a:t>
-                      </a:r>
-                      <a:r>
-                        <a:rPr lang="zh-TW" altLang="en-US" sz="2000">
+                          <a:prstDash val="solid"/>
+                          <a:round/>
+                          <a:headEnd type="none" w="med" len="med"/>
+                          <a:tailEnd type="none" w="med" len="med"/>
+                        </a:lnL>
+                        <a:lnR w="9525" cap="flat" cmpd="sng" algn="ctr">
                           <a:solidFill>
-                            <a:srgbClr val="1F1F1F"/>
+                            <a:schemeClr val="bg1"/>
                           </a:solidFill>
-                          <a:effectLst/>
-                          <a:latin typeface="Google Sans Text"/>
-                        </a:rPr>
-                        <a:t>萬</a:t>
-                      </a:r>
-                    </a:p>
-                  </a:txBody>
-                  <a:tcPr marR="114300" marT="152400" marB="152400" anchor="ctr">
-                    <a:lnL w="9525" cap="flat" cmpd="sng" algn="ctr">
-                      <a:solidFill>
-                        <a:schemeClr val="bg1"/>
-                      </a:solidFill>
-                      <a:prstDash val="solid"/>
-                      <a:round/>
-                      <a:headEnd type="none" w="med" len="med"/>
-                      <a:tailEnd type="none" w="med" len="med"/>
-                    </a:lnL>
-                    <a:lnR w="9525" cap="flat" cmpd="sng" algn="ctr">
-                      <a:solidFill>
-                        <a:schemeClr val="bg1"/>
-                      </a:solidFill>
-                      <a:prstDash val="solid"/>
-                      <a:round/>
-                      <a:headEnd type="none" w="med" len="med"/>
-                      <a:tailEnd type="none" w="med" len="med"/>
-                    </a:lnR>
-                    <a:lnT w="9525" cap="flat" cmpd="sng" algn="ctr">
-                      <a:solidFill>
-                        <a:schemeClr val="bg1"/>
-                      </a:solidFill>
-                      <a:prstDash val="solid"/>
-                      <a:round/>
-                      <a:headEnd type="none" w="med" len="med"/>
-                      <a:tailEnd type="none" w="med" len="med"/>
-                    </a:lnT>
-                    <a:lnB w="9525" cap="flat" cmpd="sng" algn="ctr">
-                      <a:solidFill>
-                        <a:schemeClr val="bg1"/>
-                      </a:solidFill>
-                      <a:prstDash val="solid"/>
-                      <a:round/>
-                      <a:headEnd type="none" w="med" len="med"/>
-                      <a:tailEnd type="none" w="med" len="med"/>
-                    </a:lnB>
-                    <a:noFill/>
-                  </a:tcPr>
-                </a:tc>
-                <a:tc>
-                  <a:txBody>
-                    <a:bodyPr/>
-                    <a:lstStyle/>
-                    <a:p>
-                      <a:pPr rtl="0"/>
-                      <a:r>
-                        <a:rPr lang="en-US" altLang="zh-TW" sz="2000">
+                          <a:prstDash val="solid"/>
+                          <a:round/>
+                          <a:headEnd type="none" w="med" len="med"/>
+                          <a:tailEnd type="none" w="med" len="med"/>
+                        </a:lnR>
+                        <a:lnT w="9525" cap="flat" cmpd="sng" algn="ctr">
                           <a:solidFill>
-                            <a:srgbClr val="1F1F1F"/>
+                            <a:schemeClr val="bg1"/>
                           </a:solidFill>
-                          <a:effectLst/>
-                          <a:latin typeface="Google Sans Text"/>
-                        </a:rPr>
-                        <a:t>0.1197</a:t>
-                      </a:r>
-                    </a:p>
-                  </a:txBody>
-                  <a:tcPr marR="114300" marT="152400" marB="152400" anchor="ctr">
-                    <a:lnL w="9525" cap="flat" cmpd="sng" algn="ctr">
-                      <a:solidFill>
-                        <a:schemeClr val="bg1"/>
-                      </a:solidFill>
-                      <a:prstDash val="solid"/>
-                      <a:round/>
-                      <a:headEnd type="none" w="med" len="med"/>
-                      <a:tailEnd type="none" w="med" len="med"/>
-                    </a:lnL>
-                    <a:lnR w="9525" cap="flat" cmpd="sng" algn="ctr">
-                      <a:solidFill>
-                        <a:schemeClr val="bg1"/>
-                      </a:solidFill>
-                      <a:prstDash val="solid"/>
-                      <a:round/>
-                      <a:headEnd type="none" w="med" len="med"/>
-                      <a:tailEnd type="none" w="med" len="med"/>
-                    </a:lnR>
-                    <a:lnT w="9525" cap="flat" cmpd="sng" algn="ctr">
-                      <a:solidFill>
-                        <a:schemeClr val="bg1"/>
-                      </a:solidFill>
-                      <a:prstDash val="solid"/>
-                      <a:round/>
-                      <a:headEnd type="none" w="med" len="med"/>
-                      <a:tailEnd type="none" w="med" len="med"/>
-                    </a:lnT>
-                    <a:lnB w="9525" cap="flat" cmpd="sng" algn="ctr">
-                      <a:solidFill>
-                        <a:schemeClr val="bg1"/>
-                      </a:solidFill>
-                      <a:prstDash val="solid"/>
-                      <a:round/>
-                      <a:headEnd type="none" w="med" len="med"/>
-                      <a:tailEnd type="none" w="med" len="med"/>
-                    </a:lnB>
-                    <a:noFill/>
-                  </a:tcPr>
-                </a:tc>
-                <a:tc>
-                  <a:txBody>
-                    <a:bodyPr/>
-                    <a:lstStyle/>
-                    <a:p>
-                      <a:pPr rtl="0"/>
-                      <a:r>
-                        <a:rPr lang="en-US" altLang="zh-TW" sz="2000" b="1">
+                          <a:prstDash val="solid"/>
+                          <a:round/>
+                          <a:headEnd type="none" w="med" len="med"/>
+                          <a:tailEnd type="none" w="med" len="med"/>
+                        </a:lnT>
+                        <a:lnB w="9525" cap="flat" cmpd="sng" algn="ctr">
                           <a:solidFill>
-                            <a:srgbClr val="1F1F1F"/>
+                            <a:schemeClr val="bg1"/>
                           </a:solidFill>
-                          <a:effectLst/>
-                          <a:latin typeface="Google Sans Text"/>
-                        </a:rPr>
-                        <a:t>91.57 </a:t>
-                      </a:r>
-                      <a:r>
-                        <a:rPr lang="zh-TW" altLang="en-US" sz="2000" b="1">
+                          <a:prstDash val="solid"/>
+                          <a:round/>
+                          <a:headEnd type="none" w="med" len="med"/>
+                          <a:tailEnd type="none" w="med" len="med"/>
+                        </a:lnB>
+                        <a:blipFill>
+                          <a:blip r:embed="rId2"/>
+                          <a:stretch>
+                            <a:fillRect l="-64780" t="-2041" r="-295597" b="-491837"/>
+                          </a:stretch>
+                        </a:blipFill>
+                      </a:tcPr>
+                    </a:tc>
+                    <a:tc>
+                      <a:txBody>
+                        <a:bodyPr/>
+                        <a:lstStyle/>
+                        <a:p>
+                          <a:pPr algn="r" rtl="0"/>
+                          <a:r>
+                            <a:rPr lang="zh-TW" altLang="en-US" sz="2000" b="1" dirty="0">
+                              <a:solidFill>
+                                <a:srgbClr val="1F1F1F"/>
+                              </a:solidFill>
+                              <a:effectLst/>
+                              <a:latin typeface="Google Sans Text"/>
+                            </a:rPr>
+                            <a:t>發生機率 </a:t>
+                          </a:r>
+                          <a:r>
+                            <a:rPr lang="en-US" altLang="zh-TW" sz="2000" b="1" dirty="0">
+                              <a:solidFill>
+                                <a:srgbClr val="1F1F1F"/>
+                              </a:solidFill>
+                              <a:effectLst/>
+                              <a:latin typeface="Google Sans Text"/>
+                            </a:rPr>
+                            <a:t>(</a:t>
+                          </a:r>
+                          <a:r>
+                            <a:rPr lang="en" sz="2000" b="1" dirty="0">
+                              <a:solidFill>
+                                <a:srgbClr val="1F1F1F"/>
+                              </a:solidFill>
+                              <a:effectLst/>
+                              <a:latin typeface="Google Sans Text"/>
+                            </a:rPr>
+                            <a:t>P)</a:t>
+                          </a:r>
+                          <a:endParaRPr lang="en" sz="2000" dirty="0">
+                            <a:solidFill>
+                              <a:srgbClr val="1F1F1F"/>
+                            </a:solidFill>
+                            <a:effectLst/>
+                            <a:latin typeface="Google Sans Text"/>
+                          </a:endParaRPr>
+                        </a:p>
+                      </a:txBody>
+                      <a:tcPr marR="114300" marT="152400" marB="152400" anchor="ctr">
+                        <a:lnL w="9525" cap="flat" cmpd="sng" algn="ctr">
                           <a:solidFill>
-                            <a:srgbClr val="1F1F1F"/>
+                            <a:schemeClr val="bg1"/>
                           </a:solidFill>
-                          <a:effectLst/>
-                          <a:latin typeface="Google Sans Text"/>
-                        </a:rPr>
-                        <a:t>萬</a:t>
-                      </a:r>
-                      <a:endParaRPr lang="zh-TW" altLang="en-US" sz="2000">
-                        <a:solidFill>
-                          <a:srgbClr val="1F1F1F"/>
-                        </a:solidFill>
-                        <a:effectLst/>
-                        <a:latin typeface="Google Sans Text"/>
-                      </a:endParaRPr>
-                    </a:p>
-                  </a:txBody>
-                  <a:tcPr marT="152400" marB="152400" anchor="ctr">
-                    <a:lnL w="9525" cap="flat" cmpd="sng" algn="ctr">
-                      <a:solidFill>
-                        <a:schemeClr val="bg1"/>
-                      </a:solidFill>
-                      <a:prstDash val="solid"/>
-                      <a:round/>
-                      <a:headEnd type="none" w="med" len="med"/>
-                      <a:tailEnd type="none" w="med" len="med"/>
-                    </a:lnL>
-                    <a:lnR w="9525" cap="flat" cmpd="sng" algn="ctr">
-                      <a:solidFill>
-                        <a:schemeClr val="bg1"/>
-                      </a:solidFill>
-                      <a:prstDash val="solid"/>
-                      <a:round/>
-                      <a:headEnd type="none" w="med" len="med"/>
-                      <a:tailEnd type="none" w="med" len="med"/>
-                    </a:lnR>
-                    <a:lnT w="9525" cap="flat" cmpd="sng" algn="ctr">
-                      <a:solidFill>
-                        <a:schemeClr val="bg1"/>
-                      </a:solidFill>
-                      <a:prstDash val="solid"/>
-                      <a:round/>
-                      <a:headEnd type="none" w="med" len="med"/>
-                      <a:tailEnd type="none" w="med" len="med"/>
-                    </a:lnT>
-                    <a:lnB w="9525" cap="flat" cmpd="sng" algn="ctr">
-                      <a:solidFill>
-                        <a:schemeClr val="bg1"/>
-                      </a:solidFill>
-                      <a:prstDash val="solid"/>
-                      <a:round/>
-                      <a:headEnd type="none" w="med" len="med"/>
-                      <a:tailEnd type="none" w="med" len="med"/>
-                    </a:lnB>
-                    <a:noFill/>
-                  </a:tcPr>
-                </a:tc>
-                <a:extLst>
-                  <a:ext uri="{0D108BD9-81ED-4DB2-BD59-A6C34878D82A}">
-                    <a16:rowId xmlns:a16="http://schemas.microsoft.com/office/drawing/2014/main" val="2251357188"/>
-                  </a:ext>
-                </a:extLst>
-              </a:tr>
-              <a:tr h="0">
-                <a:tc>
-                  <a:txBody>
-                    <a:bodyPr/>
-                    <a:lstStyle/>
-                    <a:p>
-                      <a:pPr rtl="0"/>
-                      <a:r>
-                        <a:rPr lang="en-US" altLang="zh-TW" sz="2000" b="1" dirty="0">
+                          <a:prstDash val="solid"/>
+                          <a:round/>
+                          <a:headEnd type="none" w="med" len="med"/>
+                          <a:tailEnd type="none" w="med" len="med"/>
+                        </a:lnL>
+                        <a:lnR w="9525" cap="flat" cmpd="sng" algn="ctr">
                           <a:solidFill>
-                            <a:srgbClr val="1F1F1F"/>
+                            <a:schemeClr val="bg1"/>
                           </a:solidFill>
-                          <a:effectLst/>
-                          <a:latin typeface="Google Sans Text"/>
-                        </a:rPr>
-                        <a:t>2 </a:t>
-                      </a:r>
-                      <a:r>
-                        <a:rPr lang="zh-TW" altLang="en-US" sz="2000" b="1" dirty="0">
+                          <a:prstDash val="solid"/>
+                          <a:round/>
+                          <a:headEnd type="none" w="med" len="med"/>
+                          <a:tailEnd type="none" w="med" len="med"/>
+                        </a:lnR>
+                        <a:lnT w="9525" cap="flat" cmpd="sng" algn="ctr">
                           <a:solidFill>
-                            <a:srgbClr val="1F1F1F"/>
+                            <a:schemeClr val="bg1"/>
                           </a:solidFill>
-                          <a:effectLst/>
-                          <a:latin typeface="Google Sans Text"/>
-                        </a:rPr>
-                        <a:t>窮人</a:t>
-                      </a:r>
-                      <a:endParaRPr lang="zh-TW" altLang="en-US" sz="2000" dirty="0">
-                        <a:solidFill>
-                          <a:srgbClr val="1F1F1F"/>
-                        </a:solidFill>
-                        <a:effectLst/>
-                        <a:latin typeface="Google Sans Text"/>
-                      </a:endParaRPr>
-                    </a:p>
-                  </a:txBody>
-                  <a:tcPr marR="114300" marT="152400" marB="152400" anchor="ctr">
-                    <a:lnL w="9525" cap="flat" cmpd="sng" algn="ctr">
-                      <a:solidFill>
-                        <a:schemeClr val="bg1"/>
-                      </a:solidFill>
-                      <a:prstDash val="solid"/>
-                      <a:round/>
-                      <a:headEnd type="none" w="med" len="med"/>
-                      <a:tailEnd type="none" w="med" len="med"/>
-                    </a:lnL>
-                    <a:lnR w="9525" cap="flat" cmpd="sng" algn="ctr">
-                      <a:solidFill>
-                        <a:schemeClr val="bg1"/>
-                      </a:solidFill>
-                      <a:prstDash val="solid"/>
-                      <a:round/>
-                      <a:headEnd type="none" w="med" len="med"/>
-                      <a:tailEnd type="none" w="med" len="med"/>
-                    </a:lnR>
-                    <a:lnT w="9525" cap="flat" cmpd="sng" algn="ctr">
-                      <a:solidFill>
-                        <a:schemeClr val="bg1"/>
-                      </a:solidFill>
-                      <a:prstDash val="solid"/>
-                      <a:round/>
-                      <a:headEnd type="none" w="med" len="med"/>
-                      <a:tailEnd type="none" w="med" len="med"/>
-                    </a:lnT>
-                    <a:lnB w="9525" cap="flat" cmpd="sng" algn="ctr">
-                      <a:solidFill>
-                        <a:schemeClr val="bg1"/>
-                      </a:solidFill>
-                      <a:prstDash val="solid"/>
-                      <a:round/>
-                      <a:headEnd type="none" w="med" len="med"/>
-                      <a:tailEnd type="none" w="med" len="med"/>
-                    </a:lnB>
-                    <a:noFill/>
-                  </a:tcPr>
-                </a:tc>
-                <a:tc>
-                  <a:txBody>
-                    <a:bodyPr/>
-                    <a:lstStyle/>
-                    <a:p>
-                      <a:pPr rtl="0"/>
-                      <a:r>
-                        <a:rPr lang="en-US" altLang="zh-TW" sz="2000">
+                          <a:prstDash val="solid"/>
+                          <a:round/>
+                          <a:headEnd type="none" w="med" len="med"/>
+                          <a:tailEnd type="none" w="med" len="med"/>
+                        </a:lnT>
+                        <a:lnB w="9525" cap="flat" cmpd="sng" algn="ctr">
                           <a:solidFill>
-                            <a:srgbClr val="1F1F1F"/>
+                            <a:schemeClr val="bg1"/>
                           </a:solidFill>
-                          <a:effectLst/>
-                          <a:latin typeface="Google Sans Text"/>
-                        </a:rPr>
-                        <a:t>680 </a:t>
-                      </a:r>
-                      <a:r>
-                        <a:rPr lang="zh-TW" altLang="en-US" sz="2000">
+                          <a:prstDash val="solid"/>
+                          <a:round/>
+                          <a:headEnd type="none" w="med" len="med"/>
+                          <a:tailEnd type="none" w="med" len="med"/>
+                        </a:lnB>
+                        <a:noFill/>
+                      </a:tcPr>
+                    </a:tc>
+                    <a:tc>
+                      <a:txBody>
+                        <a:bodyPr/>
+                        <a:lstStyle/>
+                        <a:p>
+                          <a:endParaRPr lang="zh-TW"/>
+                        </a:p>
+                      </a:txBody>
+                      <a:tcPr marT="152400" marB="152400" anchor="ctr">
+                        <a:lnL w="9525" cap="flat" cmpd="sng" algn="ctr">
                           <a:solidFill>
-                            <a:srgbClr val="1F1F1F"/>
+                            <a:schemeClr val="bg1"/>
                           </a:solidFill>
-                          <a:effectLst/>
-                          <a:latin typeface="Google Sans Text"/>
-                        </a:rPr>
-                        <a:t>萬</a:t>
-                      </a:r>
-                    </a:p>
-                  </a:txBody>
-                  <a:tcPr marR="114300" marT="152400" marB="152400" anchor="ctr">
-                    <a:lnL w="9525" cap="flat" cmpd="sng" algn="ctr">
-                      <a:solidFill>
-                        <a:schemeClr val="bg1"/>
-                      </a:solidFill>
-                      <a:prstDash val="solid"/>
-                      <a:round/>
-                      <a:headEnd type="none" w="med" len="med"/>
-                      <a:tailEnd type="none" w="med" len="med"/>
-                    </a:lnL>
-                    <a:lnR w="9525" cap="flat" cmpd="sng" algn="ctr">
-                      <a:solidFill>
-                        <a:schemeClr val="bg1"/>
-                      </a:solidFill>
-                      <a:prstDash val="solid"/>
-                      <a:round/>
-                      <a:headEnd type="none" w="med" len="med"/>
-                      <a:tailEnd type="none" w="med" len="med"/>
-                    </a:lnR>
-                    <a:lnT w="9525" cap="flat" cmpd="sng" algn="ctr">
-                      <a:solidFill>
-                        <a:schemeClr val="bg1"/>
-                      </a:solidFill>
-                      <a:prstDash val="solid"/>
-                      <a:round/>
-                      <a:headEnd type="none" w="med" len="med"/>
-                      <a:tailEnd type="none" w="med" len="med"/>
-                    </a:lnT>
-                    <a:lnB w="9525" cap="flat" cmpd="sng" algn="ctr">
-                      <a:solidFill>
-                        <a:schemeClr val="bg1"/>
-                      </a:solidFill>
-                      <a:prstDash val="solid"/>
-                      <a:round/>
-                      <a:headEnd type="none" w="med" len="med"/>
-                      <a:tailEnd type="none" w="med" len="med"/>
-                    </a:lnB>
-                    <a:noFill/>
-                  </a:tcPr>
-                </a:tc>
-                <a:tc>
-                  <a:txBody>
-                    <a:bodyPr/>
-                    <a:lstStyle/>
-                    <a:p>
-                      <a:pPr rtl="0"/>
-                      <a:r>
-                        <a:rPr lang="en-US" altLang="zh-TW" sz="2000">
+                          <a:prstDash val="solid"/>
+                          <a:round/>
+                          <a:headEnd type="none" w="med" len="med"/>
+                          <a:tailEnd type="none" w="med" len="med"/>
+                        </a:lnL>
+                        <a:lnR w="9525" cap="flat" cmpd="sng" algn="ctr">
                           <a:solidFill>
-                            <a:srgbClr val="1F1F1F"/>
+                            <a:schemeClr val="bg1"/>
                           </a:solidFill>
-                          <a:effectLst/>
-                          <a:latin typeface="Google Sans Text"/>
-                        </a:rPr>
-                        <a:t>0.0018</a:t>
-                      </a:r>
-                    </a:p>
-                  </a:txBody>
-                  <a:tcPr marR="114300" marT="152400" marB="152400" anchor="ctr">
-                    <a:lnL w="9525" cap="flat" cmpd="sng" algn="ctr">
-                      <a:solidFill>
-                        <a:schemeClr val="bg1"/>
-                      </a:solidFill>
-                      <a:prstDash val="solid"/>
-                      <a:round/>
-                      <a:headEnd type="none" w="med" len="med"/>
-                      <a:tailEnd type="none" w="med" len="med"/>
-                    </a:lnL>
-                    <a:lnR w="9525" cap="flat" cmpd="sng" algn="ctr">
-                      <a:solidFill>
-                        <a:schemeClr val="bg1"/>
-                      </a:solidFill>
-                      <a:prstDash val="solid"/>
-                      <a:round/>
-                      <a:headEnd type="none" w="med" len="med"/>
-                      <a:tailEnd type="none" w="med" len="med"/>
-                    </a:lnR>
-                    <a:lnT w="9525" cap="flat" cmpd="sng" algn="ctr">
-                      <a:solidFill>
-                        <a:schemeClr val="bg1"/>
-                      </a:solidFill>
-                      <a:prstDash val="solid"/>
-                      <a:round/>
-                      <a:headEnd type="none" w="med" len="med"/>
-                      <a:tailEnd type="none" w="med" len="med"/>
-                    </a:lnT>
-                    <a:lnB w="9525" cap="flat" cmpd="sng" algn="ctr">
-                      <a:solidFill>
-                        <a:schemeClr val="bg1"/>
-                      </a:solidFill>
-                      <a:prstDash val="solid"/>
-                      <a:round/>
-                      <a:headEnd type="none" w="med" len="med"/>
-                      <a:tailEnd type="none" w="med" len="med"/>
-                    </a:lnB>
-                    <a:noFill/>
-                  </a:tcPr>
-                </a:tc>
-                <a:tc>
-                  <a:txBody>
-                    <a:bodyPr/>
-                    <a:lstStyle/>
-                    <a:p>
-                      <a:pPr rtl="0"/>
-                      <a:r>
-                        <a:rPr lang="en-US" altLang="zh-TW" sz="2000" b="1">
+                          <a:prstDash val="solid"/>
+                          <a:round/>
+                          <a:headEnd type="none" w="med" len="med"/>
+                          <a:tailEnd type="none" w="med" len="med"/>
+                        </a:lnR>
+                        <a:lnT w="9525" cap="flat" cmpd="sng" algn="ctr">
                           <a:solidFill>
-                            <a:srgbClr val="1F1F1F"/>
+                            <a:schemeClr val="bg1"/>
                           </a:solidFill>
-                          <a:effectLst/>
-                          <a:latin typeface="Google Sans Text"/>
-                        </a:rPr>
-                        <a:t>1.22 </a:t>
-                      </a:r>
-                      <a:r>
-                        <a:rPr lang="zh-TW" altLang="en-US" sz="2000" b="1">
+                          <a:prstDash val="solid"/>
+                          <a:round/>
+                          <a:headEnd type="none" w="med" len="med"/>
+                          <a:tailEnd type="none" w="med" len="med"/>
+                        </a:lnT>
+                        <a:lnB w="9525" cap="flat" cmpd="sng" algn="ctr">
                           <a:solidFill>
-                            <a:srgbClr val="1F1F1F"/>
+                            <a:schemeClr val="bg1"/>
                           </a:solidFill>
-                          <a:effectLst/>
-                          <a:latin typeface="Google Sans Text"/>
-                        </a:rPr>
-                        <a:t>萬</a:t>
-                      </a:r>
-                      <a:endParaRPr lang="zh-TW" altLang="en-US" sz="2000">
-                        <a:solidFill>
-                          <a:srgbClr val="1F1F1F"/>
-                        </a:solidFill>
-                        <a:effectLst/>
-                        <a:latin typeface="Google Sans Text"/>
-                      </a:endParaRPr>
-                    </a:p>
-                  </a:txBody>
-                  <a:tcPr marT="152400" marB="152400" anchor="ctr">
-                    <a:lnL w="9525" cap="flat" cmpd="sng" algn="ctr">
-                      <a:solidFill>
-                        <a:schemeClr val="bg1"/>
-                      </a:solidFill>
-                      <a:prstDash val="solid"/>
-                      <a:round/>
-                      <a:headEnd type="none" w="med" len="med"/>
-                      <a:tailEnd type="none" w="med" len="med"/>
-                    </a:lnL>
-                    <a:lnR w="9525" cap="flat" cmpd="sng" algn="ctr">
-                      <a:solidFill>
-                        <a:schemeClr val="bg1"/>
-                      </a:solidFill>
-                      <a:prstDash val="solid"/>
-                      <a:round/>
-                      <a:headEnd type="none" w="med" len="med"/>
-                      <a:tailEnd type="none" w="med" len="med"/>
-                    </a:lnR>
-                    <a:lnT w="9525" cap="flat" cmpd="sng" algn="ctr">
-                      <a:solidFill>
-                        <a:schemeClr val="bg1"/>
-                      </a:solidFill>
-                      <a:prstDash val="solid"/>
-                      <a:round/>
-                      <a:headEnd type="none" w="med" len="med"/>
-                      <a:tailEnd type="none" w="med" len="med"/>
-                    </a:lnT>
-                    <a:lnB w="9525" cap="flat" cmpd="sng" algn="ctr">
-                      <a:solidFill>
-                        <a:schemeClr val="bg1"/>
-                      </a:solidFill>
-                      <a:prstDash val="solid"/>
-                      <a:round/>
-                      <a:headEnd type="none" w="med" len="med"/>
-                      <a:tailEnd type="none" w="med" len="med"/>
-                    </a:lnB>
-                    <a:noFill/>
-                  </a:tcPr>
-                </a:tc>
-                <a:extLst>
-                  <a:ext uri="{0D108BD9-81ED-4DB2-BD59-A6C34878D82A}">
-                    <a16:rowId xmlns:a16="http://schemas.microsoft.com/office/drawing/2014/main" val="3926020851"/>
-                  </a:ext>
-                </a:extLst>
-              </a:tr>
-              <a:tr h="0">
-                <a:tc>
-                  <a:txBody>
-                    <a:bodyPr/>
-                    <a:lstStyle/>
-                    <a:p>
-                      <a:pPr rtl="0"/>
-                      <a:r>
-                        <a:rPr lang="zh-TW" altLang="en-US" sz="2000" b="1" dirty="0">
+                          <a:prstDash val="solid"/>
+                          <a:round/>
+                          <a:headEnd type="none" w="med" len="med"/>
+                          <a:tailEnd type="none" w="med" len="med"/>
+                        </a:lnB>
+                        <a:blipFill>
+                          <a:blip r:embed="rId2"/>
+                          <a:stretch>
+                            <a:fillRect l="-308380" t="-2041" r="-559" b="-491837"/>
+                          </a:stretch>
+                        </a:blipFill>
+                      </a:tcPr>
+                    </a:tc>
+                    <a:extLst>
+                      <a:ext uri="{0D108BD9-81ED-4DB2-BD59-A6C34878D82A}">
+                        <a16:rowId xmlns:a16="http://schemas.microsoft.com/office/drawing/2014/main" val="1439181357"/>
+                      </a:ext>
+                    </a:extLst>
+                  </a:tr>
+                  <a:tr h="651129">
+                    <a:tc>
+                      <a:txBody>
+                        <a:bodyPr/>
+                        <a:lstStyle/>
+                        <a:p>
+                          <a:pPr rtl="0"/>
+                          <a:r>
+                            <a:rPr lang="en-US" altLang="zh-TW" sz="2000" b="0" dirty="0">
+                              <a:solidFill>
+                                <a:srgbClr val="1F1F1F"/>
+                              </a:solidFill>
+                              <a:effectLst/>
+                              <a:latin typeface="Google Sans Text"/>
+                            </a:rPr>
+                            <a:t>2 </a:t>
+                          </a:r>
+                          <a:r>
+                            <a:rPr lang="zh-TW" altLang="en-US" sz="2000" b="0" dirty="0">
+                              <a:solidFill>
+                                <a:srgbClr val="1F1F1F"/>
+                              </a:solidFill>
+                              <a:effectLst/>
+                              <a:latin typeface="Google Sans Text"/>
+                            </a:rPr>
+                            <a:t>富人</a:t>
+                          </a:r>
+                        </a:p>
+                      </a:txBody>
+                      <a:tcPr marR="114300" marT="152400" marB="152400" anchor="ctr">
+                        <a:lnL w="9525" cap="flat" cmpd="sng" algn="ctr">
                           <a:solidFill>
-                            <a:srgbClr val="1F1F1F"/>
+                            <a:schemeClr val="bg1"/>
                           </a:solidFill>
-                          <a:effectLst/>
-                          <a:latin typeface="Google Sans Text"/>
-                        </a:rPr>
-                        <a:t>總計</a:t>
-                      </a:r>
-                      <a:endParaRPr lang="zh-TW" altLang="en-US" sz="2000" dirty="0">
-                        <a:solidFill>
-                          <a:srgbClr val="1F1F1F"/>
-                        </a:solidFill>
-                        <a:effectLst/>
-                        <a:latin typeface="Google Sans Text"/>
-                      </a:endParaRPr>
-                    </a:p>
-                  </a:txBody>
-                  <a:tcPr marR="114300" marT="152400" marB="152400" anchor="ctr">
-                    <a:lnL w="9525" cap="flat" cmpd="sng" algn="ctr">
-                      <a:solidFill>
-                        <a:schemeClr val="bg1"/>
-                      </a:solidFill>
-                      <a:prstDash val="solid"/>
-                      <a:round/>
-                      <a:headEnd type="none" w="med" len="med"/>
-                      <a:tailEnd type="none" w="med" len="med"/>
-                    </a:lnL>
-                    <a:lnR w="9525" cap="flat" cmpd="sng" algn="ctr">
-                      <a:solidFill>
-                        <a:schemeClr val="bg1"/>
-                      </a:solidFill>
-                      <a:prstDash val="solid"/>
-                      <a:round/>
-                      <a:headEnd type="none" w="med" len="med"/>
-                      <a:tailEnd type="none" w="med" len="med"/>
-                    </a:lnR>
-                    <a:lnT w="9525" cap="flat" cmpd="sng" algn="ctr">
-                      <a:solidFill>
-                        <a:schemeClr val="bg1"/>
-                      </a:solidFill>
-                      <a:prstDash val="solid"/>
-                      <a:round/>
-                      <a:headEnd type="none" w="med" len="med"/>
-                      <a:tailEnd type="none" w="med" len="med"/>
-                    </a:lnT>
-                    <a:lnB w="9525" cap="flat" cmpd="sng" algn="ctr">
-                      <a:solidFill>
-                        <a:schemeClr val="bg1"/>
-                      </a:solidFill>
-                      <a:prstDash val="solid"/>
-                      <a:round/>
-                      <a:headEnd type="none" w="med" len="med"/>
-                      <a:tailEnd type="none" w="med" len="med"/>
-                    </a:lnB>
-                    <a:noFill/>
-                  </a:tcPr>
-                </a:tc>
-                <a:tc>
-                  <a:txBody>
-                    <a:bodyPr/>
-                    <a:lstStyle/>
-                    <a:p>
-                      <a:pPr rtl="0"/>
-                      <a:endParaRPr lang="zh-TW" altLang="en-US" sz="2000" dirty="0">
-                        <a:solidFill>
-                          <a:srgbClr val="1F1F1F"/>
-                        </a:solidFill>
-                        <a:effectLst/>
-                        <a:latin typeface="Google Sans Text"/>
-                      </a:endParaRPr>
-                    </a:p>
-                  </a:txBody>
-                  <a:tcPr marR="114300" marT="152400" marB="152400" anchor="ctr">
-                    <a:lnL w="9525" cap="flat" cmpd="sng" algn="ctr">
-                      <a:solidFill>
-                        <a:schemeClr val="bg1"/>
-                      </a:solidFill>
-                      <a:prstDash val="solid"/>
-                      <a:round/>
-                      <a:headEnd type="none" w="med" len="med"/>
-                      <a:tailEnd type="none" w="med" len="med"/>
-                    </a:lnL>
-                    <a:lnR w="9525" cap="flat" cmpd="sng" algn="ctr">
-                      <a:solidFill>
-                        <a:schemeClr val="bg1"/>
-                      </a:solidFill>
-                      <a:prstDash val="solid"/>
-                      <a:round/>
-                      <a:headEnd type="none" w="med" len="med"/>
-                      <a:tailEnd type="none" w="med" len="med"/>
-                    </a:lnR>
-                    <a:lnT w="9525" cap="flat" cmpd="sng" algn="ctr">
-                      <a:solidFill>
-                        <a:schemeClr val="bg1"/>
-                      </a:solidFill>
-                      <a:prstDash val="solid"/>
-                      <a:round/>
-                      <a:headEnd type="none" w="med" len="med"/>
-                      <a:tailEnd type="none" w="med" len="med"/>
-                    </a:lnT>
-                    <a:lnB w="9525" cap="flat" cmpd="sng" algn="ctr">
-                      <a:solidFill>
-                        <a:schemeClr val="bg1"/>
-                      </a:solidFill>
-                      <a:prstDash val="solid"/>
-                      <a:round/>
-                      <a:headEnd type="none" w="med" len="med"/>
-                      <a:tailEnd type="none" w="med" len="med"/>
-                    </a:lnB>
-                    <a:noFill/>
-                  </a:tcPr>
-                </a:tc>
-                <a:tc>
-                  <a:txBody>
-                    <a:bodyPr/>
-                    <a:lstStyle/>
-                    <a:p>
-                      <a:pPr rtl="0"/>
-                      <a:r>
-                        <a:rPr lang="en-US" altLang="zh-TW" sz="2000" b="1" dirty="0">
+                          <a:prstDash val="solid"/>
+                          <a:round/>
+                          <a:headEnd type="none" w="med" len="med"/>
+                          <a:tailEnd type="none" w="med" len="med"/>
+                        </a:lnL>
+                        <a:lnR w="9525" cap="flat" cmpd="sng" algn="ctr">
                           <a:solidFill>
-                            <a:srgbClr val="1F1F1F"/>
+                            <a:schemeClr val="bg1"/>
                           </a:solidFill>
-                          <a:effectLst/>
-                          <a:latin typeface="Google Sans Text"/>
-                        </a:rPr>
-                        <a:t>1.0000</a:t>
-                      </a:r>
-                      <a:endParaRPr lang="zh-TW" altLang="en-US" sz="2000" dirty="0">
-                        <a:solidFill>
-                          <a:srgbClr val="1F1F1F"/>
-                        </a:solidFill>
-                        <a:effectLst/>
-                        <a:latin typeface="Google Sans Text"/>
-                      </a:endParaRPr>
-                    </a:p>
-                  </a:txBody>
-                  <a:tcPr marR="114300" marT="152400" marB="152400" anchor="ctr">
-                    <a:lnL w="9525" cap="flat" cmpd="sng" algn="ctr">
-                      <a:solidFill>
-                        <a:schemeClr val="bg1"/>
-                      </a:solidFill>
-                      <a:prstDash val="solid"/>
-                      <a:round/>
-                      <a:headEnd type="none" w="med" len="med"/>
-                      <a:tailEnd type="none" w="med" len="med"/>
-                    </a:lnL>
-                    <a:lnR w="9525" cap="flat" cmpd="sng" algn="ctr">
-                      <a:solidFill>
-                        <a:schemeClr val="bg1"/>
-                      </a:solidFill>
-                      <a:prstDash val="solid"/>
-                      <a:round/>
-                      <a:headEnd type="none" w="med" len="med"/>
-                      <a:tailEnd type="none" w="med" len="med"/>
-                    </a:lnR>
-                    <a:lnT w="9525" cap="flat" cmpd="sng" algn="ctr">
-                      <a:solidFill>
-                        <a:schemeClr val="bg1"/>
-                      </a:solidFill>
-                      <a:prstDash val="solid"/>
-                      <a:round/>
-                      <a:headEnd type="none" w="med" len="med"/>
-                      <a:tailEnd type="none" w="med" len="med"/>
-                    </a:lnT>
-                    <a:lnB w="9525" cap="flat" cmpd="sng" algn="ctr">
-                      <a:solidFill>
-                        <a:schemeClr val="bg1"/>
-                      </a:solidFill>
-                      <a:prstDash val="solid"/>
-                      <a:round/>
-                      <a:headEnd type="none" w="med" len="med"/>
-                      <a:tailEnd type="none" w="med" len="med"/>
-                    </a:lnB>
-                    <a:noFill/>
-                  </a:tcPr>
-                </a:tc>
-                <a:tc>
-                  <a:txBody>
-                    <a:bodyPr/>
-                    <a:lstStyle/>
-                    <a:p>
-                      <a:pPr rtl="0"/>
-                      <a:r>
-                        <a:rPr lang="en-US" altLang="zh-TW" sz="2000" b="1" dirty="0">
+                          <a:prstDash val="solid"/>
+                          <a:round/>
+                          <a:headEnd type="none" w="med" len="med"/>
+                          <a:tailEnd type="none" w="med" len="med"/>
+                        </a:lnR>
+                        <a:lnT w="9525" cap="flat" cmpd="sng" algn="ctr">
                           <a:solidFill>
-                            <a:srgbClr val="1F1F1F"/>
+                            <a:schemeClr val="bg1"/>
                           </a:solidFill>
-                          <a:effectLst/>
-                          <a:latin typeface="Google Sans Text"/>
-                        </a:rPr>
-                        <a:t>839.43 </a:t>
-                      </a:r>
-                      <a:r>
-                        <a:rPr lang="zh-TW" altLang="en-US" sz="2000" b="1" dirty="0">
+                          <a:prstDash val="solid"/>
+                          <a:round/>
+                          <a:headEnd type="none" w="med" len="med"/>
+                          <a:tailEnd type="none" w="med" len="med"/>
+                        </a:lnT>
+                        <a:lnB w="9525" cap="flat" cmpd="sng" algn="ctr">
                           <a:solidFill>
-                            <a:srgbClr val="1F1F1F"/>
+                            <a:schemeClr val="bg1"/>
                           </a:solidFill>
-                          <a:effectLst/>
-                          <a:latin typeface="Google Sans Text"/>
-                        </a:rPr>
-                        <a:t>萬</a:t>
-                      </a:r>
-                      <a:endParaRPr lang="zh-TW" altLang="en-US" sz="2000" dirty="0">
-                        <a:solidFill>
-                          <a:srgbClr val="1F1F1F"/>
-                        </a:solidFill>
-                        <a:effectLst/>
-                        <a:latin typeface="Google Sans Text"/>
-                      </a:endParaRPr>
-                    </a:p>
-                  </a:txBody>
-                  <a:tcPr marT="152400" marB="152400" anchor="ctr">
-                    <a:lnL w="9525" cap="flat" cmpd="sng" algn="ctr">
-                      <a:solidFill>
-                        <a:schemeClr val="bg1"/>
-                      </a:solidFill>
-                      <a:prstDash val="solid"/>
-                      <a:round/>
-                      <a:headEnd type="none" w="med" len="med"/>
-                      <a:tailEnd type="none" w="med" len="med"/>
-                    </a:lnL>
-                    <a:lnR w="9525" cap="flat" cmpd="sng" algn="ctr">
-                      <a:solidFill>
-                        <a:schemeClr val="bg1"/>
-                      </a:solidFill>
-                      <a:prstDash val="solid"/>
-                      <a:round/>
-                      <a:headEnd type="none" w="med" len="med"/>
-                      <a:tailEnd type="none" w="med" len="med"/>
-                    </a:lnR>
-                    <a:lnT w="9525" cap="flat" cmpd="sng" algn="ctr">
-                      <a:solidFill>
-                        <a:schemeClr val="bg1"/>
-                      </a:solidFill>
-                      <a:prstDash val="solid"/>
-                      <a:round/>
-                      <a:headEnd type="none" w="med" len="med"/>
-                      <a:tailEnd type="none" w="med" len="med"/>
-                    </a:lnT>
-                    <a:lnB w="9525" cap="flat" cmpd="sng" algn="ctr">
-                      <a:solidFill>
-                        <a:schemeClr val="bg1"/>
-                      </a:solidFill>
-                      <a:prstDash val="solid"/>
-                      <a:round/>
-                      <a:headEnd type="none" w="med" len="med"/>
-                      <a:tailEnd type="none" w="med" len="med"/>
-                    </a:lnB>
-                    <a:noFill/>
-                  </a:tcPr>
-                </a:tc>
-                <a:extLst>
-                  <a:ext uri="{0D108BD9-81ED-4DB2-BD59-A6C34878D82A}">
-                    <a16:rowId xmlns:a16="http://schemas.microsoft.com/office/drawing/2014/main" val="124635869"/>
-                  </a:ext>
-                </a:extLst>
-              </a:tr>
-            </a:tbl>
-          </a:graphicData>
-        </a:graphic>
-      </p:graphicFrame>
+                          <a:prstDash val="solid"/>
+                          <a:round/>
+                          <a:headEnd type="none" w="med" len="med"/>
+                          <a:tailEnd type="none" w="med" len="med"/>
+                        </a:lnB>
+                        <a:noFill/>
+                      </a:tcPr>
+                    </a:tc>
+                    <a:tc>
+                      <a:txBody>
+                        <a:bodyPr/>
+                        <a:lstStyle/>
+                        <a:p>
+                          <a:endParaRPr lang="zh-TW"/>
+                        </a:p>
+                      </a:txBody>
+                      <a:tcPr marR="114300" marT="152400" marB="152400" anchor="ctr">
+                        <a:lnL w="9525" cap="flat" cmpd="sng" algn="ctr">
+                          <a:solidFill>
+                            <a:schemeClr val="bg1"/>
+                          </a:solidFill>
+                          <a:prstDash val="solid"/>
+                          <a:round/>
+                          <a:headEnd type="none" w="med" len="med"/>
+                          <a:tailEnd type="none" w="med" len="med"/>
+                        </a:lnL>
+                        <a:lnR w="9525" cap="flat" cmpd="sng" algn="ctr">
+                          <a:solidFill>
+                            <a:schemeClr val="bg1"/>
+                          </a:solidFill>
+                          <a:prstDash val="solid"/>
+                          <a:round/>
+                          <a:headEnd type="none" w="med" len="med"/>
+                          <a:tailEnd type="none" w="med" len="med"/>
+                        </a:lnR>
+                        <a:lnT w="9525" cap="flat" cmpd="sng" algn="ctr">
+                          <a:solidFill>
+                            <a:schemeClr val="bg1"/>
+                          </a:solidFill>
+                          <a:prstDash val="solid"/>
+                          <a:round/>
+                          <a:headEnd type="none" w="med" len="med"/>
+                          <a:tailEnd type="none" w="med" len="med"/>
+                        </a:lnT>
+                        <a:lnB w="9525" cap="flat" cmpd="sng" algn="ctr">
+                          <a:solidFill>
+                            <a:schemeClr val="bg1"/>
+                          </a:solidFill>
+                          <a:prstDash val="solid"/>
+                          <a:round/>
+                          <a:headEnd type="none" w="med" len="med"/>
+                          <a:tailEnd type="none" w="med" len="med"/>
+                        </a:lnB>
+                        <a:blipFill>
+                          <a:blip r:embed="rId2"/>
+                          <a:stretch>
+                            <a:fillRect l="-64780" t="-98039" r="-295597" b="-372549"/>
+                          </a:stretch>
+                        </a:blipFill>
+                      </a:tcPr>
+                    </a:tc>
+                    <a:tc>
+                      <a:txBody>
+                        <a:bodyPr/>
+                        <a:lstStyle/>
+                        <a:p>
+                          <a:pPr algn="r" rtl="0"/>
+                          <a:r>
+                            <a:rPr lang="en-US" altLang="zh-TW" sz="1600" dirty="0">
+                              <a:solidFill>
+                                <a:srgbClr val="1F1F1F"/>
+                              </a:solidFill>
+                              <a:effectLst/>
+                              <a:latin typeface="Google Sans Text"/>
+                            </a:rPr>
+                            <a:t>0.8784=(32/34)</a:t>
+                          </a:r>
+                          <a:r>
+                            <a:rPr lang="zh-TW" altLang="en-US" sz="1600" dirty="0">
+                              <a:solidFill>
+                                <a:srgbClr val="1F1F1F"/>
+                              </a:solidFill>
+                              <a:effectLst/>
+                              <a:latin typeface="Google Sans Text"/>
+                            </a:rPr>
+                            <a:t>*</a:t>
+                          </a:r>
+                          <a:r>
+                            <a:rPr lang="en-US" altLang="zh-TW" sz="1600" dirty="0">
+                              <a:solidFill>
+                                <a:srgbClr val="1F1F1F"/>
+                              </a:solidFill>
+                              <a:effectLst/>
+                              <a:latin typeface="Google Sans Text"/>
+                            </a:rPr>
+                            <a:t>(28/30)</a:t>
+                          </a:r>
+                        </a:p>
+                      </a:txBody>
+                      <a:tcPr marR="114300" marT="152400" marB="152400" anchor="ctr">
+                        <a:lnL w="9525" cap="flat" cmpd="sng" algn="ctr">
+                          <a:solidFill>
+                            <a:schemeClr val="bg1"/>
+                          </a:solidFill>
+                          <a:prstDash val="solid"/>
+                          <a:round/>
+                          <a:headEnd type="none" w="med" len="med"/>
+                          <a:tailEnd type="none" w="med" len="med"/>
+                        </a:lnL>
+                        <a:lnR w="9525" cap="flat" cmpd="sng" algn="ctr">
+                          <a:solidFill>
+                            <a:schemeClr val="bg1"/>
+                          </a:solidFill>
+                          <a:prstDash val="solid"/>
+                          <a:round/>
+                          <a:headEnd type="none" w="med" len="med"/>
+                          <a:tailEnd type="none" w="med" len="med"/>
+                        </a:lnR>
+                        <a:lnT w="9525" cap="flat" cmpd="sng" algn="ctr">
+                          <a:solidFill>
+                            <a:schemeClr val="bg1"/>
+                          </a:solidFill>
+                          <a:prstDash val="solid"/>
+                          <a:round/>
+                          <a:headEnd type="none" w="med" len="med"/>
+                          <a:tailEnd type="none" w="med" len="med"/>
+                        </a:lnT>
+                        <a:lnB w="9525" cap="flat" cmpd="sng" algn="ctr">
+                          <a:solidFill>
+                            <a:schemeClr val="bg1"/>
+                          </a:solidFill>
+                          <a:prstDash val="solid"/>
+                          <a:round/>
+                          <a:headEnd type="none" w="med" len="med"/>
+                          <a:tailEnd type="none" w="med" len="med"/>
+                        </a:lnB>
+                        <a:noFill/>
+                      </a:tcPr>
+                    </a:tc>
+                    <a:tc>
+                      <a:txBody>
+                        <a:bodyPr/>
+                        <a:lstStyle/>
+                        <a:p>
+                          <a:pPr algn="r" rtl="0"/>
+                          <a:r>
+                            <a:rPr lang="en-US" altLang="zh-TW" sz="1600" b="1">
+                              <a:solidFill>
+                                <a:srgbClr val="1F1F1F"/>
+                              </a:solidFill>
+                              <a:effectLst/>
+                              <a:latin typeface="Google Sans Text"/>
+                            </a:rPr>
+                            <a:t>746.64 </a:t>
+                          </a:r>
+                          <a:r>
+                            <a:rPr lang="zh-TW" altLang="en-US" sz="1600" b="1">
+                              <a:solidFill>
+                                <a:srgbClr val="1F1F1F"/>
+                              </a:solidFill>
+                              <a:effectLst/>
+                              <a:latin typeface="Google Sans Text"/>
+                            </a:rPr>
+                            <a:t>萬</a:t>
+                          </a:r>
+                          <a:endParaRPr lang="zh-TW" altLang="en-US" sz="1600">
+                            <a:solidFill>
+                              <a:srgbClr val="1F1F1F"/>
+                            </a:solidFill>
+                            <a:effectLst/>
+                            <a:latin typeface="Google Sans Text"/>
+                          </a:endParaRPr>
+                        </a:p>
+                      </a:txBody>
+                      <a:tcPr marT="152400" marB="152400" anchor="ctr">
+                        <a:lnL w="9525" cap="flat" cmpd="sng" algn="ctr">
+                          <a:solidFill>
+                            <a:schemeClr val="bg1"/>
+                          </a:solidFill>
+                          <a:prstDash val="solid"/>
+                          <a:round/>
+                          <a:headEnd type="none" w="med" len="med"/>
+                          <a:tailEnd type="none" w="med" len="med"/>
+                        </a:lnL>
+                        <a:lnR w="9525" cap="flat" cmpd="sng" algn="ctr">
+                          <a:solidFill>
+                            <a:schemeClr val="bg1"/>
+                          </a:solidFill>
+                          <a:prstDash val="solid"/>
+                          <a:round/>
+                          <a:headEnd type="none" w="med" len="med"/>
+                          <a:tailEnd type="none" w="med" len="med"/>
+                        </a:lnR>
+                        <a:lnT w="9525" cap="flat" cmpd="sng" algn="ctr">
+                          <a:solidFill>
+                            <a:schemeClr val="bg1"/>
+                          </a:solidFill>
+                          <a:prstDash val="solid"/>
+                          <a:round/>
+                          <a:headEnd type="none" w="med" len="med"/>
+                          <a:tailEnd type="none" w="med" len="med"/>
+                        </a:lnT>
+                        <a:lnB w="9525" cap="flat" cmpd="sng" algn="ctr">
+                          <a:solidFill>
+                            <a:schemeClr val="bg1"/>
+                          </a:solidFill>
+                          <a:prstDash val="solid"/>
+                          <a:round/>
+                          <a:headEnd type="none" w="med" len="med"/>
+                          <a:tailEnd type="none" w="med" len="med"/>
+                        </a:lnB>
+                        <a:noFill/>
+                      </a:tcPr>
+                    </a:tc>
+                    <a:extLst>
+                      <a:ext uri="{0D108BD9-81ED-4DB2-BD59-A6C34878D82A}">
+                        <a16:rowId xmlns:a16="http://schemas.microsoft.com/office/drawing/2014/main" val="477083205"/>
+                      </a:ext>
+                    </a:extLst>
+                  </a:tr>
+                  <a:tr h="994410">
+                    <a:tc>
+                      <a:txBody>
+                        <a:bodyPr/>
+                        <a:lstStyle/>
+                        <a:p>
+                          <a:pPr rtl="0"/>
+                          <a:r>
+                            <a:rPr lang="en-US" altLang="zh-TW" sz="2000" b="0" dirty="0">
+                              <a:solidFill>
+                                <a:srgbClr val="1F1F1F"/>
+                              </a:solidFill>
+                              <a:effectLst/>
+                              <a:latin typeface="Google Sans Text"/>
+                            </a:rPr>
+                            <a:t>1 </a:t>
+                          </a:r>
+                          <a:r>
+                            <a:rPr lang="zh-TW" altLang="en-US" sz="2000" b="0" dirty="0">
+                              <a:solidFill>
+                                <a:srgbClr val="1F1F1F"/>
+                              </a:solidFill>
+                              <a:effectLst/>
+                              <a:latin typeface="Google Sans Text"/>
+                            </a:rPr>
+                            <a:t>富 </a:t>
+                          </a:r>
+                          <a:r>
+                            <a:rPr lang="en-US" altLang="zh-TW" sz="2000" b="0" dirty="0">
+                              <a:solidFill>
+                                <a:srgbClr val="1F1F1F"/>
+                              </a:solidFill>
+                              <a:effectLst/>
+                              <a:latin typeface="Google Sans Text"/>
+                            </a:rPr>
+                            <a:t>1 </a:t>
+                          </a:r>
+                          <a:r>
+                            <a:rPr lang="zh-TW" altLang="en-US" sz="2000" b="0" dirty="0">
+                              <a:solidFill>
+                                <a:srgbClr val="1F1F1F"/>
+                              </a:solidFill>
+                              <a:effectLst/>
+                              <a:latin typeface="Google Sans Text"/>
+                            </a:rPr>
+                            <a:t>窮</a:t>
+                          </a:r>
+                        </a:p>
+                      </a:txBody>
+                      <a:tcPr marR="114300" marT="152400" marB="152400" anchor="ctr">
+                        <a:lnL w="9525" cap="flat" cmpd="sng" algn="ctr">
+                          <a:solidFill>
+                            <a:schemeClr val="bg1"/>
+                          </a:solidFill>
+                          <a:prstDash val="solid"/>
+                          <a:round/>
+                          <a:headEnd type="none" w="med" len="med"/>
+                          <a:tailEnd type="none" w="med" len="med"/>
+                        </a:lnL>
+                        <a:lnR w="9525" cap="flat" cmpd="sng" algn="ctr">
+                          <a:solidFill>
+                            <a:schemeClr val="bg1"/>
+                          </a:solidFill>
+                          <a:prstDash val="solid"/>
+                          <a:round/>
+                          <a:headEnd type="none" w="med" len="med"/>
+                          <a:tailEnd type="none" w="med" len="med"/>
+                        </a:lnR>
+                        <a:lnT w="9525" cap="flat" cmpd="sng" algn="ctr">
+                          <a:solidFill>
+                            <a:schemeClr val="bg1"/>
+                          </a:solidFill>
+                          <a:prstDash val="solid"/>
+                          <a:round/>
+                          <a:headEnd type="none" w="med" len="med"/>
+                          <a:tailEnd type="none" w="med" len="med"/>
+                        </a:lnT>
+                        <a:lnB w="9525" cap="flat" cmpd="sng" algn="ctr">
+                          <a:solidFill>
+                            <a:schemeClr val="bg1"/>
+                          </a:solidFill>
+                          <a:prstDash val="solid"/>
+                          <a:round/>
+                          <a:headEnd type="none" w="med" len="med"/>
+                          <a:tailEnd type="none" w="med" len="med"/>
+                        </a:lnB>
+                        <a:noFill/>
+                      </a:tcPr>
+                    </a:tc>
+                    <a:tc>
+                      <a:txBody>
+                        <a:bodyPr/>
+                        <a:lstStyle/>
+                        <a:p>
+                          <a:endParaRPr lang="zh-TW"/>
+                        </a:p>
+                      </a:txBody>
+                      <a:tcPr marR="114300" marT="152400" marB="152400" anchor="ctr">
+                        <a:lnL w="9525" cap="flat" cmpd="sng" algn="ctr">
+                          <a:solidFill>
+                            <a:schemeClr val="bg1"/>
+                          </a:solidFill>
+                          <a:prstDash val="solid"/>
+                          <a:round/>
+                          <a:headEnd type="none" w="med" len="med"/>
+                          <a:tailEnd type="none" w="med" len="med"/>
+                        </a:lnL>
+                        <a:lnR w="9525" cap="flat" cmpd="sng" algn="ctr">
+                          <a:solidFill>
+                            <a:schemeClr val="bg1"/>
+                          </a:solidFill>
+                          <a:prstDash val="solid"/>
+                          <a:round/>
+                          <a:headEnd type="none" w="med" len="med"/>
+                          <a:tailEnd type="none" w="med" len="med"/>
+                        </a:lnR>
+                        <a:lnT w="9525" cap="flat" cmpd="sng" algn="ctr">
+                          <a:solidFill>
+                            <a:schemeClr val="bg1"/>
+                          </a:solidFill>
+                          <a:prstDash val="solid"/>
+                          <a:round/>
+                          <a:headEnd type="none" w="med" len="med"/>
+                          <a:tailEnd type="none" w="med" len="med"/>
+                        </a:lnT>
+                        <a:lnB w="9525" cap="flat" cmpd="sng" algn="ctr">
+                          <a:solidFill>
+                            <a:schemeClr val="bg1"/>
+                          </a:solidFill>
+                          <a:prstDash val="solid"/>
+                          <a:round/>
+                          <a:headEnd type="none" w="med" len="med"/>
+                          <a:tailEnd type="none" w="med" len="med"/>
+                        </a:lnB>
+                        <a:blipFill>
+                          <a:blip r:embed="rId2"/>
+                          <a:stretch>
+                            <a:fillRect l="-64780" t="-127848" r="-295597" b="-140506"/>
+                          </a:stretch>
+                        </a:blipFill>
+                      </a:tcPr>
+                    </a:tc>
+                    <a:tc>
+                      <a:txBody>
+                        <a:bodyPr/>
+                        <a:lstStyle/>
+                        <a:p>
+                          <a:pPr algn="r" rtl="0"/>
+                          <a:r>
+                            <a:rPr lang="en-US" altLang="zh-TW" sz="1600" dirty="0">
+                              <a:solidFill>
+                                <a:srgbClr val="1F1F1F"/>
+                              </a:solidFill>
+                              <a:effectLst/>
+                              <a:latin typeface="Google Sans Text"/>
+                            </a:rPr>
+                            <a:t>0.1197=(32/34)</a:t>
+                          </a:r>
+                          <a:r>
+                            <a:rPr lang="zh-TW" altLang="en-US" sz="1600" dirty="0">
+                              <a:solidFill>
+                                <a:srgbClr val="1F1F1F"/>
+                              </a:solidFill>
+                              <a:effectLst/>
+                              <a:latin typeface="Google Sans Text"/>
+                            </a:rPr>
+                            <a:t>*</a:t>
+                          </a:r>
+                          <a:r>
+                            <a:rPr lang="en-US" altLang="zh-TW" sz="1600" dirty="0">
+                              <a:solidFill>
+                                <a:srgbClr val="1F1F1F"/>
+                              </a:solidFill>
+                              <a:effectLst/>
+                              <a:latin typeface="Google Sans Text"/>
+                            </a:rPr>
+                            <a:t>(2/30)+(2/34)*(32/33)</a:t>
+                          </a:r>
+                        </a:p>
+                      </a:txBody>
+                      <a:tcPr marR="114300" marT="152400" marB="152400" anchor="ctr">
+                        <a:lnL w="9525" cap="flat" cmpd="sng" algn="ctr">
+                          <a:solidFill>
+                            <a:schemeClr val="bg1"/>
+                          </a:solidFill>
+                          <a:prstDash val="solid"/>
+                          <a:round/>
+                          <a:headEnd type="none" w="med" len="med"/>
+                          <a:tailEnd type="none" w="med" len="med"/>
+                        </a:lnL>
+                        <a:lnR w="9525" cap="flat" cmpd="sng" algn="ctr">
+                          <a:solidFill>
+                            <a:schemeClr val="bg1"/>
+                          </a:solidFill>
+                          <a:prstDash val="solid"/>
+                          <a:round/>
+                          <a:headEnd type="none" w="med" len="med"/>
+                          <a:tailEnd type="none" w="med" len="med"/>
+                        </a:lnR>
+                        <a:lnT w="9525" cap="flat" cmpd="sng" algn="ctr">
+                          <a:solidFill>
+                            <a:schemeClr val="bg1"/>
+                          </a:solidFill>
+                          <a:prstDash val="solid"/>
+                          <a:round/>
+                          <a:headEnd type="none" w="med" len="med"/>
+                          <a:tailEnd type="none" w="med" len="med"/>
+                        </a:lnT>
+                        <a:lnB w="9525" cap="flat" cmpd="sng" algn="ctr">
+                          <a:solidFill>
+                            <a:schemeClr val="bg1"/>
+                          </a:solidFill>
+                          <a:prstDash val="solid"/>
+                          <a:round/>
+                          <a:headEnd type="none" w="med" len="med"/>
+                          <a:tailEnd type="none" w="med" len="med"/>
+                        </a:lnB>
+                        <a:noFill/>
+                      </a:tcPr>
+                    </a:tc>
+                    <a:tc>
+                      <a:txBody>
+                        <a:bodyPr/>
+                        <a:lstStyle/>
+                        <a:p>
+                          <a:pPr algn="r" rtl="0"/>
+                          <a:r>
+                            <a:rPr lang="en-US" altLang="zh-TW" sz="1600" b="1">
+                              <a:solidFill>
+                                <a:srgbClr val="1F1F1F"/>
+                              </a:solidFill>
+                              <a:effectLst/>
+                              <a:latin typeface="Google Sans Text"/>
+                            </a:rPr>
+                            <a:t>91.57 </a:t>
+                          </a:r>
+                          <a:r>
+                            <a:rPr lang="zh-TW" altLang="en-US" sz="1600" b="1">
+                              <a:solidFill>
+                                <a:srgbClr val="1F1F1F"/>
+                              </a:solidFill>
+                              <a:effectLst/>
+                              <a:latin typeface="Google Sans Text"/>
+                            </a:rPr>
+                            <a:t>萬</a:t>
+                          </a:r>
+                          <a:endParaRPr lang="zh-TW" altLang="en-US" sz="1600">
+                            <a:solidFill>
+                              <a:srgbClr val="1F1F1F"/>
+                            </a:solidFill>
+                            <a:effectLst/>
+                            <a:latin typeface="Google Sans Text"/>
+                          </a:endParaRPr>
+                        </a:p>
+                      </a:txBody>
+                      <a:tcPr marT="152400" marB="152400" anchor="ctr">
+                        <a:lnL w="9525" cap="flat" cmpd="sng" algn="ctr">
+                          <a:solidFill>
+                            <a:schemeClr val="bg1"/>
+                          </a:solidFill>
+                          <a:prstDash val="solid"/>
+                          <a:round/>
+                          <a:headEnd type="none" w="med" len="med"/>
+                          <a:tailEnd type="none" w="med" len="med"/>
+                        </a:lnL>
+                        <a:lnR w="9525" cap="flat" cmpd="sng" algn="ctr">
+                          <a:solidFill>
+                            <a:schemeClr val="bg1"/>
+                          </a:solidFill>
+                          <a:prstDash val="solid"/>
+                          <a:round/>
+                          <a:headEnd type="none" w="med" len="med"/>
+                          <a:tailEnd type="none" w="med" len="med"/>
+                        </a:lnR>
+                        <a:lnT w="9525" cap="flat" cmpd="sng" algn="ctr">
+                          <a:solidFill>
+                            <a:schemeClr val="bg1"/>
+                          </a:solidFill>
+                          <a:prstDash val="solid"/>
+                          <a:round/>
+                          <a:headEnd type="none" w="med" len="med"/>
+                          <a:tailEnd type="none" w="med" len="med"/>
+                        </a:lnT>
+                        <a:lnB w="9525" cap="flat" cmpd="sng" algn="ctr">
+                          <a:solidFill>
+                            <a:schemeClr val="bg1"/>
+                          </a:solidFill>
+                          <a:prstDash val="solid"/>
+                          <a:round/>
+                          <a:headEnd type="none" w="med" len="med"/>
+                          <a:tailEnd type="none" w="med" len="med"/>
+                        </a:lnB>
+                        <a:noFill/>
+                      </a:tcPr>
+                    </a:tc>
+                    <a:extLst>
+                      <a:ext uri="{0D108BD9-81ED-4DB2-BD59-A6C34878D82A}">
+                        <a16:rowId xmlns:a16="http://schemas.microsoft.com/office/drawing/2014/main" val="2251357188"/>
+                      </a:ext>
+                    </a:extLst>
+                  </a:tr>
+                  <a:tr h="786892">
+                    <a:tc>
+                      <a:txBody>
+                        <a:bodyPr/>
+                        <a:lstStyle/>
+                        <a:p>
+                          <a:pPr rtl="0"/>
+                          <a:r>
+                            <a:rPr lang="en-US" altLang="zh-TW" sz="2000" b="0" dirty="0">
+                              <a:solidFill>
+                                <a:srgbClr val="1F1F1F"/>
+                              </a:solidFill>
+                              <a:effectLst/>
+                              <a:latin typeface="Google Sans Text"/>
+                            </a:rPr>
+                            <a:t>2 </a:t>
+                          </a:r>
+                          <a:r>
+                            <a:rPr lang="zh-TW" altLang="en-US" sz="2000" b="0" dirty="0">
+                              <a:solidFill>
+                                <a:srgbClr val="1F1F1F"/>
+                              </a:solidFill>
+                              <a:effectLst/>
+                              <a:latin typeface="Google Sans Text"/>
+                            </a:rPr>
+                            <a:t>窮人</a:t>
+                          </a:r>
+                        </a:p>
+                      </a:txBody>
+                      <a:tcPr marR="114300" marT="152400" marB="152400" anchor="ctr">
+                        <a:lnL w="9525" cap="flat" cmpd="sng" algn="ctr">
+                          <a:solidFill>
+                            <a:schemeClr val="bg1"/>
+                          </a:solidFill>
+                          <a:prstDash val="solid"/>
+                          <a:round/>
+                          <a:headEnd type="none" w="med" len="med"/>
+                          <a:tailEnd type="none" w="med" len="med"/>
+                        </a:lnL>
+                        <a:lnR w="9525" cap="flat" cmpd="sng" algn="ctr">
+                          <a:solidFill>
+                            <a:schemeClr val="bg1"/>
+                          </a:solidFill>
+                          <a:prstDash val="solid"/>
+                          <a:round/>
+                          <a:headEnd type="none" w="med" len="med"/>
+                          <a:tailEnd type="none" w="med" len="med"/>
+                        </a:lnR>
+                        <a:lnT w="9525" cap="flat" cmpd="sng" algn="ctr">
+                          <a:solidFill>
+                            <a:schemeClr val="bg1"/>
+                          </a:solidFill>
+                          <a:prstDash val="solid"/>
+                          <a:round/>
+                          <a:headEnd type="none" w="med" len="med"/>
+                          <a:tailEnd type="none" w="med" len="med"/>
+                        </a:lnT>
+                        <a:lnB w="9525" cap="flat" cmpd="sng" algn="ctr">
+                          <a:solidFill>
+                            <a:schemeClr val="bg1"/>
+                          </a:solidFill>
+                          <a:prstDash val="solid"/>
+                          <a:round/>
+                          <a:headEnd type="none" w="med" len="med"/>
+                          <a:tailEnd type="none" w="med" len="med"/>
+                        </a:lnB>
+                        <a:noFill/>
+                      </a:tcPr>
+                    </a:tc>
+                    <a:tc>
+                      <a:txBody>
+                        <a:bodyPr/>
+                        <a:lstStyle/>
+                        <a:p>
+                          <a:endParaRPr lang="zh-TW"/>
+                        </a:p>
+                      </a:txBody>
+                      <a:tcPr marR="114300" marT="152400" marB="152400" anchor="ctr">
+                        <a:lnL w="9525" cap="flat" cmpd="sng" algn="ctr">
+                          <a:solidFill>
+                            <a:schemeClr val="bg1"/>
+                          </a:solidFill>
+                          <a:prstDash val="solid"/>
+                          <a:round/>
+                          <a:headEnd type="none" w="med" len="med"/>
+                          <a:tailEnd type="none" w="med" len="med"/>
+                        </a:lnL>
+                        <a:lnR w="9525" cap="flat" cmpd="sng" algn="ctr">
+                          <a:solidFill>
+                            <a:schemeClr val="bg1"/>
+                          </a:solidFill>
+                          <a:prstDash val="solid"/>
+                          <a:round/>
+                          <a:headEnd type="none" w="med" len="med"/>
+                          <a:tailEnd type="none" w="med" len="med"/>
+                        </a:lnR>
+                        <a:lnT w="9525" cap="flat" cmpd="sng" algn="ctr">
+                          <a:solidFill>
+                            <a:schemeClr val="bg1"/>
+                          </a:solidFill>
+                          <a:prstDash val="solid"/>
+                          <a:round/>
+                          <a:headEnd type="none" w="med" len="med"/>
+                          <a:tailEnd type="none" w="med" len="med"/>
+                        </a:lnT>
+                        <a:lnB w="9525" cap="flat" cmpd="sng" algn="ctr">
+                          <a:solidFill>
+                            <a:schemeClr val="bg1"/>
+                          </a:solidFill>
+                          <a:prstDash val="solid"/>
+                          <a:round/>
+                          <a:headEnd type="none" w="med" len="med"/>
+                          <a:tailEnd type="none" w="med" len="med"/>
+                        </a:lnB>
+                        <a:blipFill>
+                          <a:blip r:embed="rId2"/>
+                          <a:stretch>
+                            <a:fillRect l="-64780" t="-290323" r="-295597" b="-79032"/>
+                          </a:stretch>
+                        </a:blipFill>
+                      </a:tcPr>
+                    </a:tc>
+                    <a:tc>
+                      <a:txBody>
+                        <a:bodyPr/>
+                        <a:lstStyle/>
+                        <a:p>
+                          <a:pPr algn="r" rtl="0"/>
+                          <a:r>
+                            <a:rPr lang="en-US" altLang="zh-TW" sz="1600" dirty="0">
+                              <a:solidFill>
+                                <a:srgbClr val="1F1F1F"/>
+                              </a:solidFill>
+                              <a:effectLst/>
+                              <a:latin typeface="Google Sans Text"/>
+                            </a:rPr>
+                            <a:t>0.0018=(2/34)</a:t>
+                          </a:r>
+                          <a:r>
+                            <a:rPr lang="zh-TW" altLang="en-US" sz="1600" dirty="0">
+                              <a:solidFill>
+                                <a:srgbClr val="1F1F1F"/>
+                              </a:solidFill>
+                              <a:effectLst/>
+                              <a:latin typeface="Google Sans Text"/>
+                            </a:rPr>
+                            <a:t>*</a:t>
+                          </a:r>
+                          <a:r>
+                            <a:rPr lang="en-US" altLang="zh-TW" sz="1600" dirty="0">
+                              <a:solidFill>
+                                <a:srgbClr val="1F1F1F"/>
+                              </a:solidFill>
+                              <a:effectLst/>
+                              <a:latin typeface="Google Sans Text"/>
+                            </a:rPr>
+                            <a:t>(1/33)</a:t>
+                          </a:r>
+                        </a:p>
+                      </a:txBody>
+                      <a:tcPr marR="114300" marT="152400" marB="152400" anchor="ctr">
+                        <a:lnL w="9525" cap="flat" cmpd="sng" algn="ctr">
+                          <a:solidFill>
+                            <a:schemeClr val="bg1"/>
+                          </a:solidFill>
+                          <a:prstDash val="solid"/>
+                          <a:round/>
+                          <a:headEnd type="none" w="med" len="med"/>
+                          <a:tailEnd type="none" w="med" len="med"/>
+                        </a:lnL>
+                        <a:lnR w="9525" cap="flat" cmpd="sng" algn="ctr">
+                          <a:solidFill>
+                            <a:schemeClr val="bg1"/>
+                          </a:solidFill>
+                          <a:prstDash val="solid"/>
+                          <a:round/>
+                          <a:headEnd type="none" w="med" len="med"/>
+                          <a:tailEnd type="none" w="med" len="med"/>
+                        </a:lnR>
+                        <a:lnT w="9525" cap="flat" cmpd="sng" algn="ctr">
+                          <a:solidFill>
+                            <a:schemeClr val="bg1"/>
+                          </a:solidFill>
+                          <a:prstDash val="solid"/>
+                          <a:round/>
+                          <a:headEnd type="none" w="med" len="med"/>
+                          <a:tailEnd type="none" w="med" len="med"/>
+                        </a:lnT>
+                        <a:lnB w="9525" cap="flat" cmpd="sng" algn="ctr">
+                          <a:solidFill>
+                            <a:schemeClr val="bg1"/>
+                          </a:solidFill>
+                          <a:prstDash val="solid"/>
+                          <a:round/>
+                          <a:headEnd type="none" w="med" len="med"/>
+                          <a:tailEnd type="none" w="med" len="med"/>
+                        </a:lnB>
+                        <a:noFill/>
+                      </a:tcPr>
+                    </a:tc>
+                    <a:tc>
+                      <a:txBody>
+                        <a:bodyPr/>
+                        <a:lstStyle/>
+                        <a:p>
+                          <a:pPr algn="r" rtl="0"/>
+                          <a:r>
+                            <a:rPr lang="en-US" altLang="zh-TW" sz="1600" b="1">
+                              <a:solidFill>
+                                <a:srgbClr val="1F1F1F"/>
+                              </a:solidFill>
+                              <a:effectLst/>
+                              <a:latin typeface="Google Sans Text"/>
+                            </a:rPr>
+                            <a:t>1.22 </a:t>
+                          </a:r>
+                          <a:r>
+                            <a:rPr lang="zh-TW" altLang="en-US" sz="1600" b="1">
+                              <a:solidFill>
+                                <a:srgbClr val="1F1F1F"/>
+                              </a:solidFill>
+                              <a:effectLst/>
+                              <a:latin typeface="Google Sans Text"/>
+                            </a:rPr>
+                            <a:t>萬</a:t>
+                          </a:r>
+                          <a:endParaRPr lang="zh-TW" altLang="en-US" sz="1600">
+                            <a:solidFill>
+                              <a:srgbClr val="1F1F1F"/>
+                            </a:solidFill>
+                            <a:effectLst/>
+                            <a:latin typeface="Google Sans Text"/>
+                          </a:endParaRPr>
+                        </a:p>
+                      </a:txBody>
+                      <a:tcPr marT="152400" marB="152400" anchor="ctr">
+                        <a:lnL w="9525" cap="flat" cmpd="sng" algn="ctr">
+                          <a:solidFill>
+                            <a:schemeClr val="bg1"/>
+                          </a:solidFill>
+                          <a:prstDash val="solid"/>
+                          <a:round/>
+                          <a:headEnd type="none" w="med" len="med"/>
+                          <a:tailEnd type="none" w="med" len="med"/>
+                        </a:lnL>
+                        <a:lnR w="9525" cap="flat" cmpd="sng" algn="ctr">
+                          <a:solidFill>
+                            <a:schemeClr val="bg1"/>
+                          </a:solidFill>
+                          <a:prstDash val="solid"/>
+                          <a:round/>
+                          <a:headEnd type="none" w="med" len="med"/>
+                          <a:tailEnd type="none" w="med" len="med"/>
+                        </a:lnR>
+                        <a:lnT w="9525" cap="flat" cmpd="sng" algn="ctr">
+                          <a:solidFill>
+                            <a:schemeClr val="bg1"/>
+                          </a:solidFill>
+                          <a:prstDash val="solid"/>
+                          <a:round/>
+                          <a:headEnd type="none" w="med" len="med"/>
+                          <a:tailEnd type="none" w="med" len="med"/>
+                        </a:lnT>
+                        <a:lnB w="9525" cap="flat" cmpd="sng" algn="ctr">
+                          <a:solidFill>
+                            <a:schemeClr val="bg1"/>
+                          </a:solidFill>
+                          <a:prstDash val="solid"/>
+                          <a:round/>
+                          <a:headEnd type="none" w="med" len="med"/>
+                          <a:tailEnd type="none" w="med" len="med"/>
+                        </a:lnB>
+                        <a:noFill/>
+                      </a:tcPr>
+                    </a:tc>
+                    <a:extLst>
+                      <a:ext uri="{0D108BD9-81ED-4DB2-BD59-A6C34878D82A}">
+                        <a16:rowId xmlns:a16="http://schemas.microsoft.com/office/drawing/2014/main" val="3926020851"/>
+                      </a:ext>
+                    </a:extLst>
+                  </a:tr>
+                  <a:tr h="609600">
+                    <a:tc>
+                      <a:txBody>
+                        <a:bodyPr/>
+                        <a:lstStyle/>
+                        <a:p>
+                          <a:pPr rtl="0"/>
+                          <a:r>
+                            <a:rPr lang="zh-TW" altLang="en-US" sz="2000" b="0" dirty="0">
+                              <a:solidFill>
+                                <a:srgbClr val="1F1F1F"/>
+                              </a:solidFill>
+                              <a:effectLst/>
+                              <a:latin typeface="Google Sans Text"/>
+                            </a:rPr>
+                            <a:t>總計</a:t>
+                          </a:r>
+                        </a:p>
+                      </a:txBody>
+                      <a:tcPr marR="114300" marT="152400" marB="152400" anchor="ctr">
+                        <a:lnL w="9525" cap="flat" cmpd="sng" algn="ctr">
+                          <a:solidFill>
+                            <a:schemeClr val="bg1"/>
+                          </a:solidFill>
+                          <a:prstDash val="solid"/>
+                          <a:round/>
+                          <a:headEnd type="none" w="med" len="med"/>
+                          <a:tailEnd type="none" w="med" len="med"/>
+                        </a:lnL>
+                        <a:lnR w="9525" cap="flat" cmpd="sng" algn="ctr">
+                          <a:solidFill>
+                            <a:schemeClr val="bg1"/>
+                          </a:solidFill>
+                          <a:prstDash val="solid"/>
+                          <a:round/>
+                          <a:headEnd type="none" w="med" len="med"/>
+                          <a:tailEnd type="none" w="med" len="med"/>
+                        </a:lnR>
+                        <a:lnT w="9525" cap="flat" cmpd="sng" algn="ctr">
+                          <a:solidFill>
+                            <a:schemeClr val="bg1"/>
+                          </a:solidFill>
+                          <a:prstDash val="solid"/>
+                          <a:round/>
+                          <a:headEnd type="none" w="med" len="med"/>
+                          <a:tailEnd type="none" w="med" len="med"/>
+                        </a:lnT>
+                        <a:lnB w="9525" cap="flat" cmpd="sng" algn="ctr">
+                          <a:solidFill>
+                            <a:schemeClr val="bg1"/>
+                          </a:solidFill>
+                          <a:prstDash val="solid"/>
+                          <a:round/>
+                          <a:headEnd type="none" w="med" len="med"/>
+                          <a:tailEnd type="none" w="med" len="med"/>
+                        </a:lnB>
+                        <a:noFill/>
+                      </a:tcPr>
+                    </a:tc>
+                    <a:tc>
+                      <a:txBody>
+                        <a:bodyPr/>
+                        <a:lstStyle/>
+                        <a:p>
+                          <a:pPr algn="r" rtl="0"/>
+                          <a:endParaRPr lang="zh-TW" altLang="en-US" sz="1600" dirty="0">
+                            <a:solidFill>
+                              <a:srgbClr val="1F1F1F"/>
+                            </a:solidFill>
+                            <a:effectLst/>
+                            <a:latin typeface="Google Sans Text"/>
+                          </a:endParaRPr>
+                        </a:p>
+                      </a:txBody>
+                      <a:tcPr marR="114300" marT="152400" marB="152400" anchor="ctr">
+                        <a:lnL w="9525" cap="flat" cmpd="sng" algn="ctr">
+                          <a:solidFill>
+                            <a:schemeClr val="bg1"/>
+                          </a:solidFill>
+                          <a:prstDash val="solid"/>
+                          <a:round/>
+                          <a:headEnd type="none" w="med" len="med"/>
+                          <a:tailEnd type="none" w="med" len="med"/>
+                        </a:lnL>
+                        <a:lnR w="9525" cap="flat" cmpd="sng" algn="ctr">
+                          <a:solidFill>
+                            <a:schemeClr val="bg1"/>
+                          </a:solidFill>
+                          <a:prstDash val="solid"/>
+                          <a:round/>
+                          <a:headEnd type="none" w="med" len="med"/>
+                          <a:tailEnd type="none" w="med" len="med"/>
+                        </a:lnR>
+                        <a:lnT w="9525" cap="flat" cmpd="sng" algn="ctr">
+                          <a:solidFill>
+                            <a:schemeClr val="bg1"/>
+                          </a:solidFill>
+                          <a:prstDash val="solid"/>
+                          <a:round/>
+                          <a:headEnd type="none" w="med" len="med"/>
+                          <a:tailEnd type="none" w="med" len="med"/>
+                        </a:lnT>
+                        <a:lnB w="9525" cap="flat" cmpd="sng" algn="ctr">
+                          <a:solidFill>
+                            <a:schemeClr val="bg1"/>
+                          </a:solidFill>
+                          <a:prstDash val="solid"/>
+                          <a:round/>
+                          <a:headEnd type="none" w="med" len="med"/>
+                          <a:tailEnd type="none" w="med" len="med"/>
+                        </a:lnB>
+                        <a:noFill/>
+                      </a:tcPr>
+                    </a:tc>
+                    <a:tc>
+                      <a:txBody>
+                        <a:bodyPr/>
+                        <a:lstStyle/>
+                        <a:p>
+                          <a:pPr algn="r" rtl="0"/>
+                          <a:r>
+                            <a:rPr lang="en-US" altLang="zh-TW" sz="1600" b="1" dirty="0">
+                              <a:solidFill>
+                                <a:srgbClr val="1F1F1F"/>
+                              </a:solidFill>
+                              <a:effectLst/>
+                              <a:latin typeface="Google Sans Text"/>
+                            </a:rPr>
+                            <a:t>1.0000</a:t>
+                          </a:r>
+                          <a:endParaRPr lang="zh-TW" altLang="en-US" sz="1600" dirty="0">
+                            <a:solidFill>
+                              <a:srgbClr val="1F1F1F"/>
+                            </a:solidFill>
+                            <a:effectLst/>
+                            <a:latin typeface="Google Sans Text"/>
+                          </a:endParaRPr>
+                        </a:p>
+                      </a:txBody>
+                      <a:tcPr marR="114300" marT="152400" marB="152400" anchor="ctr">
+                        <a:lnL w="9525" cap="flat" cmpd="sng" algn="ctr">
+                          <a:solidFill>
+                            <a:schemeClr val="bg1"/>
+                          </a:solidFill>
+                          <a:prstDash val="solid"/>
+                          <a:round/>
+                          <a:headEnd type="none" w="med" len="med"/>
+                          <a:tailEnd type="none" w="med" len="med"/>
+                        </a:lnL>
+                        <a:lnR w="9525" cap="flat" cmpd="sng" algn="ctr">
+                          <a:solidFill>
+                            <a:schemeClr val="bg1"/>
+                          </a:solidFill>
+                          <a:prstDash val="solid"/>
+                          <a:round/>
+                          <a:headEnd type="none" w="med" len="med"/>
+                          <a:tailEnd type="none" w="med" len="med"/>
+                        </a:lnR>
+                        <a:lnT w="9525" cap="flat" cmpd="sng" algn="ctr">
+                          <a:solidFill>
+                            <a:schemeClr val="bg1"/>
+                          </a:solidFill>
+                          <a:prstDash val="solid"/>
+                          <a:round/>
+                          <a:headEnd type="none" w="med" len="med"/>
+                          <a:tailEnd type="none" w="med" len="med"/>
+                        </a:lnT>
+                        <a:lnB w="9525" cap="flat" cmpd="sng" algn="ctr">
+                          <a:solidFill>
+                            <a:schemeClr val="bg1"/>
+                          </a:solidFill>
+                          <a:prstDash val="solid"/>
+                          <a:round/>
+                          <a:headEnd type="none" w="med" len="med"/>
+                          <a:tailEnd type="none" w="med" len="med"/>
+                        </a:lnB>
+                        <a:noFill/>
+                      </a:tcPr>
+                    </a:tc>
+                    <a:tc>
+                      <a:txBody>
+                        <a:bodyPr/>
+                        <a:lstStyle/>
+                        <a:p>
+                          <a:pPr algn="r" rtl="0"/>
+                          <a:r>
+                            <a:rPr lang="en-US" altLang="zh-TW" sz="1600" b="1" dirty="0">
+                              <a:solidFill>
+                                <a:srgbClr val="1F1F1F"/>
+                              </a:solidFill>
+                              <a:effectLst/>
+                              <a:latin typeface="Google Sans Text"/>
+                            </a:rPr>
+                            <a:t>839.43 </a:t>
+                          </a:r>
+                          <a:r>
+                            <a:rPr lang="zh-TW" altLang="en-US" sz="1600" b="1" dirty="0">
+                              <a:solidFill>
+                                <a:srgbClr val="1F1F1F"/>
+                              </a:solidFill>
+                              <a:effectLst/>
+                              <a:latin typeface="Google Sans Text"/>
+                            </a:rPr>
+                            <a:t>萬</a:t>
+                          </a:r>
+                          <a:endParaRPr lang="zh-TW" altLang="en-US" sz="1600" dirty="0">
+                            <a:solidFill>
+                              <a:srgbClr val="1F1F1F"/>
+                            </a:solidFill>
+                            <a:effectLst/>
+                            <a:latin typeface="Google Sans Text"/>
+                          </a:endParaRPr>
+                        </a:p>
+                      </a:txBody>
+                      <a:tcPr marT="152400" marB="152400" anchor="ctr">
+                        <a:lnL w="9525" cap="flat" cmpd="sng" algn="ctr">
+                          <a:solidFill>
+                            <a:schemeClr val="bg1"/>
+                          </a:solidFill>
+                          <a:prstDash val="solid"/>
+                          <a:round/>
+                          <a:headEnd type="none" w="med" len="med"/>
+                          <a:tailEnd type="none" w="med" len="med"/>
+                        </a:lnL>
+                        <a:lnR w="9525" cap="flat" cmpd="sng" algn="ctr">
+                          <a:solidFill>
+                            <a:schemeClr val="bg1"/>
+                          </a:solidFill>
+                          <a:prstDash val="solid"/>
+                          <a:round/>
+                          <a:headEnd type="none" w="med" len="med"/>
+                          <a:tailEnd type="none" w="med" len="med"/>
+                        </a:lnR>
+                        <a:lnT w="9525" cap="flat" cmpd="sng" algn="ctr">
+                          <a:solidFill>
+                            <a:schemeClr val="bg1"/>
+                          </a:solidFill>
+                          <a:prstDash val="solid"/>
+                          <a:round/>
+                          <a:headEnd type="none" w="med" len="med"/>
+                          <a:tailEnd type="none" w="med" len="med"/>
+                        </a:lnT>
+                        <a:lnB w="9525" cap="flat" cmpd="sng" algn="ctr">
+                          <a:solidFill>
+                            <a:schemeClr val="bg1"/>
+                          </a:solidFill>
+                          <a:prstDash val="solid"/>
+                          <a:round/>
+                          <a:headEnd type="none" w="med" len="med"/>
+                          <a:tailEnd type="none" w="med" len="med"/>
+                        </a:lnB>
+                        <a:noFill/>
+                      </a:tcPr>
+                    </a:tc>
+                    <a:extLst>
+                      <a:ext uri="{0D108BD9-81ED-4DB2-BD59-A6C34878D82A}">
+                        <a16:rowId xmlns:a16="http://schemas.microsoft.com/office/drawing/2014/main" val="124635869"/>
+                      </a:ext>
+                    </a:extLst>
+                  </a:tr>
+                </a:tbl>
+              </a:graphicData>
+            </a:graphic>
+          </p:graphicFrame>
+        </mc:Fallback>
+      </mc:AlternateContent>
     </p:spTree>
     <p:extLst>
       <p:ext uri="{BB962C8B-B14F-4D97-AF65-F5344CB8AC3E}">
@@ -8037,13 +10002,7 @@
                       <a:rPr lang="en-US" sz="2000" b="0" i="1" smtClean="0">
                         <a:latin typeface="Cambria Math" panose="02040503050406030204" pitchFamily="18" charset="0"/>
                       </a:rPr>
-                      <m:t>，就是富人的權</m:t>
-                    </m:r>
-                    <m:r>
-                      <a:rPr lang="en-US" sz="2000" i="1" smtClean="0">
-                        <a:latin typeface="Cambria Math" panose="02040503050406030204" pitchFamily="18" charset="0"/>
-                      </a:rPr>
-                      <m:t>重。</m:t>
+                      <m:t>，就是富人的權重。</m:t>
                     </m:r>
                   </m:oMath>
                 </a14:m>
@@ -8401,13 +10360,7 @@
                       <a:rPr lang="en-US" altLang="zh-TW" sz="2000" b="0" i="1" smtClean="0">
                         <a:latin typeface="Cambria Math" panose="02040503050406030204" pitchFamily="18" charset="0"/>
                       </a:rPr>
-                      <m:t>(</m:t>
-                    </m:r>
-                    <m:r>
-                      <a:rPr lang="zh-TW" altLang="en-US" sz="2000" b="0" i="1" smtClean="0">
-                        <a:latin typeface="Cambria Math" panose="02040503050406030204" pitchFamily="18" charset="0"/>
-                      </a:rPr>
-                      <m:t> </m:t>
+                      <m:t>( </m:t>
                     </m:r>
                     <m:acc>
                       <m:accPr>
@@ -18650,7 +20603,7 @@
               </a:lnSpc>
             </a:pPr>
             <a:r>
-              <a:rPr lang="ja-JP" altLang="en-US" sz="2000"/>
+              <a:rPr lang="ja-JP" altLang="en-US" sz="2000" dirty="0"/>
               <a:t>自我加權 </a:t>
             </a:r>
             <a:r>
@@ -18658,15 +20611,15 @@
               <a:t>(Self-weighting)</a:t>
             </a:r>
             <a:r>
-              <a:rPr lang="ja-JP" altLang="en-US" sz="2000"/>
-              <a:t>：因為每一層的抽樣機率 都一樣（例如都是 </a:t>
+              <a:rPr lang="ja-JP" altLang="en-US" sz="2000" dirty="0"/>
+              <a:t>：因為每一層的抽樣機率都一樣（例如都是 </a:t>
             </a:r>
             <a:r>
               <a:rPr lang="en-US" altLang="ja-JP" sz="2000" dirty="0"/>
               <a:t>1%</a:t>
             </a:r>
             <a:r>
-              <a:rPr lang="ja-JP" altLang="en-US" sz="2000"/>
+              <a:rPr lang="ja-JP" altLang="en-US" sz="2000" dirty="0"/>
               <a:t>），所以每個樣本的權重也都一樣 。</a:t>
             </a:r>
             <a:endParaRPr lang="en-US" altLang="ja-JP" sz="2000" dirty="0"/>
@@ -18678,7 +20631,7 @@
               </a:lnSpc>
             </a:pPr>
             <a:r>
-              <a:rPr lang="ja-JP" altLang="en-US" sz="2000"/>
+              <a:rPr lang="ja-JP" altLang="en-US" sz="2000" dirty="0"/>
               <a:t>如果母體中某些族群比例極低（例如：</a:t>
             </a:r>
             <a:r>
@@ -18686,7 +20639,7 @@
               <a:t>80 </a:t>
             </a:r>
             <a:r>
-              <a:rPr lang="ja-JP" altLang="en-US" sz="2000"/>
+              <a:rPr lang="ja-JP" altLang="en-US" sz="2000" dirty="0"/>
               <a:t>歲以上長者僅佔 </a:t>
             </a:r>
             <a:r>
@@ -18694,7 +20647,7 @@
               <a:t>2%</a:t>
             </a:r>
             <a:r>
-              <a:rPr lang="ja-JP" altLang="en-US" sz="2000"/>
+              <a:rPr lang="ja-JP" altLang="en-US" sz="2000" dirty="0"/>
               <a:t>），在總樣本 </a:t>
             </a:r>
             <a:r>
@@ -18702,7 +20655,7 @@
               <a:t>1000 </a:t>
             </a:r>
             <a:r>
-              <a:rPr lang="ja-JP" altLang="en-US" sz="2000"/>
+              <a:rPr lang="ja-JP" altLang="en-US" sz="2000" dirty="0"/>
               <a:t>人的情況下，該族群只會分配到 </a:t>
             </a:r>
             <a:r>
@@ -18710,7 +20663,7 @@
               <a:t>20 </a:t>
             </a:r>
             <a:r>
-              <a:rPr lang="ja-JP" altLang="en-US" sz="2000"/>
+              <a:rPr lang="ja-JP" altLang="en-US" sz="2000" dirty="0"/>
               <a:t>人 ，訪問這些少數人，有可能出現誤差。</a:t>
             </a:r>
             <a:endParaRPr lang="en-US" altLang="ja-JP" sz="2000" dirty="0"/>
@@ -18722,7 +20675,7 @@
               </a:lnSpc>
             </a:pPr>
             <a:r>
-              <a:rPr lang="ja-JP" altLang="en-US" sz="2000"/>
+              <a:rPr lang="ja-JP" altLang="en-US" sz="2000" dirty="0"/>
               <a:t>等比例分配假設每個人被抽中的機率是均等的，但現實中不同族群「被找到」與「願意回答」的機率可能差異很大。</a:t>
             </a:r>
             <a:endParaRPr lang="en-US" altLang="ja-JP" sz="2000" dirty="0"/>
@@ -18746,7 +20699,7 @@
               </a:lnSpc>
             </a:pPr>
             <a:r>
-              <a:rPr lang="ja-JP" altLang="en-US" sz="2000"/>
+              <a:rPr lang="ja-JP" altLang="en-US" sz="2000" dirty="0"/>
               <a:t>因此，即使一開始設計是等比例抽樣，最終得到的有效樣本結構依然會與母體嚴重脫節。</a:t>
             </a:r>
             <a:endParaRPr lang="en-US" altLang="ja-JP" sz="2000" dirty="0"/>

--- a/投影片/民意與調查Week5.pptx
+++ b/投影片/民意與調查Week5.pptx
@@ -224,7 +224,7 @@
           <a:p>
             <a:fld id="{308549C9-F1F2-A344-9318-AC3AB4654B7E}" type="datetimeFigureOut">
               <a:rPr lang="en-US" smtClean="0"/>
-              <a:t>4/1/26</a:t>
+              <a:t>4/8/26</a:t>
             </a:fld>
             <a:endParaRPr lang="en-US"/>
           </a:p>
@@ -638,7 +638,7 @@
           <a:p>
             <a:fld id="{0ECB731F-7F54-EF4E-BC14-D4454C95FF4D}" type="datetime1">
               <a:rPr lang="en-US" smtClean="0"/>
-              <a:t>4/1/26</a:t>
+              <a:t>4/8/26</a:t>
             </a:fld>
             <a:endParaRPr lang="en-US"/>
           </a:p>
@@ -836,7 +836,7 @@
           <a:p>
             <a:fld id="{5FC0AAEB-F940-CA44-B742-2110711973A7}" type="datetime1">
               <a:rPr lang="en-US" smtClean="0"/>
-              <a:t>4/1/26</a:t>
+              <a:t>4/8/26</a:t>
             </a:fld>
             <a:endParaRPr lang="en-US"/>
           </a:p>
@@ -1044,7 +1044,7 @@
           <a:p>
             <a:fld id="{0C0FC7EA-A73C-4146-9B14-54C11597AA40}" type="datetime1">
               <a:rPr lang="en-US" smtClean="0"/>
-              <a:t>4/1/26</a:t>
+              <a:t>4/8/26</a:t>
             </a:fld>
             <a:endParaRPr lang="en-US"/>
           </a:p>
@@ -1242,7 +1242,7 @@
           <a:p>
             <a:fld id="{24943121-CDD1-174D-9095-06B3974B3CC1}" type="datetime1">
               <a:rPr lang="en-US" smtClean="0"/>
-              <a:t>4/1/26</a:t>
+              <a:t>4/8/26</a:t>
             </a:fld>
             <a:endParaRPr lang="en-US"/>
           </a:p>
@@ -1517,7 +1517,7 @@
           <a:p>
             <a:fld id="{21F2BAF9-EAD3-1641-87AF-ADC71D8222CD}" type="datetime1">
               <a:rPr lang="en-US" smtClean="0"/>
-              <a:t>4/1/26</a:t>
+              <a:t>4/8/26</a:t>
             </a:fld>
             <a:endParaRPr lang="en-US"/>
           </a:p>
@@ -1782,7 +1782,7 @@
           <a:p>
             <a:fld id="{F8F7A49D-4C23-6A49-AF9D-C0E1C1130921}" type="datetime1">
               <a:rPr lang="en-US" smtClean="0"/>
-              <a:t>4/1/26</a:t>
+              <a:t>4/8/26</a:t>
             </a:fld>
             <a:endParaRPr lang="en-US"/>
           </a:p>
@@ -2194,7 +2194,7 @@
           <a:p>
             <a:fld id="{9F516F59-8951-4749-B49C-6C88C0B4B6BD}" type="datetime1">
               <a:rPr lang="en-US" smtClean="0"/>
-              <a:t>4/1/26</a:t>
+              <a:t>4/8/26</a:t>
             </a:fld>
             <a:endParaRPr lang="en-US"/>
           </a:p>
@@ -2335,7 +2335,7 @@
           <a:p>
             <a:fld id="{CA82BBDF-C485-174D-8051-FF3ED3DF33C6}" type="datetime1">
               <a:rPr lang="en-US" smtClean="0"/>
-              <a:t>4/1/26</a:t>
+              <a:t>4/8/26</a:t>
             </a:fld>
             <a:endParaRPr lang="en-US"/>
           </a:p>
@@ -2448,7 +2448,7 @@
           <a:p>
             <a:fld id="{3CA316C8-35EA-C448-A7DB-295F753FB635}" type="datetime1">
               <a:rPr lang="en-US" smtClean="0"/>
-              <a:t>4/1/26</a:t>
+              <a:t>4/8/26</a:t>
             </a:fld>
             <a:endParaRPr lang="en-US"/>
           </a:p>
@@ -2759,7 +2759,7 @@
           <a:p>
             <a:fld id="{3EBA6818-685C-B142-BE10-A6D54A85D7FF}" type="datetime1">
               <a:rPr lang="en-US" smtClean="0"/>
-              <a:t>4/1/26</a:t>
+              <a:t>4/8/26</a:t>
             </a:fld>
             <a:endParaRPr lang="en-US"/>
           </a:p>
@@ -3047,7 +3047,7 @@
           <a:p>
             <a:fld id="{D444D57B-5B66-2F49-AB7C-362DD22B45D8}" type="datetime1">
               <a:rPr lang="en-US" smtClean="0"/>
-              <a:t>4/1/26</a:t>
+              <a:t>4/8/26</a:t>
             </a:fld>
             <a:endParaRPr lang="en-US"/>
           </a:p>
@@ -3288,7 +3288,7 @@
           <a:p>
             <a:fld id="{4025DC53-D744-A54C-8957-51F9F93FF803}" type="datetime1">
               <a:rPr lang="en-US" smtClean="0"/>
-              <a:t>4/1/26</a:t>
+              <a:t>4/8/26</a:t>
             </a:fld>
             <a:endParaRPr lang="en-US"/>
           </a:p>
@@ -3834,8 +3834,8 @@
           </a:p>
         </p:txBody>
       </p:sp>
-      <mc:AlternateContent xmlns:mc="http://schemas.openxmlformats.org/markup-compatibility/2006">
-        <mc:Choice xmlns:a14="http://schemas.microsoft.com/office/drawing/2010/main" Requires="a14">
+      <mc:AlternateContent xmlns:mc="http://schemas.openxmlformats.org/markup-compatibility/2006" xmlns:a14="http://schemas.microsoft.com/office/drawing/2010/main">
+        <mc:Choice Requires="a14">
           <p:sp>
             <p:nvSpPr>
               <p:cNvPr id="3" name="Content Placeholder 2">
@@ -4188,13 +4188,7 @@
                       <a:rPr lang="zh-TW" altLang="en-US" sz="2000" i="1">
                         <a:latin typeface="Cambria Math" panose="02040503050406030204" pitchFamily="18" charset="0"/>
                       </a:rPr>
-                      <m:t>萬</m:t>
-                    </m:r>
-                    <m:r>
-                      <a:rPr lang="zh-TW" altLang="en-US" sz="2000" i="1">
-                        <a:latin typeface="Cambria Math" panose="02040503050406030204" pitchFamily="18" charset="0"/>
-                      </a:rPr>
-                      <m:t>，平均是</m:t>
+                      <m:t>萬，平均是</m:t>
                     </m:r>
                     <m:r>
                       <a:rPr lang="en-US" altLang="zh-TW" sz="2000" b="0" i="1" smtClean="0">
@@ -4279,13 +4273,7 @@
                       <a:rPr lang="zh-TW" altLang="en-US" sz="2000" i="1">
                         <a:latin typeface="Cambria Math" panose="02040503050406030204" pitchFamily="18" charset="0"/>
                       </a:rPr>
-                      <m:t>萬</m:t>
-                    </m:r>
-                    <m:r>
-                      <a:rPr lang="zh-TW" altLang="en-US" sz="2000" i="1">
-                        <a:latin typeface="Cambria Math" panose="02040503050406030204" pitchFamily="18" charset="0"/>
-                      </a:rPr>
-                      <m:t>，平均是</m:t>
+                      <m:t>萬，平均是</m:t>
                     </m:r>
                     <m:r>
                       <a:rPr lang="en-US" altLang="zh-TW" sz="2000" b="0" i="1" smtClean="0">
@@ -4297,13 +4285,7 @@
                       <a:rPr lang="zh-TW" altLang="en-US" sz="2000" i="1">
                         <a:latin typeface="Cambria Math" panose="02040503050406030204" pitchFamily="18" charset="0"/>
                       </a:rPr>
-                      <m:t>萬</m:t>
-                    </m:r>
-                    <m:r>
-                      <a:rPr lang="zh-TW" altLang="en-US" sz="2000" i="1">
-                        <a:latin typeface="Cambria Math" panose="02040503050406030204" pitchFamily="18" charset="0"/>
-                      </a:rPr>
-                      <m:t>。</m:t>
+                      <m:t>萬。</m:t>
                     </m:r>
                   </m:oMath>
                 </a14:m>
@@ -4728,7 +4710,7 @@
             </p:txBody>
           </p:sp>
         </mc:Choice>
-        <mc:Fallback>
+        <mc:Fallback xmlns="">
           <p:sp>
             <p:nvSpPr>
               <p:cNvPr id="3" name="Content Placeholder 2">
@@ -4856,8 +4838,8 @@
           </a:p>
         </p:txBody>
       </p:sp>
-      <mc:AlternateContent xmlns:mc="http://schemas.openxmlformats.org/markup-compatibility/2006">
-        <mc:Choice xmlns:a14="http://schemas.microsoft.com/office/drawing/2010/main" Requires="a14">
+      <mc:AlternateContent xmlns:mc="http://schemas.openxmlformats.org/markup-compatibility/2006" xmlns:a14="http://schemas.microsoft.com/office/drawing/2010/main">
+        <mc:Choice Requires="a14">
           <p:sp>
             <p:nvSpPr>
               <p:cNvPr id="3" name="內容版面配置區 2">
@@ -5690,7 +5672,7 @@
             </p:txBody>
           </p:sp>
         </mc:Choice>
-        <mc:Fallback>
+        <mc:Fallback xmlns="">
           <p:sp>
             <p:nvSpPr>
               <p:cNvPr id="3" name="內容版面配置區 2">
@@ -5872,8 +5854,8 @@
           </a:p>
         </p:txBody>
       </p:sp>
-      <mc:AlternateContent xmlns:mc="http://schemas.openxmlformats.org/markup-compatibility/2006">
-        <mc:Choice xmlns:a14="http://schemas.microsoft.com/office/drawing/2010/main" Requires="a14">
+      <mc:AlternateContent xmlns:mc="http://schemas.openxmlformats.org/markup-compatibility/2006" xmlns:a14="http://schemas.microsoft.com/office/drawing/2010/main">
+        <mc:Choice Requires="a14">
           <p:graphicFrame>
             <p:nvGraphicFramePr>
               <p:cNvPr id="3" name="表格 2">
@@ -7713,7 +7695,7 @@
             </a:graphic>
           </p:graphicFrame>
         </mc:Choice>
-        <mc:Fallback>
+        <mc:Fallback xmlns="">
           <p:graphicFrame>
             <p:nvGraphicFramePr>
               <p:cNvPr id="3" name="表格 2">
@@ -17023,8 +17005,8 @@
           </a:p>
         </p:txBody>
       </p:sp>
-      <mc:AlternateContent xmlns:mc="http://schemas.openxmlformats.org/markup-compatibility/2006" xmlns:a14="http://schemas.microsoft.com/office/drawing/2010/main">
-        <mc:Choice Requires="a14">
+      <mc:AlternateContent xmlns:mc="http://schemas.openxmlformats.org/markup-compatibility/2006">
+        <mc:Choice xmlns:a14="http://schemas.microsoft.com/office/drawing/2010/main" Requires="a14">
           <p:sp>
             <p:nvSpPr>
               <p:cNvPr id="3" name="Content Placeholder 2">
@@ -17797,7 +17779,7 @@
                   <a:rPr lang="ja-JP" altLang="en-US" sz="2000">
                     <a:latin typeface="Google Sans Text"/>
                   </a:rPr>
-                  <a:t>每一層樣本的平均數的變異程度：</a:t>
+                  <a:t>每一層樣本平均數的變異程度：</a:t>
                 </a:r>
                 <a14:m>
                   <m:oMath xmlns:m="http://schemas.openxmlformats.org/officeDocument/2006/math">
@@ -18019,7 +18001,7 @@
                                   <a:rPr lang="en-US" altLang="ja-JP" sz="2000" b="0" i="1" smtClean="0">
                                     <a:latin typeface="Cambria Math" panose="02040503050406030204" pitchFamily="18" charset="0"/>
                                   </a:rPr>
-                                  <m:t>𝑁</m:t>
+                                  <m:t>𝑛</m:t>
                                 </m:r>
                               </m:e>
                               <m:sub>
@@ -18154,7 +18136,7 @@
             </p:txBody>
           </p:sp>
         </mc:Choice>
-        <mc:Fallback xmlns="">
+        <mc:Fallback>
           <p:sp>
             <p:nvSpPr>
               <p:cNvPr id="3" name="Content Placeholder 2">
@@ -18184,7 +18166,7 @@
               <a:lstStyle/>
               <a:p>
                 <a:r>
-                  <a:rPr lang="en-US">
+                  <a:rPr lang="zh-TW" altLang="en-US">
                     <a:noFill/>
                   </a:rPr>
                   <a:t> </a:t>
@@ -19220,9 +19202,16 @@
         </p:nvSpPr>
         <p:spPr/>
         <p:txBody>
-          <a:bodyPr/>
+          <a:bodyPr>
+            <a:normAutofit fontScale="85000" lnSpcReduction="10000"/>
+          </a:bodyPr>
           <a:lstStyle/>
           <a:p>
+            <a:pPr>
+              <a:lnSpc>
+                <a:spcPct val="150000"/>
+              </a:lnSpc>
+            </a:pPr>
             <a:r>
               <a:rPr lang="en-US" sz="2000" dirty="0" err="1"/>
               <a:t>樣本數越大，樣本估計</a:t>
@@ -19241,6 +19230,11 @@
             </a:r>
           </a:p>
           <a:p>
+            <a:pPr>
+              <a:lnSpc>
+                <a:spcPct val="150000"/>
+              </a:lnSpc>
+            </a:pPr>
             <a:r>
               <a:rPr lang="en-US" sz="2000" dirty="0" err="1"/>
               <a:t>等比例抽樣只考慮每一層佔全部人數的比例</a:t>
@@ -19251,6 +19245,11 @@
             </a:r>
           </a:p>
           <a:p>
+            <a:pPr>
+              <a:lnSpc>
+                <a:spcPct val="150000"/>
+              </a:lnSpc>
+            </a:pPr>
             <a:r>
               <a:rPr lang="ja-JP" altLang="en-US" sz="2000"/>
               <a:t>因為每一層的特性不同。最適分配在分配樣本時考慮：</a:t>
@@ -19258,6 +19257,13 @@
             <a:endParaRPr lang="en-US" altLang="ja-JP" sz="2000" dirty="0"/>
           </a:p>
           <a:p>
+            <a:pPr marL="457200" indent="-457200">
+              <a:lnSpc>
+                <a:spcPct val="150000"/>
+              </a:lnSpc>
+              <a:buFont typeface="+mj-lt"/>
+              <a:buAutoNum type="arabicParenR"/>
+            </a:pPr>
             <a:r>
               <a:rPr lang="ja-JP" altLang="en-US" sz="2000"/>
               <a:t>層的大小</a:t>
@@ -19273,6 +19279,13 @@
             <a:endParaRPr lang="en-US" altLang="ja-JP" sz="2000" dirty="0"/>
           </a:p>
           <a:p>
+            <a:pPr marL="457200" indent="-457200">
+              <a:lnSpc>
+                <a:spcPct val="150000"/>
+              </a:lnSpc>
+              <a:buFont typeface="+mj-lt"/>
+              <a:buAutoNum type="arabicParenR"/>
+            </a:pPr>
             <a:r>
               <a:rPr lang="ja-JP" altLang="en-US" sz="2000"/>
               <a:t>層內的變異程度</a:t>
@@ -19283,19 +19296,16 @@
             </a:r>
             <a:r>
               <a:rPr lang="ja-JP" altLang="en-US" sz="2000"/>
-              <a:t>如果這一層內部的意見非常分歧（標準差大），我們需要更多樣本才能</a:t>
-            </a:r>
-            <a:r>
-              <a:rPr lang="en-US" altLang="ja-JP" sz="2000" dirty="0"/>
-              <a:t>r</a:t>
-            </a:r>
-            <a:r>
-              <a:rPr lang="ja-JP" altLang="en-US" sz="2000"/>
-              <a:t>減少誤差。</a:t>
+              <a:t>如果這一層內部的意見非常分歧（標準差大），我們需要更多樣本才能減少誤差。</a:t>
             </a:r>
             <a:endParaRPr lang="en-US" altLang="ja-JP" sz="2000" dirty="0"/>
           </a:p>
           <a:p>
+            <a:pPr>
+              <a:lnSpc>
+                <a:spcPct val="150000"/>
+              </a:lnSpc>
+            </a:pPr>
             <a:r>
               <a:rPr lang="ja-JP" altLang="en-US" sz="2000"/>
               <a:t>抽樣的成本</a:t>
@@ -19311,6 +19321,11 @@
             <a:endParaRPr lang="en-US" altLang="ja-JP" sz="2000" dirty="0"/>
           </a:p>
           <a:p>
+            <a:pPr>
+              <a:lnSpc>
+                <a:spcPct val="150000"/>
+              </a:lnSpc>
+            </a:pPr>
             <a:r>
               <a:rPr lang="ja-JP" altLang="en-US" sz="2000"/>
               <a:t>分層抽樣：層內差異性越小越好</a:t>
@@ -19318,6 +19333,11 @@
             <a:endParaRPr lang="en-US" altLang="ja-JP" sz="2000" dirty="0"/>
           </a:p>
           <a:p>
+            <a:pPr>
+              <a:lnSpc>
+                <a:spcPct val="150000"/>
+              </a:lnSpc>
+            </a:pPr>
             <a:r>
               <a:rPr lang="ja-JP" altLang="en-US" sz="2000"/>
               <a:t>集群抽樣：層內差異越大越好</a:t>
